--- a/slides/wanthat-presentation.pptx
+++ b/slides/wanthat-presentation.pptx
@@ -5767,20 +5767,40 @@
           </a:fontRef>
         </p:style>
         <p:txBody>
-          <a:bodyPr rtlCol="0" anchor="ctr" wrap="square" lIns="9144" rIns="9144" tIns="9144" bIns="9144"/>
+          <a:bodyPr rtlCol="0" anchor="ctr" wrap="square" lIns="146304" rIns="146304" tIns="109728" bIns="109728"/>
           <a:lstStyle/>
           <a:p>
             <a:pPr algn="ctr"/>
-            <a:r>
-              <a:rPr sz="1700"/>
-              <a:t>💬</a:t>
-            </a:r>
-          </a:p>
-        </p:txBody>
-      </p:sp>
-      <p:sp>
-        <p:nvSpPr>
-          <p:cNvPr id="8" name="TextBox 7"/>
+          </a:p>
+        </p:txBody>
+      </p:sp>
+      <p:pic>
+        <p:nvPicPr>
+          <p:cNvPr id="8" name="Picture 7" descr="chat.png"/>
+          <p:cNvPicPr>
+            <a:picLocks noChangeAspect="1"/>
+          </p:cNvPicPr>
+          <p:nvPr/>
+        </p:nvPicPr>
+        <p:blipFill>
+          <a:blip r:embed="rId2"/>
+          <a:stretch>
+            <a:fillRect/>
+          </a:stretch>
+        </p:blipFill>
+        <p:spPr>
+          <a:xfrm>
+            <a:off x="935248" y="3404128"/>
+            <a:ext cx="342351" cy="342351"/>
+          </a:xfrm>
+          <a:prstGeom prst="rect">
+            <a:avLst/>
+          </a:prstGeom>
+        </p:spPr>
+      </p:pic>
+      <p:sp>
+        <p:nvSpPr>
+          <p:cNvPr id="9" name="TextBox 8"/>
           <p:cNvSpPr txBox="1"/>
           <p:nvPr/>
         </p:nvSpPr>
@@ -5814,7 +5834,7 @@
       </p:sp>
       <p:sp>
         <p:nvSpPr>
-          <p:cNvPr id="9" name="TextBox 8"/>
+          <p:cNvPr id="10" name="TextBox 9"/>
           <p:cNvSpPr txBox="1"/>
           <p:nvPr/>
         </p:nvSpPr>
@@ -5853,7 +5873,7 @@
       </p:sp>
       <p:sp>
         <p:nvSpPr>
-          <p:cNvPr id="10" name="Rounded Rectangle 9"/>
+          <p:cNvPr id="11" name="Rounded Rectangle 10"/>
           <p:cNvSpPr/>
           <p:nvPr/>
         </p:nvSpPr>
@@ -5901,7 +5921,7 @@
       </p:sp>
       <p:sp>
         <p:nvSpPr>
-          <p:cNvPr id="11" name="Rounded Rectangle 10"/>
+          <p:cNvPr id="12" name="Rounded Rectangle 11"/>
           <p:cNvSpPr/>
           <p:nvPr/>
         </p:nvSpPr>
@@ -5940,20 +5960,40 @@
           </a:fontRef>
         </p:style>
         <p:txBody>
-          <a:bodyPr rtlCol="0" anchor="ctr" wrap="square" lIns="9144" rIns="9144" tIns="9144" bIns="9144"/>
+          <a:bodyPr rtlCol="0" anchor="ctr" wrap="square" lIns="146304" rIns="146304" tIns="109728" bIns="109728"/>
           <a:lstStyle/>
           <a:p>
             <a:pPr algn="ctr"/>
-            <a:r>
-              <a:rPr sz="1700"/>
-              <a:t>🍪</a:t>
-            </a:r>
-          </a:p>
-        </p:txBody>
-      </p:sp>
-      <p:sp>
-        <p:nvSpPr>
-          <p:cNvPr id="12" name="TextBox 11"/>
+          </a:p>
+        </p:txBody>
+      </p:sp>
+      <p:pic>
+        <p:nvPicPr>
+          <p:cNvPr id="13" name="Picture 12" descr="cookie.png"/>
+          <p:cNvPicPr>
+            <a:picLocks noChangeAspect="1"/>
+          </p:cNvPicPr>
+          <p:nvPr/>
+        </p:nvPicPr>
+        <p:blipFill>
+          <a:blip r:embed="rId3"/>
+          <a:stretch>
+            <a:fillRect/>
+          </a:stretch>
+        </p:blipFill>
+        <p:spPr>
+          <a:xfrm>
+            <a:off x="4730008" y="3404128"/>
+            <a:ext cx="342351" cy="342351"/>
+          </a:xfrm>
+          <a:prstGeom prst="rect">
+            <a:avLst/>
+          </a:prstGeom>
+        </p:spPr>
+      </p:pic>
+      <p:sp>
+        <p:nvSpPr>
+          <p:cNvPr id="14" name="TextBox 13"/>
           <p:cNvSpPr txBox="1"/>
           <p:nvPr/>
         </p:nvSpPr>
@@ -5987,7 +6027,7 @@
       </p:sp>
       <p:sp>
         <p:nvSpPr>
-          <p:cNvPr id="13" name="TextBox 12"/>
+          <p:cNvPr id="15" name="TextBox 14"/>
           <p:cNvSpPr txBox="1"/>
           <p:nvPr/>
         </p:nvSpPr>
@@ -6026,7 +6066,7 @@
       </p:sp>
       <p:sp>
         <p:nvSpPr>
-          <p:cNvPr id="14" name="Rounded Rectangle 13"/>
+          <p:cNvPr id="16" name="Rounded Rectangle 15"/>
           <p:cNvSpPr/>
           <p:nvPr/>
         </p:nvSpPr>
@@ -6074,7 +6114,7 @@
       </p:sp>
       <p:sp>
         <p:nvSpPr>
-          <p:cNvPr id="15" name="Rounded Rectangle 14"/>
+          <p:cNvPr id="17" name="Rounded Rectangle 16"/>
           <p:cNvSpPr/>
           <p:nvPr/>
         </p:nvSpPr>
@@ -6113,20 +6153,40 @@
           </a:fontRef>
         </p:style>
         <p:txBody>
-          <a:bodyPr rtlCol="0" anchor="ctr" wrap="square" lIns="9144" rIns="9144" tIns="9144" bIns="9144"/>
+          <a:bodyPr rtlCol="0" anchor="ctr" wrap="square" lIns="146304" rIns="146304" tIns="109728" bIns="109728"/>
           <a:lstStyle/>
           <a:p>
             <a:pPr algn="ctr"/>
-            <a:r>
-              <a:rPr sz="1700"/>
-              <a:t>⚡</a:t>
-            </a:r>
-          </a:p>
-        </p:txBody>
-      </p:sp>
-      <p:sp>
-        <p:nvSpPr>
-          <p:cNvPr id="16" name="TextBox 15"/>
+          </a:p>
+        </p:txBody>
+      </p:sp>
+      <p:pic>
+        <p:nvPicPr>
+          <p:cNvPr id="18" name="Picture 17" descr="bolt.png"/>
+          <p:cNvPicPr>
+            <a:picLocks noChangeAspect="1"/>
+          </p:cNvPicPr>
+          <p:nvPr/>
+        </p:nvPicPr>
+        <p:blipFill>
+          <a:blip r:embed="rId4"/>
+          <a:stretch>
+            <a:fillRect/>
+          </a:stretch>
+        </p:blipFill>
+        <p:spPr>
+          <a:xfrm>
+            <a:off x="8524768" y="3404128"/>
+            <a:ext cx="342351" cy="342351"/>
+          </a:xfrm>
+          <a:prstGeom prst="rect">
+            <a:avLst/>
+          </a:prstGeom>
+        </p:spPr>
+      </p:pic>
+      <p:sp>
+        <p:nvSpPr>
+          <p:cNvPr id="19" name="TextBox 18"/>
           <p:cNvSpPr txBox="1"/>
           <p:nvPr/>
         </p:nvSpPr>
@@ -6160,7 +6220,7 @@
       </p:sp>
       <p:sp>
         <p:nvSpPr>
-          <p:cNvPr id="17" name="TextBox 16"/>
+          <p:cNvPr id="20" name="TextBox 19"/>
           <p:cNvSpPr txBox="1"/>
           <p:nvPr/>
         </p:nvSpPr>
@@ -6199,7 +6259,7 @@
       </p:sp>
       <p:sp>
         <p:nvSpPr>
-          <p:cNvPr id="18" name="Rectangle 17"/>
+          <p:cNvPr id="21" name="Rectangle 20"/>
           <p:cNvSpPr/>
           <p:nvPr/>
         </p:nvSpPr>
@@ -6243,7 +6303,7 @@
       </p:sp>
       <p:sp>
         <p:nvSpPr>
-          <p:cNvPr id="19" name="TextBox 18"/>
+          <p:cNvPr id="22" name="TextBox 21"/>
           <p:cNvSpPr txBox="1"/>
           <p:nvPr/>
         </p:nvSpPr>
@@ -6286,7 +6346,7 @@
       </p:sp>
       <p:sp>
         <p:nvSpPr>
-          <p:cNvPr id="20" name="TextBox 19"/>
+          <p:cNvPr id="23" name="TextBox 22"/>
           <p:cNvSpPr txBox="1"/>
           <p:nvPr/>
         </p:nvSpPr>
@@ -6668,20 +6728,40 @@
           </a:fontRef>
         </p:style>
         <p:txBody>
-          <a:bodyPr rtlCol="0" anchor="ctr" wrap="square" lIns="9144" rIns="9144" tIns="9144" bIns="9144"/>
+          <a:bodyPr rtlCol="0" anchor="ctr" wrap="square" lIns="146304" rIns="146304" tIns="109728" bIns="109728"/>
           <a:lstStyle/>
           <a:p>
             <a:pPr algn="ctr"/>
-            <a:r>
-              <a:rPr sz="1700"/>
-              <a:t>🔁</a:t>
-            </a:r>
-          </a:p>
-        </p:txBody>
-      </p:sp>
-      <p:sp>
-        <p:nvSpPr>
-          <p:cNvPr id="8" name="TextBox 7"/>
+          </a:p>
+        </p:txBody>
+      </p:sp>
+      <p:pic>
+        <p:nvPicPr>
+          <p:cNvPr id="8" name="Picture 7" descr="refresh.png"/>
+          <p:cNvPicPr>
+            <a:picLocks noChangeAspect="1"/>
+          </p:cNvPicPr>
+          <p:nvPr/>
+        </p:nvPicPr>
+        <p:blipFill>
+          <a:blip r:embed="rId2"/>
+          <a:stretch>
+            <a:fillRect/>
+          </a:stretch>
+        </p:blipFill>
+        <p:spPr>
+          <a:xfrm>
+            <a:off x="935248" y="3404128"/>
+            <a:ext cx="342351" cy="342351"/>
+          </a:xfrm>
+          <a:prstGeom prst="rect">
+            <a:avLst/>
+          </a:prstGeom>
+        </p:spPr>
+      </p:pic>
+      <p:sp>
+        <p:nvSpPr>
+          <p:cNvPr id="9" name="TextBox 8"/>
           <p:cNvSpPr txBox="1"/>
           <p:nvPr/>
         </p:nvSpPr>
@@ -6715,7 +6795,7 @@
       </p:sp>
       <p:sp>
         <p:nvSpPr>
-          <p:cNvPr id="9" name="TextBox 8"/>
+          <p:cNvPr id="10" name="TextBox 9"/>
           <p:cNvSpPr txBox="1"/>
           <p:nvPr/>
         </p:nvSpPr>
@@ -6754,7 +6834,7 @@
       </p:sp>
       <p:sp>
         <p:nvSpPr>
-          <p:cNvPr id="10" name="Rounded Rectangle 9"/>
+          <p:cNvPr id="11" name="Rounded Rectangle 10"/>
           <p:cNvSpPr/>
           <p:nvPr/>
         </p:nvSpPr>
@@ -6802,7 +6882,7 @@
       </p:sp>
       <p:sp>
         <p:nvSpPr>
-          <p:cNvPr id="11" name="Rounded Rectangle 10"/>
+          <p:cNvPr id="12" name="Rounded Rectangle 11"/>
           <p:cNvSpPr/>
           <p:nvPr/>
         </p:nvSpPr>
@@ -6841,20 +6921,40 @@
           </a:fontRef>
         </p:style>
         <p:txBody>
-          <a:bodyPr rtlCol="0" anchor="ctr" wrap="square" lIns="9144" rIns="9144" tIns="9144" bIns="9144"/>
+          <a:bodyPr rtlCol="0" anchor="ctr" wrap="square" lIns="146304" rIns="146304" tIns="109728" bIns="109728"/>
           <a:lstStyle/>
           <a:p>
             <a:pPr algn="ctr"/>
-            <a:r>
-              <a:rPr sz="1700"/>
-              <a:t>✍️</a:t>
-            </a:r>
-          </a:p>
-        </p:txBody>
-      </p:sp>
-      <p:sp>
-        <p:nvSpPr>
-          <p:cNvPr id="12" name="TextBox 11"/>
+          </a:p>
+        </p:txBody>
+      </p:sp>
+      <p:pic>
+        <p:nvPicPr>
+          <p:cNvPr id="13" name="Picture 12" descr="pen.png"/>
+          <p:cNvPicPr>
+            <a:picLocks noChangeAspect="1"/>
+          </p:cNvPicPr>
+          <p:nvPr/>
+        </p:nvPicPr>
+        <p:blipFill>
+          <a:blip r:embed="rId3"/>
+          <a:stretch>
+            <a:fillRect/>
+          </a:stretch>
+        </p:blipFill>
+        <p:spPr>
+          <a:xfrm>
+            <a:off x="4730008" y="3404128"/>
+            <a:ext cx="342351" cy="342351"/>
+          </a:xfrm>
+          <a:prstGeom prst="rect">
+            <a:avLst/>
+          </a:prstGeom>
+        </p:spPr>
+      </p:pic>
+      <p:sp>
+        <p:nvSpPr>
+          <p:cNvPr id="14" name="TextBox 13"/>
           <p:cNvSpPr txBox="1"/>
           <p:nvPr/>
         </p:nvSpPr>
@@ -6888,7 +6988,7 @@
       </p:sp>
       <p:sp>
         <p:nvSpPr>
-          <p:cNvPr id="13" name="TextBox 12"/>
+          <p:cNvPr id="15" name="TextBox 14"/>
           <p:cNvSpPr txBox="1"/>
           <p:nvPr/>
         </p:nvSpPr>
@@ -6927,7 +7027,7 @@
       </p:sp>
       <p:sp>
         <p:nvSpPr>
-          <p:cNvPr id="14" name="Rounded Rectangle 13"/>
+          <p:cNvPr id="16" name="Rounded Rectangle 15"/>
           <p:cNvSpPr/>
           <p:nvPr/>
         </p:nvSpPr>
@@ -6975,7 +7075,7 @@
       </p:sp>
       <p:sp>
         <p:nvSpPr>
-          <p:cNvPr id="15" name="Rounded Rectangle 14"/>
+          <p:cNvPr id="17" name="Rounded Rectangle 16"/>
           <p:cNvSpPr/>
           <p:nvPr/>
         </p:nvSpPr>
@@ -7014,20 +7114,40 @@
           </a:fontRef>
         </p:style>
         <p:txBody>
-          <a:bodyPr rtlCol="0" anchor="ctr" wrap="square" lIns="9144" rIns="9144" tIns="9144" bIns="9144"/>
+          <a:bodyPr rtlCol="0" anchor="ctr" wrap="square" lIns="146304" rIns="146304" tIns="109728" bIns="109728"/>
           <a:lstStyle/>
           <a:p>
             <a:pPr algn="ctr"/>
-            <a:r>
-              <a:rPr sz="1700"/>
-              <a:t>📥</a:t>
-            </a:r>
-          </a:p>
-        </p:txBody>
-      </p:sp>
-      <p:sp>
-        <p:nvSpPr>
-          <p:cNvPr id="16" name="TextBox 15"/>
+          </a:p>
+        </p:txBody>
+      </p:sp>
+      <p:pic>
+        <p:nvPicPr>
+          <p:cNvPr id="18" name="Picture 17" descr="inbox.png"/>
+          <p:cNvPicPr>
+            <a:picLocks noChangeAspect="1"/>
+          </p:cNvPicPr>
+          <p:nvPr/>
+        </p:nvPicPr>
+        <p:blipFill>
+          <a:blip r:embed="rId4"/>
+          <a:stretch>
+            <a:fillRect/>
+          </a:stretch>
+        </p:blipFill>
+        <p:spPr>
+          <a:xfrm>
+            <a:off x="8524768" y="3404128"/>
+            <a:ext cx="342351" cy="342351"/>
+          </a:xfrm>
+          <a:prstGeom prst="rect">
+            <a:avLst/>
+          </a:prstGeom>
+        </p:spPr>
+      </p:pic>
+      <p:sp>
+        <p:nvSpPr>
+          <p:cNvPr id="19" name="TextBox 18"/>
           <p:cNvSpPr txBox="1"/>
           <p:nvPr/>
         </p:nvSpPr>
@@ -7061,7 +7181,7 @@
       </p:sp>
       <p:sp>
         <p:nvSpPr>
-          <p:cNvPr id="17" name="TextBox 16"/>
+          <p:cNvPr id="20" name="TextBox 19"/>
           <p:cNvSpPr txBox="1"/>
           <p:nvPr/>
         </p:nvSpPr>
@@ -7100,7 +7220,7 @@
       </p:sp>
       <p:sp>
         <p:nvSpPr>
-          <p:cNvPr id="18" name="Rectangle 17"/>
+          <p:cNvPr id="21" name="Rectangle 20"/>
           <p:cNvSpPr/>
           <p:nvPr/>
         </p:nvSpPr>
@@ -7144,7 +7264,7 @@
       </p:sp>
       <p:sp>
         <p:nvSpPr>
-          <p:cNvPr id="19" name="TextBox 18"/>
+          <p:cNvPr id="22" name="TextBox 21"/>
           <p:cNvSpPr txBox="1"/>
           <p:nvPr/>
         </p:nvSpPr>
@@ -7187,7 +7307,7 @@
       </p:sp>
       <p:sp>
         <p:nvSpPr>
-          <p:cNvPr id="20" name="TextBox 19"/>
+          <p:cNvPr id="23" name="TextBox 22"/>
           <p:cNvSpPr txBox="1"/>
           <p:nvPr/>
         </p:nvSpPr>
@@ -7438,20 +7558,40 @@
           </a:fontRef>
         </p:style>
         <p:txBody>
-          <a:bodyPr rtlCol="0" anchor="ctr" wrap="square" lIns="9144" rIns="9144" tIns="9144" bIns="9144"/>
+          <a:bodyPr rtlCol="0" anchor="ctr" wrap="square" lIns="146304" rIns="146304" tIns="109728" bIns="109728"/>
           <a:lstStyle/>
           <a:p>
             <a:pPr algn="ctr"/>
-            <a:r>
-              <a:rPr sz="1700"/>
-              <a:t>💵</a:t>
-            </a:r>
-          </a:p>
-        </p:txBody>
-      </p:sp>
-      <p:sp>
-        <p:nvSpPr>
-          <p:cNvPr id="7" name="TextBox 6"/>
+          </a:p>
+        </p:txBody>
+      </p:sp>
+      <p:pic>
+        <p:nvPicPr>
+          <p:cNvPr id="7" name="Picture 6" descr="dbcoin.png"/>
+          <p:cNvPicPr>
+            <a:picLocks noChangeAspect="1"/>
+          </p:cNvPicPr>
+          <p:nvPr/>
+        </p:nvPicPr>
+        <p:blipFill>
+          <a:blip r:embed="rId2"/>
+          <a:stretch>
+            <a:fillRect/>
+          </a:stretch>
+        </p:blipFill>
+        <p:spPr>
+          <a:xfrm>
+            <a:off x="953536" y="2096536"/>
+            <a:ext cx="342351" cy="342351"/>
+          </a:xfrm>
+          <a:prstGeom prst="rect">
+            <a:avLst/>
+          </a:prstGeom>
+        </p:spPr>
+      </p:pic>
+      <p:sp>
+        <p:nvSpPr>
+          <p:cNvPr id="8" name="TextBox 7"/>
           <p:cNvSpPr txBox="1"/>
           <p:nvPr/>
         </p:nvSpPr>
@@ -7485,7 +7625,7 @@
       </p:sp>
       <p:sp>
         <p:nvSpPr>
-          <p:cNvPr id="8" name="TextBox 7"/>
+          <p:cNvPr id="9" name="TextBox 8"/>
           <p:cNvSpPr txBox="1"/>
           <p:nvPr/>
         </p:nvSpPr>
@@ -7620,7 +7760,7 @@
       </p:sp>
       <p:sp>
         <p:nvSpPr>
-          <p:cNvPr id="9" name="Rounded Rectangle 8"/>
+          <p:cNvPr id="10" name="Rounded Rectangle 9"/>
           <p:cNvSpPr/>
           <p:nvPr/>
         </p:nvSpPr>
@@ -7668,7 +7808,7 @@
       </p:sp>
       <p:sp>
         <p:nvSpPr>
-          <p:cNvPr id="10" name="Rounded Rectangle 9"/>
+          <p:cNvPr id="11" name="Rounded Rectangle 10"/>
           <p:cNvSpPr/>
           <p:nvPr/>
         </p:nvSpPr>
@@ -7707,20 +7847,40 @@
           </a:fontRef>
         </p:style>
         <p:txBody>
-          <a:bodyPr rtlCol="0" anchor="ctr" wrap="square" lIns="9144" rIns="9144" tIns="9144" bIns="9144"/>
+          <a:bodyPr rtlCol="0" anchor="ctr" wrap="square" lIns="146304" rIns="146304" tIns="109728" bIns="109728"/>
           <a:lstStyle/>
           <a:p>
             <a:pPr algn="ctr"/>
-            <a:r>
-              <a:rPr sz="1700"/>
-              <a:t>🛡️</a:t>
-            </a:r>
-          </a:p>
-        </p:txBody>
-      </p:sp>
-      <p:sp>
-        <p:nvSpPr>
-          <p:cNvPr id="11" name="TextBox 10"/>
+          </a:p>
+        </p:txBody>
+      </p:sp>
+      <p:pic>
+        <p:nvPicPr>
+          <p:cNvPr id="12" name="Picture 11" descr="shield.png"/>
+          <p:cNvPicPr>
+            <a:picLocks noChangeAspect="1"/>
+          </p:cNvPicPr>
+          <p:nvPr/>
+        </p:nvPicPr>
+        <p:blipFill>
+          <a:blip r:embed="rId3"/>
+          <a:stretch>
+            <a:fillRect/>
+          </a:stretch>
+        </p:blipFill>
+        <p:spPr>
+          <a:xfrm>
+            <a:off x="6531376" y="2096536"/>
+            <a:ext cx="342351" cy="342351"/>
+          </a:xfrm>
+          <a:prstGeom prst="rect">
+            <a:avLst/>
+          </a:prstGeom>
+        </p:spPr>
+      </p:pic>
+      <p:sp>
+        <p:nvSpPr>
+          <p:cNvPr id="13" name="TextBox 12"/>
           <p:cNvSpPr txBox="1"/>
           <p:nvPr/>
         </p:nvSpPr>
@@ -7754,7 +7914,7 @@
       </p:sp>
       <p:sp>
         <p:nvSpPr>
-          <p:cNvPr id="12" name="TextBox 11"/>
+          <p:cNvPr id="14" name="TextBox 13"/>
           <p:cNvSpPr txBox="1"/>
           <p:nvPr/>
         </p:nvSpPr>
@@ -7889,7 +8049,7 @@
       </p:sp>
       <p:sp>
         <p:nvSpPr>
-          <p:cNvPr id="13" name="Rectangle 12"/>
+          <p:cNvPr id="15" name="Rectangle 14"/>
           <p:cNvSpPr/>
           <p:nvPr/>
         </p:nvSpPr>
@@ -7933,7 +8093,7 @@
       </p:sp>
       <p:sp>
         <p:nvSpPr>
-          <p:cNvPr id="14" name="TextBox 13"/>
+          <p:cNvPr id="16" name="TextBox 15"/>
           <p:cNvSpPr txBox="1"/>
           <p:nvPr/>
         </p:nvSpPr>
@@ -7976,7 +8136,7 @@
       </p:sp>
       <p:sp>
         <p:nvSpPr>
-          <p:cNvPr id="15" name="TextBox 14"/>
+          <p:cNvPr id="17" name="TextBox 16"/>
           <p:cNvSpPr txBox="1"/>
           <p:nvPr/>
         </p:nvSpPr>
@@ -8227,20 +8387,40 @@
           </a:fontRef>
         </p:style>
         <p:txBody>
-          <a:bodyPr rtlCol="0" anchor="ctr" wrap="square" lIns="9144" rIns="9144" tIns="9144" bIns="9144"/>
+          <a:bodyPr rtlCol="0" anchor="ctr" wrap="square" lIns="146304" rIns="146304" tIns="109728" bIns="109728"/>
           <a:lstStyle/>
           <a:p>
             <a:pPr algn="ctr"/>
-            <a:r>
-              <a:rPr sz="1700"/>
-              <a:t>✅</a:t>
-            </a:r>
-          </a:p>
-        </p:txBody>
-      </p:sp>
-      <p:sp>
-        <p:nvSpPr>
-          <p:cNvPr id="7" name="TextBox 6"/>
+          </a:p>
+        </p:txBody>
+      </p:sp>
+      <p:pic>
+        <p:nvPicPr>
+          <p:cNvPr id="7" name="Picture 6" descr="check.png"/>
+          <p:cNvPicPr>
+            <a:picLocks noChangeAspect="1"/>
+          </p:cNvPicPr>
+          <p:nvPr/>
+        </p:nvPicPr>
+        <p:blipFill>
+          <a:blip r:embed="rId2"/>
+          <a:stretch>
+            <a:fillRect/>
+          </a:stretch>
+        </p:blipFill>
+        <p:spPr>
+          <a:xfrm>
+            <a:off x="935248" y="2123968"/>
+            <a:ext cx="342351" cy="342351"/>
+          </a:xfrm>
+          <a:prstGeom prst="rect">
+            <a:avLst/>
+          </a:prstGeom>
+        </p:spPr>
+      </p:pic>
+      <p:sp>
+        <p:nvSpPr>
+          <p:cNvPr id="8" name="TextBox 7"/>
           <p:cNvSpPr txBox="1"/>
           <p:nvPr/>
         </p:nvSpPr>
@@ -8274,7 +8454,7 @@
       </p:sp>
       <p:sp>
         <p:nvSpPr>
-          <p:cNvPr id="8" name="TextBox 7"/>
+          <p:cNvPr id="9" name="TextBox 8"/>
           <p:cNvSpPr txBox="1"/>
           <p:nvPr/>
         </p:nvSpPr>
@@ -8313,7 +8493,7 @@
       </p:sp>
       <p:sp>
         <p:nvSpPr>
-          <p:cNvPr id="9" name="Rounded Rectangle 8"/>
+          <p:cNvPr id="10" name="Rounded Rectangle 9"/>
           <p:cNvSpPr/>
           <p:nvPr/>
         </p:nvSpPr>
@@ -8361,7 +8541,7 @@
       </p:sp>
       <p:sp>
         <p:nvSpPr>
-          <p:cNvPr id="10" name="Rounded Rectangle 9"/>
+          <p:cNvPr id="11" name="Rounded Rectangle 10"/>
           <p:cNvSpPr/>
           <p:nvPr/>
         </p:nvSpPr>
@@ -8400,20 +8580,40 @@
           </a:fontRef>
         </p:style>
         <p:txBody>
-          <a:bodyPr rtlCol="0" anchor="ctr" wrap="square" lIns="9144" rIns="9144" tIns="9144" bIns="9144"/>
+          <a:bodyPr rtlCol="0" anchor="ctr" wrap="square" lIns="146304" rIns="146304" tIns="109728" bIns="109728"/>
           <a:lstStyle/>
           <a:p>
             <a:pPr algn="ctr"/>
-            <a:r>
-              <a:rPr sz="1700"/>
-              <a:t>🚧</a:t>
-            </a:r>
-          </a:p>
-        </p:txBody>
-      </p:sp>
-      <p:sp>
-        <p:nvSpPr>
-          <p:cNvPr id="11" name="TextBox 10"/>
+          </a:p>
+        </p:txBody>
+      </p:sp>
+      <p:pic>
+        <p:nvPicPr>
+          <p:cNvPr id="12" name="Picture 11" descr="cone.png"/>
+          <p:cNvPicPr>
+            <a:picLocks noChangeAspect="1"/>
+          </p:cNvPicPr>
+          <p:nvPr/>
+        </p:nvPicPr>
+        <p:blipFill>
+          <a:blip r:embed="rId3"/>
+          <a:stretch>
+            <a:fillRect/>
+          </a:stretch>
+        </p:blipFill>
+        <p:spPr>
+          <a:xfrm>
+            <a:off x="4730008" y="2123968"/>
+            <a:ext cx="342351" cy="342351"/>
+          </a:xfrm>
+          <a:prstGeom prst="rect">
+            <a:avLst/>
+          </a:prstGeom>
+        </p:spPr>
+      </p:pic>
+      <p:sp>
+        <p:nvSpPr>
+          <p:cNvPr id="13" name="TextBox 12"/>
           <p:cNvSpPr txBox="1"/>
           <p:nvPr/>
         </p:nvSpPr>
@@ -8447,7 +8647,7 @@
       </p:sp>
       <p:sp>
         <p:nvSpPr>
-          <p:cNvPr id="12" name="TextBox 11"/>
+          <p:cNvPr id="14" name="TextBox 13"/>
           <p:cNvSpPr txBox="1"/>
           <p:nvPr/>
         </p:nvSpPr>
@@ -8486,7 +8686,7 @@
       </p:sp>
       <p:sp>
         <p:nvSpPr>
-          <p:cNvPr id="13" name="Rounded Rectangle 12"/>
+          <p:cNvPr id="15" name="Rounded Rectangle 14"/>
           <p:cNvSpPr/>
           <p:nvPr/>
         </p:nvSpPr>
@@ -8534,7 +8734,7 @@
       </p:sp>
       <p:sp>
         <p:nvSpPr>
-          <p:cNvPr id="14" name="Rounded Rectangle 13"/>
+          <p:cNvPr id="16" name="Rounded Rectangle 15"/>
           <p:cNvSpPr/>
           <p:nvPr/>
         </p:nvSpPr>
@@ -8573,20 +8773,40 @@
           </a:fontRef>
         </p:style>
         <p:txBody>
-          <a:bodyPr rtlCol="0" anchor="ctr" wrap="square" lIns="9144" rIns="9144" tIns="9144" bIns="9144"/>
+          <a:bodyPr rtlCol="0" anchor="ctr" wrap="square" lIns="146304" rIns="146304" tIns="109728" bIns="109728"/>
           <a:lstStyle/>
           <a:p>
             <a:pPr algn="ctr"/>
-            <a:r>
-              <a:rPr sz="1700"/>
-              <a:t>🎯</a:t>
-            </a:r>
-          </a:p>
-        </p:txBody>
-      </p:sp>
-      <p:sp>
-        <p:nvSpPr>
-          <p:cNvPr id="15" name="TextBox 14"/>
+          </a:p>
+        </p:txBody>
+      </p:sp>
+      <p:pic>
+        <p:nvPicPr>
+          <p:cNvPr id="17" name="Picture 16" descr="target.png"/>
+          <p:cNvPicPr>
+            <a:picLocks noChangeAspect="1"/>
+          </p:cNvPicPr>
+          <p:nvPr/>
+        </p:nvPicPr>
+        <p:blipFill>
+          <a:blip r:embed="rId4"/>
+          <a:stretch>
+            <a:fillRect/>
+          </a:stretch>
+        </p:blipFill>
+        <p:spPr>
+          <a:xfrm>
+            <a:off x="8524768" y="2123968"/>
+            <a:ext cx="342351" cy="342351"/>
+          </a:xfrm>
+          <a:prstGeom prst="rect">
+            <a:avLst/>
+          </a:prstGeom>
+        </p:spPr>
+      </p:pic>
+      <p:sp>
+        <p:nvSpPr>
+          <p:cNvPr id="18" name="TextBox 17"/>
           <p:cNvSpPr txBox="1"/>
           <p:nvPr/>
         </p:nvSpPr>
@@ -8620,7 +8840,7 @@
       </p:sp>
       <p:sp>
         <p:nvSpPr>
-          <p:cNvPr id="16" name="TextBox 15"/>
+          <p:cNvPr id="19" name="TextBox 18"/>
           <p:cNvSpPr txBox="1"/>
           <p:nvPr/>
         </p:nvSpPr>
@@ -8659,7 +8879,7 @@
       </p:sp>
       <p:sp>
         <p:nvSpPr>
-          <p:cNvPr id="17" name="TextBox 16"/>
+          <p:cNvPr id="20" name="TextBox 19"/>
           <p:cNvSpPr txBox="1"/>
           <p:nvPr/>
         </p:nvSpPr>
@@ -8702,7 +8922,7 @@
       </p:sp>
       <p:sp>
         <p:nvSpPr>
-          <p:cNvPr id="18" name="Rectangle 17"/>
+          <p:cNvPr id="21" name="Rectangle 20"/>
           <p:cNvSpPr/>
           <p:nvPr/>
         </p:nvSpPr>
@@ -8746,7 +8966,7 @@
       </p:sp>
       <p:sp>
         <p:nvSpPr>
-          <p:cNvPr id="19" name="TextBox 18"/>
+          <p:cNvPr id="22" name="TextBox 21"/>
           <p:cNvSpPr txBox="1"/>
           <p:nvPr/>
         </p:nvSpPr>
@@ -8789,7 +9009,7 @@
       </p:sp>
       <p:sp>
         <p:nvSpPr>
-          <p:cNvPr id="20" name="TextBox 19"/>
+          <p:cNvPr id="23" name="TextBox 22"/>
           <p:cNvSpPr txBox="1"/>
           <p:nvPr/>
         </p:nvSpPr>
@@ -10181,20 +10401,40 @@
           </a:fontRef>
         </p:style>
         <p:txBody>
-          <a:bodyPr rtlCol="0" anchor="ctr" wrap="square" lIns="9144" rIns="9144" tIns="9144" bIns="9144"/>
+          <a:bodyPr rtlCol="0" anchor="ctr" wrap="square" lIns="146304" rIns="146304" tIns="109728" bIns="109728"/>
           <a:lstStyle/>
           <a:p>
             <a:pPr algn="ctr"/>
-            <a:r>
-              <a:rPr sz="1400"/>
-              <a:t>🏛️</a:t>
-            </a:r>
-          </a:p>
-        </p:txBody>
-      </p:sp>
-      <p:sp>
-        <p:nvSpPr>
-          <p:cNvPr id="7" name="TextBox 6"/>
+          </a:p>
+        </p:txBody>
+      </p:sp>
+      <p:pic>
+        <p:nvPicPr>
+          <p:cNvPr id="7" name="Picture 6" descr="bank.png"/>
+          <p:cNvPicPr>
+            <a:picLocks noChangeAspect="1"/>
+          </p:cNvPicPr>
+          <p:nvPr/>
+        </p:nvPicPr>
+        <p:blipFill>
+          <a:blip r:embed="rId2"/>
+          <a:stretch>
+            <a:fillRect/>
+          </a:stretch>
+        </p:blipFill>
+        <p:spPr>
+          <a:xfrm>
+            <a:off x="925007" y="2068007"/>
+            <a:ext cx="289681" cy="289681"/>
+          </a:xfrm>
+          <a:prstGeom prst="rect">
+            <a:avLst/>
+          </a:prstGeom>
+        </p:spPr>
+      </p:pic>
+      <p:sp>
+        <p:nvSpPr>
+          <p:cNvPr id="8" name="TextBox 7"/>
           <p:cNvSpPr txBox="1"/>
           <p:nvPr/>
         </p:nvSpPr>
@@ -10228,7 +10468,7 @@
       </p:sp>
       <p:sp>
         <p:nvSpPr>
-          <p:cNvPr id="8" name="TextBox 7"/>
+          <p:cNvPr id="9" name="TextBox 8"/>
           <p:cNvSpPr txBox="1"/>
           <p:nvPr/>
         </p:nvSpPr>
@@ -10395,7 +10635,7 @@
       </p:sp>
       <p:sp>
         <p:nvSpPr>
-          <p:cNvPr id="9" name="Rounded Rectangle 8"/>
+          <p:cNvPr id="10" name="Rounded Rectangle 9"/>
           <p:cNvSpPr/>
           <p:nvPr/>
         </p:nvSpPr>
@@ -10443,7 +10683,7 @@
       </p:sp>
       <p:sp>
         <p:nvSpPr>
-          <p:cNvPr id="10" name="Rounded Rectangle 9"/>
+          <p:cNvPr id="11" name="Rounded Rectangle 10"/>
           <p:cNvSpPr/>
           <p:nvPr/>
         </p:nvSpPr>
@@ -10482,20 +10722,40 @@
           </a:fontRef>
         </p:style>
         <p:txBody>
-          <a:bodyPr rtlCol="0" anchor="ctr" wrap="square" lIns="9144" rIns="9144" tIns="9144" bIns="9144"/>
+          <a:bodyPr rtlCol="0" anchor="ctr" wrap="square" lIns="146304" rIns="146304" tIns="109728" bIns="109728"/>
           <a:lstStyle/>
           <a:p>
             <a:pPr algn="ctr"/>
-            <a:r>
-              <a:rPr sz="1400"/>
-              <a:t>🧰</a:t>
-            </a:r>
-          </a:p>
-        </p:txBody>
-      </p:sp>
-      <p:sp>
-        <p:nvSpPr>
-          <p:cNvPr id="11" name="TextBox 10"/>
+          </a:p>
+        </p:txBody>
+      </p:sp>
+      <p:pic>
+        <p:nvPicPr>
+          <p:cNvPr id="12" name="Picture 11" descr="sliders.png"/>
+          <p:cNvPicPr>
+            <a:picLocks noChangeAspect="1"/>
+          </p:cNvPicPr>
+          <p:nvPr/>
+        </p:nvPicPr>
+        <p:blipFill>
+          <a:blip r:embed="rId3"/>
+          <a:stretch>
+            <a:fillRect/>
+          </a:stretch>
+        </p:blipFill>
+        <p:spPr>
+          <a:xfrm>
+            <a:off x="4719767" y="2068007"/>
+            <a:ext cx="289681" cy="289681"/>
+          </a:xfrm>
+          <a:prstGeom prst="rect">
+            <a:avLst/>
+          </a:prstGeom>
+        </p:spPr>
+      </p:pic>
+      <p:sp>
+        <p:nvSpPr>
+          <p:cNvPr id="13" name="TextBox 12"/>
           <p:cNvSpPr txBox="1"/>
           <p:nvPr/>
         </p:nvSpPr>
@@ -10529,7 +10789,7 @@
       </p:sp>
       <p:sp>
         <p:nvSpPr>
-          <p:cNvPr id="12" name="TextBox 11"/>
+          <p:cNvPr id="14" name="TextBox 13"/>
           <p:cNvSpPr txBox="1"/>
           <p:nvPr/>
         </p:nvSpPr>
@@ -10664,7 +10924,7 @@
       </p:sp>
       <p:sp>
         <p:nvSpPr>
-          <p:cNvPr id="13" name="Rounded Rectangle 12"/>
+          <p:cNvPr id="15" name="Rounded Rectangle 14"/>
           <p:cNvSpPr/>
           <p:nvPr/>
         </p:nvSpPr>
@@ -10712,7 +10972,7 @@
       </p:sp>
       <p:sp>
         <p:nvSpPr>
-          <p:cNvPr id="14" name="Rounded Rectangle 13"/>
+          <p:cNvPr id="16" name="Rounded Rectangle 15"/>
           <p:cNvSpPr/>
           <p:nvPr/>
         </p:nvSpPr>
@@ -10751,20 +11011,40 @@
           </a:fontRef>
         </p:style>
         <p:txBody>
-          <a:bodyPr rtlCol="0" anchor="ctr" wrap="square" lIns="9144" rIns="9144" tIns="9144" bIns="9144"/>
+          <a:bodyPr rtlCol="0" anchor="ctr" wrap="square" lIns="146304" rIns="146304" tIns="109728" bIns="109728"/>
           <a:lstStyle/>
           <a:p>
             <a:pPr algn="ctr"/>
-            <a:r>
-              <a:rPr sz="1400"/>
-              <a:t>🧩</a:t>
-            </a:r>
-          </a:p>
-        </p:txBody>
-      </p:sp>
-      <p:sp>
-        <p:nvSpPr>
-          <p:cNvPr id="15" name="TextBox 14"/>
+          </a:p>
+        </p:txBody>
+      </p:sp>
+      <p:pic>
+        <p:nvPicPr>
+          <p:cNvPr id="17" name="Picture 16" descr="plus.png"/>
+          <p:cNvPicPr>
+            <a:picLocks noChangeAspect="1"/>
+          </p:cNvPicPr>
+          <p:nvPr/>
+        </p:nvPicPr>
+        <p:blipFill>
+          <a:blip r:embed="rId4"/>
+          <a:stretch>
+            <a:fillRect/>
+          </a:stretch>
+        </p:blipFill>
+        <p:spPr>
+          <a:xfrm>
+            <a:off x="8514527" y="2068007"/>
+            <a:ext cx="289681" cy="289681"/>
+          </a:xfrm>
+          <a:prstGeom prst="rect">
+            <a:avLst/>
+          </a:prstGeom>
+        </p:spPr>
+      </p:pic>
+      <p:sp>
+        <p:nvSpPr>
+          <p:cNvPr id="18" name="TextBox 17"/>
           <p:cNvSpPr txBox="1"/>
           <p:nvPr/>
         </p:nvSpPr>
@@ -10798,7 +11078,7 @@
       </p:sp>
       <p:sp>
         <p:nvSpPr>
-          <p:cNvPr id="16" name="TextBox 15"/>
+          <p:cNvPr id="19" name="TextBox 18"/>
           <p:cNvSpPr txBox="1"/>
           <p:nvPr/>
         </p:nvSpPr>
@@ -10901,7 +11181,7 @@
       </p:sp>
       <p:sp>
         <p:nvSpPr>
-          <p:cNvPr id="17" name="Rectangle 16"/>
+          <p:cNvPr id="20" name="Rectangle 19"/>
           <p:cNvSpPr/>
           <p:nvPr/>
         </p:nvSpPr>
@@ -10945,7 +11225,7 @@
       </p:sp>
       <p:sp>
         <p:nvSpPr>
-          <p:cNvPr id="18" name="TextBox 17"/>
+          <p:cNvPr id="21" name="TextBox 20"/>
           <p:cNvSpPr txBox="1"/>
           <p:nvPr/>
         </p:nvSpPr>
@@ -10988,7 +11268,7 @@
       </p:sp>
       <p:sp>
         <p:nvSpPr>
-          <p:cNvPr id="19" name="TextBox 18"/>
+          <p:cNvPr id="22" name="TextBox 21"/>
           <p:cNvSpPr txBox="1"/>
           <p:nvPr/>
         </p:nvSpPr>
@@ -11596,20 +11876,40 @@
           </a:fontRef>
         </p:style>
         <p:txBody>
-          <a:bodyPr rtlCol="0" anchor="ctr" wrap="square" lIns="9144" rIns="9144" tIns="9144" bIns="9144"/>
+          <a:bodyPr rtlCol="0" anchor="ctr" wrap="square" lIns="146304" rIns="146304" tIns="109728" bIns="109728"/>
           <a:lstStyle/>
           <a:p>
             <a:pPr algn="ctr"/>
-            <a:r>
-              <a:rPr sz="1700"/>
-              <a:t>🛍️</a:t>
-            </a:r>
-          </a:p>
-        </p:txBody>
-      </p:sp>
-      <p:sp>
-        <p:nvSpPr>
-          <p:cNvPr id="8" name="TextBox 7"/>
+          </a:p>
+        </p:txBody>
+      </p:sp>
+      <p:pic>
+        <p:nvPicPr>
+          <p:cNvPr id="8" name="Picture 7" descr="bag.png"/>
+          <p:cNvPicPr>
+            <a:picLocks noChangeAspect="1"/>
+          </p:cNvPicPr>
+          <p:nvPr/>
+        </p:nvPicPr>
+        <p:blipFill>
+          <a:blip r:embed="rId2"/>
+          <a:stretch>
+            <a:fillRect/>
+          </a:stretch>
+        </p:blipFill>
+        <p:spPr>
+          <a:xfrm>
+            <a:off x="935248" y="2206264"/>
+            <a:ext cx="342351" cy="342351"/>
+          </a:xfrm>
+          <a:prstGeom prst="rect">
+            <a:avLst/>
+          </a:prstGeom>
+        </p:spPr>
+      </p:pic>
+      <p:sp>
+        <p:nvSpPr>
+          <p:cNvPr id="9" name="TextBox 8"/>
           <p:cNvSpPr txBox="1"/>
           <p:nvPr/>
         </p:nvSpPr>
@@ -11643,7 +11943,7 @@
       </p:sp>
       <p:sp>
         <p:nvSpPr>
-          <p:cNvPr id="9" name="TextBox 8"/>
+          <p:cNvPr id="10" name="TextBox 9"/>
           <p:cNvSpPr txBox="1"/>
           <p:nvPr/>
         </p:nvSpPr>
@@ -11682,7 +11982,7 @@
       </p:sp>
       <p:sp>
         <p:nvSpPr>
-          <p:cNvPr id="10" name="Rounded Rectangle 9"/>
+          <p:cNvPr id="11" name="Rounded Rectangle 10"/>
           <p:cNvSpPr/>
           <p:nvPr/>
         </p:nvSpPr>
@@ -11730,7 +12030,7 @@
       </p:sp>
       <p:sp>
         <p:nvSpPr>
-          <p:cNvPr id="11" name="Rounded Rectangle 10"/>
+          <p:cNvPr id="12" name="Rounded Rectangle 11"/>
           <p:cNvSpPr/>
           <p:nvPr/>
         </p:nvSpPr>
@@ -11769,20 +12069,40 @@
           </a:fontRef>
         </p:style>
         <p:txBody>
-          <a:bodyPr rtlCol="0" anchor="ctr" wrap="square" lIns="9144" rIns="9144" tIns="9144" bIns="9144"/>
+          <a:bodyPr rtlCol="0" anchor="ctr" wrap="square" lIns="146304" rIns="146304" tIns="109728" bIns="109728"/>
           <a:lstStyle/>
           <a:p>
             <a:pPr algn="ctr"/>
-            <a:r>
-              <a:rPr sz="1700"/>
-              <a:t>💳</a:t>
-            </a:r>
-          </a:p>
-        </p:txBody>
-      </p:sp>
-      <p:sp>
-        <p:nvSpPr>
-          <p:cNvPr id="12" name="TextBox 11"/>
+          </a:p>
+        </p:txBody>
+      </p:sp>
+      <p:pic>
+        <p:nvPicPr>
+          <p:cNvPr id="13" name="Picture 12" descr="cardpay.png"/>
+          <p:cNvPicPr>
+            <a:picLocks noChangeAspect="1"/>
+          </p:cNvPicPr>
+          <p:nvPr/>
+        </p:nvPicPr>
+        <p:blipFill>
+          <a:blip r:embed="rId3"/>
+          <a:stretch>
+            <a:fillRect/>
+          </a:stretch>
+        </p:blipFill>
+        <p:spPr>
+          <a:xfrm>
+            <a:off x="935248" y="3669304"/>
+            <a:ext cx="342351" cy="342351"/>
+          </a:xfrm>
+          <a:prstGeom prst="rect">
+            <a:avLst/>
+          </a:prstGeom>
+        </p:spPr>
+      </p:pic>
+      <p:sp>
+        <p:nvSpPr>
+          <p:cNvPr id="14" name="TextBox 13"/>
           <p:cNvSpPr txBox="1"/>
           <p:nvPr/>
         </p:nvSpPr>
@@ -11816,7 +12136,7 @@
       </p:sp>
       <p:sp>
         <p:nvSpPr>
-          <p:cNvPr id="13" name="TextBox 12"/>
+          <p:cNvPr id="15" name="TextBox 14"/>
           <p:cNvSpPr txBox="1"/>
           <p:nvPr/>
         </p:nvSpPr>
@@ -11855,7 +12175,7 @@
       </p:sp>
       <p:sp>
         <p:nvSpPr>
-          <p:cNvPr id="14" name="Rounded Rectangle 13"/>
+          <p:cNvPr id="16" name="Rounded Rectangle 15"/>
           <p:cNvSpPr/>
           <p:nvPr/>
         </p:nvSpPr>
@@ -11903,7 +12223,7 @@
       </p:sp>
       <p:sp>
         <p:nvSpPr>
-          <p:cNvPr id="15" name="Rounded Rectangle 14"/>
+          <p:cNvPr id="17" name="Rounded Rectangle 16"/>
           <p:cNvSpPr/>
           <p:nvPr/>
         </p:nvSpPr>
@@ -11942,20 +12262,40 @@
           </a:fontRef>
         </p:style>
         <p:txBody>
-          <a:bodyPr rtlCol="0" anchor="ctr" wrap="square" lIns="9144" rIns="9144" tIns="9144" bIns="9144"/>
+          <a:bodyPr rtlCol="0" anchor="ctr" wrap="square" lIns="146304" rIns="146304" tIns="109728" bIns="109728"/>
           <a:lstStyle/>
           <a:p>
             <a:pPr algn="ctr"/>
-            <a:r>
-              <a:rPr sz="1700"/>
-              <a:t>📣</a:t>
-            </a:r>
-          </a:p>
-        </p:txBody>
-      </p:sp>
-      <p:sp>
-        <p:nvSpPr>
-          <p:cNvPr id="16" name="TextBox 15"/>
+          </a:p>
+        </p:txBody>
+      </p:sp>
+      <p:pic>
+        <p:nvPicPr>
+          <p:cNvPr id="18" name="Picture 17" descr="broadcast.png"/>
+          <p:cNvPicPr>
+            <a:picLocks noChangeAspect="1"/>
+          </p:cNvPicPr>
+          <p:nvPr/>
+        </p:nvPicPr>
+        <p:blipFill>
+          <a:blip r:embed="rId4"/>
+          <a:stretch>
+            <a:fillRect/>
+          </a:stretch>
+        </p:blipFill>
+        <p:spPr>
+          <a:xfrm>
+            <a:off x="935248" y="5132344"/>
+            <a:ext cx="342351" cy="342351"/>
+          </a:xfrm>
+          <a:prstGeom prst="rect">
+            <a:avLst/>
+          </a:prstGeom>
+        </p:spPr>
+      </p:pic>
+      <p:sp>
+        <p:nvSpPr>
+          <p:cNvPr id="19" name="TextBox 18"/>
           <p:cNvSpPr txBox="1"/>
           <p:nvPr/>
         </p:nvSpPr>
@@ -11989,7 +12329,7 @@
       </p:sp>
       <p:sp>
         <p:nvSpPr>
-          <p:cNvPr id="17" name="TextBox 16"/>
+          <p:cNvPr id="20" name="TextBox 19"/>
           <p:cNvSpPr txBox="1"/>
           <p:nvPr/>
         </p:nvSpPr>
@@ -12028,7 +12368,7 @@
       </p:sp>
       <p:sp>
         <p:nvSpPr>
-          <p:cNvPr id="18" name="TextBox 17"/>
+          <p:cNvPr id="21" name="TextBox 20"/>
           <p:cNvSpPr txBox="1"/>
           <p:nvPr/>
         </p:nvSpPr>
@@ -12062,7 +12402,7 @@
       </p:sp>
       <p:sp>
         <p:nvSpPr>
-          <p:cNvPr id="19" name="Rounded Rectangle 18"/>
+          <p:cNvPr id="22" name="Rounded Rectangle 21"/>
           <p:cNvSpPr/>
           <p:nvPr/>
         </p:nvSpPr>
@@ -12110,7 +12450,7 @@
       </p:sp>
       <p:sp>
         <p:nvSpPr>
-          <p:cNvPr id="20" name="Rounded Rectangle 19"/>
+          <p:cNvPr id="23" name="Rounded Rectangle 22"/>
           <p:cNvSpPr/>
           <p:nvPr/>
         </p:nvSpPr>
@@ -12125,7 +12465,7 @@
             </a:avLst>
           </a:prstGeom>
           <a:solidFill>
-            <a:srgbClr val="FFFFFF"/>
+            <a:srgbClr val="E7F1EC"/>
           </a:solidFill>
           <a:ln w="12700">
             <a:solidFill>
@@ -12149,20 +12489,40 @@
           </a:fontRef>
         </p:style>
         <p:txBody>
-          <a:bodyPr rtlCol="0" anchor="ctr" wrap="square" lIns="9144" rIns="9144" tIns="9144" bIns="9144"/>
+          <a:bodyPr rtlCol="0" anchor="ctr" wrap="square" lIns="146304" rIns="146304" tIns="109728" bIns="109728"/>
           <a:lstStyle/>
           <a:p>
             <a:pPr algn="ctr"/>
-            <a:r>
-              <a:rPr sz="1700"/>
-              <a:t>🔗</a:t>
-            </a:r>
-          </a:p>
-        </p:txBody>
-      </p:sp>
-      <p:sp>
-        <p:nvSpPr>
-          <p:cNvPr id="21" name="TextBox 20"/>
+          </a:p>
+        </p:txBody>
+      </p:sp>
+      <p:pic>
+        <p:nvPicPr>
+          <p:cNvPr id="24" name="Picture 23" descr="link.png"/>
+          <p:cNvPicPr>
+            <a:picLocks noChangeAspect="1"/>
+          </p:cNvPicPr>
+          <p:nvPr/>
+        </p:nvPicPr>
+        <p:blipFill>
+          <a:blip r:embed="rId5"/>
+          <a:stretch>
+            <a:fillRect/>
+          </a:stretch>
+        </p:blipFill>
+        <p:spPr>
+          <a:xfrm>
+            <a:off x="6723400" y="2224552"/>
+            <a:ext cx="342351" cy="342351"/>
+          </a:xfrm>
+          <a:prstGeom prst="rect">
+            <a:avLst/>
+          </a:prstGeom>
+        </p:spPr>
+      </p:pic>
+      <p:sp>
+        <p:nvSpPr>
+          <p:cNvPr id="25" name="TextBox 24"/>
           <p:cNvSpPr txBox="1"/>
           <p:nvPr/>
         </p:nvSpPr>
@@ -12226,7 +12586,7 @@
       </p:sp>
       <p:sp>
         <p:nvSpPr>
-          <p:cNvPr id="22" name="Rectangle 21"/>
+          <p:cNvPr id="26" name="Rectangle 25"/>
           <p:cNvSpPr/>
           <p:nvPr/>
         </p:nvSpPr>
@@ -12270,7 +12630,7 @@
       </p:sp>
       <p:sp>
         <p:nvSpPr>
-          <p:cNvPr id="23" name="TextBox 22"/>
+          <p:cNvPr id="27" name="TextBox 26"/>
           <p:cNvSpPr txBox="1"/>
           <p:nvPr/>
         </p:nvSpPr>
@@ -12313,7 +12673,7 @@
       </p:sp>
       <p:sp>
         <p:nvSpPr>
-          <p:cNvPr id="24" name="TextBox 23"/>
+          <p:cNvPr id="28" name="TextBox 27"/>
           <p:cNvSpPr txBox="1"/>
           <p:nvPr/>
         </p:nvSpPr>
@@ -12994,20 +13354,40 @@
           </a:fontRef>
         </p:style>
         <p:txBody>
-          <a:bodyPr rtlCol="0" anchor="ctr" wrap="square" lIns="9144" rIns="9144" tIns="9144" bIns="9144"/>
+          <a:bodyPr rtlCol="0" anchor="ctr" wrap="square" lIns="146304" rIns="146304" tIns="109728" bIns="109728"/>
           <a:lstStyle/>
           <a:p>
             <a:pPr algn="ctr"/>
-            <a:r>
-              <a:rPr sz="1700"/>
-              <a:t>🔗</a:t>
-            </a:r>
-          </a:p>
-        </p:txBody>
-      </p:sp>
-      <p:sp>
-        <p:nvSpPr>
-          <p:cNvPr id="7" name="TextBox 6"/>
+          </a:p>
+        </p:txBody>
+      </p:sp>
+      <p:pic>
+        <p:nvPicPr>
+          <p:cNvPr id="7" name="Picture 6" descr="link.png"/>
+          <p:cNvPicPr>
+            <a:picLocks noChangeAspect="1"/>
+          </p:cNvPicPr>
+          <p:nvPr/>
+        </p:nvPicPr>
+        <p:blipFill>
+          <a:blip r:embed="rId2"/>
+          <a:stretch>
+            <a:fillRect/>
+          </a:stretch>
+        </p:blipFill>
+        <p:spPr>
+          <a:xfrm>
+            <a:off x="935248" y="2352568"/>
+            <a:ext cx="342351" cy="342351"/>
+          </a:xfrm>
+          <a:prstGeom prst="rect">
+            <a:avLst/>
+          </a:prstGeom>
+        </p:spPr>
+      </p:pic>
+      <p:sp>
+        <p:nvSpPr>
+          <p:cNvPr id="8" name="TextBox 7"/>
           <p:cNvSpPr txBox="1"/>
           <p:nvPr/>
         </p:nvSpPr>
@@ -13041,7 +13421,7 @@
       </p:sp>
       <p:sp>
         <p:nvSpPr>
-          <p:cNvPr id="8" name="TextBox 7"/>
+          <p:cNvPr id="9" name="TextBox 8"/>
           <p:cNvSpPr txBox="1"/>
           <p:nvPr/>
         </p:nvSpPr>
@@ -13080,7 +13460,7 @@
       </p:sp>
       <p:sp>
         <p:nvSpPr>
-          <p:cNvPr id="9" name="Rounded Rectangle 8"/>
+          <p:cNvPr id="10" name="Rounded Rectangle 9"/>
           <p:cNvSpPr/>
           <p:nvPr/>
         </p:nvSpPr>
@@ -13128,7 +13508,7 @@
       </p:sp>
       <p:sp>
         <p:nvSpPr>
-          <p:cNvPr id="10" name="Rounded Rectangle 9"/>
+          <p:cNvPr id="11" name="Rounded Rectangle 10"/>
           <p:cNvSpPr/>
           <p:nvPr/>
         </p:nvSpPr>
@@ -13167,20 +13547,40 @@
           </a:fontRef>
         </p:style>
         <p:txBody>
-          <a:bodyPr rtlCol="0" anchor="ctr" wrap="square" lIns="9144" rIns="9144" tIns="9144" bIns="9144"/>
+          <a:bodyPr rtlCol="0" anchor="ctr" wrap="square" lIns="146304" rIns="146304" tIns="109728" bIns="109728"/>
           <a:lstStyle/>
           <a:p>
             <a:pPr algn="ctr"/>
-            <a:r>
-              <a:rPr sz="1700"/>
-              <a:t>🔁</a:t>
-            </a:r>
-          </a:p>
-        </p:txBody>
-      </p:sp>
-      <p:sp>
-        <p:nvSpPr>
-          <p:cNvPr id="11" name="TextBox 10"/>
+          </a:p>
+        </p:txBody>
+      </p:sp>
+      <p:pic>
+        <p:nvPicPr>
+          <p:cNvPr id="12" name="Picture 11" descr="refresh.png"/>
+          <p:cNvPicPr>
+            <a:picLocks noChangeAspect="1"/>
+          </p:cNvPicPr>
+          <p:nvPr/>
+        </p:nvPicPr>
+        <p:blipFill>
+          <a:blip r:embed="rId3"/>
+          <a:stretch>
+            <a:fillRect/>
+          </a:stretch>
+        </p:blipFill>
+        <p:spPr>
+          <a:xfrm>
+            <a:off x="4730008" y="2352568"/>
+            <a:ext cx="342351" cy="342351"/>
+          </a:xfrm>
+          <a:prstGeom prst="rect">
+            <a:avLst/>
+          </a:prstGeom>
+        </p:spPr>
+      </p:pic>
+      <p:sp>
+        <p:nvSpPr>
+          <p:cNvPr id="13" name="TextBox 12"/>
           <p:cNvSpPr txBox="1"/>
           <p:nvPr/>
         </p:nvSpPr>
@@ -13214,7 +13614,7 @@
       </p:sp>
       <p:sp>
         <p:nvSpPr>
-          <p:cNvPr id="12" name="TextBox 11"/>
+          <p:cNvPr id="14" name="TextBox 13"/>
           <p:cNvSpPr txBox="1"/>
           <p:nvPr/>
         </p:nvSpPr>
@@ -13253,7 +13653,7 @@
       </p:sp>
       <p:sp>
         <p:nvSpPr>
-          <p:cNvPr id="13" name="Rounded Rectangle 12"/>
+          <p:cNvPr id="15" name="Rounded Rectangle 14"/>
           <p:cNvSpPr/>
           <p:nvPr/>
         </p:nvSpPr>
@@ -13301,7 +13701,7 @@
       </p:sp>
       <p:sp>
         <p:nvSpPr>
-          <p:cNvPr id="14" name="Rounded Rectangle 13"/>
+          <p:cNvPr id="16" name="Rounded Rectangle 15"/>
           <p:cNvSpPr/>
           <p:nvPr/>
         </p:nvSpPr>
@@ -13340,20 +13740,40 @@
           </a:fontRef>
         </p:style>
         <p:txBody>
-          <a:bodyPr rtlCol="0" anchor="ctr" wrap="square" lIns="9144" rIns="9144" tIns="9144" bIns="9144"/>
+          <a:bodyPr rtlCol="0" anchor="ctr" wrap="square" lIns="146304" rIns="146304" tIns="109728" bIns="109728"/>
           <a:lstStyle/>
           <a:p>
             <a:pPr algn="ctr"/>
-            <a:r>
-              <a:rPr sz="1700"/>
-              <a:t>📥</a:t>
-            </a:r>
-          </a:p>
-        </p:txBody>
-      </p:sp>
-      <p:sp>
-        <p:nvSpPr>
-          <p:cNvPr id="15" name="TextBox 14"/>
+          </a:p>
+        </p:txBody>
+      </p:sp>
+      <p:pic>
+        <p:nvPicPr>
+          <p:cNvPr id="17" name="Picture 16" descr="inbox.png"/>
+          <p:cNvPicPr>
+            <a:picLocks noChangeAspect="1"/>
+          </p:cNvPicPr>
+          <p:nvPr/>
+        </p:nvPicPr>
+        <p:blipFill>
+          <a:blip r:embed="rId4"/>
+          <a:stretch>
+            <a:fillRect/>
+          </a:stretch>
+        </p:blipFill>
+        <p:spPr>
+          <a:xfrm>
+            <a:off x="8524768" y="2352568"/>
+            <a:ext cx="342351" cy="342351"/>
+          </a:xfrm>
+          <a:prstGeom prst="rect">
+            <a:avLst/>
+          </a:prstGeom>
+        </p:spPr>
+      </p:pic>
+      <p:sp>
+        <p:nvSpPr>
+          <p:cNvPr id="18" name="TextBox 17"/>
           <p:cNvSpPr txBox="1"/>
           <p:nvPr/>
         </p:nvSpPr>
@@ -13387,7 +13807,7 @@
       </p:sp>
       <p:sp>
         <p:nvSpPr>
-          <p:cNvPr id="16" name="TextBox 15"/>
+          <p:cNvPr id="19" name="TextBox 18"/>
           <p:cNvSpPr txBox="1"/>
           <p:nvPr/>
         </p:nvSpPr>
@@ -13426,7 +13846,7 @@
       </p:sp>
       <p:sp>
         <p:nvSpPr>
-          <p:cNvPr id="17" name="Rectangle 16"/>
+          <p:cNvPr id="20" name="Rectangle 19"/>
           <p:cNvSpPr/>
           <p:nvPr/>
         </p:nvSpPr>
@@ -13470,7 +13890,7 @@
       </p:sp>
       <p:sp>
         <p:nvSpPr>
-          <p:cNvPr id="18" name="TextBox 17"/>
+          <p:cNvPr id="21" name="TextBox 20"/>
           <p:cNvSpPr txBox="1"/>
           <p:nvPr/>
         </p:nvSpPr>
@@ -13513,7 +13933,7 @@
       </p:sp>
       <p:sp>
         <p:nvSpPr>
-          <p:cNvPr id="19" name="TextBox 18"/>
+          <p:cNvPr id="22" name="TextBox 21"/>
           <p:cNvSpPr txBox="1"/>
           <p:nvPr/>
         </p:nvSpPr>
@@ -13764,20 +14184,40 @@
           </a:fontRef>
         </p:style>
         <p:txBody>
-          <a:bodyPr rtlCol="0" anchor="ctr" wrap="square" lIns="9144" rIns="9144" tIns="9144" bIns="9144"/>
+          <a:bodyPr rtlCol="0" anchor="ctr" wrap="square" lIns="146304" rIns="146304" tIns="109728" bIns="109728"/>
           <a:lstStyle/>
           <a:p>
             <a:pPr algn="ctr"/>
-            <a:r>
-              <a:rPr sz="1700"/>
-              <a:t>💱</a:t>
-            </a:r>
-          </a:p>
-        </p:txBody>
-      </p:sp>
-      <p:sp>
-        <p:nvSpPr>
-          <p:cNvPr id="7" name="TextBox 6"/>
+          </a:p>
+        </p:txBody>
+      </p:sp>
+      <p:pic>
+        <p:nvPicPr>
+          <p:cNvPr id="7" name="Picture 6" descr="exchange.png"/>
+          <p:cNvPicPr>
+            <a:picLocks noChangeAspect="1"/>
+          </p:cNvPicPr>
+          <p:nvPr/>
+        </p:nvPicPr>
+        <p:blipFill>
+          <a:blip r:embed="rId2"/>
+          <a:stretch>
+            <a:fillRect/>
+          </a:stretch>
+        </p:blipFill>
+        <p:spPr>
+          <a:xfrm>
+            <a:off x="935248" y="2352568"/>
+            <a:ext cx="342351" cy="342351"/>
+          </a:xfrm>
+          <a:prstGeom prst="rect">
+            <a:avLst/>
+          </a:prstGeom>
+        </p:spPr>
+      </p:pic>
+      <p:sp>
+        <p:nvSpPr>
+          <p:cNvPr id="8" name="TextBox 7"/>
           <p:cNvSpPr txBox="1"/>
           <p:nvPr/>
         </p:nvSpPr>
@@ -13811,7 +14251,7 @@
       </p:sp>
       <p:sp>
         <p:nvSpPr>
-          <p:cNvPr id="8" name="TextBox 7"/>
+          <p:cNvPr id="9" name="TextBox 8"/>
           <p:cNvSpPr txBox="1"/>
           <p:nvPr/>
         </p:nvSpPr>
@@ -13850,7 +14290,7 @@
       </p:sp>
       <p:sp>
         <p:nvSpPr>
-          <p:cNvPr id="9" name="Rounded Rectangle 8"/>
+          <p:cNvPr id="10" name="Rounded Rectangle 9"/>
           <p:cNvSpPr/>
           <p:nvPr/>
         </p:nvSpPr>
@@ -13898,7 +14338,7 @@
       </p:sp>
       <p:sp>
         <p:nvSpPr>
-          <p:cNvPr id="10" name="Rounded Rectangle 9"/>
+          <p:cNvPr id="11" name="Rounded Rectangle 10"/>
           <p:cNvSpPr/>
           <p:nvPr/>
         </p:nvSpPr>
@@ -13937,20 +14377,40 @@
           </a:fontRef>
         </p:style>
         <p:txBody>
-          <a:bodyPr rtlCol="0" anchor="ctr" wrap="square" lIns="9144" rIns="9144" tIns="9144" bIns="9144"/>
+          <a:bodyPr rtlCol="0" anchor="ctr" wrap="square" lIns="146304" rIns="146304" tIns="109728" bIns="109728"/>
           <a:lstStyle/>
           <a:p>
             <a:pPr algn="ctr"/>
-            <a:r>
-              <a:rPr sz="1700"/>
-              <a:t>📊</a:t>
-            </a:r>
-          </a:p>
-        </p:txBody>
-      </p:sp>
-      <p:sp>
-        <p:nvSpPr>
-          <p:cNvPr id="11" name="TextBox 10"/>
+          </a:p>
+        </p:txBody>
+      </p:sp>
+      <p:pic>
+        <p:nvPicPr>
+          <p:cNvPr id="12" name="Picture 11" descr="chart.png"/>
+          <p:cNvPicPr>
+            <a:picLocks noChangeAspect="1"/>
+          </p:cNvPicPr>
+          <p:nvPr/>
+        </p:nvPicPr>
+        <p:blipFill>
+          <a:blip r:embed="rId3"/>
+          <a:stretch>
+            <a:fillRect/>
+          </a:stretch>
+        </p:blipFill>
+        <p:spPr>
+          <a:xfrm>
+            <a:off x="4730008" y="2352568"/>
+            <a:ext cx="342351" cy="342351"/>
+          </a:xfrm>
+          <a:prstGeom prst="rect">
+            <a:avLst/>
+          </a:prstGeom>
+        </p:spPr>
+      </p:pic>
+      <p:sp>
+        <p:nvSpPr>
+          <p:cNvPr id="13" name="TextBox 12"/>
           <p:cNvSpPr txBox="1"/>
           <p:nvPr/>
         </p:nvSpPr>
@@ -13984,7 +14444,7 @@
       </p:sp>
       <p:sp>
         <p:nvSpPr>
-          <p:cNvPr id="12" name="TextBox 11"/>
+          <p:cNvPr id="14" name="TextBox 13"/>
           <p:cNvSpPr txBox="1"/>
           <p:nvPr/>
         </p:nvSpPr>
@@ -14023,7 +14483,7 @@
       </p:sp>
       <p:sp>
         <p:nvSpPr>
-          <p:cNvPr id="13" name="Rounded Rectangle 12"/>
+          <p:cNvPr id="15" name="Rounded Rectangle 14"/>
           <p:cNvSpPr/>
           <p:nvPr/>
         </p:nvSpPr>
@@ -14071,7 +14531,7 @@
       </p:sp>
       <p:sp>
         <p:nvSpPr>
-          <p:cNvPr id="14" name="Rounded Rectangle 13"/>
+          <p:cNvPr id="16" name="Rounded Rectangle 15"/>
           <p:cNvSpPr/>
           <p:nvPr/>
         </p:nvSpPr>
@@ -14110,20 +14570,40 @@
           </a:fontRef>
         </p:style>
         <p:txBody>
-          <a:bodyPr rtlCol="0" anchor="ctr" wrap="square" lIns="9144" rIns="9144" tIns="9144" bIns="9144"/>
+          <a:bodyPr rtlCol="0" anchor="ctr" wrap="square" lIns="146304" rIns="146304" tIns="109728" bIns="109728"/>
           <a:lstStyle/>
           <a:p>
             <a:pPr algn="ctr"/>
-            <a:r>
-              <a:rPr sz="1700"/>
-              <a:t>🏦</a:t>
-            </a:r>
-          </a:p>
-        </p:txBody>
-      </p:sp>
-      <p:sp>
-        <p:nvSpPr>
-          <p:cNvPr id="15" name="TextBox 14"/>
+          </a:p>
+        </p:txBody>
+      </p:sp>
+      <p:pic>
+        <p:nvPicPr>
+          <p:cNvPr id="17" name="Picture 16" descr="bank.png"/>
+          <p:cNvPicPr>
+            <a:picLocks noChangeAspect="1"/>
+          </p:cNvPicPr>
+          <p:nvPr/>
+        </p:nvPicPr>
+        <p:blipFill>
+          <a:blip r:embed="rId4"/>
+          <a:stretch>
+            <a:fillRect/>
+          </a:stretch>
+        </p:blipFill>
+        <p:spPr>
+          <a:xfrm>
+            <a:off x="8524768" y="2352568"/>
+            <a:ext cx="342351" cy="342351"/>
+          </a:xfrm>
+          <a:prstGeom prst="rect">
+            <a:avLst/>
+          </a:prstGeom>
+        </p:spPr>
+      </p:pic>
+      <p:sp>
+        <p:nvSpPr>
+          <p:cNvPr id="18" name="TextBox 17"/>
           <p:cNvSpPr txBox="1"/>
           <p:nvPr/>
         </p:nvSpPr>
@@ -14157,7 +14637,7 @@
       </p:sp>
       <p:sp>
         <p:nvSpPr>
-          <p:cNvPr id="16" name="TextBox 15"/>
+          <p:cNvPr id="19" name="TextBox 18"/>
           <p:cNvSpPr txBox="1"/>
           <p:nvPr/>
         </p:nvSpPr>
@@ -14196,7 +14676,7 @@
       </p:sp>
       <p:sp>
         <p:nvSpPr>
-          <p:cNvPr id="17" name="Rectangle 16"/>
+          <p:cNvPr id="20" name="Rectangle 19"/>
           <p:cNvSpPr/>
           <p:nvPr/>
         </p:nvSpPr>
@@ -14240,7 +14720,7 @@
       </p:sp>
       <p:sp>
         <p:nvSpPr>
-          <p:cNvPr id="18" name="TextBox 17"/>
+          <p:cNvPr id="21" name="TextBox 20"/>
           <p:cNvSpPr txBox="1"/>
           <p:nvPr/>
         </p:nvSpPr>
@@ -14283,7 +14763,7 @@
       </p:sp>
       <p:sp>
         <p:nvSpPr>
-          <p:cNvPr id="19" name="TextBox 18"/>
+          <p:cNvPr id="22" name="TextBox 21"/>
           <p:cNvSpPr txBox="1"/>
           <p:nvPr/>
         </p:nvSpPr>
@@ -14534,20 +15014,40 @@
           </a:fontRef>
         </p:style>
         <p:txBody>
-          <a:bodyPr rtlCol="0" anchor="ctr" wrap="square" lIns="9144" rIns="9144" tIns="9144" bIns="9144"/>
+          <a:bodyPr rtlCol="0" anchor="ctr" wrap="square" lIns="146304" rIns="146304" tIns="109728" bIns="109728"/>
           <a:lstStyle/>
           <a:p>
             <a:pPr algn="ctr"/>
-            <a:r>
-              <a:rPr sz="1700"/>
-              <a:t>🛒</a:t>
-            </a:r>
-          </a:p>
-        </p:txBody>
-      </p:sp>
-      <p:sp>
-        <p:nvSpPr>
-          <p:cNvPr id="7" name="TextBox 6"/>
+          </a:p>
+        </p:txBody>
+      </p:sp>
+      <p:pic>
+        <p:nvPicPr>
+          <p:cNvPr id="7" name="Picture 6" descr="cart.png"/>
+          <p:cNvPicPr>
+            <a:picLocks noChangeAspect="1"/>
+          </p:cNvPicPr>
+          <p:nvPr/>
+        </p:nvPicPr>
+        <p:blipFill>
+          <a:blip r:embed="rId2"/>
+          <a:stretch>
+            <a:fillRect/>
+          </a:stretch>
+        </p:blipFill>
+        <p:spPr>
+          <a:xfrm>
+            <a:off x="3669304" y="2096536"/>
+            <a:ext cx="342351" cy="342351"/>
+          </a:xfrm>
+          <a:prstGeom prst="rect">
+            <a:avLst/>
+          </a:prstGeom>
+        </p:spPr>
+      </p:pic>
+      <p:sp>
+        <p:nvSpPr>
+          <p:cNvPr id="8" name="TextBox 7"/>
           <p:cNvSpPr txBox="1"/>
           <p:nvPr/>
         </p:nvSpPr>
@@ -14581,7 +15081,7 @@
       </p:sp>
       <p:sp>
         <p:nvSpPr>
-          <p:cNvPr id="8" name="TextBox 7"/>
+          <p:cNvPr id="9" name="TextBox 8"/>
           <p:cNvSpPr txBox="1"/>
           <p:nvPr/>
         </p:nvSpPr>
@@ -14620,7 +15120,7 @@
       </p:sp>
       <p:sp>
         <p:nvSpPr>
-          <p:cNvPr id="9" name="Rounded Rectangle 8"/>
+          <p:cNvPr id="10" name="Rounded Rectangle 9"/>
           <p:cNvSpPr/>
           <p:nvPr/>
         </p:nvSpPr>
@@ -14668,7 +15168,7 @@
       </p:sp>
       <p:sp>
         <p:nvSpPr>
-          <p:cNvPr id="10" name="Rounded Rectangle 9"/>
+          <p:cNvPr id="11" name="Rounded Rectangle 10"/>
           <p:cNvSpPr/>
           <p:nvPr/>
         </p:nvSpPr>
@@ -14707,20 +15207,40 @@
           </a:fontRef>
         </p:style>
         <p:txBody>
-          <a:bodyPr rtlCol="0" anchor="ctr" wrap="square" lIns="9144" rIns="9144" tIns="9144" bIns="9144"/>
+          <a:bodyPr rtlCol="0" anchor="ctr" wrap="square" lIns="146304" rIns="146304" tIns="109728" bIns="109728"/>
           <a:lstStyle/>
           <a:p>
             <a:pPr algn="ctr"/>
-            <a:r>
-              <a:rPr sz="1700"/>
-              <a:t>💬</a:t>
-            </a:r>
-          </a:p>
-        </p:txBody>
-      </p:sp>
-      <p:sp>
-        <p:nvSpPr>
-          <p:cNvPr id="11" name="TextBox 10"/>
+          </a:p>
+        </p:txBody>
+      </p:sp>
+      <p:pic>
+        <p:nvPicPr>
+          <p:cNvPr id="12" name="Picture 11" descr="chat.png"/>
+          <p:cNvPicPr>
+            <a:picLocks noChangeAspect="1"/>
+          </p:cNvPicPr>
+          <p:nvPr/>
+        </p:nvPicPr>
+        <p:blipFill>
+          <a:blip r:embed="rId3"/>
+          <a:stretch>
+            <a:fillRect/>
+          </a:stretch>
+        </p:blipFill>
+        <p:spPr>
+          <a:xfrm>
+            <a:off x="7464064" y="2096536"/>
+            <a:ext cx="342351" cy="342351"/>
+          </a:xfrm>
+          <a:prstGeom prst="rect">
+            <a:avLst/>
+          </a:prstGeom>
+        </p:spPr>
+      </p:pic>
+      <p:sp>
+        <p:nvSpPr>
+          <p:cNvPr id="13" name="TextBox 12"/>
           <p:cNvSpPr txBox="1"/>
           <p:nvPr/>
         </p:nvSpPr>
@@ -14754,7 +15274,7 @@
       </p:sp>
       <p:sp>
         <p:nvSpPr>
-          <p:cNvPr id="12" name="TextBox 11"/>
+          <p:cNvPr id="14" name="TextBox 13"/>
           <p:cNvSpPr txBox="1"/>
           <p:nvPr/>
         </p:nvSpPr>
@@ -14793,7 +15313,7 @@
       </p:sp>
       <p:sp>
         <p:nvSpPr>
-          <p:cNvPr id="13" name="Rounded Rectangle 12"/>
+          <p:cNvPr id="15" name="Rounded Rectangle 14"/>
           <p:cNvSpPr/>
           <p:nvPr/>
         </p:nvSpPr>
@@ -14841,7 +15361,7 @@
       </p:sp>
       <p:sp>
         <p:nvSpPr>
-          <p:cNvPr id="14" name="Rounded Rectangle 13"/>
+          <p:cNvPr id="16" name="Rounded Rectangle 15"/>
           <p:cNvSpPr/>
           <p:nvPr/>
         </p:nvSpPr>
@@ -14880,20 +15400,40 @@
           </a:fontRef>
         </p:style>
         <p:txBody>
-          <a:bodyPr rtlCol="0" anchor="ctr" wrap="square" lIns="9144" rIns="9144" tIns="9144" bIns="9144"/>
+          <a:bodyPr rtlCol="0" anchor="ctr" wrap="square" lIns="146304" rIns="146304" tIns="109728" bIns="109728"/>
           <a:lstStyle/>
           <a:p>
             <a:pPr algn="ctr"/>
-            <a:r>
-              <a:rPr sz="1700"/>
-              <a:t>📈</a:t>
-            </a:r>
-          </a:p>
-        </p:txBody>
-      </p:sp>
-      <p:sp>
-        <p:nvSpPr>
-          <p:cNvPr id="15" name="TextBox 14"/>
+          </a:p>
+        </p:txBody>
+      </p:sp>
+      <p:pic>
+        <p:nvPicPr>
+          <p:cNvPr id="17" name="Picture 16" descr="trend.png"/>
+          <p:cNvPicPr>
+            <a:picLocks noChangeAspect="1"/>
+          </p:cNvPicPr>
+          <p:nvPr/>
+        </p:nvPicPr>
+        <p:blipFill>
+          <a:blip r:embed="rId4"/>
+          <a:stretch>
+            <a:fillRect/>
+          </a:stretch>
+        </p:blipFill>
+        <p:spPr>
+          <a:xfrm>
+            <a:off x="11258824" y="2096536"/>
+            <a:ext cx="342351" cy="342351"/>
+          </a:xfrm>
+          <a:prstGeom prst="rect">
+            <a:avLst/>
+          </a:prstGeom>
+        </p:spPr>
+      </p:pic>
+      <p:sp>
+        <p:nvSpPr>
+          <p:cNvPr id="18" name="TextBox 17"/>
           <p:cNvSpPr txBox="1"/>
           <p:nvPr/>
         </p:nvSpPr>
@@ -14927,7 +15467,7 @@
       </p:sp>
       <p:sp>
         <p:nvSpPr>
-          <p:cNvPr id="16" name="TextBox 15"/>
+          <p:cNvPr id="19" name="TextBox 18"/>
           <p:cNvSpPr txBox="1"/>
           <p:nvPr/>
         </p:nvSpPr>
@@ -14966,7 +15506,7 @@
       </p:sp>
       <p:sp>
         <p:nvSpPr>
-          <p:cNvPr id="17" name="Rounded Rectangle 16"/>
+          <p:cNvPr id="20" name="Rounded Rectangle 19"/>
           <p:cNvSpPr/>
           <p:nvPr/>
         </p:nvSpPr>
@@ -15014,7 +15554,7 @@
       </p:sp>
       <p:sp>
         <p:nvSpPr>
-          <p:cNvPr id="18" name="Rounded Rectangle 17"/>
+          <p:cNvPr id="21" name="Rounded Rectangle 20"/>
           <p:cNvSpPr/>
           <p:nvPr/>
         </p:nvSpPr>
@@ -15053,20 +15593,40 @@
           </a:fontRef>
         </p:style>
         <p:txBody>
-          <a:bodyPr rtlCol="0" anchor="ctr" wrap="square" lIns="9144" rIns="9144" tIns="9144" bIns="9144"/>
+          <a:bodyPr rtlCol="0" anchor="ctr" wrap="square" lIns="146304" rIns="146304" tIns="109728" bIns="109728"/>
           <a:lstStyle/>
           <a:p>
             <a:pPr algn="ctr"/>
-            <a:r>
-              <a:rPr sz="1700"/>
-              <a:t>⏱️</a:t>
-            </a:r>
-          </a:p>
-        </p:txBody>
-      </p:sp>
-      <p:sp>
-        <p:nvSpPr>
-          <p:cNvPr id="19" name="TextBox 18"/>
+          </a:p>
+        </p:txBody>
+      </p:sp>
+      <p:pic>
+        <p:nvPicPr>
+          <p:cNvPr id="22" name="Picture 21" descr="clock.png"/>
+          <p:cNvPicPr>
+            <a:picLocks noChangeAspect="1"/>
+          </p:cNvPicPr>
+          <p:nvPr/>
+        </p:nvPicPr>
+        <p:blipFill>
+          <a:blip r:embed="rId5"/>
+          <a:stretch>
+            <a:fillRect/>
+          </a:stretch>
+        </p:blipFill>
+        <p:spPr>
+          <a:xfrm>
+            <a:off x="3669304" y="4272808"/>
+            <a:ext cx="342351" cy="342351"/>
+          </a:xfrm>
+          <a:prstGeom prst="rect">
+            <a:avLst/>
+          </a:prstGeom>
+        </p:spPr>
+      </p:pic>
+      <p:sp>
+        <p:nvSpPr>
+          <p:cNvPr id="23" name="TextBox 22"/>
           <p:cNvSpPr txBox="1"/>
           <p:nvPr/>
         </p:nvSpPr>
@@ -15100,7 +15660,7 @@
       </p:sp>
       <p:sp>
         <p:nvSpPr>
-          <p:cNvPr id="20" name="TextBox 19"/>
+          <p:cNvPr id="24" name="TextBox 23"/>
           <p:cNvSpPr txBox="1"/>
           <p:nvPr/>
         </p:nvSpPr>
@@ -15139,7 +15699,7 @@
       </p:sp>
       <p:sp>
         <p:nvSpPr>
-          <p:cNvPr id="21" name="Rounded Rectangle 20"/>
+          <p:cNvPr id="25" name="Rounded Rectangle 24"/>
           <p:cNvSpPr/>
           <p:nvPr/>
         </p:nvSpPr>
@@ -15187,7 +15747,7 @@
       </p:sp>
       <p:sp>
         <p:nvSpPr>
-          <p:cNvPr id="22" name="Rounded Rectangle 21"/>
+          <p:cNvPr id="26" name="Rounded Rectangle 25"/>
           <p:cNvSpPr/>
           <p:nvPr/>
         </p:nvSpPr>
@@ -15226,20 +15786,40 @@
           </a:fontRef>
         </p:style>
         <p:txBody>
-          <a:bodyPr rtlCol="0" anchor="ctr" wrap="square" lIns="9144" rIns="9144" tIns="9144" bIns="9144"/>
+          <a:bodyPr rtlCol="0" anchor="ctr" wrap="square" lIns="146304" rIns="146304" tIns="109728" bIns="109728"/>
           <a:lstStyle/>
           <a:p>
             <a:pPr algn="ctr"/>
-            <a:r>
-              <a:rPr sz="1700"/>
-              <a:t>🏦</a:t>
-            </a:r>
-          </a:p>
-        </p:txBody>
-      </p:sp>
-      <p:sp>
-        <p:nvSpPr>
-          <p:cNvPr id="23" name="TextBox 22"/>
+          </a:p>
+        </p:txBody>
+      </p:sp>
+      <p:pic>
+        <p:nvPicPr>
+          <p:cNvPr id="27" name="Picture 26" descr="bank.png"/>
+          <p:cNvPicPr>
+            <a:picLocks noChangeAspect="1"/>
+          </p:cNvPicPr>
+          <p:nvPr/>
+        </p:nvPicPr>
+        <p:blipFill>
+          <a:blip r:embed="rId6"/>
+          <a:stretch>
+            <a:fillRect/>
+          </a:stretch>
+        </p:blipFill>
+        <p:spPr>
+          <a:xfrm>
+            <a:off x="7464064" y="4272808"/>
+            <a:ext cx="342351" cy="342351"/>
+          </a:xfrm>
+          <a:prstGeom prst="rect">
+            <a:avLst/>
+          </a:prstGeom>
+        </p:spPr>
+      </p:pic>
+      <p:sp>
+        <p:nvSpPr>
+          <p:cNvPr id="28" name="TextBox 27"/>
           <p:cNvSpPr txBox="1"/>
           <p:nvPr/>
         </p:nvSpPr>
@@ -15273,7 +15853,7 @@
       </p:sp>
       <p:sp>
         <p:nvSpPr>
-          <p:cNvPr id="24" name="TextBox 23"/>
+          <p:cNvPr id="29" name="TextBox 28"/>
           <p:cNvSpPr txBox="1"/>
           <p:nvPr/>
         </p:nvSpPr>
@@ -15312,7 +15892,7 @@
       </p:sp>
       <p:sp>
         <p:nvSpPr>
-          <p:cNvPr id="25" name="Rounded Rectangle 24"/>
+          <p:cNvPr id="30" name="Rounded Rectangle 29"/>
           <p:cNvSpPr/>
           <p:nvPr/>
         </p:nvSpPr>
@@ -15360,7 +15940,7 @@
       </p:sp>
       <p:sp>
         <p:nvSpPr>
-          <p:cNvPr id="26" name="Rounded Rectangle 25"/>
+          <p:cNvPr id="31" name="Rounded Rectangle 30"/>
           <p:cNvSpPr/>
           <p:nvPr/>
         </p:nvSpPr>
@@ -15399,20 +15979,40 @@
           </a:fontRef>
         </p:style>
         <p:txBody>
-          <a:bodyPr rtlCol="0" anchor="ctr" wrap="square" lIns="9144" rIns="9144" tIns="9144" bIns="9144"/>
+          <a:bodyPr rtlCol="0" anchor="ctr" wrap="square" lIns="146304" rIns="146304" tIns="109728" bIns="109728"/>
           <a:lstStyle/>
           <a:p>
             <a:pPr algn="ctr"/>
-            <a:r>
-              <a:rPr sz="1700"/>
-              <a:t>🎯</a:t>
-            </a:r>
-          </a:p>
-        </p:txBody>
-      </p:sp>
-      <p:sp>
-        <p:nvSpPr>
-          <p:cNvPr id="27" name="TextBox 26"/>
+          </a:p>
+        </p:txBody>
+      </p:sp>
+      <p:pic>
+        <p:nvPicPr>
+          <p:cNvPr id="32" name="Picture 31" descr="target.png"/>
+          <p:cNvPicPr>
+            <a:picLocks noChangeAspect="1"/>
+          </p:cNvPicPr>
+          <p:nvPr/>
+        </p:nvPicPr>
+        <p:blipFill>
+          <a:blip r:embed="rId7"/>
+          <a:stretch>
+            <a:fillRect/>
+          </a:stretch>
+        </p:blipFill>
+        <p:spPr>
+          <a:xfrm>
+            <a:off x="11258824" y="4272808"/>
+            <a:ext cx="342351" cy="342351"/>
+          </a:xfrm>
+          <a:prstGeom prst="rect">
+            <a:avLst/>
+          </a:prstGeom>
+        </p:spPr>
+      </p:pic>
+      <p:sp>
+        <p:nvSpPr>
+          <p:cNvPr id="33" name="TextBox 32"/>
           <p:cNvSpPr txBox="1"/>
           <p:nvPr/>
         </p:nvSpPr>
@@ -15446,7 +16046,7 @@
       </p:sp>
       <p:sp>
         <p:nvSpPr>
-          <p:cNvPr id="28" name="TextBox 27"/>
+          <p:cNvPr id="34" name="TextBox 33"/>
           <p:cNvSpPr txBox="1"/>
           <p:nvPr/>
         </p:nvSpPr>
@@ -15485,7 +16085,7 @@
       </p:sp>
       <p:sp>
         <p:nvSpPr>
-          <p:cNvPr id="29" name="Rectangle 28"/>
+          <p:cNvPr id="35" name="Rectangle 34"/>
           <p:cNvSpPr/>
           <p:nvPr/>
         </p:nvSpPr>
@@ -15529,7 +16129,7 @@
       </p:sp>
       <p:sp>
         <p:nvSpPr>
-          <p:cNvPr id="30" name="TextBox 29"/>
+          <p:cNvPr id="36" name="TextBox 35"/>
           <p:cNvSpPr txBox="1"/>
           <p:nvPr/>
         </p:nvSpPr>
@@ -15572,7 +16172,7 @@
       </p:sp>
       <p:sp>
         <p:nvSpPr>
-          <p:cNvPr id="31" name="TextBox 30"/>
+          <p:cNvPr id="37" name="TextBox 36"/>
           <p:cNvSpPr txBox="1"/>
           <p:nvPr/>
         </p:nvSpPr>
@@ -17607,20 +18207,40 @@
           </a:fontRef>
         </p:style>
         <p:txBody>
-          <a:bodyPr rtlCol="0" anchor="ctr" wrap="square" lIns="9144" rIns="9144" tIns="9144" bIns="9144"/>
+          <a:bodyPr rtlCol="0" anchor="ctr" wrap="square" lIns="146304" rIns="146304" tIns="109728" bIns="109728"/>
           <a:lstStyle/>
           <a:p>
             <a:pPr algn="ctr"/>
-            <a:r>
-              <a:rPr sz="1700"/>
-              <a:t>📦</a:t>
-            </a:r>
-          </a:p>
-        </p:txBody>
-      </p:sp>
-      <p:sp>
-        <p:nvSpPr>
-          <p:cNvPr id="7" name="TextBox 6"/>
+          </a:p>
+        </p:txBody>
+      </p:sp>
+      <p:pic>
+        <p:nvPicPr>
+          <p:cNvPr id="7" name="Picture 6" descr="box.png"/>
+          <p:cNvPicPr>
+            <a:picLocks noChangeAspect="1"/>
+          </p:cNvPicPr>
+          <p:nvPr/>
+        </p:nvPicPr>
+        <p:blipFill>
+          <a:blip r:embed="rId2"/>
+          <a:stretch>
+            <a:fillRect/>
+          </a:stretch>
+        </p:blipFill>
+        <p:spPr>
+          <a:xfrm>
+            <a:off x="907816" y="2142256"/>
+            <a:ext cx="342351" cy="342351"/>
+          </a:xfrm>
+          <a:prstGeom prst="rect">
+            <a:avLst/>
+          </a:prstGeom>
+        </p:spPr>
+      </p:pic>
+      <p:sp>
+        <p:nvSpPr>
+          <p:cNvPr id="8" name="TextBox 7"/>
           <p:cNvSpPr txBox="1"/>
           <p:nvPr/>
         </p:nvSpPr>
@@ -17659,7 +18279,7 @@
       </p:sp>
       <p:sp>
         <p:nvSpPr>
-          <p:cNvPr id="8" name="TextBox 7"/>
+          <p:cNvPr id="9" name="TextBox 8"/>
           <p:cNvSpPr txBox="1"/>
           <p:nvPr/>
         </p:nvSpPr>
@@ -17698,7 +18318,7 @@
       </p:sp>
       <p:sp>
         <p:nvSpPr>
-          <p:cNvPr id="9" name="Rounded Rectangle 8"/>
+          <p:cNvPr id="10" name="Rounded Rectangle 9"/>
           <p:cNvSpPr/>
           <p:nvPr/>
         </p:nvSpPr>
@@ -17746,7 +18366,7 @@
       </p:sp>
       <p:sp>
         <p:nvSpPr>
-          <p:cNvPr id="10" name="Rounded Rectangle 9"/>
+          <p:cNvPr id="11" name="Rounded Rectangle 10"/>
           <p:cNvSpPr/>
           <p:nvPr/>
         </p:nvSpPr>
@@ -17785,20 +18405,40 @@
           </a:fontRef>
         </p:style>
         <p:txBody>
-          <a:bodyPr rtlCol="0" anchor="ctr" wrap="square" lIns="9144" rIns="9144" tIns="9144" bIns="9144"/>
+          <a:bodyPr rtlCol="0" anchor="ctr" wrap="square" lIns="146304" rIns="146304" tIns="109728" bIns="109728"/>
           <a:lstStyle/>
           <a:p>
             <a:pPr algn="ctr"/>
-            <a:r>
-              <a:rPr sz="1700"/>
-              <a:t>🏗️</a:t>
-            </a:r>
-          </a:p>
-        </p:txBody>
-      </p:sp>
-      <p:sp>
-        <p:nvSpPr>
-          <p:cNvPr id="11" name="TextBox 10"/>
+          </a:p>
+        </p:txBody>
+      </p:sp>
+      <p:pic>
+        <p:nvPicPr>
+          <p:cNvPr id="12" name="Picture 11" descr="layers.png"/>
+          <p:cNvPicPr>
+            <a:picLocks noChangeAspect="1"/>
+          </p:cNvPicPr>
+          <p:nvPr/>
+        </p:nvPicPr>
+        <p:blipFill>
+          <a:blip r:embed="rId3"/>
+          <a:stretch>
+            <a:fillRect/>
+          </a:stretch>
+        </p:blipFill>
+        <p:spPr>
+          <a:xfrm>
+            <a:off x="3212104" y="2142256"/>
+            <a:ext cx="342351" cy="342351"/>
+          </a:xfrm>
+          <a:prstGeom prst="rect">
+            <a:avLst/>
+          </a:prstGeom>
+        </p:spPr>
+      </p:pic>
+      <p:sp>
+        <p:nvSpPr>
+          <p:cNvPr id="13" name="TextBox 12"/>
           <p:cNvSpPr txBox="1"/>
           <p:nvPr/>
         </p:nvSpPr>
@@ -17837,7 +18477,7 @@
       </p:sp>
       <p:sp>
         <p:nvSpPr>
-          <p:cNvPr id="12" name="TextBox 11"/>
+          <p:cNvPr id="14" name="TextBox 13"/>
           <p:cNvSpPr txBox="1"/>
           <p:nvPr/>
         </p:nvSpPr>
@@ -17876,7 +18516,7 @@
       </p:sp>
       <p:sp>
         <p:nvSpPr>
-          <p:cNvPr id="13" name="Rounded Rectangle 12"/>
+          <p:cNvPr id="15" name="Rounded Rectangle 14"/>
           <p:cNvSpPr/>
           <p:nvPr/>
         </p:nvSpPr>
@@ -17924,7 +18564,7 @@
       </p:sp>
       <p:sp>
         <p:nvSpPr>
-          <p:cNvPr id="14" name="Rounded Rectangle 13"/>
+          <p:cNvPr id="16" name="Rounded Rectangle 15"/>
           <p:cNvSpPr/>
           <p:nvPr/>
         </p:nvSpPr>
@@ -17963,20 +18603,40 @@
           </a:fontRef>
         </p:style>
         <p:txBody>
-          <a:bodyPr rtlCol="0" anchor="ctr" wrap="square" lIns="9144" rIns="9144" tIns="9144" bIns="9144"/>
+          <a:bodyPr rtlCol="0" anchor="ctr" wrap="square" lIns="146304" rIns="146304" tIns="109728" bIns="109728"/>
           <a:lstStyle/>
           <a:p>
             <a:pPr algn="ctr"/>
-            <a:r>
-              <a:rPr sz="1700"/>
-              <a:t>📜</a:t>
-            </a:r>
-          </a:p>
-        </p:txBody>
-      </p:sp>
-      <p:sp>
-        <p:nvSpPr>
-          <p:cNvPr id="15" name="TextBox 14"/>
+          </a:p>
+        </p:txBody>
+      </p:sp>
+      <p:pic>
+        <p:nvPicPr>
+          <p:cNvPr id="17" name="Picture 16" descr="doc.png"/>
+          <p:cNvPicPr>
+            <a:picLocks noChangeAspect="1"/>
+          </p:cNvPicPr>
+          <p:nvPr/>
+        </p:nvPicPr>
+        <p:blipFill>
+          <a:blip r:embed="rId4"/>
+          <a:stretch>
+            <a:fillRect/>
+          </a:stretch>
+        </p:blipFill>
+        <p:spPr>
+          <a:xfrm>
+            <a:off x="5516392" y="2142256"/>
+            <a:ext cx="342351" cy="342351"/>
+          </a:xfrm>
+          <a:prstGeom prst="rect">
+            <a:avLst/>
+          </a:prstGeom>
+        </p:spPr>
+      </p:pic>
+      <p:sp>
+        <p:nvSpPr>
+          <p:cNvPr id="18" name="TextBox 17"/>
           <p:cNvSpPr txBox="1"/>
           <p:nvPr/>
         </p:nvSpPr>
@@ -18015,7 +18675,7 @@
       </p:sp>
       <p:sp>
         <p:nvSpPr>
-          <p:cNvPr id="16" name="TextBox 15"/>
+          <p:cNvPr id="19" name="TextBox 18"/>
           <p:cNvSpPr txBox="1"/>
           <p:nvPr/>
         </p:nvSpPr>
@@ -18054,7 +18714,7 @@
       </p:sp>
       <p:sp>
         <p:nvSpPr>
-          <p:cNvPr id="17" name="Rounded Rectangle 16"/>
+          <p:cNvPr id="20" name="Rounded Rectangle 19"/>
           <p:cNvSpPr/>
           <p:nvPr/>
         </p:nvSpPr>
@@ -18102,7 +18762,7 @@
       </p:sp>
       <p:sp>
         <p:nvSpPr>
-          <p:cNvPr id="18" name="Rounded Rectangle 17"/>
+          <p:cNvPr id="21" name="Rounded Rectangle 20"/>
           <p:cNvSpPr/>
           <p:nvPr/>
         </p:nvSpPr>
@@ -18141,20 +18801,40 @@
           </a:fontRef>
         </p:style>
         <p:txBody>
-          <a:bodyPr rtlCol="0" anchor="ctr" wrap="square" lIns="9144" rIns="9144" tIns="9144" bIns="9144"/>
+          <a:bodyPr rtlCol="0" anchor="ctr" wrap="square" lIns="146304" rIns="146304" tIns="109728" bIns="109728"/>
           <a:lstStyle/>
           <a:p>
             <a:pPr algn="ctr"/>
-            <a:r>
-              <a:rPr sz="1700"/>
-              <a:t>💸</a:t>
-            </a:r>
-          </a:p>
-        </p:txBody>
-      </p:sp>
-      <p:sp>
-        <p:nvSpPr>
-          <p:cNvPr id="19" name="TextBox 18"/>
+          </a:p>
+        </p:txBody>
+      </p:sp>
+      <p:pic>
+        <p:nvPicPr>
+          <p:cNvPr id="22" name="Picture 21" descr="dbcoin.png"/>
+          <p:cNvPicPr>
+            <a:picLocks noChangeAspect="1"/>
+          </p:cNvPicPr>
+          <p:nvPr/>
+        </p:nvPicPr>
+        <p:blipFill>
+          <a:blip r:embed="rId5"/>
+          <a:stretch>
+            <a:fillRect/>
+          </a:stretch>
+        </p:blipFill>
+        <p:spPr>
+          <a:xfrm>
+            <a:off x="7820680" y="2142256"/>
+            <a:ext cx="342351" cy="342351"/>
+          </a:xfrm>
+          <a:prstGeom prst="rect">
+            <a:avLst/>
+          </a:prstGeom>
+        </p:spPr>
+      </p:pic>
+      <p:sp>
+        <p:nvSpPr>
+          <p:cNvPr id="23" name="TextBox 22"/>
           <p:cNvSpPr txBox="1"/>
           <p:nvPr/>
         </p:nvSpPr>
@@ -18193,7 +18873,7 @@
       </p:sp>
       <p:sp>
         <p:nvSpPr>
-          <p:cNvPr id="20" name="TextBox 19"/>
+          <p:cNvPr id="24" name="TextBox 23"/>
           <p:cNvSpPr txBox="1"/>
           <p:nvPr/>
         </p:nvSpPr>
@@ -18232,7 +18912,7 @@
       </p:sp>
       <p:sp>
         <p:nvSpPr>
-          <p:cNvPr id="21" name="Rounded Rectangle 20"/>
+          <p:cNvPr id="25" name="Rounded Rectangle 24"/>
           <p:cNvSpPr/>
           <p:nvPr/>
         </p:nvSpPr>
@@ -18280,7 +18960,7 @@
       </p:sp>
       <p:sp>
         <p:nvSpPr>
-          <p:cNvPr id="22" name="Rounded Rectangle 21"/>
+          <p:cNvPr id="26" name="Rounded Rectangle 25"/>
           <p:cNvSpPr/>
           <p:nvPr/>
         </p:nvSpPr>
@@ -18319,20 +18999,40 @@
           </a:fontRef>
         </p:style>
         <p:txBody>
-          <a:bodyPr rtlCol="0" anchor="ctr" wrap="square" lIns="9144" rIns="9144" tIns="9144" bIns="9144"/>
+          <a:bodyPr rtlCol="0" anchor="ctr" wrap="square" lIns="146304" rIns="146304" tIns="109728" bIns="109728"/>
           <a:lstStyle/>
           <a:p>
             <a:pPr algn="ctr"/>
-            <a:r>
-              <a:rPr sz="1700"/>
-              <a:t>⚡</a:t>
-            </a:r>
-          </a:p>
-        </p:txBody>
-      </p:sp>
-      <p:sp>
-        <p:nvSpPr>
-          <p:cNvPr id="23" name="TextBox 22"/>
+          </a:p>
+        </p:txBody>
+      </p:sp>
+      <p:pic>
+        <p:nvPicPr>
+          <p:cNvPr id="27" name="Picture 26" descr="bolt.png"/>
+          <p:cNvPicPr>
+            <a:picLocks noChangeAspect="1"/>
+          </p:cNvPicPr>
+          <p:nvPr/>
+        </p:nvPicPr>
+        <p:blipFill>
+          <a:blip r:embed="rId6"/>
+          <a:stretch>
+            <a:fillRect/>
+          </a:stretch>
+        </p:blipFill>
+        <p:spPr>
+          <a:xfrm>
+            <a:off x="10124968" y="2142256"/>
+            <a:ext cx="342351" cy="342351"/>
+          </a:xfrm>
+          <a:prstGeom prst="rect">
+            <a:avLst/>
+          </a:prstGeom>
+        </p:spPr>
+      </p:pic>
+      <p:sp>
+        <p:nvSpPr>
+          <p:cNvPr id="28" name="TextBox 27"/>
           <p:cNvSpPr txBox="1"/>
           <p:nvPr/>
         </p:nvSpPr>
@@ -18371,7 +19071,7 @@
       </p:sp>
       <p:sp>
         <p:nvSpPr>
-          <p:cNvPr id="24" name="TextBox 23"/>
+          <p:cNvPr id="29" name="TextBox 28"/>
           <p:cNvSpPr txBox="1"/>
           <p:nvPr/>
         </p:nvSpPr>
@@ -18410,7 +19110,7 @@
       </p:sp>
       <p:sp>
         <p:nvSpPr>
-          <p:cNvPr id="25" name="Rectangle 24"/>
+          <p:cNvPr id="30" name="Rectangle 29"/>
           <p:cNvSpPr/>
           <p:nvPr/>
         </p:nvSpPr>
@@ -18454,7 +19154,7 @@
       </p:sp>
       <p:sp>
         <p:nvSpPr>
-          <p:cNvPr id="26" name="TextBox 25"/>
+          <p:cNvPr id="31" name="TextBox 30"/>
           <p:cNvSpPr txBox="1"/>
           <p:nvPr/>
         </p:nvSpPr>
@@ -18497,7 +19197,7 @@
       </p:sp>
       <p:sp>
         <p:nvSpPr>
-          <p:cNvPr id="27" name="TextBox 26"/>
+          <p:cNvPr id="32" name="TextBox 31"/>
           <p:cNvSpPr txBox="1"/>
           <p:nvPr/>
         </p:nvSpPr>
@@ -19143,20 +19843,40 @@
           </a:fontRef>
         </p:style>
         <p:txBody>
-          <a:bodyPr rtlCol="0" anchor="ctr" wrap="square" lIns="9144" rIns="9144" tIns="9144" bIns="9144"/>
+          <a:bodyPr rtlCol="0" anchor="ctr" wrap="square" lIns="146304" rIns="146304" tIns="109728" bIns="109728"/>
           <a:lstStyle/>
           <a:p>
             <a:pPr algn="ctr"/>
-            <a:r>
-              <a:rPr sz="1400"/>
-              <a:t>🪪</a:t>
-            </a:r>
-          </a:p>
-        </p:txBody>
-      </p:sp>
-      <p:sp>
-        <p:nvSpPr>
-          <p:cNvPr id="9" name="TextBox 8"/>
+          </a:p>
+        </p:txBody>
+      </p:sp>
+      <p:pic>
+        <p:nvPicPr>
+          <p:cNvPr id="9" name="Picture 8" descr="idcard.png"/>
+          <p:cNvPicPr>
+            <a:picLocks noChangeAspect="1"/>
+          </p:cNvPicPr>
+          <p:nvPr/>
+        </p:nvPicPr>
+        <p:blipFill>
+          <a:blip r:embed="rId3"/>
+          <a:stretch>
+            <a:fillRect/>
+          </a:stretch>
+        </p:blipFill>
+        <p:spPr>
+          <a:xfrm>
+            <a:off x="879287" y="4427159"/>
+            <a:ext cx="289681" cy="289681"/>
+          </a:xfrm>
+          <a:prstGeom prst="rect">
+            <a:avLst/>
+          </a:prstGeom>
+        </p:spPr>
+      </p:pic>
+      <p:sp>
+        <p:nvSpPr>
+          <p:cNvPr id="10" name="TextBox 9"/>
           <p:cNvSpPr txBox="1"/>
           <p:nvPr/>
         </p:nvSpPr>
@@ -19190,7 +19910,7 @@
       </p:sp>
       <p:sp>
         <p:nvSpPr>
-          <p:cNvPr id="10" name="TextBox 9"/>
+          <p:cNvPr id="11" name="TextBox 10"/>
           <p:cNvSpPr txBox="1"/>
           <p:nvPr/>
         </p:nvSpPr>
@@ -19229,7 +19949,7 @@
       </p:sp>
       <p:sp>
         <p:nvSpPr>
-          <p:cNvPr id="11" name="Rounded Rectangle 10"/>
+          <p:cNvPr id="12" name="Rounded Rectangle 11"/>
           <p:cNvSpPr/>
           <p:nvPr/>
         </p:nvSpPr>
@@ -19277,7 +19997,7 @@
       </p:sp>
       <p:sp>
         <p:nvSpPr>
-          <p:cNvPr id="12" name="Rounded Rectangle 11"/>
+          <p:cNvPr id="13" name="Rounded Rectangle 12"/>
           <p:cNvSpPr/>
           <p:nvPr/>
         </p:nvSpPr>
@@ -19316,20 +20036,40 @@
           </a:fontRef>
         </p:style>
         <p:txBody>
-          <a:bodyPr rtlCol="0" anchor="ctr" wrap="square" lIns="9144" rIns="9144" tIns="9144" bIns="9144"/>
+          <a:bodyPr rtlCol="0" anchor="ctr" wrap="square" lIns="146304" rIns="146304" tIns="109728" bIns="109728"/>
           <a:lstStyle/>
           <a:p>
             <a:pPr algn="ctr"/>
-            <a:r>
-              <a:rPr sz="1400"/>
-              <a:t>🧾</a:t>
-            </a:r>
-          </a:p>
-        </p:txBody>
-      </p:sp>
-      <p:sp>
-        <p:nvSpPr>
-          <p:cNvPr id="13" name="TextBox 12"/>
+          </a:p>
+        </p:txBody>
+      </p:sp>
+      <p:pic>
+        <p:nvPicPr>
+          <p:cNvPr id="14" name="Picture 13" descr="receipt.png"/>
+          <p:cNvPicPr>
+            <a:picLocks noChangeAspect="1"/>
+          </p:cNvPicPr>
+          <p:nvPr/>
+        </p:nvPicPr>
+        <p:blipFill>
+          <a:blip r:embed="rId4"/>
+          <a:stretch>
+            <a:fillRect/>
+          </a:stretch>
+        </p:blipFill>
+        <p:spPr>
+          <a:xfrm>
+            <a:off x="3732215" y="4427159"/>
+            <a:ext cx="289681" cy="289681"/>
+          </a:xfrm>
+          <a:prstGeom prst="rect">
+            <a:avLst/>
+          </a:prstGeom>
+        </p:spPr>
+      </p:pic>
+      <p:sp>
+        <p:nvSpPr>
+          <p:cNvPr id="15" name="TextBox 14"/>
           <p:cNvSpPr txBox="1"/>
           <p:nvPr/>
         </p:nvSpPr>
@@ -19363,7 +20103,7 @@
       </p:sp>
       <p:sp>
         <p:nvSpPr>
-          <p:cNvPr id="14" name="TextBox 13"/>
+          <p:cNvPr id="16" name="TextBox 15"/>
           <p:cNvSpPr txBox="1"/>
           <p:nvPr/>
         </p:nvSpPr>
@@ -19402,7 +20142,7 @@
       </p:sp>
       <p:sp>
         <p:nvSpPr>
-          <p:cNvPr id="15" name="Rounded Rectangle 14"/>
+          <p:cNvPr id="17" name="Rounded Rectangle 16"/>
           <p:cNvSpPr/>
           <p:nvPr/>
         </p:nvSpPr>
@@ -19450,7 +20190,7 @@
       </p:sp>
       <p:sp>
         <p:nvSpPr>
-          <p:cNvPr id="16" name="Rounded Rectangle 15"/>
+          <p:cNvPr id="18" name="Rounded Rectangle 17"/>
           <p:cNvSpPr/>
           <p:nvPr/>
         </p:nvSpPr>
@@ -19489,20 +20229,40 @@
           </a:fontRef>
         </p:style>
         <p:txBody>
-          <a:bodyPr rtlCol="0" anchor="ctr" wrap="square" lIns="9144" rIns="9144" tIns="9144" bIns="9144"/>
+          <a:bodyPr rtlCol="0" anchor="ctr" wrap="square" lIns="146304" rIns="146304" tIns="109728" bIns="109728"/>
           <a:lstStyle/>
           <a:p>
             <a:pPr algn="ctr"/>
-            <a:r>
-              <a:rPr sz="1400"/>
-              <a:t>⚙️</a:t>
-            </a:r>
-          </a:p>
-        </p:txBody>
-      </p:sp>
-      <p:sp>
-        <p:nvSpPr>
-          <p:cNvPr id="17" name="TextBox 16"/>
+          </a:p>
+        </p:txBody>
+      </p:sp>
+      <p:pic>
+        <p:nvPicPr>
+          <p:cNvPr id="19" name="Picture 18" descr="grid.png"/>
+          <p:cNvPicPr>
+            <a:picLocks noChangeAspect="1"/>
+          </p:cNvPicPr>
+          <p:nvPr/>
+        </p:nvPicPr>
+        <p:blipFill>
+          <a:blip r:embed="rId5"/>
+          <a:stretch>
+            <a:fillRect/>
+          </a:stretch>
+        </p:blipFill>
+        <p:spPr>
+          <a:xfrm>
+            <a:off x="6585143" y="4427159"/>
+            <a:ext cx="289681" cy="289681"/>
+          </a:xfrm>
+          <a:prstGeom prst="rect">
+            <a:avLst/>
+          </a:prstGeom>
+        </p:spPr>
+      </p:pic>
+      <p:sp>
+        <p:nvSpPr>
+          <p:cNvPr id="20" name="TextBox 19"/>
           <p:cNvSpPr txBox="1"/>
           <p:nvPr/>
         </p:nvSpPr>
@@ -19536,7 +20296,7 @@
       </p:sp>
       <p:sp>
         <p:nvSpPr>
-          <p:cNvPr id="18" name="TextBox 17"/>
+          <p:cNvPr id="21" name="TextBox 20"/>
           <p:cNvSpPr txBox="1"/>
           <p:nvPr/>
         </p:nvSpPr>
@@ -19575,7 +20335,7 @@
       </p:sp>
       <p:sp>
         <p:nvSpPr>
-          <p:cNvPr id="19" name="Rounded Rectangle 18"/>
+          <p:cNvPr id="22" name="Rounded Rectangle 21"/>
           <p:cNvSpPr/>
           <p:nvPr/>
         </p:nvSpPr>
@@ -19623,7 +20383,7 @@
       </p:sp>
       <p:sp>
         <p:nvSpPr>
-          <p:cNvPr id="20" name="Rounded Rectangle 19"/>
+          <p:cNvPr id="23" name="Rounded Rectangle 22"/>
           <p:cNvSpPr/>
           <p:nvPr/>
         </p:nvSpPr>
@@ -19662,20 +20422,40 @@
           </a:fontRef>
         </p:style>
         <p:txBody>
-          <a:bodyPr rtlCol="0" anchor="ctr" wrap="square" lIns="9144" rIns="9144" tIns="9144" bIns="9144"/>
+          <a:bodyPr rtlCol="0" anchor="ctr" wrap="square" lIns="146304" rIns="146304" tIns="109728" bIns="109728"/>
           <a:lstStyle/>
           <a:p>
             <a:pPr algn="ctr"/>
-            <a:r>
-              <a:rPr sz="1400"/>
-              <a:t>🔒</a:t>
-            </a:r>
-          </a:p>
-        </p:txBody>
-      </p:sp>
-      <p:sp>
-        <p:nvSpPr>
-          <p:cNvPr id="21" name="TextBox 20"/>
+          </a:p>
+        </p:txBody>
+      </p:sp>
+      <p:pic>
+        <p:nvPicPr>
+          <p:cNvPr id="24" name="Picture 23" descr="lock.png"/>
+          <p:cNvPicPr>
+            <a:picLocks noChangeAspect="1"/>
+          </p:cNvPicPr>
+          <p:nvPr/>
+        </p:nvPicPr>
+        <p:blipFill>
+          <a:blip r:embed="rId6"/>
+          <a:stretch>
+            <a:fillRect/>
+          </a:stretch>
+        </p:blipFill>
+        <p:spPr>
+          <a:xfrm>
+            <a:off x="9438071" y="4427159"/>
+            <a:ext cx="289681" cy="289681"/>
+          </a:xfrm>
+          <a:prstGeom prst="rect">
+            <a:avLst/>
+          </a:prstGeom>
+        </p:spPr>
+      </p:pic>
+      <p:sp>
+        <p:nvSpPr>
+          <p:cNvPr id="25" name="TextBox 24"/>
           <p:cNvSpPr txBox="1"/>
           <p:nvPr/>
         </p:nvSpPr>
@@ -19709,7 +20489,7 @@
       </p:sp>
       <p:sp>
         <p:nvSpPr>
-          <p:cNvPr id="22" name="TextBox 21"/>
+          <p:cNvPr id="26" name="TextBox 25"/>
           <p:cNvSpPr txBox="1"/>
           <p:nvPr/>
         </p:nvSpPr>
@@ -19748,7 +20528,7 @@
       </p:sp>
       <p:sp>
         <p:nvSpPr>
-          <p:cNvPr id="23" name="Rectangle 22"/>
+          <p:cNvPr id="27" name="Rectangle 26"/>
           <p:cNvSpPr/>
           <p:nvPr/>
         </p:nvSpPr>
@@ -19792,7 +20572,7 @@
       </p:sp>
       <p:sp>
         <p:nvSpPr>
-          <p:cNvPr id="24" name="TextBox 23"/>
+          <p:cNvPr id="28" name="TextBox 27"/>
           <p:cNvSpPr txBox="1"/>
           <p:nvPr/>
         </p:nvSpPr>
@@ -19835,7 +20615,7 @@
       </p:sp>
       <p:sp>
         <p:nvSpPr>
-          <p:cNvPr id="25" name="TextBox 24"/>
+          <p:cNvPr id="29" name="TextBox 28"/>
           <p:cNvSpPr txBox="1"/>
           <p:nvPr/>
         </p:nvSpPr>
@@ -20086,20 +20866,40 @@
           </a:fontRef>
         </p:style>
         <p:txBody>
-          <a:bodyPr rtlCol="0" anchor="ctr" wrap="square" lIns="9144" rIns="9144" tIns="9144" bIns="9144"/>
+          <a:bodyPr rtlCol="0" anchor="ctr" wrap="square" lIns="146304" rIns="146304" tIns="109728" bIns="109728"/>
           <a:lstStyle/>
           <a:p>
             <a:pPr algn="ctr"/>
-            <a:r>
-              <a:rPr sz="1700"/>
-              <a:t>🔐</a:t>
-            </a:r>
-          </a:p>
-        </p:txBody>
-      </p:sp>
-      <p:sp>
-        <p:nvSpPr>
-          <p:cNvPr id="7" name="TextBox 6"/>
+          </a:p>
+        </p:txBody>
+      </p:sp>
+      <p:pic>
+        <p:nvPicPr>
+          <p:cNvPr id="7" name="Picture 6" descr="key.png"/>
+          <p:cNvPicPr>
+            <a:picLocks noChangeAspect="1"/>
+          </p:cNvPicPr>
+          <p:nvPr/>
+        </p:nvPicPr>
+        <p:blipFill>
+          <a:blip r:embed="rId2"/>
+          <a:stretch>
+            <a:fillRect/>
+          </a:stretch>
+        </p:blipFill>
+        <p:spPr>
+          <a:xfrm>
+            <a:off x="935248" y="2078248"/>
+            <a:ext cx="342351" cy="342351"/>
+          </a:xfrm>
+          <a:prstGeom prst="rect">
+            <a:avLst/>
+          </a:prstGeom>
+        </p:spPr>
+      </p:pic>
+      <p:sp>
+        <p:nvSpPr>
+          <p:cNvPr id="8" name="TextBox 7"/>
           <p:cNvSpPr txBox="1"/>
           <p:nvPr/>
         </p:nvSpPr>
@@ -20133,7 +20933,7 @@
       </p:sp>
       <p:sp>
         <p:nvSpPr>
-          <p:cNvPr id="8" name="TextBox 7"/>
+          <p:cNvPr id="9" name="TextBox 8"/>
           <p:cNvSpPr txBox="1"/>
           <p:nvPr/>
         </p:nvSpPr>
@@ -20172,7 +20972,7 @@
       </p:sp>
       <p:sp>
         <p:nvSpPr>
-          <p:cNvPr id="9" name="Rounded Rectangle 8"/>
+          <p:cNvPr id="10" name="Rounded Rectangle 9"/>
           <p:cNvSpPr/>
           <p:nvPr/>
         </p:nvSpPr>
@@ -20220,7 +21020,7 @@
       </p:sp>
       <p:sp>
         <p:nvSpPr>
-          <p:cNvPr id="10" name="Rounded Rectangle 9"/>
+          <p:cNvPr id="11" name="Rounded Rectangle 10"/>
           <p:cNvSpPr/>
           <p:nvPr/>
         </p:nvSpPr>
@@ -20259,20 +21059,40 @@
           </a:fontRef>
         </p:style>
         <p:txBody>
-          <a:bodyPr rtlCol="0" anchor="ctr" wrap="square" lIns="9144" rIns="9144" tIns="9144" bIns="9144"/>
+          <a:bodyPr rtlCol="0" anchor="ctr" wrap="square" lIns="146304" rIns="146304" tIns="109728" bIns="109728"/>
           <a:lstStyle/>
           <a:p>
             <a:pPr algn="ctr"/>
-            <a:r>
-              <a:rPr sz="1700"/>
-              <a:t>📲</a:t>
-            </a:r>
-          </a:p>
-        </p:txBody>
-      </p:sp>
-      <p:sp>
-        <p:nvSpPr>
-          <p:cNvPr id="11" name="TextBox 10"/>
+          </a:p>
+        </p:txBody>
+      </p:sp>
+      <p:pic>
+        <p:nvPicPr>
+          <p:cNvPr id="12" name="Picture 11" descr="phone.png"/>
+          <p:cNvPicPr>
+            <a:picLocks noChangeAspect="1"/>
+          </p:cNvPicPr>
+          <p:nvPr/>
+        </p:nvPicPr>
+        <p:blipFill>
+          <a:blip r:embed="rId3"/>
+          <a:stretch>
+            <a:fillRect/>
+          </a:stretch>
+        </p:blipFill>
+        <p:spPr>
+          <a:xfrm>
+            <a:off x="4730008" y="2078248"/>
+            <a:ext cx="342351" cy="342351"/>
+          </a:xfrm>
+          <a:prstGeom prst="rect">
+            <a:avLst/>
+          </a:prstGeom>
+        </p:spPr>
+      </p:pic>
+      <p:sp>
+        <p:nvSpPr>
+          <p:cNvPr id="13" name="TextBox 12"/>
           <p:cNvSpPr txBox="1"/>
           <p:nvPr/>
         </p:nvSpPr>
@@ -20306,7 +21126,7 @@
       </p:sp>
       <p:sp>
         <p:nvSpPr>
-          <p:cNvPr id="12" name="TextBox 11"/>
+          <p:cNvPr id="14" name="TextBox 13"/>
           <p:cNvSpPr txBox="1"/>
           <p:nvPr/>
         </p:nvSpPr>
@@ -20345,7 +21165,7 @@
       </p:sp>
       <p:sp>
         <p:nvSpPr>
-          <p:cNvPr id="13" name="Rounded Rectangle 12"/>
+          <p:cNvPr id="15" name="Rounded Rectangle 14"/>
           <p:cNvSpPr/>
           <p:nvPr/>
         </p:nvSpPr>
@@ -20393,7 +21213,7 @@
       </p:sp>
       <p:sp>
         <p:nvSpPr>
-          <p:cNvPr id="14" name="Rounded Rectangle 13"/>
+          <p:cNvPr id="16" name="Rounded Rectangle 15"/>
           <p:cNvSpPr/>
           <p:nvPr/>
         </p:nvSpPr>
@@ -20432,20 +21252,40 @@
           </a:fontRef>
         </p:style>
         <p:txBody>
-          <a:bodyPr rtlCol="0" anchor="ctr" wrap="square" lIns="9144" rIns="9144" tIns="9144" bIns="9144"/>
+          <a:bodyPr rtlCol="0" anchor="ctr" wrap="square" lIns="146304" rIns="146304" tIns="109728" bIns="109728"/>
           <a:lstStyle/>
           <a:p>
             <a:pPr algn="ctr"/>
-            <a:r>
-              <a:rPr sz="1700"/>
-              <a:t>👆</a:t>
-            </a:r>
-          </a:p>
-        </p:txBody>
-      </p:sp>
-      <p:sp>
-        <p:nvSpPr>
-          <p:cNvPr id="15" name="TextBox 14"/>
+          </a:p>
+        </p:txBody>
+      </p:sp>
+      <p:pic>
+        <p:nvPicPr>
+          <p:cNvPr id="17" name="Picture 16" descr="facescan.png"/>
+          <p:cNvPicPr>
+            <a:picLocks noChangeAspect="1"/>
+          </p:cNvPicPr>
+          <p:nvPr/>
+        </p:nvPicPr>
+        <p:blipFill>
+          <a:blip r:embed="rId4"/>
+          <a:stretch>
+            <a:fillRect/>
+          </a:stretch>
+        </p:blipFill>
+        <p:spPr>
+          <a:xfrm>
+            <a:off x="8524768" y="2078248"/>
+            <a:ext cx="342351" cy="342351"/>
+          </a:xfrm>
+          <a:prstGeom prst="rect">
+            <a:avLst/>
+          </a:prstGeom>
+        </p:spPr>
+      </p:pic>
+      <p:sp>
+        <p:nvSpPr>
+          <p:cNvPr id="18" name="TextBox 17"/>
           <p:cNvSpPr txBox="1"/>
           <p:nvPr/>
         </p:nvSpPr>
@@ -20479,7 +21319,7 @@
       </p:sp>
       <p:sp>
         <p:nvSpPr>
-          <p:cNvPr id="16" name="TextBox 15"/>
+          <p:cNvPr id="19" name="TextBox 18"/>
           <p:cNvSpPr txBox="1"/>
           <p:nvPr/>
         </p:nvSpPr>
@@ -20518,7 +21358,7 @@
       </p:sp>
       <p:sp>
         <p:nvSpPr>
-          <p:cNvPr id="17" name="Rounded Rectangle 16"/>
+          <p:cNvPr id="20" name="Rounded Rectangle 19"/>
           <p:cNvSpPr/>
           <p:nvPr/>
         </p:nvSpPr>
@@ -20566,7 +21406,7 @@
       </p:sp>
       <p:sp>
         <p:nvSpPr>
-          <p:cNvPr id="18" name="Rounded Rectangle 17"/>
+          <p:cNvPr id="21" name="Rounded Rectangle 20"/>
           <p:cNvSpPr/>
           <p:nvPr/>
         </p:nvSpPr>
@@ -20605,20 +21445,40 @@
           </a:fontRef>
         </p:style>
         <p:txBody>
-          <a:bodyPr rtlCol="0" anchor="ctr" wrap="square" lIns="9144" rIns="9144" tIns="9144" bIns="9144"/>
+          <a:bodyPr rtlCol="0" anchor="ctr" wrap="square" lIns="146304" rIns="146304" tIns="109728" bIns="109728"/>
           <a:lstStyle/>
           <a:p>
             <a:pPr algn="ctr"/>
-            <a:r>
-              <a:rPr sz="1700"/>
-              <a:t>🛡️</a:t>
-            </a:r>
-          </a:p>
-        </p:txBody>
-      </p:sp>
-      <p:sp>
-        <p:nvSpPr>
-          <p:cNvPr id="19" name="TextBox 18"/>
+          </a:p>
+        </p:txBody>
+      </p:sp>
+      <p:pic>
+        <p:nvPicPr>
+          <p:cNvPr id="22" name="Picture 21" descr="shield.png"/>
+          <p:cNvPicPr>
+            <a:picLocks noChangeAspect="1"/>
+          </p:cNvPicPr>
+          <p:nvPr/>
+        </p:nvPicPr>
+        <p:blipFill>
+          <a:blip r:embed="rId5"/>
+          <a:stretch>
+            <a:fillRect/>
+          </a:stretch>
+        </p:blipFill>
+        <p:spPr>
+          <a:xfrm>
+            <a:off x="935248" y="4291096"/>
+            <a:ext cx="342351" cy="342351"/>
+          </a:xfrm>
+          <a:prstGeom prst="rect">
+            <a:avLst/>
+          </a:prstGeom>
+        </p:spPr>
+      </p:pic>
+      <p:sp>
+        <p:nvSpPr>
+          <p:cNvPr id="23" name="TextBox 22"/>
           <p:cNvSpPr txBox="1"/>
           <p:nvPr/>
         </p:nvSpPr>
@@ -20652,7 +21512,7 @@
       </p:sp>
       <p:sp>
         <p:nvSpPr>
-          <p:cNvPr id="20" name="TextBox 19"/>
+          <p:cNvPr id="24" name="TextBox 23"/>
           <p:cNvSpPr txBox="1"/>
           <p:nvPr/>
         </p:nvSpPr>
@@ -20691,7 +21551,7 @@
       </p:sp>
       <p:sp>
         <p:nvSpPr>
-          <p:cNvPr id="21" name="Rounded Rectangle 20"/>
+          <p:cNvPr id="25" name="Rounded Rectangle 24"/>
           <p:cNvSpPr/>
           <p:nvPr/>
         </p:nvSpPr>
@@ -20739,7 +21599,7 @@
       </p:sp>
       <p:sp>
         <p:nvSpPr>
-          <p:cNvPr id="22" name="Rounded Rectangle 21"/>
+          <p:cNvPr id="26" name="Rounded Rectangle 25"/>
           <p:cNvSpPr/>
           <p:nvPr/>
         </p:nvSpPr>
@@ -20778,20 +21638,40 @@
           </a:fontRef>
         </p:style>
         <p:txBody>
-          <a:bodyPr rtlCol="0" anchor="ctr" wrap="square" lIns="9144" rIns="9144" tIns="9144" bIns="9144"/>
+          <a:bodyPr rtlCol="0" anchor="ctr" wrap="square" lIns="146304" rIns="146304" tIns="109728" bIns="109728"/>
           <a:lstStyle/>
           <a:p>
             <a:pPr algn="ctr"/>
-            <a:r>
-              <a:rPr sz="1700"/>
-              <a:t>🧑‍💼</a:t>
-            </a:r>
-          </a:p>
-        </p:txBody>
-      </p:sp>
-      <p:sp>
-        <p:nvSpPr>
-          <p:cNvPr id="23" name="TextBox 22"/>
+          </a:p>
+        </p:txBody>
+      </p:sp>
+      <p:pic>
+        <p:nvPicPr>
+          <p:cNvPr id="27" name="Picture 26" descr="briefcase.png"/>
+          <p:cNvPicPr>
+            <a:picLocks noChangeAspect="1"/>
+          </p:cNvPicPr>
+          <p:nvPr/>
+        </p:nvPicPr>
+        <p:blipFill>
+          <a:blip r:embed="rId6"/>
+          <a:stretch>
+            <a:fillRect/>
+          </a:stretch>
+        </p:blipFill>
+        <p:spPr>
+          <a:xfrm>
+            <a:off x="4730008" y="4291096"/>
+            <a:ext cx="342351" cy="342351"/>
+          </a:xfrm>
+          <a:prstGeom prst="rect">
+            <a:avLst/>
+          </a:prstGeom>
+        </p:spPr>
+      </p:pic>
+      <p:sp>
+        <p:nvSpPr>
+          <p:cNvPr id="28" name="TextBox 27"/>
           <p:cNvSpPr txBox="1"/>
           <p:nvPr/>
         </p:nvSpPr>
@@ -20825,7 +21705,7 @@
       </p:sp>
       <p:sp>
         <p:nvSpPr>
-          <p:cNvPr id="24" name="TextBox 23"/>
+          <p:cNvPr id="29" name="TextBox 28"/>
           <p:cNvSpPr txBox="1"/>
           <p:nvPr/>
         </p:nvSpPr>
@@ -20864,7 +21744,7 @@
       </p:sp>
       <p:sp>
         <p:nvSpPr>
-          <p:cNvPr id="25" name="TextBox 24"/>
+          <p:cNvPr id="30" name="TextBox 29"/>
           <p:cNvSpPr txBox="1"/>
           <p:nvPr/>
         </p:nvSpPr>
@@ -20913,7 +21793,7 @@
       </p:sp>
       <p:sp>
         <p:nvSpPr>
-          <p:cNvPr id="26" name="Rectangle 25"/>
+          <p:cNvPr id="31" name="Rectangle 30"/>
           <p:cNvSpPr/>
           <p:nvPr/>
         </p:nvSpPr>
@@ -20957,7 +21837,7 @@
       </p:sp>
       <p:sp>
         <p:nvSpPr>
-          <p:cNvPr id="27" name="TextBox 26"/>
+          <p:cNvPr id="32" name="TextBox 31"/>
           <p:cNvSpPr txBox="1"/>
           <p:nvPr/>
         </p:nvSpPr>
@@ -21000,7 +21880,7 @@
       </p:sp>
       <p:sp>
         <p:nvSpPr>
-          <p:cNvPr id="28" name="TextBox 27"/>
+          <p:cNvPr id="33" name="TextBox 32"/>
           <p:cNvSpPr txBox="1"/>
           <p:nvPr/>
         </p:nvSpPr>

--- a/slides/wanthat-presentation.pptx
+++ b/slides/wanthat-presentation.pptx
@@ -593,7 +593,7 @@
           <a:lstStyle/>
           <a:p>
             <a:r>
-              <a:t>Latency budget is relaxed-but-reachable (ADR-0007); the whole path is DynamoDB reads.</a:t>
+              <a:t>il-central-1 gaps shaped this too: no RDS Data API (killed the no-VPC data path), no Lambda Function URLs (landing sits behind an HTTP API).</a:t>
             </a:r>
           </a:p>
         </p:txBody>
@@ -663,7 +663,7 @@
           <a:lstStyle/>
           <a:p>
             <a:r>
-              <a:t>Idempotency: the unique (order_id, kind, status) index makes every poll replayable.</a:t>
+              <a:t>Sequence in backup B3. Unmatched orders are not dropped: they park in unattributed_order and an admin claim settles on the next heartbeat.</a:t>
             </a:r>
           </a:p>
         </p:txBody>
@@ -733,7 +733,7 @@
           <a:lstStyle/>
           <a:p>
             <a:r>
-              <a:t>The security model leans on the platform: GRANTs and pool separation over custom code.</a:t>
+              <a:t>Numbers are il-central-1 approximations; the point is the shape: a ~$20 measured floor, then linear with usage.</a:t>
             </a:r>
           </a:p>
         </p:txBody>
@@ -801,7 +801,11 @@
         <p:txBody>
           <a:bodyPr/>
           <a:lstStyle/>
-          <a:p/>
+          <a:p>
+            <a:r>
+              <a:t>Every row is documented in an ADR or the architecture doc - none of these are surprises.</a:t>
+            </a:r>
+          </a:p>
         </p:txBody>
       </p:sp>
       <p:sp>
@@ -1899,7 +1903,7 @@
           <a:lstStyle/>
           <a:p>
             <a:r>
-              <a:t>The sub is the only join key between the three worlds — that's what makes user deletion clean and keeps the ledger pseudonymous.</a:t>
+              <a:t>If asked why not one Postgres for everything: the redirect hot path must absorb viral spikes at zero idle cost, and the auth path must not depend on a relational database resume.</a:t>
             </a:r>
           </a:p>
         </p:txBody>
@@ -1969,7 +1973,7 @@
           <a:lstStyle/>
           <a:p>
             <a:r>
-              <a:t>Backup slide B1 has the full sequence diagram.</a:t>
+              <a:t>Full sequence diagram in backup B1. The C-&gt;B migration was possible pre-release: one dev user deleted, no migration burden.</a:t>
             </a:r>
           </a:p>
         </p:txBody>
@@ -5490,7 +5494,7 @@
                 </a:solidFill>
                 <a:latin typeface="Space Mono"/>
               </a:rPr>
-              <a:t>ENGINEERING</a:t>
+              <a:t>DECISIONS</a:t>
             </a:r>
           </a:p>
         </p:txBody>
@@ -5518,296 +5522,469 @@
           <a:lstStyle/>
           <a:p>
             <a:r>
-              <a:rPr sz="2700" b="1">
+              <a:rPr sz="2500" b="1">
                 <a:solidFill>
                   <a:srgbClr val="15201C"/>
                 </a:solidFill>
                 <a:latin typeface="Space Grotesk"/>
               </a:rPr>
-              <a:t>The viral hot path</a:t>
-            </a:r>
-          </a:p>
-        </p:txBody>
-      </p:sp>
-      <p:sp>
-        <p:nvSpPr>
-          <p:cNvPr id="5" name="Rounded Rectangle 4"/>
-          <p:cNvSpPr/>
-          <p:nvPr/>
-        </p:nvSpPr>
-        <p:spPr>
-          <a:xfrm>
-            <a:off x="658368" y="1828800"/>
-            <a:ext cx="10881360" cy="868680"/>
-          </a:xfrm>
-          <a:prstGeom prst="roundRect">
-            <a:avLst>
-              <a:gd name="adj" fmla="val 5500"/>
-            </a:avLst>
-          </a:prstGeom>
-          <a:solidFill>
-            <a:srgbClr val="1B2924"/>
-          </a:solidFill>
-          <a:ln>
-            <a:noFill/>
-          </a:ln>
-          <a:effectLst/>
-        </p:spPr>
-        <p:style>
-          <a:lnRef idx="1">
-            <a:schemeClr val="accent1"/>
-          </a:lnRef>
-          <a:fillRef idx="3">
-            <a:schemeClr val="accent1"/>
-          </a:fillRef>
-          <a:effectRef idx="2">
-            <a:schemeClr val="accent1"/>
-          </a:effectRef>
-          <a:fontRef idx="minor">
-            <a:schemeClr val="lt1"/>
-          </a:fontRef>
-        </p:style>
-        <p:txBody>
-          <a:bodyPr rtlCol="0" anchor="ctr" wrap="square" lIns="146304" rIns="146304" tIns="109728" bIns="109728"/>
-          <a:lstStyle/>
-          <a:p>
-            <a:pPr algn="ctr">
-              <a:lnSpc>
-                <a:spcPct val="125000"/>
-              </a:lnSpc>
-            </a:pPr>
-            <a:r>
-              <a:rPr sz="1300" b="0">
-                <a:solidFill>
-                  <a:srgbClr val="FFFFFF"/>
-                </a:solidFill>
-                <a:latin typeface="Space Mono"/>
-              </a:rPr>
-              <a:t>friend taps /p/{id}</a:t>
-            </a:r>
-            <a:r>
-              <a:rPr sz="1300" b="1">
-                <a:solidFill>
-                  <a:srgbClr val="7FE0B0"/>
-                </a:solidFill>
-                <a:latin typeface="Space Mono"/>
-              </a:rPr>
-              <a:t> → </a:t>
-            </a:r>
-            <a:r>
-              <a:rPr sz="1300" b="0">
-                <a:solidFill>
-                  <a:srgbClr val="FFFFFF"/>
-                </a:solidFill>
-                <a:latin typeface="Space Mono"/>
-              </a:rPr>
-              <a:t>CloudFront</a:t>
-            </a:r>
-            <a:r>
-              <a:rPr sz="1300" b="1">
-                <a:solidFill>
-                  <a:srgbClr val="7FE0B0"/>
-                </a:solidFill>
-                <a:latin typeface="Space Mono"/>
-              </a:rPr>
-              <a:t> → </a:t>
-            </a:r>
-            <a:r>
-              <a:rPr sz="1300" b="0">
-                <a:solidFill>
-                  <a:srgbClr val="FFFFFF"/>
-                </a:solidFill>
-                <a:latin typeface="Space Mono"/>
-              </a:rPr>
-              <a:t>landing (non-VPC)</a:t>
-            </a:r>
-            <a:r>
-              <a:rPr sz="1300" b="1">
-                <a:solidFill>
-                  <a:srgbClr val="7FE0B0"/>
-                </a:solidFill>
-                <a:latin typeface="Space Mono"/>
-              </a:rPr>
-              <a:t> → </a:t>
-            </a:r>
-            <a:r>
-              <a:rPr sz="1300" b="0">
-                <a:solidFill>
-                  <a:srgbClr val="FFFFFF"/>
-                </a:solidFill>
-                <a:latin typeface="Space Mono"/>
-              </a:rPr>
-              <a:t>DynamoDB: short id</a:t>
-            </a:r>
-            <a:r>
-              <a:rPr sz="1300" b="1">
-                <a:solidFill>
-                  <a:srgbClr val="7FE0B0"/>
-                </a:solidFill>
-                <a:latin typeface="Space Mono"/>
-              </a:rPr>
-              <a:t> → </a:t>
-            </a:r>
-            <a:r>
-              <a:rPr sz="1300" b="0">
-                <a:solidFill>
-                  <a:srgbClr val="FFFFFF"/>
-                </a:solidFill>
-                <a:latin typeface="Space Mono"/>
-              </a:rPr>
-              <a:t>OG landing + review</a:t>
-            </a:r>
-            <a:r>
-              <a:rPr sz="1300" b="1">
-                <a:solidFill>
-                  <a:srgbClr val="7FE0B0"/>
-                </a:solidFill>
-                <a:latin typeface="Space Mono"/>
-              </a:rPr>
-              <a:t> → </a:t>
-            </a:r>
-            <a:r>
-              <a:rPr sz="1300" b="0">
-                <a:solidFill>
-                  <a:srgbClr val="FFFFFF"/>
-                </a:solidFill>
-                <a:latin typeface="Space Mono"/>
-              </a:rPr>
-              <a:t>302 to store, custom_parameters</a:t>
-            </a:r>
-          </a:p>
-        </p:txBody>
-      </p:sp>
-      <p:sp>
-        <p:nvSpPr>
-          <p:cNvPr id="6" name="Rounded Rectangle 5"/>
-          <p:cNvSpPr/>
-          <p:nvPr/>
-        </p:nvSpPr>
-        <p:spPr>
-          <a:xfrm>
-            <a:off x="685800" y="3154680"/>
-            <a:ext cx="3593592" cy="2286000"/>
-          </a:xfrm>
-          <a:prstGeom prst="roundRect">
-            <a:avLst>
-              <a:gd name="adj" fmla="val 5500"/>
-            </a:avLst>
-          </a:prstGeom>
-          <a:solidFill>
-            <a:srgbClr val="FFFFFF"/>
-          </a:solidFill>
-          <a:ln w="12700">
-            <a:solidFill>
-              <a:srgbClr val="E6EBE8"/>
-            </a:solidFill>
-          </a:ln>
-          <a:effectLst/>
-        </p:spPr>
-        <p:style>
-          <a:lnRef idx="1">
-            <a:schemeClr val="accent1"/>
-          </a:lnRef>
-          <a:fillRef idx="3">
-            <a:schemeClr val="accent1"/>
-          </a:fillRef>
-          <a:effectRef idx="2">
-            <a:schemeClr val="accent1"/>
-          </a:effectRef>
-          <a:fontRef idx="minor">
-            <a:schemeClr val="lt1"/>
-          </a:fontRef>
-        </p:style>
-        <p:txBody>
-          <a:bodyPr rtlCol="0" anchor="ctr" wrap="square" lIns="146304" rIns="146304" tIns="109728" bIns="109728"/>
-          <a:lstStyle/>
-          <a:p>
-            <a:pPr algn="ctr"/>
-          </a:p>
-        </p:txBody>
-      </p:sp>
-      <p:sp>
-        <p:nvSpPr>
-          <p:cNvPr id="7" name="Rounded Rectangle 6"/>
-          <p:cNvSpPr/>
-          <p:nvPr/>
-        </p:nvSpPr>
-        <p:spPr>
-          <a:xfrm>
-            <a:off x="868680" y="3337560"/>
-            <a:ext cx="475488" cy="475488"/>
-          </a:xfrm>
-          <a:prstGeom prst="roundRect">
-            <a:avLst>
-              <a:gd name="adj" fmla="val 28000"/>
-            </a:avLst>
-          </a:prstGeom>
-          <a:solidFill>
-            <a:srgbClr val="E7F1EC"/>
-          </a:solidFill>
-          <a:ln w="12700">
-            <a:solidFill>
-              <a:srgbClr val="D2E3D9"/>
-            </a:solidFill>
-          </a:ln>
-          <a:effectLst/>
-        </p:spPr>
-        <p:style>
-          <a:lnRef idx="1">
-            <a:schemeClr val="accent1"/>
-          </a:lnRef>
-          <a:fillRef idx="3">
-            <a:schemeClr val="accent1"/>
-          </a:fillRef>
-          <a:effectRef idx="2">
-            <a:schemeClr val="accent1"/>
-          </a:effectRef>
-          <a:fontRef idx="minor">
-            <a:schemeClr val="lt1"/>
-          </a:fontRef>
-        </p:style>
-        <p:txBody>
-          <a:bodyPr rtlCol="0" anchor="ctr" wrap="square" lIns="146304" rIns="146304" tIns="109728" bIns="109728"/>
-          <a:lstStyle/>
-          <a:p>
-            <a:pPr algn="ctr"/>
-          </a:p>
-        </p:txBody>
-      </p:sp>
-      <p:pic>
-        <p:nvPicPr>
-          <p:cNvPr id="8" name="Picture 7" descr="chat.png"/>
-          <p:cNvPicPr>
-            <a:picLocks noChangeAspect="1"/>
-          </p:cNvPicPr>
-          <p:nvPr/>
-        </p:nvPicPr>
-        <p:blipFill>
-          <a:blip r:embed="rId2"/>
-          <a:stretch>
-            <a:fillRect/>
-          </a:stretch>
-        </p:blipFill>
-        <p:spPr>
-          <a:xfrm>
-            <a:off x="935248" y="3404128"/>
-            <a:ext cx="342351" cy="342351"/>
-          </a:xfrm>
-          <a:prstGeom prst="rect">
-            <a:avLst/>
-          </a:prstGeom>
-        </p:spPr>
-      </p:pic>
-      <p:sp>
-        <p:nvSpPr>
-          <p:cNvPr id="9" name="TextBox 8"/>
+              <a:t>Network — pay for nothing that idles</a:t>
+            </a:r>
+          </a:p>
+        </p:txBody>
+      </p:sp>
+      <p:graphicFrame>
+        <p:nvGraphicFramePr>
+          <p:cNvPr id="5" name="Table 4"/>
+          <p:cNvGraphicFramePr>
+            <a:graphicFrameLocks noGrp="1"/>
+          </p:cNvGraphicFramePr>
+          <p:nvPr/>
+        </p:nvGraphicFramePr>
+        <p:xfrm>
+          <a:off x="658368" y="1783080"/>
+          <a:ext cx="10881360" cy="1828800"/>
+        </p:xfrm>
+        <a:graphic>
+          <a:graphicData uri="http://schemas.openxmlformats.org/drawingml/2006/table">
+            <a:tbl>
+              <a:tblPr>
+                <a:tableStyleId>{5C22544A-7EE6-4342-B048-85BDC9FD1C3A}</a:tableStyleId>
+              </a:tblPr>
+              <a:tblGrid>
+                <a:gridCol w="2651760"/>
+                <a:gridCol w="1920240"/>
+                <a:gridCol w="6309360"/>
+              </a:tblGrid>
+              <a:tr h="365760">
+                <a:tc>
+                  <a:txBody>
+                    <a:bodyPr wrap="square"/>
+                    <a:lstStyle/>
+                    <a:p>
+                      <a:pPr>
+                        <a:lnSpc>
+                          <a:spcPct val="108000"/>
+                        </a:lnSpc>
+                      </a:pPr>
+                      <a:r>
+                        <a:rPr sz="1100" b="1">
+                          <a:solidFill>
+                            <a:srgbClr val="7FE0B0"/>
+                          </a:solidFill>
+                          <a:latin typeface="Space Grotesk"/>
+                        </a:rPr>
+                        <a:t>Component avoided</a:t>
+                      </a:r>
+                    </a:p>
+                  </a:txBody>
+                  <a:tcPr marL="91440" marR="91440" marT="45720" marB="45720">
+                    <a:solidFill>
+                      <a:srgbClr val="15201C"/>
+                    </a:solidFill>
+                  </a:tcPr>
+                </a:tc>
+                <a:tc>
+                  <a:txBody>
+                    <a:bodyPr wrap="square"/>
+                    <a:lstStyle/>
+                    <a:p>
+                      <a:pPr>
+                        <a:lnSpc>
+                          <a:spcPct val="108000"/>
+                        </a:lnSpc>
+                      </a:pPr>
+                      <a:r>
+                        <a:rPr sz="1100" b="1">
+                          <a:solidFill>
+                            <a:srgbClr val="7FE0B0"/>
+                          </a:solidFill>
+                          <a:latin typeface="Space Grotesk"/>
+                        </a:rPr>
+                        <a:t>Fixed cost avoided</a:t>
+                      </a:r>
+                    </a:p>
+                  </a:txBody>
+                  <a:tcPr marL="91440" marR="91440" marT="45720" marB="45720">
+                    <a:solidFill>
+                      <a:srgbClr val="15201C"/>
+                    </a:solidFill>
+                  </a:tcPr>
+                </a:tc>
+                <a:tc>
+                  <a:txBody>
+                    <a:bodyPr wrap="square"/>
+                    <a:lstStyle/>
+                    <a:p>
+                      <a:pPr>
+                        <a:lnSpc>
+                          <a:spcPct val="108000"/>
+                        </a:lnSpc>
+                      </a:pPr>
+                      <a:r>
+                        <a:rPr sz="1100" b="1">
+                          <a:solidFill>
+                            <a:srgbClr val="7FE0B0"/>
+                          </a:solidFill>
+                          <a:latin typeface="Space Grotesk"/>
+                        </a:rPr>
+                        <a:t>Replaced by</a:t>
+                      </a:r>
+                    </a:p>
+                  </a:txBody>
+                  <a:tcPr marL="91440" marR="91440" marT="45720" marB="45720">
+                    <a:solidFill>
+                      <a:srgbClr val="15201C"/>
+                    </a:solidFill>
+                  </a:tcPr>
+                </a:tc>
+              </a:tr>
+              <a:tr h="365760">
+                <a:tc>
+                  <a:txBody>
+                    <a:bodyPr wrap="square"/>
+                    <a:lstStyle/>
+                    <a:p>
+                      <a:pPr>
+                        <a:lnSpc>
+                          <a:spcPct val="108000"/>
+                        </a:lnSpc>
+                      </a:pPr>
+                      <a:r>
+                        <a:rPr sz="1050" b="1">
+                          <a:solidFill>
+                            <a:srgbClr val="15201C"/>
+                          </a:solidFill>
+                          <a:latin typeface="Hanken Grotesk"/>
+                        </a:rPr>
+                        <a:t>NAT Gateway</a:t>
+                      </a:r>
+                    </a:p>
+                  </a:txBody>
+                  <a:tcPr marL="91440" marR="91440" marT="45720" marB="45720">
+                    <a:solidFill>
+                      <a:srgbClr val="FFFFFF"/>
+                    </a:solidFill>
+                  </a:tcPr>
+                </a:tc>
+                <a:tc>
+                  <a:txBody>
+                    <a:bodyPr wrap="square"/>
+                    <a:lstStyle/>
+                    <a:p>
+                      <a:pPr>
+                        <a:lnSpc>
+                          <a:spcPct val="108000"/>
+                        </a:lnSpc>
+                      </a:pPr>
+                      <a:r>
+                        <a:rPr sz="1050" b="0">
+                          <a:solidFill>
+                            <a:srgbClr val="6B7B73"/>
+                          </a:solidFill>
+                          <a:latin typeface="Hanken Grotesk"/>
+                        </a:rPr>
+                        <a:t>~$33/mo + $0.045/GB</a:t>
+                      </a:r>
+                    </a:p>
+                  </a:txBody>
+                  <a:tcPr marL="91440" marR="91440" marT="45720" marB="45720">
+                    <a:solidFill>
+                      <a:srgbClr val="FFFFFF"/>
+                    </a:solidFill>
+                  </a:tcPr>
+                </a:tc>
+                <a:tc>
+                  <a:txBody>
+                    <a:bodyPr wrap="square"/>
+                    <a:lstStyle/>
+                    <a:p>
+                      <a:pPr>
+                        <a:lnSpc>
+                          <a:spcPct val="108000"/>
+                        </a:lnSpc>
+                      </a:pPr>
+                      <a:r>
+                        <a:rPr sz="1050" b="0">
+                          <a:solidFill>
+                            <a:srgbClr val="6B7B73"/>
+                          </a:solidFill>
+                          <a:latin typeface="Hanken Grotesk"/>
+                        </a:rPr>
+                        <a:t>Non-VPC functions call public AWS endpoints (IAM + TLS); the only true internet egress is retailer-proxy</a:t>
+                      </a:r>
+                    </a:p>
+                  </a:txBody>
+                  <a:tcPr marL="91440" marR="91440" marT="45720" marB="45720">
+                    <a:solidFill>
+                      <a:srgbClr val="FFFFFF"/>
+                    </a:solidFill>
+                  </a:tcPr>
+                </a:tc>
+              </a:tr>
+              <a:tr h="365760">
+                <a:tc>
+                  <a:txBody>
+                    <a:bodyPr wrap="square"/>
+                    <a:lstStyle/>
+                    <a:p>
+                      <a:pPr>
+                        <a:lnSpc>
+                          <a:spcPct val="108000"/>
+                        </a:lnSpc>
+                      </a:pPr>
+                      <a:r>
+                        <a:rPr sz="1050" b="1">
+                          <a:solidFill>
+                            <a:srgbClr val="15201C"/>
+                          </a:solidFill>
+                          <a:latin typeface="Hanken Grotesk"/>
+                        </a:rPr>
+                        <a:t>VPC interface endpoints</a:t>
+                      </a:r>
+                    </a:p>
+                  </a:txBody>
+                  <a:tcPr marL="91440" marR="91440" marT="45720" marB="45720">
+                    <a:solidFill>
+                      <a:srgbClr val="F4F6F5"/>
+                    </a:solidFill>
+                  </a:tcPr>
+                </a:tc>
+                <a:tc>
+                  <a:txBody>
+                    <a:bodyPr wrap="square"/>
+                    <a:lstStyle/>
+                    <a:p>
+                      <a:pPr>
+                        <a:lnSpc>
+                          <a:spcPct val="108000"/>
+                        </a:lnSpc>
+                      </a:pPr>
+                      <a:r>
+                        <a:rPr sz="1050" b="0">
+                          <a:solidFill>
+                            <a:srgbClr val="6B7B73"/>
+                          </a:solidFill>
+                          <a:latin typeface="Hanken Grotesk"/>
+                        </a:rPr>
+                        <a:t>~$7-15/mo each</a:t>
+                      </a:r>
+                    </a:p>
+                  </a:txBody>
+                  <a:tcPr marL="91440" marR="91440" marT="45720" marB="45720">
+                    <a:solidFill>
+                      <a:srgbClr val="F4F6F5"/>
+                    </a:solidFill>
+                  </a:tcPr>
+                </a:tc>
+                <a:tc>
+                  <a:txBody>
+                    <a:bodyPr wrap="square"/>
+                    <a:lstStyle/>
+                    <a:p>
+                      <a:pPr>
+                        <a:lnSpc>
+                          <a:spcPct val="108000"/>
+                        </a:lnSpc>
+                      </a:pPr>
+                      <a:r>
+                        <a:rPr sz="1050" b="0">
+                          <a:solidFill>
+                            <a:srgbClr val="6B7B73"/>
+                          </a:solidFill>
+                          <a:latin typeface="Hanken Grotesk"/>
+                        </a:rPr>
+                        <a:t>Zero needed: nothing in-VPC calls Cognito, Secrets Manager, or the internet - by design, not by exception</a:t>
+                      </a:r>
+                    </a:p>
+                  </a:txBody>
+                  <a:tcPr marL="91440" marR="91440" marT="45720" marB="45720">
+                    <a:solidFill>
+                      <a:srgbClr val="F4F6F5"/>
+                    </a:solidFill>
+                  </a:tcPr>
+                </a:tc>
+              </a:tr>
+              <a:tr h="365760">
+                <a:tc>
+                  <a:txBody>
+                    <a:bodyPr wrap="square"/>
+                    <a:lstStyle/>
+                    <a:p>
+                      <a:pPr>
+                        <a:lnSpc>
+                          <a:spcPct val="108000"/>
+                        </a:lnSpc>
+                      </a:pPr>
+                      <a:r>
+                        <a:rPr sz="1050" b="1">
+                          <a:solidFill>
+                            <a:srgbClr val="15201C"/>
+                          </a:solidFill>
+                          <a:latin typeface="Hanken Grotesk"/>
+                        </a:rPr>
+                        <a:t>RDS Proxy</a:t>
+                      </a:r>
+                    </a:p>
+                  </a:txBody>
+                  <a:tcPr marL="91440" marR="91440" marT="45720" marB="45720">
+                    <a:solidFill>
+                      <a:srgbClr val="FFFFFF"/>
+                    </a:solidFill>
+                  </a:tcPr>
+                </a:tc>
+                <a:tc>
+                  <a:txBody>
+                    <a:bodyPr wrap="square"/>
+                    <a:lstStyle/>
+                    <a:p>
+                      <a:pPr>
+                        <a:lnSpc>
+                          <a:spcPct val="108000"/>
+                        </a:lnSpc>
+                      </a:pPr>
+                      <a:r>
+                        <a:rPr sz="1050" b="0">
+                          <a:solidFill>
+                            <a:srgbClr val="6B7B73"/>
+                          </a:solidFill>
+                          <a:latin typeface="Hanken Grotesk"/>
+                        </a:rPr>
+                        <a:t>per-ACU hourly</a:t>
+                      </a:r>
+                    </a:p>
+                  </a:txBody>
+                  <a:tcPr marL="91440" marR="91440" marT="45720" marB="45720">
+                    <a:solidFill>
+                      <a:srgbClr val="FFFFFF"/>
+                    </a:solidFill>
+                  </a:tcPr>
+                </a:tc>
+                <a:tc>
+                  <a:txBody>
+                    <a:bodyPr wrap="square"/>
+                    <a:lstStyle/>
+                    <a:p>
+                      <a:pPr>
+                        <a:lnSpc>
+                          <a:spcPct val="108000"/>
+                        </a:lnSpc>
+                      </a:pPr>
+                      <a:r>
+                        <a:rPr sz="1050" b="0">
+                          <a:solidFill>
+                            <a:srgbClr val="6B7B73"/>
+                          </a:solidFill>
+                          <a:latin typeface="Hanken Grotesk"/>
+                        </a:rPr>
+                        <a:t>Direct IAM DB auth; 50-connection cap + no reserved concurrency keeps pressure bounded</a:t>
+                      </a:r>
+                    </a:p>
+                  </a:txBody>
+                  <a:tcPr marL="91440" marR="91440" marT="45720" marB="45720">
+                    <a:solidFill>
+                      <a:srgbClr val="FFFFFF"/>
+                    </a:solidFill>
+                  </a:tcPr>
+                </a:tc>
+              </a:tr>
+              <a:tr h="365760">
+                <a:tc>
+                  <a:txBody>
+                    <a:bodyPr wrap="square"/>
+                    <a:lstStyle/>
+                    <a:p>
+                      <a:pPr>
+                        <a:lnSpc>
+                          <a:spcPct val="108000"/>
+                        </a:lnSpc>
+                      </a:pPr>
+                      <a:r>
+                        <a:rPr sz="1050" b="1">
+                          <a:solidFill>
+                            <a:srgbClr val="15201C"/>
+                          </a:solidFill>
+                          <a:latin typeface="Hanken Grotesk"/>
+                        </a:rPr>
+                        <a:t>DynamoDB access from VPC</a:t>
+                      </a:r>
+                    </a:p>
+                  </a:txBody>
+                  <a:tcPr marL="91440" marR="91440" marT="45720" marB="45720">
+                    <a:solidFill>
+                      <a:srgbClr val="F4F6F5"/>
+                    </a:solidFill>
+                  </a:tcPr>
+                </a:tc>
+                <a:tc>
+                  <a:txBody>
+                    <a:bodyPr wrap="square"/>
+                    <a:lstStyle/>
+                    <a:p>
+                      <a:pPr>
+                        <a:lnSpc>
+                          <a:spcPct val="108000"/>
+                        </a:lnSpc>
+                      </a:pPr>
+                      <a:r>
+                        <a:rPr sz="1050" b="0">
+                          <a:solidFill>
+                            <a:srgbClr val="6B7B73"/>
+                          </a:solidFill>
+                          <a:latin typeface="Hanken Grotesk"/>
+                        </a:rPr>
+                        <a:t>-</a:t>
+                      </a:r>
+                    </a:p>
+                  </a:txBody>
+                  <a:tcPr marL="91440" marR="91440" marT="45720" marB="45720">
+                    <a:solidFill>
+                      <a:srgbClr val="F4F6F5"/>
+                    </a:solidFill>
+                  </a:tcPr>
+                </a:tc>
+                <a:tc>
+                  <a:txBody>
+                    <a:bodyPr wrap="square"/>
+                    <a:lstStyle/>
+                    <a:p>
+                      <a:pPr>
+                        <a:lnSpc>
+                          <a:spcPct val="108000"/>
+                        </a:lnSpc>
+                      </a:pPr>
+                      <a:r>
+                        <a:rPr sz="1050" b="0">
+                          <a:solidFill>
+                            <a:srgbClr val="6B7B73"/>
+                          </a:solidFill>
+                          <a:latin typeface="Hanken Grotesk"/>
+                        </a:rPr>
+                        <a:t>Free gateway endpoint</a:t>
+                      </a:r>
+                    </a:p>
+                  </a:txBody>
+                  <a:tcPr marL="91440" marR="91440" marT="45720" marB="45720">
+                    <a:solidFill>
+                      <a:srgbClr val="F4F6F5"/>
+                    </a:solidFill>
+                  </a:tcPr>
+                </a:tc>
+              </a:tr>
+            </a:tbl>
+          </a:graphicData>
+        </a:graphic>
+      </p:graphicFrame>
+      <p:sp>
+        <p:nvSpPr>
+          <p:cNvPr id="6" name="TextBox 5"/>
           <p:cNvSpPr txBox="1"/>
           <p:nvPr/>
         </p:nvSpPr>
         <p:spPr>
           <a:xfrm>
-            <a:off x="1472184" y="3374136"/>
-            <a:ext cx="2679192" cy="457200"/>
+            <a:off x="658368" y="4434840"/>
+            <a:ext cx="10881360" cy="1737360"/>
           </a:xfrm>
           <a:prstGeom prst="rect">
             <a:avLst/>
@@ -5820,446 +5997,94 @@
           </a:bodyPr>
           <a:lstStyle/>
           <a:p>
-            <a:r>
-              <a:rPr sz="1400" b="1">
-                <a:solidFill>
-                  <a:srgbClr val="15201C"/>
-                </a:solidFill>
-                <a:latin typeface="Space Grotesk"/>
-              </a:rPr>
-              <a:t>Rich in WhatsApp</a:t>
-            </a:r>
-          </a:p>
-        </p:txBody>
-      </p:sp>
-      <p:sp>
-        <p:nvSpPr>
-          <p:cNvPr id="10" name="TextBox 9"/>
-          <p:cNvSpPr txBox="1"/>
-          <p:nvPr/>
-        </p:nvSpPr>
-        <p:spPr>
-          <a:xfrm>
-            <a:off x="886968" y="3959352"/>
-            <a:ext cx="3191256" cy="1325880"/>
-          </a:xfrm>
-          <a:prstGeom prst="rect">
-            <a:avLst/>
-          </a:prstGeom>
-          <a:noFill/>
-        </p:spPr>
-        <p:txBody>
-          <a:bodyPr wrap="square">
-            <a:spAutoFit/>
-          </a:bodyPr>
-          <a:lstStyle/>
-          <a:p>
             <a:pPr>
               <a:lnSpc>
-                <a:spcPct val="114000"/>
+                <a:spcPct val="115000"/>
               </a:lnSpc>
+              <a:spcAft>
+                <a:spcPts val="600"/>
+              </a:spcAft>
             </a:pPr>
             <a:r>
-              <a:rPr sz="1200" b="0">
+              <a:rPr sz="1250" b="1">
+                <a:solidFill>
+                  <a:srgbClr val="15201C"/>
+                </a:solidFill>
+                <a:latin typeface="Hanken Grotesk"/>
+              </a:rPr>
+              <a:t>Structural consequence: </a:t>
+            </a:r>
+            <a:r>
+              <a:rPr sz="1250" b="0">
                 <a:solidFill>
                   <a:srgbClr val="6B7B73"/>
                 </a:solidFill>
                 <a:latin typeface="Hanken Grotesk"/>
               </a:rPr>
-              <a:t>Crawlers get server-injected OG tags — every shared link renders as a product card.</a:t>
-            </a:r>
-          </a:p>
-        </p:txBody>
-      </p:sp>
-      <p:sp>
-        <p:nvSpPr>
-          <p:cNvPr id="11" name="Rounded Rectangle 10"/>
-          <p:cNvSpPr/>
-          <p:nvPr/>
-        </p:nvSpPr>
-        <p:spPr>
-          <a:xfrm>
-            <a:off x="4480560" y="3154680"/>
-            <a:ext cx="3593592" cy="2286000"/>
-          </a:xfrm>
-          <a:prstGeom prst="roundRect">
-            <a:avLst>
-              <a:gd name="adj" fmla="val 5500"/>
-            </a:avLst>
-          </a:prstGeom>
-          <a:solidFill>
-            <a:srgbClr val="FFFFFF"/>
-          </a:solidFill>
-          <a:ln w="12700">
-            <a:solidFill>
-              <a:srgbClr val="E6EBE8"/>
-            </a:solidFill>
-          </a:ln>
-          <a:effectLst/>
-        </p:spPr>
-        <p:style>
-          <a:lnRef idx="1">
-            <a:schemeClr val="accent1"/>
-          </a:lnRef>
-          <a:fillRef idx="3">
-            <a:schemeClr val="accent1"/>
-          </a:fillRef>
-          <a:effectRef idx="2">
-            <a:schemeClr val="accent1"/>
-          </a:effectRef>
-          <a:fontRef idx="minor">
-            <a:schemeClr val="lt1"/>
-          </a:fontRef>
-        </p:style>
-        <p:txBody>
-          <a:bodyPr rtlCol="0" anchor="ctr" wrap="square" lIns="146304" rIns="146304" tIns="109728" bIns="109728"/>
-          <a:lstStyle/>
-          <a:p>
-            <a:pPr algn="ctr"/>
-          </a:p>
-        </p:txBody>
-      </p:sp>
-      <p:sp>
-        <p:nvSpPr>
-          <p:cNvPr id="12" name="Rounded Rectangle 11"/>
-          <p:cNvSpPr/>
-          <p:nvPr/>
-        </p:nvSpPr>
-        <p:spPr>
-          <a:xfrm>
-            <a:off x="4663440" y="3337560"/>
-            <a:ext cx="475488" cy="475488"/>
-          </a:xfrm>
-          <a:prstGeom prst="roundRect">
-            <a:avLst>
-              <a:gd name="adj" fmla="val 28000"/>
-            </a:avLst>
-          </a:prstGeom>
-          <a:solidFill>
-            <a:srgbClr val="E7F1EC"/>
-          </a:solidFill>
-          <a:ln w="12700">
-            <a:solidFill>
-              <a:srgbClr val="D2E3D9"/>
-            </a:solidFill>
-          </a:ln>
-          <a:effectLst/>
-        </p:spPr>
-        <p:style>
-          <a:lnRef idx="1">
-            <a:schemeClr val="accent1"/>
-          </a:lnRef>
-          <a:fillRef idx="3">
-            <a:schemeClr val="accent1"/>
-          </a:fillRef>
-          <a:effectRef idx="2">
-            <a:schemeClr val="accent1"/>
-          </a:effectRef>
-          <a:fontRef idx="minor">
-            <a:schemeClr val="lt1"/>
-          </a:fontRef>
-        </p:style>
-        <p:txBody>
-          <a:bodyPr rtlCol="0" anchor="ctr" wrap="square" lIns="146304" rIns="146304" tIns="109728" bIns="109728"/>
-          <a:lstStyle/>
-          <a:p>
-            <a:pPr algn="ctr"/>
-          </a:p>
-        </p:txBody>
-      </p:sp>
-      <p:pic>
-        <p:nvPicPr>
-          <p:cNvPr id="13" name="Picture 12" descr="cookie.png"/>
-          <p:cNvPicPr>
-            <a:picLocks noChangeAspect="1"/>
-          </p:cNvPicPr>
-          <p:nvPr/>
-        </p:nvPicPr>
-        <p:blipFill>
-          <a:blip r:embed="rId3"/>
-          <a:stretch>
-            <a:fillRect/>
-          </a:stretch>
-        </p:blipFill>
-        <p:spPr>
-          <a:xfrm>
-            <a:off x="4730008" y="3404128"/>
-            <a:ext cx="342351" cy="342351"/>
-          </a:xfrm>
-          <a:prstGeom prst="rect">
-            <a:avLst/>
-          </a:prstGeom>
-        </p:spPr>
-      </p:pic>
-      <p:sp>
-        <p:nvSpPr>
-          <p:cNvPr id="14" name="TextBox 13"/>
-          <p:cNvSpPr txBox="1"/>
-          <p:nvPr/>
-        </p:nvSpPr>
-        <p:spPr>
-          <a:xfrm>
-            <a:off x="5266944" y="3374136"/>
-            <a:ext cx="2679192" cy="457200"/>
-          </a:xfrm>
-          <a:prstGeom prst="rect">
-            <a:avLst/>
-          </a:prstGeom>
-          <a:noFill/>
-        </p:spPr>
-        <p:txBody>
-          <a:bodyPr wrap="square">
-            <a:spAutoFit/>
-          </a:bodyPr>
-          <a:lstStyle/>
-          <a:p>
-            <a:r>
-              <a:rPr sz="1400" b="1">
-                <a:solidFill>
-                  <a:srgbClr val="15201C"/>
-                </a:solidFill>
-                <a:latin typeface="Space Grotesk"/>
-              </a:rPr>
-              <a:t>Cookieless</a:t>
-            </a:r>
-          </a:p>
-        </p:txBody>
-      </p:sp>
-      <p:sp>
-        <p:nvSpPr>
-          <p:cNvPr id="15" name="TextBox 14"/>
-          <p:cNvSpPr txBox="1"/>
-          <p:nvPr/>
-        </p:nvSpPr>
-        <p:spPr>
-          <a:xfrm>
-            <a:off x="4681728" y="3959352"/>
-            <a:ext cx="3191256" cy="1325880"/>
-          </a:xfrm>
-          <a:prstGeom prst="rect">
-            <a:avLst/>
-          </a:prstGeom>
-          <a:noFill/>
-        </p:spPr>
-        <p:txBody>
-          <a:bodyPr wrap="square">
-            <a:spAutoFit/>
-          </a:bodyPr>
-          <a:lstStyle/>
+              <a:t>in-VPC functions cannot initiate outward calls - so the conversion chain is always proxy -&gt; writer (invoke), and admin claim intents settle asynchronously on the next poll heartbeat rather than inline.</a:t>
+            </a:r>
+          </a:p>
           <a:p>
             <a:pPr>
               <a:lnSpc>
-                <a:spcPct val="114000"/>
+                <a:spcPct val="115000"/>
               </a:lnSpc>
+              <a:spcAft>
+                <a:spcPts val="600"/>
+              </a:spcAft>
             </a:pPr>
             <a:r>
-              <a:rPr sz="1200" b="0">
+              <a:rPr sz="1250" b="1">
+                <a:solidFill>
+                  <a:srgbClr val="15201C"/>
+                </a:solidFill>
+                <a:latin typeface="Hanken Grotesk"/>
+              </a:rPr>
+              <a:t>Blast-radius bonus: </a:t>
+            </a:r>
+            <a:r>
+              <a:rPr sz="1250" b="0">
                 <a:solidFill>
                   <a:srgbClr val="6B7B73"/>
                 </a:solidFill>
                 <a:latin typeface="Hanken Grotesk"/>
               </a:rPr>
-              <a:t>Attribution rides the URL (custom_parameters), not a cookie — no consent-banner dependency (ADR-0008).</a:t>
-            </a:r>
-          </a:p>
-        </p:txBody>
-      </p:sp>
-      <p:sp>
-        <p:nvSpPr>
-          <p:cNvPr id="16" name="Rounded Rectangle 15"/>
-          <p:cNvSpPr/>
-          <p:nvPr/>
-        </p:nvSpPr>
-        <p:spPr>
-          <a:xfrm>
-            <a:off x="8275320" y="3154680"/>
-            <a:ext cx="3593592" cy="2286000"/>
-          </a:xfrm>
-          <a:prstGeom prst="roundRect">
-            <a:avLst>
-              <a:gd name="adj" fmla="val 5500"/>
-            </a:avLst>
-          </a:prstGeom>
-          <a:solidFill>
-            <a:srgbClr val="FFFFFF"/>
-          </a:solidFill>
-          <a:ln w="12700">
-            <a:solidFill>
-              <a:srgbClr val="E6EBE8"/>
-            </a:solidFill>
-          </a:ln>
-          <a:effectLst/>
-        </p:spPr>
-        <p:style>
-          <a:lnRef idx="1">
-            <a:schemeClr val="accent1"/>
-          </a:lnRef>
-          <a:fillRef idx="3">
-            <a:schemeClr val="accent1"/>
-          </a:fillRef>
-          <a:effectRef idx="2">
-            <a:schemeClr val="accent1"/>
-          </a:effectRef>
-          <a:fontRef idx="minor">
-            <a:schemeClr val="lt1"/>
-          </a:fontRef>
-        </p:style>
-        <p:txBody>
-          <a:bodyPr rtlCol="0" anchor="ctr" wrap="square" lIns="146304" rIns="146304" tIns="109728" bIns="109728"/>
-          <a:lstStyle/>
-          <a:p>
-            <a:pPr algn="ctr"/>
-          </a:p>
-        </p:txBody>
-      </p:sp>
-      <p:sp>
-        <p:nvSpPr>
-          <p:cNvPr id="17" name="Rounded Rectangle 16"/>
-          <p:cNvSpPr/>
-          <p:nvPr/>
-        </p:nvSpPr>
-        <p:spPr>
-          <a:xfrm>
-            <a:off x="8458200" y="3337560"/>
-            <a:ext cx="475488" cy="475488"/>
-          </a:xfrm>
-          <a:prstGeom prst="roundRect">
-            <a:avLst>
-              <a:gd name="adj" fmla="val 28000"/>
-            </a:avLst>
-          </a:prstGeom>
-          <a:solidFill>
-            <a:srgbClr val="E7F1EC"/>
-          </a:solidFill>
-          <a:ln w="12700">
-            <a:solidFill>
-              <a:srgbClr val="D2E3D9"/>
-            </a:solidFill>
-          </a:ln>
-          <a:effectLst/>
-        </p:spPr>
-        <p:style>
-          <a:lnRef idx="1">
-            <a:schemeClr val="accent1"/>
-          </a:lnRef>
-          <a:fillRef idx="3">
-            <a:schemeClr val="accent1"/>
-          </a:fillRef>
-          <a:effectRef idx="2">
-            <a:schemeClr val="accent1"/>
-          </a:effectRef>
-          <a:fontRef idx="minor">
-            <a:schemeClr val="lt1"/>
-          </a:fontRef>
-        </p:style>
-        <p:txBody>
-          <a:bodyPr rtlCol="0" anchor="ctr" wrap="square" lIns="146304" rIns="146304" tIns="109728" bIns="109728"/>
-          <a:lstStyle/>
-          <a:p>
-            <a:pPr algn="ctr"/>
-          </a:p>
-        </p:txBody>
-      </p:sp>
-      <p:pic>
-        <p:nvPicPr>
-          <p:cNvPr id="18" name="Picture 17" descr="bolt.png"/>
-          <p:cNvPicPr>
-            <a:picLocks noChangeAspect="1"/>
-          </p:cNvPicPr>
-          <p:nvPr/>
-        </p:nvPicPr>
-        <p:blipFill>
-          <a:blip r:embed="rId4"/>
-          <a:stretch>
-            <a:fillRect/>
-          </a:stretch>
-        </p:blipFill>
-        <p:spPr>
-          <a:xfrm>
-            <a:off x="8524768" y="3404128"/>
-            <a:ext cx="342351" cy="342351"/>
-          </a:xfrm>
-          <a:prstGeom prst="rect">
-            <a:avLst/>
-          </a:prstGeom>
-        </p:spPr>
-      </p:pic>
-      <p:sp>
-        <p:nvSpPr>
-          <p:cNvPr id="19" name="TextBox 18"/>
-          <p:cNvSpPr txBox="1"/>
-          <p:nvPr/>
-        </p:nvSpPr>
-        <p:spPr>
-          <a:xfrm>
-            <a:off x="9061704" y="3374136"/>
-            <a:ext cx="2679192" cy="457200"/>
-          </a:xfrm>
-          <a:prstGeom prst="rect">
-            <a:avLst/>
-          </a:prstGeom>
-          <a:noFill/>
-        </p:spPr>
-        <p:txBody>
-          <a:bodyPr wrap="square">
-            <a:spAutoFit/>
-          </a:bodyPr>
-          <a:lstStyle/>
-          <a:p>
-            <a:r>
-              <a:rPr sz="1400" b="1">
-                <a:solidFill>
-                  <a:srgbClr val="15201C"/>
-                </a:solidFill>
-                <a:latin typeface="Space Grotesk"/>
-              </a:rPr>
-              <a:t>Burst-proof</a:t>
-            </a:r>
-          </a:p>
-        </p:txBody>
-      </p:sp>
-      <p:sp>
-        <p:nvSpPr>
-          <p:cNvPr id="20" name="TextBox 19"/>
-          <p:cNvSpPr txBox="1"/>
-          <p:nvPr/>
-        </p:nvSpPr>
-        <p:spPr>
-          <a:xfrm>
-            <a:off x="8476488" y="3959352"/>
-            <a:ext cx="3191256" cy="1325880"/>
-          </a:xfrm>
-          <a:prstGeom prst="rect">
-            <a:avLst/>
-          </a:prstGeom>
-          <a:noFill/>
-        </p:spPr>
-        <p:txBody>
-          <a:bodyPr wrap="square">
-            <a:spAutoFit/>
-          </a:bodyPr>
-          <a:lstStyle/>
+              <a:t>the retailer credential is readable by exactly one non-VPC function; a compromised in-VPC function has no path to it or to the internet.</a:t>
+            </a:r>
+          </a:p>
           <a:p>
             <a:pPr>
               <a:lnSpc>
-                <a:spcPct val="114000"/>
+                <a:spcPct val="115000"/>
               </a:lnSpc>
+              <a:spcAft>
+                <a:spcPts val="600"/>
+              </a:spcAft>
             </a:pPr>
             <a:r>
-              <a:rPr sz="1200" b="0">
+              <a:rPr sz="1250" b="1">
+                <a:solidFill>
+                  <a:srgbClr val="15201C"/>
+                </a:solidFill>
+                <a:latin typeface="Hanken Grotesk"/>
+              </a:rPr>
+              <a:t>Revisit trigger: </a:t>
+            </a:r>
+            <a:r>
+              <a:rPr sz="1250" b="0">
                 <a:solidFill>
                   <a:srgbClr val="6B7B73"/>
                 </a:solidFill>
                 <a:latin typeface="Hanken Grotesk"/>
               </a:rPr>
-              <a:t>Aurora is never on this path — a viral spike cannot touch the money database.</a:t>
-            </a:r>
-          </a:p>
-        </p:txBody>
-      </p:sp>
-      <p:sp>
-        <p:nvSpPr>
-          <p:cNvPr id="21" name="Rectangle 20"/>
+              <a:t>sustained Aurora connection pressure (alarm at 80% of 50) -&gt; introduce RDS Proxy; steady traffic -&gt; reserved concurrency once the account quota (10) is raised.</a:t>
+            </a:r>
+          </a:p>
+        </p:txBody>
+      </p:sp>
+      <p:sp>
+        <p:nvSpPr>
+          <p:cNvPr id="7" name="Rectangle 6"/>
           <p:cNvSpPr/>
           <p:nvPr/>
         </p:nvSpPr>
@@ -6303,7 +6128,7 @@
       </p:sp>
       <p:sp>
         <p:nvSpPr>
-          <p:cNvPr id="22" name="TextBox 21"/>
+          <p:cNvPr id="8" name="TextBox 7"/>
           <p:cNvSpPr txBox="1"/>
           <p:nvPr/>
         </p:nvSpPr>
@@ -6346,7 +6171,7 @@
       </p:sp>
       <p:sp>
         <p:nvSpPr>
-          <p:cNvPr id="23" name="TextBox 22"/>
+          <p:cNvPr id="9" name="TextBox 8"/>
           <p:cNvSpPr txBox="1"/>
           <p:nvPr/>
         </p:nvSpPr>
@@ -6469,7 +6294,7 @@
                 </a:solidFill>
                 <a:latin typeface="Space Mono"/>
               </a:rPr>
-              <a:t>ENGINEERING</a:t>
+              <a:t>DECISIONS</a:t>
             </a:r>
           </a:p>
         </p:txBody>
@@ -6497,13 +6322,13 @@
           <a:lstStyle/>
           <a:p>
             <a:r>
-              <a:rPr sz="2700" b="1">
+              <a:rPr sz="2500" b="1">
                 <a:solidFill>
                   <a:srgbClr val="15201C"/>
                 </a:solidFill>
                 <a:latin typeface="Space Grotesk"/>
               </a:rPr>
-              <a:t>Following the money — poll, don't listen</a:t>
+              <a:t>Money — poll over webhook, append over update</a:t>
             </a:r>
           </a:p>
         </p:txBody>
@@ -6516,139 +6341,8 @@
         </p:nvSpPr>
         <p:spPr>
           <a:xfrm>
-            <a:off x="658368" y="1828800"/>
-            <a:ext cx="10881360" cy="868680"/>
-          </a:xfrm>
-          <a:prstGeom prst="roundRect">
-            <a:avLst>
-              <a:gd name="adj" fmla="val 5500"/>
-            </a:avLst>
-          </a:prstGeom>
-          <a:solidFill>
-            <a:srgbClr val="1B2924"/>
-          </a:solidFill>
-          <a:ln>
-            <a:noFill/>
-          </a:ln>
-          <a:effectLst/>
-        </p:spPr>
-        <p:style>
-          <a:lnRef idx="1">
-            <a:schemeClr val="accent1"/>
-          </a:lnRef>
-          <a:fillRef idx="3">
-            <a:schemeClr val="accent1"/>
-          </a:fillRef>
-          <a:effectRef idx="2">
-            <a:schemeClr val="accent1"/>
-          </a:effectRef>
-          <a:fontRef idx="minor">
-            <a:schemeClr val="lt1"/>
-          </a:fontRef>
-        </p:style>
-        <p:txBody>
-          <a:bodyPr rtlCol="0" anchor="ctr" wrap="square" lIns="146304" rIns="146304" tIns="109728" bIns="109728"/>
-          <a:lstStyle/>
-          <a:p>
-            <a:pPr algn="ctr">
-              <a:lnSpc>
-                <a:spcPct val="125000"/>
-              </a:lnSpc>
-            </a:pPr>
-            <a:r>
-              <a:rPr sz="1300" b="0">
-                <a:solidFill>
-                  <a:srgbClr val="FFFFFF"/>
-                </a:solidFill>
-                <a:latin typeface="Space Mono"/>
-              </a:rPr>
-              <a:t>heartbeat 15 min</a:t>
-            </a:r>
-            <a:r>
-              <a:rPr sz="1300" b="1">
-                <a:solidFill>
-                  <a:srgbClr val="7FE0B0"/>
-                </a:solidFill>
-                <a:latin typeface="Space Mono"/>
-              </a:rPr>
-              <a:t> → </a:t>
-            </a:r>
-            <a:r>
-              <a:rPr sz="1300" b="0">
-                <a:solidFill>
-                  <a:srgbClr val="FFFFFF"/>
-                </a:solidFill>
-                <a:latin typeface="Space Mono"/>
-              </a:rPr>
-              <a:t>retailer-proxy: listOrdersByIndex</a:t>
-            </a:r>
-            <a:r>
-              <a:rPr sz="1300" b="1">
-                <a:solidFill>
-                  <a:srgbClr val="7FE0B0"/>
-                </a:solidFill>
-                <a:latin typeface="Space Mono"/>
-              </a:rPr>
-              <a:t> → </a:t>
-            </a:r>
-            <a:r>
-              <a:rPr sz="1300" b="0">
-                <a:solidFill>
-                  <a:srgbClr val="FFFFFF"/>
-                </a:solidFill>
-                <a:latin typeface="Space Mono"/>
-              </a:rPr>
-              <a:t>attribution resolve</a:t>
-            </a:r>
-            <a:r>
-              <a:rPr sz="1300" b="1">
-                <a:solidFill>
-                  <a:srgbClr val="7FE0B0"/>
-                </a:solidFill>
-                <a:latin typeface="Space Mono"/>
-              </a:rPr>
-              <a:t> → </a:t>
-            </a:r>
-            <a:r>
-              <a:rPr sz="1300" b="0">
-                <a:solidFill>
-                  <a:srgbClr val="FFFFFF"/>
-                </a:solidFill>
-                <a:latin typeface="Space Mono"/>
-              </a:rPr>
-              <a:t>invoke in-VPC writer</a:t>
-            </a:r>
-            <a:r>
-              <a:rPr sz="1300" b="1">
-                <a:solidFill>
-                  <a:srgbClr val="7FE0B0"/>
-                </a:solidFill>
-                <a:latin typeface="Space Mono"/>
-              </a:rPr>
-              <a:t> → </a:t>
-            </a:r>
-            <a:r>
-              <a:rPr sz="1300" b="0">
-                <a:solidFill>
-                  <a:srgbClr val="FFFFFF"/>
-                </a:solidFill>
-                <a:latin typeface="Space Mono"/>
-              </a:rPr>
-              <a:t>append ledger + audit chain</a:t>
-            </a:r>
-          </a:p>
-        </p:txBody>
-      </p:sp>
-      <p:sp>
-        <p:nvSpPr>
-          <p:cNvPr id="6" name="Rounded Rectangle 5"/>
-          <p:cNvSpPr/>
-          <p:nvPr/>
-        </p:nvSpPr>
-        <p:spPr>
-          <a:xfrm>
-            <a:off x="685800" y="3154680"/>
-            <a:ext cx="3593592" cy="2286000"/>
+            <a:off x="658368" y="1783080"/>
+            <a:ext cx="5349240" cy="3931920"/>
           </a:xfrm>
           <a:prstGeom prst="roundRect">
             <a:avLst>
@@ -6689,86 +6383,14 @@
       </p:sp>
       <p:sp>
         <p:nvSpPr>
-          <p:cNvPr id="7" name="Rounded Rectangle 6"/>
-          <p:cNvSpPr/>
-          <p:nvPr/>
-        </p:nvSpPr>
-        <p:spPr>
-          <a:xfrm>
-            <a:off x="868680" y="3337560"/>
-            <a:ext cx="475488" cy="475488"/>
-          </a:xfrm>
-          <a:prstGeom prst="roundRect">
-            <a:avLst>
-              <a:gd name="adj" fmla="val 28000"/>
-            </a:avLst>
-          </a:prstGeom>
-          <a:solidFill>
-            <a:srgbClr val="E7F1EC"/>
-          </a:solidFill>
-          <a:ln w="12700">
-            <a:solidFill>
-              <a:srgbClr val="D2E3D9"/>
-            </a:solidFill>
-          </a:ln>
-          <a:effectLst/>
-        </p:spPr>
-        <p:style>
-          <a:lnRef idx="1">
-            <a:schemeClr val="accent1"/>
-          </a:lnRef>
-          <a:fillRef idx="3">
-            <a:schemeClr val="accent1"/>
-          </a:fillRef>
-          <a:effectRef idx="2">
-            <a:schemeClr val="accent1"/>
-          </a:effectRef>
-          <a:fontRef idx="minor">
-            <a:schemeClr val="lt1"/>
-          </a:fontRef>
-        </p:style>
-        <p:txBody>
-          <a:bodyPr rtlCol="0" anchor="ctr" wrap="square" lIns="146304" rIns="146304" tIns="109728" bIns="109728"/>
-          <a:lstStyle/>
-          <a:p>
-            <a:pPr algn="ctr"/>
-          </a:p>
-        </p:txBody>
-      </p:sp>
-      <p:pic>
-        <p:nvPicPr>
-          <p:cNvPr id="8" name="Picture 7" descr="refresh.png"/>
-          <p:cNvPicPr>
-            <a:picLocks noChangeAspect="1"/>
-          </p:cNvPicPr>
-          <p:nvPr/>
-        </p:nvPicPr>
-        <p:blipFill>
-          <a:blip r:embed="rId2"/>
-          <a:stretch>
-            <a:fillRect/>
-          </a:stretch>
-        </p:blipFill>
-        <p:spPr>
-          <a:xfrm>
-            <a:off x="935248" y="3404128"/>
-            <a:ext cx="342351" cy="342351"/>
-          </a:xfrm>
-          <a:prstGeom prst="rect">
-            <a:avLst/>
-          </a:prstGeom>
-        </p:spPr>
-      </p:pic>
-      <p:sp>
-        <p:nvSpPr>
-          <p:cNvPr id="9" name="TextBox 8"/>
+          <p:cNvPr id="6" name="TextBox 5"/>
           <p:cNvSpPr txBox="1"/>
           <p:nvPr/>
         </p:nvSpPr>
         <p:spPr>
           <a:xfrm>
-            <a:off x="1472184" y="3374136"/>
-            <a:ext cx="2679192" cy="457200"/>
+            <a:off x="868680" y="1938528"/>
+            <a:ext cx="4937760" cy="457200"/>
           </a:xfrm>
           <a:prstGeom prst="rect">
             <a:avLst/>
@@ -6782,27 +6404,27 @@
           <a:lstStyle/>
           <a:p>
             <a:r>
-              <a:rPr sz="1400" b="1">
+              <a:rPr sz="1500" b="1">
                 <a:solidFill>
                   <a:srgbClr val="15201C"/>
                 </a:solidFill>
                 <a:latin typeface="Space Grotesk"/>
               </a:rPr>
-              <a:t>Poll, don't listen</a:t>
-            </a:r>
-          </a:p>
-        </p:txBody>
-      </p:sp>
-      <p:sp>
-        <p:nvSpPr>
-          <p:cNvPr id="10" name="TextBox 9"/>
+              <a:t>Ingestion: scheduled reconciliation</a:t>
+            </a:r>
+          </a:p>
+        </p:txBody>
+      </p:sp>
+      <p:sp>
+        <p:nvSpPr>
+          <p:cNvPr id="7" name="TextBox 6"/>
           <p:cNvSpPr txBox="1"/>
           <p:nvPr/>
         </p:nvSpPr>
         <p:spPr>
           <a:xfrm>
-            <a:off x="886968" y="3959352"/>
-            <a:ext cx="3191256" cy="1325880"/>
+            <a:off x="868680" y="2468880"/>
+            <a:ext cx="4937760" cy="3108960"/>
           </a:xfrm>
           <a:prstGeom prst="rect">
             <a:avLst/>
@@ -6817,31 +6439,127 @@
           <a:p>
             <a:pPr>
               <a:lnSpc>
-                <a:spcPct val="114000"/>
+                <a:spcPct val="112000"/>
               </a:lnSpc>
+              <a:spcAft>
+                <a:spcPts val="700"/>
+              </a:spcAft>
             </a:pPr>
             <a:r>
+              <a:rPr sz="1200" b="1">
+                <a:solidFill>
+                  <a:srgbClr val="1F7A57"/>
+                </a:solidFill>
+                <a:latin typeface="Hanken Grotesk"/>
+              </a:rPr>
+              <a:t>-  </a:t>
+            </a:r>
+            <a:r>
               <a:rPr sz="1200" b="0">
                 <a:solidFill>
                   <a:srgbClr val="6B7B73"/>
                 </a:solidFill>
                 <a:latin typeface="Hanken Grotesk"/>
               </a:rPr>
-              <a:t>A scheduled reconciliation poll is auditable and replayable; no inbound webhook to spoof (ADR-0009).</a:t>
-            </a:r>
-          </a:p>
-        </p:txBody>
-      </p:sp>
-      <p:sp>
-        <p:nvSpPr>
-          <p:cNvPr id="11" name="Rounded Rectangle 10"/>
+              <a:t>Webhooks rejected: an inbound money-bearing endpoint is a spoofing surface, needs ordering + retry semantics, and the retailer offers no reliable one anyway (ADR-0009).</a:t>
+            </a:r>
+          </a:p>
+          <a:p>
+            <a:pPr>
+              <a:lnSpc>
+                <a:spcPct val="112000"/>
+              </a:lnSpc>
+              <a:spcAft>
+                <a:spcPts val="700"/>
+              </a:spcAft>
+            </a:pPr>
+            <a:r>
+              <a:rPr sz="1200" b="1">
+                <a:solidFill>
+                  <a:srgbClr val="1F7A57"/>
+                </a:solidFill>
+                <a:latin typeface="Hanken Grotesk"/>
+              </a:rPr>
+              <a:t>-  </a:t>
+            </a:r>
+            <a:r>
+              <a:rPr sz="1200" b="0">
+                <a:solidFill>
+                  <a:srgbClr val="6B7B73"/>
+                </a:solidFill>
+                <a:latin typeface="Hanken Grotesk"/>
+              </a:rPr>
+              <a:t>Poll = a cursor in poller_state + listOrdersByIndex every 15 min: replayable from any point, idempotent by the ledger unique index, nothing to authenticate inbound.</a:t>
+            </a:r>
+          </a:p>
+          <a:p>
+            <a:pPr>
+              <a:lnSpc>
+                <a:spcPct val="112000"/>
+              </a:lnSpc>
+              <a:spcAft>
+                <a:spcPts val="700"/>
+              </a:spcAft>
+            </a:pPr>
+            <a:r>
+              <a:rPr sz="1200" b="1">
+                <a:solidFill>
+                  <a:srgbClr val="1F7A57"/>
+                </a:solidFill>
+                <a:latin typeface="Hanken Grotesk"/>
+              </a:rPr>
+              <a:t>-  </a:t>
+            </a:r>
+            <a:r>
+              <a:rPr sz="1200" b="0">
+                <a:solidFill>
+                  <a:srgbClr val="6B7B73"/>
+                </a:solidFill>
+                <a:latin typeface="Hanken Grotesk"/>
+              </a:rPr>
+              <a:t>Accepted latency: minutes to surface, 24-48 h to confirm (retailer settlement dominates - the product promise is days, not seconds).</a:t>
+            </a:r>
+          </a:p>
+          <a:p>
+            <a:pPr>
+              <a:lnSpc>
+                <a:spcPct val="112000"/>
+              </a:lnSpc>
+              <a:spcAft>
+                <a:spcPts val="700"/>
+              </a:spcAft>
+            </a:pPr>
+            <a:r>
+              <a:rPr sz="1200" b="1">
+                <a:solidFill>
+                  <a:srgbClr val="1F7A57"/>
+                </a:solidFill>
+                <a:latin typeface="Hanken Grotesk"/>
+              </a:rPr>
+              <a:t>-  </a:t>
+            </a:r>
+            <a:r>
+              <a:rPr sz="1200" b="0">
+                <a:solidFill>
+                  <a:srgbClr val="6B7B73"/>
+                </a:solidFill>
+                <a:latin typeface="Hanken Grotesk"/>
+              </a:rPr>
+              <a:t>Interim throttling (ADR-0021): sequential calls + one ban-window retry; revisit at real volume / app approval.</a:t>
+            </a:r>
+          </a:p>
+        </p:txBody>
+      </p:sp>
+      <p:sp>
+        <p:nvSpPr>
+          <p:cNvPr id="8" name="Rounded Rectangle 7"/>
           <p:cNvSpPr/>
           <p:nvPr/>
         </p:nvSpPr>
         <p:spPr>
           <a:xfrm>
-            <a:off x="4480560" y="3154680"/>
-            <a:ext cx="3593592" cy="2286000"/>
+            <a:off x="6199632" y="1783080"/>
+            <a:ext cx="5349240" cy="3931920"/>
           </a:xfrm>
           <a:prstGeom prst="roundRect">
             <a:avLst>
@@ -6882,86 +6600,14 @@
       </p:sp>
       <p:sp>
         <p:nvSpPr>
-          <p:cNvPr id="12" name="Rounded Rectangle 11"/>
-          <p:cNvSpPr/>
-          <p:nvPr/>
-        </p:nvSpPr>
-        <p:spPr>
-          <a:xfrm>
-            <a:off x="4663440" y="3337560"/>
-            <a:ext cx="475488" cy="475488"/>
-          </a:xfrm>
-          <a:prstGeom prst="roundRect">
-            <a:avLst>
-              <a:gd name="adj" fmla="val 28000"/>
-            </a:avLst>
-          </a:prstGeom>
-          <a:solidFill>
-            <a:srgbClr val="E7F1EC"/>
-          </a:solidFill>
-          <a:ln w="12700">
-            <a:solidFill>
-              <a:srgbClr val="D2E3D9"/>
-            </a:solidFill>
-          </a:ln>
-          <a:effectLst/>
-        </p:spPr>
-        <p:style>
-          <a:lnRef idx="1">
-            <a:schemeClr val="accent1"/>
-          </a:lnRef>
-          <a:fillRef idx="3">
-            <a:schemeClr val="accent1"/>
-          </a:fillRef>
-          <a:effectRef idx="2">
-            <a:schemeClr val="accent1"/>
-          </a:effectRef>
-          <a:fontRef idx="minor">
-            <a:schemeClr val="lt1"/>
-          </a:fontRef>
-        </p:style>
-        <p:txBody>
-          <a:bodyPr rtlCol="0" anchor="ctr" wrap="square" lIns="146304" rIns="146304" tIns="109728" bIns="109728"/>
-          <a:lstStyle/>
-          <a:p>
-            <a:pPr algn="ctr"/>
-          </a:p>
-        </p:txBody>
-      </p:sp>
-      <p:pic>
-        <p:nvPicPr>
-          <p:cNvPr id="13" name="Picture 12" descr="pen.png"/>
-          <p:cNvPicPr>
-            <a:picLocks noChangeAspect="1"/>
-          </p:cNvPicPr>
-          <p:nvPr/>
-        </p:nvPicPr>
-        <p:blipFill>
-          <a:blip r:embed="rId3"/>
-          <a:stretch>
-            <a:fillRect/>
-          </a:stretch>
-        </p:blipFill>
-        <p:spPr>
-          <a:xfrm>
-            <a:off x="4730008" y="3404128"/>
-            <a:ext cx="342351" cy="342351"/>
-          </a:xfrm>
-          <a:prstGeom prst="rect">
-            <a:avLst/>
-          </a:prstGeom>
-        </p:spPr>
-      </p:pic>
-      <p:sp>
-        <p:nvSpPr>
-          <p:cNvPr id="14" name="TextBox 13"/>
+          <p:cNvPr id="9" name="TextBox 8"/>
           <p:cNvSpPr txBox="1"/>
           <p:nvPr/>
         </p:nvSpPr>
         <p:spPr>
           <a:xfrm>
-            <a:off x="5266944" y="3374136"/>
-            <a:ext cx="2679192" cy="457200"/>
+            <a:off x="6400800" y="1938528"/>
+            <a:ext cx="4937760" cy="457200"/>
           </a:xfrm>
           <a:prstGeom prst="rect">
             <a:avLst/>
@@ -6975,27 +6621,27 @@
           <a:lstStyle/>
           <a:p>
             <a:r>
-              <a:rPr sz="1400" b="1">
+              <a:rPr sz="1500" b="1">
                 <a:solidFill>
                   <a:srgbClr val="15201C"/>
                 </a:solidFill>
                 <a:latin typeface="Space Grotesk"/>
               </a:rPr>
-              <a:t>One writer</a:t>
-            </a:r>
-          </a:p>
-        </p:txBody>
-      </p:sp>
-      <p:sp>
-        <p:nvSpPr>
-          <p:cNvPr id="15" name="TextBox 14"/>
+              <a:t>Storage: append-only + GRANT-enforced</a:t>
+            </a:r>
+          </a:p>
+        </p:txBody>
+      </p:sp>
+      <p:sp>
+        <p:nvSpPr>
+          <p:cNvPr id="10" name="TextBox 9"/>
           <p:cNvSpPr txBox="1"/>
           <p:nvPr/>
         </p:nvSpPr>
         <p:spPr>
           <a:xfrm>
-            <a:off x="4681728" y="3959352"/>
-            <a:ext cx="3191256" cy="1325880"/>
+            <a:off x="6400800" y="2468880"/>
+            <a:ext cx="4937760" cy="3108960"/>
           </a:xfrm>
           <a:prstGeom prst="rect">
             <a:avLst/>
@@ -7010,217 +6656,120 @@
           <a:p>
             <a:pPr>
               <a:lnSpc>
-                <a:spcPct val="114000"/>
+                <a:spcPct val="112000"/>
               </a:lnSpc>
+              <a:spcAft>
+                <a:spcPts val="700"/>
+              </a:spcAft>
             </a:pPr>
             <a:r>
+              <a:rPr sz="1200" b="1">
+                <a:solidFill>
+                  <a:srgbClr val="1F7A57"/>
+                </a:solidFill>
+                <a:latin typeface="Hanken Grotesk"/>
+              </a:rPr>
+              <a:t>-  </a:t>
+            </a:r>
+            <a:r>
               <a:rPr sz="1200" b="0">
                 <a:solidFill>
                   <a:srgbClr val="6B7B73"/>
                 </a:solidFill>
                 <a:latin typeface="Hanken Grotesk"/>
               </a:rPr>
-              <a:t>Only poller_writer can INSERT into the ledger; every row is audit-chained.</a:t>
-            </a:r>
-          </a:p>
-        </p:txBody>
-      </p:sp>
-      <p:sp>
-        <p:nvSpPr>
-          <p:cNvPr id="16" name="Rounded Rectangle 15"/>
-          <p:cNvSpPr/>
-          <p:nvPr/>
-        </p:nvSpPr>
-        <p:spPr>
-          <a:xfrm>
-            <a:off x="8275320" y="3154680"/>
-            <a:ext cx="3593592" cy="2286000"/>
-          </a:xfrm>
-          <a:prstGeom prst="roundRect">
-            <a:avLst>
-              <a:gd name="adj" fmla="val 5500"/>
-            </a:avLst>
-          </a:prstGeom>
-          <a:solidFill>
-            <a:srgbClr val="FFFFFF"/>
-          </a:solidFill>
-          <a:ln w="12700">
-            <a:solidFill>
-              <a:srgbClr val="E6EBE8"/>
-            </a:solidFill>
-          </a:ln>
-          <a:effectLst/>
-        </p:spPr>
-        <p:style>
-          <a:lnRef idx="1">
-            <a:schemeClr val="accent1"/>
-          </a:lnRef>
-          <a:fillRef idx="3">
-            <a:schemeClr val="accent1"/>
-          </a:fillRef>
-          <a:effectRef idx="2">
-            <a:schemeClr val="accent1"/>
-          </a:effectRef>
-          <a:fontRef idx="minor">
-            <a:schemeClr val="lt1"/>
-          </a:fontRef>
-        </p:style>
-        <p:txBody>
-          <a:bodyPr rtlCol="0" anchor="ctr" wrap="square" lIns="146304" rIns="146304" tIns="109728" bIns="109728"/>
-          <a:lstStyle/>
-          <a:p>
-            <a:pPr algn="ctr"/>
-          </a:p>
-        </p:txBody>
-      </p:sp>
-      <p:sp>
-        <p:nvSpPr>
-          <p:cNvPr id="17" name="Rounded Rectangle 16"/>
-          <p:cNvSpPr/>
-          <p:nvPr/>
-        </p:nvSpPr>
-        <p:spPr>
-          <a:xfrm>
-            <a:off x="8458200" y="3337560"/>
-            <a:ext cx="475488" cy="475488"/>
-          </a:xfrm>
-          <a:prstGeom prst="roundRect">
-            <a:avLst>
-              <a:gd name="adj" fmla="val 28000"/>
-            </a:avLst>
-          </a:prstGeom>
-          <a:solidFill>
-            <a:srgbClr val="E7F1EC"/>
-          </a:solidFill>
-          <a:ln w="12700">
-            <a:solidFill>
-              <a:srgbClr val="D2E3D9"/>
-            </a:solidFill>
-          </a:ln>
-          <a:effectLst/>
-        </p:spPr>
-        <p:style>
-          <a:lnRef idx="1">
-            <a:schemeClr val="accent1"/>
-          </a:lnRef>
-          <a:fillRef idx="3">
-            <a:schemeClr val="accent1"/>
-          </a:fillRef>
-          <a:effectRef idx="2">
-            <a:schemeClr val="accent1"/>
-          </a:effectRef>
-          <a:fontRef idx="minor">
-            <a:schemeClr val="lt1"/>
-          </a:fontRef>
-        </p:style>
-        <p:txBody>
-          <a:bodyPr rtlCol="0" anchor="ctr" wrap="square" lIns="146304" rIns="146304" tIns="109728" bIns="109728"/>
-          <a:lstStyle/>
-          <a:p>
-            <a:pPr algn="ctr"/>
-          </a:p>
-        </p:txBody>
-      </p:sp>
-      <p:pic>
-        <p:nvPicPr>
-          <p:cNvPr id="18" name="Picture 17" descr="inbox.png"/>
-          <p:cNvPicPr>
-            <a:picLocks noChangeAspect="1"/>
-          </p:cNvPicPr>
-          <p:nvPr/>
-        </p:nvPicPr>
-        <p:blipFill>
-          <a:blip r:embed="rId4"/>
-          <a:stretch>
-            <a:fillRect/>
-          </a:stretch>
-        </p:blipFill>
-        <p:spPr>
-          <a:xfrm>
-            <a:off x="8524768" y="3404128"/>
-            <a:ext cx="342351" cy="342351"/>
-          </a:xfrm>
-          <a:prstGeom prst="rect">
-            <a:avLst/>
-          </a:prstGeom>
-        </p:spPr>
-      </p:pic>
-      <p:sp>
-        <p:nvSpPr>
-          <p:cNvPr id="19" name="TextBox 18"/>
-          <p:cNvSpPr txBox="1"/>
-          <p:nvPr/>
-        </p:nvSpPr>
-        <p:spPr>
-          <a:xfrm>
-            <a:off x="9061704" y="3374136"/>
-            <a:ext cx="2679192" cy="457200"/>
-          </a:xfrm>
-          <a:prstGeom prst="rect">
-            <a:avLst/>
-          </a:prstGeom>
-          <a:noFill/>
-        </p:spPr>
-        <p:txBody>
-          <a:bodyPr wrap="square">
-            <a:spAutoFit/>
-          </a:bodyPr>
-          <a:lstStyle/>
-          <a:p>
-            <a:r>
-              <a:rPr sz="1400" b="1">
-                <a:solidFill>
-                  <a:srgbClr val="15201C"/>
-                </a:solidFill>
-                <a:latin typeface="Space Grotesk"/>
-              </a:rPr>
-              <a:t>Claim queue</a:t>
-            </a:r>
-          </a:p>
-        </p:txBody>
-      </p:sp>
-      <p:sp>
-        <p:nvSpPr>
-          <p:cNvPr id="20" name="TextBox 19"/>
-          <p:cNvSpPr txBox="1"/>
-          <p:nvPr/>
-        </p:nvSpPr>
-        <p:spPr>
-          <a:xfrm>
-            <a:off x="8476488" y="3959352"/>
-            <a:ext cx="3191256" cy="1325880"/>
-          </a:xfrm>
-          <a:prstGeom prst="rect">
-            <a:avLst/>
-          </a:prstGeom>
-          <a:noFill/>
-        </p:spPr>
-        <p:txBody>
-          <a:bodyPr wrap="square">
-            <a:spAutoFit/>
-          </a:bodyPr>
-          <a:lstStyle/>
+              <a:t>Lifecycle is data, not mutation: pending -&gt; confirmed -&gt; clawback are separate immutable rows; balances are always derived.</a:t>
+            </a:r>
+          </a:p>
           <a:p>
             <a:pPr>
               <a:lnSpc>
-                <a:spcPct val="114000"/>
+                <a:spcPct val="112000"/>
               </a:lnSpc>
+              <a:spcAft>
+                <a:spcPts val="700"/>
+              </a:spcAft>
             </a:pPr>
             <a:r>
+              <a:rPr sz="1200" b="1">
+                <a:solidFill>
+                  <a:srgbClr val="1F7A57"/>
+                </a:solidFill>
+                <a:latin typeface="Hanken Grotesk"/>
+              </a:rPr>
+              <a:t>-  </a:t>
+            </a:r>
+            <a:r>
               <a:rPr sz="1200" b="0">
                 <a:solidFill>
                   <a:srgbClr val="6B7B73"/>
                 </a:solidFill>
                 <a:latin typeface="Hanken Grotesk"/>
               </a:rPr>
-              <a:t>Unmatched orders park in DynamoDB; admin claims settle on the next beat.</a:t>
-            </a:r>
-          </a:p>
-        </p:txBody>
-      </p:sp>
-      <p:sp>
-        <p:nvSpPr>
-          <p:cNvPr id="21" name="Rectangle 20"/>
+              <a:t>The invariant lives in Postgres, not app code: UPDATE/DELETE revoked from every role; only poller_writer can INSERT; audit_append is SECURITY DEFINER.</a:t>
+            </a:r>
+          </a:p>
+          <a:p>
+            <a:pPr>
+              <a:lnSpc>
+                <a:spcPct val="112000"/>
+              </a:lnSpc>
+              <a:spcAft>
+                <a:spcPts val="700"/>
+              </a:spcAft>
+            </a:pPr>
+            <a:r>
+              <a:rPr sz="1200" b="1">
+                <a:solidFill>
+                  <a:srgbClr val="1F7A57"/>
+                </a:solidFill>
+                <a:latin typeface="Hanken Grotesk"/>
+              </a:rPr>
+              <a:t>-  </a:t>
+            </a:r>
+            <a:r>
+              <a:rPr sz="1200" b="0">
+                <a:solidFill>
+                  <a:srgbClr val="6B7B73"/>
+                </a:solidFill>
+                <a:latin typeface="Hanken Grotesk"/>
+              </a:rPr>
+              <a:t>Hash-chained audit log makes tampering evident; admin config changes audit through the same chain.</a:t>
+            </a:r>
+          </a:p>
+          <a:p>
+            <a:pPr>
+              <a:lnSpc>
+                <a:spcPct val="112000"/>
+              </a:lnSpc>
+              <a:spcAft>
+                <a:spcPts val="700"/>
+              </a:spcAft>
+            </a:pPr>
+            <a:r>
+              <a:rPr sz="1200" b="1">
+                <a:solidFill>
+                  <a:srgbClr val="1F7A57"/>
+                </a:solidFill>
+                <a:latin typeface="Hanken Grotesk"/>
+              </a:rPr>
+              <a:t>-  </a:t>
+            </a:r>
+            <a:r>
+              <a:rPr sz="1200" b="0">
+                <a:solidFill>
+                  <a:srgbClr val="6B7B73"/>
+                </a:solidFill>
+                <a:latin typeface="Hanken Grotesk"/>
+              </a:rPr>
+              <a:t>Blast radius: a bug or compromise in any read path has zero write capability on money.</a:t>
+            </a:r>
+          </a:p>
+        </p:txBody>
+      </p:sp>
+      <p:sp>
+        <p:nvSpPr>
+          <p:cNvPr id="11" name="Rectangle 10"/>
           <p:cNvSpPr/>
           <p:nvPr/>
         </p:nvSpPr>
@@ -7264,7 +6813,7 @@
       </p:sp>
       <p:sp>
         <p:nvSpPr>
-          <p:cNvPr id="22" name="TextBox 21"/>
+          <p:cNvPr id="12" name="TextBox 11"/>
           <p:cNvSpPr txBox="1"/>
           <p:nvPr/>
         </p:nvSpPr>
@@ -7307,7 +6856,7 @@
       </p:sp>
       <p:sp>
         <p:nvSpPr>
-          <p:cNvPr id="23" name="TextBox 22"/>
+          <p:cNvPr id="13" name="TextBox 12"/>
           <p:cNvSpPr txBox="1"/>
           <p:nvPr/>
         </p:nvSpPr>
@@ -7430,7 +6979,7 @@
                 </a:solidFill>
                 <a:latin typeface="Space Mono"/>
               </a:rPr>
-              <a:t>ENGINEERING</a:t>
+              <a:t>DECISIONS</a:t>
             </a:r>
           </a:p>
         </p:txBody>
@@ -7458,147 +7007,552 @@
           <a:lstStyle/>
           <a:p>
             <a:r>
-              <a:rPr sz="2700" b="1">
+              <a:rPr sz="2500" b="1">
                 <a:solidFill>
                   <a:srgbClr val="15201C"/>
                 </a:solidFill>
                 <a:latin typeface="Space Grotesk"/>
               </a:rPr>
-              <a:t>Cost and security posture</a:t>
-            </a:r>
-          </a:p>
-        </p:txBody>
-      </p:sp>
-      <p:sp>
-        <p:nvSpPr>
-          <p:cNvPr id="5" name="Rounded Rectangle 4"/>
-          <p:cNvSpPr/>
-          <p:nvPr/>
-        </p:nvSpPr>
-        <p:spPr>
-          <a:xfrm>
-            <a:off x="685800" y="1828800"/>
-            <a:ext cx="5257800" cy="4023360"/>
-          </a:xfrm>
-          <a:prstGeom prst="roundRect">
-            <a:avLst>
-              <a:gd name="adj" fmla="val 5500"/>
-            </a:avLst>
-          </a:prstGeom>
-          <a:solidFill>
-            <a:srgbClr val="FFFFFF"/>
-          </a:solidFill>
-          <a:ln w="12700">
-            <a:solidFill>
-              <a:srgbClr val="E6EBE8"/>
-            </a:solidFill>
-          </a:ln>
-          <a:effectLst/>
-        </p:spPr>
-        <p:style>
-          <a:lnRef idx="1">
-            <a:schemeClr val="accent1"/>
-          </a:lnRef>
-          <a:fillRef idx="3">
-            <a:schemeClr val="accent1"/>
-          </a:fillRef>
-          <a:effectRef idx="2">
-            <a:schemeClr val="accent1"/>
-          </a:effectRef>
-          <a:fontRef idx="minor">
-            <a:schemeClr val="lt1"/>
-          </a:fontRef>
-        </p:style>
-        <p:txBody>
-          <a:bodyPr rtlCol="0" anchor="ctr" wrap="square" lIns="146304" rIns="146304" tIns="109728" bIns="109728"/>
-          <a:lstStyle/>
-          <a:p>
-            <a:pPr algn="ctr"/>
-          </a:p>
-        </p:txBody>
-      </p:sp>
-      <p:sp>
-        <p:nvSpPr>
-          <p:cNvPr id="6" name="Rounded Rectangle 5"/>
-          <p:cNvSpPr/>
-          <p:nvPr/>
-        </p:nvSpPr>
-        <p:spPr>
-          <a:xfrm>
-            <a:off x="886968" y="2029968"/>
-            <a:ext cx="475488" cy="475488"/>
-          </a:xfrm>
-          <a:prstGeom prst="roundRect">
-            <a:avLst>
-              <a:gd name="adj" fmla="val 28000"/>
-            </a:avLst>
-          </a:prstGeom>
-          <a:solidFill>
-            <a:srgbClr val="E7F1EC"/>
-          </a:solidFill>
-          <a:ln w="12700">
-            <a:solidFill>
-              <a:srgbClr val="D2E3D9"/>
-            </a:solidFill>
-          </a:ln>
-          <a:effectLst/>
-        </p:spPr>
-        <p:style>
-          <a:lnRef idx="1">
-            <a:schemeClr val="accent1"/>
-          </a:lnRef>
-          <a:fillRef idx="3">
-            <a:schemeClr val="accent1"/>
-          </a:fillRef>
-          <a:effectRef idx="2">
-            <a:schemeClr val="accent1"/>
-          </a:effectRef>
-          <a:fontRef idx="minor">
-            <a:schemeClr val="lt1"/>
-          </a:fontRef>
-        </p:style>
-        <p:txBody>
-          <a:bodyPr rtlCol="0" anchor="ctr" wrap="square" lIns="146304" rIns="146304" tIns="109728" bIns="109728"/>
-          <a:lstStyle/>
-          <a:p>
-            <a:pPr algn="ctr"/>
-          </a:p>
-        </p:txBody>
-      </p:sp>
-      <p:pic>
-        <p:nvPicPr>
-          <p:cNvPr id="7" name="Picture 6" descr="dbcoin.png"/>
-          <p:cNvPicPr>
-            <a:picLocks noChangeAspect="1"/>
-          </p:cNvPicPr>
-          <p:nvPr/>
-        </p:nvPicPr>
-        <p:blipFill>
-          <a:blip r:embed="rId2"/>
-          <a:stretch>
-            <a:fillRect/>
-          </a:stretch>
-        </p:blipFill>
-        <p:spPr>
-          <a:xfrm>
-            <a:off x="953536" y="2096536"/>
-            <a:ext cx="342351" cy="342351"/>
-          </a:xfrm>
-          <a:prstGeom prst="rect">
-            <a:avLst/>
-          </a:prstGeom>
-        </p:spPr>
-      </p:pic>
-      <p:sp>
-        <p:nvSpPr>
-          <p:cNvPr id="8" name="TextBox 7"/>
+              <a:t>Cost model — a measured floor, then linear</a:t>
+            </a:r>
+          </a:p>
+        </p:txBody>
+      </p:sp>
+      <p:graphicFrame>
+        <p:nvGraphicFramePr>
+          <p:cNvPr id="5" name="Table 4"/>
+          <p:cNvGraphicFramePr>
+            <a:graphicFrameLocks noGrp="1"/>
+          </p:cNvGraphicFramePr>
+          <p:nvPr/>
+        </p:nvGraphicFramePr>
+        <p:xfrm>
+          <a:off x="658368" y="1783080"/>
+          <a:ext cx="10881360" cy="2194560"/>
+        </p:xfrm>
+        <a:graphic>
+          <a:graphicData uri="http://schemas.openxmlformats.org/drawingml/2006/table">
+            <a:tbl>
+              <a:tblPr>
+                <a:tableStyleId>{5C22544A-7EE6-4342-B048-85BDC9FD1C3A}</a:tableStyleId>
+              </a:tblPr>
+              <a:tblGrid>
+                <a:gridCol w="3108960"/>
+                <a:gridCol w="2011680"/>
+                <a:gridCol w="5760720"/>
+              </a:tblGrid>
+              <a:tr h="365760">
+                <a:tc>
+                  <a:txBody>
+                    <a:bodyPr wrap="square"/>
+                    <a:lstStyle/>
+                    <a:p>
+                      <a:pPr>
+                        <a:lnSpc>
+                          <a:spcPct val="108000"/>
+                        </a:lnSpc>
+                      </a:pPr>
+                      <a:r>
+                        <a:rPr sz="1100" b="1">
+                          <a:solidFill>
+                            <a:srgbClr val="7FE0B0"/>
+                          </a:solidFill>
+                          <a:latin typeface="Space Grotesk"/>
+                        </a:rPr>
+                        <a:t>Line item</a:t>
+                      </a:r>
+                    </a:p>
+                  </a:txBody>
+                  <a:tcPr marL="91440" marR="91440" marT="45720" marB="45720">
+                    <a:solidFill>
+                      <a:srgbClr val="15201C"/>
+                    </a:solidFill>
+                  </a:tcPr>
+                </a:tc>
+                <a:tc>
+                  <a:txBody>
+                    <a:bodyPr wrap="square"/>
+                    <a:lstStyle/>
+                    <a:p>
+                      <a:pPr>
+                        <a:lnSpc>
+                          <a:spcPct val="108000"/>
+                        </a:lnSpc>
+                      </a:pPr>
+                      <a:r>
+                        <a:rPr sz="1100" b="1">
+                          <a:solidFill>
+                            <a:srgbClr val="7FE0B0"/>
+                          </a:solidFill>
+                          <a:latin typeface="Space Grotesk"/>
+                        </a:rPr>
+                        <a:t>Monthly</a:t>
+                      </a:r>
+                    </a:p>
+                  </a:txBody>
+                  <a:tcPr marL="91440" marR="91440" marT="45720" marB="45720">
+                    <a:solidFill>
+                      <a:srgbClr val="15201C"/>
+                    </a:solidFill>
+                  </a:tcPr>
+                </a:tc>
+                <a:tc>
+                  <a:txBody>
+                    <a:bodyPr wrap="square"/>
+                    <a:lstStyle/>
+                    <a:p>
+                      <a:pPr>
+                        <a:lnSpc>
+                          <a:spcPct val="108000"/>
+                        </a:lnSpc>
+                      </a:pPr>
+                      <a:r>
+                        <a:rPr sz="1100" b="1">
+                          <a:solidFill>
+                            <a:srgbClr val="7FE0B0"/>
+                          </a:solidFill>
+                          <a:latin typeface="Space Grotesk"/>
+                        </a:rPr>
+                        <a:t>Note</a:t>
+                      </a:r>
+                    </a:p>
+                  </a:txBody>
+                  <a:tcPr marL="91440" marR="91440" marT="45720" marB="45720">
+                    <a:solidFill>
+                      <a:srgbClr val="15201C"/>
+                    </a:solidFill>
+                  </a:tcPr>
+                </a:tc>
+              </a:tr>
+              <a:tr h="365760">
+                <a:tc>
+                  <a:txBody>
+                    <a:bodyPr wrap="square"/>
+                    <a:lstStyle/>
+                    <a:p>
+                      <a:pPr>
+                        <a:lnSpc>
+                          <a:spcPct val="108000"/>
+                        </a:lnSpc>
+                      </a:pPr>
+                      <a:r>
+                        <a:rPr sz="1050" b="1">
+                          <a:solidFill>
+                            <a:srgbClr val="15201C"/>
+                          </a:solidFill>
+                          <a:latin typeface="Hanken Grotesk"/>
+                        </a:rPr>
+                        <a:t>Compute + APIs + DynamoDB idle</a:t>
+                      </a:r>
+                    </a:p>
+                  </a:txBody>
+                  <a:tcPr marL="91440" marR="91440" marT="45720" marB="45720">
+                    <a:solidFill>
+                      <a:srgbClr val="FFFFFF"/>
+                    </a:solidFill>
+                  </a:tcPr>
+                </a:tc>
+                <a:tc>
+                  <a:txBody>
+                    <a:bodyPr wrap="square"/>
+                    <a:lstStyle/>
+                    <a:p>
+                      <a:pPr>
+                        <a:lnSpc>
+                          <a:spcPct val="108000"/>
+                        </a:lnSpc>
+                      </a:pPr>
+                      <a:r>
+                        <a:rPr sz="1050" b="0">
+                          <a:solidFill>
+                            <a:srgbClr val="6B7B73"/>
+                          </a:solidFill>
+                          <a:latin typeface="Hanken Grotesk"/>
+                        </a:rPr>
+                        <a:t>$0</a:t>
+                      </a:r>
+                    </a:p>
+                  </a:txBody>
+                  <a:tcPr marL="91440" marR="91440" marT="45720" marB="45720">
+                    <a:solidFill>
+                      <a:srgbClr val="FFFFFF"/>
+                    </a:solidFill>
+                  </a:tcPr>
+                </a:tc>
+                <a:tc>
+                  <a:txBody>
+                    <a:bodyPr wrap="square"/>
+                    <a:lstStyle/>
+                    <a:p>
+                      <a:pPr>
+                        <a:lnSpc>
+                          <a:spcPct val="108000"/>
+                        </a:lnSpc>
+                      </a:pPr>
+                      <a:r>
+                        <a:rPr sz="1050" b="0">
+                          <a:solidFill>
+                            <a:srgbClr val="6B7B73"/>
+                          </a:solidFill>
+                          <a:latin typeface="Hanken Grotesk"/>
+                        </a:rPr>
+                        <a:t>Everything scales from zero; Aurora paused = storage only (~$2)</a:t>
+                      </a:r>
+                    </a:p>
+                  </a:txBody>
+                  <a:tcPr marL="91440" marR="91440" marT="45720" marB="45720">
+                    <a:solidFill>
+                      <a:srgbClr val="FFFFFF"/>
+                    </a:solidFill>
+                  </a:tcPr>
+                </a:tc>
+              </a:tr>
+              <a:tr h="365760">
+                <a:tc>
+                  <a:txBody>
+                    <a:bodyPr wrap="square"/>
+                    <a:lstStyle/>
+                    <a:p>
+                      <a:pPr>
+                        <a:lnSpc>
+                          <a:spcPct val="108000"/>
+                        </a:lnSpc>
+                      </a:pPr>
+                      <a:r>
+                        <a:rPr sz="1050" b="1">
+                          <a:solidFill>
+                            <a:srgbClr val="15201C"/>
+                          </a:solidFill>
+                          <a:latin typeface="Hanken Grotesk"/>
+                        </a:rPr>
+                        <a:t>WAF (2 web ACLs + rules)</a:t>
+                      </a:r>
+                    </a:p>
+                  </a:txBody>
+                  <a:tcPr marL="91440" marR="91440" marT="45720" marB="45720">
+                    <a:solidFill>
+                      <a:srgbClr val="F4F6F5"/>
+                    </a:solidFill>
+                  </a:tcPr>
+                </a:tc>
+                <a:tc>
+                  <a:txBody>
+                    <a:bodyPr wrap="square"/>
+                    <a:lstStyle/>
+                    <a:p>
+                      <a:pPr>
+                        <a:lnSpc>
+                          <a:spcPct val="108000"/>
+                        </a:lnSpc>
+                      </a:pPr>
+                      <a:r>
+                        <a:rPr sz="1050" b="0">
+                          <a:solidFill>
+                            <a:srgbClr val="6B7B73"/>
+                          </a:solidFill>
+                          <a:latin typeface="Hanken Grotesk"/>
+                        </a:rPr>
+                        <a:t>~$15</a:t>
+                      </a:r>
+                    </a:p>
+                  </a:txBody>
+                  <a:tcPr marL="91440" marR="91440" marT="45720" marB="45720">
+                    <a:solidFill>
+                      <a:srgbClr val="F4F6F5"/>
+                    </a:solidFill>
+                  </a:tcPr>
+                </a:tc>
+                <a:tc>
+                  <a:txBody>
+                    <a:bodyPr wrap="square"/>
+                    <a:lstStyle/>
+                    <a:p>
+                      <a:pPr>
+                        <a:lnSpc>
+                          <a:spcPct val="108000"/>
+                        </a:lnSpc>
+                      </a:pPr>
+                      <a:r>
+                        <a:rPr sz="1050" b="0">
+                          <a:solidFill>
+                            <a:srgbClr val="6B7B73"/>
+                          </a:solidFill>
+                          <a:latin typeface="Hanken Grotesk"/>
+                        </a:rPr>
+                        <a:t>The deliberate fixed floor: CloudFront ACL + Cognito-pool ACL - protection we chose to always-on</a:t>
+                      </a:r>
+                    </a:p>
+                  </a:txBody>
+                  <a:tcPr marL="91440" marR="91440" marT="45720" marB="45720">
+                    <a:solidFill>
+                      <a:srgbClr val="F4F6F5"/>
+                    </a:solidFill>
+                  </a:tcPr>
+                </a:tc>
+              </a:tr>
+              <a:tr h="365760">
+                <a:tc>
+                  <a:txBody>
+                    <a:bodyPr wrap="square"/>
+                    <a:lstStyle/>
+                    <a:p>
+                      <a:pPr>
+                        <a:lnSpc>
+                          <a:spcPct val="108000"/>
+                        </a:lnSpc>
+                      </a:pPr>
+                      <a:r>
+                        <a:rPr sz="1050" b="1">
+                          <a:solidFill>
+                            <a:srgbClr val="15201C"/>
+                          </a:solidFill>
+                          <a:latin typeface="Hanken Grotesk"/>
+                        </a:rPr>
+                        <a:t>Secrets, Route 53, misc</a:t>
+                      </a:r>
+                    </a:p>
+                  </a:txBody>
+                  <a:tcPr marL="91440" marR="91440" marT="45720" marB="45720">
+                    <a:solidFill>
+                      <a:srgbClr val="FFFFFF"/>
+                    </a:solidFill>
+                  </a:tcPr>
+                </a:tc>
+                <a:tc>
+                  <a:txBody>
+                    <a:bodyPr wrap="square"/>
+                    <a:lstStyle/>
+                    <a:p>
+                      <a:pPr>
+                        <a:lnSpc>
+                          <a:spcPct val="108000"/>
+                        </a:lnSpc>
+                      </a:pPr>
+                      <a:r>
+                        <a:rPr sz="1050" b="0">
+                          <a:solidFill>
+                            <a:srgbClr val="6B7B73"/>
+                          </a:solidFill>
+                          <a:latin typeface="Hanken Grotesk"/>
+                        </a:rPr>
+                        <a:t>~$2</a:t>
+                      </a:r>
+                    </a:p>
+                  </a:txBody>
+                  <a:tcPr marL="91440" marR="91440" marT="45720" marB="45720">
+                    <a:solidFill>
+                      <a:srgbClr val="FFFFFF"/>
+                    </a:solidFill>
+                  </a:tcPr>
+                </a:tc>
+                <a:tc>
+                  <a:txBody>
+                    <a:bodyPr wrap="square"/>
+                    <a:lstStyle/>
+                    <a:p>
+                      <a:pPr>
+                        <a:lnSpc>
+                          <a:spcPct val="108000"/>
+                        </a:lnSpc>
+                      </a:pPr>
+                      <a:r>
+                        <a:rPr sz="1050" b="0">
+                          <a:solidFill>
+                            <a:srgbClr val="6B7B73"/>
+                          </a:solidFill>
+                          <a:latin typeface="Hanken Grotesk"/>
+                        </a:rPr>
+                        <a:t>2 retailer secrets, hosted zone</a:t>
+                      </a:r>
+                    </a:p>
+                  </a:txBody>
+                  <a:tcPr marL="91440" marR="91440" marT="45720" marB="45720">
+                    <a:solidFill>
+                      <a:srgbClr val="FFFFFF"/>
+                    </a:solidFill>
+                  </a:tcPr>
+                </a:tc>
+              </a:tr>
+              <a:tr h="365760">
+                <a:tc>
+                  <a:txBody>
+                    <a:bodyPr wrap="square"/>
+                    <a:lstStyle/>
+                    <a:p>
+                      <a:pPr>
+                        <a:lnSpc>
+                          <a:spcPct val="108000"/>
+                        </a:lnSpc>
+                      </a:pPr>
+                      <a:r>
+                        <a:rPr sz="1050" b="1">
+                          <a:solidFill>
+                            <a:srgbClr val="15201C"/>
+                          </a:solidFill>
+                          <a:latin typeface="Hanken Grotesk"/>
+                        </a:rPr>
+                        <a:t>OTP delivery</a:t>
+                      </a:r>
+                    </a:p>
+                  </a:txBody>
+                  <a:tcPr marL="91440" marR="91440" marT="45720" marB="45720">
+                    <a:solidFill>
+                      <a:srgbClr val="F4F6F5"/>
+                    </a:solidFill>
+                  </a:tcPr>
+                </a:tc>
+                <a:tc>
+                  <a:txBody>
+                    <a:bodyPr wrap="square"/>
+                    <a:lstStyle/>
+                    <a:p>
+                      <a:pPr>
+                        <a:lnSpc>
+                          <a:spcPct val="108000"/>
+                        </a:lnSpc>
+                      </a:pPr>
+                      <a:r>
+                        <a:rPr sz="1050" b="0">
+                          <a:solidFill>
+                            <a:srgbClr val="6B7B73"/>
+                          </a:solidFill>
+                          <a:latin typeface="Hanken Grotesk"/>
+                        </a:rPr>
+                        <a:t>capped $1</a:t>
+                      </a:r>
+                    </a:p>
+                  </a:txBody>
+                  <a:tcPr marL="91440" marR="91440" marT="45720" marB="45720">
+                    <a:solidFill>
+                      <a:srgbClr val="F4F6F5"/>
+                    </a:solidFill>
+                  </a:tcPr>
+                </a:tc>
+                <a:tc>
+                  <a:txBody>
+                    <a:bodyPr wrap="square"/>
+                    <a:lstStyle/>
+                    <a:p>
+                      <a:pPr>
+                        <a:lnSpc>
+                          <a:spcPct val="108000"/>
+                        </a:lnSpc>
+                      </a:pPr>
+                      <a:r>
+                        <a:rPr sz="1050" b="0">
+                          <a:solidFill>
+                            <a:srgbClr val="6B7B73"/>
+                          </a:solidFill>
+                          <a:latin typeface="Hanken Grotesk"/>
+                        </a:rPr>
+                        <a:t>SNS hard cap (SMS sandbox); WhatsApp is ~10x cheaper per message at scale - hence WhatsApp-default</a:t>
+                      </a:r>
+                    </a:p>
+                  </a:txBody>
+                  <a:tcPr marL="91440" marR="91440" marT="45720" marB="45720">
+                    <a:solidFill>
+                      <a:srgbClr val="F4F6F5"/>
+                    </a:solidFill>
+                  </a:tcPr>
+                </a:tc>
+              </a:tr>
+              <a:tr h="365760">
+                <a:tc>
+                  <a:txBody>
+                    <a:bodyPr wrap="square"/>
+                    <a:lstStyle/>
+                    <a:p>
+                      <a:pPr>
+                        <a:lnSpc>
+                          <a:spcPct val="108000"/>
+                        </a:lnSpc>
+                      </a:pPr>
+                      <a:r>
+                        <a:rPr sz="1050" b="1">
+                          <a:solidFill>
+                            <a:srgbClr val="15201C"/>
+                          </a:solidFill>
+                          <a:latin typeface="Hanken Grotesk"/>
+                        </a:rPr>
+                        <a:t>NAT / proxies / endpoints</a:t>
+                      </a:r>
+                    </a:p>
+                  </a:txBody>
+                  <a:tcPr marL="91440" marR="91440" marT="45720" marB="45720">
+                    <a:solidFill>
+                      <a:srgbClr val="FFFFFF"/>
+                    </a:solidFill>
+                  </a:tcPr>
+                </a:tc>
+                <a:tc>
+                  <a:txBody>
+                    <a:bodyPr wrap="square"/>
+                    <a:lstStyle/>
+                    <a:p>
+                      <a:pPr>
+                        <a:lnSpc>
+                          <a:spcPct val="108000"/>
+                        </a:lnSpc>
+                      </a:pPr>
+                      <a:r>
+                        <a:rPr sz="1050" b="0">
+                          <a:solidFill>
+                            <a:srgbClr val="6B7B73"/>
+                          </a:solidFill>
+                          <a:latin typeface="Hanken Grotesk"/>
+                        </a:rPr>
+                        <a:t>$0</a:t>
+                      </a:r>
+                    </a:p>
+                  </a:txBody>
+                  <a:tcPr marL="91440" marR="91440" marT="45720" marB="45720">
+                    <a:solidFill>
+                      <a:srgbClr val="FFFFFF"/>
+                    </a:solidFill>
+                  </a:tcPr>
+                </a:tc>
+                <a:tc>
+                  <a:txBody>
+                    <a:bodyPr wrap="square"/>
+                    <a:lstStyle/>
+                    <a:p>
+                      <a:pPr>
+                        <a:lnSpc>
+                          <a:spcPct val="108000"/>
+                        </a:lnSpc>
+                      </a:pPr>
+                      <a:r>
+                        <a:rPr sz="1050" b="0">
+                          <a:solidFill>
+                            <a:srgbClr val="6B7B73"/>
+                          </a:solidFill>
+                          <a:latin typeface="Hanken Grotesk"/>
+                        </a:rPr>
+                        <a:t>Architecturally eliminated (slide 10)</a:t>
+                      </a:r>
+                    </a:p>
+                  </a:txBody>
+                  <a:tcPr marL="91440" marR="91440" marT="45720" marB="45720">
+                    <a:solidFill>
+                      <a:srgbClr val="FFFFFF"/>
+                    </a:solidFill>
+                  </a:tcPr>
+                </a:tc>
+              </a:tr>
+            </a:tbl>
+          </a:graphicData>
+        </a:graphic>
+      </p:graphicFrame>
+      <p:sp>
+        <p:nvSpPr>
+          <p:cNvPr id="6" name="TextBox 5"/>
           <p:cNvSpPr txBox="1"/>
           <p:nvPr/>
         </p:nvSpPr>
         <p:spPr>
           <a:xfrm>
-            <a:off x="1508760" y="2084831"/>
-            <a:ext cx="4114800" cy="457200"/>
+            <a:off x="658368" y="4892040"/>
+            <a:ext cx="10881360" cy="1371600"/>
           </a:xfrm>
           <a:prstGeom prst="rect">
             <a:avLst/>
@@ -7611,445 +7565,66 @@
           </a:bodyPr>
           <a:lstStyle/>
           <a:p>
-            <a:r>
-              <a:rPr sz="1700" b="1">
-                <a:solidFill>
-                  <a:srgbClr val="15201C"/>
-                </a:solidFill>
-                <a:latin typeface="Space Grotesk"/>
-              </a:rPr>
-              <a:t>Cost</a:t>
-            </a:r>
-          </a:p>
-        </p:txBody>
-      </p:sp>
-      <p:sp>
-        <p:nvSpPr>
-          <p:cNvPr id="9" name="TextBox 8"/>
-          <p:cNvSpPr txBox="1"/>
-          <p:nvPr/>
-        </p:nvSpPr>
-        <p:spPr>
-          <a:xfrm>
-            <a:off x="905256" y="2743200"/>
-            <a:ext cx="4846320" cy="2926080"/>
-          </a:xfrm>
-          <a:prstGeom prst="rect">
-            <a:avLst/>
-          </a:prstGeom>
-          <a:noFill/>
-        </p:spPr>
-        <p:txBody>
-          <a:bodyPr wrap="square">
-            <a:spAutoFit/>
-          </a:bodyPr>
-          <a:lstStyle/>
-          <a:p>
             <a:pPr>
               <a:lnSpc>
-                <a:spcPct val="112000"/>
+                <a:spcPct val="115000"/>
               </a:lnSpc>
               <a:spcAft>
-                <a:spcPts val="900"/>
+                <a:spcPts val="600"/>
               </a:spcAft>
             </a:pPr>
             <a:r>
-              <a:rPr sz="1300" b="1">
-                <a:solidFill>
-                  <a:srgbClr val="1F7A57"/>
+              <a:rPr sz="1250" b="1">
+                <a:solidFill>
+                  <a:srgbClr val="15201C"/>
                 </a:solidFill>
                 <a:latin typeface="Hanken Grotesk"/>
               </a:rPr>
-              <a:t>—  </a:t>
-            </a:r>
-            <a:r>
-              <a:rPr sz="1300" b="0">
-                <a:solidFill>
-                  <a:srgbClr val="15201C"/>
+              <a:t>Costs we accepted knowingly: </a:t>
+            </a:r>
+            <a:r>
+              <a:rPr sz="1250" b="0">
+                <a:solidFill>
+                  <a:srgbClr val="6B7B73"/>
                 </a:solidFill>
                 <a:latin typeface="Hanken Grotesk"/>
               </a:rPr>
-              <a:t>Aurora paused = storage only</a:t>
+              <a:t>cold-resume UX risk on first wallet read (mitigated by warm-up probe); one AWS account for dev+prod shares SMS caps and quotas - flagged for split before scale.</a:t>
             </a:r>
           </a:p>
           <a:p>
             <a:pPr>
               <a:lnSpc>
-                <a:spcPct val="112000"/>
+                <a:spcPct val="115000"/>
               </a:lnSpc>
               <a:spcAft>
-                <a:spcPts val="900"/>
+                <a:spcPts val="600"/>
               </a:spcAft>
             </a:pPr>
             <a:r>
-              <a:rPr sz="1300" b="1">
-                <a:solidFill>
-                  <a:srgbClr val="1F7A57"/>
+              <a:rPr sz="1250" b="1">
+                <a:solidFill>
+                  <a:srgbClr val="15201C"/>
                 </a:solidFill>
                 <a:latin typeface="Hanken Grotesk"/>
               </a:rPr>
-              <a:t>—  </a:t>
-            </a:r>
-            <a:r>
-              <a:rPr sz="1300" b="0">
-                <a:solidFill>
-                  <a:srgbClr val="15201C"/>
+              <a:t>Unit economics guardrail: </a:t>
+            </a:r>
+            <a:r>
+              <a:rPr sz="1250" b="0">
+                <a:solidFill>
+                  <a:srgbClr val="6B7B73"/>
                 </a:solidFill>
                 <a:latin typeface="Hanken Grotesk"/>
               </a:rPr>
-              <a:t>DynamoDB $0 idle</a:t>
-            </a:r>
-          </a:p>
-          <a:p>
-            <a:pPr>
-              <a:lnSpc>
-                <a:spcPct val="112000"/>
-              </a:lnSpc>
-              <a:spcAft>
-                <a:spcPts val="900"/>
-              </a:spcAft>
-            </a:pPr>
-            <a:r>
-              <a:rPr sz="1300" b="1">
-                <a:solidFill>
-                  <a:srgbClr val="1F7A57"/>
-                </a:solidFill>
-                <a:latin typeface="Hanken Grotesk"/>
-              </a:rPr>
-              <a:t>—  </a:t>
-            </a:r>
-            <a:r>
-              <a:rPr sz="1300" b="0">
-                <a:solidFill>
-                  <a:srgbClr val="15201C"/>
-                </a:solidFill>
-                <a:latin typeface="Hanken Grotesk"/>
-              </a:rPr>
-              <a:t>No NAT · no RDS Proxy · zero interface endpoints</a:t>
-            </a:r>
-          </a:p>
-          <a:p>
-            <a:pPr>
-              <a:lnSpc>
-                <a:spcPct val="112000"/>
-              </a:lnSpc>
-              <a:spcAft>
-                <a:spcPts val="900"/>
-              </a:spcAft>
-            </a:pPr>
-            <a:r>
-              <a:rPr sz="1300" b="1">
-                <a:solidFill>
-                  <a:srgbClr val="1F7A57"/>
-                </a:solidFill>
-                <a:latin typeface="Hanken Grotesk"/>
-              </a:rPr>
-              <a:t>—  </a:t>
-            </a:r>
-            <a:r>
-              <a:rPr sz="1300" b="0">
-                <a:solidFill>
-                  <a:srgbClr val="15201C"/>
-                </a:solidFill>
-                <a:latin typeface="Hanken Grotesk"/>
-              </a:rPr>
-              <a:t>OTP delivery is the dominant line item — and it is hard-capped</a:t>
-            </a:r>
-          </a:p>
-        </p:txBody>
-      </p:sp>
-      <p:sp>
-        <p:nvSpPr>
-          <p:cNvPr id="10" name="Rounded Rectangle 9"/>
-          <p:cNvSpPr/>
-          <p:nvPr/>
-        </p:nvSpPr>
-        <p:spPr>
-          <a:xfrm>
-            <a:off x="6263640" y="1828800"/>
-            <a:ext cx="5257800" cy="4023360"/>
-          </a:xfrm>
-          <a:prstGeom prst="roundRect">
-            <a:avLst>
-              <a:gd name="adj" fmla="val 5500"/>
-            </a:avLst>
-          </a:prstGeom>
-          <a:solidFill>
-            <a:srgbClr val="FFFFFF"/>
-          </a:solidFill>
-          <a:ln w="12700">
-            <a:solidFill>
-              <a:srgbClr val="E6EBE8"/>
-            </a:solidFill>
-          </a:ln>
-          <a:effectLst/>
-        </p:spPr>
-        <p:style>
-          <a:lnRef idx="1">
-            <a:schemeClr val="accent1"/>
-          </a:lnRef>
-          <a:fillRef idx="3">
-            <a:schemeClr val="accent1"/>
-          </a:fillRef>
-          <a:effectRef idx="2">
-            <a:schemeClr val="accent1"/>
-          </a:effectRef>
-          <a:fontRef idx="minor">
-            <a:schemeClr val="lt1"/>
-          </a:fontRef>
-        </p:style>
-        <p:txBody>
-          <a:bodyPr rtlCol="0" anchor="ctr" wrap="square" lIns="146304" rIns="146304" tIns="109728" bIns="109728"/>
-          <a:lstStyle/>
-          <a:p>
-            <a:pPr algn="ctr"/>
-          </a:p>
-        </p:txBody>
-      </p:sp>
-      <p:sp>
-        <p:nvSpPr>
-          <p:cNvPr id="11" name="Rounded Rectangle 10"/>
-          <p:cNvSpPr/>
-          <p:nvPr/>
-        </p:nvSpPr>
-        <p:spPr>
-          <a:xfrm>
-            <a:off x="6464807" y="2029968"/>
-            <a:ext cx="475488" cy="475488"/>
-          </a:xfrm>
-          <a:prstGeom prst="roundRect">
-            <a:avLst>
-              <a:gd name="adj" fmla="val 28000"/>
-            </a:avLst>
-          </a:prstGeom>
-          <a:solidFill>
-            <a:srgbClr val="E7F1EC"/>
-          </a:solidFill>
-          <a:ln w="12700">
-            <a:solidFill>
-              <a:srgbClr val="D2E3D9"/>
-            </a:solidFill>
-          </a:ln>
-          <a:effectLst/>
-        </p:spPr>
-        <p:style>
-          <a:lnRef idx="1">
-            <a:schemeClr val="accent1"/>
-          </a:lnRef>
-          <a:fillRef idx="3">
-            <a:schemeClr val="accent1"/>
-          </a:fillRef>
-          <a:effectRef idx="2">
-            <a:schemeClr val="accent1"/>
-          </a:effectRef>
-          <a:fontRef idx="minor">
-            <a:schemeClr val="lt1"/>
-          </a:fontRef>
-        </p:style>
-        <p:txBody>
-          <a:bodyPr rtlCol="0" anchor="ctr" wrap="square" lIns="146304" rIns="146304" tIns="109728" bIns="109728"/>
-          <a:lstStyle/>
-          <a:p>
-            <a:pPr algn="ctr"/>
-          </a:p>
-        </p:txBody>
-      </p:sp>
-      <p:pic>
-        <p:nvPicPr>
-          <p:cNvPr id="12" name="Picture 11" descr="shield.png"/>
-          <p:cNvPicPr>
-            <a:picLocks noChangeAspect="1"/>
-          </p:cNvPicPr>
-          <p:nvPr/>
-        </p:nvPicPr>
-        <p:blipFill>
-          <a:blip r:embed="rId3"/>
-          <a:stretch>
-            <a:fillRect/>
-          </a:stretch>
-        </p:blipFill>
-        <p:spPr>
-          <a:xfrm>
-            <a:off x="6531376" y="2096536"/>
-            <a:ext cx="342351" cy="342351"/>
-          </a:xfrm>
-          <a:prstGeom prst="rect">
-            <a:avLst/>
-          </a:prstGeom>
-        </p:spPr>
-      </p:pic>
-      <p:sp>
-        <p:nvSpPr>
-          <p:cNvPr id="13" name="TextBox 12"/>
-          <p:cNvSpPr txBox="1"/>
-          <p:nvPr/>
-        </p:nvSpPr>
-        <p:spPr>
-          <a:xfrm>
-            <a:off x="7086600" y="2084831"/>
-            <a:ext cx="4114800" cy="457200"/>
-          </a:xfrm>
-          <a:prstGeom prst="rect">
-            <a:avLst/>
-          </a:prstGeom>
-          <a:noFill/>
-        </p:spPr>
-        <p:txBody>
-          <a:bodyPr wrap="square">
-            <a:spAutoFit/>
-          </a:bodyPr>
-          <a:lstStyle/>
-          <a:p>
-            <a:r>
-              <a:rPr sz="1700" b="1">
-                <a:solidFill>
-                  <a:srgbClr val="15201C"/>
-                </a:solidFill>
-                <a:latin typeface="Space Grotesk"/>
-              </a:rPr>
-              <a:t>Security</a:t>
-            </a:r>
-          </a:p>
-        </p:txBody>
-      </p:sp>
-      <p:sp>
-        <p:nvSpPr>
-          <p:cNvPr id="14" name="TextBox 13"/>
-          <p:cNvSpPr txBox="1"/>
-          <p:nvPr/>
-        </p:nvSpPr>
-        <p:spPr>
-          <a:xfrm>
-            <a:off x="6483096" y="2743200"/>
-            <a:ext cx="4846320" cy="2926080"/>
-          </a:xfrm>
-          <a:prstGeom prst="rect">
-            <a:avLst/>
-          </a:prstGeom>
-          <a:noFill/>
-        </p:spPr>
-        <p:txBody>
-          <a:bodyPr wrap="square">
-            <a:spAutoFit/>
-          </a:bodyPr>
-          <a:lstStyle/>
-          <a:p>
-            <a:pPr>
-              <a:lnSpc>
-                <a:spcPct val="112000"/>
-              </a:lnSpc>
-              <a:spcAft>
-                <a:spcPts val="900"/>
-              </a:spcAft>
-            </a:pPr>
-            <a:r>
-              <a:rPr sz="1300" b="1">
-                <a:solidFill>
-                  <a:srgbClr val="1F7A57"/>
-                </a:solidFill>
-                <a:latin typeface="Hanken Grotesk"/>
-              </a:rPr>
-              <a:t>—  </a:t>
-            </a:r>
-            <a:r>
-              <a:rPr sz="1300" b="0">
-                <a:solidFill>
-                  <a:srgbClr val="15201C"/>
-                </a:solidFill>
-                <a:latin typeface="Hanken Grotesk"/>
-              </a:rPr>
-              <a:t>Two WAF layers: CloudFront + the Cognito pool</a:t>
-            </a:r>
-          </a:p>
-          <a:p>
-            <a:pPr>
-              <a:lnSpc>
-                <a:spcPct val="112000"/>
-              </a:lnSpc>
-              <a:spcAft>
-                <a:spcPts val="900"/>
-              </a:spcAft>
-            </a:pPr>
-            <a:r>
-              <a:rPr sz="1300" b="1">
-                <a:solidFill>
-                  <a:srgbClr val="1F7A57"/>
-                </a:solidFill>
-                <a:latin typeface="Hanken Grotesk"/>
-              </a:rPr>
-              <a:t>—  </a:t>
-            </a:r>
-            <a:r>
-              <a:rPr sz="1300" b="0">
-                <a:solidFill>
-                  <a:srgbClr val="15201C"/>
-                </a:solidFill>
-                <a:latin typeface="Hanken Grotesk"/>
-              </a:rPr>
-              <a:t>Per-function IAM; money invariants in Postgres GRANTs</a:t>
-            </a:r>
-          </a:p>
-          <a:p>
-            <a:pPr>
-              <a:lnSpc>
-                <a:spcPct val="112000"/>
-              </a:lnSpc>
-              <a:spcAft>
-                <a:spcPts val="900"/>
-              </a:spcAft>
-            </a:pPr>
-            <a:r>
-              <a:rPr sz="1300" b="1">
-                <a:solidFill>
-                  <a:srgbClr val="1F7A57"/>
-                </a:solidFill>
-                <a:latin typeface="Hanken Grotesk"/>
-              </a:rPr>
-              <a:t>—  </a:t>
-            </a:r>
-            <a:r>
-              <a:rPr sz="1300" b="0">
-                <a:solidFill>
-                  <a:srgbClr val="15201C"/>
-                </a:solidFill>
-                <a:latin typeface="Hanken Grotesk"/>
-              </a:rPr>
-              <a:t>Retailer credential readable by exactly one function — admin can rotate, never read</a:t>
-            </a:r>
-          </a:p>
-          <a:p>
-            <a:pPr>
-              <a:lnSpc>
-                <a:spcPct val="112000"/>
-              </a:lnSpc>
-              <a:spcAft>
-                <a:spcPts val="900"/>
-              </a:spcAft>
-            </a:pPr>
-            <a:r>
-              <a:rPr sz="1300" b="1">
-                <a:solidFill>
-                  <a:srgbClr val="1F7A57"/>
-                </a:solidFill>
-                <a:latin typeface="Hanken Grotesk"/>
-              </a:rPr>
-              <a:t>—  </a:t>
-            </a:r>
-            <a:r>
-              <a:rPr sz="1300" b="0">
-                <a:solidFill>
-                  <a:srgbClr val="15201C"/>
-                </a:solidFill>
-                <a:latin typeface="Hanken Grotesk"/>
-              </a:rPr>
-              <a:t>Customer / admin separated at the pool level</a:t>
-            </a:r>
-          </a:p>
-        </p:txBody>
-      </p:sp>
-      <p:sp>
-        <p:nvSpPr>
-          <p:cNvPr id="15" name="Rectangle 14"/>
+              <a:t>the redirect hot path (the viral surface) costs micro-cents per thousand clicks and cannot touch Aurora - cost scales with revenue-bearing traffic, not with virality.</a:t>
+            </a:r>
+          </a:p>
+        </p:txBody>
+      </p:sp>
+      <p:sp>
+        <p:nvSpPr>
+          <p:cNvPr id="7" name="Rectangle 6"/>
           <p:cNvSpPr/>
           <p:nvPr/>
         </p:nvSpPr>
@@ -8093,7 +7668,7 @@
       </p:sp>
       <p:sp>
         <p:nvSpPr>
-          <p:cNvPr id="16" name="TextBox 15"/>
+          <p:cNvPr id="8" name="TextBox 7"/>
           <p:cNvSpPr txBox="1"/>
           <p:nvPr/>
         </p:nvSpPr>
@@ -8136,7 +7711,7 @@
       </p:sp>
       <p:sp>
         <p:nvSpPr>
-          <p:cNvPr id="17" name="TextBox 16"/>
+          <p:cNvPr id="9" name="TextBox 8"/>
           <p:cNvSpPr txBox="1"/>
           <p:nvPr/>
         </p:nvSpPr>
@@ -8259,7 +7834,7 @@
                 </a:solidFill>
                 <a:latin typeface="Space Mono"/>
               </a:rPr>
-              <a:t>WRAP-UP</a:t>
+              <a:t>DECISIONS</a:t>
             </a:r>
           </a:p>
         </p:txBody>
@@ -8287,147 +7862,635 @@
           <a:lstStyle/>
           <a:p>
             <a:r>
-              <a:rPr sz="2700" b="1">
+              <a:rPr sz="2500" b="1">
                 <a:solidFill>
                   <a:srgbClr val="15201C"/>
                 </a:solidFill>
                 <a:latin typeface="Space Grotesk"/>
               </a:rPr>
-              <a:t>Status and what's next</a:t>
-            </a:r>
-          </a:p>
-        </p:txBody>
-      </p:sp>
-      <p:sp>
-        <p:nvSpPr>
-          <p:cNvPr id="5" name="Rounded Rectangle 4"/>
-          <p:cNvSpPr/>
-          <p:nvPr/>
-        </p:nvSpPr>
-        <p:spPr>
-          <a:xfrm>
-            <a:off x="685800" y="1874519"/>
-            <a:ext cx="3593592" cy="2468880"/>
-          </a:xfrm>
-          <a:prstGeom prst="roundRect">
-            <a:avLst>
-              <a:gd name="adj" fmla="val 5500"/>
-            </a:avLst>
-          </a:prstGeom>
-          <a:solidFill>
-            <a:srgbClr val="FFFFFF"/>
-          </a:solidFill>
-          <a:ln w="12700">
-            <a:solidFill>
-              <a:srgbClr val="E6EBE8"/>
-            </a:solidFill>
-          </a:ln>
-          <a:effectLst/>
-        </p:spPr>
-        <p:style>
-          <a:lnRef idx="1">
-            <a:schemeClr val="accent1"/>
-          </a:lnRef>
-          <a:fillRef idx="3">
-            <a:schemeClr val="accent1"/>
-          </a:fillRef>
-          <a:effectRef idx="2">
-            <a:schemeClr val="accent1"/>
-          </a:effectRef>
-          <a:fontRef idx="minor">
-            <a:schemeClr val="lt1"/>
-          </a:fontRef>
-        </p:style>
-        <p:txBody>
-          <a:bodyPr rtlCol="0" anchor="ctr" wrap="square" lIns="146304" rIns="146304" tIns="109728" bIns="109728"/>
-          <a:lstStyle/>
-          <a:p>
-            <a:pPr algn="ctr"/>
-          </a:p>
-        </p:txBody>
-      </p:sp>
-      <p:sp>
-        <p:nvSpPr>
-          <p:cNvPr id="6" name="Rounded Rectangle 5"/>
-          <p:cNvSpPr/>
-          <p:nvPr/>
-        </p:nvSpPr>
-        <p:spPr>
-          <a:xfrm>
-            <a:off x="868680" y="2057400"/>
-            <a:ext cx="475488" cy="475488"/>
-          </a:xfrm>
-          <a:prstGeom prst="roundRect">
-            <a:avLst>
-              <a:gd name="adj" fmla="val 28000"/>
-            </a:avLst>
-          </a:prstGeom>
-          <a:solidFill>
-            <a:srgbClr val="E7F1EC"/>
-          </a:solidFill>
-          <a:ln w="12700">
-            <a:solidFill>
-              <a:srgbClr val="D2E3D9"/>
-            </a:solidFill>
-          </a:ln>
-          <a:effectLst/>
-        </p:spPr>
-        <p:style>
-          <a:lnRef idx="1">
-            <a:schemeClr val="accent1"/>
-          </a:lnRef>
-          <a:fillRef idx="3">
-            <a:schemeClr val="accent1"/>
-          </a:fillRef>
-          <a:effectRef idx="2">
-            <a:schemeClr val="accent1"/>
-          </a:effectRef>
-          <a:fontRef idx="minor">
-            <a:schemeClr val="lt1"/>
-          </a:fontRef>
-        </p:style>
-        <p:txBody>
-          <a:bodyPr rtlCol="0" anchor="ctr" wrap="square" lIns="146304" rIns="146304" tIns="109728" bIns="109728"/>
-          <a:lstStyle/>
-          <a:p>
-            <a:pPr algn="ctr"/>
-          </a:p>
-        </p:txBody>
-      </p:sp>
-      <p:pic>
-        <p:nvPicPr>
-          <p:cNvPr id="7" name="Picture 6" descr="check.png"/>
-          <p:cNvPicPr>
-            <a:picLocks noChangeAspect="1"/>
-          </p:cNvPicPr>
-          <p:nvPr/>
-        </p:nvPicPr>
-        <p:blipFill>
-          <a:blip r:embed="rId2"/>
-          <a:stretch>
-            <a:fillRect/>
-          </a:stretch>
-        </p:blipFill>
-        <p:spPr>
-          <a:xfrm>
-            <a:off x="935248" y="2123968"/>
-            <a:ext cx="342351" cy="342351"/>
-          </a:xfrm>
-          <a:prstGeom prst="rect">
-            <a:avLst/>
-          </a:prstGeom>
-        </p:spPr>
-      </p:pic>
-      <p:sp>
-        <p:nvSpPr>
-          <p:cNvPr id="8" name="TextBox 7"/>
+              <a:t>Limits I know about — and their revisit triggers</a:t>
+            </a:r>
+          </a:p>
+        </p:txBody>
+      </p:sp>
+      <p:graphicFrame>
+        <p:nvGraphicFramePr>
+          <p:cNvPr id="5" name="Table 4"/>
+          <p:cNvGraphicFramePr>
+            <a:graphicFrameLocks noGrp="1"/>
+          </p:cNvGraphicFramePr>
+          <p:nvPr/>
+        </p:nvGraphicFramePr>
+        <p:xfrm>
+          <a:off x="658368" y="1737360"/>
+          <a:ext cx="10881359" cy="2560320"/>
+        </p:xfrm>
+        <a:graphic>
+          <a:graphicData uri="http://schemas.openxmlformats.org/drawingml/2006/table">
+            <a:tbl>
+              <a:tblPr>
+                <a:tableStyleId>{5C22544A-7EE6-4342-B048-85BDC9FD1C3A}</a:tableStyleId>
+              </a:tblPr>
+              <a:tblGrid>
+                <a:gridCol w="3017520"/>
+                <a:gridCol w="4114800"/>
+                <a:gridCol w="3749039"/>
+              </a:tblGrid>
+              <a:tr h="365760">
+                <a:tc>
+                  <a:txBody>
+                    <a:bodyPr wrap="square"/>
+                    <a:lstStyle/>
+                    <a:p>
+                      <a:pPr>
+                        <a:lnSpc>
+                          <a:spcPct val="108000"/>
+                        </a:lnSpc>
+                      </a:pPr>
+                      <a:r>
+                        <a:rPr sz="1100" b="1">
+                          <a:solidFill>
+                            <a:srgbClr val="7FE0B0"/>
+                          </a:solidFill>
+                          <a:latin typeface="Space Grotesk"/>
+                        </a:rPr>
+                        <a:t>Limitation</a:t>
+                      </a:r>
+                    </a:p>
+                  </a:txBody>
+                  <a:tcPr marL="91440" marR="91440" marT="45720" marB="45720">
+                    <a:solidFill>
+                      <a:srgbClr val="15201C"/>
+                    </a:solidFill>
+                  </a:tcPr>
+                </a:tc>
+                <a:tc>
+                  <a:txBody>
+                    <a:bodyPr wrap="square"/>
+                    <a:lstStyle/>
+                    <a:p>
+                      <a:pPr>
+                        <a:lnSpc>
+                          <a:spcPct val="108000"/>
+                        </a:lnSpc>
+                      </a:pPr>
+                      <a:r>
+                        <a:rPr sz="1100" b="1">
+                          <a:solidFill>
+                            <a:srgbClr val="7FE0B0"/>
+                          </a:solidFill>
+                          <a:latin typeface="Space Grotesk"/>
+                        </a:rPr>
+                        <a:t>Current stance</a:t>
+                      </a:r>
+                    </a:p>
+                  </a:txBody>
+                  <a:tcPr marL="91440" marR="91440" marT="45720" marB="45720">
+                    <a:solidFill>
+                      <a:srgbClr val="15201C"/>
+                    </a:solidFill>
+                  </a:tcPr>
+                </a:tc>
+                <a:tc>
+                  <a:txBody>
+                    <a:bodyPr wrap="square"/>
+                    <a:lstStyle/>
+                    <a:p>
+                      <a:pPr>
+                        <a:lnSpc>
+                          <a:spcPct val="108000"/>
+                        </a:lnSpc>
+                      </a:pPr>
+                      <a:r>
+                        <a:rPr sz="1100" b="1">
+                          <a:solidFill>
+                            <a:srgbClr val="7FE0B0"/>
+                          </a:solidFill>
+                          <a:latin typeface="Space Grotesk"/>
+                        </a:rPr>
+                        <a:t>Revisit trigger</a:t>
+                      </a:r>
+                    </a:p>
+                  </a:txBody>
+                  <a:tcPr marL="91440" marR="91440" marT="45720" marB="45720">
+                    <a:solidFill>
+                      <a:srgbClr val="15201C"/>
+                    </a:solidFill>
+                  </a:tcPr>
+                </a:tc>
+              </a:tr>
+              <a:tr h="365760">
+                <a:tc>
+                  <a:txBody>
+                    <a:bodyPr wrap="square"/>
+                    <a:lstStyle/>
+                    <a:p>
+                      <a:pPr>
+                        <a:lnSpc>
+                          <a:spcPct val="108000"/>
+                        </a:lnSpc>
+                      </a:pPr>
+                      <a:r>
+                        <a:rPr sz="1050" b="1">
+                          <a:solidFill>
+                            <a:srgbClr val="15201C"/>
+                          </a:solidFill>
+                          <a:latin typeface="Hanken Grotesk"/>
+                        </a:rPr>
+                        <a:t>Single active region</a:t>
+                      </a:r>
+                    </a:p>
+                  </a:txBody>
+                  <a:tcPr marL="91440" marR="91440" marT="45720" marB="45720">
+                    <a:solidFill>
+                      <a:srgbClr val="FFFFFF"/>
+                    </a:solidFill>
+                  </a:tcPr>
+                </a:tc>
+                <a:tc>
+                  <a:txBody>
+                    <a:bodyPr wrap="square"/>
+                    <a:lstStyle/>
+                    <a:p>
+                      <a:pPr>
+                        <a:lnSpc>
+                          <a:spcPct val="108000"/>
+                        </a:lnSpc>
+                      </a:pPr>
+                      <a:r>
+                        <a:rPr sz="1050" b="0">
+                          <a:solidFill>
+                            <a:srgbClr val="6B7B73"/>
+                          </a:solidFill>
+                          <a:latin typeface="Hanken Grotesk"/>
+                        </a:rPr>
+                        <a:t>Cross-region backups only; RTO = hours (ADR-0005)</a:t>
+                      </a:r>
+                    </a:p>
+                  </a:txBody>
+                  <a:tcPr marL="91440" marR="91440" marT="45720" marB="45720">
+                    <a:solidFill>
+                      <a:srgbClr val="FFFFFF"/>
+                    </a:solidFill>
+                  </a:tcPr>
+                </a:tc>
+                <a:tc>
+                  <a:txBody>
+                    <a:bodyPr wrap="square"/>
+                    <a:lstStyle/>
+                    <a:p>
+                      <a:pPr>
+                        <a:lnSpc>
+                          <a:spcPct val="108000"/>
+                        </a:lnSpc>
+                      </a:pPr>
+                      <a:r>
+                        <a:rPr sz="1050" b="0">
+                          <a:solidFill>
+                            <a:srgbClr val="6B7B73"/>
+                          </a:solidFill>
+                          <a:latin typeface="Hanken Grotesk"/>
+                        </a:rPr>
+                        <a:t>Revenue SLA or user base that prices an active-standby</a:t>
+                      </a:r>
+                    </a:p>
+                  </a:txBody>
+                  <a:tcPr marL="91440" marR="91440" marT="45720" marB="45720">
+                    <a:solidFill>
+                      <a:srgbClr val="FFFFFF"/>
+                    </a:solidFill>
+                  </a:tcPr>
+                </a:tc>
+              </a:tr>
+              <a:tr h="365760">
+                <a:tc>
+                  <a:txBody>
+                    <a:bodyPr wrap="square"/>
+                    <a:lstStyle/>
+                    <a:p>
+                      <a:pPr>
+                        <a:lnSpc>
+                          <a:spcPct val="108000"/>
+                        </a:lnSpc>
+                      </a:pPr>
+                      <a:r>
+                        <a:rPr sz="1050" b="1">
+                          <a:solidFill>
+                            <a:srgbClr val="15201C"/>
+                          </a:solidFill>
+                          <a:latin typeface="Hanken Grotesk"/>
+                        </a:rPr>
+                        <a:t>Cognito PII: no PITR, weak queries</a:t>
+                      </a:r>
+                    </a:p>
+                  </a:txBody>
+                  <a:tcPr marL="91440" marR="91440" marT="45720" marB="45720">
+                    <a:solidFill>
+                      <a:srgbClr val="F4F6F5"/>
+                    </a:solidFill>
+                  </a:tcPr>
+                </a:tc>
+                <a:tc>
+                  <a:txBody>
+                    <a:bodyPr wrap="square"/>
+                    <a:lstStyle/>
+                    <a:p>
+                      <a:pPr>
+                        <a:lnSpc>
+                          <a:spcPct val="108000"/>
+                        </a:lnSpc>
+                      </a:pPr>
+                      <a:r>
+                        <a:rPr sz="1050" b="0">
+                          <a:solidFill>
+                            <a:srgbClr val="6B7B73"/>
+                          </a:solidFill>
+                          <a:latin typeface="Hanken Grotesk"/>
+                        </a:rPr>
+                        <a:t>Accepted for MVP; profile is thin</a:t>
+                      </a:r>
+                    </a:p>
+                  </a:txBody>
+                  <a:tcPr marL="91440" marR="91440" marT="45720" marB="45720">
+                    <a:solidFill>
+                      <a:srgbClr val="F4F6F5"/>
+                    </a:solidFill>
+                  </a:tcPr>
+                </a:tc>
+                <a:tc>
+                  <a:txBody>
+                    <a:bodyPr wrap="square"/>
+                    <a:lstStyle/>
+                    <a:p>
+                      <a:pPr>
+                        <a:lnSpc>
+                          <a:spcPct val="108000"/>
+                        </a:lnSpc>
+                      </a:pPr>
+                      <a:r>
+                        <a:rPr sz="1050" b="0">
+                          <a:solidFill>
+                            <a:srgbClr val="6B7B73"/>
+                          </a:solidFill>
+                          <a:latin typeface="Hanken Grotesk"/>
+                        </a:rPr>
+                        <a:t>Compliance/BI needs -&gt; dual-write projection to SQL</a:t>
+                      </a:r>
+                    </a:p>
+                  </a:txBody>
+                  <a:tcPr marL="91440" marR="91440" marT="45720" marB="45720">
+                    <a:solidFill>
+                      <a:srgbClr val="F4F6F5"/>
+                    </a:solidFill>
+                  </a:tcPr>
+                </a:tc>
+              </a:tr>
+              <a:tr h="365760">
+                <a:tc>
+                  <a:txBody>
+                    <a:bodyPr wrap="square"/>
+                    <a:lstStyle/>
+                    <a:p>
+                      <a:pPr>
+                        <a:lnSpc>
+                          <a:spcPct val="108000"/>
+                        </a:lnSpc>
+                      </a:pPr>
+                      <a:r>
+                        <a:rPr sz="1050" b="1">
+                          <a:solidFill>
+                            <a:srgbClr val="15201C"/>
+                          </a:solidFill>
+                          <a:latin typeface="Hanken Grotesk"/>
+                        </a:rPr>
+                        <a:t>JWT revocation lag &lt;= 1 h</a:t>
+                      </a:r>
+                    </a:p>
+                  </a:txBody>
+                  <a:tcPr marL="91440" marR="91440" marT="45720" marB="45720">
+                    <a:solidFill>
+                      <a:srgbClr val="FFFFFF"/>
+                    </a:solidFill>
+                  </a:tcPr>
+                </a:tc>
+                <a:tc>
+                  <a:txBody>
+                    <a:bodyPr wrap="square"/>
+                    <a:lstStyle/>
+                    <a:p>
+                      <a:pPr>
+                        <a:lnSpc>
+                          <a:spcPct val="108000"/>
+                        </a:lnSpc>
+                      </a:pPr>
+                      <a:r>
+                        <a:rPr sz="1050" b="0">
+                          <a:solidFill>
+                            <a:srgbClr val="6B7B73"/>
+                          </a:solidFill>
+                          <a:latin typeface="Hanken Grotesk"/>
+                        </a:rPr>
+                        <a:t>Only member surface is a read-only wallet</a:t>
+                      </a:r>
+                    </a:p>
+                  </a:txBody>
+                  <a:tcPr marL="91440" marR="91440" marT="45720" marB="45720">
+                    <a:solidFill>
+                      <a:srgbClr val="FFFFFF"/>
+                    </a:solidFill>
+                  </a:tcPr>
+                </a:tc>
+                <a:tc>
+                  <a:txBody>
+                    <a:bodyPr wrap="square"/>
+                    <a:lstStyle/>
+                    <a:p>
+                      <a:pPr>
+                        <a:lnSpc>
+                          <a:spcPct val="108000"/>
+                        </a:lnSpc>
+                      </a:pPr>
+                      <a:r>
+                        <a:rPr sz="1050" b="0">
+                          <a:solidFill>
+                            <a:srgbClr val="6B7B73"/>
+                          </a:solidFill>
+                          <a:latin typeface="Hanken Grotesk"/>
+                        </a:rPr>
+                        <a:t>Any sensitive member mutation -&gt; short tokens or in-handler check</a:t>
+                      </a:r>
+                    </a:p>
+                  </a:txBody>
+                  <a:tcPr marL="91440" marR="91440" marT="45720" marB="45720">
+                    <a:solidFill>
+                      <a:srgbClr val="FFFFFF"/>
+                    </a:solidFill>
+                  </a:tcPr>
+                </a:tc>
+              </a:tr>
+              <a:tr h="365760">
+                <a:tc>
+                  <a:txBody>
+                    <a:bodyPr wrap="square"/>
+                    <a:lstStyle/>
+                    <a:p>
+                      <a:pPr>
+                        <a:lnSpc>
+                          <a:spcPct val="108000"/>
+                        </a:lnSpc>
+                      </a:pPr>
+                      <a:r>
+                        <a:rPr sz="1050" b="1">
+                          <a:solidFill>
+                            <a:srgbClr val="15201C"/>
+                          </a:solidFill>
+                          <a:latin typeface="Hanken Grotesk"/>
+                        </a:rPr>
+                        <a:t>Account concurrency = 10</a:t>
+                      </a:r>
+                    </a:p>
+                  </a:txBody>
+                  <a:tcPr marL="91440" marR="91440" marT="45720" marB="45720">
+                    <a:solidFill>
+                      <a:srgbClr val="F4F6F5"/>
+                    </a:solidFill>
+                  </a:tcPr>
+                </a:tc>
+                <a:tc>
+                  <a:txBody>
+                    <a:bodyPr wrap="square"/>
+                    <a:lstStyle/>
+                    <a:p>
+                      <a:pPr>
+                        <a:lnSpc>
+                          <a:spcPct val="108000"/>
+                        </a:lnSpc>
+                      </a:pPr>
+                      <a:r>
+                        <a:rPr sz="1050" b="0">
+                          <a:solidFill>
+                            <a:srgbClr val="6B7B73"/>
+                          </a:solidFill>
+                          <a:latin typeface="Hanken Grotesk"/>
+                        </a:rPr>
+                        <a:t>No reserved concurrency anywhere (deliberate)</a:t>
+                      </a:r>
+                    </a:p>
+                  </a:txBody>
+                  <a:tcPr marL="91440" marR="91440" marT="45720" marB="45720">
+                    <a:solidFill>
+                      <a:srgbClr val="F4F6F5"/>
+                    </a:solidFill>
+                  </a:tcPr>
+                </a:tc>
+                <a:tc>
+                  <a:txBody>
+                    <a:bodyPr wrap="square"/>
+                    <a:lstStyle/>
+                    <a:p>
+                      <a:pPr>
+                        <a:lnSpc>
+                          <a:spcPct val="108000"/>
+                        </a:lnSpc>
+                      </a:pPr>
+                      <a:r>
+                        <a:rPr sz="1050" b="0">
+                          <a:solidFill>
+                            <a:srgbClr val="6B7B73"/>
+                          </a:solidFill>
+                          <a:latin typeface="Hanken Grotesk"/>
+                        </a:rPr>
+                        <a:t>Quota raise, then per-function caps return</a:t>
+                      </a:r>
+                    </a:p>
+                  </a:txBody>
+                  <a:tcPr marL="91440" marR="91440" marT="45720" marB="45720">
+                    <a:solidFill>
+                      <a:srgbClr val="F4F6F5"/>
+                    </a:solidFill>
+                  </a:tcPr>
+                </a:tc>
+              </a:tr>
+              <a:tr h="365760">
+                <a:tc>
+                  <a:txBody>
+                    <a:bodyPr wrap="square"/>
+                    <a:lstStyle/>
+                    <a:p>
+                      <a:pPr>
+                        <a:lnSpc>
+                          <a:spcPct val="108000"/>
+                        </a:lnSpc>
+                      </a:pPr>
+                      <a:r>
+                        <a:rPr sz="1050" b="1">
+                          <a:solidFill>
+                            <a:srgbClr val="15201C"/>
+                          </a:solidFill>
+                          <a:latin typeface="Hanken Grotesk"/>
+                        </a:rPr>
+                        <a:t>dev + prod in one account</a:t>
+                      </a:r>
+                    </a:p>
+                  </a:txBody>
+                  <a:tcPr marL="91440" marR="91440" marT="45720" marB="45720">
+                    <a:solidFill>
+                      <a:srgbClr val="FFFFFF"/>
+                    </a:solidFill>
+                  </a:tcPr>
+                </a:tc>
+                <a:tc>
+                  <a:txBody>
+                    <a:bodyPr wrap="square"/>
+                    <a:lstStyle/>
+                    <a:p>
+                      <a:pPr>
+                        <a:lnSpc>
+                          <a:spcPct val="108000"/>
+                        </a:lnSpc>
+                      </a:pPr>
+                      <a:r>
+                        <a:rPr sz="1050" b="0">
+                          <a:solidFill>
+                            <a:srgbClr val="6B7B73"/>
+                          </a:solidFill>
+                          <a:latin typeface="Hanken Grotesk"/>
+                        </a:rPr>
+                        <a:t>Shared SMS cap and service quotas</a:t>
+                      </a:r>
+                    </a:p>
+                  </a:txBody>
+                  <a:tcPr marL="91440" marR="91440" marT="45720" marB="45720">
+                    <a:solidFill>
+                      <a:srgbClr val="FFFFFF"/>
+                    </a:solidFill>
+                  </a:tcPr>
+                </a:tc>
+                <a:tc>
+                  <a:txBody>
+                    <a:bodyPr wrap="square"/>
+                    <a:lstStyle/>
+                    <a:p>
+                      <a:pPr>
+                        <a:lnSpc>
+                          <a:spcPct val="108000"/>
+                        </a:lnSpc>
+                      </a:pPr>
+                      <a:r>
+                        <a:rPr sz="1050" b="0">
+                          <a:solidFill>
+                            <a:srgbClr val="6B7B73"/>
+                          </a:solidFill>
+                          <a:latin typeface="Hanken Grotesk"/>
+                        </a:rPr>
+                        <a:t>Before marketing push: account split</a:t>
+                      </a:r>
+                    </a:p>
+                  </a:txBody>
+                  <a:tcPr marL="91440" marR="91440" marT="45720" marB="45720">
+                    <a:solidFill>
+                      <a:srgbClr val="FFFFFF"/>
+                    </a:solidFill>
+                  </a:tcPr>
+                </a:tc>
+              </a:tr>
+              <a:tr h="365760">
+                <a:tc>
+                  <a:txBody>
+                    <a:bodyPr wrap="square"/>
+                    <a:lstStyle/>
+                    <a:p>
+                      <a:pPr>
+                        <a:lnSpc>
+                          <a:spcPct val="108000"/>
+                        </a:lnSpc>
+                      </a:pPr>
+                      <a:r>
+                        <a:rPr sz="1050" b="1">
+                          <a:solidFill>
+                            <a:srgbClr val="15201C"/>
+                          </a:solidFill>
+                          <a:latin typeface="Hanken Grotesk"/>
+                        </a:rPr>
+                        <a:t>Retailer throttling interim</a:t>
+                      </a:r>
+                    </a:p>
+                  </a:txBody>
+                  <a:tcPr marL="91440" marR="91440" marT="45720" marB="45720">
+                    <a:solidFill>
+                      <a:srgbClr val="F4F6F5"/>
+                    </a:solidFill>
+                  </a:tcPr>
+                </a:tc>
+                <a:tc>
+                  <a:txBody>
+                    <a:bodyPr wrap="square"/>
+                    <a:lstStyle/>
+                    <a:p>
+                      <a:pPr>
+                        <a:lnSpc>
+                          <a:spcPct val="108000"/>
+                        </a:lnSpc>
+                      </a:pPr>
+                      <a:r>
+                        <a:rPr sz="1050" b="0">
+                          <a:solidFill>
+                            <a:srgbClr val="6B7B73"/>
+                          </a:solidFill>
+                          <a:latin typeface="Hanken Grotesk"/>
+                        </a:rPr>
+                        <a:t>Sequential calls + one ban-window retry (ADR-0021)</a:t>
+                      </a:r>
+                    </a:p>
+                  </a:txBody>
+                  <a:tcPr marL="91440" marR="91440" marT="45720" marB="45720">
+                    <a:solidFill>
+                      <a:srgbClr val="F4F6F5"/>
+                    </a:solidFill>
+                  </a:tcPr>
+                </a:tc>
+                <a:tc>
+                  <a:txBody>
+                    <a:bodyPr wrap="square"/>
+                    <a:lstStyle/>
+                    <a:p>
+                      <a:pPr>
+                        <a:lnSpc>
+                          <a:spcPct val="108000"/>
+                        </a:lnSpc>
+                      </a:pPr>
+                      <a:r>
+                        <a:rPr sz="1050" b="0">
+                          <a:solidFill>
+                            <a:srgbClr val="6B7B73"/>
+                          </a:solidFill>
+                          <a:latin typeface="Hanken Grotesk"/>
+                        </a:rPr>
+                        <a:t>Poller volume growth or AliExpress app approval</a:t>
+                      </a:r>
+                    </a:p>
+                  </a:txBody>
+                  <a:tcPr marL="91440" marR="91440" marT="45720" marB="45720">
+                    <a:solidFill>
+                      <a:srgbClr val="F4F6F5"/>
+                    </a:solidFill>
+                  </a:tcPr>
+                </a:tc>
+              </a:tr>
+            </a:tbl>
+          </a:graphicData>
+        </a:graphic>
+      </p:graphicFrame>
+      <p:sp>
+        <p:nvSpPr>
+          <p:cNvPr id="6" name="TextBox 5"/>
           <p:cNvSpPr txBox="1"/>
           <p:nvPr/>
         </p:nvSpPr>
         <p:spPr>
           <a:xfrm>
-            <a:off x="1472184" y="2093976"/>
-            <a:ext cx="2679192" cy="457200"/>
+            <a:off x="658368" y="5577840"/>
+            <a:ext cx="10972800" cy="548640"/>
           </a:xfrm>
           <a:prstGeom prst="rect">
             <a:avLst/>
@@ -8441,488 +8504,29 @@
           <a:lstStyle/>
           <a:p>
             <a:r>
-              <a:rPr sz="1400" b="1">
-                <a:solidFill>
-                  <a:srgbClr val="15201C"/>
+              <a:rPr sz="2200" b="1">
+                <a:solidFill>
+                  <a:srgbClr val="1F7A57"/>
                 </a:solidFill>
                 <a:latin typeface="Space Grotesk"/>
               </a:rPr>
-              <a:t>Live in dev + prod</a:t>
-            </a:r>
-          </a:p>
-        </p:txBody>
-      </p:sp>
-      <p:sp>
-        <p:nvSpPr>
-          <p:cNvPr id="9" name="TextBox 8"/>
-          <p:cNvSpPr txBox="1"/>
-          <p:nvPr/>
-        </p:nvSpPr>
-        <p:spPr>
-          <a:xfrm>
-            <a:off x="886968" y="2679191"/>
-            <a:ext cx="3191256" cy="1508760"/>
-          </a:xfrm>
-          <a:prstGeom prst="rect">
-            <a:avLst/>
-          </a:prstGeom>
-          <a:noFill/>
-        </p:spPr>
-        <p:txBody>
-          <a:bodyPr wrap="square">
-            <a:spAutoFit/>
-          </a:bodyPr>
-          <a:lstStyle/>
-          <a:p>
-            <a:pPr>
-              <a:lnSpc>
-                <a:spcPct val="114000"/>
-              </a:lnSpc>
-            </a:pPr>
-            <a:r>
-              <a:rPr sz="1250" b="0">
-                <a:solidFill>
-                  <a:srgbClr val="6B7B73"/>
-                </a:solidFill>
-                <a:latin typeface="Hanken Grotesk"/>
-              </a:rPr>
-              <a:t>Create-link, landing /p/, conversion pipeline (15-min heartbeat), wallet, admin console with money KPIs, funnel analytics.</a:t>
-            </a:r>
-          </a:p>
-        </p:txBody>
-      </p:sp>
-      <p:sp>
-        <p:nvSpPr>
-          <p:cNvPr id="10" name="Rounded Rectangle 9"/>
-          <p:cNvSpPr/>
-          <p:nvPr/>
-        </p:nvSpPr>
-        <p:spPr>
-          <a:xfrm>
-            <a:off x="4480560" y="1874519"/>
-            <a:ext cx="3593592" cy="2468880"/>
-          </a:xfrm>
-          <a:prstGeom prst="roundRect">
-            <a:avLst>
-              <a:gd name="adj" fmla="val 5500"/>
-            </a:avLst>
-          </a:prstGeom>
-          <a:solidFill>
-            <a:srgbClr val="FFFFFF"/>
-          </a:solidFill>
-          <a:ln w="12700">
-            <a:solidFill>
-              <a:srgbClr val="E6EBE8"/>
-            </a:solidFill>
-          </a:ln>
-          <a:effectLst/>
-        </p:spPr>
-        <p:style>
-          <a:lnRef idx="1">
-            <a:schemeClr val="accent1"/>
-          </a:lnRef>
-          <a:fillRef idx="3">
-            <a:schemeClr val="accent1"/>
-          </a:fillRef>
-          <a:effectRef idx="2">
-            <a:schemeClr val="accent1"/>
-          </a:effectRef>
-          <a:fontRef idx="minor">
-            <a:schemeClr val="lt1"/>
-          </a:fontRef>
-        </p:style>
-        <p:txBody>
-          <a:bodyPr rtlCol="0" anchor="ctr" wrap="square" lIns="146304" rIns="146304" tIns="109728" bIns="109728"/>
-          <a:lstStyle/>
-          <a:p>
-            <a:pPr algn="ctr"/>
-          </a:p>
-        </p:txBody>
-      </p:sp>
-      <p:sp>
-        <p:nvSpPr>
-          <p:cNvPr id="11" name="Rounded Rectangle 10"/>
-          <p:cNvSpPr/>
-          <p:nvPr/>
-        </p:nvSpPr>
-        <p:spPr>
-          <a:xfrm>
-            <a:off x="4663440" y="2057400"/>
-            <a:ext cx="475488" cy="475488"/>
-          </a:xfrm>
-          <a:prstGeom prst="roundRect">
-            <a:avLst>
-              <a:gd name="adj" fmla="val 28000"/>
-            </a:avLst>
-          </a:prstGeom>
-          <a:solidFill>
-            <a:srgbClr val="E7F1EC"/>
-          </a:solidFill>
-          <a:ln w="12700">
-            <a:solidFill>
-              <a:srgbClr val="D2E3D9"/>
-            </a:solidFill>
-          </a:ln>
-          <a:effectLst/>
-        </p:spPr>
-        <p:style>
-          <a:lnRef idx="1">
-            <a:schemeClr val="accent1"/>
-          </a:lnRef>
-          <a:fillRef idx="3">
-            <a:schemeClr val="accent1"/>
-          </a:fillRef>
-          <a:effectRef idx="2">
-            <a:schemeClr val="accent1"/>
-          </a:effectRef>
-          <a:fontRef idx="minor">
-            <a:schemeClr val="lt1"/>
-          </a:fontRef>
-        </p:style>
-        <p:txBody>
-          <a:bodyPr rtlCol="0" anchor="ctr" wrap="square" lIns="146304" rIns="146304" tIns="109728" bIns="109728"/>
-          <a:lstStyle/>
-          <a:p>
-            <a:pPr algn="ctr"/>
-          </a:p>
-        </p:txBody>
-      </p:sp>
-      <p:pic>
-        <p:nvPicPr>
-          <p:cNvPr id="12" name="Picture 11" descr="cone.png"/>
-          <p:cNvPicPr>
-            <a:picLocks noChangeAspect="1"/>
-          </p:cNvPicPr>
-          <p:nvPr/>
-        </p:nvPicPr>
-        <p:blipFill>
-          <a:blip r:embed="rId3"/>
-          <a:stretch>
-            <a:fillRect/>
-          </a:stretch>
-        </p:blipFill>
-        <p:spPr>
-          <a:xfrm>
-            <a:off x="4730008" y="2123968"/>
-            <a:ext cx="342351" cy="342351"/>
-          </a:xfrm>
-          <a:prstGeom prst="rect">
-            <a:avLst/>
-          </a:prstGeom>
-        </p:spPr>
-      </p:pic>
-      <p:sp>
-        <p:nvSpPr>
-          <p:cNvPr id="13" name="TextBox 12"/>
-          <p:cNvSpPr txBox="1"/>
-          <p:nvPr/>
-        </p:nvSpPr>
-        <p:spPr>
-          <a:xfrm>
-            <a:off x="5266944" y="2093976"/>
-            <a:ext cx="2679192" cy="457200"/>
-          </a:xfrm>
-          <a:prstGeom prst="rect">
-            <a:avLst/>
-          </a:prstGeom>
-          <a:noFill/>
-        </p:spPr>
-        <p:txBody>
-          <a:bodyPr wrap="square">
-            <a:spAutoFit/>
-          </a:bodyPr>
-          <a:lstStyle/>
-          <a:p>
-            <a:r>
-              <a:rPr sz="1400" b="1">
-                <a:solidFill>
-                  <a:srgbClr val="15201C"/>
-                </a:solidFill>
-                <a:latin typeface="Space Grotesk"/>
-              </a:rPr>
-              <a:t>Critical path</a:t>
-            </a:r>
-          </a:p>
-        </p:txBody>
-      </p:sp>
-      <p:sp>
-        <p:nvSpPr>
-          <p:cNvPr id="14" name="TextBox 13"/>
-          <p:cNvSpPr txBox="1"/>
-          <p:nvPr/>
-        </p:nvSpPr>
-        <p:spPr>
-          <a:xfrm>
-            <a:off x="4681728" y="2679191"/>
-            <a:ext cx="3191256" cy="1508760"/>
-          </a:xfrm>
-          <a:prstGeom prst="rect">
-            <a:avLst/>
-          </a:prstGeom>
-          <a:noFill/>
-        </p:spPr>
-        <p:txBody>
-          <a:bodyPr wrap="square">
-            <a:spAutoFit/>
-          </a:bodyPr>
-          <a:lstStyle/>
-          <a:p>
-            <a:pPr>
-              <a:lnSpc>
-                <a:spcPct val="114000"/>
-              </a:lnSpc>
-            </a:pPr>
-            <a:r>
-              <a:rPr sz="1250" b="0">
-                <a:solidFill>
-                  <a:srgbClr val="6B7B73"/>
-                </a:solidFill>
-                <a:latin typeface="Hanken Grotesk"/>
-              </a:rPr>
-              <a:t>Meta WhatsApp onboarding (OTP at scale) + AliExpress app approval.</a:t>
-            </a:r>
-          </a:p>
-        </p:txBody>
-      </p:sp>
-      <p:sp>
-        <p:nvSpPr>
-          <p:cNvPr id="15" name="Rounded Rectangle 14"/>
-          <p:cNvSpPr/>
-          <p:nvPr/>
-        </p:nvSpPr>
-        <p:spPr>
-          <a:xfrm>
-            <a:off x="8275320" y="1874519"/>
-            <a:ext cx="3593592" cy="2468880"/>
-          </a:xfrm>
-          <a:prstGeom prst="roundRect">
-            <a:avLst>
-              <a:gd name="adj" fmla="val 5500"/>
-            </a:avLst>
-          </a:prstGeom>
-          <a:solidFill>
-            <a:srgbClr val="FFFFFF"/>
-          </a:solidFill>
-          <a:ln w="12700">
-            <a:solidFill>
-              <a:srgbClr val="E6EBE8"/>
-            </a:solidFill>
-          </a:ln>
-          <a:effectLst/>
-        </p:spPr>
-        <p:style>
-          <a:lnRef idx="1">
-            <a:schemeClr val="accent1"/>
-          </a:lnRef>
-          <a:fillRef idx="3">
-            <a:schemeClr val="accent1"/>
-          </a:fillRef>
-          <a:effectRef idx="2">
-            <a:schemeClr val="accent1"/>
-          </a:effectRef>
-          <a:fontRef idx="minor">
-            <a:schemeClr val="lt1"/>
-          </a:fontRef>
-        </p:style>
-        <p:txBody>
-          <a:bodyPr rtlCol="0" anchor="ctr" wrap="square" lIns="146304" rIns="146304" tIns="109728" bIns="109728"/>
-          <a:lstStyle/>
-          <a:p>
-            <a:pPr algn="ctr"/>
-          </a:p>
-        </p:txBody>
-      </p:sp>
-      <p:sp>
-        <p:nvSpPr>
-          <p:cNvPr id="16" name="Rounded Rectangle 15"/>
-          <p:cNvSpPr/>
-          <p:nvPr/>
-        </p:nvSpPr>
-        <p:spPr>
-          <a:xfrm>
-            <a:off x="8458200" y="2057400"/>
-            <a:ext cx="475488" cy="475488"/>
-          </a:xfrm>
-          <a:prstGeom prst="roundRect">
-            <a:avLst>
-              <a:gd name="adj" fmla="val 28000"/>
-            </a:avLst>
-          </a:prstGeom>
-          <a:solidFill>
-            <a:srgbClr val="E7F1EC"/>
-          </a:solidFill>
-          <a:ln w="12700">
-            <a:solidFill>
-              <a:srgbClr val="D2E3D9"/>
-            </a:solidFill>
-          </a:ln>
-          <a:effectLst/>
-        </p:spPr>
-        <p:style>
-          <a:lnRef idx="1">
-            <a:schemeClr val="accent1"/>
-          </a:lnRef>
-          <a:fillRef idx="3">
-            <a:schemeClr val="accent1"/>
-          </a:fillRef>
-          <a:effectRef idx="2">
-            <a:schemeClr val="accent1"/>
-          </a:effectRef>
-          <a:fontRef idx="minor">
-            <a:schemeClr val="lt1"/>
-          </a:fontRef>
-        </p:style>
-        <p:txBody>
-          <a:bodyPr rtlCol="0" anchor="ctr" wrap="square" lIns="146304" rIns="146304" tIns="109728" bIns="109728"/>
-          <a:lstStyle/>
-          <a:p>
-            <a:pPr algn="ctr"/>
-          </a:p>
-        </p:txBody>
-      </p:sp>
-      <p:pic>
-        <p:nvPicPr>
-          <p:cNvPr id="17" name="Picture 16" descr="target.png"/>
-          <p:cNvPicPr>
-            <a:picLocks noChangeAspect="1"/>
-          </p:cNvPicPr>
-          <p:nvPr/>
-        </p:nvPicPr>
-        <p:blipFill>
-          <a:blip r:embed="rId4"/>
-          <a:stretch>
-            <a:fillRect/>
-          </a:stretch>
-        </p:blipFill>
-        <p:spPr>
-          <a:xfrm>
-            <a:off x="8524768" y="2123968"/>
-            <a:ext cx="342351" cy="342351"/>
-          </a:xfrm>
-          <a:prstGeom prst="rect">
-            <a:avLst/>
-          </a:prstGeom>
-        </p:spPr>
-      </p:pic>
-      <p:sp>
-        <p:nvSpPr>
-          <p:cNvPr id="18" name="TextBox 17"/>
-          <p:cNvSpPr txBox="1"/>
-          <p:nvPr/>
-        </p:nvSpPr>
-        <p:spPr>
-          <a:xfrm>
-            <a:off x="9061704" y="2093976"/>
-            <a:ext cx="2679192" cy="457200"/>
-          </a:xfrm>
-          <a:prstGeom prst="rect">
-            <a:avLst/>
-          </a:prstGeom>
-          <a:noFill/>
-        </p:spPr>
-        <p:txBody>
-          <a:bodyPr wrap="square">
-            <a:spAutoFit/>
-          </a:bodyPr>
-          <a:lstStyle/>
-          <a:p>
-            <a:r>
-              <a:rPr sz="1400" b="1">
-                <a:solidFill>
-                  <a:srgbClr val="15201C"/>
-                </a:solidFill>
-                <a:latin typeface="Space Grotesk"/>
-              </a:rPr>
-              <a:t>Month-3 gates</a:t>
-            </a:r>
-          </a:p>
-        </p:txBody>
-      </p:sp>
-      <p:sp>
-        <p:nvSpPr>
-          <p:cNvPr id="19" name="TextBox 18"/>
-          <p:cNvSpPr txBox="1"/>
-          <p:nvPr/>
-        </p:nvSpPr>
-        <p:spPr>
-          <a:xfrm>
-            <a:off x="8476488" y="2679191"/>
-            <a:ext cx="3191256" cy="1508760"/>
-          </a:xfrm>
-          <a:prstGeom prst="rect">
-            <a:avLst/>
-          </a:prstGeom>
-          <a:noFill/>
-        </p:spPr>
-        <p:txBody>
-          <a:bodyPr wrap="square">
-            <a:spAutoFit/>
-          </a:bodyPr>
-          <a:lstStyle/>
-          <a:p>
-            <a:pPr>
-              <a:lnSpc>
-                <a:spcPct val="114000"/>
-              </a:lnSpc>
-            </a:pPr>
-            <a:r>
-              <a:rPr sz="1250" b="0">
-                <a:solidFill>
-                  <a:srgbClr val="6B7B73"/>
-                </a:solidFill>
-                <a:latin typeface="Hanken Grotesk"/>
-              </a:rPr>
-              <a:t>Decide Phase 2: group sharing + two-sided rewards.</a:t>
-            </a:r>
-          </a:p>
-        </p:txBody>
-      </p:sp>
-      <p:sp>
-        <p:nvSpPr>
-          <p:cNvPr id="20" name="TextBox 19"/>
-          <p:cNvSpPr txBox="1"/>
-          <p:nvPr/>
-        </p:nvSpPr>
-        <p:spPr>
-          <a:xfrm>
-            <a:off x="685800" y="4846320"/>
-            <a:ext cx="10972800" cy="731520"/>
-          </a:xfrm>
-          <a:prstGeom prst="rect">
-            <a:avLst/>
-          </a:prstGeom>
-          <a:noFill/>
-        </p:spPr>
-        <p:txBody>
-          <a:bodyPr wrap="square">
-            <a:spAutoFit/>
-          </a:bodyPr>
-          <a:lstStyle/>
-          <a:p>
-            <a:r>
-              <a:rPr sz="2600" b="1">
-                <a:solidFill>
-                  <a:srgbClr val="1F7A57"/>
-                </a:solidFill>
-                <a:latin typeface="Space Grotesk"/>
-              </a:rPr>
               <a:t>Questions?</a:t>
             </a:r>
             <a:r>
-              <a:rPr sz="1300" b="0">
+              <a:rPr sz="1200" b="0">
                 <a:solidFill>
                   <a:srgbClr val="8A968F"/>
                 </a:solidFill>
                 <a:latin typeface="Space Mono"/>
               </a:rPr>
-              <a:t>    backup: sequence diagrams + the ADR map →</a:t>
-            </a:r>
-          </a:p>
-        </p:txBody>
-      </p:sp>
-      <p:sp>
-        <p:nvSpPr>
-          <p:cNvPr id="21" name="Rectangle 20"/>
+              <a:t>    backup: sequence diagrams · failure modes · the rejected-alternatives list</a:t>
+            </a:r>
+          </a:p>
+        </p:txBody>
+      </p:sp>
+      <p:sp>
+        <p:nvSpPr>
+          <p:cNvPr id="7" name="Rectangle 6"/>
           <p:cNvSpPr/>
           <p:nvPr/>
         </p:nvSpPr>
@@ -8966,7 +8570,7 @@
       </p:sp>
       <p:sp>
         <p:nvSpPr>
-          <p:cNvPr id="22" name="TextBox 21"/>
+          <p:cNvPr id="8" name="TextBox 7"/>
           <p:cNvSpPr txBox="1"/>
           <p:nvPr/>
         </p:nvSpPr>
@@ -9009,7 +8613,7 @@
       </p:sp>
       <p:sp>
         <p:nvSpPr>
-          <p:cNvPr id="23" name="TextBox 22"/>
+          <p:cNvPr id="9" name="TextBox 8"/>
           <p:cNvSpPr txBox="1"/>
           <p:nvPr/>
         </p:nvSpPr>
@@ -13260,593 +12864,622 @@
                 </a:solidFill>
                 <a:latin typeface="Space Grotesk"/>
               </a:rPr>
-              <a:t>ADR-0008 + 0009 — attribution and polling</a:t>
-            </a:r>
-          </a:p>
-        </p:txBody>
-      </p:sp>
-      <p:sp>
-        <p:nvSpPr>
-          <p:cNvPr id="5" name="Rounded Rectangle 4"/>
-          <p:cNvSpPr/>
-          <p:nvPr/>
-        </p:nvSpPr>
-        <p:spPr>
-          <a:xfrm>
-            <a:off x="685800" y="2103120"/>
-            <a:ext cx="3593592" cy="2743200"/>
-          </a:xfrm>
-          <a:prstGeom prst="roundRect">
-            <a:avLst>
-              <a:gd name="adj" fmla="val 5500"/>
-            </a:avLst>
-          </a:prstGeom>
-          <a:solidFill>
-            <a:srgbClr val="FFFFFF"/>
-          </a:solidFill>
-          <a:ln w="12700">
-            <a:solidFill>
-              <a:srgbClr val="E6EBE8"/>
-            </a:solidFill>
-          </a:ln>
-          <a:effectLst/>
-        </p:spPr>
-        <p:style>
-          <a:lnRef idx="1">
-            <a:schemeClr val="accent1"/>
-          </a:lnRef>
-          <a:fillRef idx="3">
-            <a:schemeClr val="accent1"/>
-          </a:fillRef>
-          <a:effectRef idx="2">
-            <a:schemeClr val="accent1"/>
-          </a:effectRef>
-          <a:fontRef idx="minor">
-            <a:schemeClr val="lt1"/>
-          </a:fontRef>
-        </p:style>
-        <p:txBody>
-          <a:bodyPr rtlCol="0" anchor="ctr" wrap="square" lIns="146304" rIns="146304" tIns="109728" bIns="109728"/>
-          <a:lstStyle/>
-          <a:p>
-            <a:pPr algn="ctr"/>
-          </a:p>
-        </p:txBody>
-      </p:sp>
-      <p:sp>
-        <p:nvSpPr>
-          <p:cNvPr id="6" name="Rounded Rectangle 5"/>
-          <p:cNvSpPr/>
-          <p:nvPr/>
-        </p:nvSpPr>
-        <p:spPr>
-          <a:xfrm>
-            <a:off x="868680" y="2286000"/>
-            <a:ext cx="475488" cy="475488"/>
-          </a:xfrm>
-          <a:prstGeom prst="roundRect">
-            <a:avLst>
-              <a:gd name="adj" fmla="val 28000"/>
-            </a:avLst>
-          </a:prstGeom>
-          <a:solidFill>
-            <a:srgbClr val="E7F1EC"/>
-          </a:solidFill>
-          <a:ln w="12700">
-            <a:solidFill>
-              <a:srgbClr val="D2E3D9"/>
-            </a:solidFill>
-          </a:ln>
-          <a:effectLst/>
-        </p:spPr>
-        <p:style>
-          <a:lnRef idx="1">
-            <a:schemeClr val="accent1"/>
-          </a:lnRef>
-          <a:fillRef idx="3">
-            <a:schemeClr val="accent1"/>
-          </a:fillRef>
-          <a:effectRef idx="2">
-            <a:schemeClr val="accent1"/>
-          </a:effectRef>
-          <a:fontRef idx="minor">
-            <a:schemeClr val="lt1"/>
-          </a:fontRef>
-        </p:style>
-        <p:txBody>
-          <a:bodyPr rtlCol="0" anchor="ctr" wrap="square" lIns="146304" rIns="146304" tIns="109728" bIns="109728"/>
-          <a:lstStyle/>
-          <a:p>
-            <a:pPr algn="ctr"/>
-          </a:p>
-        </p:txBody>
-      </p:sp>
-      <p:pic>
-        <p:nvPicPr>
-          <p:cNvPr id="7" name="Picture 6" descr="link.png"/>
-          <p:cNvPicPr>
-            <a:picLocks noChangeAspect="1"/>
-          </p:cNvPicPr>
-          <p:nvPr/>
-        </p:nvPicPr>
-        <p:blipFill>
-          <a:blip r:embed="rId2"/>
-          <a:stretch>
-            <a:fillRect/>
-          </a:stretch>
-        </p:blipFill>
-        <p:spPr>
-          <a:xfrm>
-            <a:off x="935248" y="2352568"/>
-            <a:ext cx="342351" cy="342351"/>
-          </a:xfrm>
-          <a:prstGeom prst="rect">
-            <a:avLst/>
-          </a:prstGeom>
-        </p:spPr>
-      </p:pic>
-      <p:sp>
-        <p:nvSpPr>
-          <p:cNvPr id="8" name="TextBox 7"/>
-          <p:cNvSpPr txBox="1"/>
-          <p:nvPr/>
-        </p:nvSpPr>
-        <p:spPr>
-          <a:xfrm>
-            <a:off x="1472184" y="2322576"/>
-            <a:ext cx="2679192" cy="457200"/>
-          </a:xfrm>
-          <a:prstGeom prst="rect">
-            <a:avLst/>
-          </a:prstGeom>
-          <a:noFill/>
-        </p:spPr>
-        <p:txBody>
-          <a:bodyPr wrap="square">
-            <a:spAutoFit/>
-          </a:bodyPr>
-          <a:lstStyle/>
-          <a:p>
-            <a:r>
-              <a:rPr sz="1400" b="1">
-                <a:solidFill>
-                  <a:srgbClr val="15201C"/>
-                </a:solidFill>
-                <a:latin typeface="Space Grotesk"/>
-              </a:rPr>
-              <a:t>Attribution in the URL</a:t>
-            </a:r>
-          </a:p>
-        </p:txBody>
-      </p:sp>
-      <p:sp>
-        <p:nvSpPr>
-          <p:cNvPr id="9" name="TextBox 8"/>
-          <p:cNvSpPr txBox="1"/>
-          <p:nvPr/>
-        </p:nvSpPr>
-        <p:spPr>
-          <a:xfrm>
-            <a:off x="886968" y="2907791"/>
-            <a:ext cx="3191256" cy="1783080"/>
-          </a:xfrm>
-          <a:prstGeom prst="rect">
-            <a:avLst/>
-          </a:prstGeom>
-          <a:noFill/>
-        </p:spPr>
-        <p:txBody>
-          <a:bodyPr wrap="square">
-            <a:spAutoFit/>
-          </a:bodyPr>
-          <a:lstStyle/>
-          <a:p>
-            <a:pPr>
-              <a:lnSpc>
-                <a:spcPct val="114000"/>
-              </a:lnSpc>
-            </a:pPr>
-            <a:r>
-              <a:rPr sz="1200" b="0">
-                <a:solidFill>
-                  <a:srgbClr val="6B7B73"/>
-                </a:solidFill>
-                <a:latin typeface="Hanken Grotesk"/>
-              </a:rPr>
-              <a:t>custom_parameters on the retailer redirect — no click-log lookup, no cookies; the 3-day window is the retailer's, not ours.</a:t>
-            </a:r>
-          </a:p>
-        </p:txBody>
-      </p:sp>
-      <p:sp>
-        <p:nvSpPr>
-          <p:cNvPr id="10" name="Rounded Rectangle 9"/>
-          <p:cNvSpPr/>
-          <p:nvPr/>
-        </p:nvSpPr>
-        <p:spPr>
-          <a:xfrm>
-            <a:off x="4480560" y="2103120"/>
-            <a:ext cx="3593592" cy="2743200"/>
-          </a:xfrm>
-          <a:prstGeom prst="roundRect">
-            <a:avLst>
-              <a:gd name="adj" fmla="val 5500"/>
-            </a:avLst>
-          </a:prstGeom>
-          <a:solidFill>
-            <a:srgbClr val="FFFFFF"/>
-          </a:solidFill>
-          <a:ln w="12700">
-            <a:solidFill>
-              <a:srgbClr val="E6EBE8"/>
-            </a:solidFill>
-          </a:ln>
-          <a:effectLst/>
-        </p:spPr>
-        <p:style>
-          <a:lnRef idx="1">
-            <a:schemeClr val="accent1"/>
-          </a:lnRef>
-          <a:fillRef idx="3">
-            <a:schemeClr val="accent1"/>
-          </a:fillRef>
-          <a:effectRef idx="2">
-            <a:schemeClr val="accent1"/>
-          </a:effectRef>
-          <a:fontRef idx="minor">
-            <a:schemeClr val="lt1"/>
-          </a:fontRef>
-        </p:style>
-        <p:txBody>
-          <a:bodyPr rtlCol="0" anchor="ctr" wrap="square" lIns="146304" rIns="146304" tIns="109728" bIns="109728"/>
-          <a:lstStyle/>
-          <a:p>
-            <a:pPr algn="ctr"/>
-          </a:p>
-        </p:txBody>
-      </p:sp>
-      <p:sp>
-        <p:nvSpPr>
-          <p:cNvPr id="11" name="Rounded Rectangle 10"/>
-          <p:cNvSpPr/>
-          <p:nvPr/>
-        </p:nvSpPr>
-        <p:spPr>
-          <a:xfrm>
-            <a:off x="4663440" y="2286000"/>
-            <a:ext cx="475488" cy="475488"/>
-          </a:xfrm>
-          <a:prstGeom prst="roundRect">
-            <a:avLst>
-              <a:gd name="adj" fmla="val 28000"/>
-            </a:avLst>
-          </a:prstGeom>
-          <a:solidFill>
-            <a:srgbClr val="E7F1EC"/>
-          </a:solidFill>
-          <a:ln w="12700">
-            <a:solidFill>
-              <a:srgbClr val="D2E3D9"/>
-            </a:solidFill>
-          </a:ln>
-          <a:effectLst/>
-        </p:spPr>
-        <p:style>
-          <a:lnRef idx="1">
-            <a:schemeClr val="accent1"/>
-          </a:lnRef>
-          <a:fillRef idx="3">
-            <a:schemeClr val="accent1"/>
-          </a:fillRef>
-          <a:effectRef idx="2">
-            <a:schemeClr val="accent1"/>
-          </a:effectRef>
-          <a:fontRef idx="minor">
-            <a:schemeClr val="lt1"/>
-          </a:fontRef>
-        </p:style>
-        <p:txBody>
-          <a:bodyPr rtlCol="0" anchor="ctr" wrap="square" lIns="146304" rIns="146304" tIns="109728" bIns="109728"/>
-          <a:lstStyle/>
-          <a:p>
-            <a:pPr algn="ctr"/>
-          </a:p>
-        </p:txBody>
-      </p:sp>
-      <p:pic>
-        <p:nvPicPr>
-          <p:cNvPr id="12" name="Picture 11" descr="refresh.png"/>
-          <p:cNvPicPr>
-            <a:picLocks noChangeAspect="1"/>
-          </p:cNvPicPr>
-          <p:nvPr/>
-        </p:nvPicPr>
-        <p:blipFill>
-          <a:blip r:embed="rId3"/>
-          <a:stretch>
-            <a:fillRect/>
-          </a:stretch>
-        </p:blipFill>
-        <p:spPr>
-          <a:xfrm>
-            <a:off x="4730008" y="2352568"/>
-            <a:ext cx="342351" cy="342351"/>
-          </a:xfrm>
-          <a:prstGeom prst="rect">
-            <a:avLst/>
-          </a:prstGeom>
-        </p:spPr>
-      </p:pic>
-      <p:sp>
-        <p:nvSpPr>
-          <p:cNvPr id="13" name="TextBox 12"/>
-          <p:cNvSpPr txBox="1"/>
-          <p:nvPr/>
-        </p:nvSpPr>
-        <p:spPr>
-          <a:xfrm>
-            <a:off x="5266944" y="2322576"/>
-            <a:ext cx="2679192" cy="457200"/>
-          </a:xfrm>
-          <a:prstGeom prst="rect">
-            <a:avLst/>
-          </a:prstGeom>
-          <a:noFill/>
-        </p:spPr>
-        <p:txBody>
-          <a:bodyPr wrap="square">
-            <a:spAutoFit/>
-          </a:bodyPr>
-          <a:lstStyle/>
-          <a:p>
-            <a:r>
-              <a:rPr sz="1400" b="1">
-                <a:solidFill>
-                  <a:srgbClr val="15201C"/>
-                </a:solidFill>
-                <a:latin typeface="Space Grotesk"/>
-              </a:rPr>
-              <a:t>Scheduled reconciliation</a:t>
-            </a:r>
-          </a:p>
-        </p:txBody>
-      </p:sp>
-      <p:sp>
-        <p:nvSpPr>
-          <p:cNvPr id="14" name="TextBox 13"/>
-          <p:cNvSpPr txBox="1"/>
-          <p:nvPr/>
-        </p:nvSpPr>
-        <p:spPr>
-          <a:xfrm>
-            <a:off x="4681728" y="2907791"/>
-            <a:ext cx="3191256" cy="1783080"/>
-          </a:xfrm>
-          <a:prstGeom prst="rect">
-            <a:avLst/>
-          </a:prstGeom>
-          <a:noFill/>
-        </p:spPr>
-        <p:txBody>
-          <a:bodyPr wrap="square">
-            <a:spAutoFit/>
-          </a:bodyPr>
-          <a:lstStyle/>
-          <a:p>
-            <a:pPr>
-              <a:lnSpc>
-                <a:spcPct val="114000"/>
-              </a:lnSpc>
-            </a:pPr>
-            <a:r>
-              <a:rPr sz="1200" b="0">
-                <a:solidFill>
-                  <a:srgbClr val="6B7B73"/>
-                </a:solidFill>
-                <a:latin typeface="Hanken Grotesk"/>
-              </a:rPr>
-              <a:t>listOrdersByIndex polling: idempotent by the unique (order_id, kind, status) index; replayable from the poller_state cursor; nothing to spoof.</a:t>
-            </a:r>
-          </a:p>
-        </p:txBody>
-      </p:sp>
-      <p:sp>
-        <p:nvSpPr>
-          <p:cNvPr id="15" name="Rounded Rectangle 14"/>
-          <p:cNvSpPr/>
-          <p:nvPr/>
-        </p:nvSpPr>
-        <p:spPr>
-          <a:xfrm>
-            <a:off x="8275320" y="2103120"/>
-            <a:ext cx="3593592" cy="2743200"/>
-          </a:xfrm>
-          <a:prstGeom prst="roundRect">
-            <a:avLst>
-              <a:gd name="adj" fmla="val 5500"/>
-            </a:avLst>
-          </a:prstGeom>
-          <a:solidFill>
-            <a:srgbClr val="FFFFFF"/>
-          </a:solidFill>
-          <a:ln w="12700">
-            <a:solidFill>
-              <a:srgbClr val="E6EBE8"/>
-            </a:solidFill>
-          </a:ln>
-          <a:effectLst/>
-        </p:spPr>
-        <p:style>
-          <a:lnRef idx="1">
-            <a:schemeClr val="accent1"/>
-          </a:lnRef>
-          <a:fillRef idx="3">
-            <a:schemeClr val="accent1"/>
-          </a:fillRef>
-          <a:effectRef idx="2">
-            <a:schemeClr val="accent1"/>
-          </a:effectRef>
-          <a:fontRef idx="minor">
-            <a:schemeClr val="lt1"/>
-          </a:fontRef>
-        </p:style>
-        <p:txBody>
-          <a:bodyPr rtlCol="0" anchor="ctr" wrap="square" lIns="146304" rIns="146304" tIns="109728" bIns="109728"/>
-          <a:lstStyle/>
-          <a:p>
-            <a:pPr algn="ctr"/>
-          </a:p>
-        </p:txBody>
-      </p:sp>
-      <p:sp>
-        <p:nvSpPr>
-          <p:cNvPr id="16" name="Rounded Rectangle 15"/>
-          <p:cNvSpPr/>
-          <p:nvPr/>
-        </p:nvSpPr>
-        <p:spPr>
-          <a:xfrm>
-            <a:off x="8458200" y="2286000"/>
-            <a:ext cx="475488" cy="475488"/>
-          </a:xfrm>
-          <a:prstGeom prst="roundRect">
-            <a:avLst>
-              <a:gd name="adj" fmla="val 28000"/>
-            </a:avLst>
-          </a:prstGeom>
-          <a:solidFill>
-            <a:srgbClr val="E7F1EC"/>
-          </a:solidFill>
-          <a:ln w="12700">
-            <a:solidFill>
-              <a:srgbClr val="D2E3D9"/>
-            </a:solidFill>
-          </a:ln>
-          <a:effectLst/>
-        </p:spPr>
-        <p:style>
-          <a:lnRef idx="1">
-            <a:schemeClr val="accent1"/>
-          </a:lnRef>
-          <a:fillRef idx="3">
-            <a:schemeClr val="accent1"/>
-          </a:fillRef>
-          <a:effectRef idx="2">
-            <a:schemeClr val="accent1"/>
-          </a:effectRef>
-          <a:fontRef idx="minor">
-            <a:schemeClr val="lt1"/>
-          </a:fontRef>
-        </p:style>
-        <p:txBody>
-          <a:bodyPr rtlCol="0" anchor="ctr" wrap="square" lIns="146304" rIns="146304" tIns="109728" bIns="109728"/>
-          <a:lstStyle/>
-          <a:p>
-            <a:pPr algn="ctr"/>
-          </a:p>
-        </p:txBody>
-      </p:sp>
-      <p:pic>
-        <p:nvPicPr>
-          <p:cNvPr id="17" name="Picture 16" descr="inbox.png"/>
-          <p:cNvPicPr>
-            <a:picLocks noChangeAspect="1"/>
-          </p:cNvPicPr>
-          <p:nvPr/>
-        </p:nvPicPr>
-        <p:blipFill>
-          <a:blip r:embed="rId4"/>
-          <a:stretch>
-            <a:fillRect/>
-          </a:stretch>
-        </p:blipFill>
-        <p:spPr>
-          <a:xfrm>
-            <a:off x="8524768" y="2352568"/>
-            <a:ext cx="342351" cy="342351"/>
-          </a:xfrm>
-          <a:prstGeom prst="rect">
-            <a:avLst/>
-          </a:prstGeom>
-        </p:spPr>
-      </p:pic>
-      <p:sp>
-        <p:nvSpPr>
-          <p:cNvPr id="18" name="TextBox 17"/>
-          <p:cNvSpPr txBox="1"/>
-          <p:nvPr/>
-        </p:nvSpPr>
-        <p:spPr>
-          <a:xfrm>
-            <a:off x="9061704" y="2322576"/>
-            <a:ext cx="2679192" cy="457200"/>
-          </a:xfrm>
-          <a:prstGeom prst="rect">
-            <a:avLst/>
-          </a:prstGeom>
-          <a:noFill/>
-        </p:spPr>
-        <p:txBody>
-          <a:bodyPr wrap="square">
-            <a:spAutoFit/>
-          </a:bodyPr>
-          <a:lstStyle/>
-          <a:p>
-            <a:r>
-              <a:rPr sz="1400" b="1">
-                <a:solidFill>
-                  <a:srgbClr val="15201C"/>
-                </a:solidFill>
-                <a:latin typeface="Space Grotesk"/>
-              </a:rPr>
-              <a:t>Unmatched orders</a:t>
-            </a:r>
-          </a:p>
-        </p:txBody>
-      </p:sp>
-      <p:sp>
-        <p:nvSpPr>
-          <p:cNvPr id="19" name="TextBox 18"/>
-          <p:cNvSpPr txBox="1"/>
-          <p:nvPr/>
-        </p:nvSpPr>
-        <p:spPr>
-          <a:xfrm>
-            <a:off x="8476488" y="2907791"/>
-            <a:ext cx="3191256" cy="1783080"/>
-          </a:xfrm>
-          <a:prstGeom prst="rect">
-            <a:avLst/>
-          </a:prstGeom>
-          <a:noFill/>
-        </p:spPr>
-        <p:txBody>
-          <a:bodyPr wrap="square">
-            <a:spAutoFit/>
-          </a:bodyPr>
-          <a:lstStyle/>
-          <a:p>
-            <a:pPr>
-              <a:lnSpc>
-                <a:spcPct val="114000"/>
-              </a:lnSpc>
-            </a:pPr>
-            <a:r>
-              <a:rPr sz="1200" b="0">
-                <a:solidFill>
-                  <a:srgbClr val="6B7B73"/>
-                </a:solidFill>
-                <a:latin typeface="Hanken Grotesk"/>
-              </a:rPr>
-              <a:t>Park in unattributed_order — an admin claim queue settled on the next heartbeat.</a:t>
-            </a:r>
-          </a:p>
-        </p:txBody>
-      </p:sp>
-      <p:sp>
-        <p:nvSpPr>
-          <p:cNvPr id="20" name="Rectangle 19"/>
+              <a:t>Failure modes and recovery</a:t>
+            </a:r>
+          </a:p>
+        </p:txBody>
+      </p:sp>
+      <p:graphicFrame>
+        <p:nvGraphicFramePr>
+          <p:cNvPr id="5" name="Table 4"/>
+          <p:cNvGraphicFramePr>
+            <a:graphicFrameLocks noGrp="1"/>
+          </p:cNvGraphicFramePr>
+          <p:nvPr/>
+        </p:nvGraphicFramePr>
+        <p:xfrm>
+          <a:off x="658368" y="1737360"/>
+          <a:ext cx="10881360" cy="2560320"/>
+        </p:xfrm>
+        <a:graphic>
+          <a:graphicData uri="http://schemas.openxmlformats.org/drawingml/2006/table">
+            <a:tbl>
+              <a:tblPr>
+                <a:tableStyleId>{5C22544A-7EE6-4342-B048-85BDC9FD1C3A}</a:tableStyleId>
+              </a:tblPr>
+              <a:tblGrid>
+                <a:gridCol w="2834640"/>
+                <a:gridCol w="4206240"/>
+                <a:gridCol w="3840480"/>
+              </a:tblGrid>
+              <a:tr h="365760">
+                <a:tc>
+                  <a:txBody>
+                    <a:bodyPr wrap="square"/>
+                    <a:lstStyle/>
+                    <a:p>
+                      <a:pPr>
+                        <a:lnSpc>
+                          <a:spcPct val="108000"/>
+                        </a:lnSpc>
+                      </a:pPr>
+                      <a:r>
+                        <a:rPr sz="1100" b="1">
+                          <a:solidFill>
+                            <a:srgbClr val="7FE0B0"/>
+                          </a:solidFill>
+                          <a:latin typeface="Space Grotesk"/>
+                        </a:rPr>
+                        <a:t>Failure</a:t>
+                      </a:r>
+                    </a:p>
+                  </a:txBody>
+                  <a:tcPr marL="91440" marR="91440" marT="45720" marB="45720">
+                    <a:solidFill>
+                      <a:srgbClr val="15201C"/>
+                    </a:solidFill>
+                  </a:tcPr>
+                </a:tc>
+                <a:tc>
+                  <a:txBody>
+                    <a:bodyPr wrap="square"/>
+                    <a:lstStyle/>
+                    <a:p>
+                      <a:pPr>
+                        <a:lnSpc>
+                          <a:spcPct val="108000"/>
+                        </a:lnSpc>
+                      </a:pPr>
+                      <a:r>
+                        <a:rPr sz="1100" b="1">
+                          <a:solidFill>
+                            <a:srgbClr val="7FE0B0"/>
+                          </a:solidFill>
+                          <a:latin typeface="Space Grotesk"/>
+                        </a:rPr>
+                        <a:t>Behavior</a:t>
+                      </a:r>
+                    </a:p>
+                  </a:txBody>
+                  <a:tcPr marL="91440" marR="91440" marT="45720" marB="45720">
+                    <a:solidFill>
+                      <a:srgbClr val="15201C"/>
+                    </a:solidFill>
+                  </a:tcPr>
+                </a:tc>
+                <a:tc>
+                  <a:txBody>
+                    <a:bodyPr wrap="square"/>
+                    <a:lstStyle/>
+                    <a:p>
+                      <a:pPr>
+                        <a:lnSpc>
+                          <a:spcPct val="108000"/>
+                        </a:lnSpc>
+                      </a:pPr>
+                      <a:r>
+                        <a:rPr sz="1100" b="1">
+                          <a:solidFill>
+                            <a:srgbClr val="7FE0B0"/>
+                          </a:solidFill>
+                          <a:latin typeface="Space Grotesk"/>
+                        </a:rPr>
+                        <a:t>Recovery</a:t>
+                      </a:r>
+                    </a:p>
+                  </a:txBody>
+                  <a:tcPr marL="91440" marR="91440" marT="45720" marB="45720">
+                    <a:solidFill>
+                      <a:srgbClr val="15201C"/>
+                    </a:solidFill>
+                  </a:tcPr>
+                </a:tc>
+              </a:tr>
+              <a:tr h="365760">
+                <a:tc>
+                  <a:txBody>
+                    <a:bodyPr wrap="square"/>
+                    <a:lstStyle/>
+                    <a:p>
+                      <a:pPr>
+                        <a:lnSpc>
+                          <a:spcPct val="108000"/>
+                        </a:lnSpc>
+                      </a:pPr>
+                      <a:r>
+                        <a:rPr sz="1050" b="1">
+                          <a:solidFill>
+                            <a:srgbClr val="15201C"/>
+                          </a:solidFill>
+                          <a:latin typeface="Hanken Grotesk"/>
+                        </a:rPr>
+                        <a:t>Aurora cold resume (~20 s)</a:t>
+                      </a:r>
+                    </a:p>
+                  </a:txBody>
+                  <a:tcPr marL="91440" marR="91440" marT="45720" marB="45720">
+                    <a:solidFill>
+                      <a:srgbClr val="FFFFFF"/>
+                    </a:solidFill>
+                  </a:tcPr>
+                </a:tc>
+                <a:tc>
+                  <a:txBody>
+                    <a:bodyPr wrap="square"/>
+                    <a:lstStyle/>
+                    <a:p>
+                      <a:pPr>
+                        <a:lnSpc>
+                          <a:spcPct val="108000"/>
+                        </a:lnSpc>
+                      </a:pPr>
+                      <a:r>
+                        <a:rPr sz="1050" b="0">
+                          <a:solidFill>
+                            <a:srgbClr val="6B7B73"/>
+                          </a:solidFill>
+                          <a:latin typeface="Hanken Grotesk"/>
+                        </a:rPr>
+                        <a:t>First wallet read after idle stalls</a:t>
+                      </a:r>
+                    </a:p>
+                  </a:txBody>
+                  <a:tcPr marL="91440" marR="91440" marT="45720" marB="45720">
+                    <a:solidFill>
+                      <a:srgbClr val="FFFFFF"/>
+                    </a:solidFill>
+                  </a:tcPr>
+                </a:tc>
+                <a:tc>
+                  <a:txBody>
+                    <a:bodyPr wrap="square"/>
+                    <a:lstStyle/>
+                    <a:p>
+                      <a:pPr>
+                        <a:lnSpc>
+                          <a:spcPct val="108000"/>
+                        </a:lnSpc>
+                      </a:pPr>
+                      <a:r>
+                        <a:rPr sz="1050" b="0">
+                          <a:solidFill>
+                            <a:srgbClr val="6B7B73"/>
+                          </a:solidFill>
+                          <a:latin typeface="Hanken Grotesk"/>
+                        </a:rPr>
+                        <a:t>SPA fires /healthz/db warm-up probe on auth screens; 60 s connect timeout rides it out</a:t>
+                      </a:r>
+                    </a:p>
+                  </a:txBody>
+                  <a:tcPr marL="91440" marR="91440" marT="45720" marB="45720">
+                    <a:solidFill>
+                      <a:srgbClr val="FFFFFF"/>
+                    </a:solidFill>
+                  </a:tcPr>
+                </a:tc>
+              </a:tr>
+              <a:tr h="365760">
+                <a:tc>
+                  <a:txBody>
+                    <a:bodyPr wrap="square"/>
+                    <a:lstStyle/>
+                    <a:p>
+                      <a:pPr>
+                        <a:lnSpc>
+                          <a:spcPct val="108000"/>
+                        </a:lnSpc>
+                      </a:pPr>
+                      <a:r>
+                        <a:rPr sz="1050" b="1">
+                          <a:solidFill>
+                            <a:srgbClr val="15201C"/>
+                          </a:solidFill>
+                          <a:latin typeface="Hanken Grotesk"/>
+                        </a:rPr>
+                        <a:t>AliExpress ApiCallLimit ban window</a:t>
+                      </a:r>
+                    </a:p>
+                  </a:txBody>
+                  <a:tcPr marL="91440" marR="91440" marT="45720" marB="45720">
+                    <a:solidFill>
+                      <a:srgbClr val="F4F6F5"/>
+                    </a:solidFill>
+                  </a:tcPr>
+                </a:tc>
+                <a:tc>
+                  <a:txBody>
+                    <a:bodyPr wrap="square"/>
+                    <a:lstStyle/>
+                    <a:p>
+                      <a:pPr>
+                        <a:lnSpc>
+                          <a:spcPct val="108000"/>
+                        </a:lnSpc>
+                      </a:pPr>
+                      <a:r>
+                        <a:rPr sz="1050" b="0">
+                          <a:solidFill>
+                            <a:srgbClr val="6B7B73"/>
+                          </a:solidFill>
+                          <a:latin typeface="Hanken Grotesk"/>
+                        </a:rPr>
+                        <a:t>Poll heartbeat calls rejected</a:t>
+                      </a:r>
+                    </a:p>
+                  </a:txBody>
+                  <a:tcPr marL="91440" marR="91440" marT="45720" marB="45720">
+                    <a:solidFill>
+                      <a:srgbClr val="F4F6F5"/>
+                    </a:solidFill>
+                  </a:tcPr>
+                </a:tc>
+                <a:tc>
+                  <a:txBody>
+                    <a:bodyPr wrap="square"/>
+                    <a:lstStyle/>
+                    <a:p>
+                      <a:pPr>
+                        <a:lnSpc>
+                          <a:spcPct val="108000"/>
+                        </a:lnSpc>
+                      </a:pPr>
+                      <a:r>
+                        <a:rPr sz="1050" b="0">
+                          <a:solidFill>
+                            <a:srgbClr val="6B7B73"/>
+                          </a:solidFill>
+                          <a:latin typeface="Hanken Grotesk"/>
+                        </a:rPr>
+                        <a:t>Sequential calls + one ban-window retry (ADR-0021); cursor unmoved -&gt; next beat replays</a:t>
+                      </a:r>
+                    </a:p>
+                  </a:txBody>
+                  <a:tcPr marL="91440" marR="91440" marT="45720" marB="45720">
+                    <a:solidFill>
+                      <a:srgbClr val="F4F6F5"/>
+                    </a:solidFill>
+                  </a:tcPr>
+                </a:tc>
+              </a:tr>
+              <a:tr h="365760">
+                <a:tc>
+                  <a:txBody>
+                    <a:bodyPr wrap="square"/>
+                    <a:lstStyle/>
+                    <a:p>
+                      <a:pPr>
+                        <a:lnSpc>
+                          <a:spcPct val="108000"/>
+                        </a:lnSpc>
+                      </a:pPr>
+                      <a:r>
+                        <a:rPr sz="1050" b="1">
+                          <a:solidFill>
+                            <a:srgbClr val="15201C"/>
+                          </a:solidFill>
+                          <a:latin typeface="Hanken Grotesk"/>
+                        </a:rPr>
+                        <a:t>WhatsApp delivery down</a:t>
+                      </a:r>
+                    </a:p>
+                  </a:txBody>
+                  <a:tcPr marL="91440" marR="91440" marT="45720" marB="45720">
+                    <a:solidFill>
+                      <a:srgbClr val="FFFFFF"/>
+                    </a:solidFill>
+                  </a:tcPr>
+                </a:tc>
+                <a:tc>
+                  <a:txBody>
+                    <a:bodyPr wrap="square"/>
+                    <a:lstStyle/>
+                    <a:p>
+                      <a:pPr>
+                        <a:lnSpc>
+                          <a:spcPct val="108000"/>
+                        </a:lnSpc>
+                      </a:pPr>
+                      <a:r>
+                        <a:rPr sz="1050" b="0">
+                          <a:solidFill>
+                            <a:srgbClr val="6B7B73"/>
+                          </a:solidFill>
+                          <a:latin typeface="Hanken Grotesk"/>
+                        </a:rPr>
+                        <a:t>OTP channel unavailable</a:t>
+                      </a:r>
+                    </a:p>
+                  </a:txBody>
+                  <a:tcPr marL="91440" marR="91440" marT="45720" marB="45720">
+                    <a:solidFill>
+                      <a:srgbClr val="FFFFFF"/>
+                    </a:solidFill>
+                  </a:tcPr>
+                </a:tc>
+                <a:tc>
+                  <a:txBody>
+                    <a:bodyPr wrap="square"/>
+                    <a:lstStyle/>
+                    <a:p>
+                      <a:pPr>
+                        <a:lnSpc>
+                          <a:spcPct val="108000"/>
+                        </a:lnSpc>
+                      </a:pPr>
+                      <a:r>
+                        <a:rPr sz="1050" b="0">
+                          <a:solidFill>
+                            <a:srgbClr val="6B7B73"/>
+                          </a:solidFill>
+                          <a:latin typeface="Hanken Grotesk"/>
+                        </a:rPr>
+                        <a:t>Sticky-preference fallback to SMS; runtime-config kill switches; SNS spend cap bounds abuse</a:t>
+                      </a:r>
+                    </a:p>
+                  </a:txBody>
+                  <a:tcPr marL="91440" marR="91440" marT="45720" marB="45720">
+                    <a:solidFill>
+                      <a:srgbClr val="FFFFFF"/>
+                    </a:solidFill>
+                  </a:tcPr>
+                </a:tc>
+              </a:tr>
+              <a:tr h="365760">
+                <a:tc>
+                  <a:txBody>
+                    <a:bodyPr wrap="square"/>
+                    <a:lstStyle/>
+                    <a:p>
+                      <a:pPr>
+                        <a:lnSpc>
+                          <a:spcPct val="108000"/>
+                        </a:lnSpc>
+                      </a:pPr>
+                      <a:r>
+                        <a:rPr sz="1050" b="1">
+                          <a:solidFill>
+                            <a:srgbClr val="15201C"/>
+                          </a:solidFill>
+                          <a:latin typeface="Hanken Grotesk"/>
+                        </a:rPr>
+                        <a:t>Poller crash mid-batch</a:t>
+                      </a:r>
+                    </a:p>
+                  </a:txBody>
+                  <a:tcPr marL="91440" marR="91440" marT="45720" marB="45720">
+                    <a:solidFill>
+                      <a:srgbClr val="F4F6F5"/>
+                    </a:solidFill>
+                  </a:tcPr>
+                </a:tc>
+                <a:tc>
+                  <a:txBody>
+                    <a:bodyPr wrap="square"/>
+                    <a:lstStyle/>
+                    <a:p>
+                      <a:pPr>
+                        <a:lnSpc>
+                          <a:spcPct val="108000"/>
+                        </a:lnSpc>
+                      </a:pPr>
+                      <a:r>
+                        <a:rPr sz="1050" b="0">
+                          <a:solidFill>
+                            <a:srgbClr val="6B7B73"/>
+                          </a:solidFill>
+                          <a:latin typeface="Hanken Grotesk"/>
+                        </a:rPr>
+                        <a:t>Partial writes</a:t>
+                      </a:r>
+                    </a:p>
+                  </a:txBody>
+                  <a:tcPr marL="91440" marR="91440" marT="45720" marB="45720">
+                    <a:solidFill>
+                      <a:srgbClr val="F4F6F5"/>
+                    </a:solidFill>
+                  </a:tcPr>
+                </a:tc>
+                <a:tc>
+                  <a:txBody>
+                    <a:bodyPr wrap="square"/>
+                    <a:lstStyle/>
+                    <a:p>
+                      <a:pPr>
+                        <a:lnSpc>
+                          <a:spcPct val="108000"/>
+                        </a:lnSpc>
+                      </a:pPr>
+                      <a:r>
+                        <a:rPr sz="1050" b="0">
+                          <a:solidFill>
+                            <a:srgbClr val="6B7B73"/>
+                          </a:solidFill>
+                          <a:latin typeface="Hanken Grotesk"/>
+                        </a:rPr>
+                        <a:t>Cursor advances only after batch; ledger unique index makes replays no-ops</a:t>
+                      </a:r>
+                    </a:p>
+                  </a:txBody>
+                  <a:tcPr marL="91440" marR="91440" marT="45720" marB="45720">
+                    <a:solidFill>
+                      <a:srgbClr val="F4F6F5"/>
+                    </a:solidFill>
+                  </a:tcPr>
+                </a:tc>
+              </a:tr>
+              <a:tr h="365760">
+                <a:tc>
+                  <a:txBody>
+                    <a:bodyPr wrap="square"/>
+                    <a:lstStyle/>
+                    <a:p>
+                      <a:pPr>
+                        <a:lnSpc>
+                          <a:spcPct val="108000"/>
+                        </a:lnSpc>
+                      </a:pPr>
+                      <a:r>
+                        <a:rPr sz="1050" b="1">
+                          <a:solidFill>
+                            <a:srgbClr val="15201C"/>
+                          </a:solidFill>
+                          <a:latin typeface="Hanken Grotesk"/>
+                        </a:rPr>
+                        <a:t>Dispatcher poison message</a:t>
+                      </a:r>
+                    </a:p>
+                  </a:txBody>
+                  <a:tcPr marL="91440" marR="91440" marT="45720" marB="45720">
+                    <a:solidFill>
+                      <a:srgbClr val="FFFFFF"/>
+                    </a:solidFill>
+                  </a:tcPr>
+                </a:tc>
+                <a:tc>
+                  <a:txBody>
+                    <a:bodyPr wrap="square"/>
+                    <a:lstStyle/>
+                    <a:p>
+                      <a:pPr>
+                        <a:lnSpc>
+                          <a:spcPct val="108000"/>
+                        </a:lnSpc>
+                      </a:pPr>
+                      <a:r>
+                        <a:rPr sz="1050" b="0">
+                          <a:solidFill>
+                            <a:srgbClr val="6B7B73"/>
+                          </a:solidFill>
+                          <a:latin typeface="Hanken Grotesk"/>
+                        </a:rPr>
+                        <a:t>Outbox item repeatedly fails</a:t>
+                      </a:r>
+                    </a:p>
+                  </a:txBody>
+                  <a:tcPr marL="91440" marR="91440" marT="45720" marB="45720">
+                    <a:solidFill>
+                      <a:srgbClr val="FFFFFF"/>
+                    </a:solidFill>
+                  </a:tcPr>
+                </a:tc>
+                <a:tc>
+                  <a:txBody>
+                    <a:bodyPr wrap="square"/>
+                    <a:lstStyle/>
+                    <a:p>
+                      <a:pPr>
+                        <a:lnSpc>
+                          <a:spcPct val="108000"/>
+                        </a:lnSpc>
+                      </a:pPr>
+                      <a:r>
+                        <a:rPr sz="1050" b="0">
+                          <a:solidFill>
+                            <a:srgbClr val="6B7B73"/>
+                          </a:solidFill>
+                          <a:latin typeface="Hanken Grotesk"/>
+                        </a:rPr>
+                        <a:t>bisectBatchOnError + 3 retries -&gt; SQS DLQ (14 d); items age out by TTL</a:t>
+                      </a:r>
+                    </a:p>
+                  </a:txBody>
+                  <a:tcPr marL="91440" marR="91440" marT="45720" marB="45720">
+                    <a:solidFill>
+                      <a:srgbClr val="FFFFFF"/>
+                    </a:solidFill>
+                  </a:tcPr>
+                </a:tc>
+              </a:tr>
+              <a:tr h="365760">
+                <a:tc>
+                  <a:txBody>
+                    <a:bodyPr wrap="square"/>
+                    <a:lstStyle/>
+                    <a:p>
+                      <a:pPr>
+                        <a:lnSpc>
+                          <a:spcPct val="108000"/>
+                        </a:lnSpc>
+                      </a:pPr>
+                      <a:r>
+                        <a:rPr sz="1050" b="1">
+                          <a:solidFill>
+                            <a:srgbClr val="15201C"/>
+                          </a:solidFill>
+                          <a:latin typeface="Hanken Grotesk"/>
+                        </a:rPr>
+                        <a:t>Cognito outage</a:t>
+                      </a:r>
+                    </a:p>
+                  </a:txBody>
+                  <a:tcPr marL="91440" marR="91440" marT="45720" marB="45720">
+                    <a:solidFill>
+                      <a:srgbClr val="F4F6F5"/>
+                    </a:solidFill>
+                  </a:tcPr>
+                </a:tc>
+                <a:tc>
+                  <a:txBody>
+                    <a:bodyPr wrap="square"/>
+                    <a:lstStyle/>
+                    <a:p>
+                      <a:pPr>
+                        <a:lnSpc>
+                          <a:spcPct val="108000"/>
+                        </a:lnSpc>
+                      </a:pPr>
+                      <a:r>
+                        <a:rPr sz="1050" b="0">
+                          <a:solidFill>
+                            <a:srgbClr val="6B7B73"/>
+                          </a:solidFill>
+                          <a:latin typeface="Hanken Grotesk"/>
+                        </a:rPr>
+                        <a:t>No new logins</a:t>
+                      </a:r>
+                    </a:p>
+                  </a:txBody>
+                  <a:tcPr marL="91440" marR="91440" marT="45720" marB="45720">
+                    <a:solidFill>
+                      <a:srgbClr val="F4F6F5"/>
+                    </a:solidFill>
+                  </a:tcPr>
+                </a:tc>
+                <a:tc>
+                  <a:txBody>
+                    <a:bodyPr wrap="square"/>
+                    <a:lstStyle/>
+                    <a:p>
+                      <a:pPr>
+                        <a:lnSpc>
+                          <a:spcPct val="108000"/>
+                        </a:lnSpc>
+                      </a:pPr>
+                      <a:r>
+                        <a:rPr sz="1050" b="0">
+                          <a:solidFill>
+                            <a:srgbClr val="6B7B73"/>
+                          </a:solidFill>
+                          <a:latin typeface="Hanken Grotesk"/>
+                        </a:rPr>
+                        <a:t>Static SPA still serves; landing redirect works for guests (DynamoDB-only path)</a:t>
+                      </a:r>
+                    </a:p>
+                  </a:txBody>
+                  <a:tcPr marL="91440" marR="91440" marT="45720" marB="45720">
+                    <a:solidFill>
+                      <a:srgbClr val="F4F6F5"/>
+                    </a:solidFill>
+                  </a:tcPr>
+                </a:tc>
+              </a:tr>
+            </a:tbl>
+          </a:graphicData>
+        </a:graphic>
+      </p:graphicFrame>
+      <p:sp>
+        <p:nvSpPr>
+          <p:cNvPr id="6" name="Rectangle 5"/>
           <p:cNvSpPr/>
           <p:nvPr/>
         </p:nvSpPr>
@@ -13890,7 +13523,7 @@
       </p:sp>
       <p:sp>
         <p:nvSpPr>
-          <p:cNvPr id="21" name="TextBox 20"/>
+          <p:cNvPr id="7" name="TextBox 6"/>
           <p:cNvSpPr txBox="1"/>
           <p:nvPr/>
         </p:nvSpPr>
@@ -13933,7 +13566,7 @@
       </p:sp>
       <p:sp>
         <p:nvSpPr>
-          <p:cNvPr id="22" name="TextBox 21"/>
+          <p:cNvPr id="8" name="TextBox 7"/>
           <p:cNvSpPr txBox="1"/>
           <p:nvPr/>
         </p:nvSpPr>
@@ -14090,593 +13723,544 @@
                 </a:solidFill>
                 <a:latin typeface="Space Grotesk"/>
               </a:rPr>
-              <a:t>ADR-0017 — currency model</a:t>
-            </a:r>
-          </a:p>
-        </p:txBody>
-      </p:sp>
-      <p:sp>
-        <p:nvSpPr>
-          <p:cNvPr id="5" name="Rounded Rectangle 4"/>
-          <p:cNvSpPr/>
-          <p:nvPr/>
-        </p:nvSpPr>
-        <p:spPr>
-          <a:xfrm>
-            <a:off x="685800" y="2103120"/>
-            <a:ext cx="3593592" cy="2743200"/>
-          </a:xfrm>
-          <a:prstGeom prst="roundRect">
-            <a:avLst>
-              <a:gd name="adj" fmla="val 5500"/>
-            </a:avLst>
-          </a:prstGeom>
-          <a:solidFill>
-            <a:srgbClr val="FFFFFF"/>
-          </a:solidFill>
-          <a:ln w="12700">
-            <a:solidFill>
-              <a:srgbClr val="E6EBE8"/>
-            </a:solidFill>
-          </a:ln>
-          <a:effectLst/>
-        </p:spPr>
-        <p:style>
-          <a:lnRef idx="1">
-            <a:schemeClr val="accent1"/>
-          </a:lnRef>
-          <a:fillRef idx="3">
-            <a:schemeClr val="accent1"/>
-          </a:fillRef>
-          <a:effectRef idx="2">
-            <a:schemeClr val="accent1"/>
-          </a:effectRef>
-          <a:fontRef idx="minor">
-            <a:schemeClr val="lt1"/>
-          </a:fontRef>
-        </p:style>
-        <p:txBody>
-          <a:bodyPr rtlCol="0" anchor="ctr" wrap="square" lIns="146304" rIns="146304" tIns="109728" bIns="109728"/>
-          <a:lstStyle/>
-          <a:p>
-            <a:pPr algn="ctr"/>
-          </a:p>
-        </p:txBody>
-      </p:sp>
-      <p:sp>
-        <p:nvSpPr>
-          <p:cNvPr id="6" name="Rounded Rectangle 5"/>
-          <p:cNvSpPr/>
-          <p:nvPr/>
-        </p:nvSpPr>
-        <p:spPr>
-          <a:xfrm>
-            <a:off x="868680" y="2286000"/>
-            <a:ext cx="475488" cy="475488"/>
-          </a:xfrm>
-          <a:prstGeom prst="roundRect">
-            <a:avLst>
-              <a:gd name="adj" fmla="val 28000"/>
-            </a:avLst>
-          </a:prstGeom>
-          <a:solidFill>
-            <a:srgbClr val="E7F1EC"/>
-          </a:solidFill>
-          <a:ln w="12700">
-            <a:solidFill>
-              <a:srgbClr val="D2E3D9"/>
-            </a:solidFill>
-          </a:ln>
-          <a:effectLst/>
-        </p:spPr>
-        <p:style>
-          <a:lnRef idx="1">
-            <a:schemeClr val="accent1"/>
-          </a:lnRef>
-          <a:fillRef idx="3">
-            <a:schemeClr val="accent1"/>
-          </a:fillRef>
-          <a:effectRef idx="2">
-            <a:schemeClr val="accent1"/>
-          </a:effectRef>
-          <a:fontRef idx="minor">
-            <a:schemeClr val="lt1"/>
-          </a:fontRef>
-        </p:style>
-        <p:txBody>
-          <a:bodyPr rtlCol="0" anchor="ctr" wrap="square" lIns="146304" rIns="146304" tIns="109728" bIns="109728"/>
-          <a:lstStyle/>
-          <a:p>
-            <a:pPr algn="ctr"/>
-          </a:p>
-        </p:txBody>
-      </p:sp>
-      <p:pic>
-        <p:nvPicPr>
-          <p:cNvPr id="7" name="Picture 6" descr="exchange.png"/>
-          <p:cNvPicPr>
-            <a:picLocks noChangeAspect="1"/>
-          </p:cNvPicPr>
-          <p:nvPr/>
-        </p:nvPicPr>
-        <p:blipFill>
-          <a:blip r:embed="rId2"/>
-          <a:stretch>
-            <a:fillRect/>
-          </a:stretch>
-        </p:blipFill>
-        <p:spPr>
-          <a:xfrm>
-            <a:off x="935248" y="2352568"/>
-            <a:ext cx="342351" cy="342351"/>
-          </a:xfrm>
-          <a:prstGeom prst="rect">
-            <a:avLst/>
-          </a:prstGeom>
-        </p:spPr>
-      </p:pic>
-      <p:sp>
-        <p:nvSpPr>
-          <p:cNvPr id="8" name="TextBox 7"/>
-          <p:cNvSpPr txBox="1"/>
-          <p:nvPr/>
-        </p:nvSpPr>
-        <p:spPr>
-          <a:xfrm>
-            <a:off x="1472184" y="2322576"/>
-            <a:ext cx="2679192" cy="457200"/>
-          </a:xfrm>
-          <a:prstGeom prst="rect">
-            <a:avLst/>
-          </a:prstGeom>
-          <a:noFill/>
-        </p:spPr>
-        <p:txBody>
-          <a:bodyPr wrap="square">
-            <a:spAutoFit/>
-          </a:bodyPr>
-          <a:lstStyle/>
-          <a:p>
-            <a:r>
-              <a:rPr sz="1400" b="1">
-                <a:solidFill>
-                  <a:srgbClr val="15201C"/>
-                </a:solidFill>
-                <a:latin typeface="Space Grotesk"/>
-              </a:rPr>
-              <a:t>Hold the settlement currency</a:t>
-            </a:r>
-          </a:p>
-        </p:txBody>
-      </p:sp>
-      <p:sp>
-        <p:nvSpPr>
-          <p:cNvPr id="9" name="TextBox 8"/>
-          <p:cNvSpPr txBox="1"/>
-          <p:nvPr/>
-        </p:nvSpPr>
-        <p:spPr>
-          <a:xfrm>
-            <a:off x="886968" y="2907791"/>
-            <a:ext cx="3191256" cy="1783080"/>
-          </a:xfrm>
-          <a:prstGeom prst="rect">
-            <a:avLst/>
-          </a:prstGeom>
-          <a:noFill/>
-        </p:spPr>
-        <p:txBody>
-          <a:bodyPr wrap="square">
-            <a:spAutoFit/>
-          </a:bodyPr>
-          <a:lstStyle/>
-          <a:p>
-            <a:pPr>
-              <a:lnSpc>
-                <a:spcPct val="114000"/>
-              </a:lnSpc>
-            </a:pPr>
-            <a:r>
-              <a:rPr sz="1200" b="0">
-                <a:solidFill>
-                  <a:srgbClr val="6B7B73"/>
-                </a:solidFill>
-                <a:latin typeface="Hanken Grotesk"/>
-              </a:rPr>
-              <a:t>Cashback is stored in what AliExpress actually pays — the wallet shows real per-currency holdings.</a:t>
-            </a:r>
-          </a:p>
-        </p:txBody>
-      </p:sp>
-      <p:sp>
-        <p:nvSpPr>
-          <p:cNvPr id="10" name="Rounded Rectangle 9"/>
-          <p:cNvSpPr/>
-          <p:nvPr/>
-        </p:nvSpPr>
-        <p:spPr>
-          <a:xfrm>
-            <a:off x="4480560" y="2103120"/>
-            <a:ext cx="3593592" cy="2743200"/>
-          </a:xfrm>
-          <a:prstGeom prst="roundRect">
-            <a:avLst>
-              <a:gd name="adj" fmla="val 5500"/>
-            </a:avLst>
-          </a:prstGeom>
-          <a:solidFill>
-            <a:srgbClr val="FFFFFF"/>
-          </a:solidFill>
-          <a:ln w="12700">
-            <a:solidFill>
-              <a:srgbClr val="E6EBE8"/>
-            </a:solidFill>
-          </a:ln>
-          <a:effectLst/>
-        </p:spPr>
-        <p:style>
-          <a:lnRef idx="1">
-            <a:schemeClr val="accent1"/>
-          </a:lnRef>
-          <a:fillRef idx="3">
-            <a:schemeClr val="accent1"/>
-          </a:fillRef>
-          <a:effectRef idx="2">
-            <a:schemeClr val="accent1"/>
-          </a:effectRef>
-          <a:fontRef idx="minor">
-            <a:schemeClr val="lt1"/>
-          </a:fontRef>
-        </p:style>
-        <p:txBody>
-          <a:bodyPr rtlCol="0" anchor="ctr" wrap="square" lIns="146304" rIns="146304" tIns="109728" bIns="109728"/>
-          <a:lstStyle/>
-          <a:p>
-            <a:pPr algn="ctr"/>
-          </a:p>
-        </p:txBody>
-      </p:sp>
-      <p:sp>
-        <p:nvSpPr>
-          <p:cNvPr id="11" name="Rounded Rectangle 10"/>
-          <p:cNvSpPr/>
-          <p:nvPr/>
-        </p:nvSpPr>
-        <p:spPr>
-          <a:xfrm>
-            <a:off x="4663440" y="2286000"/>
-            <a:ext cx="475488" cy="475488"/>
-          </a:xfrm>
-          <a:prstGeom prst="roundRect">
-            <a:avLst>
-              <a:gd name="adj" fmla="val 28000"/>
-            </a:avLst>
-          </a:prstGeom>
-          <a:solidFill>
-            <a:srgbClr val="E7F1EC"/>
-          </a:solidFill>
-          <a:ln w="12700">
-            <a:solidFill>
-              <a:srgbClr val="D2E3D9"/>
-            </a:solidFill>
-          </a:ln>
-          <a:effectLst/>
-        </p:spPr>
-        <p:style>
-          <a:lnRef idx="1">
-            <a:schemeClr val="accent1"/>
-          </a:lnRef>
-          <a:fillRef idx="3">
-            <a:schemeClr val="accent1"/>
-          </a:fillRef>
-          <a:effectRef idx="2">
-            <a:schemeClr val="accent1"/>
-          </a:effectRef>
-          <a:fontRef idx="minor">
-            <a:schemeClr val="lt1"/>
-          </a:fontRef>
-        </p:style>
-        <p:txBody>
-          <a:bodyPr rtlCol="0" anchor="ctr" wrap="square" lIns="146304" rIns="146304" tIns="109728" bIns="109728"/>
-          <a:lstStyle/>
-          <a:p>
-            <a:pPr algn="ctr"/>
-          </a:p>
-        </p:txBody>
-      </p:sp>
-      <p:pic>
-        <p:nvPicPr>
-          <p:cNvPr id="12" name="Picture 11" descr="chart.png"/>
-          <p:cNvPicPr>
-            <a:picLocks noChangeAspect="1"/>
-          </p:cNvPicPr>
-          <p:nvPr/>
-        </p:nvPicPr>
-        <p:blipFill>
-          <a:blip r:embed="rId3"/>
-          <a:stretch>
-            <a:fillRect/>
-          </a:stretch>
-        </p:blipFill>
-        <p:spPr>
-          <a:xfrm>
-            <a:off x="4730008" y="2352568"/>
-            <a:ext cx="342351" cy="342351"/>
-          </a:xfrm>
-          <a:prstGeom prst="rect">
-            <a:avLst/>
-          </a:prstGeom>
-        </p:spPr>
-      </p:pic>
-      <p:sp>
-        <p:nvSpPr>
-          <p:cNvPr id="13" name="TextBox 12"/>
-          <p:cNvSpPr txBox="1"/>
-          <p:nvPr/>
-        </p:nvSpPr>
-        <p:spPr>
-          <a:xfrm>
-            <a:off x="5266944" y="2322576"/>
-            <a:ext cx="2679192" cy="457200"/>
-          </a:xfrm>
-          <a:prstGeom prst="rect">
-            <a:avLst/>
-          </a:prstGeom>
-          <a:noFill/>
-        </p:spPr>
-        <p:txBody>
-          <a:bodyPr wrap="square">
-            <a:spAutoFit/>
-          </a:bodyPr>
-          <a:lstStyle/>
-          <a:p>
-            <a:r>
-              <a:rPr sz="1400" b="1">
-                <a:solidFill>
-                  <a:srgbClr val="15201C"/>
-                </a:solidFill>
-                <a:latin typeface="Space Grotesk"/>
-              </a:rPr>
-              <a:t>ILS is a display estimate</a:t>
-            </a:r>
-          </a:p>
-        </p:txBody>
-      </p:sp>
-      <p:sp>
-        <p:nvSpPr>
-          <p:cNvPr id="14" name="TextBox 13"/>
-          <p:cNvSpPr txBox="1"/>
-          <p:nvPr/>
-        </p:nvSpPr>
-        <p:spPr>
-          <a:xfrm>
-            <a:off x="4681728" y="2907791"/>
-            <a:ext cx="3191256" cy="1783080"/>
-          </a:xfrm>
-          <a:prstGeom prst="rect">
-            <a:avLst/>
-          </a:prstGeom>
-          <a:noFill/>
-        </p:spPr>
-        <p:txBody>
-          <a:bodyPr wrap="square">
-            <a:spAutoFit/>
-          </a:bodyPr>
-          <a:lstStyle/>
-          <a:p>
-            <a:pPr>
-              <a:lnSpc>
-                <a:spcPct val="114000"/>
-              </a:lnSpc>
-            </a:pPr>
-            <a:r>
-              <a:rPr sz="1200" b="0">
-                <a:solidFill>
-                  <a:srgbClr val="6B7B73"/>
-                </a:solidFill>
-                <a:latin typeface="Hanken Grotesk"/>
-              </a:rPr>
-              <a:t>The headline (~₪142.50, "Estimated" chip) comes from the fx_rate cache — Bank of Israel rate, refreshed every 12 h.</a:t>
-            </a:r>
-          </a:p>
-        </p:txBody>
-      </p:sp>
-      <p:sp>
-        <p:nvSpPr>
-          <p:cNvPr id="15" name="Rounded Rectangle 14"/>
-          <p:cNvSpPr/>
-          <p:nvPr/>
-        </p:nvSpPr>
-        <p:spPr>
-          <a:xfrm>
-            <a:off x="8275320" y="2103120"/>
-            <a:ext cx="3593592" cy="2743200"/>
-          </a:xfrm>
-          <a:prstGeom prst="roundRect">
-            <a:avLst>
-              <a:gd name="adj" fmla="val 5500"/>
-            </a:avLst>
-          </a:prstGeom>
-          <a:solidFill>
-            <a:srgbClr val="FFFFFF"/>
-          </a:solidFill>
-          <a:ln w="12700">
-            <a:solidFill>
-              <a:srgbClr val="E6EBE8"/>
-            </a:solidFill>
-          </a:ln>
-          <a:effectLst/>
-        </p:spPr>
-        <p:style>
-          <a:lnRef idx="1">
-            <a:schemeClr val="accent1"/>
-          </a:lnRef>
-          <a:fillRef idx="3">
-            <a:schemeClr val="accent1"/>
-          </a:fillRef>
-          <a:effectRef idx="2">
-            <a:schemeClr val="accent1"/>
-          </a:effectRef>
-          <a:fontRef idx="minor">
-            <a:schemeClr val="lt1"/>
-          </a:fontRef>
-        </p:style>
-        <p:txBody>
-          <a:bodyPr rtlCol="0" anchor="ctr" wrap="square" lIns="146304" rIns="146304" tIns="109728" bIns="109728"/>
-          <a:lstStyle/>
-          <a:p>
-            <a:pPr algn="ctr"/>
-          </a:p>
-        </p:txBody>
-      </p:sp>
-      <p:sp>
-        <p:nvSpPr>
-          <p:cNvPr id="16" name="Rounded Rectangle 15"/>
-          <p:cNvSpPr/>
-          <p:nvPr/>
-        </p:nvSpPr>
-        <p:spPr>
-          <a:xfrm>
-            <a:off x="8458200" y="2286000"/>
-            <a:ext cx="475488" cy="475488"/>
-          </a:xfrm>
-          <a:prstGeom prst="roundRect">
-            <a:avLst>
-              <a:gd name="adj" fmla="val 28000"/>
-            </a:avLst>
-          </a:prstGeom>
-          <a:solidFill>
-            <a:srgbClr val="E7F1EC"/>
-          </a:solidFill>
-          <a:ln w="12700">
-            <a:solidFill>
-              <a:srgbClr val="D2E3D9"/>
-            </a:solidFill>
-          </a:ln>
-          <a:effectLst/>
-        </p:spPr>
-        <p:style>
-          <a:lnRef idx="1">
-            <a:schemeClr val="accent1"/>
-          </a:lnRef>
-          <a:fillRef idx="3">
-            <a:schemeClr val="accent1"/>
-          </a:fillRef>
-          <a:effectRef idx="2">
-            <a:schemeClr val="accent1"/>
-          </a:effectRef>
-          <a:fontRef idx="minor">
-            <a:schemeClr val="lt1"/>
-          </a:fontRef>
-        </p:style>
-        <p:txBody>
-          <a:bodyPr rtlCol="0" anchor="ctr" wrap="square" lIns="146304" rIns="146304" tIns="109728" bIns="109728"/>
-          <a:lstStyle/>
-          <a:p>
-            <a:pPr algn="ctr"/>
-          </a:p>
-        </p:txBody>
-      </p:sp>
-      <p:pic>
-        <p:nvPicPr>
-          <p:cNvPr id="17" name="Picture 16" descr="bank.png"/>
-          <p:cNvPicPr>
-            <a:picLocks noChangeAspect="1"/>
-          </p:cNvPicPr>
-          <p:nvPr/>
-        </p:nvPicPr>
-        <p:blipFill>
-          <a:blip r:embed="rId4"/>
-          <a:stretch>
-            <a:fillRect/>
-          </a:stretch>
-        </p:blipFill>
-        <p:spPr>
-          <a:xfrm>
-            <a:off x="8524768" y="2352568"/>
-            <a:ext cx="342351" cy="342351"/>
-          </a:xfrm>
-          <a:prstGeom prst="rect">
-            <a:avLst/>
-          </a:prstGeom>
-        </p:spPr>
-      </p:pic>
-      <p:sp>
-        <p:nvSpPr>
-          <p:cNvPr id="18" name="TextBox 17"/>
-          <p:cNvSpPr txBox="1"/>
-          <p:nvPr/>
-        </p:nvSpPr>
-        <p:spPr>
-          <a:xfrm>
-            <a:off x="9061704" y="2322576"/>
-            <a:ext cx="2679192" cy="457200"/>
-          </a:xfrm>
-          <a:prstGeom prst="rect">
-            <a:avLst/>
-          </a:prstGeom>
-          <a:noFill/>
-        </p:spPr>
-        <p:txBody>
-          <a:bodyPr wrap="square">
-            <a:spAutoFit/>
-          </a:bodyPr>
-          <a:lstStyle/>
-          <a:p>
-            <a:r>
-              <a:rPr sz="1400" b="1">
-                <a:solidFill>
-                  <a:srgbClr val="15201C"/>
-                </a:solidFill>
-                <a:latin typeface="Space Grotesk"/>
-              </a:rPr>
-              <a:t>Convert once, at withdrawal</a:t>
-            </a:r>
-          </a:p>
-        </p:txBody>
-      </p:sp>
-      <p:sp>
-        <p:nvSpPr>
-          <p:cNvPr id="19" name="TextBox 18"/>
-          <p:cNvSpPr txBox="1"/>
-          <p:nvPr/>
-        </p:nvSpPr>
-        <p:spPr>
-          <a:xfrm>
-            <a:off x="8476488" y="2907791"/>
-            <a:ext cx="3191256" cy="1783080"/>
-          </a:xfrm>
-          <a:prstGeom prst="rect">
-            <a:avLst/>
-          </a:prstGeom>
-          <a:noFill/>
-        </p:spPr>
-        <p:txBody>
-          <a:bodyPr wrap="square">
-            <a:spAutoFit/>
-          </a:bodyPr>
-          <a:lstStyle/>
-          <a:p>
-            <a:pPr>
-              <a:lnSpc>
-                <a:spcPct val="114000"/>
-              </a:lnSpc>
-            </a:pPr>
-            <a:r>
-              <a:rPr sz="1200" b="0">
-                <a:solidFill>
-                  <a:srgbClr val="6B7B73"/>
-                </a:solidFill>
-                <a:latin typeface="Hanken Grotesk"/>
-              </a:rPr>
-              <a:t>No FX risk carried on displayed balances.</a:t>
-            </a:r>
-          </a:p>
-        </p:txBody>
-      </p:sp>
-      <p:sp>
-        <p:nvSpPr>
-          <p:cNvPr id="20" name="Rectangle 19"/>
+              <a:t>Rejected alternatives — the graveyard</a:t>
+            </a:r>
+          </a:p>
+        </p:txBody>
+      </p:sp>
+      <p:graphicFrame>
+        <p:nvGraphicFramePr>
+          <p:cNvPr id="5" name="Table 4"/>
+          <p:cNvGraphicFramePr>
+            <a:graphicFrameLocks noGrp="1"/>
+          </p:cNvGraphicFramePr>
+          <p:nvPr/>
+        </p:nvGraphicFramePr>
+        <p:xfrm>
+          <a:off x="658368" y="1737360"/>
+          <a:ext cx="10881360" cy="3291840"/>
+        </p:xfrm>
+        <a:graphic>
+          <a:graphicData uri="http://schemas.openxmlformats.org/drawingml/2006/table">
+            <a:tbl>
+              <a:tblPr>
+                <a:tableStyleId>{5C22544A-7EE6-4342-B048-85BDC9FD1C3A}</a:tableStyleId>
+              </a:tblPr>
+              <a:tblGrid>
+                <a:gridCol w="3108960"/>
+                <a:gridCol w="7772400"/>
+              </a:tblGrid>
+              <a:tr h="365760">
+                <a:tc>
+                  <a:txBody>
+                    <a:bodyPr wrap="square"/>
+                    <a:lstStyle/>
+                    <a:p>
+                      <a:pPr>
+                        <a:lnSpc>
+                          <a:spcPct val="108000"/>
+                        </a:lnSpc>
+                      </a:pPr>
+                      <a:r>
+                        <a:rPr sz="1100" b="1">
+                          <a:solidFill>
+                            <a:srgbClr val="7FE0B0"/>
+                          </a:solidFill>
+                          <a:latin typeface="Space Grotesk"/>
+                        </a:rPr>
+                        <a:t>Alternative</a:t>
+                      </a:r>
+                    </a:p>
+                  </a:txBody>
+                  <a:tcPr marL="91440" marR="91440" marT="45720" marB="45720">
+                    <a:solidFill>
+                      <a:srgbClr val="15201C"/>
+                    </a:solidFill>
+                  </a:tcPr>
+                </a:tc>
+                <a:tc>
+                  <a:txBody>
+                    <a:bodyPr wrap="square"/>
+                    <a:lstStyle/>
+                    <a:p>
+                      <a:pPr>
+                        <a:lnSpc>
+                          <a:spcPct val="108000"/>
+                        </a:lnSpc>
+                      </a:pPr>
+                      <a:r>
+                        <a:rPr sz="1100" b="1">
+                          <a:solidFill>
+                            <a:srgbClr val="7FE0B0"/>
+                          </a:solidFill>
+                          <a:latin typeface="Space Grotesk"/>
+                        </a:rPr>
+                        <a:t>Why not</a:t>
+                      </a:r>
+                    </a:p>
+                  </a:txBody>
+                  <a:tcPr marL="91440" marR="91440" marT="45720" marB="45720">
+                    <a:solidFill>
+                      <a:srgbClr val="15201C"/>
+                    </a:solidFill>
+                  </a:tcPr>
+                </a:tc>
+              </a:tr>
+              <a:tr h="365760">
+                <a:tc>
+                  <a:txBody>
+                    <a:bodyPr wrap="square"/>
+                    <a:lstStyle/>
+                    <a:p>
+                      <a:pPr>
+                        <a:lnSpc>
+                          <a:spcPct val="108000"/>
+                        </a:lnSpc>
+                      </a:pPr>
+                      <a:r>
+                        <a:rPr sz="1050" b="1">
+                          <a:solidFill>
+                            <a:srgbClr val="15201C"/>
+                          </a:solidFill>
+                          <a:latin typeface="Hanken Grotesk"/>
+                        </a:rPr>
+                        <a:t>RDS Data API (no-VPC SQL)</a:t>
+                      </a:r>
+                    </a:p>
+                  </a:txBody>
+                  <a:tcPr marL="91440" marR="91440" marT="45720" marB="45720">
+                    <a:solidFill>
+                      <a:srgbClr val="FFFFFF"/>
+                    </a:solidFill>
+                  </a:tcPr>
+                </a:tc>
+                <a:tc>
+                  <a:txBody>
+                    <a:bodyPr wrap="square"/>
+                    <a:lstStyle/>
+                    <a:p>
+                      <a:pPr>
+                        <a:lnSpc>
+                          <a:spcPct val="108000"/>
+                        </a:lnSpc>
+                      </a:pPr>
+                      <a:r>
+                        <a:rPr sz="1050" b="0">
+                          <a:solidFill>
+                            <a:srgbClr val="6B7B73"/>
+                          </a:solidFill>
+                          <a:latin typeface="Hanken Grotesk"/>
+                        </a:rPr>
+                        <a:t>Not available in il-central-1 - verified, killed the design branch</a:t>
+                      </a:r>
+                    </a:p>
+                  </a:txBody>
+                  <a:tcPr marL="91440" marR="91440" marT="45720" marB="45720">
+                    <a:solidFill>
+                      <a:srgbClr val="FFFFFF"/>
+                    </a:solidFill>
+                  </a:tcPr>
+                </a:tc>
+              </a:tr>
+              <a:tr h="365760">
+                <a:tc>
+                  <a:txBody>
+                    <a:bodyPr wrap="square"/>
+                    <a:lstStyle/>
+                    <a:p>
+                      <a:pPr>
+                        <a:lnSpc>
+                          <a:spcPct val="108000"/>
+                        </a:lnSpc>
+                      </a:pPr>
+                      <a:r>
+                        <a:rPr sz="1050" b="1">
+                          <a:solidFill>
+                            <a:srgbClr val="15201C"/>
+                          </a:solidFill>
+                          <a:latin typeface="Hanken Grotesk"/>
+                        </a:rPr>
+                        <a:t>Lambda Function URLs for landing</a:t>
+                      </a:r>
+                    </a:p>
+                  </a:txBody>
+                  <a:tcPr marL="91440" marR="91440" marT="45720" marB="45720">
+                    <a:solidFill>
+                      <a:srgbClr val="F4F6F5"/>
+                    </a:solidFill>
+                  </a:tcPr>
+                </a:tc>
+                <a:tc>
+                  <a:txBody>
+                    <a:bodyPr wrap="square"/>
+                    <a:lstStyle/>
+                    <a:p>
+                      <a:pPr>
+                        <a:lnSpc>
+                          <a:spcPct val="108000"/>
+                        </a:lnSpc>
+                      </a:pPr>
+                      <a:r>
+                        <a:rPr sz="1050" b="0">
+                          <a:solidFill>
+                            <a:srgbClr val="6B7B73"/>
+                          </a:solidFill>
+                          <a:latin typeface="Hanken Grotesk"/>
+                        </a:rPr>
+                        <a:t>Not available in il-central-1 -&gt; HTTP API behind CloudFront /p/*</a:t>
+                      </a:r>
+                    </a:p>
+                  </a:txBody>
+                  <a:tcPr marL="91440" marR="91440" marT="45720" marB="45720">
+                    <a:solidFill>
+                      <a:srgbClr val="F4F6F5"/>
+                    </a:solidFill>
+                  </a:tcPr>
+                </a:tc>
+              </a:tr>
+              <a:tr h="365760">
+                <a:tc>
+                  <a:txBody>
+                    <a:bodyPr wrap="square"/>
+                    <a:lstStyle/>
+                    <a:p>
+                      <a:pPr>
+                        <a:lnSpc>
+                          <a:spcPct val="108000"/>
+                        </a:lnSpc>
+                      </a:pPr>
+                      <a:r>
+                        <a:rPr sz="1050" b="1">
+                          <a:solidFill>
+                            <a:srgbClr val="15201C"/>
+                          </a:solidFill>
+                          <a:latin typeface="Hanken Grotesk"/>
+                        </a:rPr>
+                        <a:t>NAT + interface endpoints</a:t>
+                      </a:r>
+                    </a:p>
+                  </a:txBody>
+                  <a:tcPr marL="91440" marR="91440" marT="45720" marB="45720">
+                    <a:solidFill>
+                      <a:srgbClr val="FFFFFF"/>
+                    </a:solidFill>
+                  </a:tcPr>
+                </a:tc>
+                <a:tc>
+                  <a:txBody>
+                    <a:bodyPr wrap="square"/>
+                    <a:lstStyle/>
+                    <a:p>
+                      <a:pPr>
+                        <a:lnSpc>
+                          <a:spcPct val="108000"/>
+                        </a:lnSpc>
+                      </a:pPr>
+                      <a:r>
+                        <a:rPr sz="1050" b="0">
+                          <a:solidFill>
+                            <a:srgbClr val="6B7B73"/>
+                          </a:solidFill>
+                          <a:latin typeface="Hanken Grotesk"/>
+                        </a:rPr>
+                        <a:t>Fixed monthly cost for idle capability; non-VPC chaining is $0 and least-privilege by construction</a:t>
+                      </a:r>
+                    </a:p>
+                  </a:txBody>
+                  <a:tcPr marL="91440" marR="91440" marT="45720" marB="45720">
+                    <a:solidFill>
+                      <a:srgbClr val="FFFFFF"/>
+                    </a:solidFill>
+                  </a:tcPr>
+                </a:tc>
+              </a:tr>
+              <a:tr h="365760">
+                <a:tc>
+                  <a:txBody>
+                    <a:bodyPr wrap="square"/>
+                    <a:lstStyle/>
+                    <a:p>
+                      <a:pPr>
+                        <a:lnSpc>
+                          <a:spcPct val="108000"/>
+                        </a:lnSpc>
+                      </a:pPr>
+                      <a:r>
+                        <a:rPr sz="1050" b="1">
+                          <a:solidFill>
+                            <a:srgbClr val="15201C"/>
+                          </a:solidFill>
+                          <a:latin typeface="Hanken Grotesk"/>
+                        </a:rPr>
+                        <a:t>RDS Proxy</a:t>
+                      </a:r>
+                    </a:p>
+                  </a:txBody>
+                  <a:tcPr marL="91440" marR="91440" marT="45720" marB="45720">
+                    <a:solidFill>
+                      <a:srgbClr val="F4F6F5"/>
+                    </a:solidFill>
+                  </a:tcPr>
+                </a:tc>
+                <a:tc>
+                  <a:txBody>
+                    <a:bodyPr wrap="square"/>
+                    <a:lstStyle/>
+                    <a:p>
+                      <a:pPr>
+                        <a:lnSpc>
+                          <a:spcPct val="108000"/>
+                        </a:lnSpc>
+                      </a:pPr>
+                      <a:r>
+                        <a:rPr sz="1050" b="0">
+                          <a:solidFill>
+                            <a:srgbClr val="6B7B73"/>
+                          </a:solidFill>
+                          <a:latin typeface="Hanken Grotesk"/>
+                        </a:rPr>
+                        <a:t>Cost + unneeded at 50-connection scale; revisit on connection-pressure alarm</a:t>
+                      </a:r>
+                    </a:p>
+                  </a:txBody>
+                  <a:tcPr marL="91440" marR="91440" marT="45720" marB="45720">
+                    <a:solidFill>
+                      <a:srgbClr val="F4F6F5"/>
+                    </a:solidFill>
+                  </a:tcPr>
+                </a:tc>
+              </a:tr>
+              <a:tr h="365760">
+                <a:tc>
+                  <a:txBody>
+                    <a:bodyPr wrap="square"/>
+                    <a:lstStyle/>
+                    <a:p>
+                      <a:pPr>
+                        <a:lnSpc>
+                          <a:spcPct val="108000"/>
+                        </a:lnSpc>
+                      </a:pPr>
+                      <a:r>
+                        <a:rPr sz="1050" b="1">
+                          <a:solidFill>
+                            <a:srgbClr val="15201C"/>
+                          </a:solidFill>
+                          <a:latin typeface="Hanken Grotesk"/>
+                        </a:rPr>
+                        <a:t>Managed Login for customers</a:t>
+                      </a:r>
+                    </a:p>
+                  </a:txBody>
+                  <a:tcPr marL="91440" marR="91440" marT="45720" marB="45720">
+                    <a:solidFill>
+                      <a:srgbClr val="FFFFFF"/>
+                    </a:solidFill>
+                  </a:tcPr>
+                </a:tc>
+                <a:tc>
+                  <a:txBody>
+                    <a:bodyPr wrap="square"/>
+                    <a:lstStyle/>
+                    <a:p>
+                      <a:pPr>
+                        <a:lnSpc>
+                          <a:spcPct val="108000"/>
+                        </a:lnSpc>
+                      </a:pPr>
+                      <a:r>
+                        <a:rPr sz="1050" b="0">
+                          <a:solidFill>
+                            <a:srgbClr val="6B7B73"/>
+                          </a:solidFill>
+                          <a:latin typeface="Hanken Grotesk"/>
+                        </a:rPr>
+                        <a:t>No Hebrew/RTL; passkey RP-ID silo on the auth subdomain (kept for the admin console, where it fits)</a:t>
+                      </a:r>
+                    </a:p>
+                  </a:txBody>
+                  <a:tcPr marL="91440" marR="91440" marT="45720" marB="45720">
+                    <a:solidFill>
+                      <a:srgbClr val="FFFFFF"/>
+                    </a:solidFill>
+                  </a:tcPr>
+                </a:tc>
+              </a:tr>
+              <a:tr h="365760">
+                <a:tc>
+                  <a:txBody>
+                    <a:bodyPr wrap="square"/>
+                    <a:lstStyle/>
+                    <a:p>
+                      <a:pPr>
+                        <a:lnSpc>
+                          <a:spcPct val="108000"/>
+                        </a:lnSpc>
+                      </a:pPr>
+                      <a:r>
+                        <a:rPr sz="1050" b="1">
+                          <a:solidFill>
+                            <a:srgbClr val="15201C"/>
+                          </a:solidFill>
+                          <a:latin typeface="Hanken Grotesk"/>
+                        </a:rPr>
+                        <a:t>Conversion webhooks</a:t>
+                      </a:r>
+                    </a:p>
+                  </a:txBody>
+                  <a:tcPr marL="91440" marR="91440" marT="45720" marB="45720">
+                    <a:solidFill>
+                      <a:srgbClr val="F4F6F5"/>
+                    </a:solidFill>
+                  </a:tcPr>
+                </a:tc>
+                <a:tc>
+                  <a:txBody>
+                    <a:bodyPr wrap="square"/>
+                    <a:lstStyle/>
+                    <a:p>
+                      <a:pPr>
+                        <a:lnSpc>
+                          <a:spcPct val="108000"/>
+                        </a:lnSpc>
+                      </a:pPr>
+                      <a:r>
+                        <a:rPr sz="1050" b="0">
+                          <a:solidFill>
+                            <a:srgbClr val="6B7B73"/>
+                          </a:solidFill>
+                          <a:latin typeface="Hanken Grotesk"/>
+                        </a:rPr>
+                        <a:t>Spoofable inbound money surface + no reliable retailer support; reconciliation poll is replayable and auditable</a:t>
+                      </a:r>
+                    </a:p>
+                  </a:txBody>
+                  <a:tcPr marL="91440" marR="91440" marT="45720" marB="45720">
+                    <a:solidFill>
+                      <a:srgbClr val="F4F6F5"/>
+                    </a:solidFill>
+                  </a:tcPr>
+                </a:tc>
+              </a:tr>
+              <a:tr h="365760">
+                <a:tc>
+                  <a:txBody>
+                    <a:bodyPr wrap="square"/>
+                    <a:lstStyle/>
+                    <a:p>
+                      <a:pPr>
+                        <a:lnSpc>
+                          <a:spcPct val="108000"/>
+                        </a:lnSpc>
+                      </a:pPr>
+                      <a:r>
+                        <a:rPr sz="1050" b="1">
+                          <a:solidFill>
+                            <a:srgbClr val="15201C"/>
+                          </a:solidFill>
+                          <a:latin typeface="Hanken Grotesk"/>
+                        </a:rPr>
+                        <a:t>Self-minted session JWTs</a:t>
+                      </a:r>
+                    </a:p>
+                  </a:txBody>
+                  <a:tcPr marL="91440" marR="91440" marT="45720" marB="45720">
+                    <a:solidFill>
+                      <a:srgbClr val="FFFFFF"/>
+                    </a:solidFill>
+                  </a:tcPr>
+                </a:tc>
+                <a:tc>
+                  <a:txBody>
+                    <a:bodyPr wrap="square"/>
+                    <a:lstStyle/>
+                    <a:p>
+                      <a:pPr>
+                        <a:lnSpc>
+                          <a:spcPct val="108000"/>
+                        </a:lnSpc>
+                      </a:pPr>
+                      <a:r>
+                        <a:rPr sz="1050" b="0">
+                          <a:solidFill>
+                            <a:srgbClr val="6B7B73"/>
+                          </a:solidFill>
+                          <a:latin typeface="Hanken Grotesk"/>
+                        </a:rPr>
+                        <a:t>A second token validation path across every API; Cognito stays the only issuer</a:t>
+                      </a:r>
+                    </a:p>
+                  </a:txBody>
+                  <a:tcPr marL="91440" marR="91440" marT="45720" marB="45720">
+                    <a:solidFill>
+                      <a:srgbClr val="FFFFFF"/>
+                    </a:solidFill>
+                  </a:tcPr>
+                </a:tc>
+              </a:tr>
+              <a:tr h="365760">
+                <a:tc>
+                  <a:txBody>
+                    <a:bodyPr wrap="square"/>
+                    <a:lstStyle/>
+                    <a:p>
+                      <a:pPr>
+                        <a:lnSpc>
+                          <a:spcPct val="108000"/>
+                        </a:lnSpc>
+                      </a:pPr>
+                      <a:r>
+                        <a:rPr sz="1050" b="1">
+                          <a:solidFill>
+                            <a:srgbClr val="15201C"/>
+                          </a:solidFill>
+                          <a:latin typeface="Hanken Grotesk"/>
+                        </a:rPr>
+                        <a:t>Aurora customer table (PII in SQL)</a:t>
+                      </a:r>
+                    </a:p>
+                  </a:txBody>
+                  <a:tcPr marL="91440" marR="91440" marT="45720" marB="45720">
+                    <a:solidFill>
+                      <a:srgbClr val="F4F6F5"/>
+                    </a:solidFill>
+                  </a:tcPr>
+                </a:tc>
+                <a:tc>
+                  <a:txBody>
+                    <a:bodyPr wrap="square"/>
+                    <a:lstStyle/>
+                    <a:p>
+                      <a:pPr>
+                        <a:lnSpc>
+                          <a:spcPct val="108000"/>
+                        </a:lnSpc>
+                      </a:pPr>
+                      <a:r>
+                        <a:rPr sz="1050" b="0">
+                          <a:solidFill>
+                            <a:srgbClr val="6B7B73"/>
+                          </a:solidFill>
+                          <a:latin typeface="Hanken Grotesk"/>
+                        </a:rPr>
+                        <a:t>Kept Aurora on the auth path and PII in two stores; moved to Cognito attributes (ADR-0027)</a:t>
+                      </a:r>
+                    </a:p>
+                  </a:txBody>
+                  <a:tcPr marL="91440" marR="91440" marT="45720" marB="45720">
+                    <a:solidFill>
+                      <a:srgbClr val="F4F6F5"/>
+                    </a:solidFill>
+                  </a:tcPr>
+                </a:tc>
+              </a:tr>
+            </a:tbl>
+          </a:graphicData>
+        </a:graphic>
+      </p:graphicFrame>
+      <p:sp>
+        <p:nvSpPr>
+          <p:cNvPr id="6" name="Rectangle 5"/>
           <p:cNvSpPr/>
           <p:nvPr/>
         </p:nvSpPr>
@@ -14720,7 +14304,7 @@
       </p:sp>
       <p:sp>
         <p:nvSpPr>
-          <p:cNvPr id="21" name="TextBox 20"/>
+          <p:cNvPr id="7" name="TextBox 6"/>
           <p:cNvSpPr txBox="1"/>
           <p:nvPr/>
         </p:nvSpPr>
@@ -14763,7 +14347,7 @@
       </p:sp>
       <p:sp>
         <p:nvSpPr>
-          <p:cNvPr id="22" name="TextBox 21"/>
+          <p:cNvPr id="8" name="TextBox 7"/>
           <p:cNvSpPr txBox="1"/>
           <p:nvPr/>
         </p:nvSpPr>
@@ -19643,7 +19227,7 @@
                 </a:solidFill>
                 <a:latin typeface="Space Mono"/>
               </a:rPr>
-              <a:t>ENGINEERING</a:t>
+              <a:t>DECISIONS</a:t>
             </a:r>
           </a:p>
         </p:txBody>
@@ -19671,219 +19255,495 @@
           <a:lstStyle/>
           <a:p>
             <a:r>
-              <a:rPr sz="2700" b="1">
+              <a:rPr sz="2500" b="1">
                 <a:solidFill>
                   <a:srgbClr val="15201C"/>
                 </a:solidFill>
                 <a:latin typeface="Space Grotesk"/>
               </a:rPr>
-              <a:t>Data — three homes, one rule each</a:t>
-            </a:r>
-          </a:p>
-        </p:txBody>
-      </p:sp>
-      <p:sp>
-        <p:nvSpPr>
-          <p:cNvPr id="5" name="Rounded Rectangle 4"/>
-          <p:cNvSpPr/>
-          <p:nvPr/>
-        </p:nvSpPr>
-        <p:spPr>
-          <a:xfrm>
-            <a:off x="2575695" y="1618488"/>
-            <a:ext cx="7040304" cy="2569464"/>
-          </a:xfrm>
-          <a:prstGeom prst="roundRect">
-            <a:avLst>
-              <a:gd name="adj" fmla="val 5500"/>
-            </a:avLst>
-          </a:prstGeom>
-          <a:solidFill>
-            <a:srgbClr val="FFFFFF"/>
-          </a:solidFill>
-          <a:ln w="12700">
-            <a:solidFill>
-              <a:srgbClr val="E6EBE8"/>
-            </a:solidFill>
-          </a:ln>
-          <a:effectLst/>
-        </p:spPr>
-        <p:style>
-          <a:lnRef idx="1">
-            <a:schemeClr val="accent1"/>
-          </a:lnRef>
-          <a:fillRef idx="3">
-            <a:schemeClr val="accent1"/>
-          </a:fillRef>
-          <a:effectRef idx="2">
-            <a:schemeClr val="accent1"/>
-          </a:effectRef>
-          <a:fontRef idx="minor">
-            <a:schemeClr val="lt1"/>
-          </a:fontRef>
-        </p:style>
-        <p:txBody>
-          <a:bodyPr rtlCol="0" anchor="ctr" wrap="square" lIns="146304" rIns="146304" tIns="109728" bIns="109728"/>
-          <a:lstStyle/>
-          <a:p>
-            <a:pPr algn="ctr"/>
-          </a:p>
-        </p:txBody>
-      </p:sp>
-      <p:pic>
-        <p:nvPicPr>
-          <p:cNvPr id="6" name="Picture 5" descr="diagram-1.png"/>
-          <p:cNvPicPr>
-            <a:picLocks noChangeAspect="1"/>
-          </p:cNvPicPr>
-          <p:nvPr/>
-        </p:nvPicPr>
-        <p:blipFill>
-          <a:blip r:embed="rId2"/>
-          <a:stretch>
-            <a:fillRect/>
-          </a:stretch>
-        </p:blipFill>
-        <p:spPr>
-          <a:xfrm>
-            <a:off x="2740287" y="1783080"/>
-            <a:ext cx="6711120" cy="2240280"/>
-          </a:xfrm>
-          <a:prstGeom prst="rect">
-            <a:avLst/>
-          </a:prstGeom>
-        </p:spPr>
-      </p:pic>
-      <p:sp>
-        <p:nvSpPr>
-          <p:cNvPr id="7" name="Rounded Rectangle 6"/>
-          <p:cNvSpPr/>
-          <p:nvPr/>
-        </p:nvSpPr>
-        <p:spPr>
-          <a:xfrm>
-            <a:off x="658368" y="4224528"/>
-            <a:ext cx="2706624" cy="2011680"/>
-          </a:xfrm>
-          <a:prstGeom prst="roundRect">
-            <a:avLst>
-              <a:gd name="adj" fmla="val 5500"/>
-            </a:avLst>
-          </a:prstGeom>
-          <a:solidFill>
-            <a:srgbClr val="FFFFFF"/>
-          </a:solidFill>
-          <a:ln w="12700">
-            <a:solidFill>
-              <a:srgbClr val="E6EBE8"/>
-            </a:solidFill>
-          </a:ln>
-          <a:effectLst/>
-        </p:spPr>
-        <p:style>
-          <a:lnRef idx="1">
-            <a:schemeClr val="accent1"/>
-          </a:lnRef>
-          <a:fillRef idx="3">
-            <a:schemeClr val="accent1"/>
-          </a:fillRef>
-          <a:effectRef idx="2">
-            <a:schemeClr val="accent1"/>
-          </a:effectRef>
-          <a:fontRef idx="minor">
-            <a:schemeClr val="lt1"/>
-          </a:fontRef>
-        </p:style>
-        <p:txBody>
-          <a:bodyPr rtlCol="0" anchor="ctr" wrap="square" lIns="146304" rIns="146304" tIns="109728" bIns="109728"/>
-          <a:lstStyle/>
-          <a:p>
-            <a:pPr algn="ctr"/>
-          </a:p>
-        </p:txBody>
-      </p:sp>
-      <p:sp>
-        <p:nvSpPr>
-          <p:cNvPr id="8" name="Rounded Rectangle 7"/>
-          <p:cNvSpPr/>
-          <p:nvPr/>
-        </p:nvSpPr>
-        <p:spPr>
-          <a:xfrm>
-            <a:off x="822959" y="4370832"/>
-            <a:ext cx="402336" cy="402336"/>
-          </a:xfrm>
-          <a:prstGeom prst="roundRect">
-            <a:avLst>
-              <a:gd name="adj" fmla="val 28000"/>
-            </a:avLst>
-          </a:prstGeom>
-          <a:solidFill>
-            <a:srgbClr val="E7F1EC"/>
-          </a:solidFill>
-          <a:ln w="12700">
-            <a:solidFill>
-              <a:srgbClr val="D2E3D9"/>
-            </a:solidFill>
-          </a:ln>
-          <a:effectLst/>
-        </p:spPr>
-        <p:style>
-          <a:lnRef idx="1">
-            <a:schemeClr val="accent1"/>
-          </a:lnRef>
-          <a:fillRef idx="3">
-            <a:schemeClr val="accent1"/>
-          </a:fillRef>
-          <a:effectRef idx="2">
-            <a:schemeClr val="accent1"/>
-          </a:effectRef>
-          <a:fontRef idx="minor">
-            <a:schemeClr val="lt1"/>
-          </a:fontRef>
-        </p:style>
-        <p:txBody>
-          <a:bodyPr rtlCol="0" anchor="ctr" wrap="square" lIns="146304" rIns="146304" tIns="109728" bIns="109728"/>
-          <a:lstStyle/>
-          <a:p>
-            <a:pPr algn="ctr"/>
-          </a:p>
-        </p:txBody>
-      </p:sp>
-      <p:pic>
-        <p:nvPicPr>
-          <p:cNvPr id="9" name="Picture 8" descr="idcard.png"/>
-          <p:cNvPicPr>
-            <a:picLocks noChangeAspect="1"/>
-          </p:cNvPicPr>
-          <p:nvPr/>
-        </p:nvPicPr>
-        <p:blipFill>
-          <a:blip r:embed="rId3"/>
-          <a:stretch>
-            <a:fillRect/>
-          </a:stretch>
-        </p:blipFill>
-        <p:spPr>
-          <a:xfrm>
-            <a:off x="879287" y="4427159"/>
-            <a:ext cx="289681" cy="289681"/>
-          </a:xfrm>
-          <a:prstGeom prst="rect">
-            <a:avLst/>
-          </a:prstGeom>
-        </p:spPr>
-      </p:pic>
-      <p:sp>
-        <p:nvSpPr>
-          <p:cNvPr id="10" name="TextBox 9"/>
+              <a:t>Data — one store per job, and what each costs us</a:t>
+            </a:r>
+          </a:p>
+        </p:txBody>
+      </p:sp>
+      <p:graphicFrame>
+        <p:nvGraphicFramePr>
+          <p:cNvPr id="5" name="Table 4"/>
+          <p:cNvGraphicFramePr>
+            <a:graphicFrameLocks noGrp="1"/>
+          </p:cNvGraphicFramePr>
+          <p:nvPr/>
+        </p:nvGraphicFramePr>
+        <p:xfrm>
+          <a:off x="658368" y="1783080"/>
+          <a:ext cx="10881360" cy="1463040"/>
+        </p:xfrm>
+        <a:graphic>
+          <a:graphicData uri="http://schemas.openxmlformats.org/drawingml/2006/table">
+            <a:tbl>
+              <a:tblPr>
+                <a:tableStyleId>{5C22544A-7EE6-4342-B048-85BDC9FD1C3A}</a:tableStyleId>
+              </a:tblPr>
+              <a:tblGrid>
+                <a:gridCol w="1417320"/>
+                <a:gridCol w="2926080"/>
+                <a:gridCol w="3291840"/>
+                <a:gridCol w="3246120"/>
+              </a:tblGrid>
+              <a:tr h="365760">
+                <a:tc>
+                  <a:txBody>
+                    <a:bodyPr wrap="square"/>
+                    <a:lstStyle/>
+                    <a:p>
+                      <a:pPr>
+                        <a:lnSpc>
+                          <a:spcPct val="108000"/>
+                        </a:lnSpc>
+                      </a:pPr>
+                      <a:r>
+                        <a:rPr sz="1100" b="1">
+                          <a:solidFill>
+                            <a:srgbClr val="7FE0B0"/>
+                          </a:solidFill>
+                          <a:latin typeface="Space Grotesk"/>
+                        </a:rPr>
+                        <a:t>Data</a:t>
+                      </a:r>
+                    </a:p>
+                  </a:txBody>
+                  <a:tcPr marL="91440" marR="91440" marT="45720" marB="45720">
+                    <a:solidFill>
+                      <a:srgbClr val="15201C"/>
+                    </a:solidFill>
+                  </a:tcPr>
+                </a:tc>
+                <a:tc>
+                  <a:txBody>
+                    <a:bodyPr wrap="square"/>
+                    <a:lstStyle/>
+                    <a:p>
+                      <a:pPr>
+                        <a:lnSpc>
+                          <a:spcPct val="108000"/>
+                        </a:lnSpc>
+                      </a:pPr>
+                      <a:r>
+                        <a:rPr sz="1100" b="1">
+                          <a:solidFill>
+                            <a:srgbClr val="7FE0B0"/>
+                          </a:solidFill>
+                          <a:latin typeface="Space Grotesk"/>
+                        </a:rPr>
+                        <a:t>Decision</a:t>
+                      </a:r>
+                    </a:p>
+                  </a:txBody>
+                  <a:tcPr marL="91440" marR="91440" marT="45720" marB="45720">
+                    <a:solidFill>
+                      <a:srgbClr val="15201C"/>
+                    </a:solidFill>
+                  </a:tcPr>
+                </a:tc>
+                <a:tc>
+                  <a:txBody>
+                    <a:bodyPr wrap="square"/>
+                    <a:lstStyle/>
+                    <a:p>
+                      <a:pPr>
+                        <a:lnSpc>
+                          <a:spcPct val="108000"/>
+                        </a:lnSpc>
+                      </a:pPr>
+                      <a:r>
+                        <a:rPr sz="1100" b="1">
+                          <a:solidFill>
+                            <a:srgbClr val="7FE0B0"/>
+                          </a:solidFill>
+                          <a:latin typeface="Space Grotesk"/>
+                        </a:rPr>
+                        <a:t>Why</a:t>
+                      </a:r>
+                    </a:p>
+                  </a:txBody>
+                  <a:tcPr marL="91440" marR="91440" marT="45720" marB="45720">
+                    <a:solidFill>
+                      <a:srgbClr val="15201C"/>
+                    </a:solidFill>
+                  </a:tcPr>
+                </a:tc>
+                <a:tc>
+                  <a:txBody>
+                    <a:bodyPr wrap="square"/>
+                    <a:lstStyle/>
+                    <a:p>
+                      <a:pPr>
+                        <a:lnSpc>
+                          <a:spcPct val="108000"/>
+                        </a:lnSpc>
+                      </a:pPr>
+                      <a:r>
+                        <a:rPr sz="1100" b="1">
+                          <a:solidFill>
+                            <a:srgbClr val="7FE0B0"/>
+                          </a:solidFill>
+                          <a:latin typeface="Space Grotesk"/>
+                        </a:rPr>
+                        <a:t>Trade-off accepted</a:t>
+                      </a:r>
+                    </a:p>
+                  </a:txBody>
+                  <a:tcPr marL="91440" marR="91440" marT="45720" marB="45720">
+                    <a:solidFill>
+                      <a:srgbClr val="15201C"/>
+                    </a:solidFill>
+                  </a:tcPr>
+                </a:tc>
+              </a:tr>
+              <a:tr h="365760">
+                <a:tc>
+                  <a:txBody>
+                    <a:bodyPr wrap="square"/>
+                    <a:lstStyle/>
+                    <a:p>
+                      <a:pPr>
+                        <a:lnSpc>
+                          <a:spcPct val="108000"/>
+                        </a:lnSpc>
+                      </a:pPr>
+                      <a:r>
+                        <a:rPr sz="1050" b="1">
+                          <a:solidFill>
+                            <a:srgbClr val="15201C"/>
+                          </a:solidFill>
+                          <a:latin typeface="Hanken Grotesk"/>
+                        </a:rPr>
+                        <a:t>Money</a:t>
+                      </a:r>
+                    </a:p>
+                  </a:txBody>
+                  <a:tcPr marL="91440" marR="91440" marT="45720" marB="45720">
+                    <a:solidFill>
+                      <a:srgbClr val="FFFFFF"/>
+                    </a:solidFill>
+                  </a:tcPr>
+                </a:tc>
+                <a:tc>
+                  <a:txBody>
+                    <a:bodyPr wrap="square"/>
+                    <a:lstStyle/>
+                    <a:p>
+                      <a:pPr>
+                        <a:lnSpc>
+                          <a:spcPct val="108000"/>
+                        </a:lnSpc>
+                      </a:pPr>
+                      <a:r>
+                        <a:rPr sz="1050" b="0">
+                          <a:solidFill>
+                            <a:srgbClr val="6B7B73"/>
+                          </a:solidFill>
+                          <a:latin typeface="Hanken Grotesk"/>
+                        </a:rPr>
+                        <a:t>Aurora Serverless v2 (0-2 ACU, IAM auth, no proxy)</a:t>
+                      </a:r>
+                    </a:p>
+                  </a:txBody>
+                  <a:tcPr marL="91440" marR="91440" marT="45720" marB="45720">
+                    <a:solidFill>
+                      <a:srgbClr val="FFFFFF"/>
+                    </a:solidFill>
+                  </a:tcPr>
+                </a:tc>
+                <a:tc>
+                  <a:txBody>
+                    <a:bodyPr wrap="square"/>
+                    <a:lstStyle/>
+                    <a:p>
+                      <a:pPr>
+                        <a:lnSpc>
+                          <a:spcPct val="108000"/>
+                        </a:lnSpc>
+                      </a:pPr>
+                      <a:r>
+                        <a:rPr sz="1050" b="0">
+                          <a:solidFill>
+                            <a:srgbClr val="6B7B73"/>
+                          </a:solidFill>
+                          <a:latin typeface="Hanken Grotesk"/>
+                        </a:rPr>
+                        <a:t>ACID + Postgres GRANTs as the money invariant (app_rw SELECT-only, poller_writer INSERT-only); SQL for reconciliation</a:t>
+                      </a:r>
+                    </a:p>
+                  </a:txBody>
+                  <a:tcPr marL="91440" marR="91440" marT="45720" marB="45720">
+                    <a:solidFill>
+                      <a:srgbClr val="FFFFFF"/>
+                    </a:solidFill>
+                  </a:tcPr>
+                </a:tc>
+                <a:tc>
+                  <a:txBody>
+                    <a:bodyPr wrap="square"/>
+                    <a:lstStyle/>
+                    <a:p>
+                      <a:pPr>
+                        <a:lnSpc>
+                          <a:spcPct val="108000"/>
+                        </a:lnSpc>
+                      </a:pPr>
+                      <a:r>
+                        <a:rPr sz="1050" b="0">
+                          <a:solidFill>
+                            <a:srgbClr val="6B7B73"/>
+                          </a:solidFill>
+                          <a:latin typeface="Hanken Grotesk"/>
+                        </a:rPr>
+                        <a:t>Scale-to-zero cold resume ~20 s (60 s connect timeout + SPA warm-up probe); 50-connection cap</a:t>
+                      </a:r>
+                    </a:p>
+                  </a:txBody>
+                  <a:tcPr marL="91440" marR="91440" marT="45720" marB="45720">
+                    <a:solidFill>
+                      <a:srgbClr val="FFFFFF"/>
+                    </a:solidFill>
+                  </a:tcPr>
+                </a:tc>
+              </a:tr>
+              <a:tr h="365760">
+                <a:tc>
+                  <a:txBody>
+                    <a:bodyPr wrap="square"/>
+                    <a:lstStyle/>
+                    <a:p>
+                      <a:pPr>
+                        <a:lnSpc>
+                          <a:spcPct val="108000"/>
+                        </a:lnSpc>
+                      </a:pPr>
+                      <a:r>
+                        <a:rPr sz="1050" b="1">
+                          <a:solidFill>
+                            <a:srgbClr val="15201C"/>
+                          </a:solidFill>
+                          <a:latin typeface="Hanken Grotesk"/>
+                        </a:rPr>
+                        <a:t>Customer PII</a:t>
+                      </a:r>
+                    </a:p>
+                  </a:txBody>
+                  <a:tcPr marL="91440" marR="91440" marT="45720" marB="45720">
+                    <a:solidFill>
+                      <a:srgbClr val="F4F6F5"/>
+                    </a:solidFill>
+                  </a:tcPr>
+                </a:tc>
+                <a:tc>
+                  <a:txBody>
+                    <a:bodyPr wrap="square"/>
+                    <a:lstStyle/>
+                    <a:p>
+                      <a:pPr>
+                        <a:lnSpc>
+                          <a:spcPct val="108000"/>
+                        </a:lnSpc>
+                      </a:pPr>
+                      <a:r>
+                        <a:rPr sz="1050" b="0">
+                          <a:solidFill>
+                            <a:srgbClr val="6B7B73"/>
+                          </a:solidFill>
+                          <a:latin typeface="Hanken Grotesk"/>
+                        </a:rPr>
+                        <a:t>Cognito user attributes are the system of record</a:t>
+                      </a:r>
+                    </a:p>
+                  </a:txBody>
+                  <a:tcPr marL="91440" marR="91440" marT="45720" marB="45720">
+                    <a:solidFill>
+                      <a:srgbClr val="F4F6F5"/>
+                    </a:solidFill>
+                  </a:tcPr>
+                </a:tc>
+                <a:tc>
+                  <a:txBody>
+                    <a:bodyPr wrap="square"/>
+                    <a:lstStyle/>
+                    <a:p>
+                      <a:pPr>
+                        <a:lnSpc>
+                          <a:spcPct val="108000"/>
+                        </a:lnSpc>
+                      </a:pPr>
+                      <a:r>
+                        <a:rPr sz="1050" b="0">
+                          <a:solidFill>
+                            <a:srgbClr val="6B7B73"/>
+                          </a:solidFill>
+                          <a:latin typeface="Hanken Grotesk"/>
+                        </a:rPr>
+                        <a:t>Auth path touches zero databases; GDPR delete = one call; backups carry no PII</a:t>
+                      </a:r>
+                    </a:p>
+                  </a:txBody>
+                  <a:tcPr marL="91440" marR="91440" marT="45720" marB="45720">
+                    <a:solidFill>
+                      <a:srgbClr val="F4F6F5"/>
+                    </a:solidFill>
+                  </a:tcPr>
+                </a:tc>
+                <a:tc>
+                  <a:txBody>
+                    <a:bodyPr wrap="square"/>
+                    <a:lstStyle/>
+                    <a:p>
+                      <a:pPr>
+                        <a:lnSpc>
+                          <a:spcPct val="108000"/>
+                        </a:lnSpc>
+                      </a:pPr>
+                      <a:r>
+                        <a:rPr sz="1050" b="0">
+                          <a:solidFill>
+                            <a:srgbClr val="6B7B73"/>
+                          </a:solidFill>
+                          <a:latin typeface="Hanken Grotesk"/>
+                        </a:rPr>
+                        <a:t>ListUsers-only queries (no joins, one filter); no PITR; no attribute history. Escape hatch: dual-write projection</a:t>
+                      </a:r>
+                    </a:p>
+                  </a:txBody>
+                  <a:tcPr marL="91440" marR="91440" marT="45720" marB="45720">
+                    <a:solidFill>
+                      <a:srgbClr val="F4F6F5"/>
+                    </a:solidFill>
+                  </a:tcPr>
+                </a:tc>
+              </a:tr>
+              <a:tr h="365760">
+                <a:tc>
+                  <a:txBody>
+                    <a:bodyPr wrap="square"/>
+                    <a:lstStyle/>
+                    <a:p>
+                      <a:pPr>
+                        <a:lnSpc>
+                          <a:spcPct val="108000"/>
+                        </a:lnSpc>
+                      </a:pPr>
+                      <a:r>
+                        <a:rPr sz="1050" b="1">
+                          <a:solidFill>
+                            <a:srgbClr val="15201C"/>
+                          </a:solidFill>
+                          <a:latin typeface="Hanken Grotesk"/>
+                        </a:rPr>
+                        <a:t>Operational</a:t>
+                      </a:r>
+                    </a:p>
+                  </a:txBody>
+                  <a:tcPr marL="91440" marR="91440" marT="45720" marB="45720">
+                    <a:solidFill>
+                      <a:srgbClr val="FFFFFF"/>
+                    </a:solidFill>
+                  </a:tcPr>
+                </a:tc>
+                <a:tc>
+                  <a:txBody>
+                    <a:bodyPr wrap="square"/>
+                    <a:lstStyle/>
+                    <a:p>
+                      <a:pPr>
+                        <a:lnSpc>
+                          <a:spcPct val="108000"/>
+                        </a:lnSpc>
+                      </a:pPr>
+                      <a:r>
+                        <a:rPr sz="1050" b="0">
+                          <a:solidFill>
+                            <a:srgbClr val="6B7B73"/>
+                          </a:solidFill>
+                          <a:latin typeface="Hanken Grotesk"/>
+                        </a:rPr>
+                        <a:t>DynamoDB on-demand (10 tables)</a:t>
+                      </a:r>
+                    </a:p>
+                  </a:txBody>
+                  <a:tcPr marL="91440" marR="91440" marT="45720" marB="45720">
+                    <a:solidFill>
+                      <a:srgbClr val="FFFFFF"/>
+                    </a:solidFill>
+                  </a:tcPr>
+                </a:tc>
+                <a:tc>
+                  <a:txBody>
+                    <a:bodyPr wrap="square"/>
+                    <a:lstStyle/>
+                    <a:p>
+                      <a:pPr>
+                        <a:lnSpc>
+                          <a:spcPct val="108000"/>
+                        </a:lnSpc>
+                      </a:pPr>
+                      <a:r>
+                        <a:rPr sz="1050" b="0">
+                          <a:solidFill>
+                            <a:srgbClr val="6B7B73"/>
+                          </a:solidFill>
+                          <a:latin typeface="Hanken Grotesk"/>
+                        </a:rPr>
+                        <a:t>Viral bursts absorbed at $0 idle; access patterns modeled as projections (byOwner, byState GSIs)</a:t>
+                      </a:r>
+                    </a:p>
+                  </a:txBody>
+                  <a:tcPr marL="91440" marR="91440" marT="45720" marB="45720">
+                    <a:solidFill>
+                      <a:srgbClr val="FFFFFF"/>
+                    </a:solidFill>
+                  </a:tcPr>
+                </a:tc>
+                <a:tc>
+                  <a:txBody>
+                    <a:bodyPr wrap="square"/>
+                    <a:lstStyle/>
+                    <a:p>
+                      <a:pPr>
+                        <a:lnSpc>
+                          <a:spcPct val="108000"/>
+                        </a:lnSpc>
+                      </a:pPr>
+                      <a:r>
+                        <a:rPr sz="1050" b="0">
+                          <a:solidFill>
+                            <a:srgbClr val="6B7B73"/>
+                          </a:solidFill>
+                          <a:latin typeface="Hanken Grotesk"/>
+                        </a:rPr>
+                        <a:t>No joins, no ad-hoc queries; counters kept exact via same-table transactions</a:t>
+                      </a:r>
+                    </a:p>
+                  </a:txBody>
+                  <a:tcPr marL="91440" marR="91440" marT="45720" marB="45720">
+                    <a:solidFill>
+                      <a:srgbClr val="FFFFFF"/>
+                    </a:solidFill>
+                  </a:tcPr>
+                </a:tc>
+              </a:tr>
+            </a:tbl>
+          </a:graphicData>
+        </a:graphic>
+      </p:graphicFrame>
+      <p:sp>
+        <p:nvSpPr>
+          <p:cNvPr id="6" name="TextBox 5"/>
           <p:cNvSpPr txBox="1"/>
           <p:nvPr/>
         </p:nvSpPr>
         <p:spPr>
           <a:xfrm>
-            <a:off x="1316736" y="4389120"/>
-            <a:ext cx="1883664" cy="411480"/>
+            <a:off x="658368" y="5394960"/>
+            <a:ext cx="10881360" cy="822960"/>
           </a:xfrm>
           <a:prstGeom prst="rect">
             <a:avLst/>
@@ -19896,639 +19756,35 @@
           </a:bodyPr>
           <a:lstStyle/>
           <a:p>
-            <a:r>
-              <a:rPr sz="1250" b="1">
-                <a:solidFill>
-                  <a:srgbClr val="15201C"/>
-                </a:solidFill>
-                <a:latin typeface="Space Grotesk"/>
-              </a:rPr>
-              <a:t>PII in Cognito</a:t>
-            </a:r>
-          </a:p>
-        </p:txBody>
-      </p:sp>
-      <p:sp>
-        <p:nvSpPr>
-          <p:cNvPr id="11" name="TextBox 10"/>
-          <p:cNvSpPr txBox="1"/>
-          <p:nvPr/>
-        </p:nvSpPr>
-        <p:spPr>
-          <a:xfrm>
-            <a:off x="841247" y="4892040"/>
-            <a:ext cx="2340864" cy="1280160"/>
-          </a:xfrm>
-          <a:prstGeom prst="rect">
-            <a:avLst/>
-          </a:prstGeom>
-          <a:noFill/>
-        </p:spPr>
-        <p:txBody>
-          <a:bodyPr wrap="square">
-            <a:spAutoFit/>
-          </a:bodyPr>
-          <a:lstStyle/>
-          <a:p>
             <a:pPr>
               <a:lnSpc>
-                <a:spcPct val="112000"/>
+                <a:spcPct val="115000"/>
               </a:lnSpc>
             </a:pPr>
             <a:r>
-              <a:rPr sz="1050" b="0">
+              <a:rPr sz="1250" b="1">
+                <a:solidFill>
+                  <a:srgbClr val="15201C"/>
+                </a:solidFill>
+                <a:latin typeface="Hanken Grotesk"/>
+              </a:rPr>
+              <a:t>Deliberate constraint: </a:t>
+            </a:r>
+            <a:r>
+              <a:rPr sz="1250" b="0">
                 <a:solidFill>
                   <a:srgbClr val="6B7B73"/>
                 </a:solidFill>
                 <a:latin typeface="Hanken Grotesk"/>
               </a:rPr>
-              <a:t>Profile = ID-token claims; GDPR delete = one API call; the auth path never touches a database.</a:t>
-            </a:r>
-          </a:p>
-        </p:txBody>
-      </p:sp>
-      <p:sp>
-        <p:nvSpPr>
-          <p:cNvPr id="12" name="Rounded Rectangle 11"/>
-          <p:cNvSpPr/>
-          <p:nvPr/>
-        </p:nvSpPr>
-        <p:spPr>
-          <a:xfrm>
-            <a:off x="3511296" y="4224528"/>
-            <a:ext cx="2706624" cy="2011680"/>
-          </a:xfrm>
-          <a:prstGeom prst="roundRect">
-            <a:avLst>
-              <a:gd name="adj" fmla="val 5500"/>
-            </a:avLst>
-          </a:prstGeom>
-          <a:solidFill>
-            <a:srgbClr val="FFFFFF"/>
-          </a:solidFill>
-          <a:ln w="12700">
-            <a:solidFill>
-              <a:srgbClr val="E6EBE8"/>
-            </a:solidFill>
-          </a:ln>
-          <a:effectLst/>
-        </p:spPr>
-        <p:style>
-          <a:lnRef idx="1">
-            <a:schemeClr val="accent1"/>
-          </a:lnRef>
-          <a:fillRef idx="3">
-            <a:schemeClr val="accent1"/>
-          </a:fillRef>
-          <a:effectRef idx="2">
-            <a:schemeClr val="accent1"/>
-          </a:effectRef>
-          <a:fontRef idx="minor">
-            <a:schemeClr val="lt1"/>
-          </a:fontRef>
-        </p:style>
-        <p:txBody>
-          <a:bodyPr rtlCol="0" anchor="ctr" wrap="square" lIns="146304" rIns="146304" tIns="109728" bIns="109728"/>
-          <a:lstStyle/>
-          <a:p>
-            <a:pPr algn="ctr"/>
-          </a:p>
-        </p:txBody>
-      </p:sp>
-      <p:sp>
-        <p:nvSpPr>
-          <p:cNvPr id="13" name="Rounded Rectangle 12"/>
-          <p:cNvSpPr/>
-          <p:nvPr/>
-        </p:nvSpPr>
-        <p:spPr>
-          <a:xfrm>
-            <a:off x="3675887" y="4370832"/>
-            <a:ext cx="402336" cy="402336"/>
-          </a:xfrm>
-          <a:prstGeom prst="roundRect">
-            <a:avLst>
-              <a:gd name="adj" fmla="val 28000"/>
-            </a:avLst>
-          </a:prstGeom>
-          <a:solidFill>
-            <a:srgbClr val="E7F1EC"/>
-          </a:solidFill>
-          <a:ln w="12700">
-            <a:solidFill>
-              <a:srgbClr val="D2E3D9"/>
-            </a:solidFill>
-          </a:ln>
-          <a:effectLst/>
-        </p:spPr>
-        <p:style>
-          <a:lnRef idx="1">
-            <a:schemeClr val="accent1"/>
-          </a:lnRef>
-          <a:fillRef idx="3">
-            <a:schemeClr val="accent1"/>
-          </a:fillRef>
-          <a:effectRef idx="2">
-            <a:schemeClr val="accent1"/>
-          </a:effectRef>
-          <a:fontRef idx="minor">
-            <a:schemeClr val="lt1"/>
-          </a:fontRef>
-        </p:style>
-        <p:txBody>
-          <a:bodyPr rtlCol="0" anchor="ctr" wrap="square" lIns="146304" rIns="146304" tIns="109728" bIns="109728"/>
-          <a:lstStyle/>
-          <a:p>
-            <a:pPr algn="ctr"/>
-          </a:p>
-        </p:txBody>
-      </p:sp>
-      <p:pic>
-        <p:nvPicPr>
-          <p:cNvPr id="14" name="Picture 13" descr="receipt.png"/>
-          <p:cNvPicPr>
-            <a:picLocks noChangeAspect="1"/>
-          </p:cNvPicPr>
-          <p:nvPr/>
-        </p:nvPicPr>
-        <p:blipFill>
-          <a:blip r:embed="rId4"/>
-          <a:stretch>
-            <a:fillRect/>
-          </a:stretch>
-        </p:blipFill>
-        <p:spPr>
-          <a:xfrm>
-            <a:off x="3732215" y="4427159"/>
-            <a:ext cx="289681" cy="289681"/>
-          </a:xfrm>
-          <a:prstGeom prst="rect">
-            <a:avLst/>
-          </a:prstGeom>
-        </p:spPr>
-      </p:pic>
-      <p:sp>
-        <p:nvSpPr>
-          <p:cNvPr id="15" name="TextBox 14"/>
-          <p:cNvSpPr txBox="1"/>
-          <p:nvPr/>
-        </p:nvSpPr>
-        <p:spPr>
-          <a:xfrm>
-            <a:off x="4169663" y="4389120"/>
-            <a:ext cx="1883664" cy="411480"/>
-          </a:xfrm>
-          <a:prstGeom prst="rect">
-            <a:avLst/>
-          </a:prstGeom>
-          <a:noFill/>
-        </p:spPr>
-        <p:txBody>
-          <a:bodyPr wrap="square">
-            <a:spAutoFit/>
-          </a:bodyPr>
-          <a:lstStyle/>
-          <a:p>
-            <a:r>
-              <a:rPr sz="1250" b="1">
-                <a:solidFill>
-                  <a:srgbClr val="15201C"/>
-                </a:solidFill>
-                <a:latin typeface="Space Grotesk"/>
-              </a:rPr>
-              <a:t>Aurora = money only</a:t>
-            </a:r>
-          </a:p>
-        </p:txBody>
-      </p:sp>
-      <p:sp>
-        <p:nvSpPr>
-          <p:cNvPr id="16" name="TextBox 15"/>
-          <p:cNvSpPr txBox="1"/>
-          <p:nvPr/>
-        </p:nvSpPr>
-        <p:spPr>
-          <a:xfrm>
-            <a:off x="3694176" y="4892040"/>
-            <a:ext cx="2340864" cy="1280160"/>
-          </a:xfrm>
-          <a:prstGeom prst="rect">
-            <a:avLst/>
-          </a:prstGeom>
-          <a:noFill/>
-        </p:spPr>
-        <p:txBody>
-          <a:bodyPr wrap="square">
-            <a:spAutoFit/>
-          </a:bodyPr>
-          <a:lstStyle/>
-          <a:p>
-            <a:pPr>
-              <a:lnSpc>
-                <a:spcPct val="112000"/>
-              </a:lnSpc>
-            </a:pPr>
-            <a:r>
-              <a:rPr sz="1050" b="0">
-                <a:solidFill>
-                  <a:srgbClr val="6B7B73"/>
-                </a:solidFill>
-                <a:latin typeface="Hanken Grotesk"/>
-              </a:rPr>
-              <a:t>Append-only ledger + hash-chained audit; balances derived. GRANTs enforce: app_rw SELECTs, poller_writer INSERTs.</a:t>
-            </a:r>
-          </a:p>
-        </p:txBody>
-      </p:sp>
-      <p:sp>
-        <p:nvSpPr>
-          <p:cNvPr id="17" name="Rounded Rectangle 16"/>
-          <p:cNvSpPr/>
-          <p:nvPr/>
-        </p:nvSpPr>
-        <p:spPr>
-          <a:xfrm>
-            <a:off x="6364224" y="4224528"/>
-            <a:ext cx="2706624" cy="2011680"/>
-          </a:xfrm>
-          <a:prstGeom prst="roundRect">
-            <a:avLst>
-              <a:gd name="adj" fmla="val 5500"/>
-            </a:avLst>
-          </a:prstGeom>
-          <a:solidFill>
-            <a:srgbClr val="FFFFFF"/>
-          </a:solidFill>
-          <a:ln w="12700">
-            <a:solidFill>
-              <a:srgbClr val="E6EBE8"/>
-            </a:solidFill>
-          </a:ln>
-          <a:effectLst/>
-        </p:spPr>
-        <p:style>
-          <a:lnRef idx="1">
-            <a:schemeClr val="accent1"/>
-          </a:lnRef>
-          <a:fillRef idx="3">
-            <a:schemeClr val="accent1"/>
-          </a:fillRef>
-          <a:effectRef idx="2">
-            <a:schemeClr val="accent1"/>
-          </a:effectRef>
-          <a:fontRef idx="minor">
-            <a:schemeClr val="lt1"/>
-          </a:fontRef>
-        </p:style>
-        <p:txBody>
-          <a:bodyPr rtlCol="0" anchor="ctr" wrap="square" lIns="146304" rIns="146304" tIns="109728" bIns="109728"/>
-          <a:lstStyle/>
-          <a:p>
-            <a:pPr algn="ctr"/>
-          </a:p>
-        </p:txBody>
-      </p:sp>
-      <p:sp>
-        <p:nvSpPr>
-          <p:cNvPr id="18" name="Rounded Rectangle 17"/>
-          <p:cNvSpPr/>
-          <p:nvPr/>
-        </p:nvSpPr>
-        <p:spPr>
-          <a:xfrm>
-            <a:off x="6528816" y="4370832"/>
-            <a:ext cx="402336" cy="402336"/>
-          </a:xfrm>
-          <a:prstGeom prst="roundRect">
-            <a:avLst>
-              <a:gd name="adj" fmla="val 28000"/>
-            </a:avLst>
-          </a:prstGeom>
-          <a:solidFill>
-            <a:srgbClr val="E7F1EC"/>
-          </a:solidFill>
-          <a:ln w="12700">
-            <a:solidFill>
-              <a:srgbClr val="D2E3D9"/>
-            </a:solidFill>
-          </a:ln>
-          <a:effectLst/>
-        </p:spPr>
-        <p:style>
-          <a:lnRef idx="1">
-            <a:schemeClr val="accent1"/>
-          </a:lnRef>
-          <a:fillRef idx="3">
-            <a:schemeClr val="accent1"/>
-          </a:fillRef>
-          <a:effectRef idx="2">
-            <a:schemeClr val="accent1"/>
-          </a:effectRef>
-          <a:fontRef idx="minor">
-            <a:schemeClr val="lt1"/>
-          </a:fontRef>
-        </p:style>
-        <p:txBody>
-          <a:bodyPr rtlCol="0" anchor="ctr" wrap="square" lIns="146304" rIns="146304" tIns="109728" bIns="109728"/>
-          <a:lstStyle/>
-          <a:p>
-            <a:pPr algn="ctr"/>
-          </a:p>
-        </p:txBody>
-      </p:sp>
-      <p:pic>
-        <p:nvPicPr>
-          <p:cNvPr id="19" name="Picture 18" descr="grid.png"/>
-          <p:cNvPicPr>
-            <a:picLocks noChangeAspect="1"/>
-          </p:cNvPicPr>
-          <p:nvPr/>
-        </p:nvPicPr>
-        <p:blipFill>
-          <a:blip r:embed="rId5"/>
-          <a:stretch>
-            <a:fillRect/>
-          </a:stretch>
-        </p:blipFill>
-        <p:spPr>
-          <a:xfrm>
-            <a:off x="6585143" y="4427159"/>
-            <a:ext cx="289681" cy="289681"/>
-          </a:xfrm>
-          <a:prstGeom prst="rect">
-            <a:avLst/>
-          </a:prstGeom>
-        </p:spPr>
-      </p:pic>
-      <p:sp>
-        <p:nvSpPr>
-          <p:cNvPr id="20" name="TextBox 19"/>
-          <p:cNvSpPr txBox="1"/>
-          <p:nvPr/>
-        </p:nvSpPr>
-        <p:spPr>
-          <a:xfrm>
-            <a:off x="7022592" y="4389120"/>
-            <a:ext cx="1883664" cy="411480"/>
-          </a:xfrm>
-          <a:prstGeom prst="rect">
-            <a:avLst/>
-          </a:prstGeom>
-          <a:noFill/>
-        </p:spPr>
-        <p:txBody>
-          <a:bodyPr wrap="square">
-            <a:spAutoFit/>
-          </a:bodyPr>
-          <a:lstStyle/>
-          <a:p>
-            <a:r>
-              <a:rPr sz="1250" b="1">
-                <a:solidFill>
-                  <a:srgbClr val="15201C"/>
-                </a:solidFill>
-                <a:latin typeface="Space Grotesk"/>
-              </a:rPr>
-              <a:t>DynamoDB = the rest</a:t>
-            </a:r>
-          </a:p>
-        </p:txBody>
-      </p:sp>
-      <p:sp>
-        <p:nvSpPr>
-          <p:cNvPr id="21" name="TextBox 20"/>
-          <p:cNvSpPr txBox="1"/>
-          <p:nvPr/>
-        </p:nvSpPr>
-        <p:spPr>
-          <a:xfrm>
-            <a:off x="6547104" y="4892040"/>
-            <a:ext cx="2340864" cy="1280160"/>
-          </a:xfrm>
-          <a:prstGeom prst="rect">
-            <a:avLst/>
-          </a:prstGeom>
-          <a:noFill/>
-        </p:spPr>
-        <p:txBody>
-          <a:bodyPr wrap="square">
-            <a:spAutoFit/>
-          </a:bodyPr>
-          <a:lstStyle/>
-          <a:p>
-            <a:pPr>
-              <a:lnSpc>
-                <a:spcPct val="112000"/>
-              </a:lnSpc>
-            </a:pPr>
-            <a:r>
-              <a:rPr sz="1050" b="0">
-                <a:solidFill>
-                  <a:srgbClr val="6B7B73"/>
-                </a:solidFill>
-                <a:latin typeface="Hanken Grotesk"/>
-              </a:rPr>
-              <a:t>10 on-demand tables; $0 idle, unlimited burst.</a:t>
-            </a:r>
-          </a:p>
-        </p:txBody>
-      </p:sp>
-      <p:sp>
-        <p:nvSpPr>
-          <p:cNvPr id="22" name="Rounded Rectangle 21"/>
-          <p:cNvSpPr/>
-          <p:nvPr/>
-        </p:nvSpPr>
-        <p:spPr>
-          <a:xfrm>
-            <a:off x="9217152" y="4224528"/>
-            <a:ext cx="2706624" cy="2011680"/>
-          </a:xfrm>
-          <a:prstGeom prst="roundRect">
-            <a:avLst>
-              <a:gd name="adj" fmla="val 5500"/>
-            </a:avLst>
-          </a:prstGeom>
-          <a:solidFill>
-            <a:srgbClr val="FFFFFF"/>
-          </a:solidFill>
-          <a:ln w="12700">
-            <a:solidFill>
-              <a:srgbClr val="E6EBE8"/>
-            </a:solidFill>
-          </a:ln>
-          <a:effectLst/>
-        </p:spPr>
-        <p:style>
-          <a:lnRef idx="1">
-            <a:schemeClr val="accent1"/>
-          </a:lnRef>
-          <a:fillRef idx="3">
-            <a:schemeClr val="accent1"/>
-          </a:fillRef>
-          <a:effectRef idx="2">
-            <a:schemeClr val="accent1"/>
-          </a:effectRef>
-          <a:fontRef idx="minor">
-            <a:schemeClr val="lt1"/>
-          </a:fontRef>
-        </p:style>
-        <p:txBody>
-          <a:bodyPr rtlCol="0" anchor="ctr" wrap="square" lIns="146304" rIns="146304" tIns="109728" bIns="109728"/>
-          <a:lstStyle/>
-          <a:p>
-            <a:pPr algn="ctr"/>
-          </a:p>
-        </p:txBody>
-      </p:sp>
-      <p:sp>
-        <p:nvSpPr>
-          <p:cNvPr id="23" name="Rounded Rectangle 22"/>
-          <p:cNvSpPr/>
-          <p:nvPr/>
-        </p:nvSpPr>
-        <p:spPr>
-          <a:xfrm>
-            <a:off x="9381744" y="4370832"/>
-            <a:ext cx="402336" cy="402336"/>
-          </a:xfrm>
-          <a:prstGeom prst="roundRect">
-            <a:avLst>
-              <a:gd name="adj" fmla="val 28000"/>
-            </a:avLst>
-          </a:prstGeom>
-          <a:solidFill>
-            <a:srgbClr val="E7F1EC"/>
-          </a:solidFill>
-          <a:ln w="12700">
-            <a:solidFill>
-              <a:srgbClr val="D2E3D9"/>
-            </a:solidFill>
-          </a:ln>
-          <a:effectLst/>
-        </p:spPr>
-        <p:style>
-          <a:lnRef idx="1">
-            <a:schemeClr val="accent1"/>
-          </a:lnRef>
-          <a:fillRef idx="3">
-            <a:schemeClr val="accent1"/>
-          </a:fillRef>
-          <a:effectRef idx="2">
-            <a:schemeClr val="accent1"/>
-          </a:effectRef>
-          <a:fontRef idx="minor">
-            <a:schemeClr val="lt1"/>
-          </a:fontRef>
-        </p:style>
-        <p:txBody>
-          <a:bodyPr rtlCol="0" anchor="ctr" wrap="square" lIns="146304" rIns="146304" tIns="109728" bIns="109728"/>
-          <a:lstStyle/>
-          <a:p>
-            <a:pPr algn="ctr"/>
-          </a:p>
-        </p:txBody>
-      </p:sp>
-      <p:pic>
-        <p:nvPicPr>
-          <p:cNvPr id="24" name="Picture 23" descr="lock.png"/>
-          <p:cNvPicPr>
-            <a:picLocks noChangeAspect="1"/>
-          </p:cNvPicPr>
-          <p:nvPr/>
-        </p:nvPicPr>
-        <p:blipFill>
-          <a:blip r:embed="rId6"/>
-          <a:stretch>
-            <a:fillRect/>
-          </a:stretch>
-        </p:blipFill>
-        <p:spPr>
-          <a:xfrm>
-            <a:off x="9438071" y="4427159"/>
-            <a:ext cx="289681" cy="289681"/>
-          </a:xfrm>
-          <a:prstGeom prst="rect">
-            <a:avLst/>
-          </a:prstGeom>
-        </p:spPr>
-      </p:pic>
-      <p:sp>
-        <p:nvSpPr>
-          <p:cNvPr id="25" name="TextBox 24"/>
-          <p:cNvSpPr txBox="1"/>
-          <p:nvPr/>
-        </p:nvSpPr>
-        <p:spPr>
-          <a:xfrm>
-            <a:off x="9875520" y="4389120"/>
-            <a:ext cx="1883664" cy="411480"/>
-          </a:xfrm>
-          <a:prstGeom prst="rect">
-            <a:avLst/>
-          </a:prstGeom>
-          <a:noFill/>
-        </p:spPr>
-        <p:txBody>
-          <a:bodyPr wrap="square">
-            <a:spAutoFit/>
-          </a:bodyPr>
-          <a:lstStyle/>
-          <a:p>
-            <a:r>
-              <a:rPr sz="1250" b="1">
-                <a:solidFill>
-                  <a:srgbClr val="15201C"/>
-                </a:solidFill>
-                <a:latin typeface="Space Grotesk"/>
-              </a:rPr>
-              <a:t>No cross-table tx</a:t>
-            </a:r>
-          </a:p>
-        </p:txBody>
-      </p:sp>
-      <p:sp>
-        <p:nvSpPr>
-          <p:cNvPr id="26" name="TextBox 25"/>
-          <p:cNvSpPr txBox="1"/>
-          <p:nvPr/>
-        </p:nvSpPr>
-        <p:spPr>
-          <a:xfrm>
-            <a:off x="9400032" y="4892040"/>
-            <a:ext cx="2340864" cy="1280160"/>
-          </a:xfrm>
-          <a:prstGeom prst="rect">
-            <a:avLst/>
-          </a:prstGeom>
-          <a:noFill/>
-        </p:spPr>
-        <p:txBody>
-          <a:bodyPr wrap="square">
-            <a:spAutoFit/>
-          </a:bodyPr>
-          <a:lstStyle/>
-          <a:p>
-            <a:pPr>
-              <a:lnSpc>
-                <a:spcPct val="112000"/>
-              </a:lnSpc>
-            </a:pPr>
-            <a:r>
-              <a:rPr sz="1050" b="0">
-                <a:solidFill>
-                  <a:srgbClr val="6B7B73"/>
-                </a:solidFill>
-                <a:latin typeface="Hanken Grotesk"/>
-              </a:rPr>
-              <a:t>Counters live inside the counted table; ledger + audit are sequential idempotent appends.</a:t>
-            </a:r>
-          </a:p>
-        </p:txBody>
-      </p:sp>
-      <p:sp>
-        <p:nvSpPr>
-          <p:cNvPr id="27" name="Rectangle 26"/>
+              <a:t>no cross-table transactions exist anywhere — counter rows live inside the counted table (single-table TransactWriteItems), ledger + audit are sequential idempotent appends behind a unique (order_id, kind, status) index. Cross-store consistency is by keys and idempotency, not coordination.</a:t>
+            </a:r>
+          </a:p>
+        </p:txBody>
+      </p:sp>
+      <p:sp>
+        <p:nvSpPr>
+          <p:cNvPr id="7" name="Rectangle 6"/>
           <p:cNvSpPr/>
           <p:nvPr/>
         </p:nvSpPr>
@@ -20572,7 +19828,7 @@
       </p:sp>
       <p:sp>
         <p:nvSpPr>
-          <p:cNvPr id="28" name="TextBox 27"/>
+          <p:cNvPr id="8" name="TextBox 7"/>
           <p:cNvSpPr txBox="1"/>
           <p:nvPr/>
         </p:nvSpPr>
@@ -20615,7 +19871,7 @@
       </p:sp>
       <p:sp>
         <p:nvSpPr>
-          <p:cNvPr id="29" name="TextBox 28"/>
+          <p:cNvPr id="9" name="TextBox 8"/>
           <p:cNvSpPr txBox="1"/>
           <p:nvPr/>
         </p:nvSpPr>
@@ -20738,7 +19994,7 @@
                 </a:solidFill>
                 <a:latin typeface="Space Mono"/>
               </a:rPr>
-              <a:t>ENGINEERING</a:t>
+              <a:t>DECISIONS</a:t>
             </a:r>
           </a:p>
         </p:txBody>
@@ -20766,13 +20022,13 @@
           <a:lstStyle/>
           <a:p>
             <a:r>
-              <a:rPr sz="2700" b="1">
+              <a:rPr sz="2500" b="1">
                 <a:solidFill>
                   <a:srgbClr val="15201C"/>
                 </a:solidFill>
                 <a:latin typeface="Space Grotesk"/>
               </a:rPr>
-              <a:t>Auth without an auth service</a:t>
+              <a:t>Auth — three options, one deleted service</a:t>
             </a:r>
           </a:p>
         </p:txBody>
@@ -20785,8 +20041,8 @@
         </p:nvSpPr>
         <p:spPr>
           <a:xfrm>
-            <a:off x="685800" y="1828800"/>
-            <a:ext cx="3593592" cy="2084831"/>
+            <a:off x="658368" y="1783080"/>
+            <a:ext cx="3611880" cy="2651760"/>
           </a:xfrm>
           <a:prstGeom prst="roundRect">
             <a:avLst>
@@ -20794,7 +20050,7 @@
             </a:avLst>
           </a:prstGeom>
           <a:solidFill>
-            <a:srgbClr val="FFFFFF"/>
+            <a:srgbClr val="FAF3E6"/>
           </a:solidFill>
           <a:ln w="12700">
             <a:solidFill>
@@ -20827,86 +20083,14 @@
       </p:sp>
       <p:sp>
         <p:nvSpPr>
-          <p:cNvPr id="6" name="Rounded Rectangle 5"/>
-          <p:cNvSpPr/>
-          <p:nvPr/>
-        </p:nvSpPr>
-        <p:spPr>
-          <a:xfrm>
-            <a:off x="868680" y="2011680"/>
-            <a:ext cx="475488" cy="475488"/>
-          </a:xfrm>
-          <a:prstGeom prst="roundRect">
-            <a:avLst>
-              <a:gd name="adj" fmla="val 28000"/>
-            </a:avLst>
-          </a:prstGeom>
-          <a:solidFill>
-            <a:srgbClr val="E7F1EC"/>
-          </a:solidFill>
-          <a:ln w="12700">
-            <a:solidFill>
-              <a:srgbClr val="D2E3D9"/>
-            </a:solidFill>
-          </a:ln>
-          <a:effectLst/>
-        </p:spPr>
-        <p:style>
-          <a:lnRef idx="1">
-            <a:schemeClr val="accent1"/>
-          </a:lnRef>
-          <a:fillRef idx="3">
-            <a:schemeClr val="accent1"/>
-          </a:fillRef>
-          <a:effectRef idx="2">
-            <a:schemeClr val="accent1"/>
-          </a:effectRef>
-          <a:fontRef idx="minor">
-            <a:schemeClr val="lt1"/>
-          </a:fontRef>
-        </p:style>
-        <p:txBody>
-          <a:bodyPr rtlCol="0" anchor="ctr" wrap="square" lIns="146304" rIns="146304" tIns="109728" bIns="109728"/>
-          <a:lstStyle/>
-          <a:p>
-            <a:pPr algn="ctr"/>
-          </a:p>
-        </p:txBody>
-      </p:sp>
-      <p:pic>
-        <p:nvPicPr>
-          <p:cNvPr id="7" name="Picture 6" descr="key.png"/>
-          <p:cNvPicPr>
-            <a:picLocks noChangeAspect="1"/>
-          </p:cNvPicPr>
-          <p:nvPr/>
-        </p:nvPicPr>
-        <p:blipFill>
-          <a:blip r:embed="rId2"/>
-          <a:stretch>
-            <a:fillRect/>
-          </a:stretch>
-        </p:blipFill>
-        <p:spPr>
-          <a:xfrm>
-            <a:off x="935248" y="2078248"/>
-            <a:ext cx="342351" cy="342351"/>
-          </a:xfrm>
-          <a:prstGeom prst="rect">
-            <a:avLst/>
-          </a:prstGeom>
-        </p:spPr>
-      </p:pic>
-      <p:sp>
-        <p:nvSpPr>
-          <p:cNvPr id="8" name="TextBox 7"/>
+          <p:cNvPr id="6" name="TextBox 5"/>
           <p:cNvSpPr txBox="1"/>
           <p:nvPr/>
         </p:nvSpPr>
         <p:spPr>
           <a:xfrm>
-            <a:off x="1472184" y="2048256"/>
-            <a:ext cx="2679192" cy="457200"/>
+            <a:off x="841247" y="1920240"/>
+            <a:ext cx="3246120" cy="594360"/>
           </a:xfrm>
           <a:prstGeom prst="rect">
             <a:avLst/>
@@ -20920,27 +20104,36 @@
           <a:lstStyle/>
           <a:p>
             <a:r>
+              <a:rPr sz="1800" b="1">
+                <a:solidFill>
+                  <a:srgbClr val="B07A1E"/>
+                </a:solidFill>
+                <a:latin typeface="Space Grotesk"/>
+              </a:rPr>
+              <a:t>A  </a:t>
+            </a:r>
+            <a:r>
               <a:rPr sz="1350" b="1">
                 <a:solidFill>
                   <a:srgbClr val="15201C"/>
                 </a:solidFill>
                 <a:latin typeface="Space Grotesk"/>
               </a:rPr>
-              <a:t>Browser-direct</a:t>
-            </a:r>
-          </a:p>
-        </p:txBody>
-      </p:sp>
-      <p:sp>
-        <p:nvSpPr>
-          <p:cNvPr id="9" name="TextBox 8"/>
+              <a:t>Cognito Managed Login</a:t>
+            </a:r>
+          </a:p>
+        </p:txBody>
+      </p:sp>
+      <p:sp>
+        <p:nvSpPr>
+          <p:cNvPr id="7" name="TextBox 6"/>
           <p:cNvSpPr txBox="1"/>
           <p:nvPr/>
         </p:nvSpPr>
         <p:spPr>
           <a:xfrm>
-            <a:off x="886968" y="2633472"/>
-            <a:ext cx="3191256" cy="1124711"/>
+            <a:off x="841247" y="2514600"/>
+            <a:ext cx="3246120" cy="822960"/>
           </a:xfrm>
           <a:prstGeom prst="rect">
             <a:avLst/>
@@ -20955,31 +20148,70 @@
           <a:p>
             <a:pPr>
               <a:lnSpc>
-                <a:spcPct val="114000"/>
+                <a:spcPct val="110000"/>
               </a:lnSpc>
             </a:pPr>
             <a:r>
-              <a:rPr sz="1100" b="0">
+              <a:rPr sz="1050" b="0">
                 <a:solidFill>
                   <a:srgbClr val="6B7B73"/>
                 </a:solidFill>
                 <a:latin typeface="Hanken Grotesk"/>
               </a:rPr>
-              <a:t>The SPA calls the public Cognito API — SignUp, InitiateAuth, native WEB_AUTHN. Zero backend calls to log in; the first backend touch is GET /wallet.</a:t>
-            </a:r>
-          </a:p>
-        </p:txBody>
-      </p:sp>
-      <p:sp>
-        <p:nvSpPr>
-          <p:cNvPr id="10" name="Rounded Rectangle 9"/>
+              <a:t>Hosted pages, PKCE — zero auth code to own</a:t>
+            </a:r>
+          </a:p>
+        </p:txBody>
+      </p:sp>
+      <p:sp>
+        <p:nvSpPr>
+          <p:cNvPr id="8" name="TextBox 7"/>
+          <p:cNvSpPr txBox="1"/>
+          <p:nvPr/>
+        </p:nvSpPr>
+        <p:spPr>
+          <a:xfrm>
+            <a:off x="841247" y="3429000"/>
+            <a:ext cx="3246120" cy="960120"/>
+          </a:xfrm>
+          <a:prstGeom prst="rect">
+            <a:avLst/>
+          </a:prstGeom>
+          <a:noFill/>
+        </p:spPr>
+        <p:txBody>
+          <a:bodyPr wrap="square">
+            <a:spAutoFit/>
+          </a:bodyPr>
+          <a:lstStyle/>
+          <a:p>
+            <a:pPr>
+              <a:lnSpc>
+                <a:spcPct val="110000"/>
+              </a:lnSpc>
+            </a:pPr>
+            <a:r>
+              <a:rPr sz="1050" b="0">
+                <a:solidFill>
+                  <a:srgbClr val="15201C"/>
+                </a:solidFill>
+                <a:latin typeface="Hanken Grotesk"/>
+              </a:rPr>
+              <a:t>REJECTED: no Hebrew/RTL (12 locales, text not editable); passkey RP-ID forced to the auth subdomain — credentials siloed off wanthat.app</a:t>
+            </a:r>
+          </a:p>
+        </p:txBody>
+      </p:sp>
+      <p:sp>
+        <p:nvSpPr>
+          <p:cNvPr id="9" name="Rounded Rectangle 8"/>
           <p:cNvSpPr/>
           <p:nvPr/>
         </p:nvSpPr>
         <p:spPr>
           <a:xfrm>
-            <a:off x="4480560" y="1828800"/>
-            <a:ext cx="3593592" cy="2084831"/>
+            <a:off x="4434840" y="1783080"/>
+            <a:ext cx="3611880" cy="2651760"/>
           </a:xfrm>
           <a:prstGeom prst="roundRect">
             <a:avLst>
@@ -20987,7 +20219,7 @@
             </a:avLst>
           </a:prstGeom>
           <a:solidFill>
-            <a:srgbClr val="FFFFFF"/>
+            <a:srgbClr val="E7F1EC"/>
           </a:solidFill>
           <a:ln w="12700">
             <a:solidFill>
@@ -21020,86 +20252,14 @@
       </p:sp>
       <p:sp>
         <p:nvSpPr>
-          <p:cNvPr id="11" name="Rounded Rectangle 10"/>
-          <p:cNvSpPr/>
-          <p:nvPr/>
-        </p:nvSpPr>
-        <p:spPr>
-          <a:xfrm>
-            <a:off x="4663440" y="2011680"/>
-            <a:ext cx="475488" cy="475488"/>
-          </a:xfrm>
-          <a:prstGeom prst="roundRect">
-            <a:avLst>
-              <a:gd name="adj" fmla="val 28000"/>
-            </a:avLst>
-          </a:prstGeom>
-          <a:solidFill>
-            <a:srgbClr val="E7F1EC"/>
-          </a:solidFill>
-          <a:ln w="12700">
-            <a:solidFill>
-              <a:srgbClr val="D2E3D9"/>
-            </a:solidFill>
-          </a:ln>
-          <a:effectLst/>
-        </p:spPr>
-        <p:style>
-          <a:lnRef idx="1">
-            <a:schemeClr val="accent1"/>
-          </a:lnRef>
-          <a:fillRef idx="3">
-            <a:schemeClr val="accent1"/>
-          </a:fillRef>
-          <a:effectRef idx="2">
-            <a:schemeClr val="accent1"/>
-          </a:effectRef>
-          <a:fontRef idx="minor">
-            <a:schemeClr val="lt1"/>
-          </a:fontRef>
-        </p:style>
-        <p:txBody>
-          <a:bodyPr rtlCol="0" anchor="ctr" wrap="square" lIns="146304" rIns="146304" tIns="109728" bIns="109728"/>
-          <a:lstStyle/>
-          <a:p>
-            <a:pPr algn="ctr"/>
-          </a:p>
-        </p:txBody>
-      </p:sp>
-      <p:pic>
-        <p:nvPicPr>
-          <p:cNvPr id="12" name="Picture 11" descr="phone.png"/>
-          <p:cNvPicPr>
-            <a:picLocks noChangeAspect="1"/>
-          </p:cNvPicPr>
-          <p:nvPr/>
-        </p:nvPicPr>
-        <p:blipFill>
-          <a:blip r:embed="rId3"/>
-          <a:stretch>
-            <a:fillRect/>
-          </a:stretch>
-        </p:blipFill>
-        <p:spPr>
-          <a:xfrm>
-            <a:off x="4730008" y="2078248"/>
-            <a:ext cx="342351" cy="342351"/>
-          </a:xfrm>
-          <a:prstGeom prst="rect">
-            <a:avLst/>
-          </a:prstGeom>
-        </p:spPr>
-      </p:pic>
-      <p:sp>
-        <p:nvSpPr>
-          <p:cNvPr id="13" name="TextBox 12"/>
+          <p:cNvPr id="10" name="TextBox 9"/>
           <p:cNvSpPr txBox="1"/>
           <p:nvPr/>
         </p:nvSpPr>
         <p:spPr>
           <a:xfrm>
-            <a:off x="5266944" y="2048256"/>
-            <a:ext cx="2679192" cy="457200"/>
+            <a:off x="4617720" y="1920240"/>
+            <a:ext cx="3246120" cy="594360"/>
           </a:xfrm>
           <a:prstGeom prst="rect">
             <a:avLst/>
@@ -21113,27 +20273,36 @@
           <a:lstStyle/>
           <a:p>
             <a:r>
+              <a:rPr sz="1800" b="1">
+                <a:solidFill>
+                  <a:srgbClr val="1F7A57"/>
+                </a:solidFill>
+                <a:latin typeface="Space Grotesk"/>
+              </a:rPr>
+              <a:t>B  </a:t>
+            </a:r>
+            <a:r>
               <a:rPr sz="1350" b="1">
                 <a:solidFill>
                   <a:srgbClr val="15201C"/>
                 </a:solidFill>
                 <a:latin typeface="Space Grotesk"/>
               </a:rPr>
-              <a:t>OTP, kill-switched</a:t>
-            </a:r>
-          </a:p>
-        </p:txBody>
-      </p:sp>
-      <p:sp>
-        <p:nvSpPr>
-          <p:cNvPr id="14" name="TextBox 13"/>
+              <a:t>Cognito-native, own UI</a:t>
+            </a:r>
+          </a:p>
+        </p:txBody>
+      </p:sp>
+      <p:sp>
+        <p:nvSpPr>
+          <p:cNvPr id="11" name="TextBox 10"/>
           <p:cNvSpPr txBox="1"/>
           <p:nvPr/>
         </p:nvSpPr>
         <p:spPr>
           <a:xfrm>
-            <a:off x="4681728" y="2633472"/>
-            <a:ext cx="3191256" cy="1124711"/>
+            <a:off x="4617720" y="2514600"/>
+            <a:ext cx="3246120" cy="822960"/>
           </a:xfrm>
           <a:prstGeom prst="rect">
             <a:avLst/>
@@ -21148,31 +20317,70 @@
           <a:p>
             <a:pPr>
               <a:lnSpc>
-                <a:spcPct val="114000"/>
+                <a:spcPct val="110000"/>
               </a:lnSpc>
             </a:pPr>
             <a:r>
-              <a:rPr sz="1100" b="0">
+              <a:rPr sz="1050" b="0">
                 <a:solidFill>
                   <a:srgbClr val="6B7B73"/>
                 </a:solidFill>
                 <a:latin typeface="Hanken Grotesk"/>
               </a:rPr>
-              <a:t>WhatsApp-default / SMS-fallback via the custom-sender Lambda — sticky preference, runtime-config kill switches, hard SMS spend cap.</a:t>
-            </a:r>
-          </a:p>
-        </p:txBody>
-      </p:sp>
-      <p:sp>
-        <p:nvSpPr>
-          <p:cNvPr id="15" name="Rounded Rectangle 14"/>
+              <a:t>Browser calls SignUp / InitiateAuth / WEB_AUTHN directly; profile = ID-token claims</a:t>
+            </a:r>
+          </a:p>
+        </p:txBody>
+      </p:sp>
+      <p:sp>
+        <p:nvSpPr>
+          <p:cNvPr id="12" name="TextBox 11"/>
+          <p:cNvSpPr txBox="1"/>
+          <p:nvPr/>
+        </p:nvSpPr>
+        <p:spPr>
+          <a:xfrm>
+            <a:off x="4617720" y="3429000"/>
+            <a:ext cx="3246120" cy="960120"/>
+          </a:xfrm>
+          <a:prstGeom prst="rect">
+            <a:avLst/>
+          </a:prstGeom>
+          <a:noFill/>
+        </p:spPr>
+        <p:txBody>
+          <a:bodyPr wrap="square">
+            <a:spAutoFit/>
+          </a:bodyPr>
+          <a:lstStyle/>
+          <a:p>
+            <a:pPr>
+              <a:lnSpc>
+                <a:spcPct val="110000"/>
+              </a:lnSpc>
+            </a:pPr>
+            <a:r>
+              <a:rPr sz="1050" b="0">
+                <a:solidFill>
+                  <a:srgbClr val="15201C"/>
+                </a:solidFill>
+                <a:latin typeface="Hanken Grotesk"/>
+              </a:rPr>
+              <a:t>CHOSEN: zero backend calls to authenticate; full RTL UI; pool WAF + quotas as abuse control</a:t>
+            </a:r>
+          </a:p>
+        </p:txBody>
+      </p:sp>
+      <p:sp>
+        <p:nvSpPr>
+          <p:cNvPr id="13" name="Rounded Rectangle 12"/>
           <p:cNvSpPr/>
           <p:nvPr/>
         </p:nvSpPr>
         <p:spPr>
           <a:xfrm>
-            <a:off x="8275320" y="1828800"/>
-            <a:ext cx="3593592" cy="2084831"/>
+            <a:off x="8211312" y="1783080"/>
+            <a:ext cx="3611880" cy="2651760"/>
           </a:xfrm>
           <a:prstGeom prst="roundRect">
             <a:avLst>
@@ -21180,7 +20388,7 @@
             </a:avLst>
           </a:prstGeom>
           <a:solidFill>
-            <a:srgbClr val="FFFFFF"/>
+            <a:srgbClr val="F4F6F5"/>
           </a:solidFill>
           <a:ln w="12700">
             <a:solidFill>
@@ -21213,86 +20421,14 @@
       </p:sp>
       <p:sp>
         <p:nvSpPr>
-          <p:cNvPr id="16" name="Rounded Rectangle 15"/>
-          <p:cNvSpPr/>
-          <p:nvPr/>
-        </p:nvSpPr>
-        <p:spPr>
-          <a:xfrm>
-            <a:off x="8458200" y="2011680"/>
-            <a:ext cx="475488" cy="475488"/>
-          </a:xfrm>
-          <a:prstGeom prst="roundRect">
-            <a:avLst>
-              <a:gd name="adj" fmla="val 28000"/>
-            </a:avLst>
-          </a:prstGeom>
-          <a:solidFill>
-            <a:srgbClr val="E7F1EC"/>
-          </a:solidFill>
-          <a:ln w="12700">
-            <a:solidFill>
-              <a:srgbClr val="D2E3D9"/>
-            </a:solidFill>
-          </a:ln>
-          <a:effectLst/>
-        </p:spPr>
-        <p:style>
-          <a:lnRef idx="1">
-            <a:schemeClr val="accent1"/>
-          </a:lnRef>
-          <a:fillRef idx="3">
-            <a:schemeClr val="accent1"/>
-          </a:fillRef>
-          <a:effectRef idx="2">
-            <a:schemeClr val="accent1"/>
-          </a:effectRef>
-          <a:fontRef idx="minor">
-            <a:schemeClr val="lt1"/>
-          </a:fontRef>
-        </p:style>
-        <p:txBody>
-          <a:bodyPr rtlCol="0" anchor="ctr" wrap="square" lIns="146304" rIns="146304" tIns="109728" bIns="109728"/>
-          <a:lstStyle/>
-          <a:p>
-            <a:pPr algn="ctr"/>
-          </a:p>
-        </p:txBody>
-      </p:sp>
-      <p:pic>
-        <p:nvPicPr>
-          <p:cNvPr id="17" name="Picture 16" descr="facescan.png"/>
-          <p:cNvPicPr>
-            <a:picLocks noChangeAspect="1"/>
-          </p:cNvPicPr>
-          <p:nvPr/>
-        </p:nvPicPr>
-        <p:blipFill>
-          <a:blip r:embed="rId4"/>
-          <a:stretch>
-            <a:fillRect/>
-          </a:stretch>
-        </p:blipFill>
-        <p:spPr>
-          <a:xfrm>
-            <a:off x="8524768" y="2078248"/>
-            <a:ext cx="342351" cy="342351"/>
-          </a:xfrm>
-          <a:prstGeom prst="rect">
-            <a:avLst/>
-          </a:prstGeom>
-        </p:spPr>
-      </p:pic>
-      <p:sp>
-        <p:nvSpPr>
-          <p:cNvPr id="18" name="TextBox 17"/>
+          <p:cNvPr id="14" name="TextBox 13"/>
           <p:cNvSpPr txBox="1"/>
           <p:nvPr/>
         </p:nvSpPr>
         <p:spPr>
           <a:xfrm>
-            <a:off x="9061704" y="2048256"/>
-            <a:ext cx="2679192" cy="457200"/>
+            <a:off x="8394192" y="1920240"/>
+            <a:ext cx="3246120" cy="594360"/>
           </a:xfrm>
           <a:prstGeom prst="rect">
             <a:avLst/>
@@ -21306,27 +20442,36 @@
           <a:lstStyle/>
           <a:p>
             <a:r>
+              <a:rPr sz="1800" b="1">
+                <a:solidFill>
+                  <a:srgbClr val="6B7B73"/>
+                </a:solidFill>
+                <a:latin typeface="Space Grotesk"/>
+              </a:rPr>
+              <a:t>C  </a:t>
+            </a:r>
+            <a:r>
               <a:rPr sz="1350" b="1">
                 <a:solidFill>
                   <a:srgbClr val="15201C"/>
                 </a:solidFill>
                 <a:latin typeface="Space Grotesk"/>
               </a:rPr>
-              <a:t>Face ID</a:t>
-            </a:r>
-          </a:p>
-        </p:txBody>
-      </p:sp>
-      <p:sp>
-        <p:nvSpPr>
-          <p:cNvPr id="19" name="TextBox 18"/>
+              <a:t>App-owned ceremonies</a:t>
+            </a:r>
+          </a:p>
+        </p:txBody>
+      </p:sp>
+      <p:sp>
+        <p:nvSpPr>
+          <p:cNvPr id="15" name="TextBox 14"/>
           <p:cNvSpPr txBox="1"/>
           <p:nvPr/>
         </p:nvSpPr>
         <p:spPr>
           <a:xfrm>
-            <a:off x="8476488" y="2633472"/>
-            <a:ext cx="3191256" cy="1124711"/>
+            <a:off x="8394192" y="2514600"/>
+            <a:ext cx="3246120" cy="822960"/>
           </a:xfrm>
           <a:prstGeom prst="rect">
             <a:avLst/>
@@ -21341,151 +20486,31 @@
           <a:p>
             <a:pPr>
               <a:lnSpc>
-                <a:spcPct val="114000"/>
+                <a:spcPct val="110000"/>
               </a:lnSpc>
             </a:pPr>
             <a:r>
-              <a:rPr sz="1100" b="0">
+              <a:rPr sz="1050" b="0">
                 <a:solidFill>
                   <a:srgbClr val="6B7B73"/>
                 </a:solidFill>
                 <a:latin typeface="Hanken Grotesk"/>
               </a:rPr>
-              <a:t>One-prompt Cognito-native passkey on returning devices (remembered phone).</a:t>
-            </a:r>
-          </a:p>
-        </p:txBody>
-      </p:sp>
-      <p:sp>
-        <p:nvSpPr>
-          <p:cNvPr id="20" name="Rounded Rectangle 19"/>
-          <p:cNvSpPr/>
-          <p:nvPr/>
-        </p:nvSpPr>
-        <p:spPr>
-          <a:xfrm>
-            <a:off x="685800" y="4041648"/>
-            <a:ext cx="3593592" cy="2084831"/>
-          </a:xfrm>
-          <a:prstGeom prst="roundRect">
-            <a:avLst>
-              <a:gd name="adj" fmla="val 5500"/>
-            </a:avLst>
-          </a:prstGeom>
-          <a:solidFill>
-            <a:srgbClr val="FFFFFF"/>
-          </a:solidFill>
-          <a:ln w="12700">
-            <a:solidFill>
-              <a:srgbClr val="E6EBE8"/>
-            </a:solidFill>
-          </a:ln>
-          <a:effectLst/>
-        </p:spPr>
-        <p:style>
-          <a:lnRef idx="1">
-            <a:schemeClr val="accent1"/>
-          </a:lnRef>
-          <a:fillRef idx="3">
-            <a:schemeClr val="accent1"/>
-          </a:fillRef>
-          <a:effectRef idx="2">
-            <a:schemeClr val="accent1"/>
-          </a:effectRef>
-          <a:fontRef idx="minor">
-            <a:schemeClr val="lt1"/>
-          </a:fontRef>
-        </p:style>
-        <p:txBody>
-          <a:bodyPr rtlCol="0" anchor="ctr" wrap="square" lIns="146304" rIns="146304" tIns="109728" bIns="109728"/>
-          <a:lstStyle/>
-          <a:p>
-            <a:pPr algn="ctr"/>
-          </a:p>
-        </p:txBody>
-      </p:sp>
-      <p:sp>
-        <p:nvSpPr>
-          <p:cNvPr id="21" name="Rounded Rectangle 20"/>
-          <p:cNvSpPr/>
-          <p:nvPr/>
-        </p:nvSpPr>
-        <p:spPr>
-          <a:xfrm>
-            <a:off x="868680" y="4224528"/>
-            <a:ext cx="475488" cy="475488"/>
-          </a:xfrm>
-          <a:prstGeom prst="roundRect">
-            <a:avLst>
-              <a:gd name="adj" fmla="val 28000"/>
-            </a:avLst>
-          </a:prstGeom>
-          <a:solidFill>
-            <a:srgbClr val="E7F1EC"/>
-          </a:solidFill>
-          <a:ln w="12700">
-            <a:solidFill>
-              <a:srgbClr val="D2E3D9"/>
-            </a:solidFill>
-          </a:ln>
-          <a:effectLst/>
-        </p:spPr>
-        <p:style>
-          <a:lnRef idx="1">
-            <a:schemeClr val="accent1"/>
-          </a:lnRef>
-          <a:fillRef idx="3">
-            <a:schemeClr val="accent1"/>
-          </a:fillRef>
-          <a:effectRef idx="2">
-            <a:schemeClr val="accent1"/>
-          </a:effectRef>
-          <a:fontRef idx="minor">
-            <a:schemeClr val="lt1"/>
-          </a:fontRef>
-        </p:style>
-        <p:txBody>
-          <a:bodyPr rtlCol="0" anchor="ctr" wrap="square" lIns="146304" rIns="146304" tIns="109728" bIns="109728"/>
-          <a:lstStyle/>
-          <a:p>
-            <a:pPr algn="ctr"/>
-          </a:p>
-        </p:txBody>
-      </p:sp>
-      <p:pic>
-        <p:nvPicPr>
-          <p:cNvPr id="22" name="Picture 21" descr="shield.png"/>
-          <p:cNvPicPr>
-            <a:picLocks noChangeAspect="1"/>
-          </p:cNvPicPr>
-          <p:nvPr/>
-        </p:nvPicPr>
-        <p:blipFill>
-          <a:blip r:embed="rId5"/>
-          <a:stretch>
-            <a:fillRect/>
-          </a:stretch>
-        </p:blipFill>
-        <p:spPr>
-          <a:xfrm>
-            <a:off x="935248" y="4291096"/>
-            <a:ext cx="342351" cy="342351"/>
-          </a:xfrm>
-          <a:prstGeom prst="rect">
-            <a:avLst/>
-          </a:prstGeom>
-        </p:spPr>
-      </p:pic>
-      <p:sp>
-        <p:nvSpPr>
-          <p:cNvPr id="23" name="TextBox 22"/>
+              <a:t>Proxy every OTP step, own WebAuthn store, Ed25519 ticket bridge, AdminSetUserPassword exchange</a:t>
+            </a:r>
+          </a:p>
+        </p:txBody>
+      </p:sp>
+      <p:sp>
+        <p:nvSpPr>
+          <p:cNvPr id="16" name="TextBox 15"/>
           <p:cNvSpPr txBox="1"/>
           <p:nvPr/>
         </p:nvSpPr>
         <p:spPr>
           <a:xfrm>
-            <a:off x="1472184" y="4261104"/>
-            <a:ext cx="2679192" cy="457200"/>
+            <a:off x="8394192" y="3429000"/>
+            <a:ext cx="3246120" cy="960120"/>
           </a:xfrm>
           <a:prstGeom prst="rect">
             <a:avLst/>
@@ -21498,28 +20523,33 @@
           </a:bodyPr>
           <a:lstStyle/>
           <a:p>
-            <a:r>
-              <a:rPr sz="1350" b="1">
+            <a:pPr>
+              <a:lnSpc>
+                <a:spcPct val="110000"/>
+              </a:lnSpc>
+            </a:pPr>
+            <a:r>
+              <a:rPr sz="1050" b="0">
                 <a:solidFill>
                   <a:srgbClr val="15201C"/>
                 </a:solidFill>
-                <a:latin typeface="Space Grotesk"/>
-              </a:rPr>
-              <a:t>Pool-boundary abuse control</a:t>
-            </a:r>
-          </a:p>
-        </p:txBody>
-      </p:sp>
-      <p:sp>
-        <p:nvSpPr>
-          <p:cNvPr id="24" name="TextBox 23"/>
+                <a:latin typeface="Hanken Grotesk"/>
+              </a:rPr>
+              <a:t>BUILT, THEN DELETED: 2 Lambdas + 3 tables + a crypto path bought ONE feature - userless Face ID. Requirement waived, cost column deleted</a:t>
+            </a:r>
+          </a:p>
+        </p:txBody>
+      </p:sp>
+      <p:sp>
+        <p:nvSpPr>
+          <p:cNvPr id="17" name="TextBox 16"/>
           <p:cNvSpPr txBox="1"/>
           <p:nvPr/>
         </p:nvSpPr>
         <p:spPr>
           <a:xfrm>
-            <a:off x="886968" y="4846320"/>
-            <a:ext cx="3191256" cy="1124711"/>
+            <a:off x="658368" y="4709160"/>
+            <a:ext cx="10881360" cy="1463040"/>
           </a:xfrm>
           <a:prstGeom prst="rect">
             <a:avLst/>
@@ -21534,266 +20564,64 @@
           <a:p>
             <a:pPr>
               <a:lnSpc>
-                <a:spcPct val="114000"/>
+                <a:spcPct val="115000"/>
               </a:lnSpc>
+              <a:spcAft>
+                <a:spcPts val="600"/>
+              </a:spcAft>
             </a:pPr>
             <a:r>
-              <a:rPr sz="1100" b="0">
+              <a:rPr sz="1250" b="1">
+                <a:solidFill>
+                  <a:srgbClr val="15201C"/>
+                </a:solidFill>
+                <a:latin typeface="Hanken Grotesk"/>
+              </a:rPr>
+              <a:t>Trade-offs signed off with B: </a:t>
+            </a:r>
+            <a:r>
+              <a:rPr sz="1250" b="0">
                 <a:solidFill>
                   <a:srgbClr val="6B7B73"/>
                 </a:solidFill>
                 <a:latin typeface="Hanken Grotesk"/>
               </a:rPr>
-              <a:t>WAF rate rules on the unauthenticated Cognito operations + quotas — no app-side velocity tables.</a:t>
-            </a:r>
-          </a:p>
-        </p:txBody>
-      </p:sp>
-      <p:sp>
-        <p:nvSpPr>
-          <p:cNvPr id="25" name="Rounded Rectangle 24"/>
-          <p:cNvSpPr/>
-          <p:nvPr/>
-        </p:nvSpPr>
-        <p:spPr>
-          <a:xfrm>
-            <a:off x="4480560" y="4041648"/>
-            <a:ext cx="3593592" cy="2084831"/>
-          </a:xfrm>
-          <a:prstGeom prst="roundRect">
-            <a:avLst>
-              <a:gd name="adj" fmla="val 5500"/>
-            </a:avLst>
-          </a:prstGeom>
-          <a:solidFill>
-            <a:srgbClr val="FFFFFF"/>
-          </a:solidFill>
-          <a:ln w="12700">
-            <a:solidFill>
-              <a:srgbClr val="E6EBE8"/>
-            </a:solidFill>
-          </a:ln>
-          <a:effectLst/>
-        </p:spPr>
-        <p:style>
-          <a:lnRef idx="1">
-            <a:schemeClr val="accent1"/>
-          </a:lnRef>
-          <a:fillRef idx="3">
-            <a:schemeClr val="accent1"/>
-          </a:fillRef>
-          <a:effectRef idx="2">
-            <a:schemeClr val="accent1"/>
-          </a:effectRef>
-          <a:fontRef idx="minor">
-            <a:schemeClr val="lt1"/>
-          </a:fontRef>
-        </p:style>
-        <p:txBody>
-          <a:bodyPr rtlCol="0" anchor="ctr" wrap="square" lIns="146304" rIns="146304" tIns="109728" bIns="109728"/>
-          <a:lstStyle/>
-          <a:p>
-            <a:pPr algn="ctr"/>
-          </a:p>
-        </p:txBody>
-      </p:sp>
-      <p:sp>
-        <p:nvSpPr>
-          <p:cNvPr id="26" name="Rounded Rectangle 25"/>
-          <p:cNvSpPr/>
-          <p:nvPr/>
-        </p:nvSpPr>
-        <p:spPr>
-          <a:xfrm>
-            <a:off x="4663440" y="4224528"/>
-            <a:ext cx="475488" cy="475488"/>
-          </a:xfrm>
-          <a:prstGeom prst="roundRect">
-            <a:avLst>
-              <a:gd name="adj" fmla="val 28000"/>
-            </a:avLst>
-          </a:prstGeom>
-          <a:solidFill>
-            <a:srgbClr val="E7F1EC"/>
-          </a:solidFill>
-          <a:ln w="12700">
-            <a:solidFill>
-              <a:srgbClr val="D2E3D9"/>
-            </a:solidFill>
-          </a:ln>
-          <a:effectLst/>
-        </p:spPr>
-        <p:style>
-          <a:lnRef idx="1">
-            <a:schemeClr val="accent1"/>
-          </a:lnRef>
-          <a:fillRef idx="3">
-            <a:schemeClr val="accent1"/>
-          </a:fillRef>
-          <a:effectRef idx="2">
-            <a:schemeClr val="accent1"/>
-          </a:effectRef>
-          <a:fontRef idx="minor">
-            <a:schemeClr val="lt1"/>
-          </a:fontRef>
-        </p:style>
-        <p:txBody>
-          <a:bodyPr rtlCol="0" anchor="ctr" wrap="square" lIns="146304" rIns="146304" tIns="109728" bIns="109728"/>
-          <a:lstStyle/>
-          <a:p>
-            <a:pPr algn="ctr"/>
-          </a:p>
-        </p:txBody>
-      </p:sp>
-      <p:pic>
-        <p:nvPicPr>
-          <p:cNvPr id="27" name="Picture 26" descr="briefcase.png"/>
-          <p:cNvPicPr>
-            <a:picLocks noChangeAspect="1"/>
-          </p:cNvPicPr>
-          <p:nvPr/>
-        </p:nvPicPr>
-        <p:blipFill>
-          <a:blip r:embed="rId6"/>
-          <a:stretch>
-            <a:fillRect/>
-          </a:stretch>
-        </p:blipFill>
-        <p:spPr>
-          <a:xfrm>
-            <a:off x="4730008" y="4291096"/>
-            <a:ext cx="342351" cy="342351"/>
-          </a:xfrm>
-          <a:prstGeom prst="rect">
-            <a:avLst/>
-          </a:prstGeom>
-        </p:spPr>
-      </p:pic>
-      <p:sp>
-        <p:nvSpPr>
-          <p:cNvPr id="28" name="TextBox 27"/>
-          <p:cNvSpPr txBox="1"/>
-          <p:nvPr/>
-        </p:nvSpPr>
-        <p:spPr>
-          <a:xfrm>
-            <a:off x="5266944" y="4261104"/>
-            <a:ext cx="2679192" cy="457200"/>
-          </a:xfrm>
-          <a:prstGeom prst="rect">
-            <a:avLst/>
-          </a:prstGeom>
-          <a:noFill/>
-        </p:spPr>
-        <p:txBody>
-          <a:bodyPr wrap="square">
-            <a:spAutoFit/>
-          </a:bodyPr>
-          <a:lstStyle/>
-          <a:p>
-            <a:r>
-              <a:rPr sz="1350" b="1">
-                <a:solidFill>
-                  <a:srgbClr val="15201C"/>
-                </a:solidFill>
-                <a:latin typeface="Space Grotesk"/>
-              </a:rPr>
-              <a:t>Separate admin pool</a:t>
-            </a:r>
-          </a:p>
-        </p:txBody>
-      </p:sp>
-      <p:sp>
-        <p:nvSpPr>
-          <p:cNvPr id="29" name="TextBox 28"/>
-          <p:cNvSpPr txBox="1"/>
-          <p:nvPr/>
-        </p:nvSpPr>
-        <p:spPr>
-          <a:xfrm>
-            <a:off x="4681728" y="4846320"/>
-            <a:ext cx="3191256" cy="1124711"/>
-          </a:xfrm>
-          <a:prstGeom prst="rect">
-            <a:avLst/>
-          </a:prstGeom>
-          <a:noFill/>
-        </p:spPr>
-        <p:txBody>
-          <a:bodyPr wrap="square">
-            <a:spAutoFit/>
-          </a:bodyPr>
-          <a:lstStyle/>
+              <a:t>userless Face ID waived (remembered-phone one-prompt kept); phone enumeration accepted (preventUserExistenceErrors LEGACY) - mitigated by pool WAF rate rules; JWT revocation lags up to 1 h on our APIs (stateless authorizer) - acceptable while the only member surface is a read-only wallet.</a:t>
+            </a:r>
+          </a:p>
           <a:p>
             <a:pPr>
               <a:lnSpc>
-                <a:spcPct val="114000"/>
+                <a:spcPct val="115000"/>
               </a:lnSpc>
+              <a:spcAft>
+                <a:spcPts val="600"/>
+              </a:spcAft>
             </a:pPr>
             <a:r>
-              <a:rPr sz="1100" b="0">
+              <a:rPr sz="1250" b="1">
+                <a:solidFill>
+                  <a:srgbClr val="15201C"/>
+                </a:solidFill>
+                <a:latin typeface="Hanken Grotesk"/>
+              </a:rPr>
+              <a:t>Measured effect: </a:t>
+            </a:r>
+            <a:r>
+              <a:rPr sz="1250" b="0">
                 <a:solidFill>
                   <a:srgbClr val="6B7B73"/>
                 </a:solidFill>
                 <a:latin typeface="Hanken Grotesk"/>
               </a:rPr>
-              <a:t>Employees, mandatory TOTP, Managed Login + PKCE — a customer token structurally cannot reach /admin.</a:t>
-            </a:r>
-          </a:p>
-        </p:txBody>
-      </p:sp>
-      <p:sp>
-        <p:nvSpPr>
-          <p:cNvPr id="30" name="TextBox 29"/>
-          <p:cNvSpPr txBox="1"/>
-          <p:nvPr/>
-        </p:nvSpPr>
-        <p:spPr>
-          <a:xfrm>
-            <a:off x="8458200" y="4206240"/>
-            <a:ext cx="3200400" cy="1828800"/>
-          </a:xfrm>
-          <a:prstGeom prst="rect">
-            <a:avLst/>
-          </a:prstGeom>
-          <a:noFill/>
-        </p:spPr>
-        <p:txBody>
-          <a:bodyPr wrap="square">
-            <a:spAutoFit/>
-          </a:bodyPr>
-          <a:lstStyle/>
-          <a:p>
-            <a:pPr>
-              <a:lnSpc>
-                <a:spcPct val="120000"/>
-              </a:lnSpc>
-            </a:pPr>
-            <a:r>
-              <a:rPr sz="1150" b="0">
-                <a:solidFill>
-                  <a:srgbClr val="6B7B73"/>
-                </a:solidFill>
-                <a:latin typeface="Hanken Grotesk"/>
-              </a:rPr>
-              <a:t>The old design bought one feature (userless Face ID) with two Lambdas, three tables and a crypto path.
-</a:t>
-            </a:r>
-            <a:r>
-              <a:rPr sz="1250" b="1">
-                <a:solidFill>
-                  <a:srgbClr val="1F7A57"/>
-                </a:solidFill>
-                <a:latin typeface="Space Grotesk"/>
-              </a:rPr>
-              <a:t>Waived → deleted.</a:t>
-            </a:r>
-          </a:p>
-        </p:txBody>
-      </p:sp>
-      <p:sp>
-        <p:nvSpPr>
-          <p:cNvPr id="31" name="Rectangle 30"/>
+              <a:t>login requires zero backend calls; the Aurora cold-resume login stall (~20 s) is structurally impossible.</a:t>
+            </a:r>
+          </a:p>
+        </p:txBody>
+      </p:sp>
+      <p:sp>
+        <p:nvSpPr>
+          <p:cNvPr id="18" name="Rectangle 17"/>
           <p:cNvSpPr/>
           <p:nvPr/>
         </p:nvSpPr>
@@ -21837,7 +20665,7 @@
       </p:sp>
       <p:sp>
         <p:nvSpPr>
-          <p:cNvPr id="32" name="TextBox 31"/>
+          <p:cNvPr id="19" name="TextBox 18"/>
           <p:cNvSpPr txBox="1"/>
           <p:nvPr/>
         </p:nvSpPr>
@@ -21880,7 +20708,7 @@
       </p:sp>
       <p:sp>
         <p:nvSpPr>
-          <p:cNvPr id="33" name="TextBox 32"/>
+          <p:cNvPr id="20" name="TextBox 19"/>
           <p:cNvSpPr txBox="1"/>
           <p:nvPr/>
         </p:nvSpPr>

--- a/slides/wanthat-presentation.pptx
+++ b/slides/wanthat-presentation.pptx
@@ -18952,7 +18952,7 @@
         <p:spPr>
           <a:xfrm>
             <a:off x="307695" y="1709928"/>
-            <a:ext cx="11576304" cy="3938849"/>
+            <a:ext cx="11576304" cy="3673114"/>
           </a:xfrm>
           <a:prstGeom prst="roundRect">
             <a:avLst>
@@ -19008,7 +19008,7 @@
         <p:spPr>
           <a:xfrm>
             <a:off x="472287" y="1874519"/>
-            <a:ext cx="11247120" cy="3609665"/>
+            <a:ext cx="11247120" cy="3343930"/>
           </a:xfrm>
           <a:prstGeom prst="rect">
             <a:avLst/>

--- a/slides/wanthat-presentation.pptx
+++ b/slides/wanthat-presentation.pptx
@@ -18952,7 +18952,7 @@
         <p:spPr>
           <a:xfrm>
             <a:off x="307695" y="1709928"/>
-            <a:ext cx="11576304" cy="3673114"/>
+            <a:ext cx="11576304" cy="3539235"/>
           </a:xfrm>
           <a:prstGeom prst="roundRect">
             <a:avLst>
@@ -19008,7 +19008,7 @@
         <p:spPr>
           <a:xfrm>
             <a:off x="472287" y="1874519"/>
-            <a:ext cx="11247120" cy="3343930"/>
+            <a:ext cx="11247120" cy="3210051"/>
           </a:xfrm>
           <a:prstGeom prst="rect">
             <a:avLst/>

--- a/slides/wanthat-presentation.pptx
+++ b/slides/wanthat-presentation.pptx
@@ -18952,7 +18952,7 @@
         <p:spPr>
           <a:xfrm>
             <a:off x="307695" y="1709928"/>
-            <a:ext cx="11576304" cy="3539235"/>
+            <a:ext cx="11576304" cy="2544704"/>
           </a:xfrm>
           <a:prstGeom prst="roundRect">
             <a:avLst>
@@ -19008,7 +19008,7 @@
         <p:spPr>
           <a:xfrm>
             <a:off x="472287" y="1874519"/>
-            <a:ext cx="11247120" cy="3210051"/>
+            <a:ext cx="11247120" cy="2215520"/>
           </a:xfrm>
           <a:prstGeom prst="rect">
             <a:avLst/>

--- a/slides/wanthat-presentation.pptx
+++ b/slides/wanthat-presentation.pptx
@@ -18952,7 +18952,7 @@
         <p:spPr>
           <a:xfrm>
             <a:off x="307695" y="1709928"/>
-            <a:ext cx="11576304" cy="2544704"/>
+            <a:ext cx="11576304" cy="4094430"/>
           </a:xfrm>
           <a:prstGeom prst="roundRect">
             <a:avLst>
@@ -19008,7 +19008,7 @@
         <p:spPr>
           <a:xfrm>
             <a:off x="472287" y="1874519"/>
-            <a:ext cx="11247120" cy="2215520"/>
+            <a:ext cx="11247120" cy="3765246"/>
           </a:xfrm>
           <a:prstGeom prst="rect">
             <a:avLst/>

--- a/slides/wanthat-presentation.pptx
+++ b/slides/wanthat-presentation.pptx
@@ -18952,7 +18952,7 @@
         <p:spPr>
           <a:xfrm>
             <a:off x="307695" y="1709928"/>
-            <a:ext cx="11576304" cy="4094430"/>
+            <a:ext cx="11576304" cy="3836962"/>
           </a:xfrm>
           <a:prstGeom prst="roundRect">
             <a:avLst>
@@ -19008,7 +19008,7 @@
         <p:spPr>
           <a:xfrm>
             <a:off x="472287" y="1874519"/>
-            <a:ext cx="11247120" cy="3765246"/>
+            <a:ext cx="11247120" cy="3507778"/>
           </a:xfrm>
           <a:prstGeom prst="rect">
             <a:avLst/>

--- a/slides/wanthat-presentation.pptx
+++ b/slides/wanthat-presentation.pptx
@@ -18951,8 +18951,8 @@
         </p:nvSpPr>
         <p:spPr>
           <a:xfrm>
-            <a:off x="307695" y="1709928"/>
-            <a:ext cx="11576304" cy="3836962"/>
+            <a:off x="1646027" y="1709928"/>
+            <a:ext cx="8899641" cy="4764024"/>
           </a:xfrm>
           <a:prstGeom prst="roundRect">
             <a:avLst>
@@ -19007,8 +19007,8 @@
         </p:blipFill>
         <p:spPr>
           <a:xfrm>
-            <a:off x="472287" y="1874519"/>
-            <a:ext cx="11247120" cy="3507778"/>
+            <a:off x="1810619" y="1874519"/>
+            <a:ext cx="8570457" cy="4434840"/>
           </a:xfrm>
           <a:prstGeom prst="rect">
             <a:avLst/>

--- a/slides/wanthat-presentation.pptx
+++ b/slides/wanthat-presentation.pptx
@@ -18951,8 +18951,8 @@
         </p:nvSpPr>
         <p:spPr>
           <a:xfrm>
-            <a:off x="1646027" y="1709928"/>
-            <a:ext cx="8899641" cy="4764024"/>
+            <a:off x="307695" y="1709928"/>
+            <a:ext cx="11576304" cy="4671613"/>
           </a:xfrm>
           <a:prstGeom prst="roundRect">
             <a:avLst>
@@ -19007,8 +19007,8 @@
         </p:blipFill>
         <p:spPr>
           <a:xfrm>
-            <a:off x="1810619" y="1874519"/>
-            <a:ext cx="8570457" cy="4434840"/>
+            <a:off x="472287" y="1874519"/>
+            <a:ext cx="11247120" cy="4342429"/>
           </a:xfrm>
           <a:prstGeom prst="rect">
             <a:avLst/>

--- a/slides/wanthat-presentation.pptx
+++ b/slides/wanthat-presentation.pptx
@@ -18952,7 +18952,7 @@
         <p:spPr>
           <a:xfrm>
             <a:off x="307695" y="1709928"/>
-            <a:ext cx="11576304" cy="4671613"/>
+            <a:ext cx="11576304" cy="4141527"/>
           </a:xfrm>
           <a:prstGeom prst="roundRect">
             <a:avLst>
@@ -19008,7 +19008,7 @@
         <p:spPr>
           <a:xfrm>
             <a:off x="472287" y="1874519"/>
-            <a:ext cx="11247120" cy="4342429"/>
+            <a:ext cx="11247120" cy="3812343"/>
           </a:xfrm>
           <a:prstGeom prst="rect">
             <a:avLst/>

--- a/slides/wanthat-presentation.pptx
+++ b/slides/wanthat-presentation.pptx
@@ -18951,8 +18951,8 @@
         </p:nvSpPr>
         <p:spPr>
           <a:xfrm>
-            <a:off x="307695" y="1709928"/>
-            <a:ext cx="11576304" cy="4141527"/>
+            <a:off x="3148745" y="1481328"/>
+            <a:ext cx="5894204" cy="5084064"/>
           </a:xfrm>
           <a:prstGeom prst="roundRect">
             <a:avLst>
@@ -19007,8 +19007,8 @@
         </p:blipFill>
         <p:spPr>
           <a:xfrm>
-            <a:off x="472287" y="1874519"/>
-            <a:ext cx="11247120" cy="3812343"/>
+            <a:off x="3313337" y="1645920"/>
+            <a:ext cx="5565020" cy="4754880"/>
           </a:xfrm>
           <a:prstGeom prst="rect">
             <a:avLst/>

--- a/slides/wanthat-presentation.pptx
+++ b/slides/wanthat-presentation.pptx
@@ -18951,8 +18951,8 @@
         </p:nvSpPr>
         <p:spPr>
           <a:xfrm>
-            <a:off x="3148745" y="1481328"/>
-            <a:ext cx="5894204" cy="5084064"/>
+            <a:off x="4246592" y="1481328"/>
+            <a:ext cx="3698509" cy="5084064"/>
           </a:xfrm>
           <a:prstGeom prst="roundRect">
             <a:avLst>
@@ -19007,8 +19007,8 @@
         </p:blipFill>
         <p:spPr>
           <a:xfrm>
-            <a:off x="3313337" y="1645920"/>
-            <a:ext cx="5565020" cy="4754880"/>
+            <a:off x="4411184" y="1645920"/>
+            <a:ext cx="3369325" cy="4754880"/>
           </a:xfrm>
           <a:prstGeom prst="rect">
             <a:avLst/>

--- a/slides/wanthat-presentation.pptx
+++ b/slides/wanthat-presentation.pptx
@@ -18951,8 +18951,8 @@
         </p:nvSpPr>
         <p:spPr>
           <a:xfrm>
-            <a:off x="4246592" y="1481328"/>
-            <a:ext cx="3698509" cy="5084064"/>
+            <a:off x="4023389" y="1481328"/>
+            <a:ext cx="4144916" cy="5084064"/>
           </a:xfrm>
           <a:prstGeom prst="roundRect">
             <a:avLst>
@@ -19007,8 +19007,8 @@
         </p:blipFill>
         <p:spPr>
           <a:xfrm>
-            <a:off x="4411184" y="1645920"/>
-            <a:ext cx="3369325" cy="4754880"/>
+            <a:off x="4187981" y="1645920"/>
+            <a:ext cx="3815732" cy="4754880"/>
           </a:xfrm>
           <a:prstGeom prst="rect">
             <a:avLst/>

--- a/slides/wanthat-presentation.pptx
+++ b/slides/wanthat-presentation.pptx
@@ -18951,8 +18951,8 @@
         </p:nvSpPr>
         <p:spPr>
           <a:xfrm>
-            <a:off x="307695" y="1709928"/>
-            <a:ext cx="11576304" cy="3938849"/>
+            <a:off x="4023389" y="1481328"/>
+            <a:ext cx="4144916" cy="5084064"/>
           </a:xfrm>
           <a:prstGeom prst="roundRect">
             <a:avLst>
@@ -19007,8 +19007,8 @@
         </p:blipFill>
         <p:spPr>
           <a:xfrm>
-            <a:off x="472287" y="1874519"/>
-            <a:ext cx="11247120" cy="3609665"/>
+            <a:off x="4187981" y="1645920"/>
+            <a:ext cx="3815732" cy="4754880"/>
           </a:xfrm>
           <a:prstGeom prst="rect">
             <a:avLst/>

--- a/slides/wanthat-presentation.pptx
+++ b/slides/wanthat-presentation.pptx
@@ -523,7 +523,7 @@
           <a:lstStyle/>
           <a:p>
             <a:r>
-              <a:t>One sentence: Wanthat turns the product links people already send to friends into cashback — I'll show the product in two minutes, then spend the rest on how it's built.</a:t>
+              <a:t>One sentence: "Wanthat turns the product links people already send to friends into cashback — I'll show the product in two minutes, then spend the rest on how it's built."</a:t>
             </a:r>
           </a:p>
         </p:txBody>
@@ -593,7 +593,7 @@
           <a:lstStyle/>
           <a:p>
             <a:r>
-              <a:t>il-central-1 gaps shaped this too: no RDS Data API (killed the no-VPC data path), no Lambda Function URLs (landing sits behind an HTTP API).</a:t>
+              <a:t>il-central-1 gaps shaped this too — no RDS Data API (killed the no-VPC data path), no Lambda Function URLs (landing sits behind an HTTP API).</a:t>
             </a:r>
           </a:p>
         </p:txBody>
@@ -663,7 +663,7 @@
           <a:lstStyle/>
           <a:p>
             <a:r>
-              <a:t>Sequence in backup B3. Unmatched orders are not dropped: they park in unattributed_order and an admin claim settles on the next heartbeat.</a:t>
+              <a:t>sequence in backup B3. Unmatched orders are not dropped — they park in unattributed_order and an admin claim settles on the next heartbeat.</a:t>
             </a:r>
           </a:p>
         </p:txBody>
@@ -733,7 +733,7 @@
           <a:lstStyle/>
           <a:p>
             <a:r>
-              <a:t>Numbers are il-central-1 approximations; the point is the shape: a ~$20 measured floor, then linear with usage.</a:t>
+              <a:t>numbers are il-central-1 approximations; the point is the shape — a ~$20 measured floor, then linear with usage.</a:t>
             </a:r>
           </a:p>
         </p:txBody>
@@ -803,7 +803,7 @@
           <a:lstStyle/>
           <a:p>
             <a:r>
-              <a:t>Every row is documented in an ADR or the architecture doc - none of these are surprises.</a:t>
+              <a:t>every row is documented in an ADR or docs/AWS_Architecture.md — none of these are surprises.</a:t>
             </a:r>
           </a:p>
         </p:txBody>
@@ -871,7 +871,11 @@
         <p:txBody>
           <a:bodyPr/>
           <a:lstStyle/>
-          <a:p/>
+          <a:p>
+            <a:r>
+              <a:t>Registration IS SignUp; OTP and passkey logins; the only Aurora touch is the wallet read.</a:t>
+            </a:r>
+          </a:p>
         </p:txBody>
       </p:sp>
       <p:sp>
@@ -939,7 +943,7 @@
           <a:lstStyle/>
           <a:p>
             <a:r>
-              <a:t>Registration IS SignUp; OTP and passkey logins; the only Aurora touch is the wallet read.</a:t>
+              <a:t>Cache-first product resolve; on a miss member-catalog invokes retailer-linkgen, which calls AliExpress; both writes are same-table transactions.</a:t>
             </a:r>
           </a:p>
         </p:txBody>
@@ -1009,7 +1013,7 @@
           <a:lstStyle/>
           <a:p>
             <a:r>
-              <a:t>Cache-first product resolve; on miss the proxy calls AliExpress; both writes are same-table transactions with their counter rows.</a:t>
+              <a:t>Impression, click, purchase, 15-min poll, attribution resolve, append-only ledger + audit chain.</a:t>
             </a:r>
           </a:p>
         </p:txBody>
@@ -1079,143 +1083,7 @@
           <a:lstStyle/>
           <a:p>
             <a:r>
-              <a:t>Impression, click, purchase, 15-min poll, attribution resolve, append-only ledger + audit chain.</a:t>
-            </a:r>
-          </a:p>
-        </p:txBody>
-      </p:sp>
-      <p:sp>
-        <p:nvSpPr>
-          <p:cNvPr id="4" name="Slide Number Placeholder 3"/>
-          <p:cNvSpPr>
-            <a:spLocks noGrp="1"/>
-          </p:cNvSpPr>
-          <p:nvPr>
-            <p:ph type="sldNum" idx="5" sz="quarter"/>
-          </p:nvPr>
-        </p:nvSpPr>
-        <p:spPr/>
-      </p:sp>
-    </p:spTree>
-  </p:cSld>
-  <p:clrMapOvr>
-    <a:masterClrMapping/>
-  </p:clrMapOvr>
-</p:notes>
-</file>
-
-<file path=ppt/notesSlides/notesSlide18.xml><?xml version="1.0" encoding="utf-8"?>
-<p:notes xmlns:a="http://schemas.openxmlformats.org/drawingml/2006/main" xmlns:p="http://schemas.openxmlformats.org/presentationml/2006/main" xmlns:r="http://schemas.openxmlformats.org/officeDocument/2006/relationships">
-  <p:cSld>
-    <p:spTree>
-      <p:nvGrpSpPr>
-        <p:cNvPr id="1" name=""/>
-        <p:cNvGrpSpPr/>
-        <p:nvPr/>
-      </p:nvGrpSpPr>
-      <p:grpSpPr>
-        <a:xfrm>
-          <a:off x="0" y="0"/>
-          <a:ext cx="0" cy="0"/>
-          <a:chOff x="0" y="0"/>
-          <a:chExt cx="0" cy="0"/>
-        </a:xfrm>
-      </p:grpSpPr>
-      <p:sp>
-        <p:nvSpPr>
-          <p:cNvPr id="2" name="Slide Image Placeholder 1"/>
-          <p:cNvSpPr>
-            <a:spLocks noGrp="1"/>
-          </p:cNvSpPr>
-          <p:nvPr>
-            <p:ph type="sldImg" idx="2"/>
-          </p:nvPr>
-        </p:nvSpPr>
-        <p:spPr/>
-      </p:sp>
-      <p:sp>
-        <p:nvSpPr>
-          <p:cNvPr id="3" name="Notes Placeholder 2"/>
-          <p:cNvSpPr>
-            <a:spLocks noGrp="1"/>
-          </p:cNvSpPr>
-          <p:nvPr>
-            <p:ph type="body" idx="3" sz="quarter"/>
-          </p:nvPr>
-        </p:nvSpPr>
-        <p:spPr/>
-        <p:txBody>
-          <a:bodyPr/>
-          <a:lstStyle/>
-          <a:p/>
-        </p:txBody>
-      </p:sp>
-      <p:sp>
-        <p:nvSpPr>
-          <p:cNvPr id="4" name="Slide Number Placeholder 3"/>
-          <p:cNvSpPr>
-            <a:spLocks noGrp="1"/>
-          </p:cNvSpPr>
-          <p:nvPr>
-            <p:ph type="sldNum" idx="5" sz="quarter"/>
-          </p:nvPr>
-        </p:nvSpPr>
-        <p:spPr/>
-      </p:sp>
-    </p:spTree>
-  </p:cSld>
-  <p:clrMapOvr>
-    <a:masterClrMapping/>
-  </p:clrMapOvr>
-</p:notes>
-</file>
-
-<file path=ppt/notesSlides/notesSlide19.xml><?xml version="1.0" encoding="utf-8"?>
-<p:notes xmlns:a="http://schemas.openxmlformats.org/drawingml/2006/main" xmlns:p="http://schemas.openxmlformats.org/presentationml/2006/main" xmlns:r="http://schemas.openxmlformats.org/officeDocument/2006/relationships">
-  <p:cSld>
-    <p:spTree>
-      <p:nvGrpSpPr>
-        <p:cNvPr id="1" name=""/>
-        <p:cNvGrpSpPr/>
-        <p:nvPr/>
-      </p:nvGrpSpPr>
-      <p:grpSpPr>
-        <a:xfrm>
-          <a:off x="0" y="0"/>
-          <a:ext cx="0" cy="0"/>
-          <a:chOff x="0" y="0"/>
-          <a:chExt cx="0" cy="0"/>
-        </a:xfrm>
-      </p:grpSpPr>
-      <p:sp>
-        <p:nvSpPr>
-          <p:cNvPr id="2" name="Slide Image Placeholder 1"/>
-          <p:cNvSpPr>
-            <a:spLocks noGrp="1"/>
-          </p:cNvSpPr>
-          <p:nvPr>
-            <p:ph type="sldImg" idx="2"/>
-          </p:nvPr>
-        </p:nvSpPr>
-        <p:spPr/>
-      </p:sp>
-      <p:sp>
-        <p:nvSpPr>
-          <p:cNvPr id="3" name="Notes Placeholder 2"/>
-          <p:cNvSpPr>
-            <a:spLocks noGrp="1"/>
-          </p:cNvSpPr>
-          <p:nvPr>
-            <p:ph type="body" idx="3" sz="quarter"/>
-          </p:nvPr>
-        </p:nvSpPr>
-        <p:spPr/>
-        <p:txBody>
-          <a:bodyPr/>
-          <a:lstStyle/>
-          <a:p>
-            <a:r>
-              <a:t>Only what touches Aurora enters the VPC; in-VPC functions cannot call out — the conversion chain is always proxy → writer; a NAT Gateway would be the single biggest fixed cost in the account.</a:t>
+              <a:t>Only what touches Aurora enters the VPC; in-VPC functions cannot call out — every invoke arrow starts outside the VPC and the conversion chain is always settlement -&gt; writer; a NAT Gateway would be the single biggest fixed cost in the account.</a:t>
             </a:r>
           </a:p>
         </p:txBody>
@@ -1285,207 +1153,9 @@
           <a:lstStyle/>
           <a:p>
             <a:r>
-              <a:t>Word-of-mouth drives 20-50% of purchases and nobody pays for it. We are not building an influencer platform — the persona is a regular person in four family WhatsApp groups.</a:t>
-            </a:r>
-          </a:p>
-        </p:txBody>
-      </p:sp>
-      <p:sp>
-        <p:nvSpPr>
-          <p:cNvPr id="4" name="Slide Number Placeholder 3"/>
-          <p:cNvSpPr>
-            <a:spLocks noGrp="1"/>
-          </p:cNvSpPr>
-          <p:nvPr>
-            <p:ph type="sldNum" idx="5" sz="quarter"/>
-          </p:nvPr>
-        </p:nvSpPr>
-        <p:spPr/>
-      </p:sp>
-    </p:spTree>
-  </p:cSld>
-  <p:clrMapOvr>
-    <a:masterClrMapping/>
-  </p:clrMapOvr>
-</p:notes>
-</file>
-
-<file path=ppt/notesSlides/notesSlide20.xml><?xml version="1.0" encoding="utf-8"?>
-<p:notes xmlns:a="http://schemas.openxmlformats.org/drawingml/2006/main" xmlns:p="http://schemas.openxmlformats.org/presentationml/2006/main" xmlns:r="http://schemas.openxmlformats.org/officeDocument/2006/relationships">
-  <p:cSld>
-    <p:spTree>
-      <p:nvGrpSpPr>
-        <p:cNvPr id="1" name=""/>
-        <p:cNvGrpSpPr/>
-        <p:nvPr/>
-      </p:nvGrpSpPr>
-      <p:grpSpPr>
-        <a:xfrm>
-          <a:off x="0" y="0"/>
-          <a:ext cx="0" cy="0"/>
-          <a:chOff x="0" y="0"/>
-          <a:chExt cx="0" cy="0"/>
-        </a:xfrm>
-      </p:grpSpPr>
-      <p:sp>
-        <p:nvSpPr>
-          <p:cNvPr id="2" name="Slide Image Placeholder 1"/>
-          <p:cNvSpPr>
-            <a:spLocks noGrp="1"/>
-          </p:cNvSpPr>
-          <p:nvPr>
-            <p:ph type="sldImg" idx="2"/>
-          </p:nvPr>
-        </p:nvSpPr>
-        <p:spPr/>
-      </p:sp>
-      <p:sp>
-        <p:nvSpPr>
-          <p:cNvPr id="3" name="Notes Placeholder 2"/>
-          <p:cNvSpPr>
-            <a:spLocks noGrp="1"/>
-          </p:cNvSpPr>
-          <p:nvPr>
-            <p:ph type="body" idx="3" sz="quarter"/>
-          </p:nvPr>
-        </p:nvSpPr>
-        <p:spPr/>
-        <p:txBody>
-          <a:bodyPr/>
-          <a:lstStyle/>
-          <a:p/>
-        </p:txBody>
-      </p:sp>
-      <p:sp>
-        <p:nvSpPr>
-          <p:cNvPr id="4" name="Slide Number Placeholder 3"/>
-          <p:cNvSpPr>
-            <a:spLocks noGrp="1"/>
-          </p:cNvSpPr>
-          <p:nvPr>
-            <p:ph type="sldNum" idx="5" sz="quarter"/>
-          </p:nvPr>
-        </p:nvSpPr>
-        <p:spPr/>
-      </p:sp>
-    </p:spTree>
-  </p:cSld>
-  <p:clrMapOvr>
-    <a:masterClrMapping/>
-  </p:clrMapOvr>
-</p:notes>
-</file>
-
-<file path=ppt/notesSlides/notesSlide21.xml><?xml version="1.0" encoding="utf-8"?>
-<p:notes xmlns:a="http://schemas.openxmlformats.org/drawingml/2006/main" xmlns:p="http://schemas.openxmlformats.org/presentationml/2006/main" xmlns:r="http://schemas.openxmlformats.org/officeDocument/2006/relationships">
-  <p:cSld>
-    <p:spTree>
-      <p:nvGrpSpPr>
-        <p:cNvPr id="1" name=""/>
-        <p:cNvGrpSpPr/>
-        <p:nvPr/>
-      </p:nvGrpSpPr>
-      <p:grpSpPr>
-        <a:xfrm>
-          <a:off x="0" y="0"/>
-          <a:ext cx="0" cy="0"/>
-          <a:chOff x="0" y="0"/>
-          <a:chExt cx="0" cy="0"/>
-        </a:xfrm>
-      </p:grpSpPr>
-      <p:sp>
-        <p:nvSpPr>
-          <p:cNvPr id="2" name="Slide Image Placeholder 1"/>
-          <p:cNvSpPr>
-            <a:spLocks noGrp="1"/>
-          </p:cNvSpPr>
-          <p:nvPr>
-            <p:ph type="sldImg" idx="2"/>
-          </p:nvPr>
-        </p:nvSpPr>
-        <p:spPr/>
-      </p:sp>
-      <p:sp>
-        <p:nvSpPr>
-          <p:cNvPr id="3" name="Notes Placeholder 2"/>
-          <p:cNvSpPr>
-            <a:spLocks noGrp="1"/>
-          </p:cNvSpPr>
-          <p:nvPr>
-            <p:ph type="body" idx="3" sz="quarter"/>
-          </p:nvPr>
-        </p:nvSpPr>
-        <p:spPr/>
-        <p:txBody>
-          <a:bodyPr/>
-          <a:lstStyle/>
-          <a:p/>
-        </p:txBody>
-      </p:sp>
-      <p:sp>
-        <p:nvSpPr>
-          <p:cNvPr id="4" name="Slide Number Placeholder 3"/>
-          <p:cNvSpPr>
-            <a:spLocks noGrp="1"/>
-          </p:cNvSpPr>
-          <p:nvPr>
-            <p:ph type="sldNum" idx="5" sz="quarter"/>
-          </p:nvPr>
-        </p:nvSpPr>
-        <p:spPr/>
-      </p:sp>
-    </p:spTree>
-  </p:cSld>
-  <p:clrMapOvr>
-    <a:masterClrMapping/>
-  </p:clrMapOvr>
-</p:notes>
-</file>
-
-<file path=ppt/notesSlides/notesSlide22.xml><?xml version="1.0" encoding="utf-8"?>
-<p:notes xmlns:a="http://schemas.openxmlformats.org/drawingml/2006/main" xmlns:p="http://schemas.openxmlformats.org/presentationml/2006/main" xmlns:r="http://schemas.openxmlformats.org/officeDocument/2006/relationships">
-  <p:cSld>
-    <p:spTree>
-      <p:nvGrpSpPr>
-        <p:cNvPr id="1" name=""/>
-        <p:cNvGrpSpPr/>
-        <p:nvPr/>
-      </p:nvGrpSpPr>
-      <p:grpSpPr>
-        <a:xfrm>
-          <a:off x="0" y="0"/>
-          <a:ext cx="0" cy="0"/>
-          <a:chOff x="0" y="0"/>
-          <a:chExt cx="0" cy="0"/>
-        </a:xfrm>
-      </p:grpSpPr>
-      <p:sp>
-        <p:nvSpPr>
-          <p:cNvPr id="2" name="Slide Image Placeholder 1"/>
-          <p:cNvSpPr>
-            <a:spLocks noGrp="1"/>
-          </p:cNvSpPr>
-          <p:nvPr>
-            <p:ph type="sldImg" idx="2"/>
-          </p:nvPr>
-        </p:nvSpPr>
-        <p:spPr/>
-      </p:sp>
-      <p:sp>
-        <p:nvSpPr>
-          <p:cNvPr id="3" name="Notes Placeholder 2"/>
-          <p:cNvSpPr>
-            <a:spLocks noGrp="1"/>
-          </p:cNvSpPr>
-          <p:nvPr>
-            <p:ph type="body" idx="3" sz="quarter"/>
-          </p:nvPr>
-        </p:nvSpPr>
-        <p:spPr/>
-        <p:txBody>
-          <a:bodyPr/>
-          <a:lstStyle/>
-          <a:p/>
+              <a:t>word-of-mouth drives 20-50% of purchases and nobody pays for it. We are not building an influencer platform — the persona is a regular person in four family WhatsApp groups.</a:t>
+            </a:r>
+          </a:p>
         </p:txBody>
       </p:sp>
       <p:sp>
@@ -1553,7 +1223,7 @@
           <a:lstStyle/>
           <a:p>
             <a:r>
-              <a:t>The gates decide Phase 2 (group sharing, two-sided rewards) and a pre-seed raise.</a:t>
+              <a:t>the gates decide Phase 2 (group sharing, two-sided rewards) and a pre-seed raise.</a:t>
             </a:r>
           </a:p>
         </p:txBody>
@@ -1623,7 +1293,7 @@
           <a:lstStyle/>
           <a:p>
             <a:r>
-              <a:t>The whole loop is two taps for the member; the friend's landing carries the personal review, which is the trust mechanic. Screens are the design-handoff mocks.</a:t>
+              <a:t>the whole loop is two taps for the member; the friend's landing carries the personal review, which is the trust mechanic. Screens are the design-handoff mocks.</a:t>
             </a:r>
           </a:p>
         </p:txBody>
@@ -1693,7 +1363,7 @@
           <a:lstStyle/>
           <a:p>
             <a:r>
-              <a:t>Note the "Estimated" chip — cashback is held in the settlement currency and the ILS headline is a display estimate (ADR-0017); conversion happens at withdrawal.</a:t>
+              <a:t>note the "Estimated" chip — cashback is held in the settlement currency and the ILS headline is a display estimate (ADR-0017); conversion happens at withdrawal.</a:t>
             </a:r>
           </a:p>
         </p:txBody>
@@ -1763,7 +1433,7 @@
           <a:lstStyle/>
           <a:p>
             <a:r>
-              <a:t>These five drove every decision that follows; when two conflicted, cost and money-safety won.</a:t>
+              <a:t>these five drove every decision that follows; when two conflicted, cost and money-safety won.</a:t>
             </a:r>
           </a:p>
         </p:txBody>
@@ -1833,7 +1503,7 @@
           <a:lstStyle/>
           <a:p>
             <a:r>
-              <a:t>Walk left to right: (1) no auth service — the browser talks to Cognito directly; OTP rides a custom sender, WhatsApp-default, kill-switched. (2) Member APIs split into non-VPC app-links and in-VPC app-core — only what touches money enters the VPC. (3) The friend's click never leaves DynamoDB. (4) Money enters only through the scheduled pipeline: retailer-proxy fetches, the in-VPC writer appends. Full per-table version in docs/AWS_Architecture.md.</a:t>
+              <a:t>(walk it left to right) (1) there is no auth service — the browser talks to Cognito directly; OTP rides a custom sender with WhatsApp-default and kill switches. (2) The member APIs split into non-VPC member-catalog and in-VPC member-wallet — only what touches money enters the VPC; the admin surface splits the same way (console vs ledger view). (3) The friend's click never leaves DynamoDB. (4) Money enters only through the scheduled pipeline on the right — retailer-settlement fetches, the in-VPC ledger-writer appends and returns the totals the poll projects back onto the links. Full per-table version lives in `docs/AWS_Architecture.md`.</a:t>
             </a:r>
           </a:p>
         </p:txBody>
@@ -1903,7 +1573,7 @@
           <a:lstStyle/>
           <a:p>
             <a:r>
-              <a:t>If asked why not one Postgres for everything: the redirect hot path must absorb viral spikes at zero idle cost, and the auth path must not depend on a relational database resume.</a:t>
+              <a:t>if asked why not one Postgres for everything — the redirect hot path must absorb viral spikes at zero idle cost, and the auth path must not depend on a relational database resume. (The data-homes diagram is in backup B6.)</a:t>
             </a:r>
           </a:p>
         </p:txBody>
@@ -1973,7 +1643,7 @@
           <a:lstStyle/>
           <a:p>
             <a:r>
-              <a:t>Full sequence diagram in backup B1. The C-&gt;B migration was possible pre-release: one dev user deleted, no migration burden.</a:t>
+              <a:t>full sequence diagram in backup B1. The C-to-B migration was possible pre-release — one dev user deleted, no migration burden.</a:t>
             </a:r>
           </a:p>
         </p:txBody>
@@ -5024,7 +4694,7 @@
           </a:fontRef>
         </p:style>
         <p:txBody>
-          <a:bodyPr rtlCol="0" anchor="ctr" wrap="square" lIns="146304" rIns="146304" tIns="109728" bIns="109728"/>
+          <a:bodyPr rtlCol="0" anchor="ctr"/>
           <a:lstStyle/>
           <a:p>
             <a:pPr algn="ctr"/>
@@ -5048,7 +4718,7 @@
           <a:noFill/>
         </p:spPr>
         <p:txBody>
-          <a:bodyPr wrap="square">
+          <a:bodyPr wrap="square" anchor="t" lIns="0" rIns="0" tIns="0" bIns="0">
             <a:spAutoFit/>
           </a:bodyPr>
           <a:lstStyle/>
@@ -5082,7 +4752,7 @@
           <a:noFill/>
         </p:spPr>
         <p:txBody>
-          <a:bodyPr wrap="square">
+          <a:bodyPr wrap="square" anchor="t" lIns="0" rIns="0" tIns="0" bIns="0">
             <a:spAutoFit/>
           </a:bodyPr>
           <a:lstStyle/>
@@ -5125,7 +4795,7 @@
           <a:noFill/>
         </p:spPr>
         <p:txBody>
-          <a:bodyPr wrap="square">
+          <a:bodyPr wrap="square" anchor="t" lIns="0" rIns="0" tIns="0" bIns="0">
             <a:spAutoFit/>
           </a:bodyPr>
           <a:lstStyle/>
@@ -5159,7 +4829,7 @@
           <a:noFill/>
         </p:spPr>
         <p:txBody>
-          <a:bodyPr wrap="square">
+          <a:bodyPr wrap="square" anchor="t" lIns="0" rIns="0" tIns="0" bIns="0">
             <a:spAutoFit/>
           </a:bodyPr>
           <a:lstStyle/>
@@ -5217,12 +4887,12 @@
           </a:fontRef>
         </p:style>
         <p:txBody>
-          <a:bodyPr rtlCol="0" anchor="ctr" wrap="square" lIns="146304" rIns="146304" tIns="109728" bIns="109728"/>
+          <a:bodyPr rtlCol="0" anchor="ctr" lIns="0" rIns="0" tIns="0" bIns="0"/>
           <a:lstStyle/>
           <a:p>
             <a:pPr algn="ctr"/>
             <a:r>
-              <a:rPr sz="1050" b="0">
+              <a:rPr sz="1050">
                 <a:solidFill>
                   <a:srgbClr val="9DB6AB"/>
                 </a:solidFill>
@@ -5241,8 +4911,8 @@
         </p:nvSpPr>
         <p:spPr>
           <a:xfrm>
-            <a:off x="2569464" y="5074920"/>
-            <a:ext cx="1458468" cy="384048"/>
+            <a:off x="2569463" y="5074920"/>
+            <a:ext cx="1453896" cy="384048"/>
           </a:xfrm>
           <a:prstGeom prst="roundRect">
             <a:avLst>
@@ -5274,12 +4944,12 @@
           </a:fontRef>
         </p:style>
         <p:txBody>
-          <a:bodyPr rtlCol="0" anchor="ctr" wrap="square" lIns="146304" rIns="146304" tIns="109728" bIns="109728"/>
+          <a:bodyPr rtlCol="0" anchor="ctr" lIns="0" rIns="0" tIns="0" bIns="0"/>
           <a:lstStyle/>
           <a:p>
             <a:pPr algn="ctr"/>
             <a:r>
-              <a:rPr sz="1050" b="0">
+              <a:rPr sz="1050">
                 <a:solidFill>
                   <a:srgbClr val="9DB6AB"/>
                 </a:solidFill>
@@ -5298,7 +4968,7 @@
         </p:nvSpPr>
         <p:spPr>
           <a:xfrm>
-            <a:off x="4192524" y="5074920"/>
+            <a:off x="4187952" y="5074920"/>
             <a:ext cx="1847088" cy="384048"/>
           </a:xfrm>
           <a:prstGeom prst="roundRect">
@@ -5331,12 +5001,12 @@
           </a:fontRef>
         </p:style>
         <p:txBody>
-          <a:bodyPr rtlCol="0" anchor="ctr" wrap="square" lIns="146304" rIns="146304" tIns="109728" bIns="109728"/>
+          <a:bodyPr rtlCol="0" anchor="ctr" lIns="0" rIns="0" tIns="0" bIns="0"/>
           <a:lstStyle/>
           <a:p>
             <a:pPr algn="ctr"/>
             <a:r>
-              <a:rPr sz="1050" b="0">
+              <a:rPr sz="1050">
                 <a:solidFill>
                   <a:srgbClr val="9DB6AB"/>
                 </a:solidFill>
@@ -5355,8 +5025,8 @@
         </p:nvSpPr>
         <p:spPr>
           <a:xfrm>
-            <a:off x="6204204" y="5074920"/>
-            <a:ext cx="1769364" cy="384048"/>
+            <a:off x="6199632" y="5074920"/>
+            <a:ext cx="1773936" cy="384048"/>
           </a:xfrm>
           <a:prstGeom prst="roundRect">
             <a:avLst>
@@ -5388,12 +5058,12 @@
           </a:fontRef>
         </p:style>
         <p:txBody>
-          <a:bodyPr rtlCol="0" anchor="ctr" wrap="square" lIns="146304" rIns="146304" tIns="109728" bIns="109728"/>
+          <a:bodyPr rtlCol="0" anchor="ctr" lIns="0" rIns="0" tIns="0" bIns="0"/>
           <a:lstStyle/>
           <a:p>
             <a:pPr algn="ctr"/>
             <a:r>
-              <a:rPr sz="1050" b="0">
+              <a:rPr sz="1050">
                 <a:solidFill>
                   <a:srgbClr val="9DB6AB"/>
                 </a:solidFill>
@@ -5447,7 +5117,7 @@
           <a:noFill/>
         </p:spPr>
         <p:txBody>
-          <a:bodyPr wrap="square">
+          <a:bodyPr wrap="square" anchor="t" lIns="0" rIns="0" tIns="0" bIns="0">
             <a:spAutoFit/>
           </a:bodyPr>
           <a:lstStyle/>
@@ -5482,7 +5152,7 @@
           <a:noFill/>
         </p:spPr>
         <p:txBody>
-          <a:bodyPr wrap="square">
+          <a:bodyPr wrap="square" anchor="t" lIns="0" rIns="0" tIns="0" bIns="0">
             <a:spAutoFit/>
           </a:bodyPr>
           <a:lstStyle/>
@@ -5516,13 +5186,13 @@
           <a:noFill/>
         </p:spPr>
         <p:txBody>
-          <a:bodyPr wrap="square">
+          <a:bodyPr wrap="square" anchor="t" lIns="0" rIns="0" tIns="0" bIns="0">
             <a:spAutoFit/>
           </a:bodyPr>
           <a:lstStyle/>
           <a:p>
             <a:r>
-              <a:rPr sz="2500" b="1">
+              <a:rPr sz="2700" b="1">
                 <a:solidFill>
                   <a:srgbClr val="15201C"/>
                 </a:solidFill>
@@ -5559,7 +5229,7 @@
               <a:tr h="365760">
                 <a:tc>
                   <a:txBody>
-                    <a:bodyPr wrap="square"/>
+                    <a:bodyPr/>
                     <a:lstStyle/>
                     <a:p>
                       <a:pPr>
@@ -5586,7 +5256,7 @@
                 </a:tc>
                 <a:tc>
                   <a:txBody>
-                    <a:bodyPr wrap="square"/>
+                    <a:bodyPr/>
                     <a:lstStyle/>
                     <a:p>
                       <a:pPr>
@@ -5613,7 +5283,7 @@
                 </a:tc>
                 <a:tc>
                   <a:txBody>
-                    <a:bodyPr wrap="square"/>
+                    <a:bodyPr/>
                     <a:lstStyle/>
                     <a:p>
                       <a:pPr>
@@ -5642,7 +5312,7 @@
               <a:tr h="365760">
                 <a:tc>
                   <a:txBody>
-                    <a:bodyPr wrap="square"/>
+                    <a:bodyPr/>
                     <a:lstStyle/>
                     <a:p>
                       <a:pPr>
@@ -5669,7 +5339,7 @@
                 </a:tc>
                 <a:tc>
                   <a:txBody>
-                    <a:bodyPr wrap="square"/>
+                    <a:bodyPr/>
                     <a:lstStyle/>
                     <a:p>
                       <a:pPr>
@@ -5696,7 +5366,7 @@
                 </a:tc>
                 <a:tc>
                   <a:txBody>
-                    <a:bodyPr wrap="square"/>
+                    <a:bodyPr/>
                     <a:lstStyle/>
                     <a:p>
                       <a:pPr>
@@ -5711,7 +5381,7 @@
                           </a:solidFill>
                           <a:latin typeface="Hanken Grotesk"/>
                         </a:rPr>
-                        <a:t>Non-VPC functions call public AWS endpoints (IAM + TLS); the only true internet egress is retailer-proxy</a:t>
+                        <a:t>Non-VPC functions call public AWS endpoints (IAM + TLS); the only true internet egress is the retailer tier</a:t>
                       </a:r>
                     </a:p>
                   </a:txBody>
@@ -5725,7 +5395,7 @@
               <a:tr h="365760">
                 <a:tc>
                   <a:txBody>
-                    <a:bodyPr wrap="square"/>
+                    <a:bodyPr/>
                     <a:lstStyle/>
                     <a:p>
                       <a:pPr>
@@ -5752,7 +5422,7 @@
                 </a:tc>
                 <a:tc>
                   <a:txBody>
-                    <a:bodyPr wrap="square"/>
+                    <a:bodyPr/>
                     <a:lstStyle/>
                     <a:p>
                       <a:pPr>
@@ -5779,7 +5449,7 @@
                 </a:tc>
                 <a:tc>
                   <a:txBody>
-                    <a:bodyPr wrap="square"/>
+                    <a:bodyPr/>
                     <a:lstStyle/>
                     <a:p>
                       <a:pPr>
@@ -5794,7 +5464,7 @@
                           </a:solidFill>
                           <a:latin typeface="Hanken Grotesk"/>
                         </a:rPr>
-                        <a:t>Zero needed: nothing in-VPC calls Cognito, Secrets Manager, or the internet - by design, not by exception</a:t>
+                        <a:t>Zero needed: nothing in-VPC calls Cognito, Secrets Manager, or the internet — by design, not by exception</a:t>
                       </a:r>
                     </a:p>
                   </a:txBody>
@@ -5808,7 +5478,7 @@
               <a:tr h="365760">
                 <a:tc>
                   <a:txBody>
-                    <a:bodyPr wrap="square"/>
+                    <a:bodyPr/>
                     <a:lstStyle/>
                     <a:p>
                       <a:pPr>
@@ -5835,7 +5505,7 @@
                 </a:tc>
                 <a:tc>
                   <a:txBody>
-                    <a:bodyPr wrap="square"/>
+                    <a:bodyPr/>
                     <a:lstStyle/>
                     <a:p>
                       <a:pPr>
@@ -5862,7 +5532,7 @@
                 </a:tc>
                 <a:tc>
                   <a:txBody>
-                    <a:bodyPr wrap="square"/>
+                    <a:bodyPr/>
                     <a:lstStyle/>
                     <a:p>
                       <a:pPr>
@@ -5891,7 +5561,7 @@
               <a:tr h="365760">
                 <a:tc>
                   <a:txBody>
-                    <a:bodyPr wrap="square"/>
+                    <a:bodyPr/>
                     <a:lstStyle/>
                     <a:p>
                       <a:pPr>
@@ -5918,7 +5588,7 @@
                 </a:tc>
                 <a:tc>
                   <a:txBody>
-                    <a:bodyPr wrap="square"/>
+                    <a:bodyPr/>
                     <a:lstStyle/>
                     <a:p>
                       <a:pPr>
@@ -5933,7 +5603,7 @@
                           </a:solidFill>
                           <a:latin typeface="Hanken Grotesk"/>
                         </a:rPr>
-                        <a:t>-</a:t>
+                        <a:t>—</a:t>
                       </a:r>
                     </a:p>
                   </a:txBody>
@@ -5945,7 +5615,7 @@
                 </a:tc>
                 <a:tc>
                   <a:txBody>
-                    <a:bodyPr wrap="square"/>
+                    <a:bodyPr/>
                     <a:lstStyle/>
                     <a:p>
                       <a:pPr>
@@ -5992,14 +5662,14 @@
           <a:noFill/>
         </p:spPr>
         <p:txBody>
-          <a:bodyPr wrap="square">
+          <a:bodyPr wrap="square" anchor="t" lIns="0" rIns="0" tIns="0" bIns="0">
             <a:spAutoFit/>
           </a:bodyPr>
           <a:lstStyle/>
           <a:p>
             <a:pPr>
               <a:lnSpc>
-                <a:spcPct val="115000"/>
+                <a:spcPct val="110000"/>
               </a:lnSpc>
               <a:spcAft>
                 <a:spcPts val="600"/>
@@ -6021,13 +5691,13 @@
                 </a:solidFill>
                 <a:latin typeface="Hanken Grotesk"/>
               </a:rPr>
-              <a:t>in-VPC functions cannot initiate outward calls - so the conversion chain is always proxy -&gt; writer (invoke), and admin claim intents settle asynchronously on the next poll heartbeat rather than inline.</a:t>
+              <a:t>in-VPC functions cannot initiate outward calls — the conversion chain is always proxy → writer (invoke), and admin claim intents settle asynchronously on the next poll heartbeat.</a:t>
             </a:r>
           </a:p>
           <a:p>
             <a:pPr>
               <a:lnSpc>
-                <a:spcPct val="115000"/>
+                <a:spcPct val="110000"/>
               </a:lnSpc>
               <a:spcAft>
                 <a:spcPts val="600"/>
@@ -6055,7 +5725,7 @@
           <a:p>
             <a:pPr>
               <a:lnSpc>
-                <a:spcPct val="115000"/>
+                <a:spcPct val="110000"/>
               </a:lnSpc>
               <a:spcAft>
                 <a:spcPts val="600"/>
@@ -6077,7 +5747,7 @@
                 </a:solidFill>
                 <a:latin typeface="Hanken Grotesk"/>
               </a:rPr>
-              <a:t>sustained Aurora connection pressure (alarm at 80% of 50) -&gt; introduce RDS Proxy; steady traffic -&gt; reserved concurrency once the account quota (10) is raised.</a:t>
+              <a:t>sustained Aurora connection pressure (alarm at 80% of 50) → RDS Proxy; steady traffic → reserved concurrency once the account quota (10) is raised.</a:t>
             </a:r>
           </a:p>
         </p:txBody>
@@ -6091,7 +5761,7 @@
         <p:spPr>
           <a:xfrm>
             <a:off x="640080" y="6455664"/>
-            <a:ext cx="10908792" cy="10972"/>
+            <a:ext cx="10908792" cy="9144"/>
           </a:xfrm>
           <a:prstGeom prst="rect">
             <a:avLst/>
@@ -6119,7 +5789,7 @@
           </a:fontRef>
         </p:style>
         <p:txBody>
-          <a:bodyPr rtlCol="0" anchor="ctr" wrap="square" lIns="146304" rIns="146304" tIns="109728" bIns="109728"/>
+          <a:bodyPr rtlCol="0" anchor="ctr"/>
           <a:lstStyle/>
           <a:p>
             <a:pPr algn="ctr"/>
@@ -6143,7 +5813,7 @@
           <a:noFill/>
         </p:spPr>
         <p:txBody>
-          <a:bodyPr wrap="square">
+          <a:bodyPr wrap="square" anchor="t" lIns="0" rIns="0" tIns="0" bIns="0">
             <a:spAutoFit/>
           </a:bodyPr>
           <a:lstStyle/>
@@ -6186,7 +5856,7 @@
           <a:noFill/>
         </p:spPr>
         <p:txBody>
-          <a:bodyPr wrap="square">
+          <a:bodyPr wrap="square" anchor="t" lIns="0" rIns="0" tIns="0" bIns="0">
             <a:spAutoFit/>
           </a:bodyPr>
           <a:lstStyle/>
@@ -6247,7 +5917,7 @@
           <a:noFill/>
         </p:spPr>
         <p:txBody>
-          <a:bodyPr wrap="square">
+          <a:bodyPr wrap="square" anchor="t" lIns="0" rIns="0" tIns="0" bIns="0">
             <a:spAutoFit/>
           </a:bodyPr>
           <a:lstStyle/>
@@ -6282,7 +5952,7 @@
           <a:noFill/>
         </p:spPr>
         <p:txBody>
-          <a:bodyPr wrap="square">
+          <a:bodyPr wrap="square" anchor="t" lIns="0" rIns="0" tIns="0" bIns="0">
             <a:spAutoFit/>
           </a:bodyPr>
           <a:lstStyle/>
@@ -6316,13 +5986,13 @@
           <a:noFill/>
         </p:spPr>
         <p:txBody>
-          <a:bodyPr wrap="square">
+          <a:bodyPr wrap="square" anchor="t" lIns="0" rIns="0" tIns="0" bIns="0">
             <a:spAutoFit/>
           </a:bodyPr>
           <a:lstStyle/>
           <a:p>
             <a:r>
-              <a:rPr sz="2500" b="1">
+              <a:rPr sz="2700" b="1">
                 <a:solidFill>
                   <a:srgbClr val="15201C"/>
                 </a:solidFill>
@@ -6346,7 +6016,7 @@
           </a:xfrm>
           <a:prstGeom prst="roundRect">
             <a:avLst>
-              <a:gd name="adj" fmla="val 5500"/>
+              <a:gd name="adj" fmla="val 4000"/>
             </a:avLst>
           </a:prstGeom>
           <a:solidFill>
@@ -6374,7 +6044,7 @@
           </a:fontRef>
         </p:style>
         <p:txBody>
-          <a:bodyPr rtlCol="0" anchor="ctr" wrap="square" lIns="146304" rIns="146304" tIns="109728" bIns="109728"/>
+          <a:bodyPr rtlCol="0" anchor="ctr"/>
           <a:lstStyle/>
           <a:p>
             <a:pPr algn="ctr"/>
@@ -6389,7 +6059,7 @@
         </p:nvSpPr>
         <p:spPr>
           <a:xfrm>
-            <a:off x="868680" y="1938528"/>
+            <a:off x="868680" y="1984248"/>
             <a:ext cx="4937760" cy="457200"/>
           </a:xfrm>
           <a:prstGeom prst="rect">
@@ -6398,7 +6068,7 @@
           <a:noFill/>
         </p:spPr>
         <p:txBody>
-          <a:bodyPr wrap="square">
+          <a:bodyPr wrap="square" anchor="t" lIns="0" rIns="0" tIns="0" bIns="0">
             <a:spAutoFit/>
           </a:bodyPr>
           <a:lstStyle/>
@@ -6423,7 +6093,7 @@
         </p:nvSpPr>
         <p:spPr>
           <a:xfrm>
-            <a:off x="868680" y="2468880"/>
+            <a:off x="868680" y="2514600"/>
             <a:ext cx="4937760" cy="3108960"/>
           </a:xfrm>
           <a:prstGeom prst="rect">
@@ -6432,21 +6102,21 @@
           <a:noFill/>
         </p:spPr>
         <p:txBody>
-          <a:bodyPr wrap="square">
+          <a:bodyPr wrap="square" anchor="t" lIns="0" rIns="0" tIns="0" bIns="0">
             <a:spAutoFit/>
           </a:bodyPr>
           <a:lstStyle/>
           <a:p>
             <a:pPr>
               <a:lnSpc>
-                <a:spcPct val="112000"/>
+                <a:spcPct val="108000"/>
               </a:lnSpc>
               <a:spcAft>
                 <a:spcPts val="700"/>
               </a:spcAft>
             </a:pPr>
             <a:r>
-              <a:rPr sz="1200" b="1">
+              <a:rPr sz="1150" b="1">
                 <a:solidFill>
                   <a:srgbClr val="1F7A57"/>
                 </a:solidFill>
@@ -6455,26 +6125,26 @@
               <a:t>-  </a:t>
             </a:r>
             <a:r>
-              <a:rPr sz="1200" b="0">
+              <a:rPr sz="1150" b="0">
                 <a:solidFill>
                   <a:srgbClr val="6B7B73"/>
                 </a:solidFill>
                 <a:latin typeface="Hanken Grotesk"/>
               </a:rPr>
-              <a:t>Webhooks rejected: an inbound money-bearing endpoint is a spoofing surface, needs ordering + retry semantics, and the retailer offers no reliable one anyway (ADR-0009).</a:t>
+              <a:t>Webhooks rejected: an inbound money-bearing endpoint is a spoofing surface, needs ordering and retry semantics, and the retailer offers no reliable one anyway (ADR-0009).</a:t>
             </a:r>
           </a:p>
           <a:p>
             <a:pPr>
               <a:lnSpc>
-                <a:spcPct val="112000"/>
+                <a:spcPct val="108000"/>
               </a:lnSpc>
               <a:spcAft>
                 <a:spcPts val="700"/>
               </a:spcAft>
             </a:pPr>
             <a:r>
-              <a:rPr sz="1200" b="1">
+              <a:rPr sz="1150" b="1">
                 <a:solidFill>
                   <a:srgbClr val="1F7A57"/>
                 </a:solidFill>
@@ -6483,7 +6153,7 @@
               <a:t>-  </a:t>
             </a:r>
             <a:r>
-              <a:rPr sz="1200" b="0">
+              <a:rPr sz="1150" b="0">
                 <a:solidFill>
                   <a:srgbClr val="6B7B73"/>
                 </a:solidFill>
@@ -6495,14 +6165,14 @@
           <a:p>
             <a:pPr>
               <a:lnSpc>
-                <a:spcPct val="112000"/>
+                <a:spcPct val="108000"/>
               </a:lnSpc>
               <a:spcAft>
                 <a:spcPts val="700"/>
               </a:spcAft>
             </a:pPr>
             <a:r>
-              <a:rPr sz="1200" b="1">
+              <a:rPr sz="1150" b="1">
                 <a:solidFill>
                   <a:srgbClr val="1F7A57"/>
                 </a:solidFill>
@@ -6511,26 +6181,26 @@
               <a:t>-  </a:t>
             </a:r>
             <a:r>
-              <a:rPr sz="1200" b="0">
+              <a:rPr sz="1150" b="0">
                 <a:solidFill>
                   <a:srgbClr val="6B7B73"/>
                 </a:solidFill>
                 <a:latin typeface="Hanken Grotesk"/>
               </a:rPr>
-              <a:t>Accepted latency: minutes to surface, 24-48 h to confirm (retailer settlement dominates - the product promise is days, not seconds).</a:t>
+              <a:t>Accepted latency: minutes to surface, 24-48 h to confirm (retailer settlement dominates — the product promise is days, not seconds).</a:t>
             </a:r>
           </a:p>
           <a:p>
             <a:pPr>
               <a:lnSpc>
-                <a:spcPct val="112000"/>
+                <a:spcPct val="108000"/>
               </a:lnSpc>
               <a:spcAft>
                 <a:spcPts val="700"/>
               </a:spcAft>
             </a:pPr>
             <a:r>
-              <a:rPr sz="1200" b="1">
+              <a:rPr sz="1150" b="1">
                 <a:solidFill>
                   <a:srgbClr val="1F7A57"/>
                 </a:solidFill>
@@ -6539,13 +6209,13 @@
               <a:t>-  </a:t>
             </a:r>
             <a:r>
-              <a:rPr sz="1200" b="0">
+              <a:rPr sz="1150" b="0">
                 <a:solidFill>
                   <a:srgbClr val="6B7B73"/>
                 </a:solidFill>
                 <a:latin typeface="Hanken Grotesk"/>
               </a:rPr>
-              <a:t>Interim throttling (ADR-0021): sequential calls + one ban-window retry; revisit at real volume / app approval.</a:t>
+              <a:t>Interim throttling (ADR-0021): sequential calls + one ban-window retry; revisit at volume.</a:t>
             </a:r>
           </a:p>
         </p:txBody>
@@ -6563,7 +6233,7 @@
           </a:xfrm>
           <a:prstGeom prst="roundRect">
             <a:avLst>
-              <a:gd name="adj" fmla="val 5500"/>
+              <a:gd name="adj" fmla="val 4000"/>
             </a:avLst>
           </a:prstGeom>
           <a:solidFill>
@@ -6591,7 +6261,7 @@
           </a:fontRef>
         </p:style>
         <p:txBody>
-          <a:bodyPr rtlCol="0" anchor="ctr" wrap="square" lIns="146304" rIns="146304" tIns="109728" bIns="109728"/>
+          <a:bodyPr rtlCol="0" anchor="ctr"/>
           <a:lstStyle/>
           <a:p>
             <a:pPr algn="ctr"/>
@@ -6606,7 +6276,7 @@
         </p:nvSpPr>
         <p:spPr>
           <a:xfrm>
-            <a:off x="6400800" y="1938528"/>
+            <a:off x="6409944" y="1984248"/>
             <a:ext cx="4937760" cy="457200"/>
           </a:xfrm>
           <a:prstGeom prst="rect">
@@ -6615,7 +6285,7 @@
           <a:noFill/>
         </p:spPr>
         <p:txBody>
-          <a:bodyPr wrap="square">
+          <a:bodyPr wrap="square" anchor="t" lIns="0" rIns="0" tIns="0" bIns="0">
             <a:spAutoFit/>
           </a:bodyPr>
           <a:lstStyle/>
@@ -6640,7 +6310,7 @@
         </p:nvSpPr>
         <p:spPr>
           <a:xfrm>
-            <a:off x="6400800" y="2468880"/>
+            <a:off x="6409944" y="2514600"/>
             <a:ext cx="4937760" cy="3108960"/>
           </a:xfrm>
           <a:prstGeom prst="rect">
@@ -6649,21 +6319,21 @@
           <a:noFill/>
         </p:spPr>
         <p:txBody>
-          <a:bodyPr wrap="square">
+          <a:bodyPr wrap="square" anchor="t" lIns="0" rIns="0" tIns="0" bIns="0">
             <a:spAutoFit/>
           </a:bodyPr>
           <a:lstStyle/>
           <a:p>
             <a:pPr>
               <a:lnSpc>
-                <a:spcPct val="112000"/>
+                <a:spcPct val="108000"/>
               </a:lnSpc>
               <a:spcAft>
                 <a:spcPts val="700"/>
               </a:spcAft>
             </a:pPr>
             <a:r>
-              <a:rPr sz="1200" b="1">
+              <a:rPr sz="1150" b="1">
                 <a:solidFill>
                   <a:srgbClr val="1F7A57"/>
                 </a:solidFill>
@@ -6672,26 +6342,26 @@
               <a:t>-  </a:t>
             </a:r>
             <a:r>
-              <a:rPr sz="1200" b="0">
+              <a:rPr sz="1150" b="0">
                 <a:solidFill>
                   <a:srgbClr val="6B7B73"/>
                 </a:solidFill>
                 <a:latin typeface="Hanken Grotesk"/>
               </a:rPr>
-              <a:t>Lifecycle is data, not mutation: pending -&gt; confirmed -&gt; clawback are separate immutable rows; balances are always derived.</a:t>
+              <a:t>Lifecycle is data, not mutation: pending → confirmed → clawback are separate immutable rows; balances are always derived.</a:t>
             </a:r>
           </a:p>
           <a:p>
             <a:pPr>
               <a:lnSpc>
-                <a:spcPct val="112000"/>
+                <a:spcPct val="108000"/>
               </a:lnSpc>
               <a:spcAft>
                 <a:spcPts val="700"/>
               </a:spcAft>
             </a:pPr>
             <a:r>
-              <a:rPr sz="1200" b="1">
+              <a:rPr sz="1150" b="1">
                 <a:solidFill>
                   <a:srgbClr val="1F7A57"/>
                 </a:solidFill>
@@ -6700,26 +6370,26 @@
               <a:t>-  </a:t>
             </a:r>
             <a:r>
-              <a:rPr sz="1200" b="0">
+              <a:rPr sz="1150" b="0">
                 <a:solidFill>
                   <a:srgbClr val="6B7B73"/>
                 </a:solidFill>
                 <a:latin typeface="Hanken Grotesk"/>
               </a:rPr>
-              <a:t>The invariant lives in Postgres, not app code: UPDATE/DELETE revoked from every role; only poller_writer can INSERT; audit_append is SECURITY DEFINER.</a:t>
+              <a:t>The invariant lives in Postgres, not app code: UPDATE/DELETE revoked from every role; only ledger_writer can INSERT; audit_append is SECURITY DEFINER and the only door into the audit log.</a:t>
             </a:r>
           </a:p>
           <a:p>
             <a:pPr>
               <a:lnSpc>
-                <a:spcPct val="112000"/>
+                <a:spcPct val="108000"/>
               </a:lnSpc>
               <a:spcAft>
                 <a:spcPts val="700"/>
               </a:spcAft>
             </a:pPr>
             <a:r>
-              <a:rPr sz="1200" b="1">
+              <a:rPr sz="1150" b="1">
                 <a:solidFill>
                   <a:srgbClr val="1F7A57"/>
                 </a:solidFill>
@@ -6728,26 +6398,26 @@
               <a:t>-  </a:t>
             </a:r>
             <a:r>
-              <a:rPr sz="1200" b="0">
+              <a:rPr sz="1150" b="0">
                 <a:solidFill>
                   <a:srgbClr val="6B7B73"/>
                 </a:solidFill>
                 <a:latin typeface="Hanken Grotesk"/>
               </a:rPr>
-              <a:t>Hash-chained audit log makes tampering evident; admin config changes audit through the same chain.</a:t>
+              <a:t>Hash-chained audit log makes tampering evident; admin config changes audit the same way.</a:t>
             </a:r>
           </a:p>
           <a:p>
             <a:pPr>
               <a:lnSpc>
-                <a:spcPct val="112000"/>
+                <a:spcPct val="108000"/>
               </a:lnSpc>
               <a:spcAft>
                 <a:spcPts val="700"/>
               </a:spcAft>
             </a:pPr>
             <a:r>
-              <a:rPr sz="1200" b="1">
+              <a:rPr sz="1150" b="1">
                 <a:solidFill>
                   <a:srgbClr val="1F7A57"/>
                 </a:solidFill>
@@ -6756,7 +6426,7 @@
               <a:t>-  </a:t>
             </a:r>
             <a:r>
-              <a:rPr sz="1200" b="0">
+              <a:rPr sz="1150" b="0">
                 <a:solidFill>
                   <a:srgbClr val="6B7B73"/>
                 </a:solidFill>
@@ -6776,7 +6446,7 @@
         <p:spPr>
           <a:xfrm>
             <a:off x="640080" y="6455664"/>
-            <a:ext cx="10908792" cy="10972"/>
+            <a:ext cx="10908792" cy="9144"/>
           </a:xfrm>
           <a:prstGeom prst="rect">
             <a:avLst/>
@@ -6804,7 +6474,7 @@
           </a:fontRef>
         </p:style>
         <p:txBody>
-          <a:bodyPr rtlCol="0" anchor="ctr" wrap="square" lIns="146304" rIns="146304" tIns="109728" bIns="109728"/>
+          <a:bodyPr rtlCol="0" anchor="ctr"/>
           <a:lstStyle/>
           <a:p>
             <a:pPr algn="ctr"/>
@@ -6828,7 +6498,7 @@
           <a:noFill/>
         </p:spPr>
         <p:txBody>
-          <a:bodyPr wrap="square">
+          <a:bodyPr wrap="square" anchor="t" lIns="0" rIns="0" tIns="0" bIns="0">
             <a:spAutoFit/>
           </a:bodyPr>
           <a:lstStyle/>
@@ -6871,7 +6541,7 @@
           <a:noFill/>
         </p:spPr>
         <p:txBody>
-          <a:bodyPr wrap="square">
+          <a:bodyPr wrap="square" anchor="t" lIns="0" rIns="0" tIns="0" bIns="0">
             <a:spAutoFit/>
           </a:bodyPr>
           <a:lstStyle/>
@@ -6932,7 +6602,7 @@
           <a:noFill/>
         </p:spPr>
         <p:txBody>
-          <a:bodyPr wrap="square">
+          <a:bodyPr wrap="square" anchor="t" lIns="0" rIns="0" tIns="0" bIns="0">
             <a:spAutoFit/>
           </a:bodyPr>
           <a:lstStyle/>
@@ -6967,7 +6637,7 @@
           <a:noFill/>
         </p:spPr>
         <p:txBody>
-          <a:bodyPr wrap="square">
+          <a:bodyPr wrap="square" anchor="t" lIns="0" rIns="0" tIns="0" bIns="0">
             <a:spAutoFit/>
           </a:bodyPr>
           <a:lstStyle/>
@@ -7001,13 +6671,13 @@
           <a:noFill/>
         </p:spPr>
         <p:txBody>
-          <a:bodyPr wrap="square">
+          <a:bodyPr wrap="square" anchor="t" lIns="0" rIns="0" tIns="0" bIns="0">
             <a:spAutoFit/>
           </a:bodyPr>
           <a:lstStyle/>
           <a:p>
             <a:r>
-              <a:rPr sz="2500" b="1">
+              <a:rPr sz="2700" b="1">
                 <a:solidFill>
                   <a:srgbClr val="15201C"/>
                 </a:solidFill>
@@ -7044,7 +6714,7 @@
               <a:tr h="365760">
                 <a:tc>
                   <a:txBody>
-                    <a:bodyPr wrap="square"/>
+                    <a:bodyPr/>
                     <a:lstStyle/>
                     <a:p>
                       <a:pPr>
@@ -7071,7 +6741,7 @@
                 </a:tc>
                 <a:tc>
                   <a:txBody>
-                    <a:bodyPr wrap="square"/>
+                    <a:bodyPr/>
                     <a:lstStyle/>
                     <a:p>
                       <a:pPr>
@@ -7098,7 +6768,7 @@
                 </a:tc>
                 <a:tc>
                   <a:txBody>
-                    <a:bodyPr wrap="square"/>
+                    <a:bodyPr/>
                     <a:lstStyle/>
                     <a:p>
                       <a:pPr>
@@ -7127,7 +6797,7 @@
               <a:tr h="365760">
                 <a:tc>
                   <a:txBody>
-                    <a:bodyPr wrap="square"/>
+                    <a:bodyPr/>
                     <a:lstStyle/>
                     <a:p>
                       <a:pPr>
@@ -7154,7 +6824,7 @@
                 </a:tc>
                 <a:tc>
                   <a:txBody>
-                    <a:bodyPr wrap="square"/>
+                    <a:bodyPr/>
                     <a:lstStyle/>
                     <a:p>
                       <a:pPr>
@@ -7181,7 +6851,7 @@
                 </a:tc>
                 <a:tc>
                   <a:txBody>
-                    <a:bodyPr wrap="square"/>
+                    <a:bodyPr/>
                     <a:lstStyle/>
                     <a:p>
                       <a:pPr>
@@ -7210,7 +6880,7 @@
               <a:tr h="365760">
                 <a:tc>
                   <a:txBody>
-                    <a:bodyPr wrap="square"/>
+                    <a:bodyPr/>
                     <a:lstStyle/>
                     <a:p>
                       <a:pPr>
@@ -7237,7 +6907,7 @@
                 </a:tc>
                 <a:tc>
                   <a:txBody>
-                    <a:bodyPr wrap="square"/>
+                    <a:bodyPr/>
                     <a:lstStyle/>
                     <a:p>
                       <a:pPr>
@@ -7264,7 +6934,7 @@
                 </a:tc>
                 <a:tc>
                   <a:txBody>
-                    <a:bodyPr wrap="square"/>
+                    <a:bodyPr/>
                     <a:lstStyle/>
                     <a:p>
                       <a:pPr>
@@ -7279,7 +6949,7 @@
                           </a:solidFill>
                           <a:latin typeface="Hanken Grotesk"/>
                         </a:rPr>
-                        <a:t>The deliberate fixed floor: CloudFront ACL + Cognito-pool ACL - protection we chose to always-on</a:t>
+                        <a:t>The deliberate fixed floor: CloudFront ACL + Cognito-pool ACL</a:t>
                       </a:r>
                     </a:p>
                   </a:txBody>
@@ -7293,7 +6963,7 @@
               <a:tr h="365760">
                 <a:tc>
                   <a:txBody>
-                    <a:bodyPr wrap="square"/>
+                    <a:bodyPr/>
                     <a:lstStyle/>
                     <a:p>
                       <a:pPr>
@@ -7320,7 +6990,7 @@
                 </a:tc>
                 <a:tc>
                   <a:txBody>
-                    <a:bodyPr wrap="square"/>
+                    <a:bodyPr/>
                     <a:lstStyle/>
                     <a:p>
                       <a:pPr>
@@ -7347,7 +7017,7 @@
                 </a:tc>
                 <a:tc>
                   <a:txBody>
-                    <a:bodyPr wrap="square"/>
+                    <a:bodyPr/>
                     <a:lstStyle/>
                     <a:p>
                       <a:pPr>
@@ -7376,7 +7046,7 @@
               <a:tr h="365760">
                 <a:tc>
                   <a:txBody>
-                    <a:bodyPr wrap="square"/>
+                    <a:bodyPr/>
                     <a:lstStyle/>
                     <a:p>
                       <a:pPr>
@@ -7403,7 +7073,7 @@
                 </a:tc>
                 <a:tc>
                   <a:txBody>
-                    <a:bodyPr wrap="square"/>
+                    <a:bodyPr/>
                     <a:lstStyle/>
                     <a:p>
                       <a:pPr>
@@ -7430,7 +7100,7 @@
                 </a:tc>
                 <a:tc>
                   <a:txBody>
-                    <a:bodyPr wrap="square"/>
+                    <a:bodyPr/>
                     <a:lstStyle/>
                     <a:p>
                       <a:pPr>
@@ -7445,7 +7115,7 @@
                           </a:solidFill>
                           <a:latin typeface="Hanken Grotesk"/>
                         </a:rPr>
-                        <a:t>SNS hard cap (SMS sandbox); WhatsApp is ~10x cheaper per message at scale - hence WhatsApp-default</a:t>
+                        <a:t>SNS hard cap (SMS sandbox); WhatsApp ~10x cheaper per message at scale — hence WhatsApp-default</a:t>
                       </a:r>
                     </a:p>
                   </a:txBody>
@@ -7459,7 +7129,7 @@
               <a:tr h="365760">
                 <a:tc>
                   <a:txBody>
-                    <a:bodyPr wrap="square"/>
+                    <a:bodyPr/>
                     <a:lstStyle/>
                     <a:p>
                       <a:pPr>
@@ -7486,7 +7156,7 @@
                 </a:tc>
                 <a:tc>
                   <a:txBody>
-                    <a:bodyPr wrap="square"/>
+                    <a:bodyPr/>
                     <a:lstStyle/>
                     <a:p>
                       <a:pPr>
@@ -7513,7 +7183,7 @@
                 </a:tc>
                 <a:tc>
                   <a:txBody>
-                    <a:bodyPr wrap="square"/>
+                    <a:bodyPr/>
                     <a:lstStyle/>
                     <a:p>
                       <a:pPr>
@@ -7551,7 +7221,7 @@
         </p:nvSpPr>
         <p:spPr>
           <a:xfrm>
-            <a:off x="658368" y="4892040"/>
+            <a:off x="658368" y="4983480"/>
             <a:ext cx="10881360" cy="1371600"/>
           </a:xfrm>
           <a:prstGeom prst="rect">
@@ -7560,14 +7230,14 @@
           <a:noFill/>
         </p:spPr>
         <p:txBody>
-          <a:bodyPr wrap="square">
+          <a:bodyPr wrap="square" anchor="t" lIns="0" rIns="0" tIns="0" bIns="0">
             <a:spAutoFit/>
           </a:bodyPr>
           <a:lstStyle/>
           <a:p>
             <a:pPr>
               <a:lnSpc>
-                <a:spcPct val="115000"/>
+                <a:spcPct val="110000"/>
               </a:lnSpc>
               <a:spcAft>
                 <a:spcPts val="600"/>
@@ -7580,7 +7250,7 @@
                 </a:solidFill>
                 <a:latin typeface="Hanken Grotesk"/>
               </a:rPr>
-              <a:t>Costs we accepted knowingly: </a:t>
+              <a:t>Costs accepted knowingly: </a:t>
             </a:r>
             <a:r>
               <a:rPr sz="1250" b="0">
@@ -7589,13 +7259,13 @@
                 </a:solidFill>
                 <a:latin typeface="Hanken Grotesk"/>
               </a:rPr>
-              <a:t>cold-resume UX risk on first wallet read (mitigated by warm-up probe); one AWS account for dev+prod shares SMS caps and quotas - flagged for split before scale.</a:t>
+              <a:t>cold-resume UX risk on first wallet read (mitigated by warm-up probe); one AWS account for dev+prod shares SMS caps and quotas — flagged for split.</a:t>
             </a:r>
           </a:p>
           <a:p>
             <a:pPr>
               <a:lnSpc>
-                <a:spcPct val="115000"/>
+                <a:spcPct val="110000"/>
               </a:lnSpc>
               <a:spcAft>
                 <a:spcPts val="600"/>
@@ -7617,7 +7287,7 @@
                 </a:solidFill>
                 <a:latin typeface="Hanken Grotesk"/>
               </a:rPr>
-              <a:t>the redirect hot path (the viral surface) costs micro-cents per thousand clicks and cannot touch Aurora - cost scales with revenue-bearing traffic, not with virality.</a:t>
+              <a:t>the redirect hot path costs micro-cents per thousand clicks and cannot touch Aurora — cost scales with revenue-bearing traffic, not with virality.</a:t>
             </a:r>
           </a:p>
         </p:txBody>
@@ -7631,7 +7301,7 @@
         <p:spPr>
           <a:xfrm>
             <a:off x="640080" y="6455664"/>
-            <a:ext cx="10908792" cy="10972"/>
+            <a:ext cx="10908792" cy="9144"/>
           </a:xfrm>
           <a:prstGeom prst="rect">
             <a:avLst/>
@@ -7659,7 +7329,7 @@
           </a:fontRef>
         </p:style>
         <p:txBody>
-          <a:bodyPr rtlCol="0" anchor="ctr" wrap="square" lIns="146304" rIns="146304" tIns="109728" bIns="109728"/>
+          <a:bodyPr rtlCol="0" anchor="ctr"/>
           <a:lstStyle/>
           <a:p>
             <a:pPr algn="ctr"/>
@@ -7683,7 +7353,7 @@
           <a:noFill/>
         </p:spPr>
         <p:txBody>
-          <a:bodyPr wrap="square">
+          <a:bodyPr wrap="square" anchor="t" lIns="0" rIns="0" tIns="0" bIns="0">
             <a:spAutoFit/>
           </a:bodyPr>
           <a:lstStyle/>
@@ -7726,7 +7396,7 @@
           <a:noFill/>
         </p:spPr>
         <p:txBody>
-          <a:bodyPr wrap="square">
+          <a:bodyPr wrap="square" anchor="t" lIns="0" rIns="0" tIns="0" bIns="0">
             <a:spAutoFit/>
           </a:bodyPr>
           <a:lstStyle/>
@@ -7787,7 +7457,7 @@
           <a:noFill/>
         </p:spPr>
         <p:txBody>
-          <a:bodyPr wrap="square">
+          <a:bodyPr wrap="square" anchor="t" lIns="0" rIns="0" tIns="0" bIns="0">
             <a:spAutoFit/>
           </a:bodyPr>
           <a:lstStyle/>
@@ -7822,7 +7492,7 @@
           <a:noFill/>
         </p:spPr>
         <p:txBody>
-          <a:bodyPr wrap="square">
+          <a:bodyPr wrap="square" anchor="t" lIns="0" rIns="0" tIns="0" bIns="0">
             <a:spAutoFit/>
           </a:bodyPr>
           <a:lstStyle/>
@@ -7856,7 +7526,7 @@
           <a:noFill/>
         </p:spPr>
         <p:txBody>
-          <a:bodyPr wrap="square">
+          <a:bodyPr wrap="square" anchor="t" lIns="0" rIns="0" tIns="0" bIns="0">
             <a:spAutoFit/>
           </a:bodyPr>
           <a:lstStyle/>
@@ -7899,7 +7569,7 @@
               <a:tr h="365760">
                 <a:tc>
                   <a:txBody>
-                    <a:bodyPr wrap="square"/>
+                    <a:bodyPr/>
                     <a:lstStyle/>
                     <a:p>
                       <a:pPr>
@@ -7926,7 +7596,7 @@
                 </a:tc>
                 <a:tc>
                   <a:txBody>
-                    <a:bodyPr wrap="square"/>
+                    <a:bodyPr/>
                     <a:lstStyle/>
                     <a:p>
                       <a:pPr>
@@ -7953,7 +7623,7 @@
                 </a:tc>
                 <a:tc>
                   <a:txBody>
-                    <a:bodyPr wrap="square"/>
+                    <a:bodyPr/>
                     <a:lstStyle/>
                     <a:p>
                       <a:pPr>
@@ -7982,7 +7652,7 @@
               <a:tr h="365760">
                 <a:tc>
                   <a:txBody>
-                    <a:bodyPr wrap="square"/>
+                    <a:bodyPr/>
                     <a:lstStyle/>
                     <a:p>
                       <a:pPr>
@@ -8009,7 +7679,7 @@
                 </a:tc>
                 <a:tc>
                   <a:txBody>
-                    <a:bodyPr wrap="square"/>
+                    <a:bodyPr/>
                     <a:lstStyle/>
                     <a:p>
                       <a:pPr>
@@ -8036,7 +7706,7 @@
                 </a:tc>
                 <a:tc>
                   <a:txBody>
-                    <a:bodyPr wrap="square"/>
+                    <a:bodyPr/>
                     <a:lstStyle/>
                     <a:p>
                       <a:pPr>
@@ -8065,7 +7735,7 @@
               <a:tr h="365760">
                 <a:tc>
                   <a:txBody>
-                    <a:bodyPr wrap="square"/>
+                    <a:bodyPr/>
                     <a:lstStyle/>
                     <a:p>
                       <a:pPr>
@@ -8092,7 +7762,7 @@
                 </a:tc>
                 <a:tc>
                   <a:txBody>
-                    <a:bodyPr wrap="square"/>
+                    <a:bodyPr/>
                     <a:lstStyle/>
                     <a:p>
                       <a:pPr>
@@ -8119,7 +7789,7 @@
                 </a:tc>
                 <a:tc>
                   <a:txBody>
-                    <a:bodyPr wrap="square"/>
+                    <a:bodyPr/>
                     <a:lstStyle/>
                     <a:p>
                       <a:pPr>
@@ -8134,7 +7804,7 @@
                           </a:solidFill>
                           <a:latin typeface="Hanken Grotesk"/>
                         </a:rPr>
-                        <a:t>Compliance/BI needs -&gt; dual-write projection to SQL</a:t>
+                        <a:t>Compliance/BI needs → dual-write projection to SQL</a:t>
                       </a:r>
                     </a:p>
                   </a:txBody>
@@ -8148,7 +7818,7 @@
               <a:tr h="365760">
                 <a:tc>
                   <a:txBody>
-                    <a:bodyPr wrap="square"/>
+                    <a:bodyPr/>
                     <a:lstStyle/>
                     <a:p>
                       <a:pPr>
@@ -8175,7 +7845,7 @@
                 </a:tc>
                 <a:tc>
                   <a:txBody>
-                    <a:bodyPr wrap="square"/>
+                    <a:bodyPr/>
                     <a:lstStyle/>
                     <a:p>
                       <a:pPr>
@@ -8202,7 +7872,7 @@
                 </a:tc>
                 <a:tc>
                   <a:txBody>
-                    <a:bodyPr wrap="square"/>
+                    <a:bodyPr/>
                     <a:lstStyle/>
                     <a:p>
                       <a:pPr>
@@ -8217,7 +7887,7 @@
                           </a:solidFill>
                           <a:latin typeface="Hanken Grotesk"/>
                         </a:rPr>
-                        <a:t>Any sensitive member mutation -&gt; short tokens or in-handler check</a:t>
+                        <a:t>Any sensitive member mutation → short tokens or in-handler check</a:t>
                       </a:r>
                     </a:p>
                   </a:txBody>
@@ -8231,7 +7901,7 @@
               <a:tr h="365760">
                 <a:tc>
                   <a:txBody>
-                    <a:bodyPr wrap="square"/>
+                    <a:bodyPr/>
                     <a:lstStyle/>
                     <a:p>
                       <a:pPr>
@@ -8258,7 +7928,7 @@
                 </a:tc>
                 <a:tc>
                   <a:txBody>
-                    <a:bodyPr wrap="square"/>
+                    <a:bodyPr/>
                     <a:lstStyle/>
                     <a:p>
                       <a:pPr>
@@ -8285,7 +7955,7 @@
                 </a:tc>
                 <a:tc>
                   <a:txBody>
-                    <a:bodyPr wrap="square"/>
+                    <a:bodyPr/>
                     <a:lstStyle/>
                     <a:p>
                       <a:pPr>
@@ -8314,7 +7984,7 @@
               <a:tr h="365760">
                 <a:tc>
                   <a:txBody>
-                    <a:bodyPr wrap="square"/>
+                    <a:bodyPr/>
                     <a:lstStyle/>
                     <a:p>
                       <a:pPr>
@@ -8341,7 +8011,7 @@
                 </a:tc>
                 <a:tc>
                   <a:txBody>
-                    <a:bodyPr wrap="square"/>
+                    <a:bodyPr/>
                     <a:lstStyle/>
                     <a:p>
                       <a:pPr>
@@ -8368,7 +8038,7 @@
                 </a:tc>
                 <a:tc>
                   <a:txBody>
-                    <a:bodyPr wrap="square"/>
+                    <a:bodyPr/>
                     <a:lstStyle/>
                     <a:p>
                       <a:pPr>
@@ -8397,7 +8067,7 @@
               <a:tr h="365760">
                 <a:tc>
                   <a:txBody>
-                    <a:bodyPr wrap="square"/>
+                    <a:bodyPr/>
                     <a:lstStyle/>
                     <a:p>
                       <a:pPr>
@@ -8424,7 +8094,7 @@
                 </a:tc>
                 <a:tc>
                   <a:txBody>
-                    <a:bodyPr wrap="square"/>
+                    <a:bodyPr/>
                     <a:lstStyle/>
                     <a:p>
                       <a:pPr>
@@ -8439,7 +8109,7 @@
                           </a:solidFill>
                           <a:latin typeface="Hanken Grotesk"/>
                         </a:rPr>
-                        <a:t>Sequential calls + one ban-window retry (ADR-0021)</a:t>
+                        <a:t>Sequential + one ban-window retry (ADR-0021)</a:t>
                       </a:r>
                     </a:p>
                   </a:txBody>
@@ -8451,7 +8121,7 @@
                 </a:tc>
                 <a:tc>
                   <a:txBody>
-                    <a:bodyPr wrap="square"/>
+                    <a:bodyPr/>
                     <a:lstStyle/>
                     <a:p>
                       <a:pPr>
@@ -8498,7 +8168,7 @@
           <a:noFill/>
         </p:spPr>
         <p:txBody>
-          <a:bodyPr wrap="square">
+          <a:bodyPr wrap="square" anchor="t" lIns="0" rIns="0" tIns="0" bIns="0">
             <a:spAutoFit/>
           </a:bodyPr>
           <a:lstStyle/>
@@ -8533,7 +8203,7 @@
         <p:spPr>
           <a:xfrm>
             <a:off x="640080" y="6455664"/>
-            <a:ext cx="10908792" cy="10972"/>
+            <a:ext cx="10908792" cy="9144"/>
           </a:xfrm>
           <a:prstGeom prst="rect">
             <a:avLst/>
@@ -8561,7 +8231,7 @@
           </a:fontRef>
         </p:style>
         <p:txBody>
-          <a:bodyPr rtlCol="0" anchor="ctr" wrap="square" lIns="146304" rIns="146304" tIns="109728" bIns="109728"/>
+          <a:bodyPr rtlCol="0" anchor="ctr"/>
           <a:lstStyle/>
           <a:p>
             <a:pPr algn="ctr"/>
@@ -8585,7 +8255,7 @@
           <a:noFill/>
         </p:spPr>
         <p:txBody>
-          <a:bodyPr wrap="square">
+          <a:bodyPr wrap="square" anchor="t" lIns="0" rIns="0" tIns="0" bIns="0">
             <a:spAutoFit/>
           </a:bodyPr>
           <a:lstStyle/>
@@ -8628,7 +8298,7 @@
           <a:noFill/>
         </p:spPr>
         <p:txBody>
-          <a:bodyPr wrap="square">
+          <a:bodyPr wrap="square" anchor="t" lIns="0" rIns="0" tIns="0" bIns="0">
             <a:spAutoFit/>
           </a:bodyPr>
           <a:lstStyle/>
@@ -8709,7 +8379,7 @@
           </a:fontRef>
         </p:style>
         <p:txBody>
-          <a:bodyPr rtlCol="0" anchor="ctr" wrap="square" lIns="146304" rIns="146304" tIns="109728" bIns="109728"/>
+          <a:bodyPr rtlCol="0" anchor="ctr"/>
           <a:lstStyle/>
           <a:p>
             <a:pPr algn="ctr"/>
@@ -8733,7 +8403,7 @@
           <a:noFill/>
         </p:spPr>
         <p:txBody>
-          <a:bodyPr wrap="square">
+          <a:bodyPr wrap="square" anchor="t" lIns="0" rIns="0" tIns="0" bIns="0">
             <a:spAutoFit/>
           </a:bodyPr>
           <a:lstStyle/>
@@ -8767,7 +8437,7 @@
           <a:noFill/>
         </p:spPr>
         <p:txBody>
-          <a:bodyPr wrap="square">
+          <a:bodyPr wrap="square" anchor="t" lIns="0" rIns="0" tIns="0" bIns="0">
             <a:spAutoFit/>
           </a:bodyPr>
           <a:lstStyle/>
@@ -8801,7 +8471,7 @@
           <a:noFill/>
         </p:spPr>
         <p:txBody>
-          <a:bodyPr wrap="square">
+          <a:bodyPr wrap="square" anchor="t" lIns="0" rIns="0" tIns="0" bIns="0">
             <a:spAutoFit/>
           </a:bodyPr>
           <a:lstStyle/>
@@ -8861,7 +8531,7 @@
           <a:noFill/>
         </p:spPr>
         <p:txBody>
-          <a:bodyPr wrap="square">
+          <a:bodyPr wrap="square" anchor="t" lIns="0" rIns="0" tIns="0" bIns="0">
             <a:spAutoFit/>
           </a:bodyPr>
           <a:lstStyle/>
@@ -8896,7 +8566,7 @@
           <a:noFill/>
         </p:spPr>
         <p:txBody>
-          <a:bodyPr wrap="square">
+          <a:bodyPr wrap="square" anchor="t" lIns="0" rIns="0" tIns="0" bIns="0">
             <a:spAutoFit/>
           </a:bodyPr>
           <a:lstStyle/>
@@ -8930,13 +8600,13 @@
           <a:noFill/>
         </p:spPr>
         <p:txBody>
-          <a:bodyPr wrap="square">
+          <a:bodyPr wrap="square" anchor="t" lIns="0" rIns="0" tIns="0" bIns="0">
             <a:spAutoFit/>
           </a:bodyPr>
           <a:lstStyle/>
           <a:p>
             <a:r>
-              <a:rPr sz="2300" b="1">
+              <a:rPr sz="2700" b="1">
                 <a:solidFill>
                   <a:srgbClr val="15201C"/>
                 </a:solidFill>
@@ -8955,12 +8625,12 @@
         </p:nvSpPr>
         <p:spPr>
           <a:xfrm>
-            <a:off x="2083196" y="1618488"/>
-            <a:ext cx="8025303" cy="4901184"/>
+            <a:off x="2904158" y="1618488"/>
+            <a:ext cx="6383378" cy="4901184"/>
           </a:xfrm>
           <a:prstGeom prst="roundRect">
             <a:avLst>
-              <a:gd name="adj" fmla="val 5500"/>
+              <a:gd name="adj" fmla="val 3000"/>
             </a:avLst>
           </a:prstGeom>
           <a:solidFill>
@@ -8988,7 +8658,7 @@
           </a:fontRef>
         </p:style>
         <p:txBody>
-          <a:bodyPr rtlCol="0" anchor="ctr" wrap="square" lIns="146304" rIns="146304" tIns="109728" bIns="109728"/>
+          <a:bodyPr rtlCol="0" anchor="ctr"/>
           <a:lstStyle/>
           <a:p>
             <a:pPr algn="ctr"/>
@@ -8997,7 +8667,7 @@
       </p:sp>
       <p:pic>
         <p:nvPicPr>
-          <p:cNvPr id="6" name="Picture 5" descr="diagram-2.png"/>
+          <p:cNvPr id="6" name="Picture 5" descr="slide-B1.png"/>
           <p:cNvPicPr>
             <a:picLocks noChangeAspect="1"/>
           </p:cNvPicPr>
@@ -9011,8 +8681,8 @@
         </p:blipFill>
         <p:spPr>
           <a:xfrm>
-            <a:off x="2247788" y="1783080"/>
-            <a:ext cx="7696119" cy="4572000"/>
+            <a:off x="3068750" y="1783080"/>
+            <a:ext cx="6054194" cy="4572000"/>
           </a:xfrm>
           <a:prstGeom prst="rect">
             <a:avLst/>
@@ -9028,7 +8698,7 @@
         <p:spPr>
           <a:xfrm>
             <a:off x="640080" y="6455664"/>
-            <a:ext cx="10908792" cy="10972"/>
+            <a:ext cx="10908792" cy="9144"/>
           </a:xfrm>
           <a:prstGeom prst="rect">
             <a:avLst/>
@@ -9056,7 +8726,7 @@
           </a:fontRef>
         </p:style>
         <p:txBody>
-          <a:bodyPr rtlCol="0" anchor="ctr" wrap="square" lIns="146304" rIns="146304" tIns="109728" bIns="109728"/>
+          <a:bodyPr rtlCol="0" anchor="ctr"/>
           <a:lstStyle/>
           <a:p>
             <a:pPr algn="ctr"/>
@@ -9080,7 +8750,7 @@
           <a:noFill/>
         </p:spPr>
         <p:txBody>
-          <a:bodyPr wrap="square">
+          <a:bodyPr wrap="square" anchor="t" lIns="0" rIns="0" tIns="0" bIns="0">
             <a:spAutoFit/>
           </a:bodyPr>
           <a:lstStyle/>
@@ -9123,7 +8793,7 @@
           <a:noFill/>
         </p:spPr>
         <p:txBody>
-          <a:bodyPr wrap="square">
+          <a:bodyPr wrap="square" anchor="t" lIns="0" rIns="0" tIns="0" bIns="0">
             <a:spAutoFit/>
           </a:bodyPr>
           <a:lstStyle/>
@@ -9184,7 +8854,7 @@
           <a:noFill/>
         </p:spPr>
         <p:txBody>
-          <a:bodyPr wrap="square">
+          <a:bodyPr wrap="square" anchor="t" lIns="0" rIns="0" tIns="0" bIns="0">
             <a:spAutoFit/>
           </a:bodyPr>
           <a:lstStyle/>
@@ -9219,7 +8889,7 @@
           <a:noFill/>
         </p:spPr>
         <p:txBody>
-          <a:bodyPr wrap="square">
+          <a:bodyPr wrap="square" anchor="t" lIns="0" rIns="0" tIns="0" bIns="0">
             <a:spAutoFit/>
           </a:bodyPr>
           <a:lstStyle/>
@@ -9253,13 +8923,13 @@
           <a:noFill/>
         </p:spPr>
         <p:txBody>
-          <a:bodyPr wrap="square">
+          <a:bodyPr wrap="square" anchor="t" lIns="0" rIns="0" tIns="0" bIns="0">
             <a:spAutoFit/>
           </a:bodyPr>
           <a:lstStyle/>
           <a:p>
             <a:r>
-              <a:rPr sz="2300" b="1">
+              <a:rPr sz="2700" b="1">
                 <a:solidFill>
                   <a:srgbClr val="15201C"/>
                 </a:solidFill>
@@ -9278,12 +8948,12 @@
         </p:nvSpPr>
         <p:spPr>
           <a:xfrm>
-            <a:off x="1684386" y="1618488"/>
-            <a:ext cx="8822921" cy="4901184"/>
+            <a:off x="805464" y="1618488"/>
+            <a:ext cx="10580767" cy="4901184"/>
           </a:xfrm>
           <a:prstGeom prst="roundRect">
             <a:avLst>
-              <a:gd name="adj" fmla="val 5500"/>
+              <a:gd name="adj" fmla="val 3000"/>
             </a:avLst>
           </a:prstGeom>
           <a:solidFill>
@@ -9311,7 +8981,7 @@
           </a:fontRef>
         </p:style>
         <p:txBody>
-          <a:bodyPr rtlCol="0" anchor="ctr" wrap="square" lIns="146304" rIns="146304" tIns="109728" bIns="109728"/>
+          <a:bodyPr rtlCol="0" anchor="ctr"/>
           <a:lstStyle/>
           <a:p>
             <a:pPr algn="ctr"/>
@@ -9320,7 +8990,7 @@
       </p:sp>
       <p:pic>
         <p:nvPicPr>
-          <p:cNvPr id="6" name="Picture 5" descr="diagram-3.png"/>
+          <p:cNvPr id="6" name="Picture 5" descr="slide-B2.png"/>
           <p:cNvPicPr>
             <a:picLocks noChangeAspect="1"/>
           </p:cNvPicPr>
@@ -9334,8 +9004,8 @@
         </p:blipFill>
         <p:spPr>
           <a:xfrm>
-            <a:off x="1848978" y="1783080"/>
-            <a:ext cx="8493737" cy="4572000"/>
+            <a:off x="970056" y="1783080"/>
+            <a:ext cx="10251583" cy="4572000"/>
           </a:xfrm>
           <a:prstGeom prst="rect">
             <a:avLst/>
@@ -9351,7 +9021,7 @@
         <p:spPr>
           <a:xfrm>
             <a:off x="640080" y="6455664"/>
-            <a:ext cx="10908792" cy="10972"/>
+            <a:ext cx="10908792" cy="9144"/>
           </a:xfrm>
           <a:prstGeom prst="rect">
             <a:avLst/>
@@ -9379,7 +9049,7 @@
           </a:fontRef>
         </p:style>
         <p:txBody>
-          <a:bodyPr rtlCol="0" anchor="ctr" wrap="square" lIns="146304" rIns="146304" tIns="109728" bIns="109728"/>
+          <a:bodyPr rtlCol="0" anchor="ctr"/>
           <a:lstStyle/>
           <a:p>
             <a:pPr algn="ctr"/>
@@ -9403,7 +9073,7 @@
           <a:noFill/>
         </p:spPr>
         <p:txBody>
-          <a:bodyPr wrap="square">
+          <a:bodyPr wrap="square" anchor="t" lIns="0" rIns="0" tIns="0" bIns="0">
             <a:spAutoFit/>
           </a:bodyPr>
           <a:lstStyle/>
@@ -9446,7 +9116,7 @@
           <a:noFill/>
         </p:spPr>
         <p:txBody>
-          <a:bodyPr wrap="square">
+          <a:bodyPr wrap="square" anchor="t" lIns="0" rIns="0" tIns="0" bIns="0">
             <a:spAutoFit/>
           </a:bodyPr>
           <a:lstStyle/>
@@ -9507,7 +9177,7 @@
           <a:noFill/>
         </p:spPr>
         <p:txBody>
-          <a:bodyPr wrap="square">
+          <a:bodyPr wrap="square" anchor="t" lIns="0" rIns="0" tIns="0" bIns="0">
             <a:spAutoFit/>
           </a:bodyPr>
           <a:lstStyle/>
@@ -9542,7 +9212,7 @@
           <a:noFill/>
         </p:spPr>
         <p:txBody>
-          <a:bodyPr wrap="square">
+          <a:bodyPr wrap="square" anchor="t" lIns="0" rIns="0" tIns="0" bIns="0">
             <a:spAutoFit/>
           </a:bodyPr>
           <a:lstStyle/>
@@ -9576,13 +9246,13 @@
           <a:noFill/>
         </p:spPr>
         <p:txBody>
-          <a:bodyPr wrap="square">
+          <a:bodyPr wrap="square" anchor="t" lIns="0" rIns="0" tIns="0" bIns="0">
             <a:spAutoFit/>
           </a:bodyPr>
           <a:lstStyle/>
           <a:p>
             <a:r>
-              <a:rPr sz="2300" b="1">
+              <a:rPr sz="2700" b="1">
                 <a:solidFill>
                   <a:srgbClr val="15201C"/>
                 </a:solidFill>
@@ -9601,12 +9271,12 @@
         </p:nvSpPr>
         <p:spPr>
           <a:xfrm>
-            <a:off x="1733372" y="1618488"/>
-            <a:ext cx="8724950" cy="4901184"/>
+            <a:off x="673455" y="1879849"/>
+            <a:ext cx="10844784" cy="4378460"/>
           </a:xfrm>
           <a:prstGeom prst="roundRect">
             <a:avLst>
-              <a:gd name="adj" fmla="val 5500"/>
+              <a:gd name="adj" fmla="val 3000"/>
             </a:avLst>
           </a:prstGeom>
           <a:solidFill>
@@ -9634,7 +9304,7 @@
           </a:fontRef>
         </p:style>
         <p:txBody>
-          <a:bodyPr rtlCol="0" anchor="ctr" wrap="square" lIns="146304" rIns="146304" tIns="109728" bIns="109728"/>
+          <a:bodyPr rtlCol="0" anchor="ctr"/>
           <a:lstStyle/>
           <a:p>
             <a:pPr algn="ctr"/>
@@ -9643,7 +9313,7 @@
       </p:sp>
       <p:pic>
         <p:nvPicPr>
-          <p:cNvPr id="6" name="Picture 5" descr="diagram-4.png"/>
+          <p:cNvPr id="6" name="Picture 5" descr="slide-B3.png"/>
           <p:cNvPicPr>
             <a:picLocks noChangeAspect="1"/>
           </p:cNvPicPr>
@@ -9657,8 +9327,8 @@
         </p:blipFill>
         <p:spPr>
           <a:xfrm>
-            <a:off x="1897964" y="1783080"/>
-            <a:ext cx="8395766" cy="4572000"/>
+            <a:off x="838047" y="2044441"/>
+            <a:ext cx="10515600" cy="4049276"/>
           </a:xfrm>
           <a:prstGeom prst="rect">
             <a:avLst/>
@@ -9674,7 +9344,7 @@
         <p:spPr>
           <a:xfrm>
             <a:off x="640080" y="6455664"/>
-            <a:ext cx="10908792" cy="10972"/>
+            <a:ext cx="10908792" cy="9144"/>
           </a:xfrm>
           <a:prstGeom prst="rect">
             <a:avLst/>
@@ -9702,7 +9372,7 @@
           </a:fontRef>
         </p:style>
         <p:txBody>
-          <a:bodyPr rtlCol="0" anchor="ctr" wrap="square" lIns="146304" rIns="146304" tIns="109728" bIns="109728"/>
+          <a:bodyPr rtlCol="0" anchor="ctr"/>
           <a:lstStyle/>
           <a:p>
             <a:pPr algn="ctr"/>
@@ -9726,7 +9396,7 @@
           <a:noFill/>
         </p:spPr>
         <p:txBody>
-          <a:bodyPr wrap="square">
+          <a:bodyPr wrap="square" anchor="t" lIns="0" rIns="0" tIns="0" bIns="0">
             <a:spAutoFit/>
           </a:bodyPr>
           <a:lstStyle/>
@@ -9769,7 +9439,7 @@
           <a:noFill/>
         </p:spPr>
         <p:txBody>
-          <a:bodyPr wrap="square">
+          <a:bodyPr wrap="square" anchor="t" lIns="0" rIns="0" tIns="0" bIns="0">
             <a:spAutoFit/>
           </a:bodyPr>
           <a:lstStyle/>
@@ -9830,7 +9500,7 @@
           <a:noFill/>
         </p:spPr>
         <p:txBody>
-          <a:bodyPr wrap="square">
+          <a:bodyPr wrap="square" anchor="t" lIns="0" rIns="0" tIns="0" bIns="0">
             <a:spAutoFit/>
           </a:bodyPr>
           <a:lstStyle/>
@@ -9865,7 +9535,7 @@
           <a:noFill/>
         </p:spPr>
         <p:txBody>
-          <a:bodyPr wrap="square">
+          <a:bodyPr wrap="square" anchor="t" lIns="0" rIns="0" tIns="0" bIns="0">
             <a:spAutoFit/>
           </a:bodyPr>
           <a:lstStyle/>
@@ -9899,13 +9569,13 @@
           <a:noFill/>
         </p:spPr>
         <p:txBody>
-          <a:bodyPr wrap="square">
+          <a:bodyPr wrap="square" anchor="t" lIns="0" rIns="0" tIns="0" bIns="0">
             <a:spAutoFit/>
           </a:bodyPr>
           <a:lstStyle/>
           <a:p>
             <a:r>
-              <a:rPr sz="2300" b="1">
+              <a:rPr sz="2700" b="1">
                 <a:solidFill>
                   <a:srgbClr val="15201C"/>
                 </a:solidFill>
@@ -9929,7 +9599,7 @@
           </a:xfrm>
           <a:prstGeom prst="roundRect">
             <a:avLst>
-              <a:gd name="adj" fmla="val 5500"/>
+              <a:gd name="adj" fmla="val 4000"/>
             </a:avLst>
           </a:prstGeom>
           <a:solidFill>
@@ -9957,7 +9627,7 @@
           </a:fontRef>
         </p:style>
         <p:txBody>
-          <a:bodyPr rtlCol="0" anchor="ctr" wrap="square" lIns="146304" rIns="146304" tIns="109728" bIns="109728"/>
+          <a:bodyPr rtlCol="0" anchor="ctr"/>
           <a:lstStyle/>
           <a:p>
             <a:pPr algn="ctr"/>
@@ -9977,7 +9647,7 @@
           </a:xfrm>
           <a:prstGeom prst="roundRect">
             <a:avLst>
-              <a:gd name="adj" fmla="val 28000"/>
+              <a:gd name="adj" fmla="val 22000"/>
             </a:avLst>
           </a:prstGeom>
           <a:solidFill>
@@ -10005,7 +9675,7 @@
           </a:fontRef>
         </p:style>
         <p:txBody>
-          <a:bodyPr rtlCol="0" anchor="ctr" wrap="square" lIns="146304" rIns="146304" tIns="109728" bIns="109728"/>
+          <a:bodyPr rtlCol="0" anchor="ctr"/>
           <a:lstStyle/>
           <a:p>
             <a:pPr algn="ctr"/>
@@ -10014,7 +9684,7 @@
       </p:sp>
       <p:pic>
         <p:nvPicPr>
-          <p:cNvPr id="7" name="Picture 6" descr="bank.png"/>
+          <p:cNvPr id="7" name="Picture 6" descr="s03_i5.png"/>
           <p:cNvPicPr>
             <a:picLocks noChangeAspect="1"/>
           </p:cNvPicPr>
@@ -10028,8 +9698,8 @@
         </p:blipFill>
         <p:spPr>
           <a:xfrm>
-            <a:off x="925007" y="2068007"/>
-            <a:ext cx="289681" cy="289681"/>
+            <a:off x="923544" y="2066544"/>
+            <a:ext cx="292608" cy="292608"/>
           </a:xfrm>
           <a:prstGeom prst="rect">
             <a:avLst/>
@@ -10053,7 +9723,7 @@
           <a:noFill/>
         </p:spPr>
         <p:txBody>
-          <a:bodyPr wrap="square">
+          <a:bodyPr wrap="square" anchor="t" lIns="0" rIns="0" tIns="0" bIns="0">
             <a:spAutoFit/>
           </a:bodyPr>
           <a:lstStyle/>
@@ -10087,12 +9757,15 @@
           <a:noFill/>
         </p:spPr>
         <p:txBody>
-          <a:bodyPr wrap="square">
+          <a:bodyPr wrap="square" anchor="t" lIns="0" rIns="0" tIns="0" bIns="0">
             <a:spAutoFit/>
           </a:bodyPr>
           <a:lstStyle/>
           <a:p>
             <a:pPr>
+              <a:lnSpc>
+                <a:spcPct val="105000"/>
+              </a:lnSpc>
               <a:spcAft>
                 <a:spcPts val="500"/>
               </a:spcAft>
@@ -10109,6 +9782,9 @@
           </a:p>
           <a:p>
             <a:pPr>
+              <a:lnSpc>
+                <a:spcPct val="105000"/>
+              </a:lnSpc>
               <a:spcAft>
                 <a:spcPts val="500"/>
               </a:spcAft>
@@ -10125,6 +9801,9 @@
           </a:p>
           <a:p>
             <a:pPr>
+              <a:lnSpc>
+                <a:spcPct val="105000"/>
+              </a:lnSpc>
               <a:spcAft>
                 <a:spcPts val="500"/>
               </a:spcAft>
@@ -10141,6 +9820,9 @@
           </a:p>
           <a:p>
             <a:pPr>
+              <a:lnSpc>
+                <a:spcPct val="105000"/>
+              </a:lnSpc>
               <a:spcAft>
                 <a:spcPts val="500"/>
               </a:spcAft>
@@ -10157,6 +9839,9 @@
           </a:p>
           <a:p>
             <a:pPr>
+              <a:lnSpc>
+                <a:spcPct val="105000"/>
+              </a:lnSpc>
               <a:spcAft>
                 <a:spcPts val="500"/>
               </a:spcAft>
@@ -10173,6 +9858,9 @@
           </a:p>
           <a:p>
             <a:pPr>
+              <a:lnSpc>
+                <a:spcPct val="105000"/>
+              </a:lnSpc>
               <a:spcAft>
                 <a:spcPts val="500"/>
               </a:spcAft>
@@ -10189,6 +9877,9 @@
           </a:p>
           <a:p>
             <a:pPr>
+              <a:lnSpc>
+                <a:spcPct val="105000"/>
+              </a:lnSpc>
               <a:spcAft>
                 <a:spcPts val="500"/>
               </a:spcAft>
@@ -10205,6 +9896,9 @@
           </a:p>
           <a:p>
             <a:pPr>
+              <a:lnSpc>
+                <a:spcPct val="105000"/>
+              </a:lnSpc>
               <a:spcAft>
                 <a:spcPts val="500"/>
               </a:spcAft>
@@ -10221,6 +9915,9 @@
           </a:p>
           <a:p>
             <a:pPr>
+              <a:lnSpc>
+                <a:spcPct val="105000"/>
+              </a:lnSpc>
               <a:spcAft>
                 <a:spcPts val="500"/>
               </a:spcAft>
@@ -10250,7 +9947,7 @@
           </a:xfrm>
           <a:prstGeom prst="roundRect">
             <a:avLst>
-              <a:gd name="adj" fmla="val 5500"/>
+              <a:gd name="adj" fmla="val 4000"/>
             </a:avLst>
           </a:prstGeom>
           <a:solidFill>
@@ -10278,7 +9975,7 @@
           </a:fontRef>
         </p:style>
         <p:txBody>
-          <a:bodyPr rtlCol="0" anchor="ctr" wrap="square" lIns="146304" rIns="146304" tIns="109728" bIns="109728"/>
+          <a:bodyPr rtlCol="0" anchor="ctr"/>
           <a:lstStyle/>
           <a:p>
             <a:pPr algn="ctr"/>
@@ -10298,7 +9995,7 @@
           </a:xfrm>
           <a:prstGeom prst="roundRect">
             <a:avLst>
-              <a:gd name="adj" fmla="val 28000"/>
+              <a:gd name="adj" fmla="val 22000"/>
             </a:avLst>
           </a:prstGeom>
           <a:solidFill>
@@ -10326,7 +10023,7 @@
           </a:fontRef>
         </p:style>
         <p:txBody>
-          <a:bodyPr rtlCol="0" anchor="ctr" wrap="square" lIns="146304" rIns="146304" tIns="109728" bIns="109728"/>
+          <a:bodyPr rtlCol="0" anchor="ctr"/>
           <a:lstStyle/>
           <a:p>
             <a:pPr algn="ctr"/>
@@ -10335,7 +10032,7 @@
       </p:sp>
       <p:pic>
         <p:nvPicPr>
-          <p:cNvPr id="12" name="Picture 11" descr="sliders.png"/>
+          <p:cNvPr id="12" name="Picture 11" descr="s18_i2.png"/>
           <p:cNvPicPr>
             <a:picLocks noChangeAspect="1"/>
           </p:cNvPicPr>
@@ -10349,8 +10046,8 @@
         </p:blipFill>
         <p:spPr>
           <a:xfrm>
-            <a:off x="4719767" y="2068007"/>
-            <a:ext cx="289681" cy="289681"/>
+            <a:off x="4718304" y="2066544"/>
+            <a:ext cx="292608" cy="292608"/>
           </a:xfrm>
           <a:prstGeom prst="rect">
             <a:avLst/>
@@ -10374,7 +10071,7 @@
           <a:noFill/>
         </p:spPr>
         <p:txBody>
-          <a:bodyPr wrap="square">
+          <a:bodyPr wrap="square" anchor="t" lIns="0" rIns="0" tIns="0" bIns="0">
             <a:spAutoFit/>
           </a:bodyPr>
           <a:lstStyle/>
@@ -10408,12 +10105,15 @@
           <a:noFill/>
         </p:spPr>
         <p:txBody>
-          <a:bodyPr wrap="square">
+          <a:bodyPr wrap="square" anchor="t" lIns="0" rIns="0" tIns="0" bIns="0">
             <a:spAutoFit/>
           </a:bodyPr>
           <a:lstStyle/>
           <a:p>
             <a:pPr>
+              <a:lnSpc>
+                <a:spcPct val="105000"/>
+              </a:lnSpc>
               <a:spcAft>
                 <a:spcPts val="500"/>
               </a:spcAft>
@@ -10430,6 +10130,9 @@
           </a:p>
           <a:p>
             <a:pPr>
+              <a:lnSpc>
+                <a:spcPct val="105000"/>
+              </a:lnSpc>
               <a:spcAft>
                 <a:spcPts val="500"/>
               </a:spcAft>
@@ -10446,6 +10149,9 @@
           </a:p>
           <a:p>
             <a:pPr>
+              <a:lnSpc>
+                <a:spcPct val="105000"/>
+              </a:lnSpc>
               <a:spcAft>
                 <a:spcPts val="500"/>
               </a:spcAft>
@@ -10462,6 +10168,9 @@
           </a:p>
           <a:p>
             <a:pPr>
+              <a:lnSpc>
+                <a:spcPct val="105000"/>
+              </a:lnSpc>
               <a:spcAft>
                 <a:spcPts val="500"/>
               </a:spcAft>
@@ -10478,6 +10187,9 @@
           </a:p>
           <a:p>
             <a:pPr>
+              <a:lnSpc>
+                <a:spcPct val="105000"/>
+              </a:lnSpc>
               <a:spcAft>
                 <a:spcPts val="500"/>
               </a:spcAft>
@@ -10494,6 +10206,9 @@
           </a:p>
           <a:p>
             <a:pPr>
+              <a:lnSpc>
+                <a:spcPct val="105000"/>
+              </a:lnSpc>
               <a:spcAft>
                 <a:spcPts val="500"/>
               </a:spcAft>
@@ -10510,6 +10225,9 @@
           </a:p>
           <a:p>
             <a:pPr>
+              <a:lnSpc>
+                <a:spcPct val="105000"/>
+              </a:lnSpc>
               <a:spcAft>
                 <a:spcPts val="500"/>
               </a:spcAft>
@@ -10539,7 +10257,7 @@
           </a:xfrm>
           <a:prstGeom prst="roundRect">
             <a:avLst>
-              <a:gd name="adj" fmla="val 5500"/>
+              <a:gd name="adj" fmla="val 4000"/>
             </a:avLst>
           </a:prstGeom>
           <a:solidFill>
@@ -10567,7 +10285,7 @@
           </a:fontRef>
         </p:style>
         <p:txBody>
-          <a:bodyPr rtlCol="0" anchor="ctr" wrap="square" lIns="146304" rIns="146304" tIns="109728" bIns="109728"/>
+          <a:bodyPr rtlCol="0" anchor="ctr"/>
           <a:lstStyle/>
           <a:p>
             <a:pPr algn="ctr"/>
@@ -10587,7 +10305,7 @@
           </a:xfrm>
           <a:prstGeom prst="roundRect">
             <a:avLst>
-              <a:gd name="adj" fmla="val 28000"/>
+              <a:gd name="adj" fmla="val 22000"/>
             </a:avLst>
           </a:prstGeom>
           <a:solidFill>
@@ -10615,7 +10333,7 @@
           </a:fontRef>
         </p:style>
         <p:txBody>
-          <a:bodyPr rtlCol="0" anchor="ctr" wrap="square" lIns="146304" rIns="146304" tIns="109728" bIns="109728"/>
+          <a:bodyPr rtlCol="0" anchor="ctr"/>
           <a:lstStyle/>
           <a:p>
             <a:pPr algn="ctr"/>
@@ -10624,7 +10342,7 @@
       </p:sp>
       <p:pic>
         <p:nvPicPr>
-          <p:cNvPr id="17" name="Picture 16" descr="plus.png"/>
+          <p:cNvPr id="17" name="Picture 16" descr="s18_i3.png"/>
           <p:cNvPicPr>
             <a:picLocks noChangeAspect="1"/>
           </p:cNvPicPr>
@@ -10638,8 +10356,8 @@
         </p:blipFill>
         <p:spPr>
           <a:xfrm>
-            <a:off x="8514527" y="2068007"/>
-            <a:ext cx="289681" cy="289681"/>
+            <a:off x="8513064" y="2066544"/>
+            <a:ext cx="292608" cy="292608"/>
           </a:xfrm>
           <a:prstGeom prst="rect">
             <a:avLst/>
@@ -10663,7 +10381,7 @@
           <a:noFill/>
         </p:spPr>
         <p:txBody>
-          <a:bodyPr wrap="square">
+          <a:bodyPr wrap="square" anchor="t" lIns="0" rIns="0" tIns="0" bIns="0">
             <a:spAutoFit/>
           </a:bodyPr>
           <a:lstStyle/>
@@ -10697,12 +10415,15 @@
           <a:noFill/>
         </p:spPr>
         <p:txBody>
-          <a:bodyPr wrap="square">
+          <a:bodyPr wrap="square" anchor="t" lIns="0" rIns="0" tIns="0" bIns="0">
             <a:spAutoFit/>
           </a:bodyPr>
           <a:lstStyle/>
           <a:p>
             <a:pPr>
+              <a:lnSpc>
+                <a:spcPct val="105000"/>
+              </a:lnSpc>
               <a:spcAft>
                 <a:spcPts val="500"/>
               </a:spcAft>
@@ -10719,6 +10440,9 @@
           </a:p>
           <a:p>
             <a:pPr>
+              <a:lnSpc>
+                <a:spcPct val="105000"/>
+              </a:lnSpc>
               <a:spcAft>
                 <a:spcPts val="500"/>
               </a:spcAft>
@@ -10735,6 +10459,9 @@
           </a:p>
           <a:p>
             <a:pPr>
+              <a:lnSpc>
+                <a:spcPct val="105000"/>
+              </a:lnSpc>
               <a:spcAft>
                 <a:spcPts val="500"/>
               </a:spcAft>
@@ -10751,6 +10478,9 @@
           </a:p>
           <a:p>
             <a:pPr>
+              <a:lnSpc>
+                <a:spcPct val="105000"/>
+              </a:lnSpc>
               <a:spcAft>
                 <a:spcPts val="500"/>
               </a:spcAft>
@@ -10767,6 +10497,9 @@
           </a:p>
           <a:p>
             <a:pPr>
+              <a:lnSpc>
+                <a:spcPct val="105000"/>
+              </a:lnSpc>
               <a:spcAft>
                 <a:spcPts val="500"/>
               </a:spcAft>
@@ -10792,7 +10525,7 @@
         <p:spPr>
           <a:xfrm>
             <a:off x="640080" y="6455664"/>
-            <a:ext cx="10908792" cy="10972"/>
+            <a:ext cx="10908792" cy="9144"/>
           </a:xfrm>
           <a:prstGeom prst="rect">
             <a:avLst/>
@@ -10820,7 +10553,7 @@
           </a:fontRef>
         </p:style>
         <p:txBody>
-          <a:bodyPr rtlCol="0" anchor="ctr" wrap="square" lIns="146304" rIns="146304" tIns="109728" bIns="109728"/>
+          <a:bodyPr rtlCol="0" anchor="ctr"/>
           <a:lstStyle/>
           <a:p>
             <a:pPr algn="ctr"/>
@@ -10844,7 +10577,7 @@
           <a:noFill/>
         </p:spPr>
         <p:txBody>
-          <a:bodyPr wrap="square">
+          <a:bodyPr wrap="square" anchor="t" lIns="0" rIns="0" tIns="0" bIns="0">
             <a:spAutoFit/>
           </a:bodyPr>
           <a:lstStyle/>
@@ -10887,7 +10620,7 @@
           <a:noFill/>
         </p:spPr>
         <p:txBody>
-          <a:bodyPr wrap="square">
+          <a:bodyPr wrap="square" anchor="t" lIns="0" rIns="0" tIns="0" bIns="0">
             <a:spAutoFit/>
           </a:bodyPr>
           <a:lstStyle/>
@@ -10948,7 +10681,7 @@
           <a:noFill/>
         </p:spPr>
         <p:txBody>
-          <a:bodyPr wrap="square">
+          <a:bodyPr wrap="square" anchor="t" lIns="0" rIns="0" tIns="0" bIns="0">
             <a:spAutoFit/>
           </a:bodyPr>
           <a:lstStyle/>
@@ -10983,7 +10716,7 @@
           <a:noFill/>
         </p:spPr>
         <p:txBody>
-          <a:bodyPr wrap="square">
+          <a:bodyPr wrap="square" anchor="t" lIns="0" rIns="0" tIns="0" bIns="0">
             <a:spAutoFit/>
           </a:bodyPr>
           <a:lstStyle/>
@@ -11017,13 +10750,13 @@
           <a:noFill/>
         </p:spPr>
         <p:txBody>
-          <a:bodyPr wrap="square">
+          <a:bodyPr wrap="square" anchor="t" lIns="0" rIns="0" tIns="0" bIns="0">
             <a:spAutoFit/>
           </a:bodyPr>
           <a:lstStyle/>
           <a:p>
             <a:r>
-              <a:rPr sz="2300" b="1">
+              <a:rPr sz="2500" b="1">
                 <a:solidFill>
                   <a:srgbClr val="15201C"/>
                 </a:solidFill>
@@ -11042,12 +10775,12 @@
         </p:nvSpPr>
         <p:spPr>
           <a:xfrm>
-            <a:off x="2804217" y="1618488"/>
-            <a:ext cx="6583260" cy="4352544"/>
+            <a:off x="3115872" y="1618488"/>
+            <a:ext cx="5959951" cy="4535424"/>
           </a:xfrm>
           <a:prstGeom prst="roundRect">
             <a:avLst>
-              <a:gd name="adj" fmla="val 5500"/>
+              <a:gd name="adj" fmla="val 3000"/>
             </a:avLst>
           </a:prstGeom>
           <a:solidFill>
@@ -11075,7 +10808,7 @@
           </a:fontRef>
         </p:style>
         <p:txBody>
-          <a:bodyPr rtlCol="0" anchor="ctr" wrap="square" lIns="146304" rIns="146304" tIns="109728" bIns="109728"/>
+          <a:bodyPr rtlCol="0" anchor="ctr"/>
           <a:lstStyle/>
           <a:p>
             <a:pPr algn="ctr"/>
@@ -11084,7 +10817,7 @@
       </p:sp>
       <p:pic>
         <p:nvPicPr>
-          <p:cNvPr id="6" name="Picture 5" descr="diagram-5.png"/>
+          <p:cNvPr id="6" name="Picture 5" descr="slide-B5.png"/>
           <p:cNvPicPr>
             <a:picLocks noChangeAspect="1"/>
           </p:cNvPicPr>
@@ -11098,8 +10831,8 @@
         </p:blipFill>
         <p:spPr>
           <a:xfrm>
-            <a:off x="2968809" y="1783080"/>
-            <a:ext cx="6254076" cy="4023360"/>
+            <a:off x="3280464" y="1783080"/>
+            <a:ext cx="5630767" cy="4206240"/>
           </a:xfrm>
           <a:prstGeom prst="rect">
             <a:avLst/>
@@ -11115,7 +10848,7 @@
         <p:spPr>
           <a:xfrm>
             <a:off x="640080" y="6455664"/>
-            <a:ext cx="10908792" cy="10972"/>
+            <a:ext cx="10908792" cy="9144"/>
           </a:xfrm>
           <a:prstGeom prst="rect">
             <a:avLst/>
@@ -11143,7 +10876,7 @@
           </a:fontRef>
         </p:style>
         <p:txBody>
-          <a:bodyPr rtlCol="0" anchor="ctr" wrap="square" lIns="146304" rIns="146304" tIns="109728" bIns="109728"/>
+          <a:bodyPr rtlCol="0" anchor="ctr"/>
           <a:lstStyle/>
           <a:p>
             <a:pPr algn="ctr"/>
@@ -11167,7 +10900,7 @@
           <a:noFill/>
         </p:spPr>
         <p:txBody>
-          <a:bodyPr wrap="square">
+          <a:bodyPr wrap="square" anchor="t" lIns="0" rIns="0" tIns="0" bIns="0">
             <a:spAutoFit/>
           </a:bodyPr>
           <a:lstStyle/>
@@ -11210,7 +10943,7 @@
           <a:noFill/>
         </p:spPr>
         <p:txBody>
-          <a:bodyPr wrap="square">
+          <a:bodyPr wrap="square" anchor="t" lIns="0" rIns="0" tIns="0" bIns="0">
             <a:spAutoFit/>
           </a:bodyPr>
           <a:lstStyle/>
@@ -11271,7 +11004,7 @@
           <a:noFill/>
         </p:spPr>
         <p:txBody>
-          <a:bodyPr wrap="square">
+          <a:bodyPr wrap="square" anchor="t" lIns="0" rIns="0" tIns="0" bIns="0">
             <a:spAutoFit/>
           </a:bodyPr>
           <a:lstStyle/>
@@ -11306,7 +11039,7 @@
           <a:noFill/>
         </p:spPr>
         <p:txBody>
-          <a:bodyPr wrap="square">
+          <a:bodyPr wrap="square" anchor="t" lIns="0" rIns="0" tIns="0" bIns="0">
             <a:spAutoFit/>
           </a:bodyPr>
           <a:lstStyle/>
@@ -11340,7 +11073,7 @@
           <a:noFill/>
         </p:spPr>
         <p:txBody>
-          <a:bodyPr wrap="square">
+          <a:bodyPr wrap="square" anchor="t" lIns="0" rIns="0" tIns="0" bIns="0">
             <a:spAutoFit/>
           </a:bodyPr>
           <a:lstStyle/>
@@ -11374,7 +11107,7 @@
           <a:noFill/>
         </p:spPr>
         <p:txBody>
-          <a:bodyPr wrap="square">
+          <a:bodyPr wrap="square" anchor="t" lIns="0" rIns="0" tIns="0" bIns="0">
             <a:spAutoFit/>
           </a:bodyPr>
           <a:lstStyle/>
@@ -11404,7 +11137,7 @@
           </a:xfrm>
           <a:prstGeom prst="roundRect">
             <a:avLst>
-              <a:gd name="adj" fmla="val 5500"/>
+              <a:gd name="adj" fmla="val 8000"/>
             </a:avLst>
           </a:prstGeom>
           <a:solidFill>
@@ -11432,7 +11165,7 @@
           </a:fontRef>
         </p:style>
         <p:txBody>
-          <a:bodyPr rtlCol="0" anchor="ctr" wrap="square" lIns="146304" rIns="146304" tIns="109728" bIns="109728"/>
+          <a:bodyPr rtlCol="0" anchor="ctr"/>
           <a:lstStyle/>
           <a:p>
             <a:pPr algn="ctr"/>
@@ -11452,7 +11185,7 @@
           </a:xfrm>
           <a:prstGeom prst="roundRect">
             <a:avLst>
-              <a:gd name="adj" fmla="val 28000"/>
+              <a:gd name="adj" fmla="val 22000"/>
             </a:avLst>
           </a:prstGeom>
           <a:solidFill>
@@ -11480,7 +11213,7 @@
           </a:fontRef>
         </p:style>
         <p:txBody>
-          <a:bodyPr rtlCol="0" anchor="ctr" wrap="square" lIns="146304" rIns="146304" tIns="109728" bIns="109728"/>
+          <a:bodyPr rtlCol="0" anchor="ctr"/>
           <a:lstStyle/>
           <a:p>
             <a:pPr algn="ctr"/>
@@ -11489,7 +11222,7 @@
       </p:sp>
       <p:pic>
         <p:nvPicPr>
-          <p:cNvPr id="8" name="Picture 7" descr="bag.png"/>
+          <p:cNvPr id="8" name="Picture 7" descr="s02_i1.png"/>
           <p:cNvPicPr>
             <a:picLocks noChangeAspect="1"/>
           </p:cNvPicPr>
@@ -11503,8 +11236,8 @@
         </p:blipFill>
         <p:spPr>
           <a:xfrm>
-            <a:off x="935248" y="2206264"/>
-            <a:ext cx="342351" cy="342351"/>
+            <a:off x="937259" y="2208276"/>
+            <a:ext cx="338328" cy="338328"/>
           </a:xfrm>
           <a:prstGeom prst="rect">
             <a:avLst/>
@@ -11528,7 +11261,7 @@
           <a:noFill/>
         </p:spPr>
         <p:txBody>
-          <a:bodyPr wrap="square">
+          <a:bodyPr wrap="square" anchor="t" lIns="0" rIns="0" tIns="0" bIns="0">
             <a:spAutoFit/>
           </a:bodyPr>
           <a:lstStyle/>
@@ -11554,7 +11287,7 @@
         <p:spPr>
           <a:xfrm>
             <a:off x="886968" y="2761488"/>
-            <a:ext cx="4946903" cy="365759"/>
+            <a:ext cx="4946904" cy="457200"/>
           </a:xfrm>
           <a:prstGeom prst="rect">
             <a:avLst/>
@@ -11562,14 +11295,14 @@
           <a:noFill/>
         </p:spPr>
         <p:txBody>
-          <a:bodyPr wrap="square">
+          <a:bodyPr wrap="square" anchor="t" lIns="0" rIns="0" tIns="0" bIns="0">
             <a:spAutoFit/>
           </a:bodyPr>
           <a:lstStyle/>
           <a:p>
             <a:pPr>
               <a:lnSpc>
-                <a:spcPct val="114000"/>
+                <a:spcPct val="105000"/>
               </a:lnSpc>
             </a:pPr>
             <a:r>
@@ -11597,7 +11330,7 @@
           </a:xfrm>
           <a:prstGeom prst="roundRect">
             <a:avLst>
-              <a:gd name="adj" fmla="val 5500"/>
+              <a:gd name="adj" fmla="val 8000"/>
             </a:avLst>
           </a:prstGeom>
           <a:solidFill>
@@ -11625,7 +11358,7 @@
           </a:fontRef>
         </p:style>
         <p:txBody>
-          <a:bodyPr rtlCol="0" anchor="ctr" wrap="square" lIns="146304" rIns="146304" tIns="109728" bIns="109728"/>
+          <a:bodyPr rtlCol="0" anchor="ctr"/>
           <a:lstStyle/>
           <a:p>
             <a:pPr algn="ctr"/>
@@ -11645,7 +11378,7 @@
           </a:xfrm>
           <a:prstGeom prst="roundRect">
             <a:avLst>
-              <a:gd name="adj" fmla="val 28000"/>
+              <a:gd name="adj" fmla="val 22000"/>
             </a:avLst>
           </a:prstGeom>
           <a:solidFill>
@@ -11673,7 +11406,7 @@
           </a:fontRef>
         </p:style>
         <p:txBody>
-          <a:bodyPr rtlCol="0" anchor="ctr" wrap="square" lIns="146304" rIns="146304" tIns="109728" bIns="109728"/>
+          <a:bodyPr rtlCol="0" anchor="ctr"/>
           <a:lstStyle/>
           <a:p>
             <a:pPr algn="ctr"/>
@@ -11682,7 +11415,7 @@
       </p:sp>
       <p:pic>
         <p:nvPicPr>
-          <p:cNvPr id="13" name="Picture 12" descr="cardpay.png"/>
+          <p:cNvPr id="13" name="Picture 12" descr="s02_i2.png"/>
           <p:cNvPicPr>
             <a:picLocks noChangeAspect="1"/>
           </p:cNvPicPr>
@@ -11696,8 +11429,8 @@
         </p:blipFill>
         <p:spPr>
           <a:xfrm>
-            <a:off x="935248" y="3669304"/>
-            <a:ext cx="342351" cy="342351"/>
+            <a:off x="937259" y="3671316"/>
+            <a:ext cx="338328" cy="338328"/>
           </a:xfrm>
           <a:prstGeom prst="rect">
             <a:avLst/>
@@ -11721,7 +11454,7 @@
           <a:noFill/>
         </p:spPr>
         <p:txBody>
-          <a:bodyPr wrap="square">
+          <a:bodyPr wrap="square" anchor="t" lIns="0" rIns="0" tIns="0" bIns="0">
             <a:spAutoFit/>
           </a:bodyPr>
           <a:lstStyle/>
@@ -11747,7 +11480,7 @@
         <p:spPr>
           <a:xfrm>
             <a:off x="886968" y="4224528"/>
-            <a:ext cx="4946903" cy="365759"/>
+            <a:ext cx="4946904" cy="457200"/>
           </a:xfrm>
           <a:prstGeom prst="rect">
             <a:avLst/>
@@ -11755,14 +11488,14 @@
           <a:noFill/>
         </p:spPr>
         <p:txBody>
-          <a:bodyPr wrap="square">
+          <a:bodyPr wrap="square" anchor="t" lIns="0" rIns="0" tIns="0" bIns="0">
             <a:spAutoFit/>
           </a:bodyPr>
           <a:lstStyle/>
           <a:p>
             <a:pPr>
               <a:lnSpc>
-                <a:spcPct val="114000"/>
+                <a:spcPct val="105000"/>
               </a:lnSpc>
             </a:pPr>
             <a:r>
@@ -11772,7 +11505,7 @@
                 </a:solidFill>
                 <a:latin typeface="Hanken Grotesk"/>
               </a:rPr>
-              <a:t>reward passive shopping through their own portal; the social recommendation goes unpaid and unmeasured.</a:t>
+              <a:t>Rakuten and Honey reward passive shopping through their own portal; the social recommendation goes unpaid and unmeasured.</a:t>
             </a:r>
           </a:p>
         </p:txBody>
@@ -11790,7 +11523,7 @@
           </a:xfrm>
           <a:prstGeom prst="roundRect">
             <a:avLst>
-              <a:gd name="adj" fmla="val 5500"/>
+              <a:gd name="adj" fmla="val 8000"/>
             </a:avLst>
           </a:prstGeom>
           <a:solidFill>
@@ -11818,7 +11551,7 @@
           </a:fontRef>
         </p:style>
         <p:txBody>
-          <a:bodyPr rtlCol="0" anchor="ctr" wrap="square" lIns="146304" rIns="146304" tIns="109728" bIns="109728"/>
+          <a:bodyPr rtlCol="0" anchor="ctr"/>
           <a:lstStyle/>
           <a:p>
             <a:pPr algn="ctr"/>
@@ -11838,7 +11571,7 @@
           </a:xfrm>
           <a:prstGeom prst="roundRect">
             <a:avLst>
-              <a:gd name="adj" fmla="val 28000"/>
+              <a:gd name="adj" fmla="val 22000"/>
             </a:avLst>
           </a:prstGeom>
           <a:solidFill>
@@ -11866,7 +11599,7 @@
           </a:fontRef>
         </p:style>
         <p:txBody>
-          <a:bodyPr rtlCol="0" anchor="ctr" wrap="square" lIns="146304" rIns="146304" tIns="109728" bIns="109728"/>
+          <a:bodyPr rtlCol="0" anchor="ctr"/>
           <a:lstStyle/>
           <a:p>
             <a:pPr algn="ctr"/>
@@ -11875,7 +11608,7 @@
       </p:sp>
       <p:pic>
         <p:nvPicPr>
-          <p:cNvPr id="18" name="Picture 17" descr="broadcast.png"/>
+          <p:cNvPr id="18" name="Picture 17" descr="s02_i3.png"/>
           <p:cNvPicPr>
             <a:picLocks noChangeAspect="1"/>
           </p:cNvPicPr>
@@ -11889,8 +11622,8 @@
         </p:blipFill>
         <p:spPr>
           <a:xfrm>
-            <a:off x="935248" y="5132344"/>
-            <a:ext cx="342351" cy="342351"/>
+            <a:off x="937259" y="5134356"/>
+            <a:ext cx="338328" cy="338328"/>
           </a:xfrm>
           <a:prstGeom prst="rect">
             <a:avLst/>
@@ -11914,7 +11647,7 @@
           <a:noFill/>
         </p:spPr>
         <p:txBody>
-          <a:bodyPr wrap="square">
+          <a:bodyPr wrap="square" anchor="t" lIns="0" rIns="0" tIns="0" bIns="0">
             <a:spAutoFit/>
           </a:bodyPr>
           <a:lstStyle/>
@@ -11940,7 +11673,7 @@
         <p:spPr>
           <a:xfrm>
             <a:off x="886968" y="5687568"/>
-            <a:ext cx="4946903" cy="365759"/>
+            <a:ext cx="4946904" cy="457200"/>
           </a:xfrm>
           <a:prstGeom prst="rect">
             <a:avLst/>
@@ -11948,14 +11681,14 @@
           <a:noFill/>
         </p:spPr>
         <p:txBody>
-          <a:bodyPr wrap="square">
+          <a:bodyPr wrap="square" anchor="t" lIns="0" rIns="0" tIns="0" bIns="0">
             <a:spAutoFit/>
           </a:bodyPr>
           <a:lstStyle/>
           <a:p>
             <a:pPr>
               <a:lnSpc>
-                <a:spcPct val="114000"/>
+                <a:spcPct val="105000"/>
               </a:lnSpc>
             </a:pPr>
             <a:r>
@@ -11965,7 +11698,7 @@
                 </a:solidFill>
                 <a:latin typeface="Hanken Grotesk"/>
               </a:rPr>
-              <a:t>keep growing influencer budgets while organic word-of-mouth — which converts better — stays invisible.</a:t>
+              <a:t>influencer budgets keep growing while organic word-of-mouth — which converts better — stays invisible.</a:t>
             </a:r>
           </a:p>
         </p:txBody>
@@ -11987,7 +11720,7 @@
           <a:noFill/>
         </p:spPr>
         <p:txBody>
-          <a:bodyPr wrap="square">
+          <a:bodyPr wrap="square" anchor="t" lIns="0" rIns="0" tIns="0" bIns="0">
             <a:spAutoFit/>
           </a:bodyPr>
           <a:lstStyle/>
@@ -12017,7 +11750,7 @@
           </a:xfrm>
           <a:prstGeom prst="roundRect">
             <a:avLst>
-              <a:gd name="adj" fmla="val 5500"/>
+              <a:gd name="adj" fmla="val 5000"/>
             </a:avLst>
           </a:prstGeom>
           <a:solidFill>
@@ -12045,7 +11778,7 @@
           </a:fontRef>
         </p:style>
         <p:txBody>
-          <a:bodyPr rtlCol="0" anchor="ctr" wrap="square" lIns="146304" rIns="146304" tIns="109728" bIns="109728"/>
+          <a:bodyPr rtlCol="0" anchor="ctr"/>
           <a:lstStyle/>
           <a:p>
             <a:pPr algn="ctr"/>
@@ -12065,7 +11798,7 @@
           </a:xfrm>
           <a:prstGeom prst="roundRect">
             <a:avLst>
-              <a:gd name="adj" fmla="val 28000"/>
+              <a:gd name="adj" fmla="val 22000"/>
             </a:avLst>
           </a:prstGeom>
           <a:solidFill>
@@ -12093,7 +11826,7 @@
           </a:fontRef>
         </p:style>
         <p:txBody>
-          <a:bodyPr rtlCol="0" anchor="ctr" wrap="square" lIns="146304" rIns="146304" tIns="109728" bIns="109728"/>
+          <a:bodyPr rtlCol="0" anchor="ctr"/>
           <a:lstStyle/>
           <a:p>
             <a:pPr algn="ctr"/>
@@ -12102,7 +11835,7 @@
       </p:sp>
       <p:pic>
         <p:nvPicPr>
-          <p:cNvPr id="24" name="Picture 23" descr="link.png"/>
+          <p:cNvPr id="24" name="Picture 23" descr="s02_i4.png"/>
           <p:cNvPicPr>
             <a:picLocks noChangeAspect="1"/>
           </p:cNvPicPr>
@@ -12116,8 +11849,8 @@
         </p:blipFill>
         <p:spPr>
           <a:xfrm>
-            <a:off x="6723400" y="2224552"/>
-            <a:ext cx="342351" cy="342351"/>
+            <a:off x="6725412" y="2226564"/>
+            <a:ext cx="338328" cy="338328"/>
           </a:xfrm>
           <a:prstGeom prst="rect">
             <a:avLst/>
@@ -12141,15 +11874,18 @@
           <a:noFill/>
         </p:spPr>
         <p:txBody>
-          <a:bodyPr wrap="square">
+          <a:bodyPr wrap="square" anchor="t" lIns="0" rIns="0" tIns="0" bIns="0">
             <a:spAutoFit/>
           </a:bodyPr>
           <a:lstStyle/>
           <a:p>
             <a:pPr>
               <a:lnSpc>
-                <a:spcPct val="125000"/>
+                <a:spcPct val="108000"/>
               </a:lnSpc>
+              <a:spcAft>
+                <a:spcPts val="1000"/>
+              </a:spcAft>
             </a:pPr>
             <a:r>
               <a:rPr sz="1500" b="1">
@@ -12158,8 +11894,18 @@
                 </a:solidFill>
                 <a:latin typeface="Hanken Grotesk"/>
               </a:rPr>
-              <a:t>Wanthat turns the link you already send into a tracked affiliate link. </a:t>
-            </a:r>
+              <a:t>Wanthat turns the link you already send into a tracked affiliate link.</a:t>
+            </a:r>
+          </a:p>
+          <a:p>
+            <a:pPr>
+              <a:lnSpc>
+                <a:spcPct val="108000"/>
+              </a:lnSpc>
+              <a:spcAft>
+                <a:spcPts val="1000"/>
+              </a:spcAft>
+            </a:pPr>
             <a:r>
               <a:rPr sz="1500" b="0">
                 <a:solidFill>
@@ -12167,14 +11913,17 @@
                 </a:solidFill>
                 <a:latin typeface="Hanken Grotesk"/>
               </a:rPr>
-              <a:t>Wanthat is the single registered affiliate across AliExpress / Awin / eBay — when a friend buys, the commission flows in and the majority is credited back to the recommender as cashback.</a:t>
+              <a:t>Wanthat is the single registered affiliate across AliExpress / Awin / eBay; when a friend buys, the commission flows in and the majority is credited back to the recommender as cashback.</a:t>
             </a:r>
           </a:p>
           <a:p>
             <a:pPr>
-              <a:spcBef>
-                <a:spcPts val="1400"/>
-              </a:spcBef>
+              <a:lnSpc>
+                <a:spcPct val="108000"/>
+              </a:lnSpc>
+              <a:spcAft>
+                <a:spcPts val="1000"/>
+              </a:spcAft>
             </a:pPr>
             <a:r>
               <a:rPr sz="1400" b="1">
@@ -12197,7 +11946,7 @@
         <p:spPr>
           <a:xfrm>
             <a:off x="640080" y="6455664"/>
-            <a:ext cx="10908792" cy="10972"/>
+            <a:ext cx="10908792" cy="9144"/>
           </a:xfrm>
           <a:prstGeom prst="rect">
             <a:avLst/>
@@ -12225,7 +11974,7 @@
           </a:fontRef>
         </p:style>
         <p:txBody>
-          <a:bodyPr rtlCol="0" anchor="ctr" wrap="square" lIns="146304" rIns="146304" tIns="109728" bIns="109728"/>
+          <a:bodyPr rtlCol="0" anchor="ctr"/>
           <a:lstStyle/>
           <a:p>
             <a:pPr algn="ctr"/>
@@ -12249,7 +11998,7 @@
           <a:noFill/>
         </p:spPr>
         <p:txBody>
-          <a:bodyPr wrap="square">
+          <a:bodyPr wrap="square" anchor="t" lIns="0" rIns="0" tIns="0" bIns="0">
             <a:spAutoFit/>
           </a:bodyPr>
           <a:lstStyle/>
@@ -12292,7 +12041,7 @@
           <a:noFill/>
         </p:spPr>
         <p:txBody>
-          <a:bodyPr wrap="square">
+          <a:bodyPr wrap="square" anchor="t" lIns="0" rIns="0" tIns="0" bIns="0">
             <a:spAutoFit/>
           </a:bodyPr>
           <a:lstStyle/>
@@ -12353,7 +12102,7 @@
           <a:noFill/>
         </p:spPr>
         <p:txBody>
-          <a:bodyPr wrap="square">
+          <a:bodyPr wrap="square" anchor="t" lIns="0" rIns="0" tIns="0" bIns="0">
             <a:spAutoFit/>
           </a:bodyPr>
           <a:lstStyle/>
@@ -12388,7 +12137,7 @@
           <a:noFill/>
         </p:spPr>
         <p:txBody>
-          <a:bodyPr wrap="square">
+          <a:bodyPr wrap="square" anchor="t" lIns="0" rIns="0" tIns="0" bIns="0">
             <a:spAutoFit/>
           </a:bodyPr>
           <a:lstStyle/>
@@ -12422,19 +12171,19 @@
           <a:noFill/>
         </p:spPr>
         <p:txBody>
-          <a:bodyPr wrap="square">
+          <a:bodyPr wrap="square" anchor="t" lIns="0" rIns="0" tIns="0" bIns="0">
             <a:spAutoFit/>
           </a:bodyPr>
           <a:lstStyle/>
           <a:p>
             <a:r>
-              <a:rPr sz="2300" b="1">
+              <a:rPr sz="2700" b="1">
                 <a:solidFill>
                   <a:srgbClr val="15201C"/>
                 </a:solidFill>
                 <a:latin typeface="Space Grotesk"/>
               </a:rPr>
-              <a:t>ADR-0003 + 0027 — where data lives</a:t>
+              <a:t>ADR-0003 + 0006 — where data lives</a:t>
             </a:r>
           </a:p>
         </p:txBody>
@@ -12447,12 +12196,12 @@
         </p:nvSpPr>
         <p:spPr>
           <a:xfrm>
-            <a:off x="2027848" y="1618488"/>
-            <a:ext cx="8135997" cy="2935224"/>
+            <a:off x="1679295" y="1664883"/>
+            <a:ext cx="8833104" cy="2979593"/>
           </a:xfrm>
           <a:prstGeom prst="roundRect">
             <a:avLst>
-              <a:gd name="adj" fmla="val 5500"/>
+              <a:gd name="adj" fmla="val 3000"/>
             </a:avLst>
           </a:prstGeom>
           <a:solidFill>
@@ -12480,7 +12229,7 @@
           </a:fontRef>
         </p:style>
         <p:txBody>
-          <a:bodyPr rtlCol="0" anchor="ctr" wrap="square" lIns="146304" rIns="146304" tIns="109728" bIns="109728"/>
+          <a:bodyPr rtlCol="0" anchor="ctr"/>
           <a:lstStyle/>
           <a:p>
             <a:pPr algn="ctr"/>
@@ -12489,7 +12238,7 @@
       </p:sp>
       <p:pic>
         <p:nvPicPr>
-          <p:cNvPr id="6" name="Picture 5" descr="diagram-1.png"/>
+          <p:cNvPr id="6" name="Picture 5" descr="slide-B6.png"/>
           <p:cNvPicPr>
             <a:picLocks noChangeAspect="1"/>
           </p:cNvPicPr>
@@ -12503,8 +12252,8 @@
         </p:blipFill>
         <p:spPr>
           <a:xfrm>
-            <a:off x="2192440" y="1783080"/>
-            <a:ext cx="7806813" cy="2606040"/>
+            <a:off x="1843887" y="1829475"/>
+            <a:ext cx="8503920" cy="2650409"/>
           </a:xfrm>
           <a:prstGeom prst="rect">
             <a:avLst/>
@@ -12519,7 +12268,7 @@
         </p:nvSpPr>
         <p:spPr>
           <a:xfrm>
-            <a:off x="822960" y="4709160"/>
+            <a:off x="822960" y="4846320"/>
             <a:ext cx="10607040" cy="1554480"/>
           </a:xfrm>
           <a:prstGeom prst="rect">
@@ -12528,17 +12277,17 @@
           <a:noFill/>
         </p:spPr>
         <p:txBody>
-          <a:bodyPr wrap="square">
+          <a:bodyPr wrap="square" anchor="t" lIns="0" rIns="0" tIns="0" bIns="0">
             <a:spAutoFit/>
           </a:bodyPr>
           <a:lstStyle/>
           <a:p>
             <a:pPr>
               <a:lnSpc>
-                <a:spcPct val="112000"/>
+                <a:spcPct val="110000"/>
               </a:lnSpc>
               <a:spcAft>
-                <a:spcPts val="600"/>
+                <a:spcPts val="500"/>
               </a:spcAft>
             </a:pPr>
             <a:r>
@@ -12553,7 +12302,7 @@
             <a:r>
               <a:rPr sz="1200" b="0">
                 <a:solidFill>
-                  <a:srgbClr val="15201C"/>
+                  <a:srgbClr val="6B7B73"/>
                 </a:solidFill>
                 <a:latin typeface="Hanken Grotesk"/>
               </a:rPr>
@@ -12563,10 +12312,10 @@
           <a:p>
             <a:pPr>
               <a:lnSpc>
-                <a:spcPct val="112000"/>
+                <a:spcPct val="110000"/>
               </a:lnSpc>
               <a:spcAft>
-                <a:spcPts val="600"/>
+                <a:spcPts val="500"/>
               </a:spcAft>
             </a:pPr>
             <a:r>
@@ -12581,7 +12330,7 @@
             <a:r>
               <a:rPr sz="1200" b="0">
                 <a:solidFill>
-                  <a:srgbClr val="15201C"/>
+                  <a:srgbClr val="6B7B73"/>
                 </a:solidFill>
                 <a:latin typeface="Hanken Grotesk"/>
               </a:rPr>
@@ -12591,10 +12340,10 @@
           <a:p>
             <a:pPr>
               <a:lnSpc>
-                <a:spcPct val="112000"/>
+                <a:spcPct val="110000"/>
               </a:lnSpc>
               <a:spcAft>
-                <a:spcPts val="600"/>
+                <a:spcPts val="500"/>
               </a:spcAft>
             </a:pPr>
             <a:r>
@@ -12609,7 +12358,7 @@
             <a:r>
               <a:rPr sz="1200" b="0">
                 <a:solidFill>
-                  <a:srgbClr val="15201C"/>
+                  <a:srgbClr val="6B7B73"/>
                 </a:solidFill>
                 <a:latin typeface="Hanken Grotesk"/>
               </a:rPr>
@@ -12627,7 +12376,7 @@
         <p:spPr>
           <a:xfrm>
             <a:off x="640080" y="6455664"/>
-            <a:ext cx="10908792" cy="10972"/>
+            <a:ext cx="10908792" cy="9144"/>
           </a:xfrm>
           <a:prstGeom prst="rect">
             <a:avLst/>
@@ -12655,7 +12404,7 @@
           </a:fontRef>
         </p:style>
         <p:txBody>
-          <a:bodyPr rtlCol="0" anchor="ctr" wrap="square" lIns="146304" rIns="146304" tIns="109728" bIns="109728"/>
+          <a:bodyPr rtlCol="0" anchor="ctr"/>
           <a:lstStyle/>
           <a:p>
             <a:pPr algn="ctr"/>
@@ -12679,7 +12428,7 @@
           <a:noFill/>
         </p:spPr>
         <p:txBody>
-          <a:bodyPr wrap="square">
+          <a:bodyPr wrap="square" anchor="t" lIns="0" rIns="0" tIns="0" bIns="0">
             <a:spAutoFit/>
           </a:bodyPr>
           <a:lstStyle/>
@@ -12722,7 +12471,7 @@
           <a:noFill/>
         </p:spPr>
         <p:txBody>
-          <a:bodyPr wrap="square">
+          <a:bodyPr wrap="square" anchor="t" lIns="0" rIns="0" tIns="0" bIns="0">
             <a:spAutoFit/>
           </a:bodyPr>
           <a:lstStyle/>
@@ -12783,7 +12532,7 @@
           <a:noFill/>
         </p:spPr>
         <p:txBody>
-          <a:bodyPr wrap="square">
+          <a:bodyPr wrap="square" anchor="t" lIns="0" rIns="0" tIns="0" bIns="0">
             <a:spAutoFit/>
           </a:bodyPr>
           <a:lstStyle/>
@@ -12818,7 +12567,7 @@
           <a:noFill/>
         </p:spPr>
         <p:txBody>
-          <a:bodyPr wrap="square">
+          <a:bodyPr wrap="square" anchor="t" lIns="0" rIns="0" tIns="0" bIns="0">
             <a:spAutoFit/>
           </a:bodyPr>
           <a:lstStyle/>
@@ -12852,13 +12601,13 @@
           <a:noFill/>
         </p:spPr>
         <p:txBody>
-          <a:bodyPr wrap="square">
+          <a:bodyPr wrap="square" anchor="t" lIns="0" rIns="0" tIns="0" bIns="0">
             <a:spAutoFit/>
           </a:bodyPr>
           <a:lstStyle/>
           <a:p>
             <a:r>
-              <a:rPr sz="2300" b="1">
+              <a:rPr sz="2700" b="1">
                 <a:solidFill>
                   <a:srgbClr val="15201C"/>
                 </a:solidFill>
@@ -12895,7 +12644,7 @@
               <a:tr h="365760">
                 <a:tc>
                   <a:txBody>
-                    <a:bodyPr wrap="square"/>
+                    <a:bodyPr/>
                     <a:lstStyle/>
                     <a:p>
                       <a:pPr>
@@ -12922,7 +12671,7 @@
                 </a:tc>
                 <a:tc>
                   <a:txBody>
-                    <a:bodyPr wrap="square"/>
+                    <a:bodyPr/>
                     <a:lstStyle/>
                     <a:p>
                       <a:pPr>
@@ -12949,7 +12698,7 @@
                 </a:tc>
                 <a:tc>
                   <a:txBody>
-                    <a:bodyPr wrap="square"/>
+                    <a:bodyPr/>
                     <a:lstStyle/>
                     <a:p>
                       <a:pPr>
@@ -12978,7 +12727,7 @@
               <a:tr h="365760">
                 <a:tc>
                   <a:txBody>
-                    <a:bodyPr wrap="square"/>
+                    <a:bodyPr/>
                     <a:lstStyle/>
                     <a:p>
                       <a:pPr>
@@ -12987,7 +12736,7 @@
                         </a:lnSpc>
                       </a:pPr>
                       <a:r>
-                        <a:rPr sz="1050" b="1">
+                        <a:rPr sz="1000" b="1">
                           <a:solidFill>
                             <a:srgbClr val="15201C"/>
                           </a:solidFill>
@@ -13005,7 +12754,7 @@
                 </a:tc>
                 <a:tc>
                   <a:txBody>
-                    <a:bodyPr wrap="square"/>
+                    <a:bodyPr/>
                     <a:lstStyle/>
                     <a:p>
                       <a:pPr>
@@ -13014,7 +12763,7 @@
                         </a:lnSpc>
                       </a:pPr>
                       <a:r>
-                        <a:rPr sz="1050" b="0">
+                        <a:rPr sz="1000" b="0">
                           <a:solidFill>
                             <a:srgbClr val="6B7B73"/>
                           </a:solidFill>
@@ -13032,7 +12781,7 @@
                 </a:tc>
                 <a:tc>
                   <a:txBody>
-                    <a:bodyPr wrap="square"/>
+                    <a:bodyPr/>
                     <a:lstStyle/>
                     <a:p>
                       <a:pPr>
@@ -13041,7 +12790,7 @@
                         </a:lnSpc>
                       </a:pPr>
                       <a:r>
-                        <a:rPr sz="1050" b="0">
+                        <a:rPr sz="1000" b="0">
                           <a:solidFill>
                             <a:srgbClr val="6B7B73"/>
                           </a:solidFill>
@@ -13061,7 +12810,7 @@
               <a:tr h="365760">
                 <a:tc>
                   <a:txBody>
-                    <a:bodyPr wrap="square"/>
+                    <a:bodyPr/>
                     <a:lstStyle/>
                     <a:p>
                       <a:pPr>
@@ -13070,7 +12819,7 @@
                         </a:lnSpc>
                       </a:pPr>
                       <a:r>
-                        <a:rPr sz="1050" b="1">
+                        <a:rPr sz="1000" b="1">
                           <a:solidFill>
                             <a:srgbClr val="15201C"/>
                           </a:solidFill>
@@ -13088,7 +12837,7 @@
                 </a:tc>
                 <a:tc>
                   <a:txBody>
-                    <a:bodyPr wrap="square"/>
+                    <a:bodyPr/>
                     <a:lstStyle/>
                     <a:p>
                       <a:pPr>
@@ -13097,7 +12846,7 @@
                         </a:lnSpc>
                       </a:pPr>
                       <a:r>
-                        <a:rPr sz="1050" b="0">
+                        <a:rPr sz="1000" b="0">
                           <a:solidFill>
                             <a:srgbClr val="6B7B73"/>
                           </a:solidFill>
@@ -13115,7 +12864,7 @@
                 </a:tc>
                 <a:tc>
                   <a:txBody>
-                    <a:bodyPr wrap="square"/>
+                    <a:bodyPr/>
                     <a:lstStyle/>
                     <a:p>
                       <a:pPr>
@@ -13124,13 +12873,13 @@
                         </a:lnSpc>
                       </a:pPr>
                       <a:r>
-                        <a:rPr sz="1050" b="0">
+                        <a:rPr sz="1000" b="0">
                           <a:solidFill>
                             <a:srgbClr val="6B7B73"/>
                           </a:solidFill>
                           <a:latin typeface="Hanken Grotesk"/>
                         </a:rPr>
-                        <a:t>Sequential calls + one ban-window retry (ADR-0021); cursor unmoved -&gt; next beat replays</a:t>
+                        <a:t>Sequential calls + one ban-window retry (ADR-0021); cursor unmoved → next beat replays</a:t>
                       </a:r>
                     </a:p>
                   </a:txBody>
@@ -13144,7 +12893,7 @@
               <a:tr h="365760">
                 <a:tc>
                   <a:txBody>
-                    <a:bodyPr wrap="square"/>
+                    <a:bodyPr/>
                     <a:lstStyle/>
                     <a:p>
                       <a:pPr>
@@ -13153,7 +12902,7 @@
                         </a:lnSpc>
                       </a:pPr>
                       <a:r>
-                        <a:rPr sz="1050" b="1">
+                        <a:rPr sz="1000" b="1">
                           <a:solidFill>
                             <a:srgbClr val="15201C"/>
                           </a:solidFill>
@@ -13171,7 +12920,7 @@
                 </a:tc>
                 <a:tc>
                   <a:txBody>
-                    <a:bodyPr wrap="square"/>
+                    <a:bodyPr/>
                     <a:lstStyle/>
                     <a:p>
                       <a:pPr>
@@ -13180,7 +12929,7 @@
                         </a:lnSpc>
                       </a:pPr>
                       <a:r>
-                        <a:rPr sz="1050" b="0">
+                        <a:rPr sz="1000" b="0">
                           <a:solidFill>
                             <a:srgbClr val="6B7B73"/>
                           </a:solidFill>
@@ -13198,7 +12947,7 @@
                 </a:tc>
                 <a:tc>
                   <a:txBody>
-                    <a:bodyPr wrap="square"/>
+                    <a:bodyPr/>
                     <a:lstStyle/>
                     <a:p>
                       <a:pPr>
@@ -13207,7 +12956,7 @@
                         </a:lnSpc>
                       </a:pPr>
                       <a:r>
-                        <a:rPr sz="1050" b="0">
+                        <a:rPr sz="1000" b="0">
                           <a:solidFill>
                             <a:srgbClr val="6B7B73"/>
                           </a:solidFill>
@@ -13227,7 +12976,7 @@
               <a:tr h="365760">
                 <a:tc>
                   <a:txBody>
-                    <a:bodyPr wrap="square"/>
+                    <a:bodyPr/>
                     <a:lstStyle/>
                     <a:p>
                       <a:pPr>
@@ -13236,13 +12985,13 @@
                         </a:lnSpc>
                       </a:pPr>
                       <a:r>
-                        <a:rPr sz="1050" b="1">
+                        <a:rPr sz="1000" b="1">
                           <a:solidFill>
                             <a:srgbClr val="15201C"/>
                           </a:solidFill>
                           <a:latin typeface="Hanken Grotesk"/>
                         </a:rPr>
-                        <a:t>Poller crash mid-batch</a:t>
+                        <a:t>Settlement poll crash mid-batch</a:t>
                       </a:r>
                     </a:p>
                   </a:txBody>
@@ -13254,7 +13003,7 @@
                 </a:tc>
                 <a:tc>
                   <a:txBody>
-                    <a:bodyPr wrap="square"/>
+                    <a:bodyPr/>
                     <a:lstStyle/>
                     <a:p>
                       <a:pPr>
@@ -13263,7 +13012,7 @@
                         </a:lnSpc>
                       </a:pPr>
                       <a:r>
-                        <a:rPr sz="1050" b="0">
+                        <a:rPr sz="1000" b="0">
                           <a:solidFill>
                             <a:srgbClr val="6B7B73"/>
                           </a:solidFill>
@@ -13281,7 +13030,7 @@
                 </a:tc>
                 <a:tc>
                   <a:txBody>
-                    <a:bodyPr wrap="square"/>
+                    <a:bodyPr/>
                     <a:lstStyle/>
                     <a:p>
                       <a:pPr>
@@ -13290,13 +13039,13 @@
                         </a:lnSpc>
                       </a:pPr>
                       <a:r>
-                        <a:rPr sz="1050" b="0">
+                        <a:rPr sz="1000" b="0">
                           <a:solidFill>
                             <a:srgbClr val="6B7B73"/>
                           </a:solidFill>
                           <a:latin typeface="Hanken Grotesk"/>
                         </a:rPr>
-                        <a:t>Cursor advances only after batch; ledger unique index makes replays no-ops</a:t>
+                        <a:t>Cursor advances only after batch; ledger unique index + absolute stat SETs make replays no-ops</a:t>
                       </a:r>
                     </a:p>
                   </a:txBody>
@@ -13310,7 +13059,7 @@
               <a:tr h="365760">
                 <a:tc>
                   <a:txBody>
-                    <a:bodyPr wrap="square"/>
+                    <a:bodyPr/>
                     <a:lstStyle/>
                     <a:p>
                       <a:pPr>
@@ -13319,13 +13068,13 @@
                         </a:lnSpc>
                       </a:pPr>
                       <a:r>
-                        <a:rPr sz="1050" b="1">
+                        <a:rPr sz="1000" b="1">
                           <a:solidFill>
                             <a:srgbClr val="15201C"/>
                           </a:solidFill>
                           <a:latin typeface="Hanken Grotesk"/>
                         </a:rPr>
-                        <a:t>Dispatcher poison message</a:t>
+                        <a:t>Notification invoke keeps failing</a:t>
                       </a:r>
                     </a:p>
                   </a:txBody>
@@ -13337,7 +13086,7 @@
                 </a:tc>
                 <a:tc>
                   <a:txBody>
-                    <a:bodyPr wrap="square"/>
+                    <a:bodyPr/>
                     <a:lstStyle/>
                     <a:p>
                       <a:pPr>
@@ -13346,13 +13095,13 @@
                         </a:lnSpc>
                       </a:pPr>
                       <a:r>
-                        <a:rPr sz="1050" b="0">
+                        <a:rPr sz="1000" b="0">
                           <a:solidFill>
                             <a:srgbClr val="6B7B73"/>
                           </a:solidFill>
                           <a:latin typeface="Hanken Grotesk"/>
                         </a:rPr>
-                        <a:t>Outbox item repeatedly fails</a:t>
+                        <a:t>Welcome message undelivered</a:t>
                       </a:r>
                     </a:p>
                   </a:txBody>
@@ -13364,7 +13113,7 @@
                 </a:tc>
                 <a:tc>
                   <a:txBody>
-                    <a:bodyPr wrap="square"/>
+                    <a:bodyPr/>
                     <a:lstStyle/>
                     <a:p>
                       <a:pPr>
@@ -13373,13 +13122,13 @@
                         </a:lnSpc>
                       </a:pPr>
                       <a:r>
-                        <a:rPr sz="1050" b="0">
+                        <a:rPr sz="1000" b="0">
                           <a:solidFill>
                             <a:srgbClr val="6B7B73"/>
                           </a:solidFill>
                           <a:latin typeface="Hanken Grotesk"/>
                         </a:rPr>
-                        <a:t>bisectBatchOnError + 3 retries -&gt; SQS DLQ (14 d); items age out by TTL</a:t>
+                        <a:t>Lambda async retry x2 → real-payload SQS DLQ (redrivable); kill-switched skips return success and never DLQ</a:t>
                       </a:r>
                     </a:p>
                   </a:txBody>
@@ -13393,7 +13142,7 @@
               <a:tr h="365760">
                 <a:tc>
                   <a:txBody>
-                    <a:bodyPr wrap="square"/>
+                    <a:bodyPr/>
                     <a:lstStyle/>
                     <a:p>
                       <a:pPr>
@@ -13402,7 +13151,7 @@
                         </a:lnSpc>
                       </a:pPr>
                       <a:r>
-                        <a:rPr sz="1050" b="1">
+                        <a:rPr sz="1000" b="1">
                           <a:solidFill>
                             <a:srgbClr val="15201C"/>
                           </a:solidFill>
@@ -13420,7 +13169,7 @@
                 </a:tc>
                 <a:tc>
                   <a:txBody>
-                    <a:bodyPr wrap="square"/>
+                    <a:bodyPr/>
                     <a:lstStyle/>
                     <a:p>
                       <a:pPr>
@@ -13429,7 +13178,7 @@
                         </a:lnSpc>
                       </a:pPr>
                       <a:r>
-                        <a:rPr sz="1050" b="0">
+                        <a:rPr sz="1000" b="0">
                           <a:solidFill>
                             <a:srgbClr val="6B7B73"/>
                           </a:solidFill>
@@ -13447,7 +13196,7 @@
                 </a:tc>
                 <a:tc>
                   <a:txBody>
-                    <a:bodyPr wrap="square"/>
+                    <a:bodyPr/>
                     <a:lstStyle/>
                     <a:p>
                       <a:pPr>
@@ -13456,7 +13205,7 @@
                         </a:lnSpc>
                       </a:pPr>
                       <a:r>
-                        <a:rPr sz="1050" b="0">
+                        <a:rPr sz="1000" b="0">
                           <a:solidFill>
                             <a:srgbClr val="6B7B73"/>
                           </a:solidFill>
@@ -13486,7 +13235,7 @@
         <p:spPr>
           <a:xfrm>
             <a:off x="640080" y="6455664"/>
-            <a:ext cx="10908792" cy="10972"/>
+            <a:ext cx="10908792" cy="9144"/>
           </a:xfrm>
           <a:prstGeom prst="rect">
             <a:avLst/>
@@ -13514,7 +13263,7 @@
           </a:fontRef>
         </p:style>
         <p:txBody>
-          <a:bodyPr rtlCol="0" anchor="ctr" wrap="square" lIns="146304" rIns="146304" tIns="109728" bIns="109728"/>
+          <a:bodyPr rtlCol="0" anchor="ctr"/>
           <a:lstStyle/>
           <a:p>
             <a:pPr algn="ctr"/>
@@ -13538,7 +13287,7 @@
           <a:noFill/>
         </p:spPr>
         <p:txBody>
-          <a:bodyPr wrap="square">
+          <a:bodyPr wrap="square" anchor="t" lIns="0" rIns="0" tIns="0" bIns="0">
             <a:spAutoFit/>
           </a:bodyPr>
           <a:lstStyle/>
@@ -13581,7 +13330,7 @@
           <a:noFill/>
         </p:spPr>
         <p:txBody>
-          <a:bodyPr wrap="square">
+          <a:bodyPr wrap="square" anchor="t" lIns="0" rIns="0" tIns="0" bIns="0">
             <a:spAutoFit/>
           </a:bodyPr>
           <a:lstStyle/>
@@ -13642,7 +13391,7 @@
           <a:noFill/>
         </p:spPr>
         <p:txBody>
-          <a:bodyPr wrap="square">
+          <a:bodyPr wrap="square" anchor="t" lIns="0" rIns="0" tIns="0" bIns="0">
             <a:spAutoFit/>
           </a:bodyPr>
           <a:lstStyle/>
@@ -13677,7 +13426,7 @@
           <a:noFill/>
         </p:spPr>
         <p:txBody>
-          <a:bodyPr wrap="square">
+          <a:bodyPr wrap="square" anchor="t" lIns="0" rIns="0" tIns="0" bIns="0">
             <a:spAutoFit/>
           </a:bodyPr>
           <a:lstStyle/>
@@ -13711,13 +13460,13 @@
           <a:noFill/>
         </p:spPr>
         <p:txBody>
-          <a:bodyPr wrap="square">
+          <a:bodyPr wrap="square" anchor="t" lIns="0" rIns="0" tIns="0" bIns="0">
             <a:spAutoFit/>
           </a:bodyPr>
           <a:lstStyle/>
           <a:p>
             <a:r>
-              <a:rPr sz="2300" b="1">
+              <a:rPr sz="2700" b="1">
                 <a:solidFill>
                   <a:srgbClr val="15201C"/>
                 </a:solidFill>
@@ -13753,7 +13502,7 @@
               <a:tr h="365760">
                 <a:tc>
                   <a:txBody>
-                    <a:bodyPr wrap="square"/>
+                    <a:bodyPr/>
                     <a:lstStyle/>
                     <a:p>
                       <a:pPr>
@@ -13780,7 +13529,7 @@
                 </a:tc>
                 <a:tc>
                   <a:txBody>
-                    <a:bodyPr wrap="square"/>
+                    <a:bodyPr/>
                     <a:lstStyle/>
                     <a:p>
                       <a:pPr>
@@ -13809,7 +13558,7 @@
               <a:tr h="365760">
                 <a:tc>
                   <a:txBody>
-                    <a:bodyPr wrap="square"/>
+                    <a:bodyPr/>
                     <a:lstStyle/>
                     <a:p>
                       <a:pPr>
@@ -13818,7 +13567,7 @@
                         </a:lnSpc>
                       </a:pPr>
                       <a:r>
-                        <a:rPr sz="1050" b="1">
+                        <a:rPr sz="1000" b="1">
                           <a:solidFill>
                             <a:srgbClr val="15201C"/>
                           </a:solidFill>
@@ -13836,7 +13585,7 @@
                 </a:tc>
                 <a:tc>
                   <a:txBody>
-                    <a:bodyPr wrap="square"/>
+                    <a:bodyPr/>
                     <a:lstStyle/>
                     <a:p>
                       <a:pPr>
@@ -13845,13 +13594,13 @@
                         </a:lnSpc>
                       </a:pPr>
                       <a:r>
-                        <a:rPr sz="1050" b="0">
+                        <a:rPr sz="1000" b="0">
                           <a:solidFill>
                             <a:srgbClr val="6B7B73"/>
                           </a:solidFill>
                           <a:latin typeface="Hanken Grotesk"/>
                         </a:rPr>
-                        <a:t>Not available in il-central-1 - verified, killed the design branch</a:t>
+                        <a:t>Not available in il-central-1 — verified, killed the design branch</a:t>
                       </a:r>
                     </a:p>
                   </a:txBody>
@@ -13865,7 +13614,7 @@
               <a:tr h="365760">
                 <a:tc>
                   <a:txBody>
-                    <a:bodyPr wrap="square"/>
+                    <a:bodyPr/>
                     <a:lstStyle/>
                     <a:p>
                       <a:pPr>
@@ -13874,7 +13623,7 @@
                         </a:lnSpc>
                       </a:pPr>
                       <a:r>
-                        <a:rPr sz="1050" b="1">
+                        <a:rPr sz="1000" b="1">
                           <a:solidFill>
                             <a:srgbClr val="15201C"/>
                           </a:solidFill>
@@ -13892,7 +13641,7 @@
                 </a:tc>
                 <a:tc>
                   <a:txBody>
-                    <a:bodyPr wrap="square"/>
+                    <a:bodyPr/>
                     <a:lstStyle/>
                     <a:p>
                       <a:pPr>
@@ -13901,13 +13650,13 @@
                         </a:lnSpc>
                       </a:pPr>
                       <a:r>
-                        <a:rPr sz="1050" b="0">
+                        <a:rPr sz="1000" b="0">
                           <a:solidFill>
                             <a:srgbClr val="6B7B73"/>
                           </a:solidFill>
                           <a:latin typeface="Hanken Grotesk"/>
                         </a:rPr>
-                        <a:t>Not available in il-central-1 -&gt; HTTP API behind CloudFront /p/*</a:t>
+                        <a:t>Not available in il-central-1 → HTTP API behind CloudFront /p/*</a:t>
                       </a:r>
                     </a:p>
                   </a:txBody>
@@ -13921,7 +13670,7 @@
               <a:tr h="365760">
                 <a:tc>
                   <a:txBody>
-                    <a:bodyPr wrap="square"/>
+                    <a:bodyPr/>
                     <a:lstStyle/>
                     <a:p>
                       <a:pPr>
@@ -13930,7 +13679,7 @@
                         </a:lnSpc>
                       </a:pPr>
                       <a:r>
-                        <a:rPr sz="1050" b="1">
+                        <a:rPr sz="1000" b="1">
                           <a:solidFill>
                             <a:srgbClr val="15201C"/>
                           </a:solidFill>
@@ -13948,7 +13697,7 @@
                 </a:tc>
                 <a:tc>
                   <a:txBody>
-                    <a:bodyPr wrap="square"/>
+                    <a:bodyPr/>
                     <a:lstStyle/>
                     <a:p>
                       <a:pPr>
@@ -13957,7 +13706,7 @@
                         </a:lnSpc>
                       </a:pPr>
                       <a:r>
-                        <a:rPr sz="1050" b="0">
+                        <a:rPr sz="1000" b="0">
                           <a:solidFill>
                             <a:srgbClr val="6B7B73"/>
                           </a:solidFill>
@@ -13977,7 +13726,7 @@
               <a:tr h="365760">
                 <a:tc>
                   <a:txBody>
-                    <a:bodyPr wrap="square"/>
+                    <a:bodyPr/>
                     <a:lstStyle/>
                     <a:p>
                       <a:pPr>
@@ -13986,7 +13735,7 @@
                         </a:lnSpc>
                       </a:pPr>
                       <a:r>
-                        <a:rPr sz="1050" b="1">
+                        <a:rPr sz="1000" b="1">
                           <a:solidFill>
                             <a:srgbClr val="15201C"/>
                           </a:solidFill>
@@ -14004,7 +13753,7 @@
                 </a:tc>
                 <a:tc>
                   <a:txBody>
-                    <a:bodyPr wrap="square"/>
+                    <a:bodyPr/>
                     <a:lstStyle/>
                     <a:p>
                       <a:pPr>
@@ -14013,7 +13762,7 @@
                         </a:lnSpc>
                       </a:pPr>
                       <a:r>
-                        <a:rPr sz="1050" b="0">
+                        <a:rPr sz="1000" b="0">
                           <a:solidFill>
                             <a:srgbClr val="6B7B73"/>
                           </a:solidFill>
@@ -14033,7 +13782,7 @@
               <a:tr h="365760">
                 <a:tc>
                   <a:txBody>
-                    <a:bodyPr wrap="square"/>
+                    <a:bodyPr/>
                     <a:lstStyle/>
                     <a:p>
                       <a:pPr>
@@ -14042,7 +13791,7 @@
                         </a:lnSpc>
                       </a:pPr>
                       <a:r>
-                        <a:rPr sz="1050" b="1">
+                        <a:rPr sz="1000" b="1">
                           <a:solidFill>
                             <a:srgbClr val="15201C"/>
                           </a:solidFill>
@@ -14060,7 +13809,7 @@
                 </a:tc>
                 <a:tc>
                   <a:txBody>
-                    <a:bodyPr wrap="square"/>
+                    <a:bodyPr/>
                     <a:lstStyle/>
                     <a:p>
                       <a:pPr>
@@ -14069,7 +13818,7 @@
                         </a:lnSpc>
                       </a:pPr>
                       <a:r>
-                        <a:rPr sz="1050" b="0">
+                        <a:rPr sz="1000" b="0">
                           <a:solidFill>
                             <a:srgbClr val="6B7B73"/>
                           </a:solidFill>
@@ -14089,7 +13838,7 @@
               <a:tr h="365760">
                 <a:tc>
                   <a:txBody>
-                    <a:bodyPr wrap="square"/>
+                    <a:bodyPr/>
                     <a:lstStyle/>
                     <a:p>
                       <a:pPr>
@@ -14098,7 +13847,7 @@
                         </a:lnSpc>
                       </a:pPr>
                       <a:r>
-                        <a:rPr sz="1050" b="1">
+                        <a:rPr sz="1000" b="1">
                           <a:solidFill>
                             <a:srgbClr val="15201C"/>
                           </a:solidFill>
@@ -14116,7 +13865,7 @@
                 </a:tc>
                 <a:tc>
                   <a:txBody>
-                    <a:bodyPr wrap="square"/>
+                    <a:bodyPr/>
                     <a:lstStyle/>
                     <a:p>
                       <a:pPr>
@@ -14125,7 +13874,7 @@
                         </a:lnSpc>
                       </a:pPr>
                       <a:r>
-                        <a:rPr sz="1050" b="0">
+                        <a:rPr sz="1000" b="0">
                           <a:solidFill>
                             <a:srgbClr val="6B7B73"/>
                           </a:solidFill>
@@ -14145,7 +13894,7 @@
               <a:tr h="365760">
                 <a:tc>
                   <a:txBody>
-                    <a:bodyPr wrap="square"/>
+                    <a:bodyPr/>
                     <a:lstStyle/>
                     <a:p>
                       <a:pPr>
@@ -14154,7 +13903,7 @@
                         </a:lnSpc>
                       </a:pPr>
                       <a:r>
-                        <a:rPr sz="1050" b="1">
+                        <a:rPr sz="1000" b="1">
                           <a:solidFill>
                             <a:srgbClr val="15201C"/>
                           </a:solidFill>
@@ -14172,7 +13921,7 @@
                 </a:tc>
                 <a:tc>
                   <a:txBody>
-                    <a:bodyPr wrap="square"/>
+                    <a:bodyPr/>
                     <a:lstStyle/>
                     <a:p>
                       <a:pPr>
@@ -14181,7 +13930,7 @@
                         </a:lnSpc>
                       </a:pPr>
                       <a:r>
-                        <a:rPr sz="1050" b="0">
+                        <a:rPr sz="1000" b="0">
                           <a:solidFill>
                             <a:srgbClr val="6B7B73"/>
                           </a:solidFill>
@@ -14201,7 +13950,7 @@
               <a:tr h="365760">
                 <a:tc>
                   <a:txBody>
-                    <a:bodyPr wrap="square"/>
+                    <a:bodyPr/>
                     <a:lstStyle/>
                     <a:p>
                       <a:pPr>
@@ -14210,7 +13959,7 @@
                         </a:lnSpc>
                       </a:pPr>
                       <a:r>
-                        <a:rPr sz="1050" b="1">
+                        <a:rPr sz="1000" b="1">
                           <a:solidFill>
                             <a:srgbClr val="15201C"/>
                           </a:solidFill>
@@ -14228,7 +13977,7 @@
                 </a:tc>
                 <a:tc>
                   <a:txBody>
-                    <a:bodyPr wrap="square"/>
+                    <a:bodyPr/>
                     <a:lstStyle/>
                     <a:p>
                       <a:pPr>
@@ -14237,13 +13986,13 @@
                         </a:lnSpc>
                       </a:pPr>
                       <a:r>
-                        <a:rPr sz="1050" b="0">
+                        <a:rPr sz="1000" b="0">
                           <a:solidFill>
                             <a:srgbClr val="6B7B73"/>
                           </a:solidFill>
                           <a:latin typeface="Hanken Grotesk"/>
                         </a:rPr>
-                        <a:t>Kept Aurora on the auth path and PII in two stores; moved to Cognito attributes (ADR-0027)</a:t>
+                        <a:t>Kept Aurora on the auth path and PII in two stores; moved to Cognito attributes (ADR-0006)</a:t>
                       </a:r>
                     </a:p>
                   </a:txBody>
@@ -14267,7 +14016,7 @@
         <p:spPr>
           <a:xfrm>
             <a:off x="640080" y="6455664"/>
-            <a:ext cx="10908792" cy="10972"/>
+            <a:ext cx="10908792" cy="9144"/>
           </a:xfrm>
           <a:prstGeom prst="rect">
             <a:avLst/>
@@ -14295,7 +14044,7 @@
           </a:fontRef>
         </p:style>
         <p:txBody>
-          <a:bodyPr rtlCol="0" anchor="ctr" wrap="square" lIns="146304" rIns="146304" tIns="109728" bIns="109728"/>
+          <a:bodyPr rtlCol="0" anchor="ctr"/>
           <a:lstStyle/>
           <a:p>
             <a:pPr algn="ctr"/>
@@ -14319,7 +14068,7 @@
           <a:noFill/>
         </p:spPr>
         <p:txBody>
-          <a:bodyPr wrap="square">
+          <a:bodyPr wrap="square" anchor="t" lIns="0" rIns="0" tIns="0" bIns="0">
             <a:spAutoFit/>
           </a:bodyPr>
           <a:lstStyle/>
@@ -14362,7 +14111,7 @@
           <a:noFill/>
         </p:spPr>
         <p:txBody>
-          <a:bodyPr wrap="square">
+          <a:bodyPr wrap="square" anchor="t" lIns="0" rIns="0" tIns="0" bIns="0">
             <a:spAutoFit/>
           </a:bodyPr>
           <a:lstStyle/>
@@ -14423,7 +14172,7 @@
           <a:noFill/>
         </p:spPr>
         <p:txBody>
-          <a:bodyPr wrap="square">
+          <a:bodyPr wrap="square" anchor="t" lIns="0" rIns="0" tIns="0" bIns="0">
             <a:spAutoFit/>
           </a:bodyPr>
           <a:lstStyle/>
@@ -14458,7 +14207,7 @@
           <a:noFill/>
         </p:spPr>
         <p:txBody>
-          <a:bodyPr wrap="square">
+          <a:bodyPr wrap="square" anchor="t" lIns="0" rIns="0" tIns="0" bIns="0">
             <a:spAutoFit/>
           </a:bodyPr>
           <a:lstStyle/>
@@ -14492,7 +14241,7 @@
           <a:noFill/>
         </p:spPr>
         <p:txBody>
-          <a:bodyPr wrap="square">
+          <a:bodyPr wrap="square" anchor="t" lIns="0" rIns="0" tIns="0" bIns="0">
             <a:spAutoFit/>
           </a:bodyPr>
           <a:lstStyle/>
@@ -14522,7 +14271,7 @@
           </a:xfrm>
           <a:prstGeom prst="roundRect">
             <a:avLst>
-              <a:gd name="adj" fmla="val 5500"/>
+              <a:gd name="adj" fmla="val 6000"/>
             </a:avLst>
           </a:prstGeom>
           <a:solidFill>
@@ -14550,7 +14299,7 @@
           </a:fontRef>
         </p:style>
         <p:txBody>
-          <a:bodyPr rtlCol="0" anchor="ctr" wrap="square" lIns="146304" rIns="146304" tIns="109728" bIns="109728"/>
+          <a:bodyPr rtlCol="0" anchor="ctr"/>
           <a:lstStyle/>
           <a:p>
             <a:pPr algn="ctr"/>
@@ -14565,12 +14314,12 @@
         </p:nvSpPr>
         <p:spPr>
           <a:xfrm>
-            <a:off x="3602735" y="2029968"/>
+            <a:off x="3602736" y="2029968"/>
             <a:ext cx="475488" cy="475488"/>
           </a:xfrm>
           <a:prstGeom prst="roundRect">
             <a:avLst>
-              <a:gd name="adj" fmla="val 28000"/>
+              <a:gd name="adj" fmla="val 22000"/>
             </a:avLst>
           </a:prstGeom>
           <a:solidFill>
@@ -14598,7 +14347,7 @@
           </a:fontRef>
         </p:style>
         <p:txBody>
-          <a:bodyPr rtlCol="0" anchor="ctr" wrap="square" lIns="146304" rIns="146304" tIns="109728" bIns="109728"/>
+          <a:bodyPr rtlCol="0" anchor="ctr"/>
           <a:lstStyle/>
           <a:p>
             <a:pPr algn="ctr"/>
@@ -14607,7 +14356,7 @@
       </p:sp>
       <p:pic>
         <p:nvPicPr>
-          <p:cNvPr id="7" name="Picture 6" descr="cart.png"/>
+          <p:cNvPr id="7" name="Picture 6" descr="s03_i1.png"/>
           <p:cNvPicPr>
             <a:picLocks noChangeAspect="1"/>
           </p:cNvPicPr>
@@ -14621,8 +14370,8 @@
         </p:blipFill>
         <p:spPr>
           <a:xfrm>
-            <a:off x="3669304" y="2096536"/>
-            <a:ext cx="342351" cy="342351"/>
+            <a:off x="3671315" y="2098548"/>
+            <a:ext cx="338328" cy="338328"/>
           </a:xfrm>
           <a:prstGeom prst="rect">
             <a:avLst/>
@@ -14646,7 +14395,7 @@
           <a:noFill/>
         </p:spPr>
         <p:txBody>
-          <a:bodyPr wrap="square">
+          <a:bodyPr wrap="square" anchor="t" lIns="0" rIns="0" tIns="0" bIns="0">
             <a:spAutoFit/>
           </a:bodyPr>
           <a:lstStyle/>
@@ -14680,14 +14429,14 @@
           <a:noFill/>
         </p:spPr>
         <p:txBody>
-          <a:bodyPr wrap="square">
+          <a:bodyPr wrap="square" anchor="t" lIns="0" rIns="0" tIns="0" bIns="0">
             <a:spAutoFit/>
           </a:bodyPr>
           <a:lstStyle/>
           <a:p>
             <a:pPr>
               <a:lnSpc>
-                <a:spcPct val="112000"/>
+                <a:spcPct val="108000"/>
               </a:lnSpc>
             </a:pPr>
             <a:r>
@@ -14715,7 +14464,7 @@
           </a:xfrm>
           <a:prstGeom prst="roundRect">
             <a:avLst>
-              <a:gd name="adj" fmla="val 5500"/>
+              <a:gd name="adj" fmla="val 6000"/>
             </a:avLst>
           </a:prstGeom>
           <a:solidFill>
@@ -14743,7 +14492,7 @@
           </a:fontRef>
         </p:style>
         <p:txBody>
-          <a:bodyPr rtlCol="0" anchor="ctr" wrap="square" lIns="146304" rIns="146304" tIns="109728" bIns="109728"/>
+          <a:bodyPr rtlCol="0" anchor="ctr"/>
           <a:lstStyle/>
           <a:p>
             <a:pPr algn="ctr"/>
@@ -14763,7 +14512,7 @@
           </a:xfrm>
           <a:prstGeom prst="roundRect">
             <a:avLst>
-              <a:gd name="adj" fmla="val 28000"/>
+              <a:gd name="adj" fmla="val 22000"/>
             </a:avLst>
           </a:prstGeom>
           <a:solidFill>
@@ -14791,7 +14540,7 @@
           </a:fontRef>
         </p:style>
         <p:txBody>
-          <a:bodyPr rtlCol="0" anchor="ctr" wrap="square" lIns="146304" rIns="146304" tIns="109728" bIns="109728"/>
+          <a:bodyPr rtlCol="0" anchor="ctr"/>
           <a:lstStyle/>
           <a:p>
             <a:pPr algn="ctr"/>
@@ -14800,7 +14549,7 @@
       </p:sp>
       <p:pic>
         <p:nvPicPr>
-          <p:cNvPr id="12" name="Picture 11" descr="chat.png"/>
+          <p:cNvPr id="12" name="Picture 11" descr="s03_i2.png"/>
           <p:cNvPicPr>
             <a:picLocks noChangeAspect="1"/>
           </p:cNvPicPr>
@@ -14814,8 +14563,8 @@
         </p:blipFill>
         <p:spPr>
           <a:xfrm>
-            <a:off x="7464064" y="2096536"/>
-            <a:ext cx="342351" cy="342351"/>
+            <a:off x="7466075" y="2098548"/>
+            <a:ext cx="338328" cy="338328"/>
           </a:xfrm>
           <a:prstGeom prst="rect">
             <a:avLst/>
@@ -14839,7 +14588,7 @@
           <a:noFill/>
         </p:spPr>
         <p:txBody>
-          <a:bodyPr wrap="square">
+          <a:bodyPr wrap="square" anchor="t" lIns="0" rIns="0" tIns="0" bIns="0">
             <a:spAutoFit/>
           </a:bodyPr>
           <a:lstStyle/>
@@ -14873,14 +14622,14 @@
           <a:noFill/>
         </p:spPr>
         <p:txBody>
-          <a:bodyPr wrap="square">
+          <a:bodyPr wrap="square" anchor="t" lIns="0" rIns="0" tIns="0" bIns="0">
             <a:spAutoFit/>
           </a:bodyPr>
           <a:lstStyle/>
           <a:p>
             <a:pPr>
               <a:lnSpc>
-                <a:spcPct val="112000"/>
+                <a:spcPct val="108000"/>
               </a:lnSpc>
             </a:pPr>
             <a:r>
@@ -14908,7 +14657,7 @@
           </a:xfrm>
           <a:prstGeom prst="roundRect">
             <a:avLst>
-              <a:gd name="adj" fmla="val 5500"/>
+              <a:gd name="adj" fmla="val 6000"/>
             </a:avLst>
           </a:prstGeom>
           <a:solidFill>
@@ -14936,7 +14685,7 @@
           </a:fontRef>
         </p:style>
         <p:txBody>
-          <a:bodyPr rtlCol="0" anchor="ctr" wrap="square" lIns="146304" rIns="146304" tIns="109728" bIns="109728"/>
+          <a:bodyPr rtlCol="0" anchor="ctr"/>
           <a:lstStyle/>
           <a:p>
             <a:pPr algn="ctr"/>
@@ -14956,7 +14705,7 @@
           </a:xfrm>
           <a:prstGeom prst="roundRect">
             <a:avLst>
-              <a:gd name="adj" fmla="val 28000"/>
+              <a:gd name="adj" fmla="val 22000"/>
             </a:avLst>
           </a:prstGeom>
           <a:solidFill>
@@ -14984,7 +14733,7 @@
           </a:fontRef>
         </p:style>
         <p:txBody>
-          <a:bodyPr rtlCol="0" anchor="ctr" wrap="square" lIns="146304" rIns="146304" tIns="109728" bIns="109728"/>
+          <a:bodyPr rtlCol="0" anchor="ctr"/>
           <a:lstStyle/>
           <a:p>
             <a:pPr algn="ctr"/>
@@ -14993,7 +14742,7 @@
       </p:sp>
       <p:pic>
         <p:nvPicPr>
-          <p:cNvPr id="17" name="Picture 16" descr="trend.png"/>
+          <p:cNvPr id="17" name="Picture 16" descr="s03_i3.png"/>
           <p:cNvPicPr>
             <a:picLocks noChangeAspect="1"/>
           </p:cNvPicPr>
@@ -15007,8 +14756,8 @@
         </p:blipFill>
         <p:spPr>
           <a:xfrm>
-            <a:off x="11258824" y="2096536"/>
-            <a:ext cx="342351" cy="342351"/>
+            <a:off x="11260836" y="2098548"/>
+            <a:ext cx="338328" cy="338328"/>
           </a:xfrm>
           <a:prstGeom prst="rect">
             <a:avLst/>
@@ -15032,7 +14781,7 @@
           <a:noFill/>
         </p:spPr>
         <p:txBody>
-          <a:bodyPr wrap="square">
+          <a:bodyPr wrap="square" anchor="t" lIns="0" rIns="0" tIns="0" bIns="0">
             <a:spAutoFit/>
           </a:bodyPr>
           <a:lstStyle/>
@@ -15066,14 +14815,14 @@
           <a:noFill/>
         </p:spPr>
         <p:txBody>
-          <a:bodyPr wrap="square">
+          <a:bodyPr wrap="square" anchor="t" lIns="0" rIns="0" tIns="0" bIns="0">
             <a:spAutoFit/>
           </a:bodyPr>
           <a:lstStyle/>
           <a:p>
             <a:pPr>
               <a:lnSpc>
-                <a:spcPct val="112000"/>
+                <a:spcPct val="108000"/>
               </a:lnSpc>
             </a:pPr>
             <a:r>
@@ -15101,7 +14850,7 @@
           </a:xfrm>
           <a:prstGeom prst="roundRect">
             <a:avLst>
-              <a:gd name="adj" fmla="val 5500"/>
+              <a:gd name="adj" fmla="val 6000"/>
             </a:avLst>
           </a:prstGeom>
           <a:solidFill>
@@ -15129,7 +14878,7 @@
           </a:fontRef>
         </p:style>
         <p:txBody>
-          <a:bodyPr rtlCol="0" anchor="ctr" wrap="square" lIns="146304" rIns="146304" tIns="109728" bIns="109728"/>
+          <a:bodyPr rtlCol="0" anchor="ctr"/>
           <a:lstStyle/>
           <a:p>
             <a:pPr algn="ctr"/>
@@ -15144,12 +14893,12 @@
         </p:nvSpPr>
         <p:spPr>
           <a:xfrm>
-            <a:off x="3602735" y="4206240"/>
+            <a:off x="3602736" y="4206240"/>
             <a:ext cx="475488" cy="475488"/>
           </a:xfrm>
           <a:prstGeom prst="roundRect">
             <a:avLst>
-              <a:gd name="adj" fmla="val 28000"/>
+              <a:gd name="adj" fmla="val 22000"/>
             </a:avLst>
           </a:prstGeom>
           <a:solidFill>
@@ -15177,7 +14926,7 @@
           </a:fontRef>
         </p:style>
         <p:txBody>
-          <a:bodyPr rtlCol="0" anchor="ctr" wrap="square" lIns="146304" rIns="146304" tIns="109728" bIns="109728"/>
+          <a:bodyPr rtlCol="0" anchor="ctr"/>
           <a:lstStyle/>
           <a:p>
             <a:pPr algn="ctr"/>
@@ -15186,7 +14935,7 @@
       </p:sp>
       <p:pic>
         <p:nvPicPr>
-          <p:cNvPr id="22" name="Picture 21" descr="clock.png"/>
+          <p:cNvPr id="22" name="Picture 21" descr="s03_i4.png"/>
           <p:cNvPicPr>
             <a:picLocks noChangeAspect="1"/>
           </p:cNvPicPr>
@@ -15200,8 +14949,8 @@
         </p:blipFill>
         <p:spPr>
           <a:xfrm>
-            <a:off x="3669304" y="4272808"/>
-            <a:ext cx="342351" cy="342351"/>
+            <a:off x="3671315" y="4274820"/>
+            <a:ext cx="338328" cy="338328"/>
           </a:xfrm>
           <a:prstGeom prst="rect">
             <a:avLst/>
@@ -15225,7 +14974,7 @@
           <a:noFill/>
         </p:spPr>
         <p:txBody>
-          <a:bodyPr wrap="square">
+          <a:bodyPr wrap="square" anchor="t" lIns="0" rIns="0" tIns="0" bIns="0">
             <a:spAutoFit/>
           </a:bodyPr>
           <a:lstStyle/>
@@ -15259,14 +15008,14 @@
           <a:noFill/>
         </p:spPr>
         <p:txBody>
-          <a:bodyPr wrap="square">
+          <a:bodyPr wrap="square" anchor="t" lIns="0" rIns="0" tIns="0" bIns="0">
             <a:spAutoFit/>
           </a:bodyPr>
           <a:lstStyle/>
           <a:p>
             <a:pPr>
               <a:lnSpc>
-                <a:spcPct val="112000"/>
+                <a:spcPct val="108000"/>
               </a:lnSpc>
             </a:pPr>
             <a:r>
@@ -15294,7 +15043,7 @@
           </a:xfrm>
           <a:prstGeom prst="roundRect">
             <a:avLst>
-              <a:gd name="adj" fmla="val 5500"/>
+              <a:gd name="adj" fmla="val 6000"/>
             </a:avLst>
           </a:prstGeom>
           <a:solidFill>
@@ -15322,7 +15071,7 @@
           </a:fontRef>
         </p:style>
         <p:txBody>
-          <a:bodyPr rtlCol="0" anchor="ctr" wrap="square" lIns="146304" rIns="146304" tIns="109728" bIns="109728"/>
+          <a:bodyPr rtlCol="0" anchor="ctr"/>
           <a:lstStyle/>
           <a:p>
             <a:pPr algn="ctr"/>
@@ -15342,7 +15091,7 @@
           </a:xfrm>
           <a:prstGeom prst="roundRect">
             <a:avLst>
-              <a:gd name="adj" fmla="val 28000"/>
+              <a:gd name="adj" fmla="val 22000"/>
             </a:avLst>
           </a:prstGeom>
           <a:solidFill>
@@ -15370,7 +15119,7 @@
           </a:fontRef>
         </p:style>
         <p:txBody>
-          <a:bodyPr rtlCol="0" anchor="ctr" wrap="square" lIns="146304" rIns="146304" tIns="109728" bIns="109728"/>
+          <a:bodyPr rtlCol="0" anchor="ctr"/>
           <a:lstStyle/>
           <a:p>
             <a:pPr algn="ctr"/>
@@ -15379,7 +15128,7 @@
       </p:sp>
       <p:pic>
         <p:nvPicPr>
-          <p:cNvPr id="27" name="Picture 26" descr="bank.png"/>
+          <p:cNvPr id="27" name="Picture 26" descr="s03_i5.png"/>
           <p:cNvPicPr>
             <a:picLocks noChangeAspect="1"/>
           </p:cNvPicPr>
@@ -15393,8 +15142,8 @@
         </p:blipFill>
         <p:spPr>
           <a:xfrm>
-            <a:off x="7464064" y="4272808"/>
-            <a:ext cx="342351" cy="342351"/>
+            <a:off x="7466075" y="4274820"/>
+            <a:ext cx="338328" cy="338328"/>
           </a:xfrm>
           <a:prstGeom prst="rect">
             <a:avLst/>
@@ -15418,7 +15167,7 @@
           <a:noFill/>
         </p:spPr>
         <p:txBody>
-          <a:bodyPr wrap="square">
+          <a:bodyPr wrap="square" anchor="t" lIns="0" rIns="0" tIns="0" bIns="0">
             <a:spAutoFit/>
           </a:bodyPr>
           <a:lstStyle/>
@@ -15452,14 +15201,14 @@
           <a:noFill/>
         </p:spPr>
         <p:txBody>
-          <a:bodyPr wrap="square">
+          <a:bodyPr wrap="square" anchor="t" lIns="0" rIns="0" tIns="0" bIns="0">
             <a:spAutoFit/>
           </a:bodyPr>
           <a:lstStyle/>
           <a:p>
             <a:pPr>
               <a:lnSpc>
-                <a:spcPct val="112000"/>
+                <a:spcPct val="108000"/>
               </a:lnSpc>
             </a:pPr>
             <a:r>
@@ -15487,7 +15236,7 @@
           </a:xfrm>
           <a:prstGeom prst="roundRect">
             <a:avLst>
-              <a:gd name="adj" fmla="val 5500"/>
+              <a:gd name="adj" fmla="val 6000"/>
             </a:avLst>
           </a:prstGeom>
           <a:solidFill>
@@ -15515,7 +15264,7 @@
           </a:fontRef>
         </p:style>
         <p:txBody>
-          <a:bodyPr rtlCol="0" anchor="ctr" wrap="square" lIns="146304" rIns="146304" tIns="109728" bIns="109728"/>
+          <a:bodyPr rtlCol="0" anchor="ctr"/>
           <a:lstStyle/>
           <a:p>
             <a:pPr algn="ctr"/>
@@ -15535,7 +15284,7 @@
           </a:xfrm>
           <a:prstGeom prst="roundRect">
             <a:avLst>
-              <a:gd name="adj" fmla="val 28000"/>
+              <a:gd name="adj" fmla="val 22000"/>
             </a:avLst>
           </a:prstGeom>
           <a:solidFill>
@@ -15563,7 +15312,7 @@
           </a:fontRef>
         </p:style>
         <p:txBody>
-          <a:bodyPr rtlCol="0" anchor="ctr" wrap="square" lIns="146304" rIns="146304" tIns="109728" bIns="109728"/>
+          <a:bodyPr rtlCol="0" anchor="ctr"/>
           <a:lstStyle/>
           <a:p>
             <a:pPr algn="ctr"/>
@@ -15572,7 +15321,7 @@
       </p:sp>
       <p:pic>
         <p:nvPicPr>
-          <p:cNvPr id="32" name="Picture 31" descr="target.png"/>
+          <p:cNvPr id="32" name="Picture 31" descr="s03_i6.png"/>
           <p:cNvPicPr>
             <a:picLocks noChangeAspect="1"/>
           </p:cNvPicPr>
@@ -15586,8 +15335,8 @@
         </p:blipFill>
         <p:spPr>
           <a:xfrm>
-            <a:off x="11258824" y="4272808"/>
-            <a:ext cx="342351" cy="342351"/>
+            <a:off x="11260836" y="4274820"/>
+            <a:ext cx="338328" cy="338328"/>
           </a:xfrm>
           <a:prstGeom prst="rect">
             <a:avLst/>
@@ -15611,7 +15360,7 @@
           <a:noFill/>
         </p:spPr>
         <p:txBody>
-          <a:bodyPr wrap="square">
+          <a:bodyPr wrap="square" anchor="t" lIns="0" rIns="0" tIns="0" bIns="0">
             <a:spAutoFit/>
           </a:bodyPr>
           <a:lstStyle/>
@@ -15645,14 +15394,14 @@
           <a:noFill/>
         </p:spPr>
         <p:txBody>
-          <a:bodyPr wrap="square">
+          <a:bodyPr wrap="square" anchor="t" lIns="0" rIns="0" tIns="0" bIns="0">
             <a:spAutoFit/>
           </a:bodyPr>
           <a:lstStyle/>
           <a:p>
             <a:pPr>
               <a:lnSpc>
-                <a:spcPct val="112000"/>
+                <a:spcPct val="108000"/>
               </a:lnSpc>
             </a:pPr>
             <a:r>
@@ -15662,7 +15411,7 @@
                 </a:solidFill>
                 <a:latin typeface="Hanken Grotesk"/>
               </a:rPr>
-              <a:t>gates: 500 active sharers · &gt;20% CTR · &gt;6% conversion · &gt;50% 30-day return</a:t>
+              <a:t>go/no-go gates: 500 active sharers · &gt;20% CTR · &gt;6% conversion · &gt;50% 30-day return</a:t>
             </a:r>
           </a:p>
         </p:txBody>
@@ -15676,7 +15425,7 @@
         <p:spPr>
           <a:xfrm>
             <a:off x="640080" y="6455664"/>
-            <a:ext cx="10908792" cy="10972"/>
+            <a:ext cx="10908792" cy="9144"/>
           </a:xfrm>
           <a:prstGeom prst="rect">
             <a:avLst/>
@@ -15704,7 +15453,7 @@
           </a:fontRef>
         </p:style>
         <p:txBody>
-          <a:bodyPr rtlCol="0" anchor="ctr" wrap="square" lIns="146304" rIns="146304" tIns="109728" bIns="109728"/>
+          <a:bodyPr rtlCol="0" anchor="ctr"/>
           <a:lstStyle/>
           <a:p>
             <a:pPr algn="ctr"/>
@@ -15728,7 +15477,7 @@
           <a:noFill/>
         </p:spPr>
         <p:txBody>
-          <a:bodyPr wrap="square">
+          <a:bodyPr wrap="square" anchor="t" lIns="0" rIns="0" tIns="0" bIns="0">
             <a:spAutoFit/>
           </a:bodyPr>
           <a:lstStyle/>
@@ -15771,7 +15520,7 @@
           <a:noFill/>
         </p:spPr>
         <p:txBody>
-          <a:bodyPr wrap="square">
+          <a:bodyPr wrap="square" anchor="t" lIns="0" rIns="0" tIns="0" bIns="0">
             <a:spAutoFit/>
           </a:bodyPr>
           <a:lstStyle/>
@@ -15832,7 +15581,7 @@
           <a:noFill/>
         </p:spPr>
         <p:txBody>
-          <a:bodyPr wrap="square">
+          <a:bodyPr wrap="square" anchor="t" lIns="0" rIns="0" tIns="0" bIns="0">
             <a:spAutoFit/>
           </a:bodyPr>
           <a:lstStyle/>
@@ -15867,7 +15616,7 @@
           <a:noFill/>
         </p:spPr>
         <p:txBody>
-          <a:bodyPr wrap="square">
+          <a:bodyPr wrap="square" anchor="t" lIns="0" rIns="0" tIns="0" bIns="0">
             <a:spAutoFit/>
           </a:bodyPr>
           <a:lstStyle/>
@@ -15901,7 +15650,7 @@
           <a:noFill/>
         </p:spPr>
         <p:txBody>
-          <a:bodyPr wrap="square">
+          <a:bodyPr wrap="square" anchor="t" lIns="0" rIns="0" tIns="0" bIns="0">
             <a:spAutoFit/>
           </a:bodyPr>
           <a:lstStyle/>
@@ -15926,8 +15675,8 @@
         </p:nvSpPr>
         <p:spPr>
           <a:xfrm>
-            <a:off x="342900" y="1700784"/>
-            <a:ext cx="2108805" cy="274320"/>
+            <a:off x="347472" y="1700784"/>
+            <a:ext cx="2112264" cy="274320"/>
           </a:xfrm>
           <a:prstGeom prst="roundRect">
             <a:avLst>
@@ -15959,7 +15708,7 @@
           </a:fontRef>
         </p:style>
         <p:txBody>
-          <a:bodyPr rtlCol="0" anchor="ctr" wrap="square" lIns="146304" rIns="146304" tIns="9144" bIns="9144"/>
+          <a:bodyPr rtlCol="0" anchor="ctr" wrap="none" lIns="0" rIns="0" tIns="0" bIns="0"/>
           <a:lstStyle/>
           <a:p>
             <a:pPr algn="ctr"/>
@@ -15992,12 +15741,12 @@
         <p:spPr>
           <a:xfrm>
             <a:off x="457200" y="2103120"/>
-            <a:ext cx="1880205" cy="3246120"/>
-          </a:xfrm>
-          <a:prstGeom prst="rect">
-            <a:avLst/>
-          </a:prstGeom>
-          <a:ln w="15240">
+            <a:ext cx="1883664" cy="3246120"/>
+          </a:xfrm>
+          <a:prstGeom prst="rect">
+            <a:avLst/>
+          </a:prstGeom>
+          <a:ln w="12700">
             <a:solidFill>
               <a:srgbClr val="D2E3D9"/>
             </a:solidFill>
@@ -16012,8 +15761,8 @@
         </p:nvSpPr>
         <p:spPr>
           <a:xfrm>
-            <a:off x="274320" y="5440679"/>
-            <a:ext cx="2245965" cy="914400"/>
+            <a:off x="274320" y="5440680"/>
+            <a:ext cx="2249424" cy="914400"/>
           </a:xfrm>
           <a:prstGeom prst="rect">
             <a:avLst/>
@@ -16021,14 +15770,14 @@
           <a:noFill/>
         </p:spPr>
         <p:txBody>
-          <a:bodyPr wrap="square">
+          <a:bodyPr wrap="square" anchor="t" lIns="0" rIns="0" tIns="0" bIns="0">
             <a:spAutoFit/>
           </a:bodyPr>
           <a:lstStyle/>
           <a:p>
             <a:pPr algn="ctr">
               <a:lnSpc>
-                <a:spcPct val="110000"/>
+                <a:spcPct val="105000"/>
               </a:lnSpc>
             </a:pPr>
             <a:r>
@@ -16060,8 +15809,8 @@
         </p:nvSpPr>
         <p:spPr>
           <a:xfrm>
-            <a:off x="2282541" y="3497579"/>
-            <a:ext cx="597082" cy="457200"/>
+            <a:off x="2286000" y="3493008"/>
+            <a:ext cx="594360" cy="457200"/>
           </a:xfrm>
           <a:prstGeom prst="rect">
             <a:avLst/>
@@ -16069,7 +15818,7 @@
           <a:noFill/>
         </p:spPr>
         <p:txBody>
-          <a:bodyPr wrap="square">
+          <a:bodyPr wrap="square" anchor="t" lIns="0" rIns="0" tIns="0" bIns="0">
             <a:spAutoFit/>
           </a:bodyPr>
           <a:lstStyle/>
@@ -16095,8 +15844,8 @@
         </p:nvSpPr>
         <p:spPr>
           <a:xfrm>
-            <a:off x="2692172" y="1700784"/>
-            <a:ext cx="2108805" cy="274320"/>
+            <a:off x="2697479" y="1700784"/>
+            <a:ext cx="2112264" cy="274320"/>
           </a:xfrm>
           <a:prstGeom prst="roundRect">
             <a:avLst>
@@ -16128,7 +15877,7 @@
           </a:fontRef>
         </p:style>
         <p:txBody>
-          <a:bodyPr rtlCol="0" anchor="ctr" wrap="square" lIns="146304" rIns="146304" tIns="9144" bIns="9144"/>
+          <a:bodyPr rtlCol="0" anchor="ctr" wrap="none" lIns="0" rIns="0" tIns="0" bIns="0"/>
           <a:lstStyle/>
           <a:p>
             <a:pPr algn="ctr"/>
@@ -16160,13 +15909,13 @@
         </p:blipFill>
         <p:spPr>
           <a:xfrm>
-            <a:off x="2806472" y="2103120"/>
-            <a:ext cx="1880205" cy="3246120"/>
-          </a:xfrm>
-          <a:prstGeom prst="rect">
-            <a:avLst/>
-          </a:prstGeom>
-          <a:ln w="15240">
+            <a:off x="2807208" y="2103120"/>
+            <a:ext cx="1883664" cy="3246120"/>
+          </a:xfrm>
+          <a:prstGeom prst="rect">
+            <a:avLst/>
+          </a:prstGeom>
+          <a:ln w="12700">
             <a:solidFill>
               <a:srgbClr val="D2E3D9"/>
             </a:solidFill>
@@ -16181,8 +15930,8 @@
         </p:nvSpPr>
         <p:spPr>
           <a:xfrm>
-            <a:off x="2623592" y="5440679"/>
-            <a:ext cx="2245965" cy="914400"/>
+            <a:off x="2624327" y="5440680"/>
+            <a:ext cx="2249424" cy="914400"/>
           </a:xfrm>
           <a:prstGeom prst="rect">
             <a:avLst/>
@@ -16190,14 +15939,14 @@
           <a:noFill/>
         </p:spPr>
         <p:txBody>
-          <a:bodyPr wrap="square">
+          <a:bodyPr wrap="square" anchor="t" lIns="0" rIns="0" tIns="0" bIns="0">
             <a:spAutoFit/>
           </a:bodyPr>
           <a:lstStyle/>
           <a:p>
             <a:pPr algn="ctr">
               <a:lnSpc>
-                <a:spcPct val="110000"/>
+                <a:spcPct val="105000"/>
               </a:lnSpc>
             </a:pPr>
             <a:r>
@@ -16216,7 +15965,7 @@
                 </a:solidFill>
                 <a:latin typeface="Hanken Grotesk"/>
               </a:rPr>
-              <a:t>  Link ready — cashback split shown</a:t>
+              <a:t>  Link ready — product pulled, cashback split shown</a:t>
             </a:r>
           </a:p>
         </p:txBody>
@@ -16229,8 +15978,8 @@
         </p:nvSpPr>
         <p:spPr>
           <a:xfrm>
-            <a:off x="4631814" y="3497579"/>
-            <a:ext cx="597082" cy="457200"/>
+            <a:off x="4636008" y="3493008"/>
+            <a:ext cx="594360" cy="457200"/>
           </a:xfrm>
           <a:prstGeom prst="rect">
             <a:avLst/>
@@ -16238,7 +15987,7 @@
           <a:noFill/>
         </p:spPr>
         <p:txBody>
-          <a:bodyPr wrap="square">
+          <a:bodyPr wrap="square" anchor="t" lIns="0" rIns="0" tIns="0" bIns="0">
             <a:spAutoFit/>
           </a:bodyPr>
           <a:lstStyle/>
@@ -16264,8 +16013,8 @@
         </p:nvSpPr>
         <p:spPr>
           <a:xfrm>
-            <a:off x="5041444" y="1700784"/>
-            <a:ext cx="2108805" cy="274320"/>
+            <a:off x="5047488" y="1700784"/>
+            <a:ext cx="2112264" cy="274320"/>
           </a:xfrm>
           <a:prstGeom prst="roundRect">
             <a:avLst>
@@ -16297,7 +16046,7 @@
           </a:fontRef>
         </p:style>
         <p:txBody>
-          <a:bodyPr rtlCol="0" anchor="ctr" wrap="square" lIns="146304" rIns="146304" tIns="9144" bIns="9144"/>
+          <a:bodyPr rtlCol="0" anchor="ctr" wrap="none" lIns="0" rIns="0" tIns="0" bIns="0"/>
           <a:lstStyle/>
           <a:p>
             <a:pPr algn="ctr"/>
@@ -16329,13 +16078,13 @@
         </p:blipFill>
         <p:spPr>
           <a:xfrm>
-            <a:off x="5155744" y="2103120"/>
-            <a:ext cx="1880205" cy="3246120"/>
-          </a:xfrm>
-          <a:prstGeom prst="rect">
-            <a:avLst/>
-          </a:prstGeom>
-          <a:ln w="15240">
+            <a:off x="5157216" y="2103120"/>
+            <a:ext cx="1883664" cy="3246120"/>
+          </a:xfrm>
+          <a:prstGeom prst="rect">
+            <a:avLst/>
+          </a:prstGeom>
+          <a:ln w="12700">
             <a:solidFill>
               <a:srgbClr val="D2E3D9"/>
             </a:solidFill>
@@ -16350,8 +16099,8 @@
         </p:nvSpPr>
         <p:spPr>
           <a:xfrm>
-            <a:off x="4972864" y="5440679"/>
-            <a:ext cx="2245965" cy="914400"/>
+            <a:off x="4974336" y="5440680"/>
+            <a:ext cx="2249424" cy="914400"/>
           </a:xfrm>
           <a:prstGeom prst="rect">
             <a:avLst/>
@@ -16359,14 +16108,14 @@
           <a:noFill/>
         </p:spPr>
         <p:txBody>
-          <a:bodyPr wrap="square">
+          <a:bodyPr wrap="square" anchor="t" lIns="0" rIns="0" tIns="0" bIns="0">
             <a:spAutoFit/>
           </a:bodyPr>
           <a:lstStyle/>
           <a:p>
             <a:pPr algn="ctr">
               <a:lnSpc>
-                <a:spcPct val="110000"/>
+                <a:spcPct val="105000"/>
               </a:lnSpc>
             </a:pPr>
             <a:r>
@@ -16385,7 +16134,7 @@
                 </a:solidFill>
                 <a:latin typeface="Hanken Grotesk"/>
               </a:rPr>
-              <a:t>  Shared — disclosure included</a:t>
+              <a:t>  Shared on WhatsApp — disclosure included</a:t>
             </a:r>
           </a:p>
         </p:txBody>
@@ -16398,8 +16147,8 @@
         </p:nvSpPr>
         <p:spPr>
           <a:xfrm>
-            <a:off x="6981086" y="3497579"/>
-            <a:ext cx="597082" cy="457200"/>
+            <a:off x="6986016" y="3493008"/>
+            <a:ext cx="594360" cy="457200"/>
           </a:xfrm>
           <a:prstGeom prst="rect">
             <a:avLst/>
@@ -16407,7 +16156,7 @@
           <a:noFill/>
         </p:spPr>
         <p:txBody>
-          <a:bodyPr wrap="square">
+          <a:bodyPr wrap="square" anchor="t" lIns="0" rIns="0" tIns="0" bIns="0">
             <a:spAutoFit/>
           </a:bodyPr>
           <a:lstStyle/>
@@ -16433,8 +16182,8 @@
         </p:nvSpPr>
         <p:spPr>
           <a:xfrm>
-            <a:off x="7390717" y="1700784"/>
-            <a:ext cx="2108805" cy="274320"/>
+            <a:off x="7397496" y="1700784"/>
+            <a:ext cx="2112264" cy="274320"/>
           </a:xfrm>
           <a:prstGeom prst="roundRect">
             <a:avLst>
@@ -16466,7 +16215,7 @@
           </a:fontRef>
         </p:style>
         <p:txBody>
-          <a:bodyPr rtlCol="0" anchor="ctr" wrap="square" lIns="146304" rIns="146304" tIns="9144" bIns="9144"/>
+          <a:bodyPr rtlCol="0" anchor="ctr" wrap="none" lIns="0" rIns="0" tIns="0" bIns="0"/>
           <a:lstStyle/>
           <a:p>
             <a:pPr algn="ctr"/>
@@ -16498,13 +16247,13 @@
         </p:blipFill>
         <p:spPr>
           <a:xfrm>
-            <a:off x="7505017" y="2103120"/>
-            <a:ext cx="1880205" cy="3246120"/>
-          </a:xfrm>
-          <a:prstGeom prst="rect">
-            <a:avLst/>
-          </a:prstGeom>
-          <a:ln w="15240">
+            <a:off x="7507223" y="2103120"/>
+            <a:ext cx="1883664" cy="3246120"/>
+          </a:xfrm>
+          <a:prstGeom prst="rect">
+            <a:avLst/>
+          </a:prstGeom>
+          <a:ln w="12700">
             <a:solidFill>
               <a:srgbClr val="D2E3D9"/>
             </a:solidFill>
@@ -16519,8 +16268,8 @@
         </p:nvSpPr>
         <p:spPr>
           <a:xfrm>
-            <a:off x="7322137" y="5440679"/>
-            <a:ext cx="2245965" cy="914400"/>
+            <a:off x="7324344" y="5440680"/>
+            <a:ext cx="2249424" cy="914400"/>
           </a:xfrm>
           <a:prstGeom prst="rect">
             <a:avLst/>
@@ -16528,14 +16277,14 @@
           <a:noFill/>
         </p:spPr>
         <p:txBody>
-          <a:bodyPr wrap="square">
+          <a:bodyPr wrap="square" anchor="t" lIns="0" rIns="0" tIns="0" bIns="0">
             <a:spAutoFit/>
           </a:bodyPr>
           <a:lstStyle/>
           <a:p>
             <a:pPr algn="ctr">
               <a:lnSpc>
-                <a:spcPct val="110000"/>
+                <a:spcPct val="105000"/>
               </a:lnSpc>
             </a:pPr>
             <a:r>
@@ -16554,7 +16303,7 @@
                 </a:solidFill>
                 <a:latin typeface="Hanken Grotesk"/>
               </a:rPr>
-              <a:t>  Friend opens the branded landing</a:t>
+              <a:t>  Friend opens the branded landing — with the review</a:t>
             </a:r>
           </a:p>
         </p:txBody>
@@ -16567,8 +16316,8 @@
         </p:nvSpPr>
         <p:spPr>
           <a:xfrm>
-            <a:off x="9330358" y="3497579"/>
-            <a:ext cx="597082" cy="457200"/>
+            <a:off x="9336024" y="3493008"/>
+            <a:ext cx="594360" cy="457200"/>
           </a:xfrm>
           <a:prstGeom prst="rect">
             <a:avLst/>
@@ -16576,7 +16325,7 @@
           <a:noFill/>
         </p:spPr>
         <p:txBody>
-          <a:bodyPr wrap="square">
+          <a:bodyPr wrap="square" anchor="t" lIns="0" rIns="0" tIns="0" bIns="0">
             <a:spAutoFit/>
           </a:bodyPr>
           <a:lstStyle/>
@@ -16602,8 +16351,8 @@
         </p:nvSpPr>
         <p:spPr>
           <a:xfrm>
-            <a:off x="9739989" y="1700784"/>
-            <a:ext cx="2108805" cy="274320"/>
+            <a:off x="9747504" y="1700784"/>
+            <a:ext cx="2112264" cy="274320"/>
           </a:xfrm>
           <a:prstGeom prst="roundRect">
             <a:avLst>
@@ -16635,18 +16384,18 @@
           </a:fontRef>
         </p:style>
         <p:txBody>
-          <a:bodyPr rtlCol="0" anchor="ctr" wrap="square" lIns="146304" rIns="146304" tIns="9144" bIns="9144"/>
+          <a:bodyPr rtlCol="0" anchor="ctr" wrap="none" lIns="0" rIns="0" tIns="0" bIns="0"/>
           <a:lstStyle/>
           <a:p>
             <a:pPr algn="ctr"/>
             <a:r>
-              <a:rPr sz="950" b="0">
+              <a:rPr sz="850" b="0">
                 <a:solidFill>
                   <a:srgbClr val="6B7B73"/>
                 </a:solidFill>
                 <a:latin typeface="Space Mono"/>
               </a:rPr>
-              <a:t>→ aliexpress.com</a:t>
+              <a:t>→ aliexpress.com — attributed</a:t>
             </a:r>
           </a:p>
         </p:txBody>
@@ -16667,13 +16416,13 @@
         </p:blipFill>
         <p:spPr>
           <a:xfrm>
-            <a:off x="9854289" y="2103120"/>
-            <a:ext cx="1880205" cy="3246120"/>
-          </a:xfrm>
-          <a:prstGeom prst="rect">
-            <a:avLst/>
-          </a:prstGeom>
-          <a:ln w="15240">
+            <a:off x="9857232" y="2103120"/>
+            <a:ext cx="1883664" cy="3246120"/>
+          </a:xfrm>
+          <a:prstGeom prst="rect">
+            <a:avLst/>
+          </a:prstGeom>
+          <a:ln w="12700">
             <a:solidFill>
               <a:srgbClr val="D2E3D9"/>
             </a:solidFill>
@@ -16688,8 +16437,8 @@
         </p:nvSpPr>
         <p:spPr>
           <a:xfrm>
-            <a:off x="9671409" y="5440679"/>
-            <a:ext cx="2245965" cy="914400"/>
+            <a:off x="9674352" y="5440680"/>
+            <a:ext cx="2249424" cy="914400"/>
           </a:xfrm>
           <a:prstGeom prst="rect">
             <a:avLst/>
@@ -16697,14 +16446,14 @@
           <a:noFill/>
         </p:spPr>
         <p:txBody>
-          <a:bodyPr wrap="square">
+          <a:bodyPr wrap="square" anchor="t" lIns="0" rIns="0" tIns="0" bIns="0">
             <a:spAutoFit/>
           </a:bodyPr>
           <a:lstStyle/>
           <a:p>
             <a:pPr algn="ctr">
               <a:lnSpc>
-                <a:spcPct val="110000"/>
+                <a:spcPct val="105000"/>
               </a:lnSpc>
             </a:pPr>
             <a:r>
@@ -16723,7 +16472,7 @@
                 </a:solidFill>
                 <a:latin typeface="Hanken Grotesk"/>
               </a:rPr>
-              <a:t>  Sent to the store — attributed</a:t>
+              <a:t>  Signed in, sent to the store — purchase attributed</a:t>
             </a:r>
           </a:p>
         </p:txBody>
@@ -16737,7 +16486,7 @@
         <p:spPr>
           <a:xfrm>
             <a:off x="640080" y="6455664"/>
-            <a:ext cx="10908792" cy="10972"/>
+            <a:ext cx="10908792" cy="9144"/>
           </a:xfrm>
           <a:prstGeom prst="rect">
             <a:avLst/>
@@ -16765,7 +16514,7 @@
           </a:fontRef>
         </p:style>
         <p:txBody>
-          <a:bodyPr rtlCol="0" anchor="ctr" wrap="square" lIns="146304" rIns="146304" tIns="109728" bIns="109728"/>
+          <a:bodyPr rtlCol="0" anchor="ctr"/>
           <a:lstStyle/>
           <a:p>
             <a:pPr algn="ctr"/>
@@ -16789,7 +16538,7 @@
           <a:noFill/>
         </p:spPr>
         <p:txBody>
-          <a:bodyPr wrap="square">
+          <a:bodyPr wrap="square" anchor="t" lIns="0" rIns="0" tIns="0" bIns="0">
             <a:spAutoFit/>
           </a:bodyPr>
           <a:lstStyle/>
@@ -16832,7 +16581,7 @@
           <a:noFill/>
         </p:spPr>
         <p:txBody>
-          <a:bodyPr wrap="square">
+          <a:bodyPr wrap="square" anchor="t" lIns="0" rIns="0" tIns="0" bIns="0">
             <a:spAutoFit/>
           </a:bodyPr>
           <a:lstStyle/>
@@ -16893,7 +16642,7 @@
           <a:noFill/>
         </p:spPr>
         <p:txBody>
-          <a:bodyPr wrap="square">
+          <a:bodyPr wrap="square" anchor="t" lIns="0" rIns="0" tIns="0" bIns="0">
             <a:spAutoFit/>
           </a:bodyPr>
           <a:lstStyle/>
@@ -16928,7 +16677,7 @@
           <a:noFill/>
         </p:spPr>
         <p:txBody>
-          <a:bodyPr wrap="square">
+          <a:bodyPr wrap="square" anchor="t" lIns="0" rIns="0" tIns="0" bIns="0">
             <a:spAutoFit/>
           </a:bodyPr>
           <a:lstStyle/>
@@ -16962,7 +16711,7 @@
           <a:noFill/>
         </p:spPr>
         <p:txBody>
-          <a:bodyPr wrap="square">
+          <a:bodyPr wrap="square" anchor="t" lIns="0" rIns="0" tIns="0" bIns="0">
             <a:spAutoFit/>
           </a:bodyPr>
           <a:lstStyle/>
@@ -16987,8 +16736,8 @@
         </p:nvSpPr>
         <p:spPr>
           <a:xfrm>
-            <a:off x="342900" y="1700784"/>
-            <a:ext cx="2320659" cy="274320"/>
+            <a:off x="347472" y="1700784"/>
+            <a:ext cx="2322576" cy="274320"/>
           </a:xfrm>
           <a:prstGeom prst="roundRect">
             <a:avLst>
@@ -17020,7 +16769,7 @@
           </a:fontRef>
         </p:style>
         <p:txBody>
-          <a:bodyPr rtlCol="0" anchor="ctr" wrap="square" lIns="146304" rIns="146304" tIns="9144" bIns="9144"/>
+          <a:bodyPr rtlCol="0" anchor="ctr" wrap="none" lIns="0" rIns="0" tIns="0" bIns="0"/>
           <a:lstStyle/>
           <a:p>
             <a:pPr algn="ctr"/>
@@ -17053,12 +16802,12 @@
         <p:spPr>
           <a:xfrm>
             <a:off x="457200" y="2103120"/>
-            <a:ext cx="2092059" cy="3611880"/>
-          </a:xfrm>
-          <a:prstGeom prst="rect">
-            <a:avLst/>
-          </a:prstGeom>
-          <a:ln w="15240">
+            <a:ext cx="2093976" cy="3611880"/>
+          </a:xfrm>
+          <a:prstGeom prst="rect">
+            <a:avLst/>
+          </a:prstGeom>
+          <a:ln w="12700">
             <a:solidFill>
               <a:srgbClr val="D2E3D9"/>
             </a:solidFill>
@@ -17074,7 +16823,7 @@
         <p:spPr>
           <a:xfrm>
             <a:off x="274320" y="5806440"/>
-            <a:ext cx="2457819" cy="914400"/>
+            <a:ext cx="2459736" cy="914400"/>
           </a:xfrm>
           <a:prstGeom prst="rect">
             <a:avLst/>
@@ -17082,14 +16831,14 @@
           <a:noFill/>
         </p:spPr>
         <p:txBody>
-          <a:bodyPr wrap="square">
+          <a:bodyPr wrap="square" anchor="t" lIns="0" rIns="0" tIns="0" bIns="0">
             <a:spAutoFit/>
           </a:bodyPr>
           <a:lstStyle/>
           <a:p>
             <a:pPr algn="ctr">
               <a:lnSpc>
-                <a:spcPct val="110000"/>
+                <a:spcPct val="105000"/>
               </a:lnSpc>
             </a:pPr>
             <a:r>
@@ -17121,8 +16870,8 @@
         </p:nvSpPr>
         <p:spPr>
           <a:xfrm>
-            <a:off x="2494395" y="3680460"/>
-            <a:ext cx="2628573" cy="457200"/>
+            <a:off x="2496312" y="3685032"/>
+            <a:ext cx="2624328" cy="457200"/>
           </a:xfrm>
           <a:prstGeom prst="rect">
             <a:avLst/>
@@ -17130,7 +16879,7 @@
           <a:noFill/>
         </p:spPr>
         <p:txBody>
-          <a:bodyPr wrap="square">
+          <a:bodyPr wrap="square" anchor="t" lIns="0" rIns="0" tIns="0" bIns="0">
             <a:spAutoFit/>
           </a:bodyPr>
           <a:lstStyle/>
@@ -17156,8 +16905,8 @@
         </p:nvSpPr>
         <p:spPr>
           <a:xfrm>
-            <a:off x="4935517" y="1700784"/>
-            <a:ext cx="2320659" cy="274320"/>
+            <a:off x="4937759" y="1700784"/>
+            <a:ext cx="2322576" cy="274320"/>
           </a:xfrm>
           <a:prstGeom prst="roundRect">
             <a:avLst>
@@ -17189,7 +16938,7 @@
           </a:fontRef>
         </p:style>
         <p:txBody>
-          <a:bodyPr rtlCol="0" anchor="ctr" wrap="square" lIns="146304" rIns="146304" tIns="9144" bIns="9144"/>
+          <a:bodyPr rtlCol="0" anchor="ctr" wrap="none" lIns="0" rIns="0" tIns="0" bIns="0"/>
           <a:lstStyle/>
           <a:p>
             <a:pPr algn="ctr"/>
@@ -17221,13 +16970,13 @@
         </p:blipFill>
         <p:spPr>
           <a:xfrm>
-            <a:off x="5049817" y="2103120"/>
-            <a:ext cx="2092059" cy="3611880"/>
-          </a:xfrm>
-          <a:prstGeom prst="rect">
-            <a:avLst/>
-          </a:prstGeom>
-          <a:ln w="15240">
+            <a:off x="5047488" y="2103120"/>
+            <a:ext cx="2093976" cy="3611880"/>
+          </a:xfrm>
+          <a:prstGeom prst="rect">
+            <a:avLst/>
+          </a:prstGeom>
+          <a:ln w="12700">
             <a:solidFill>
               <a:srgbClr val="D2E3D9"/>
             </a:solidFill>
@@ -17242,8 +16991,8 @@
         </p:nvSpPr>
         <p:spPr>
           <a:xfrm>
-            <a:off x="4866937" y="5806440"/>
-            <a:ext cx="2457819" cy="914400"/>
+            <a:off x="4864607" y="5806440"/>
+            <a:ext cx="2459736" cy="914400"/>
           </a:xfrm>
           <a:prstGeom prst="rect">
             <a:avLst/>
@@ -17251,14 +17000,14 @@
           <a:noFill/>
         </p:spPr>
         <p:txBody>
-          <a:bodyPr wrap="square">
+          <a:bodyPr wrap="square" anchor="t" lIns="0" rIns="0" tIns="0" bIns="0">
             <a:spAutoFit/>
           </a:bodyPr>
           <a:lstStyle/>
           <a:p>
             <a:pPr algn="ctr">
               <a:lnSpc>
-                <a:spcPct val="110000"/>
+                <a:spcPct val="105000"/>
               </a:lnSpc>
             </a:pPr>
             <a:r>
@@ -17290,8 +17039,8 @@
         </p:nvSpPr>
         <p:spPr>
           <a:xfrm>
-            <a:off x="7087013" y="3680460"/>
-            <a:ext cx="2628573" cy="457200"/>
+            <a:off x="7086600" y="3685032"/>
+            <a:ext cx="2624328" cy="457200"/>
           </a:xfrm>
           <a:prstGeom prst="rect">
             <a:avLst/>
@@ -17299,7 +17048,7 @@
           <a:noFill/>
         </p:spPr>
         <p:txBody>
-          <a:bodyPr wrap="square">
+          <a:bodyPr wrap="square" anchor="t" lIns="0" rIns="0" tIns="0" bIns="0">
             <a:spAutoFit/>
           </a:bodyPr>
           <a:lstStyle/>
@@ -17325,8 +17074,8 @@
         </p:nvSpPr>
         <p:spPr>
           <a:xfrm>
-            <a:off x="9528135" y="1700784"/>
-            <a:ext cx="2320659" cy="274320"/>
+            <a:off x="9528048" y="1700784"/>
+            <a:ext cx="2322576" cy="274320"/>
           </a:xfrm>
           <a:prstGeom prst="roundRect">
             <a:avLst>
@@ -17358,7 +17107,7 @@
           </a:fontRef>
         </p:style>
         <p:txBody>
-          <a:bodyPr rtlCol="0" anchor="ctr" wrap="square" lIns="146304" rIns="146304" tIns="9144" bIns="9144"/>
+          <a:bodyPr rtlCol="0" anchor="ctr" wrap="none" lIns="0" rIns="0" tIns="0" bIns="0"/>
           <a:lstStyle/>
           <a:p>
             <a:pPr algn="ctr"/>
@@ -17390,13 +17139,13 @@
         </p:blipFill>
         <p:spPr>
           <a:xfrm>
-            <a:off x="9642435" y="2103120"/>
-            <a:ext cx="2092059" cy="3611880"/>
-          </a:xfrm>
-          <a:prstGeom prst="rect">
-            <a:avLst/>
-          </a:prstGeom>
-          <a:ln w="15240">
+            <a:off x="9637776" y="2103120"/>
+            <a:ext cx="2093976" cy="3611880"/>
+          </a:xfrm>
+          <a:prstGeom prst="rect">
+            <a:avLst/>
+          </a:prstGeom>
+          <a:ln w="12700">
             <a:solidFill>
               <a:srgbClr val="D2E3D9"/>
             </a:solidFill>
@@ -17411,8 +17160,8 @@
         </p:nvSpPr>
         <p:spPr>
           <a:xfrm>
-            <a:off x="9459555" y="5806440"/>
-            <a:ext cx="2457819" cy="914400"/>
+            <a:off x="9454896" y="5806440"/>
+            <a:ext cx="2459736" cy="914400"/>
           </a:xfrm>
           <a:prstGeom prst="rect">
             <a:avLst/>
@@ -17420,14 +17169,14 @@
           <a:noFill/>
         </p:spPr>
         <p:txBody>
-          <a:bodyPr wrap="square">
+          <a:bodyPr wrap="square" anchor="t" lIns="0" rIns="0" tIns="0" bIns="0">
             <a:spAutoFit/>
           </a:bodyPr>
           <a:lstStyle/>
           <a:p>
             <a:pPr algn="ctr">
               <a:lnSpc>
-                <a:spcPct val="110000"/>
+                <a:spcPct val="105000"/>
               </a:lnSpc>
             </a:pPr>
             <a:r>
@@ -17460,7 +17209,7 @@
         <p:spPr>
           <a:xfrm>
             <a:off x="640080" y="6455664"/>
-            <a:ext cx="10908792" cy="10972"/>
+            <a:ext cx="10908792" cy="9144"/>
           </a:xfrm>
           <a:prstGeom prst="rect">
             <a:avLst/>
@@ -17488,7 +17237,7 @@
           </a:fontRef>
         </p:style>
         <p:txBody>
-          <a:bodyPr rtlCol="0" anchor="ctr" wrap="square" lIns="146304" rIns="146304" tIns="109728" bIns="109728"/>
+          <a:bodyPr rtlCol="0" anchor="ctr"/>
           <a:lstStyle/>
           <a:p>
             <a:pPr algn="ctr"/>
@@ -17512,7 +17261,7 @@
           <a:noFill/>
         </p:spPr>
         <p:txBody>
-          <a:bodyPr wrap="square">
+          <a:bodyPr wrap="square" anchor="t" lIns="0" rIns="0" tIns="0" bIns="0">
             <a:spAutoFit/>
           </a:bodyPr>
           <a:lstStyle/>
@@ -17555,7 +17304,7 @@
           <a:noFill/>
         </p:spPr>
         <p:txBody>
-          <a:bodyPr wrap="square">
+          <a:bodyPr wrap="square" anchor="t" lIns="0" rIns="0" tIns="0" bIns="0">
             <a:spAutoFit/>
           </a:bodyPr>
           <a:lstStyle/>
@@ -17616,7 +17365,7 @@
           <a:noFill/>
         </p:spPr>
         <p:txBody>
-          <a:bodyPr wrap="square">
+          <a:bodyPr wrap="square" anchor="t" lIns="0" rIns="0" tIns="0" bIns="0">
             <a:spAutoFit/>
           </a:bodyPr>
           <a:lstStyle/>
@@ -17651,7 +17400,7 @@
           <a:noFill/>
         </p:spPr>
         <p:txBody>
-          <a:bodyPr wrap="square">
+          <a:bodyPr wrap="square" anchor="t" lIns="0" rIns="0" tIns="0" bIns="0">
             <a:spAutoFit/>
           </a:bodyPr>
           <a:lstStyle/>
@@ -17685,7 +17434,7 @@
           <a:noFill/>
         </p:spPr>
         <p:txBody>
-          <a:bodyPr wrap="square">
+          <a:bodyPr wrap="square" anchor="t" lIns="0" rIns="0" tIns="0" bIns="0">
             <a:spAutoFit/>
           </a:bodyPr>
           <a:lstStyle/>
@@ -17715,7 +17464,7 @@
           </a:xfrm>
           <a:prstGeom prst="roundRect">
             <a:avLst>
-              <a:gd name="adj" fmla="val 5500"/>
+              <a:gd name="adj" fmla="val 5000"/>
             </a:avLst>
           </a:prstGeom>
           <a:solidFill>
@@ -17743,7 +17492,7 @@
           </a:fontRef>
         </p:style>
         <p:txBody>
-          <a:bodyPr rtlCol="0" anchor="ctr" wrap="square" lIns="146304" rIns="146304" tIns="109728" bIns="109728"/>
+          <a:bodyPr rtlCol="0" anchor="ctr"/>
           <a:lstStyle/>
           <a:p>
             <a:pPr algn="ctr"/>
@@ -17763,7 +17512,7 @@
           </a:xfrm>
           <a:prstGeom prst="roundRect">
             <a:avLst>
-              <a:gd name="adj" fmla="val 28000"/>
+              <a:gd name="adj" fmla="val 22000"/>
             </a:avLst>
           </a:prstGeom>
           <a:solidFill>
@@ -17791,7 +17540,7 @@
           </a:fontRef>
         </p:style>
         <p:txBody>
-          <a:bodyPr rtlCol="0" anchor="ctr" wrap="square" lIns="146304" rIns="146304" tIns="109728" bIns="109728"/>
+          <a:bodyPr rtlCol="0" anchor="ctr"/>
           <a:lstStyle/>
           <a:p>
             <a:pPr algn="ctr"/>
@@ -17800,7 +17549,7 @@
       </p:sp>
       <p:pic>
         <p:nvPicPr>
-          <p:cNvPr id="7" name="Picture 6" descr="box.png"/>
+          <p:cNvPr id="7" name="Picture 6" descr="s06_i1.png"/>
           <p:cNvPicPr>
             <a:picLocks noChangeAspect="1"/>
           </p:cNvPicPr>
@@ -17814,8 +17563,8 @@
         </p:blipFill>
         <p:spPr>
           <a:xfrm>
-            <a:off x="907816" y="2142256"/>
-            <a:ext cx="342351" cy="342351"/>
+            <a:off x="909827" y="2144268"/>
+            <a:ext cx="338328" cy="338328"/>
           </a:xfrm>
           <a:prstGeom prst="rect">
             <a:avLst/>
@@ -17839,14 +17588,14 @@
           <a:noFill/>
         </p:spPr>
         <p:txBody>
-          <a:bodyPr wrap="square">
+          <a:bodyPr wrap="square" anchor="t" lIns="0" rIns="0" tIns="0" bIns="0">
             <a:spAutoFit/>
           </a:bodyPr>
           <a:lstStyle/>
           <a:p>
             <a:pPr>
               <a:lnSpc>
-                <a:spcPct val="105000"/>
+                <a:spcPct val="102000"/>
               </a:lnSpc>
             </a:pPr>
             <a:r>
@@ -17878,14 +17627,14 @@
           <a:noFill/>
         </p:spPr>
         <p:txBody>
-          <a:bodyPr wrap="square">
+          <a:bodyPr wrap="square" anchor="t" lIns="0" rIns="0" tIns="0" bIns="0">
             <a:spAutoFit/>
           </a:bodyPr>
           <a:lstStyle/>
           <a:p>
             <a:pPr>
               <a:lnSpc>
-                <a:spcPct val="115000"/>
+                <a:spcPct val="110000"/>
               </a:lnSpc>
             </a:pPr>
             <a:r>
@@ -17895,7 +17644,7 @@
                 </a:solidFill>
                 <a:latin typeface="Hanken Grotesk"/>
               </a:rPr>
-              <a:t>pnpm + Turborepo, TypeScript everywhere (Node 24, arm64). Zod contracts: inferred types + runtime validation at every boundary.</a:t>
+              <a:t>pnpm + Turborepo, TypeScript everywhere (Node 24, arm64). Zod contracts in one package: inferred types + runtime validation at every boundary.</a:t>
             </a:r>
           </a:p>
         </p:txBody>
@@ -17913,7 +17662,7 @@
           </a:xfrm>
           <a:prstGeom prst="roundRect">
             <a:avLst>
-              <a:gd name="adj" fmla="val 5500"/>
+              <a:gd name="adj" fmla="val 5000"/>
             </a:avLst>
           </a:prstGeom>
           <a:solidFill>
@@ -17941,7 +17690,7 @@
           </a:fontRef>
         </p:style>
         <p:txBody>
-          <a:bodyPr rtlCol="0" anchor="ctr" wrap="square" lIns="146304" rIns="146304" tIns="109728" bIns="109728"/>
+          <a:bodyPr rtlCol="0" anchor="ctr"/>
           <a:lstStyle/>
           <a:p>
             <a:pPr algn="ctr"/>
@@ -17961,7 +17710,7 @@
           </a:xfrm>
           <a:prstGeom prst="roundRect">
             <a:avLst>
-              <a:gd name="adj" fmla="val 28000"/>
+              <a:gd name="adj" fmla="val 22000"/>
             </a:avLst>
           </a:prstGeom>
           <a:solidFill>
@@ -17989,7 +17738,7 @@
           </a:fontRef>
         </p:style>
         <p:txBody>
-          <a:bodyPr rtlCol="0" anchor="ctr" wrap="square" lIns="146304" rIns="146304" tIns="109728" bIns="109728"/>
+          <a:bodyPr rtlCol="0" anchor="ctr"/>
           <a:lstStyle/>
           <a:p>
             <a:pPr algn="ctr"/>
@@ -17998,7 +17747,7 @@
       </p:sp>
       <p:pic>
         <p:nvPicPr>
-          <p:cNvPr id="12" name="Picture 11" descr="layers.png"/>
+          <p:cNvPr id="12" name="Picture 11" descr="s06_i2.png"/>
           <p:cNvPicPr>
             <a:picLocks noChangeAspect="1"/>
           </p:cNvPicPr>
@@ -18012,8 +17761,8 @@
         </p:blipFill>
         <p:spPr>
           <a:xfrm>
-            <a:off x="3212104" y="2142256"/>
-            <a:ext cx="342351" cy="342351"/>
+            <a:off x="3214116" y="2144268"/>
+            <a:ext cx="338328" cy="338328"/>
           </a:xfrm>
           <a:prstGeom prst="rect">
             <a:avLst/>
@@ -18037,14 +17786,14 @@
           <a:noFill/>
         </p:spPr>
         <p:txBody>
-          <a:bodyPr wrap="square">
+          <a:bodyPr wrap="square" anchor="t" lIns="0" rIns="0" tIns="0" bIns="0">
             <a:spAutoFit/>
           </a:bodyPr>
           <a:lstStyle/>
           <a:p>
             <a:pPr>
               <a:lnSpc>
-                <a:spcPct val="105000"/>
+                <a:spcPct val="102000"/>
               </a:lnSpc>
             </a:pPr>
             <a:r>
@@ -18076,14 +17825,14 @@
           <a:noFill/>
         </p:spPr>
         <p:txBody>
-          <a:bodyPr wrap="square">
+          <a:bodyPr wrap="square" anchor="t" lIns="0" rIns="0" tIns="0" bIns="0">
             <a:spAutoFit/>
           </a:bodyPr>
           <a:lstStyle/>
           <a:p>
             <a:pPr>
               <a:lnSpc>
-                <a:spcPct val="115000"/>
+                <a:spcPct val="110000"/>
               </a:lnSpc>
             </a:pPr>
             <a:r>
@@ -18093,7 +17842,7 @@
                 </a:solidFill>
                 <a:latin typeface="Hanken Grotesk"/>
               </a:rPr>
-              <a:t>AWS CDK v2; per-env stacks; zero console changes. PRs run CI + cdk diff; merge deploys dev; SQL migrations run in-deploy.</a:t>
+              <a:t>AWS CDK v2; per-env stacks; zero console changes. PRs run CI + a cdk diff dry run; merge deploys dev, prod promotes explicitly; SQL migrations run in-deploy.</a:t>
             </a:r>
           </a:p>
         </p:txBody>
@@ -18111,7 +17860,7 @@
           </a:xfrm>
           <a:prstGeom prst="roundRect">
             <a:avLst>
-              <a:gd name="adj" fmla="val 5500"/>
+              <a:gd name="adj" fmla="val 5000"/>
             </a:avLst>
           </a:prstGeom>
           <a:solidFill>
@@ -18139,7 +17888,7 @@
           </a:fontRef>
         </p:style>
         <p:txBody>
-          <a:bodyPr rtlCol="0" anchor="ctr" wrap="square" lIns="146304" rIns="146304" tIns="109728" bIns="109728"/>
+          <a:bodyPr rtlCol="0" anchor="ctr"/>
           <a:lstStyle/>
           <a:p>
             <a:pPr algn="ctr"/>
@@ -18159,7 +17908,7 @@
           </a:xfrm>
           <a:prstGeom prst="roundRect">
             <a:avLst>
-              <a:gd name="adj" fmla="val 28000"/>
+              <a:gd name="adj" fmla="val 22000"/>
             </a:avLst>
           </a:prstGeom>
           <a:solidFill>
@@ -18187,7 +17936,7 @@
           </a:fontRef>
         </p:style>
         <p:txBody>
-          <a:bodyPr rtlCol="0" anchor="ctr" wrap="square" lIns="146304" rIns="146304" tIns="109728" bIns="109728"/>
+          <a:bodyPr rtlCol="0" anchor="ctr"/>
           <a:lstStyle/>
           <a:p>
             <a:pPr algn="ctr"/>
@@ -18196,7 +17945,7 @@
       </p:sp>
       <p:pic>
         <p:nvPicPr>
-          <p:cNvPr id="17" name="Picture 16" descr="doc.png"/>
+          <p:cNvPr id="17" name="Picture 16" descr="s06_i3.png"/>
           <p:cNvPicPr>
             <a:picLocks noChangeAspect="1"/>
           </p:cNvPicPr>
@@ -18210,8 +17959,8 @@
         </p:blipFill>
         <p:spPr>
           <a:xfrm>
-            <a:off x="5516392" y="2142256"/>
-            <a:ext cx="342351" cy="342351"/>
+            <a:off x="5518404" y="2144268"/>
+            <a:ext cx="338328" cy="338328"/>
           </a:xfrm>
           <a:prstGeom prst="rect">
             <a:avLst/>
@@ -18235,14 +17984,14 @@
           <a:noFill/>
         </p:spPr>
         <p:txBody>
-          <a:bodyPr wrap="square">
+          <a:bodyPr wrap="square" anchor="t" lIns="0" rIns="0" tIns="0" bIns="0">
             <a:spAutoFit/>
           </a:bodyPr>
           <a:lstStyle/>
           <a:p>
             <a:pPr>
               <a:lnSpc>
-                <a:spcPct val="105000"/>
+                <a:spcPct val="102000"/>
               </a:lnSpc>
             </a:pPr>
             <a:r>
@@ -18274,14 +18023,14 @@
           <a:noFill/>
         </p:spPr>
         <p:txBody>
-          <a:bodyPr wrap="square">
+          <a:bodyPr wrap="square" anchor="t" lIns="0" rIns="0" tIns="0" bIns="0">
             <a:spAutoFit/>
           </a:bodyPr>
           <a:lstStyle/>
           <a:p>
             <a:pPr>
               <a:lnSpc>
-                <a:spcPct val="115000"/>
+                <a:spcPct val="110000"/>
               </a:lnSpc>
             </a:pPr>
             <a:r>
@@ -18309,7 +18058,7 @@
           </a:xfrm>
           <a:prstGeom prst="roundRect">
             <a:avLst>
-              <a:gd name="adj" fmla="val 5500"/>
+              <a:gd name="adj" fmla="val 5000"/>
             </a:avLst>
           </a:prstGeom>
           <a:solidFill>
@@ -18337,7 +18086,7 @@
           </a:fontRef>
         </p:style>
         <p:txBody>
-          <a:bodyPr rtlCol="0" anchor="ctr" wrap="square" lIns="146304" rIns="146304" tIns="109728" bIns="109728"/>
+          <a:bodyPr rtlCol="0" anchor="ctr"/>
           <a:lstStyle/>
           <a:p>
             <a:pPr algn="ctr"/>
@@ -18357,7 +18106,7 @@
           </a:xfrm>
           <a:prstGeom prst="roundRect">
             <a:avLst>
-              <a:gd name="adj" fmla="val 28000"/>
+              <a:gd name="adj" fmla="val 22000"/>
             </a:avLst>
           </a:prstGeom>
           <a:solidFill>
@@ -18385,7 +18134,7 @@
           </a:fontRef>
         </p:style>
         <p:txBody>
-          <a:bodyPr rtlCol="0" anchor="ctr" wrap="square" lIns="146304" rIns="146304" tIns="109728" bIns="109728"/>
+          <a:bodyPr rtlCol="0" anchor="ctr"/>
           <a:lstStyle/>
           <a:p>
             <a:pPr algn="ctr"/>
@@ -18394,7 +18143,7 @@
       </p:sp>
       <p:pic>
         <p:nvPicPr>
-          <p:cNvPr id="22" name="Picture 21" descr="dbcoin.png"/>
+          <p:cNvPr id="22" name="Picture 21" descr="s06_i4.png"/>
           <p:cNvPicPr>
             <a:picLocks noChangeAspect="1"/>
           </p:cNvPicPr>
@@ -18408,8 +18157,8 @@
         </p:blipFill>
         <p:spPr>
           <a:xfrm>
-            <a:off x="7820680" y="2142256"/>
-            <a:ext cx="342351" cy="342351"/>
+            <a:off x="7822692" y="2144268"/>
+            <a:ext cx="338328" cy="338328"/>
           </a:xfrm>
           <a:prstGeom prst="rect">
             <a:avLst/>
@@ -18433,14 +18182,14 @@
           <a:noFill/>
         </p:spPr>
         <p:txBody>
-          <a:bodyPr wrap="square">
+          <a:bodyPr wrap="square" anchor="t" lIns="0" rIns="0" tIns="0" bIns="0">
             <a:spAutoFit/>
           </a:bodyPr>
           <a:lstStyle/>
           <a:p>
             <a:pPr>
               <a:lnSpc>
-                <a:spcPct val="105000"/>
+                <a:spcPct val="102000"/>
               </a:lnSpc>
             </a:pPr>
             <a:r>
@@ -18472,14 +18221,14 @@
           <a:noFill/>
         </p:spPr>
         <p:txBody>
-          <a:bodyPr wrap="square">
+          <a:bodyPr wrap="square" anchor="t" lIns="0" rIns="0" tIns="0" bIns="0">
             <a:spAutoFit/>
           </a:bodyPr>
           <a:lstStyle/>
           <a:p>
             <a:pPr>
               <a:lnSpc>
-                <a:spcPct val="115000"/>
+                <a:spcPct val="110000"/>
               </a:lnSpc>
             </a:pPr>
             <a:r>
@@ -18489,7 +18238,7 @@
                 </a:solidFill>
                 <a:latin typeface="Hanken Grotesk"/>
               </a:rPr>
-              <a:t>No NAT, no RDS Proxy, zero interface endpoints, scale-to-zero Aurora, on-demand DynamoDB. The dominant cost is OTP delivery.</a:t>
+              <a:t>No NAT, no RDS Proxy, zero interface endpoints, scale-to-zero Aurora, on-demand DynamoDB. The dominant cost line is OTP delivery, not infrastructure.</a:t>
             </a:r>
           </a:p>
         </p:txBody>
@@ -18507,7 +18256,7 @@
           </a:xfrm>
           <a:prstGeom prst="roundRect">
             <a:avLst>
-              <a:gd name="adj" fmla="val 5500"/>
+              <a:gd name="adj" fmla="val 5000"/>
             </a:avLst>
           </a:prstGeom>
           <a:solidFill>
@@ -18535,7 +18284,7 @@
           </a:fontRef>
         </p:style>
         <p:txBody>
-          <a:bodyPr rtlCol="0" anchor="ctr" wrap="square" lIns="146304" rIns="146304" tIns="109728" bIns="109728"/>
+          <a:bodyPr rtlCol="0" anchor="ctr"/>
           <a:lstStyle/>
           <a:p>
             <a:pPr algn="ctr"/>
@@ -18555,7 +18304,7 @@
           </a:xfrm>
           <a:prstGeom prst="roundRect">
             <a:avLst>
-              <a:gd name="adj" fmla="val 28000"/>
+              <a:gd name="adj" fmla="val 22000"/>
             </a:avLst>
           </a:prstGeom>
           <a:solidFill>
@@ -18583,7 +18332,7 @@
           </a:fontRef>
         </p:style>
         <p:txBody>
-          <a:bodyPr rtlCol="0" anchor="ctr" wrap="square" lIns="146304" rIns="146304" tIns="109728" bIns="109728"/>
+          <a:bodyPr rtlCol="0" anchor="ctr"/>
           <a:lstStyle/>
           <a:p>
             <a:pPr algn="ctr"/>
@@ -18592,7 +18341,7 @@
       </p:sp>
       <p:pic>
         <p:nvPicPr>
-          <p:cNvPr id="27" name="Picture 26" descr="bolt.png"/>
+          <p:cNvPr id="27" name="Picture 26" descr="s06_i5.png"/>
           <p:cNvPicPr>
             <a:picLocks noChangeAspect="1"/>
           </p:cNvPicPr>
@@ -18606,8 +18355,8 @@
         </p:blipFill>
         <p:spPr>
           <a:xfrm>
-            <a:off x="10124968" y="2142256"/>
-            <a:ext cx="342351" cy="342351"/>
+            <a:off x="10126980" y="2144268"/>
+            <a:ext cx="338328" cy="338328"/>
           </a:xfrm>
           <a:prstGeom prst="rect">
             <a:avLst/>
@@ -18631,14 +18380,14 @@
           <a:noFill/>
         </p:spPr>
         <p:txBody>
-          <a:bodyPr wrap="square">
+          <a:bodyPr wrap="square" anchor="t" lIns="0" rIns="0" tIns="0" bIns="0">
             <a:spAutoFit/>
           </a:bodyPr>
           <a:lstStyle/>
           <a:p>
             <a:pPr>
               <a:lnSpc>
-                <a:spcPct val="105000"/>
+                <a:spcPct val="102000"/>
               </a:lnSpc>
             </a:pPr>
             <a:r>
@@ -18670,14 +18419,14 @@
           <a:noFill/>
         </p:spPr>
         <p:txBody>
-          <a:bodyPr wrap="square">
+          <a:bodyPr wrap="square" anchor="t" lIns="0" rIns="0" tIns="0" bIns="0">
             <a:spAutoFit/>
           </a:bodyPr>
           <a:lstStyle/>
           <a:p>
             <a:pPr>
               <a:lnSpc>
-                <a:spcPct val="115000"/>
+                <a:spcPct val="110000"/>
               </a:lnSpc>
             </a:pPr>
             <a:r>
@@ -18687,7 +18436,7 @@
                 </a:solidFill>
                 <a:latin typeface="Hanken Grotesk"/>
               </a:rPr>
-              <a:t>A link going viral in a WhatsApp group is the design load: the hot path is non-VPC Lambda + DynamoDB — never SQL.</a:t>
+              <a:t>A link going viral in a WhatsApp group is the design load: the redirect hot path is non-VPC Lambda + DynamoDB and never touches SQL.</a:t>
             </a:r>
           </a:p>
         </p:txBody>
@@ -18701,7 +18450,7 @@
         <p:spPr>
           <a:xfrm>
             <a:off x="640080" y="6455664"/>
-            <a:ext cx="10908792" cy="10972"/>
+            <a:ext cx="10908792" cy="9144"/>
           </a:xfrm>
           <a:prstGeom prst="rect">
             <a:avLst/>
@@ -18729,7 +18478,7 @@
           </a:fontRef>
         </p:style>
         <p:txBody>
-          <a:bodyPr rtlCol="0" anchor="ctr" wrap="square" lIns="146304" rIns="146304" tIns="109728" bIns="109728"/>
+          <a:bodyPr rtlCol="0" anchor="ctr"/>
           <a:lstStyle/>
           <a:p>
             <a:pPr algn="ctr"/>
@@ -18753,7 +18502,7 @@
           <a:noFill/>
         </p:spPr>
         <p:txBody>
-          <a:bodyPr wrap="square">
+          <a:bodyPr wrap="square" anchor="t" lIns="0" rIns="0" tIns="0" bIns="0">
             <a:spAutoFit/>
           </a:bodyPr>
           <a:lstStyle/>
@@ -18796,7 +18545,7 @@
           <a:noFill/>
         </p:spPr>
         <p:txBody>
-          <a:bodyPr wrap="square">
+          <a:bodyPr wrap="square" anchor="t" lIns="0" rIns="0" tIns="0" bIns="0">
             <a:spAutoFit/>
           </a:bodyPr>
           <a:lstStyle/>
@@ -18857,7 +18606,7 @@
           <a:noFill/>
         </p:spPr>
         <p:txBody>
-          <a:bodyPr wrap="square">
+          <a:bodyPr wrap="square" anchor="t" lIns="0" rIns="0" tIns="0" bIns="0">
             <a:spAutoFit/>
           </a:bodyPr>
           <a:lstStyle/>
@@ -18892,7 +18641,7 @@
           <a:noFill/>
         </p:spPr>
         <p:txBody>
-          <a:bodyPr wrap="square">
+          <a:bodyPr wrap="square" anchor="t" lIns="0" rIns="0" tIns="0" bIns="0">
             <a:spAutoFit/>
           </a:bodyPr>
           <a:lstStyle/>
@@ -18926,7 +18675,7 @@
           <a:noFill/>
         </p:spPr>
         <p:txBody>
-          <a:bodyPr wrap="square">
+          <a:bodyPr wrap="square" anchor="t" lIns="0" rIns="0" tIns="0" bIns="0">
             <a:spAutoFit/>
           </a:bodyPr>
           <a:lstStyle/>
@@ -18951,12 +18700,12 @@
         </p:nvSpPr>
         <p:spPr>
           <a:xfrm>
-            <a:off x="4023389" y="1481328"/>
-            <a:ext cx="4144916" cy="5084064"/>
+            <a:off x="3615319" y="1481328"/>
+            <a:ext cx="4961056" cy="5084064"/>
           </a:xfrm>
           <a:prstGeom prst="roundRect">
             <a:avLst>
-              <a:gd name="adj" fmla="val 5500"/>
+              <a:gd name="adj" fmla="val 3000"/>
             </a:avLst>
           </a:prstGeom>
           <a:solidFill>
@@ -18984,7 +18733,7 @@
           </a:fontRef>
         </p:style>
         <p:txBody>
-          <a:bodyPr rtlCol="0" anchor="ctr" wrap="square" lIns="146304" rIns="146304" tIns="109728" bIns="109728"/>
+          <a:bodyPr rtlCol="0" anchor="ctr"/>
           <a:lstStyle/>
           <a:p>
             <a:pPr algn="ctr"/>
@@ -18993,7 +18742,7 @@
       </p:sp>
       <p:pic>
         <p:nvPicPr>
-          <p:cNvPr id="6" name="Picture 5" descr="diagram-0.png"/>
+          <p:cNvPr id="6" name="Picture 5" descr="slide-7.png"/>
           <p:cNvPicPr>
             <a:picLocks noChangeAspect="1"/>
           </p:cNvPicPr>
@@ -19007,8 +18756,8 @@
         </p:blipFill>
         <p:spPr>
           <a:xfrm>
-            <a:off x="4187981" y="1645920"/>
-            <a:ext cx="3815732" cy="4754880"/>
+            <a:off x="3779911" y="1645920"/>
+            <a:ext cx="4631872" cy="4754880"/>
           </a:xfrm>
           <a:prstGeom prst="rect">
             <a:avLst/>
@@ -19024,7 +18773,7 @@
         <p:spPr>
           <a:xfrm>
             <a:off x="640080" y="6455664"/>
-            <a:ext cx="10908792" cy="10972"/>
+            <a:ext cx="10908792" cy="9144"/>
           </a:xfrm>
           <a:prstGeom prst="rect">
             <a:avLst/>
@@ -19052,7 +18801,7 @@
           </a:fontRef>
         </p:style>
         <p:txBody>
-          <a:bodyPr rtlCol="0" anchor="ctr" wrap="square" lIns="146304" rIns="146304" tIns="109728" bIns="109728"/>
+          <a:bodyPr rtlCol="0" anchor="ctr"/>
           <a:lstStyle/>
           <a:p>
             <a:pPr algn="ctr"/>
@@ -19076,7 +18825,7 @@
           <a:noFill/>
         </p:spPr>
         <p:txBody>
-          <a:bodyPr wrap="square">
+          <a:bodyPr wrap="square" anchor="t" lIns="0" rIns="0" tIns="0" bIns="0">
             <a:spAutoFit/>
           </a:bodyPr>
           <a:lstStyle/>
@@ -19119,7 +18868,7 @@
           <a:noFill/>
         </p:spPr>
         <p:txBody>
-          <a:bodyPr wrap="square">
+          <a:bodyPr wrap="square" anchor="t" lIns="0" rIns="0" tIns="0" bIns="0">
             <a:spAutoFit/>
           </a:bodyPr>
           <a:lstStyle/>
@@ -19180,7 +18929,7 @@
           <a:noFill/>
         </p:spPr>
         <p:txBody>
-          <a:bodyPr wrap="square">
+          <a:bodyPr wrap="square" anchor="t" lIns="0" rIns="0" tIns="0" bIns="0">
             <a:spAutoFit/>
           </a:bodyPr>
           <a:lstStyle/>
@@ -19215,7 +18964,7 @@
           <a:noFill/>
         </p:spPr>
         <p:txBody>
-          <a:bodyPr wrap="square">
+          <a:bodyPr wrap="square" anchor="t" lIns="0" rIns="0" tIns="0" bIns="0">
             <a:spAutoFit/>
           </a:bodyPr>
           <a:lstStyle/>
@@ -19249,7 +18998,7 @@
           <a:noFill/>
         </p:spPr>
         <p:txBody>
-          <a:bodyPr wrap="square">
+          <a:bodyPr wrap="square" anchor="t" lIns="0" rIns="0" tIns="0" bIns="0">
             <a:spAutoFit/>
           </a:bodyPr>
           <a:lstStyle/>
@@ -19293,7 +19042,7 @@
               <a:tr h="365760">
                 <a:tc>
                   <a:txBody>
-                    <a:bodyPr wrap="square"/>
+                    <a:bodyPr/>
                     <a:lstStyle/>
                     <a:p>
                       <a:pPr>
@@ -19320,7 +19069,7 @@
                 </a:tc>
                 <a:tc>
                   <a:txBody>
-                    <a:bodyPr wrap="square"/>
+                    <a:bodyPr/>
                     <a:lstStyle/>
                     <a:p>
                       <a:pPr>
@@ -19347,7 +19096,7 @@
                 </a:tc>
                 <a:tc>
                   <a:txBody>
-                    <a:bodyPr wrap="square"/>
+                    <a:bodyPr/>
                     <a:lstStyle/>
                     <a:p>
                       <a:pPr>
@@ -19374,7 +19123,7 @@
                 </a:tc>
                 <a:tc>
                   <a:txBody>
-                    <a:bodyPr wrap="square"/>
+                    <a:bodyPr/>
                     <a:lstStyle/>
                     <a:p>
                       <a:pPr>
@@ -19403,7 +19152,7 @@
               <a:tr h="365760">
                 <a:tc>
                   <a:txBody>
-                    <a:bodyPr wrap="square"/>
+                    <a:bodyPr/>
                     <a:lstStyle/>
                     <a:p>
                       <a:pPr>
@@ -19430,7 +19179,7 @@
                 </a:tc>
                 <a:tc>
                   <a:txBody>
-                    <a:bodyPr wrap="square"/>
+                    <a:bodyPr/>
                     <a:lstStyle/>
                     <a:p>
                       <a:pPr>
@@ -19457,7 +19206,7 @@
                 </a:tc>
                 <a:tc>
                   <a:txBody>
-                    <a:bodyPr wrap="square"/>
+                    <a:bodyPr/>
                     <a:lstStyle/>
                     <a:p>
                       <a:pPr>
@@ -19472,7 +19221,7 @@
                           </a:solidFill>
                           <a:latin typeface="Hanken Grotesk"/>
                         </a:rPr>
-                        <a:t>ACID + Postgres GRANTs as the money invariant (app_rw SELECT-only, poller_writer INSERT-only); SQL for reconciliation</a:t>
+                        <a:t>ACID + Postgres GRANTs as the money invariant (one role per function: wallet_reader / ledger_reader SELECT-only, ledger_writer INSERT-only, audit_writer = audit_append only); SQL for reconciliation</a:t>
                       </a:r>
                     </a:p>
                   </a:txBody>
@@ -19484,7 +19233,7 @@
                 </a:tc>
                 <a:tc>
                   <a:txBody>
-                    <a:bodyPr wrap="square"/>
+                    <a:bodyPr/>
                     <a:lstStyle/>
                     <a:p>
                       <a:pPr>
@@ -19513,7 +19262,7 @@
               <a:tr h="365760">
                 <a:tc>
                   <a:txBody>
-                    <a:bodyPr wrap="square"/>
+                    <a:bodyPr/>
                     <a:lstStyle/>
                     <a:p>
                       <a:pPr>
@@ -19540,7 +19289,7 @@
                 </a:tc>
                 <a:tc>
                   <a:txBody>
-                    <a:bodyPr wrap="square"/>
+                    <a:bodyPr/>
                     <a:lstStyle/>
                     <a:p>
                       <a:pPr>
@@ -19567,7 +19316,7 @@
                 </a:tc>
                 <a:tc>
                   <a:txBody>
-                    <a:bodyPr wrap="square"/>
+                    <a:bodyPr/>
                     <a:lstStyle/>
                     <a:p>
                       <a:pPr>
@@ -19594,7 +19343,7 @@
                 </a:tc>
                 <a:tc>
                   <a:txBody>
-                    <a:bodyPr wrap="square"/>
+                    <a:bodyPr/>
                     <a:lstStyle/>
                     <a:p>
                       <a:pPr>
@@ -19623,7 +19372,7 @@
               <a:tr h="365760">
                 <a:tc>
                   <a:txBody>
-                    <a:bodyPr wrap="square"/>
+                    <a:bodyPr/>
                     <a:lstStyle/>
                     <a:p>
                       <a:pPr>
@@ -19650,7 +19399,7 @@
                 </a:tc>
                 <a:tc>
                   <a:txBody>
-                    <a:bodyPr wrap="square"/>
+                    <a:bodyPr/>
                     <a:lstStyle/>
                     <a:p>
                       <a:pPr>
@@ -19665,7 +19414,7 @@
                           </a:solidFill>
                           <a:latin typeface="Hanken Grotesk"/>
                         </a:rPr>
-                        <a:t>DynamoDB on-demand (10 tables)</a:t>
+                        <a:t>DynamoDB on-demand (9 tables)</a:t>
                       </a:r>
                     </a:p>
                   </a:txBody>
@@ -19677,7 +19426,7 @@
                 </a:tc>
                 <a:tc>
                   <a:txBody>
-                    <a:bodyPr wrap="square"/>
+                    <a:bodyPr/>
                     <a:lstStyle/>
                     <a:p>
                       <a:pPr>
@@ -19704,7 +19453,7 @@
                 </a:tc>
                 <a:tc>
                   <a:txBody>
-                    <a:bodyPr wrap="square"/>
+                    <a:bodyPr/>
                     <a:lstStyle/>
                     <a:p>
                       <a:pPr>
@@ -19751,14 +19500,14 @@
           <a:noFill/>
         </p:spPr>
         <p:txBody>
-          <a:bodyPr wrap="square">
+          <a:bodyPr wrap="square" anchor="t" lIns="0" rIns="0" tIns="0" bIns="0">
             <a:spAutoFit/>
           </a:bodyPr>
           <a:lstStyle/>
           <a:p>
             <a:pPr>
               <a:lnSpc>
-                <a:spcPct val="115000"/>
+                <a:spcPct val="110000"/>
               </a:lnSpc>
             </a:pPr>
             <a:r>
@@ -19777,7 +19526,7 @@
                 </a:solidFill>
                 <a:latin typeface="Hanken Grotesk"/>
               </a:rPr>
-              <a:t>no cross-table transactions exist anywhere — counter rows live inside the counted table (single-table TransactWriteItems), ledger + audit are sequential idempotent appends behind a unique (order_id, kind, status) index. Cross-store consistency is by keys and idempotency, not coordination.</a:t>
+              <a:t>no cross-table transactions exist anywhere — counter rows live inside the counted table (single-table TransactWriteItems); ledger + audit are sequential idempotent appends behind a unique (order_id, kind, status) index. Cross-store consistency is by keys and idempotency, not coordination.</a:t>
             </a:r>
           </a:p>
         </p:txBody>
@@ -19791,7 +19540,7 @@
         <p:spPr>
           <a:xfrm>
             <a:off x="640080" y="6455664"/>
-            <a:ext cx="10908792" cy="10972"/>
+            <a:ext cx="10908792" cy="9144"/>
           </a:xfrm>
           <a:prstGeom prst="rect">
             <a:avLst/>
@@ -19819,7 +19568,7 @@
           </a:fontRef>
         </p:style>
         <p:txBody>
-          <a:bodyPr rtlCol="0" anchor="ctr" wrap="square" lIns="146304" rIns="146304" tIns="109728" bIns="109728"/>
+          <a:bodyPr rtlCol="0" anchor="ctr"/>
           <a:lstStyle/>
           <a:p>
             <a:pPr algn="ctr"/>
@@ -19843,7 +19592,7 @@
           <a:noFill/>
         </p:spPr>
         <p:txBody>
-          <a:bodyPr wrap="square">
+          <a:bodyPr wrap="square" anchor="t" lIns="0" rIns="0" tIns="0" bIns="0">
             <a:spAutoFit/>
           </a:bodyPr>
           <a:lstStyle/>
@@ -19886,7 +19635,7 @@
           <a:noFill/>
         </p:spPr>
         <p:txBody>
-          <a:bodyPr wrap="square">
+          <a:bodyPr wrap="square" anchor="t" lIns="0" rIns="0" tIns="0" bIns="0">
             <a:spAutoFit/>
           </a:bodyPr>
           <a:lstStyle/>
@@ -19947,7 +19696,7 @@
           <a:noFill/>
         </p:spPr>
         <p:txBody>
-          <a:bodyPr wrap="square">
+          <a:bodyPr wrap="square" anchor="t" lIns="0" rIns="0" tIns="0" bIns="0">
             <a:spAutoFit/>
           </a:bodyPr>
           <a:lstStyle/>
@@ -19982,7 +19731,7 @@
           <a:noFill/>
         </p:spPr>
         <p:txBody>
-          <a:bodyPr wrap="square">
+          <a:bodyPr wrap="square" anchor="t" lIns="0" rIns="0" tIns="0" bIns="0">
             <a:spAutoFit/>
           </a:bodyPr>
           <a:lstStyle/>
@@ -20016,13 +19765,13 @@
           <a:noFill/>
         </p:spPr>
         <p:txBody>
-          <a:bodyPr wrap="square">
+          <a:bodyPr wrap="square" anchor="t" lIns="0" rIns="0" tIns="0" bIns="0">
             <a:spAutoFit/>
           </a:bodyPr>
           <a:lstStyle/>
           <a:p>
             <a:r>
-              <a:rPr sz="2500" b="1">
+              <a:rPr sz="2700" b="1">
                 <a:solidFill>
                   <a:srgbClr val="15201C"/>
                 </a:solidFill>
@@ -20046,7 +19795,7 @@
           </a:xfrm>
           <a:prstGeom prst="roundRect">
             <a:avLst>
-              <a:gd name="adj" fmla="val 5500"/>
+              <a:gd name="adj" fmla="val 5000"/>
             </a:avLst>
           </a:prstGeom>
           <a:solidFill>
@@ -20074,7 +19823,7 @@
           </a:fontRef>
         </p:style>
         <p:txBody>
-          <a:bodyPr rtlCol="0" anchor="ctr" wrap="square" lIns="146304" rIns="146304" tIns="109728" bIns="109728"/>
+          <a:bodyPr rtlCol="0" anchor="ctr"/>
           <a:lstStyle/>
           <a:p>
             <a:pPr algn="ctr"/>
@@ -20089,7 +19838,7 @@
         </p:nvSpPr>
         <p:spPr>
           <a:xfrm>
-            <a:off x="841247" y="1920240"/>
+            <a:off x="841247" y="1965960"/>
             <a:ext cx="3246120" cy="594360"/>
           </a:xfrm>
           <a:prstGeom prst="rect">
@@ -20098,7 +19847,7 @@
           <a:noFill/>
         </p:spPr>
         <p:txBody>
-          <a:bodyPr wrap="square">
+          <a:bodyPr wrap="square" anchor="t" lIns="0" rIns="0" tIns="0" bIns="0">
             <a:spAutoFit/>
           </a:bodyPr>
           <a:lstStyle/>
@@ -20132,7 +19881,7 @@
         </p:nvSpPr>
         <p:spPr>
           <a:xfrm>
-            <a:off x="841247" y="2514600"/>
+            <a:off x="841247" y="2560320"/>
             <a:ext cx="3246120" cy="822960"/>
           </a:xfrm>
           <a:prstGeom prst="rect">
@@ -20141,14 +19890,14 @@
           <a:noFill/>
         </p:spPr>
         <p:txBody>
-          <a:bodyPr wrap="square">
+          <a:bodyPr wrap="square" anchor="t" lIns="0" rIns="0" tIns="0" bIns="0">
             <a:spAutoFit/>
           </a:bodyPr>
           <a:lstStyle/>
           <a:p>
             <a:pPr>
               <a:lnSpc>
-                <a:spcPct val="110000"/>
+                <a:spcPct val="108000"/>
               </a:lnSpc>
             </a:pPr>
             <a:r>
@@ -20171,7 +19920,7 @@
         </p:nvSpPr>
         <p:spPr>
           <a:xfrm>
-            <a:off x="841247" y="3429000"/>
+            <a:off x="841247" y="3474720"/>
             <a:ext cx="3246120" cy="960120"/>
           </a:xfrm>
           <a:prstGeom prst="rect">
@@ -20180,14 +19929,14 @@
           <a:noFill/>
         </p:spPr>
         <p:txBody>
-          <a:bodyPr wrap="square">
+          <a:bodyPr wrap="square" anchor="t" lIns="0" rIns="0" tIns="0" bIns="0">
             <a:spAutoFit/>
           </a:bodyPr>
           <a:lstStyle/>
           <a:p>
             <a:pPr>
               <a:lnSpc>
-                <a:spcPct val="110000"/>
+                <a:spcPct val="108000"/>
               </a:lnSpc>
             </a:pPr>
             <a:r>
@@ -20197,7 +19946,7 @@
                 </a:solidFill>
                 <a:latin typeface="Hanken Grotesk"/>
               </a:rPr>
-              <a:t>REJECTED: no Hebrew/RTL (12 locales, text not editable); passkey RP-ID forced to the auth subdomain — credentials siloed off wanthat.app</a:t>
+              <a:t>REJECTED: no Hebrew/RTL (12 locales, text not editable); passkey RP-ID forced to the auth subdomain — credentials siloed off wanthat.app.</a:t>
             </a:r>
           </a:p>
         </p:txBody>
@@ -20215,7 +19964,7 @@
           </a:xfrm>
           <a:prstGeom prst="roundRect">
             <a:avLst>
-              <a:gd name="adj" fmla="val 5500"/>
+              <a:gd name="adj" fmla="val 5000"/>
             </a:avLst>
           </a:prstGeom>
           <a:solidFill>
@@ -20243,7 +19992,7 @@
           </a:fontRef>
         </p:style>
         <p:txBody>
-          <a:bodyPr rtlCol="0" anchor="ctr" wrap="square" lIns="146304" rIns="146304" tIns="109728" bIns="109728"/>
+          <a:bodyPr rtlCol="0" anchor="ctr"/>
           <a:lstStyle/>
           <a:p>
             <a:pPr algn="ctr"/>
@@ -20258,7 +20007,7 @@
         </p:nvSpPr>
         <p:spPr>
           <a:xfrm>
-            <a:off x="4617720" y="1920240"/>
+            <a:off x="4617720" y="1965960"/>
             <a:ext cx="3246120" cy="594360"/>
           </a:xfrm>
           <a:prstGeom prst="rect">
@@ -20267,7 +20016,7 @@
           <a:noFill/>
         </p:spPr>
         <p:txBody>
-          <a:bodyPr wrap="square">
+          <a:bodyPr wrap="square" anchor="t" lIns="0" rIns="0" tIns="0" bIns="0">
             <a:spAutoFit/>
           </a:bodyPr>
           <a:lstStyle/>
@@ -20301,7 +20050,7 @@
         </p:nvSpPr>
         <p:spPr>
           <a:xfrm>
-            <a:off x="4617720" y="2514600"/>
+            <a:off x="4617720" y="2560320"/>
             <a:ext cx="3246120" cy="822960"/>
           </a:xfrm>
           <a:prstGeom prst="rect">
@@ -20310,14 +20059,14 @@
           <a:noFill/>
         </p:spPr>
         <p:txBody>
-          <a:bodyPr wrap="square">
+          <a:bodyPr wrap="square" anchor="t" lIns="0" rIns="0" tIns="0" bIns="0">
             <a:spAutoFit/>
           </a:bodyPr>
           <a:lstStyle/>
           <a:p>
             <a:pPr>
               <a:lnSpc>
-                <a:spcPct val="110000"/>
+                <a:spcPct val="108000"/>
               </a:lnSpc>
             </a:pPr>
             <a:r>
@@ -20340,7 +20089,7 @@
         </p:nvSpPr>
         <p:spPr>
           <a:xfrm>
-            <a:off x="4617720" y="3429000"/>
+            <a:off x="4617720" y="3474720"/>
             <a:ext cx="3246120" cy="960120"/>
           </a:xfrm>
           <a:prstGeom prst="rect">
@@ -20349,14 +20098,14 @@
           <a:noFill/>
         </p:spPr>
         <p:txBody>
-          <a:bodyPr wrap="square">
+          <a:bodyPr wrap="square" anchor="t" lIns="0" rIns="0" tIns="0" bIns="0">
             <a:spAutoFit/>
           </a:bodyPr>
           <a:lstStyle/>
           <a:p>
             <a:pPr>
               <a:lnSpc>
-                <a:spcPct val="110000"/>
+                <a:spcPct val="108000"/>
               </a:lnSpc>
             </a:pPr>
             <a:r>
@@ -20366,7 +20115,7 @@
                 </a:solidFill>
                 <a:latin typeface="Hanken Grotesk"/>
               </a:rPr>
-              <a:t>CHOSEN: zero backend calls to authenticate; full RTL UI; pool WAF + quotas as abuse control</a:t>
+              <a:t>CHOSEN: zero backend calls to authenticate; full RTL UI; pool WAF + quotas as abuse control.</a:t>
             </a:r>
           </a:p>
         </p:txBody>
@@ -20384,7 +20133,7 @@
           </a:xfrm>
           <a:prstGeom prst="roundRect">
             <a:avLst>
-              <a:gd name="adj" fmla="val 5500"/>
+              <a:gd name="adj" fmla="val 5000"/>
             </a:avLst>
           </a:prstGeom>
           <a:solidFill>
@@ -20412,7 +20161,7 @@
           </a:fontRef>
         </p:style>
         <p:txBody>
-          <a:bodyPr rtlCol="0" anchor="ctr" wrap="square" lIns="146304" rIns="146304" tIns="109728" bIns="109728"/>
+          <a:bodyPr rtlCol="0" anchor="ctr"/>
           <a:lstStyle/>
           <a:p>
             <a:pPr algn="ctr"/>
@@ -20427,7 +20176,7 @@
         </p:nvSpPr>
         <p:spPr>
           <a:xfrm>
-            <a:off x="8394192" y="1920240"/>
+            <a:off x="8394192" y="1965960"/>
             <a:ext cx="3246120" cy="594360"/>
           </a:xfrm>
           <a:prstGeom prst="rect">
@@ -20436,7 +20185,7 @@
           <a:noFill/>
         </p:spPr>
         <p:txBody>
-          <a:bodyPr wrap="square">
+          <a:bodyPr wrap="square" anchor="t" lIns="0" rIns="0" tIns="0" bIns="0">
             <a:spAutoFit/>
           </a:bodyPr>
           <a:lstStyle/>
@@ -20470,7 +20219,7 @@
         </p:nvSpPr>
         <p:spPr>
           <a:xfrm>
-            <a:off x="8394192" y="2514600"/>
+            <a:off x="8394192" y="2560320"/>
             <a:ext cx="3246120" cy="822960"/>
           </a:xfrm>
           <a:prstGeom prst="rect">
@@ -20479,7 +20228,85 @@
           <a:noFill/>
         </p:spPr>
         <p:txBody>
-          <a:bodyPr wrap="square">
+          <a:bodyPr wrap="square" anchor="t" lIns="0" rIns="0" tIns="0" bIns="0">
+            <a:spAutoFit/>
+          </a:bodyPr>
+          <a:lstStyle/>
+          <a:p>
+            <a:pPr>
+              <a:lnSpc>
+                <a:spcPct val="108000"/>
+              </a:lnSpc>
+            </a:pPr>
+            <a:r>
+              <a:rPr sz="1050" b="0">
+                <a:solidFill>
+                  <a:srgbClr val="6B7B73"/>
+                </a:solidFill>
+                <a:latin typeface="Hanken Grotesk"/>
+              </a:rPr>
+              <a:t>Proxy every OTP step, own WebAuthn store, Ed25519 ticket bridge, AdminSetUserPassword exchange</a:t>
+            </a:r>
+          </a:p>
+        </p:txBody>
+      </p:sp>
+      <p:sp>
+        <p:nvSpPr>
+          <p:cNvPr id="16" name="TextBox 15"/>
+          <p:cNvSpPr txBox="1"/>
+          <p:nvPr/>
+        </p:nvSpPr>
+        <p:spPr>
+          <a:xfrm>
+            <a:off x="8394192" y="3474720"/>
+            <a:ext cx="3246120" cy="960120"/>
+          </a:xfrm>
+          <a:prstGeom prst="rect">
+            <a:avLst/>
+          </a:prstGeom>
+          <a:noFill/>
+        </p:spPr>
+        <p:txBody>
+          <a:bodyPr wrap="square" anchor="t" lIns="0" rIns="0" tIns="0" bIns="0">
+            <a:spAutoFit/>
+          </a:bodyPr>
+          <a:lstStyle/>
+          <a:p>
+            <a:pPr>
+              <a:lnSpc>
+                <a:spcPct val="108000"/>
+              </a:lnSpc>
+            </a:pPr>
+            <a:r>
+              <a:rPr sz="1050" b="0">
+                <a:solidFill>
+                  <a:srgbClr val="15201C"/>
+                </a:solidFill>
+                <a:latin typeface="Hanken Grotesk"/>
+              </a:rPr>
+              <a:t>BUILT, THEN DELETED: 2 Lambdas + 3 tables + a crypto path bought ONE feature — userless Face ID. Requirement waived, cost column deleted.</a:t>
+            </a:r>
+          </a:p>
+        </p:txBody>
+      </p:sp>
+      <p:sp>
+        <p:nvSpPr>
+          <p:cNvPr id="17" name="TextBox 16"/>
+          <p:cNvSpPr txBox="1"/>
+          <p:nvPr/>
+        </p:nvSpPr>
+        <p:spPr>
+          <a:xfrm>
+            <a:off x="658368" y="4709160"/>
+            <a:ext cx="10881360" cy="1463040"/>
+          </a:xfrm>
+          <a:prstGeom prst="rect">
+            <a:avLst/>
+          </a:prstGeom>
+          <a:noFill/>
+        </p:spPr>
+        <p:txBody>
+          <a:bodyPr wrap="square" anchor="t" lIns="0" rIns="0" tIns="0" bIns="0">
             <a:spAutoFit/>
           </a:bodyPr>
           <a:lstStyle/>
@@ -20487,84 +20314,6 @@
             <a:pPr>
               <a:lnSpc>
                 <a:spcPct val="110000"/>
-              </a:lnSpc>
-            </a:pPr>
-            <a:r>
-              <a:rPr sz="1050" b="0">
-                <a:solidFill>
-                  <a:srgbClr val="6B7B73"/>
-                </a:solidFill>
-                <a:latin typeface="Hanken Grotesk"/>
-              </a:rPr>
-              <a:t>Proxy every OTP step, own WebAuthn store, Ed25519 ticket bridge, AdminSetUserPassword exchange</a:t>
-            </a:r>
-          </a:p>
-        </p:txBody>
-      </p:sp>
-      <p:sp>
-        <p:nvSpPr>
-          <p:cNvPr id="16" name="TextBox 15"/>
-          <p:cNvSpPr txBox="1"/>
-          <p:nvPr/>
-        </p:nvSpPr>
-        <p:spPr>
-          <a:xfrm>
-            <a:off x="8394192" y="3429000"/>
-            <a:ext cx="3246120" cy="960120"/>
-          </a:xfrm>
-          <a:prstGeom prst="rect">
-            <a:avLst/>
-          </a:prstGeom>
-          <a:noFill/>
-        </p:spPr>
-        <p:txBody>
-          <a:bodyPr wrap="square">
-            <a:spAutoFit/>
-          </a:bodyPr>
-          <a:lstStyle/>
-          <a:p>
-            <a:pPr>
-              <a:lnSpc>
-                <a:spcPct val="110000"/>
-              </a:lnSpc>
-            </a:pPr>
-            <a:r>
-              <a:rPr sz="1050" b="0">
-                <a:solidFill>
-                  <a:srgbClr val="15201C"/>
-                </a:solidFill>
-                <a:latin typeface="Hanken Grotesk"/>
-              </a:rPr>
-              <a:t>BUILT, THEN DELETED: 2 Lambdas + 3 tables + a crypto path bought ONE feature - userless Face ID. Requirement waived, cost column deleted</a:t>
-            </a:r>
-          </a:p>
-        </p:txBody>
-      </p:sp>
-      <p:sp>
-        <p:nvSpPr>
-          <p:cNvPr id="17" name="TextBox 16"/>
-          <p:cNvSpPr txBox="1"/>
-          <p:nvPr/>
-        </p:nvSpPr>
-        <p:spPr>
-          <a:xfrm>
-            <a:off x="658368" y="4709160"/>
-            <a:ext cx="10881360" cy="1463040"/>
-          </a:xfrm>
-          <a:prstGeom prst="rect">
-            <a:avLst/>
-          </a:prstGeom>
-          <a:noFill/>
-        </p:spPr>
-        <p:txBody>
-          <a:bodyPr wrap="square">
-            <a:spAutoFit/>
-          </a:bodyPr>
-          <a:lstStyle/>
-          <a:p>
-            <a:pPr>
-              <a:lnSpc>
-                <a:spcPct val="115000"/>
               </a:lnSpc>
               <a:spcAft>
                 <a:spcPts val="600"/>
@@ -20586,13 +20335,13 @@
                 </a:solidFill>
                 <a:latin typeface="Hanken Grotesk"/>
               </a:rPr>
-              <a:t>userless Face ID waived (remembered-phone one-prompt kept); phone enumeration accepted (preventUserExistenceErrors LEGACY) - mitigated by pool WAF rate rules; JWT revocation lags up to 1 h on our APIs (stateless authorizer) - acceptable while the only member surface is a read-only wallet.</a:t>
+              <a:t>userless Face ID waived (remembered-phone one-prompt kept); phone enumeration accepted (preventUserExistenceErrors LEGACY) — mitigated by pool WAF rate rules; JWT revocation lags up to 1 h on our APIs (stateless authorizer) — acceptable while the only member surface is a read-only wallet.</a:t>
             </a:r>
           </a:p>
           <a:p>
             <a:pPr>
               <a:lnSpc>
-                <a:spcPct val="115000"/>
+                <a:spcPct val="110000"/>
               </a:lnSpc>
               <a:spcAft>
                 <a:spcPts val="600"/>
@@ -20628,7 +20377,7 @@
         <p:spPr>
           <a:xfrm>
             <a:off x="640080" y="6455664"/>
-            <a:ext cx="10908792" cy="10972"/>
+            <a:ext cx="10908792" cy="9144"/>
           </a:xfrm>
           <a:prstGeom prst="rect">
             <a:avLst/>
@@ -20656,7 +20405,7 @@
           </a:fontRef>
         </p:style>
         <p:txBody>
-          <a:bodyPr rtlCol="0" anchor="ctr" wrap="square" lIns="146304" rIns="146304" tIns="109728" bIns="109728"/>
+          <a:bodyPr rtlCol="0" anchor="ctr"/>
           <a:lstStyle/>
           <a:p>
             <a:pPr algn="ctr"/>
@@ -20680,7 +20429,7 @@
           <a:noFill/>
         </p:spPr>
         <p:txBody>
-          <a:bodyPr wrap="square">
+          <a:bodyPr wrap="square" anchor="t" lIns="0" rIns="0" tIns="0" bIns="0">
             <a:spAutoFit/>
           </a:bodyPr>
           <a:lstStyle/>
@@ -20723,7 +20472,7 @@
           <a:noFill/>
         </p:spPr>
         <p:txBody>
-          <a:bodyPr wrap="square">
+          <a:bodyPr wrap="square" anchor="t" lIns="0" rIns="0" tIns="0" bIns="0">
             <a:spAutoFit/>
           </a:bodyPr>
           <a:lstStyle/>

--- a/slides/wanthat-presentation.pptx
+++ b/slides/wanthat-presentation.pptx
@@ -12,8 +12,15 @@
     <p:sldId id="260" r:id="rId12"/>
     <p:sldId id="261" r:id="rId13"/>
     <p:sldId id="278" r:id="rId30"/>
+    <p:sldId id="263" r:id="rId15"/>
     <p:sldId id="262" r:id="rId14"/>
-    <p:sldId id="263" r:id="rId15"/>
+    <p:sldId id="284" r:id="rId36"/>
+    <p:sldId id="285" r:id="rId37"/>
+    <p:sldId id="286" r:id="rId38"/>
+    <p:sldId id="287" r:id="rId39"/>
+    <p:sldId id="288" r:id="rId40"/>
+    <p:sldId id="289" r:id="rId41"/>
+    <p:sldId id="290" r:id="rId42"/>
     <p:sldId id="267" r:id="rId19"/>
     <p:sldId id="268" r:id="rId20"/>
     <p:sldId id="269" r:id="rId21"/>
@@ -33,6 +40,7 @@
     <p:sldId id="275" r:id="rId27"/>
     <p:sldId id="276" r:id="rId28"/>
     <p:sldId id="277" r:id="rId29"/>
+    <p:sldId id="291" r:id="rId43"/>
   </p:sldIdLst>
   <p:sldSz cx="12191695" cy="6858000" type="screen4x3"/>
   <p:notesSz cx="6858000" cy="9144000"/>
@@ -1604,6 +1612,426 @@
 </p:notes>
 </file>
 
+<file path=ppt/notesSlides/notesSlide24.xml><?xml version="1.0" encoding="utf-8"?>
+<p:notes xmlns:a="http://schemas.openxmlformats.org/drawingml/2006/main" xmlns:p="http://schemas.openxmlformats.org/presentationml/2006/main" xmlns:r="http://schemas.openxmlformats.org/officeDocument/2006/relationships">
+  <p:cSld>
+    <p:spTree>
+      <p:nvGrpSpPr>
+        <p:cNvPr id="1" name=""/>
+        <p:cNvGrpSpPr/>
+        <p:nvPr/>
+      </p:nvGrpSpPr>
+      <p:grpSpPr>
+        <a:xfrm>
+          <a:off x="0" y="0"/>
+          <a:ext cx="0" cy="0"/>
+          <a:chOff x="0" y="0"/>
+          <a:chExt cx="0" cy="0"/>
+        </a:xfrm>
+      </p:grpSpPr>
+      <p:sp>
+        <p:nvSpPr>
+          <p:cNvPr id="2" name="Slide Image Placeholder 1"/>
+          <p:cNvSpPr>
+            <a:spLocks noGrp="1"/>
+          </p:cNvSpPr>
+          <p:nvPr>
+            <p:ph type="sldImg" idx="2"/>
+          </p:nvPr>
+        </p:nvSpPr>
+        <p:spPr/>
+      </p:sp>
+      <p:sp>
+        <p:nvSpPr>
+          <p:cNvPr id="3" name="Notes Placeholder 2"/>
+          <p:cNvSpPr>
+            <a:spLocks noGrp="1"/>
+          </p:cNvSpPr>
+          <p:nvPr>
+            <p:ph type="body" idx="3" sz="quarter"/>
+          </p:nvPr>
+        </p:nvSpPr>
+        <p:spPr/>
+        <p:txBody>
+          <a:bodyPr/>
+          <a:lstStyle/>
+          <a:p>
+            <a:r>
+              <a:t>Diagram maintained by Dennis in the working deck - the card is reserved space.</a:t>
+            </a:r>
+          </a:p>
+        </p:txBody>
+      </p:sp>
+      <p:sp>
+        <p:nvSpPr>
+          <p:cNvPr id="4" name="Slide Number Placeholder 3"/>
+          <p:cNvSpPr>
+            <a:spLocks noGrp="1"/>
+          </p:cNvSpPr>
+          <p:nvPr>
+            <p:ph type="sldNum" idx="5" sz="quarter"/>
+          </p:nvPr>
+        </p:nvSpPr>
+        <p:spPr/>
+      </p:sp>
+    </p:spTree>
+  </p:cSld>
+  <p:clrMapOvr>
+    <a:masterClrMapping/>
+  </p:clrMapOvr>
+</p:notes>
+</file>
+
+<file path=ppt/notesSlides/notesSlide25.xml><?xml version="1.0" encoding="utf-8"?>
+<p:notes xmlns:a="http://schemas.openxmlformats.org/drawingml/2006/main" xmlns:p="http://schemas.openxmlformats.org/presentationml/2006/main" xmlns:r="http://schemas.openxmlformats.org/officeDocument/2006/relationships">
+  <p:cSld>
+    <p:spTree>
+      <p:nvGrpSpPr>
+        <p:cNvPr id="1" name=""/>
+        <p:cNvGrpSpPr/>
+        <p:nvPr/>
+      </p:nvGrpSpPr>
+      <p:grpSpPr>
+        <a:xfrm>
+          <a:off x="0" y="0"/>
+          <a:ext cx="0" cy="0"/>
+          <a:chOff x="0" y="0"/>
+          <a:chExt cx="0" cy="0"/>
+        </a:xfrm>
+      </p:grpSpPr>
+      <p:sp>
+        <p:nvSpPr>
+          <p:cNvPr id="2" name="Slide Image Placeholder 1"/>
+          <p:cNvSpPr>
+            <a:spLocks noGrp="1"/>
+          </p:cNvSpPr>
+          <p:nvPr>
+            <p:ph type="sldImg" idx="2"/>
+          </p:nvPr>
+        </p:nvSpPr>
+        <p:spPr/>
+      </p:sp>
+      <p:sp>
+        <p:nvSpPr>
+          <p:cNvPr id="3" name="Notes Placeholder 2"/>
+          <p:cNvSpPr>
+            <a:spLocks noGrp="1"/>
+          </p:cNvSpPr>
+          <p:nvPr>
+            <p:ph type="body" idx="3" sz="quarter"/>
+          </p:nvPr>
+        </p:nvSpPr>
+        <p:spPr/>
+        <p:txBody>
+          <a:bodyPr/>
+          <a:lstStyle/>
+          <a:p>
+            <a:r>
+              <a:t>Diagram maintained by Dennis in the working deck - the card is reserved space.</a:t>
+            </a:r>
+          </a:p>
+        </p:txBody>
+      </p:sp>
+      <p:sp>
+        <p:nvSpPr>
+          <p:cNvPr id="4" name="Slide Number Placeholder 3"/>
+          <p:cNvSpPr>
+            <a:spLocks noGrp="1"/>
+          </p:cNvSpPr>
+          <p:nvPr>
+            <p:ph type="sldNum" idx="5" sz="quarter"/>
+          </p:nvPr>
+        </p:nvSpPr>
+        <p:spPr/>
+      </p:sp>
+    </p:spTree>
+  </p:cSld>
+  <p:clrMapOvr>
+    <a:masterClrMapping/>
+  </p:clrMapOvr>
+</p:notes>
+</file>
+
+<file path=ppt/notesSlides/notesSlide26.xml><?xml version="1.0" encoding="utf-8"?>
+<p:notes xmlns:a="http://schemas.openxmlformats.org/drawingml/2006/main" xmlns:p="http://schemas.openxmlformats.org/presentationml/2006/main" xmlns:r="http://schemas.openxmlformats.org/officeDocument/2006/relationships">
+  <p:cSld>
+    <p:spTree>
+      <p:nvGrpSpPr>
+        <p:cNvPr id="1" name=""/>
+        <p:cNvGrpSpPr/>
+        <p:nvPr/>
+      </p:nvGrpSpPr>
+      <p:grpSpPr>
+        <a:xfrm>
+          <a:off x="0" y="0"/>
+          <a:ext cx="0" cy="0"/>
+          <a:chOff x="0" y="0"/>
+          <a:chExt cx="0" cy="0"/>
+        </a:xfrm>
+      </p:grpSpPr>
+      <p:sp>
+        <p:nvSpPr>
+          <p:cNvPr id="2" name="Slide Image Placeholder 1"/>
+          <p:cNvSpPr>
+            <a:spLocks noGrp="1"/>
+          </p:cNvSpPr>
+          <p:nvPr>
+            <p:ph type="sldImg" idx="2"/>
+          </p:nvPr>
+        </p:nvSpPr>
+        <p:spPr/>
+      </p:sp>
+      <p:sp>
+        <p:nvSpPr>
+          <p:cNvPr id="3" name="Notes Placeholder 2"/>
+          <p:cNvSpPr>
+            <a:spLocks noGrp="1"/>
+          </p:cNvSpPr>
+          <p:nvPr>
+            <p:ph type="body" idx="3" sz="quarter"/>
+          </p:nvPr>
+        </p:nvSpPr>
+        <p:spPr/>
+        <p:txBody>
+          <a:bodyPr/>
+          <a:lstStyle/>
+          <a:p>
+            <a:r>
+              <a:t>Diagram maintained by Dennis in the working deck - the card is reserved space.</a:t>
+            </a:r>
+          </a:p>
+        </p:txBody>
+      </p:sp>
+      <p:sp>
+        <p:nvSpPr>
+          <p:cNvPr id="4" name="Slide Number Placeholder 3"/>
+          <p:cNvSpPr>
+            <a:spLocks noGrp="1"/>
+          </p:cNvSpPr>
+          <p:nvPr>
+            <p:ph type="sldNum" idx="5" sz="quarter"/>
+          </p:nvPr>
+        </p:nvSpPr>
+        <p:spPr/>
+      </p:sp>
+    </p:spTree>
+  </p:cSld>
+  <p:clrMapOvr>
+    <a:masterClrMapping/>
+  </p:clrMapOvr>
+</p:notes>
+</file>
+
+<file path=ppt/notesSlides/notesSlide27.xml><?xml version="1.0" encoding="utf-8"?>
+<p:notes xmlns:a="http://schemas.openxmlformats.org/drawingml/2006/main" xmlns:p="http://schemas.openxmlformats.org/presentationml/2006/main" xmlns:r="http://schemas.openxmlformats.org/officeDocument/2006/relationships">
+  <p:cSld>
+    <p:spTree>
+      <p:nvGrpSpPr>
+        <p:cNvPr id="1" name=""/>
+        <p:cNvGrpSpPr/>
+        <p:nvPr/>
+      </p:nvGrpSpPr>
+      <p:grpSpPr>
+        <a:xfrm>
+          <a:off x="0" y="0"/>
+          <a:ext cx="0" cy="0"/>
+          <a:chOff x="0" y="0"/>
+          <a:chExt cx="0" cy="0"/>
+        </a:xfrm>
+      </p:grpSpPr>
+      <p:sp>
+        <p:nvSpPr>
+          <p:cNvPr id="2" name="Slide Image Placeholder 1"/>
+          <p:cNvSpPr>
+            <a:spLocks noGrp="1"/>
+          </p:cNvSpPr>
+          <p:nvPr>
+            <p:ph type="sldImg" idx="2"/>
+          </p:nvPr>
+        </p:nvSpPr>
+        <p:spPr/>
+      </p:sp>
+      <p:sp>
+        <p:nvSpPr>
+          <p:cNvPr id="3" name="Notes Placeholder 2"/>
+          <p:cNvSpPr>
+            <a:spLocks noGrp="1"/>
+          </p:cNvSpPr>
+          <p:nvPr>
+            <p:ph type="body" idx="3" sz="quarter"/>
+          </p:nvPr>
+        </p:nvSpPr>
+        <p:spPr/>
+        <p:txBody>
+          <a:bodyPr/>
+          <a:lstStyle/>
+          <a:p>
+            <a:r>
+              <a:t>Diagram maintained by Dennis in the working deck - the card is reserved space.</a:t>
+            </a:r>
+          </a:p>
+        </p:txBody>
+      </p:sp>
+      <p:sp>
+        <p:nvSpPr>
+          <p:cNvPr id="4" name="Slide Number Placeholder 3"/>
+          <p:cNvSpPr>
+            <a:spLocks noGrp="1"/>
+          </p:cNvSpPr>
+          <p:nvPr>
+            <p:ph type="sldNum" idx="5" sz="quarter"/>
+          </p:nvPr>
+        </p:nvSpPr>
+        <p:spPr/>
+      </p:sp>
+    </p:spTree>
+  </p:cSld>
+  <p:clrMapOvr>
+    <a:masterClrMapping/>
+  </p:clrMapOvr>
+</p:notes>
+</file>
+
+<file path=ppt/notesSlides/notesSlide28.xml><?xml version="1.0" encoding="utf-8"?>
+<p:notes xmlns:a="http://schemas.openxmlformats.org/drawingml/2006/main" xmlns:p="http://schemas.openxmlformats.org/presentationml/2006/main" xmlns:r="http://schemas.openxmlformats.org/officeDocument/2006/relationships">
+  <p:cSld>
+    <p:spTree>
+      <p:nvGrpSpPr>
+        <p:cNvPr id="1" name=""/>
+        <p:cNvGrpSpPr/>
+        <p:nvPr/>
+      </p:nvGrpSpPr>
+      <p:grpSpPr>
+        <a:xfrm>
+          <a:off x="0" y="0"/>
+          <a:ext cx="0" cy="0"/>
+          <a:chOff x="0" y="0"/>
+          <a:chExt cx="0" cy="0"/>
+        </a:xfrm>
+      </p:grpSpPr>
+      <p:sp>
+        <p:nvSpPr>
+          <p:cNvPr id="2" name="Slide Image Placeholder 1"/>
+          <p:cNvSpPr>
+            <a:spLocks noGrp="1"/>
+          </p:cNvSpPr>
+          <p:nvPr>
+            <p:ph type="sldImg" idx="2"/>
+          </p:nvPr>
+        </p:nvSpPr>
+        <p:spPr/>
+      </p:sp>
+      <p:sp>
+        <p:nvSpPr>
+          <p:cNvPr id="3" name="Notes Placeholder 2"/>
+          <p:cNvSpPr>
+            <a:spLocks noGrp="1"/>
+          </p:cNvSpPr>
+          <p:nvPr>
+            <p:ph type="body" idx="3" sz="quarter"/>
+          </p:nvPr>
+        </p:nvSpPr>
+        <p:spPr/>
+        <p:txBody>
+          <a:bodyPr/>
+          <a:lstStyle/>
+          <a:p>
+            <a:r>
+              <a:t>Diagram maintained by Dennis in the working deck - the card is reserved space.</a:t>
+            </a:r>
+          </a:p>
+        </p:txBody>
+      </p:sp>
+      <p:sp>
+        <p:nvSpPr>
+          <p:cNvPr id="4" name="Slide Number Placeholder 3"/>
+          <p:cNvSpPr>
+            <a:spLocks noGrp="1"/>
+          </p:cNvSpPr>
+          <p:nvPr>
+            <p:ph type="sldNum" idx="5" sz="quarter"/>
+          </p:nvPr>
+        </p:nvSpPr>
+        <p:spPr/>
+      </p:sp>
+    </p:spTree>
+  </p:cSld>
+  <p:clrMapOvr>
+    <a:masterClrMapping/>
+  </p:clrMapOvr>
+</p:notes>
+</file>
+
+<file path=ppt/notesSlides/notesSlide29.xml><?xml version="1.0" encoding="utf-8"?>
+<p:notes xmlns:a="http://schemas.openxmlformats.org/drawingml/2006/main" xmlns:p="http://schemas.openxmlformats.org/presentationml/2006/main" xmlns:r="http://schemas.openxmlformats.org/officeDocument/2006/relationships">
+  <p:cSld>
+    <p:spTree>
+      <p:nvGrpSpPr>
+        <p:cNvPr id="1" name=""/>
+        <p:cNvGrpSpPr/>
+        <p:nvPr/>
+      </p:nvGrpSpPr>
+      <p:grpSpPr>
+        <a:xfrm>
+          <a:off x="0" y="0"/>
+          <a:ext cx="0" cy="0"/>
+          <a:chOff x="0" y="0"/>
+          <a:chExt cx="0" cy="0"/>
+        </a:xfrm>
+      </p:grpSpPr>
+      <p:sp>
+        <p:nvSpPr>
+          <p:cNvPr id="2" name="Slide Image Placeholder 1"/>
+          <p:cNvSpPr>
+            <a:spLocks noGrp="1"/>
+          </p:cNvSpPr>
+          <p:nvPr>
+            <p:ph type="sldImg" idx="2"/>
+          </p:nvPr>
+        </p:nvSpPr>
+        <p:spPr/>
+      </p:sp>
+      <p:sp>
+        <p:nvSpPr>
+          <p:cNvPr id="3" name="Notes Placeholder 2"/>
+          <p:cNvSpPr>
+            <a:spLocks noGrp="1"/>
+          </p:cNvSpPr>
+          <p:nvPr>
+            <p:ph type="body" idx="3" sz="quarter"/>
+          </p:nvPr>
+        </p:nvSpPr>
+        <p:spPr/>
+        <p:txBody>
+          <a:bodyPr/>
+          <a:lstStyle/>
+          <a:p>
+            <a:r>
+              <a:t>Diagram maintained by Dennis in the working deck - the card is reserved space.</a:t>
+            </a:r>
+          </a:p>
+        </p:txBody>
+      </p:sp>
+      <p:sp>
+        <p:nvSpPr>
+          <p:cNvPr id="4" name="Slide Number Placeholder 3"/>
+          <p:cNvSpPr>
+            <a:spLocks noGrp="1"/>
+          </p:cNvSpPr>
+          <p:nvPr>
+            <p:ph type="sldNum" idx="5" sz="quarter"/>
+          </p:nvPr>
+        </p:nvSpPr>
+        <p:spPr/>
+      </p:sp>
+    </p:spTree>
+  </p:cSld>
+  <p:clrMapOvr>
+    <a:masterClrMapping/>
+  </p:clrMapOvr>
+</p:notes>
+</file>
+
 <file path=ppt/notesSlides/notesSlide3.xml><?xml version="1.0" encoding="utf-8"?>
 <p:notes xmlns:a="http://schemas.openxmlformats.org/drawingml/2006/main" xmlns:p="http://schemas.openxmlformats.org/presentationml/2006/main" xmlns:r="http://schemas.openxmlformats.org/officeDocument/2006/relationships">
   <p:cSld>
@@ -1650,6 +2078,146 @@
           <a:p>
             <a:r>
               <a:t>the gates decide Phase 2 (group sharing, two-sided rewards) and a pre-seed raise.</a:t>
+            </a:r>
+          </a:p>
+        </p:txBody>
+      </p:sp>
+      <p:sp>
+        <p:nvSpPr>
+          <p:cNvPr id="4" name="Slide Number Placeholder 3"/>
+          <p:cNvSpPr>
+            <a:spLocks noGrp="1"/>
+          </p:cNvSpPr>
+          <p:nvPr>
+            <p:ph type="sldNum" idx="5" sz="quarter"/>
+          </p:nvPr>
+        </p:nvSpPr>
+        <p:spPr/>
+      </p:sp>
+    </p:spTree>
+  </p:cSld>
+  <p:clrMapOvr>
+    <a:masterClrMapping/>
+  </p:clrMapOvr>
+</p:notes>
+</file>
+
+<file path=ppt/notesSlides/notesSlide30.xml><?xml version="1.0" encoding="utf-8"?>
+<p:notes xmlns:a="http://schemas.openxmlformats.org/drawingml/2006/main" xmlns:p="http://schemas.openxmlformats.org/presentationml/2006/main" xmlns:r="http://schemas.openxmlformats.org/officeDocument/2006/relationships">
+  <p:cSld>
+    <p:spTree>
+      <p:nvGrpSpPr>
+        <p:cNvPr id="1" name=""/>
+        <p:cNvGrpSpPr/>
+        <p:nvPr/>
+      </p:nvGrpSpPr>
+      <p:grpSpPr>
+        <a:xfrm>
+          <a:off x="0" y="0"/>
+          <a:ext cx="0" cy="0"/>
+          <a:chOff x="0" y="0"/>
+          <a:chExt cx="0" cy="0"/>
+        </a:xfrm>
+      </p:grpSpPr>
+      <p:sp>
+        <p:nvSpPr>
+          <p:cNvPr id="2" name="Slide Image Placeholder 1"/>
+          <p:cNvSpPr>
+            <a:spLocks noGrp="1"/>
+          </p:cNvSpPr>
+          <p:nvPr>
+            <p:ph type="sldImg" idx="2"/>
+          </p:nvPr>
+        </p:nvSpPr>
+        <p:spPr/>
+      </p:sp>
+      <p:sp>
+        <p:nvSpPr>
+          <p:cNvPr id="3" name="Notes Placeholder 2"/>
+          <p:cNvSpPr>
+            <a:spLocks noGrp="1"/>
+          </p:cNvSpPr>
+          <p:nvPr>
+            <p:ph type="body" idx="3" sz="quarter"/>
+          </p:nvPr>
+        </p:nvSpPr>
+        <p:spPr/>
+        <p:txBody>
+          <a:bodyPr/>
+          <a:lstStyle/>
+          <a:p>
+            <a:r>
+              <a:t>Diagram maintained by Dennis in the working deck - the card is reserved space.</a:t>
+            </a:r>
+          </a:p>
+        </p:txBody>
+      </p:sp>
+      <p:sp>
+        <p:nvSpPr>
+          <p:cNvPr id="4" name="Slide Number Placeholder 3"/>
+          <p:cNvSpPr>
+            <a:spLocks noGrp="1"/>
+          </p:cNvSpPr>
+          <p:nvPr>
+            <p:ph type="sldNum" idx="5" sz="quarter"/>
+          </p:nvPr>
+        </p:nvSpPr>
+        <p:spPr/>
+      </p:sp>
+    </p:spTree>
+  </p:cSld>
+  <p:clrMapOvr>
+    <a:masterClrMapping/>
+  </p:clrMapOvr>
+</p:notes>
+</file>
+
+<file path=ppt/notesSlides/notesSlide31.xml><?xml version="1.0" encoding="utf-8"?>
+<p:notes xmlns:a="http://schemas.openxmlformats.org/drawingml/2006/main" xmlns:p="http://schemas.openxmlformats.org/presentationml/2006/main" xmlns:r="http://schemas.openxmlformats.org/officeDocument/2006/relationships">
+  <p:cSld>
+    <p:spTree>
+      <p:nvGrpSpPr>
+        <p:cNvPr id="1" name=""/>
+        <p:cNvGrpSpPr/>
+        <p:nvPr/>
+      </p:nvGrpSpPr>
+      <p:grpSpPr>
+        <a:xfrm>
+          <a:off x="0" y="0"/>
+          <a:ext cx="0" cy="0"/>
+          <a:chOff x="0" y="0"/>
+          <a:chExt cx="0" cy="0"/>
+        </a:xfrm>
+      </p:grpSpPr>
+      <p:sp>
+        <p:nvSpPr>
+          <p:cNvPr id="2" name="Slide Image Placeholder 1"/>
+          <p:cNvSpPr>
+            <a:spLocks noGrp="1"/>
+          </p:cNvSpPr>
+          <p:nvPr>
+            <p:ph type="sldImg" idx="2"/>
+          </p:nvPr>
+        </p:nvSpPr>
+        <p:spPr/>
+      </p:sp>
+      <p:sp>
+        <p:nvSpPr>
+          <p:cNvPr id="3" name="Notes Placeholder 2"/>
+          <p:cNvSpPr>
+            <a:spLocks noGrp="1"/>
+          </p:cNvSpPr>
+          <p:nvPr>
+            <p:ph type="body" idx="3" sz="quarter"/>
+          </p:nvPr>
+        </p:nvSpPr>
+        <p:spPr/>
+        <p:txBody>
+          <a:bodyPr/>
+          <a:lstStyle/>
+          <a:p>
+            <a:r>
+              <a:t>WAF stays flat at every scale - member API operations bypass CloudFront entirely. The scaling costs live in identity (Cognito MAU), Aurora always-on, and the per-request stack (~$90/month combined at 100k).</a:t>
             </a:r>
           </a:p>
         </p:txBody>
@@ -1929,7 +2497,7 @@
           <a:lstStyle/>
           <a:p>
             <a:r>
-              <a:t>(walk it left to right) (1) there is no auth service — the browser talks to Cognito directly; OTP rides a custom sender with WhatsApp-default and kill switches. (2) The member APIs split into non-VPC member-catalog and in-VPC member-wallet — only what touches money enters the VPC; the admin surface splits the same way (console vs ledger view). (3) The friend's click never leaves DynamoDB. (4) Money enters only through the scheduled pipeline on the right — retailer-settlement fetches, the in-VPC ledger-writer appends and returns the totals the poll projects back onto the links. Full per-table version lives in `docs/AWS_Architecture.md`.</a:t>
+              <a:t>Diagram maintained by Dennis in the working deck - the card is reserved space.</a:t>
             </a:r>
           </a:p>
         </p:txBody>
@@ -5267,7 +5835,7 @@
                 </a:solidFill>
                 <a:latin typeface="Hanken Grotesk"/>
               </a:rPr>
-              <a:t>Product &amp; architecture overview — 19 minutes</a:t>
+              <a:t>Product &amp; architecture overview  ·  Dennis Potashnik  ·  July 2026</a:t>
             </a:r>
           </a:p>
         </p:txBody>
@@ -5556,7 +6124,7 @@
                 </a:solidFill>
                 <a:latin typeface="Space Grotesk"/>
               </a:rPr>
-              <a:t>10</a:t>
+              <a:t>17</a:t>
             </a:r>
           </a:p>
         </p:txBody>
@@ -6231,6 +6799,17 @@
               <a:t>the redirect hot path costs micro-cents per thousand clicks and cannot touch Aurora — cost scales with revenue-bearing traffic, not with virality.</a:t>
             </a:r>
           </a:p>
+          <a:p>
+            <a:r>
+              <a:rPr sz="1250" b="1">
+                <a:solidFill>
+                  <a:srgbClr val="15201C"/>
+                </a:solidFill>
+                <a:latin typeface="Hanken Grotesk"/>
+              </a:rPr>
+              <a:t>Scale projection (10 → 100k users): backup B17.</a:t>
+            </a:r>
+          </a:p>
         </p:txBody>
       </p:sp>
       <p:sp>
@@ -6350,7 +6929,7 @@
                 </a:solidFill>
                 <a:latin typeface="Space Mono"/>
               </a:rPr>
-              <a:t>10</a:t>
+              <a:t>17</a:t>
             </a:r>
           </a:p>
         </p:txBody>
@@ -6411,7 +6990,7 @@
                 </a:solidFill>
                 <a:latin typeface="Space Grotesk"/>
               </a:rPr>
-              <a:t>11</a:t>
+              <a:t>18</a:t>
             </a:r>
           </a:p>
         </p:txBody>
@@ -6479,7 +7058,7 @@
                 </a:solidFill>
                 <a:latin typeface="Space Grotesk"/>
               </a:rPr>
-              <a:t>Limits I know about — and their revisit triggers</a:t>
+              <a:t>Known limits — and their revisit triggers</a:t>
             </a:r>
           </a:p>
         </p:txBody>
@@ -7252,7 +7831,7 @@
                 </a:solidFill>
                 <a:latin typeface="Space Mono"/>
               </a:rPr>
-              <a:t>11</a:t>
+              <a:t>18</a:t>
             </a:r>
           </a:p>
         </p:txBody>
@@ -12004,7 +12583,7 @@
                 </a:solidFill>
                 <a:latin typeface="Space Grotesk"/>
               </a:rPr>
-              <a:t>Brands</a:t>
+              <a:t>Organic word-of-mouth</a:t>
             </a:r>
           </a:p>
         </p:txBody>
@@ -12043,7 +12622,7 @@
                 </a:solidFill>
                 <a:latin typeface="Hanken Grotesk"/>
               </a:rPr>
-              <a:t>influencer budgets keep growing while organic word-of-mouth — which converts better — stays invisible.</a:t>
+              <a:t>brands keep growing influencer budgets while organic word-of-mouth — which converts better — stays invisible</a:t>
             </a:r>
           </a:p>
         </p:txBody>
@@ -12252,13 +12831,13 @@
               </a:spcAft>
             </a:pPr>
             <a:r>
-              <a:rPr sz="1500" b="0">
+              <a:rPr sz="1500" b="1">
                 <a:solidFill>
                   <a:srgbClr val="15201C"/>
                 </a:solidFill>
                 <a:latin typeface="Hanken Grotesk"/>
               </a:rPr>
-              <a:t>Wanthat is the single registered affiliate across AliExpress / Awin / eBay; when a friend buys, the commission flows in and the majority is credited back to the recommender as cashback.</a:t>
+              <a:t>Wanthat is the single registered affiliate across AliExpress / Shein / Amazon and others — when a friend buys, the commission flows in and is split between the recommender and the buyer.</a:t>
             </a:r>
           </a:p>
           <a:p>
@@ -12271,13 +12850,13 @@
               </a:spcAft>
             </a:pPr>
             <a:r>
-              <a:rPr sz="1400" b="1">
-                <a:solidFill>
-                  <a:srgbClr val="1F7A57"/>
-                </a:solidFill>
-                <a:latin typeface="Space Grotesk"/>
-              </a:rPr>
-              <a:t>It monetizes a behavior that already exists — without changing it.</a:t>
+              <a:rPr sz="1500" b="1">
+                <a:solidFill>
+                  <a:srgbClr val="15201C"/>
+                </a:solidFill>
+                <a:latin typeface="Hanken Grotesk"/>
+              </a:rPr>
+              <a:t>It monetizes a behavior that already exists.</a:t>
             </a:r>
           </a:p>
         </p:txBody>
@@ -19281,6 +19860,353 @@
 </p:sld>
 </file>
 
+<file path=ppt/slides/slide29.xml><?xml version="1.0" encoding="utf-8"?>
+<p:sld xmlns:a="http://schemas.openxmlformats.org/drawingml/2006/main" xmlns:p="http://schemas.openxmlformats.org/presentationml/2006/main" xmlns:r="http://schemas.openxmlformats.org/officeDocument/2006/relationships">
+  <p:cSld>
+    <p:spTree>
+      <p:nvGrpSpPr>
+        <p:cNvPr id="1" name=""/>
+        <p:cNvGrpSpPr/>
+        <p:nvPr/>
+      </p:nvGrpSpPr>
+      <p:grpSpPr/>
+      <p:sp>
+        <p:nvSpPr>
+          <p:cNvPr id="2" name="TextBox 1"/>
+          <p:cNvSpPr txBox="1"/>
+          <p:nvPr/>
+        </p:nvSpPr>
+        <p:spPr>
+          <a:xfrm>
+            <a:off x="10195560" y="256032"/>
+            <a:ext cx="1371600" cy="1005840"/>
+          </a:xfrm>
+          <a:prstGeom prst="rect">
+            <a:avLst/>
+          </a:prstGeom>
+          <a:noFill/>
+        </p:spPr>
+        <p:txBody>
+          <a:bodyPr wrap="square" anchor="t" lIns="0" rIns="0" tIns="0" bIns="0">
+            <a:spAutoFit/>
+          </a:bodyPr>
+          <a:lstStyle/>
+          <a:p>
+            <a:pPr algn="r"/>
+            <a:r>
+              <a:rPr sz="4600" b="1">
+                <a:solidFill>
+                  <a:srgbClr val="DCE5E0"/>
+                </a:solidFill>
+                <a:latin typeface="Space Grotesk"/>
+              </a:rPr>
+              <a:t>10</a:t>
+            </a:r>
+          </a:p>
+        </p:txBody>
+      </p:sp>
+      <p:sp>
+        <p:nvSpPr>
+          <p:cNvPr id="3" name="TextBox 2"/>
+          <p:cNvSpPr txBox="1"/>
+          <p:nvPr/>
+        </p:nvSpPr>
+        <p:spPr>
+          <a:xfrm>
+            <a:off x="640080" y="420624"/>
+            <a:ext cx="9418320" cy="292608"/>
+          </a:xfrm>
+          <a:prstGeom prst="rect">
+            <a:avLst/>
+          </a:prstGeom>
+          <a:noFill/>
+        </p:spPr>
+        <p:txBody>
+          <a:bodyPr wrap="square" anchor="t" lIns="0" rIns="0" tIns="0" bIns="0">
+            <a:spAutoFit/>
+          </a:bodyPr>
+          <a:lstStyle/>
+          <a:p>
+            <a:r>
+              <a:rPr sz="1150" b="1">
+                <a:solidFill>
+                  <a:srgbClr val="1F7A57"/>
+                </a:solidFill>
+                <a:latin typeface="Space Mono"/>
+              </a:rPr>
+              <a:t>ENGINEERING</a:t>
+            </a:r>
+          </a:p>
+        </p:txBody>
+      </p:sp>
+      <p:sp>
+        <p:nvSpPr>
+          <p:cNvPr id="4" name="TextBox 3"/>
+          <p:cNvSpPr txBox="1"/>
+          <p:nvPr/>
+        </p:nvSpPr>
+        <p:spPr>
+          <a:xfrm>
+            <a:off x="621792" y="731520"/>
+            <a:ext cx="9509760" cy="868680"/>
+          </a:xfrm>
+          <a:prstGeom prst="rect">
+            <a:avLst/>
+          </a:prstGeom>
+          <a:noFill/>
+        </p:spPr>
+        <p:txBody>
+          <a:bodyPr wrap="square" anchor="t" lIns="0" rIns="0" tIns="0" bIns="0">
+            <a:spAutoFit/>
+          </a:bodyPr>
+          <a:lstStyle/>
+          <a:p>
+            <a:r>
+              <a:rPr sz="2700" b="1">
+                <a:solidFill>
+                  <a:srgbClr val="15201C"/>
+                </a:solidFill>
+                <a:latin typeface="Space Grotesk"/>
+              </a:rPr>
+              <a:t>Architecture UC1 — member creates a recommendation</a:t>
+            </a:r>
+          </a:p>
+        </p:txBody>
+      </p:sp>
+      <p:sp>
+        <p:nvSpPr>
+          <p:cNvPr id="5" name="Rounded Rectangle 4"/>
+          <p:cNvSpPr/>
+          <p:nvPr/>
+        </p:nvSpPr>
+        <p:spPr>
+          <a:xfrm>
+            <a:off x="3886200" y="1600200"/>
+            <a:ext cx="7653527" cy="4709160"/>
+          </a:xfrm>
+          <a:prstGeom prst="roundRect">
+            <a:avLst>
+              <a:gd name="adj" fmla="val 3000"/>
+            </a:avLst>
+          </a:prstGeom>
+          <a:solidFill>
+            <a:srgbClr val="FFFFFF"/>
+          </a:solidFill>
+          <a:ln w="12700">
+            <a:solidFill>
+              <a:srgbClr val="E6EBE8"/>
+            </a:solidFill>
+          </a:ln>
+          <a:effectLst/>
+        </p:spPr>
+        <p:style>
+          <a:lnRef idx="1">
+            <a:schemeClr val="accent1"/>
+          </a:lnRef>
+          <a:fillRef idx="3">
+            <a:schemeClr val="accent1"/>
+          </a:fillRef>
+          <a:effectRef idx="2">
+            <a:schemeClr val="accent1"/>
+          </a:effectRef>
+          <a:fontRef idx="minor">
+            <a:schemeClr val="lt1"/>
+          </a:fontRef>
+        </p:style>
+        <p:txBody>
+          <a:bodyPr rtlCol="0" anchor="ctr"/>
+          <a:lstStyle/>
+          <a:p>
+            <a:pPr algn="ctr"/>
+          </a:p>
+        </p:txBody>
+      </p:sp>
+      <p:sp>
+        <p:nvSpPr>
+          <p:cNvPr id="7" name="Rectangle 6"/>
+          <p:cNvSpPr/>
+          <p:nvPr/>
+        </p:nvSpPr>
+        <p:spPr>
+          <a:xfrm>
+            <a:off x="640080" y="6455664"/>
+            <a:ext cx="10908792" cy="9144"/>
+          </a:xfrm>
+          <a:prstGeom prst="rect">
+            <a:avLst/>
+          </a:prstGeom>
+          <a:solidFill>
+            <a:srgbClr val="E6EBE8"/>
+          </a:solidFill>
+          <a:ln>
+            <a:noFill/>
+          </a:ln>
+          <a:effectLst/>
+        </p:spPr>
+        <p:style>
+          <a:lnRef idx="1">
+            <a:schemeClr val="accent1"/>
+          </a:lnRef>
+          <a:fillRef idx="3">
+            <a:schemeClr val="accent1"/>
+          </a:fillRef>
+          <a:effectRef idx="2">
+            <a:schemeClr val="accent1"/>
+          </a:effectRef>
+          <a:fontRef idx="minor">
+            <a:schemeClr val="lt1"/>
+          </a:fontRef>
+        </p:style>
+        <p:txBody>
+          <a:bodyPr rtlCol="0" anchor="ctr"/>
+          <a:lstStyle/>
+          <a:p>
+            <a:pPr algn="ctr"/>
+          </a:p>
+        </p:txBody>
+      </p:sp>
+      <p:sp>
+        <p:nvSpPr>
+          <p:cNvPr id="8" name="TextBox 7"/>
+          <p:cNvSpPr txBox="1"/>
+          <p:nvPr/>
+        </p:nvSpPr>
+        <p:spPr>
+          <a:xfrm>
+            <a:off x="640080" y="6510528"/>
+            <a:ext cx="2743200" cy="274320"/>
+          </a:xfrm>
+          <a:prstGeom prst="rect">
+            <a:avLst/>
+          </a:prstGeom>
+          <a:noFill/>
+        </p:spPr>
+        <p:txBody>
+          <a:bodyPr wrap="square" anchor="t" lIns="0" rIns="0" tIns="0" bIns="0">
+            <a:spAutoFit/>
+          </a:bodyPr>
+          <a:lstStyle/>
+          <a:p>
+            <a:r>
+              <a:rPr sz="1100" b="1">
+                <a:solidFill>
+                  <a:srgbClr val="6B7B73"/>
+                </a:solidFill>
+                <a:latin typeface="Space Grotesk"/>
+              </a:rPr>
+              <a:t>want</a:t>
+            </a:r>
+            <a:r>
+              <a:rPr sz="1100" b="1">
+                <a:solidFill>
+                  <a:srgbClr val="1F7A57"/>
+                </a:solidFill>
+                <a:latin typeface="Space Grotesk"/>
+              </a:rPr>
+              <a:t>hat</a:t>
+            </a:r>
+          </a:p>
+        </p:txBody>
+      </p:sp>
+      <p:sp>
+        <p:nvSpPr>
+          <p:cNvPr id="9" name="TextBox 8"/>
+          <p:cNvSpPr txBox="1"/>
+          <p:nvPr/>
+        </p:nvSpPr>
+        <p:spPr>
+          <a:xfrm>
+            <a:off x="10607040" y="6510528"/>
+            <a:ext cx="941832" cy="274320"/>
+          </a:xfrm>
+          <a:prstGeom prst="rect">
+            <a:avLst/>
+          </a:prstGeom>
+          <a:noFill/>
+        </p:spPr>
+        <p:txBody>
+          <a:bodyPr wrap="square" anchor="t" lIns="0" rIns="0" tIns="0" bIns="0">
+            <a:spAutoFit/>
+          </a:bodyPr>
+          <a:lstStyle/>
+          <a:p>
+            <a:pPr algn="r"/>
+            <a:r>
+              <a:rPr sz="1000" b="0">
+                <a:solidFill>
+                  <a:srgbClr val="8A968F"/>
+                </a:solidFill>
+                <a:latin typeface="Space Mono"/>
+              </a:rPr>
+              <a:t>10</a:t>
+            </a:r>
+          </a:p>
+        </p:txBody>
+      </p:sp>
+      <p:sp>
+        <p:nvSpPr>
+          <p:cNvPr id="10" name="TextBox 9"/>
+          <p:cNvSpPr txBox="1"/>
+          <p:nvPr/>
+        </p:nvSpPr>
+        <p:spPr>
+          <a:xfrm>
+            <a:off x="658368" y="1783080"/>
+            <a:ext cx="3063240" cy="4480560"/>
+          </a:xfrm>
+          <a:prstGeom prst="rect">
+            <a:avLst/>
+          </a:prstGeom>
+          <a:noFill/>
+        </p:spPr>
+        <p:txBody>
+          <a:bodyPr wrap="square">
+            <a:spAutoFit/>
+          </a:bodyPr>
+          <a:lstStyle/>
+          <a:p>
+            <a:r>
+              <a:rPr sz="1200" b="0">
+                <a:solidFill>
+                  <a:srgbClr val="15201C"/>
+                </a:solidFill>
+                <a:latin typeface="Hanken Grotesk"/>
+              </a:rPr>
+              <a:t>-  SPA is served from S3 via CloudFront.</a:t>
+            </a:r>
+          </a:p>
+          <a:p>
+            <a:r>
+              <a:rPr sz="1200" b="0">
+                <a:solidFill>
+                  <a:srgbClr val="15201C"/>
+                </a:solidFill>
+                <a:latin typeface="Hanken Grotesk"/>
+              </a:rPr>
+              <a:t>-  Cognito-native authentication at the application level.</a:t>
+            </a:r>
+          </a:p>
+          <a:p>
+            <a:r>
+              <a:rPr sz="1200" b="0">
+                <a:solidFill>
+                  <a:srgbClr val="15201C"/>
+                </a:solidFill>
+                <a:latin typeface="Hanken Grotesk"/>
+              </a:rPr>
+              <a:t>-  The retailer link is created ONCE per product (cache; linkgen is the sole writer).</a:t>
+            </a:r>
+          </a:p>
+        </p:txBody>
+      </p:sp>
+    </p:spTree>
+  </p:cSld>
+  <p:clrMapOvr>
+    <a:masterClrMapping/>
+  </p:clrMapOvr>
+</p:sld>
+</file>
+
 <file path=ppt/slides/slide3.xml><?xml version="1.0" encoding="utf-8"?>
 <p:sld xmlns:a="http://schemas.openxmlformats.org/drawingml/2006/main" xmlns:p="http://schemas.openxmlformats.org/presentationml/2006/main" xmlns:r="http://schemas.openxmlformats.org/officeDocument/2006/relationships">
   <p:cSld>
@@ -20678,6 +21604,2811 @@
                 <a:latin typeface="Space Mono"/>
               </a:rPr>
               <a:t>3</a:t>
+            </a:r>
+          </a:p>
+        </p:txBody>
+      </p:sp>
+    </p:spTree>
+  </p:cSld>
+  <p:clrMapOvr>
+    <a:masterClrMapping/>
+  </p:clrMapOvr>
+</p:sld>
+</file>
+
+<file path=ppt/slides/slide30.xml><?xml version="1.0" encoding="utf-8"?>
+<p:sld xmlns:a="http://schemas.openxmlformats.org/drawingml/2006/main" xmlns:p="http://schemas.openxmlformats.org/presentationml/2006/main" xmlns:r="http://schemas.openxmlformats.org/officeDocument/2006/relationships">
+  <p:cSld>
+    <p:spTree>
+      <p:nvGrpSpPr>
+        <p:cNvPr id="1" name=""/>
+        <p:cNvGrpSpPr/>
+        <p:nvPr/>
+      </p:nvGrpSpPr>
+      <p:grpSpPr/>
+      <p:sp>
+        <p:nvSpPr>
+          <p:cNvPr id="2" name="TextBox 1"/>
+          <p:cNvSpPr txBox="1"/>
+          <p:nvPr/>
+        </p:nvSpPr>
+        <p:spPr>
+          <a:xfrm>
+            <a:off x="10195560" y="256032"/>
+            <a:ext cx="1371600" cy="1005840"/>
+          </a:xfrm>
+          <a:prstGeom prst="rect">
+            <a:avLst/>
+          </a:prstGeom>
+          <a:noFill/>
+        </p:spPr>
+        <p:txBody>
+          <a:bodyPr wrap="square" anchor="t" lIns="0" rIns="0" tIns="0" bIns="0">
+            <a:spAutoFit/>
+          </a:bodyPr>
+          <a:lstStyle/>
+          <a:p>
+            <a:pPr algn="r"/>
+            <a:r>
+              <a:rPr sz="4600" b="1">
+                <a:solidFill>
+                  <a:srgbClr val="DCE5E0"/>
+                </a:solidFill>
+                <a:latin typeface="Space Grotesk"/>
+              </a:rPr>
+              <a:t>11</a:t>
+            </a:r>
+          </a:p>
+        </p:txBody>
+      </p:sp>
+      <p:sp>
+        <p:nvSpPr>
+          <p:cNvPr id="3" name="TextBox 2"/>
+          <p:cNvSpPr txBox="1"/>
+          <p:nvPr/>
+        </p:nvSpPr>
+        <p:spPr>
+          <a:xfrm>
+            <a:off x="640080" y="420624"/>
+            <a:ext cx="9418320" cy="292608"/>
+          </a:xfrm>
+          <a:prstGeom prst="rect">
+            <a:avLst/>
+          </a:prstGeom>
+          <a:noFill/>
+        </p:spPr>
+        <p:txBody>
+          <a:bodyPr wrap="square" anchor="t" lIns="0" rIns="0" tIns="0" bIns="0">
+            <a:spAutoFit/>
+          </a:bodyPr>
+          <a:lstStyle/>
+          <a:p>
+            <a:r>
+              <a:rPr sz="1150" b="1">
+                <a:solidFill>
+                  <a:srgbClr val="1F7A57"/>
+                </a:solidFill>
+                <a:latin typeface="Space Mono"/>
+              </a:rPr>
+              <a:t>ENGINEERING</a:t>
+            </a:r>
+          </a:p>
+        </p:txBody>
+      </p:sp>
+      <p:sp>
+        <p:nvSpPr>
+          <p:cNvPr id="4" name="TextBox 3"/>
+          <p:cNvSpPr txBox="1"/>
+          <p:nvPr/>
+        </p:nvSpPr>
+        <p:spPr>
+          <a:xfrm>
+            <a:off x="621792" y="731520"/>
+            <a:ext cx="9509760" cy="868680"/>
+          </a:xfrm>
+          <a:prstGeom prst="rect">
+            <a:avLst/>
+          </a:prstGeom>
+          <a:noFill/>
+        </p:spPr>
+        <p:txBody>
+          <a:bodyPr wrap="square" anchor="t" lIns="0" rIns="0" tIns="0" bIns="0">
+            <a:spAutoFit/>
+          </a:bodyPr>
+          <a:lstStyle/>
+          <a:p>
+            <a:r>
+              <a:rPr sz="2700" b="1">
+                <a:solidFill>
+                  <a:srgbClr val="15201C"/>
+                </a:solidFill>
+                <a:latin typeface="Space Grotesk"/>
+              </a:rPr>
+              <a:t>Architecture UC2 — the recommendation is shared</a:t>
+            </a:r>
+          </a:p>
+        </p:txBody>
+      </p:sp>
+      <p:sp>
+        <p:nvSpPr>
+          <p:cNvPr id="5" name="Rounded Rectangle 4"/>
+          <p:cNvSpPr/>
+          <p:nvPr/>
+        </p:nvSpPr>
+        <p:spPr>
+          <a:xfrm>
+            <a:off x="3886200" y="1600200"/>
+            <a:ext cx="7653527" cy="4709160"/>
+          </a:xfrm>
+          <a:prstGeom prst="roundRect">
+            <a:avLst>
+              <a:gd name="adj" fmla="val 3000"/>
+            </a:avLst>
+          </a:prstGeom>
+          <a:solidFill>
+            <a:srgbClr val="FFFFFF"/>
+          </a:solidFill>
+          <a:ln w="12700">
+            <a:solidFill>
+              <a:srgbClr val="E6EBE8"/>
+            </a:solidFill>
+          </a:ln>
+          <a:effectLst/>
+        </p:spPr>
+        <p:style>
+          <a:lnRef idx="1">
+            <a:schemeClr val="accent1"/>
+          </a:lnRef>
+          <a:fillRef idx="3">
+            <a:schemeClr val="accent1"/>
+          </a:fillRef>
+          <a:effectRef idx="2">
+            <a:schemeClr val="accent1"/>
+          </a:effectRef>
+          <a:fontRef idx="minor">
+            <a:schemeClr val="lt1"/>
+          </a:fontRef>
+        </p:style>
+        <p:txBody>
+          <a:bodyPr rtlCol="0" anchor="ctr"/>
+          <a:lstStyle/>
+          <a:p>
+            <a:pPr algn="ctr"/>
+          </a:p>
+        </p:txBody>
+      </p:sp>
+      <p:sp>
+        <p:nvSpPr>
+          <p:cNvPr id="7" name="Rectangle 6"/>
+          <p:cNvSpPr/>
+          <p:nvPr/>
+        </p:nvSpPr>
+        <p:spPr>
+          <a:xfrm>
+            <a:off x="640080" y="6455664"/>
+            <a:ext cx="10908792" cy="9144"/>
+          </a:xfrm>
+          <a:prstGeom prst="rect">
+            <a:avLst/>
+          </a:prstGeom>
+          <a:solidFill>
+            <a:srgbClr val="E6EBE8"/>
+          </a:solidFill>
+          <a:ln>
+            <a:noFill/>
+          </a:ln>
+          <a:effectLst/>
+        </p:spPr>
+        <p:style>
+          <a:lnRef idx="1">
+            <a:schemeClr val="accent1"/>
+          </a:lnRef>
+          <a:fillRef idx="3">
+            <a:schemeClr val="accent1"/>
+          </a:fillRef>
+          <a:effectRef idx="2">
+            <a:schemeClr val="accent1"/>
+          </a:effectRef>
+          <a:fontRef idx="minor">
+            <a:schemeClr val="lt1"/>
+          </a:fontRef>
+        </p:style>
+        <p:txBody>
+          <a:bodyPr rtlCol="0" anchor="ctr"/>
+          <a:lstStyle/>
+          <a:p>
+            <a:pPr algn="ctr"/>
+          </a:p>
+        </p:txBody>
+      </p:sp>
+      <p:sp>
+        <p:nvSpPr>
+          <p:cNvPr id="8" name="TextBox 7"/>
+          <p:cNvSpPr txBox="1"/>
+          <p:nvPr/>
+        </p:nvSpPr>
+        <p:spPr>
+          <a:xfrm>
+            <a:off x="640080" y="6510528"/>
+            <a:ext cx="2743200" cy="274320"/>
+          </a:xfrm>
+          <a:prstGeom prst="rect">
+            <a:avLst/>
+          </a:prstGeom>
+          <a:noFill/>
+        </p:spPr>
+        <p:txBody>
+          <a:bodyPr wrap="square" anchor="t" lIns="0" rIns="0" tIns="0" bIns="0">
+            <a:spAutoFit/>
+          </a:bodyPr>
+          <a:lstStyle/>
+          <a:p>
+            <a:r>
+              <a:rPr sz="1100" b="1">
+                <a:solidFill>
+                  <a:srgbClr val="6B7B73"/>
+                </a:solidFill>
+                <a:latin typeface="Space Grotesk"/>
+              </a:rPr>
+              <a:t>want</a:t>
+            </a:r>
+            <a:r>
+              <a:rPr sz="1100" b="1">
+                <a:solidFill>
+                  <a:srgbClr val="1F7A57"/>
+                </a:solidFill>
+                <a:latin typeface="Space Grotesk"/>
+              </a:rPr>
+              <a:t>hat</a:t>
+            </a:r>
+          </a:p>
+        </p:txBody>
+      </p:sp>
+      <p:sp>
+        <p:nvSpPr>
+          <p:cNvPr id="9" name="TextBox 8"/>
+          <p:cNvSpPr txBox="1"/>
+          <p:nvPr/>
+        </p:nvSpPr>
+        <p:spPr>
+          <a:xfrm>
+            <a:off x="10607040" y="6510528"/>
+            <a:ext cx="941832" cy="274320"/>
+          </a:xfrm>
+          <a:prstGeom prst="rect">
+            <a:avLst/>
+          </a:prstGeom>
+          <a:noFill/>
+        </p:spPr>
+        <p:txBody>
+          <a:bodyPr wrap="square" anchor="t" lIns="0" rIns="0" tIns="0" bIns="0">
+            <a:spAutoFit/>
+          </a:bodyPr>
+          <a:lstStyle/>
+          <a:p>
+            <a:pPr algn="r"/>
+            <a:r>
+              <a:rPr sz="1000" b="0">
+                <a:solidFill>
+                  <a:srgbClr val="8A968F"/>
+                </a:solidFill>
+                <a:latin typeface="Space Mono"/>
+              </a:rPr>
+              <a:t>11</a:t>
+            </a:r>
+          </a:p>
+        </p:txBody>
+      </p:sp>
+      <p:sp>
+        <p:nvSpPr>
+          <p:cNvPr id="10" name="TextBox 9"/>
+          <p:cNvSpPr txBox="1"/>
+          <p:nvPr/>
+        </p:nvSpPr>
+        <p:spPr>
+          <a:xfrm>
+            <a:off x="658368" y="1783080"/>
+            <a:ext cx="3063240" cy="4480560"/>
+          </a:xfrm>
+          <a:prstGeom prst="rect">
+            <a:avLst/>
+          </a:prstGeom>
+          <a:noFill/>
+        </p:spPr>
+        <p:txBody>
+          <a:bodyPr wrap="square">
+            <a:spAutoFit/>
+          </a:bodyPr>
+          <a:lstStyle/>
+          <a:p>
+            <a:r>
+              <a:rPr sz="1200" b="0">
+                <a:solidFill>
+                  <a:srgbClr val="15201C"/>
+                </a:solidFill>
+                <a:latin typeface="Hanken Grotesk"/>
+              </a:rPr>
+              <a:t>-  This is the hot path.</a:t>
+            </a:r>
+          </a:p>
+          <a:p>
+            <a:r>
+              <a:rPr sz="1200" b="0">
+                <a:solidFill>
+                  <a:srgbClr val="15201C"/>
+                </a:solidFill>
+                <a:latin typeface="Hanken Grotesk"/>
+              </a:rPr>
+              <a:t>-  The recommendation page is server-rendered and cached on CloudFront (60 s, origin-controlled).</a:t>
+            </a:r>
+          </a:p>
+          <a:p>
+            <a:r>
+              <a:rPr sz="1200" b="0">
+                <a:solidFill>
+                  <a:srgbClr val="15201C"/>
+                </a:solidFill>
+                <a:latin typeface="Hanken Grotesk"/>
+              </a:rPr>
+              <a:t>-  The TS landing app boots on the page for auth / registration and redirect-link generation.</a:t>
+            </a:r>
+          </a:p>
+        </p:txBody>
+      </p:sp>
+    </p:spTree>
+  </p:cSld>
+  <p:clrMapOvr>
+    <a:masterClrMapping/>
+  </p:clrMapOvr>
+</p:sld>
+</file>
+
+<file path=ppt/slides/slide31.xml><?xml version="1.0" encoding="utf-8"?>
+<p:sld xmlns:a="http://schemas.openxmlformats.org/drawingml/2006/main" xmlns:p="http://schemas.openxmlformats.org/presentationml/2006/main" xmlns:r="http://schemas.openxmlformats.org/officeDocument/2006/relationships">
+  <p:cSld>
+    <p:spTree>
+      <p:nvGrpSpPr>
+        <p:cNvPr id="1" name=""/>
+        <p:cNvGrpSpPr/>
+        <p:nvPr/>
+      </p:nvGrpSpPr>
+      <p:grpSpPr/>
+      <p:sp>
+        <p:nvSpPr>
+          <p:cNvPr id="2" name="TextBox 1"/>
+          <p:cNvSpPr txBox="1"/>
+          <p:nvPr/>
+        </p:nvSpPr>
+        <p:spPr>
+          <a:xfrm>
+            <a:off x="10195560" y="256032"/>
+            <a:ext cx="1371600" cy="1005840"/>
+          </a:xfrm>
+          <a:prstGeom prst="rect">
+            <a:avLst/>
+          </a:prstGeom>
+          <a:noFill/>
+        </p:spPr>
+        <p:txBody>
+          <a:bodyPr wrap="square" anchor="t" lIns="0" rIns="0" tIns="0" bIns="0">
+            <a:spAutoFit/>
+          </a:bodyPr>
+          <a:lstStyle/>
+          <a:p>
+            <a:pPr algn="r"/>
+            <a:r>
+              <a:rPr sz="4600" b="1">
+                <a:solidFill>
+                  <a:srgbClr val="DCE5E0"/>
+                </a:solidFill>
+                <a:latin typeface="Space Grotesk"/>
+              </a:rPr>
+              <a:t>12</a:t>
+            </a:r>
+          </a:p>
+        </p:txBody>
+      </p:sp>
+      <p:sp>
+        <p:nvSpPr>
+          <p:cNvPr id="3" name="TextBox 2"/>
+          <p:cNvSpPr txBox="1"/>
+          <p:nvPr/>
+        </p:nvSpPr>
+        <p:spPr>
+          <a:xfrm>
+            <a:off x="640080" y="420624"/>
+            <a:ext cx="9418320" cy="292608"/>
+          </a:xfrm>
+          <a:prstGeom prst="rect">
+            <a:avLst/>
+          </a:prstGeom>
+          <a:noFill/>
+        </p:spPr>
+        <p:txBody>
+          <a:bodyPr wrap="square" anchor="t" lIns="0" rIns="0" tIns="0" bIns="0">
+            <a:spAutoFit/>
+          </a:bodyPr>
+          <a:lstStyle/>
+          <a:p>
+            <a:r>
+              <a:rPr sz="1150" b="1">
+                <a:solidFill>
+                  <a:srgbClr val="1F7A57"/>
+                </a:solidFill>
+                <a:latin typeface="Space Mono"/>
+              </a:rPr>
+              <a:t>ENGINEERING</a:t>
+            </a:r>
+          </a:p>
+        </p:txBody>
+      </p:sp>
+      <p:sp>
+        <p:nvSpPr>
+          <p:cNvPr id="4" name="TextBox 3"/>
+          <p:cNvSpPr txBox="1"/>
+          <p:nvPr/>
+        </p:nvSpPr>
+        <p:spPr>
+          <a:xfrm>
+            <a:off x="621792" y="731520"/>
+            <a:ext cx="9509760" cy="868680"/>
+          </a:xfrm>
+          <a:prstGeom prst="rect">
+            <a:avLst/>
+          </a:prstGeom>
+          <a:noFill/>
+        </p:spPr>
+        <p:txBody>
+          <a:bodyPr wrap="square" anchor="t" lIns="0" rIns="0" tIns="0" bIns="0">
+            <a:spAutoFit/>
+          </a:bodyPr>
+          <a:lstStyle/>
+          <a:p>
+            <a:r>
+              <a:rPr sz="2700" b="1">
+                <a:solidFill>
+                  <a:srgbClr val="15201C"/>
+                </a:solidFill>
+                <a:latin typeface="Space Grotesk"/>
+              </a:rPr>
+              <a:t>Architecture UC3 — registration, login, guest + redirect</a:t>
+            </a:r>
+          </a:p>
+        </p:txBody>
+      </p:sp>
+      <p:sp>
+        <p:nvSpPr>
+          <p:cNvPr id="5" name="Rounded Rectangle 4"/>
+          <p:cNvSpPr/>
+          <p:nvPr/>
+        </p:nvSpPr>
+        <p:spPr>
+          <a:xfrm>
+            <a:off x="3886200" y="1600200"/>
+            <a:ext cx="7653527" cy="4709160"/>
+          </a:xfrm>
+          <a:prstGeom prst="roundRect">
+            <a:avLst>
+              <a:gd name="adj" fmla="val 3000"/>
+            </a:avLst>
+          </a:prstGeom>
+          <a:solidFill>
+            <a:srgbClr val="FFFFFF"/>
+          </a:solidFill>
+          <a:ln w="12700">
+            <a:solidFill>
+              <a:srgbClr val="E6EBE8"/>
+            </a:solidFill>
+          </a:ln>
+          <a:effectLst/>
+        </p:spPr>
+        <p:style>
+          <a:lnRef idx="1">
+            <a:schemeClr val="accent1"/>
+          </a:lnRef>
+          <a:fillRef idx="3">
+            <a:schemeClr val="accent1"/>
+          </a:fillRef>
+          <a:effectRef idx="2">
+            <a:schemeClr val="accent1"/>
+          </a:effectRef>
+          <a:fontRef idx="minor">
+            <a:schemeClr val="lt1"/>
+          </a:fontRef>
+        </p:style>
+        <p:txBody>
+          <a:bodyPr rtlCol="0" anchor="ctr"/>
+          <a:lstStyle/>
+          <a:p>
+            <a:pPr algn="ctr"/>
+          </a:p>
+        </p:txBody>
+      </p:sp>
+      <p:sp>
+        <p:nvSpPr>
+          <p:cNvPr id="7" name="Rectangle 6"/>
+          <p:cNvSpPr/>
+          <p:nvPr/>
+        </p:nvSpPr>
+        <p:spPr>
+          <a:xfrm>
+            <a:off x="640080" y="6455664"/>
+            <a:ext cx="10908792" cy="9144"/>
+          </a:xfrm>
+          <a:prstGeom prst="rect">
+            <a:avLst/>
+          </a:prstGeom>
+          <a:solidFill>
+            <a:srgbClr val="E6EBE8"/>
+          </a:solidFill>
+          <a:ln>
+            <a:noFill/>
+          </a:ln>
+          <a:effectLst/>
+        </p:spPr>
+        <p:style>
+          <a:lnRef idx="1">
+            <a:schemeClr val="accent1"/>
+          </a:lnRef>
+          <a:fillRef idx="3">
+            <a:schemeClr val="accent1"/>
+          </a:fillRef>
+          <a:effectRef idx="2">
+            <a:schemeClr val="accent1"/>
+          </a:effectRef>
+          <a:fontRef idx="minor">
+            <a:schemeClr val="lt1"/>
+          </a:fontRef>
+        </p:style>
+        <p:txBody>
+          <a:bodyPr rtlCol="0" anchor="ctr"/>
+          <a:lstStyle/>
+          <a:p>
+            <a:pPr algn="ctr"/>
+          </a:p>
+        </p:txBody>
+      </p:sp>
+      <p:sp>
+        <p:nvSpPr>
+          <p:cNvPr id="8" name="TextBox 7"/>
+          <p:cNvSpPr txBox="1"/>
+          <p:nvPr/>
+        </p:nvSpPr>
+        <p:spPr>
+          <a:xfrm>
+            <a:off x="640080" y="6510528"/>
+            <a:ext cx="2743200" cy="274320"/>
+          </a:xfrm>
+          <a:prstGeom prst="rect">
+            <a:avLst/>
+          </a:prstGeom>
+          <a:noFill/>
+        </p:spPr>
+        <p:txBody>
+          <a:bodyPr wrap="square" anchor="t" lIns="0" rIns="0" tIns="0" bIns="0">
+            <a:spAutoFit/>
+          </a:bodyPr>
+          <a:lstStyle/>
+          <a:p>
+            <a:r>
+              <a:rPr sz="1100" b="1">
+                <a:solidFill>
+                  <a:srgbClr val="6B7B73"/>
+                </a:solidFill>
+                <a:latin typeface="Space Grotesk"/>
+              </a:rPr>
+              <a:t>want</a:t>
+            </a:r>
+            <a:r>
+              <a:rPr sz="1100" b="1">
+                <a:solidFill>
+                  <a:srgbClr val="1F7A57"/>
+                </a:solidFill>
+                <a:latin typeface="Space Grotesk"/>
+              </a:rPr>
+              <a:t>hat</a:t>
+            </a:r>
+          </a:p>
+        </p:txBody>
+      </p:sp>
+      <p:sp>
+        <p:nvSpPr>
+          <p:cNvPr id="9" name="TextBox 8"/>
+          <p:cNvSpPr txBox="1"/>
+          <p:nvPr/>
+        </p:nvSpPr>
+        <p:spPr>
+          <a:xfrm>
+            <a:off x="10607040" y="6510528"/>
+            <a:ext cx="941832" cy="274320"/>
+          </a:xfrm>
+          <a:prstGeom prst="rect">
+            <a:avLst/>
+          </a:prstGeom>
+          <a:noFill/>
+        </p:spPr>
+        <p:txBody>
+          <a:bodyPr wrap="square" anchor="t" lIns="0" rIns="0" tIns="0" bIns="0">
+            <a:spAutoFit/>
+          </a:bodyPr>
+          <a:lstStyle/>
+          <a:p>
+            <a:pPr algn="r"/>
+            <a:r>
+              <a:rPr sz="1000" b="0">
+                <a:solidFill>
+                  <a:srgbClr val="8A968F"/>
+                </a:solidFill>
+                <a:latin typeface="Space Mono"/>
+              </a:rPr>
+              <a:t>12</a:t>
+            </a:r>
+          </a:p>
+        </p:txBody>
+      </p:sp>
+      <p:sp>
+        <p:nvSpPr>
+          <p:cNvPr id="10" name="TextBox 9"/>
+          <p:cNvSpPr txBox="1"/>
+          <p:nvPr/>
+        </p:nvSpPr>
+        <p:spPr>
+          <a:xfrm>
+            <a:off x="658368" y="1783080"/>
+            <a:ext cx="3063240" cy="4480560"/>
+          </a:xfrm>
+          <a:prstGeom prst="rect">
+            <a:avLst/>
+          </a:prstGeom>
+          <a:noFill/>
+        </p:spPr>
+        <p:txBody>
+          <a:bodyPr wrap="square">
+            <a:spAutoFit/>
+          </a:bodyPr>
+          <a:lstStyle/>
+          <a:p>
+            <a:r>
+              <a:rPr sz="1200" b="0">
+                <a:solidFill>
+                  <a:srgbClr val="15201C"/>
+                </a:solidFill>
+                <a:latin typeface="Hanken Grotesk"/>
+              </a:rPr>
+              <a:t>-  Every registration appends a hash-chained audit row — each row carries the previous row's hash.</a:t>
+            </a:r>
+          </a:p>
+          <a:p>
+            <a:r>
+              <a:rPr sz="1200" b="0">
+                <a:solidFill>
+                  <a:srgbClr val="15201C"/>
+                </a:solidFill>
+                <a:latin typeface="Hanken Grotesk"/>
+              </a:rPr>
+              <a:t>-  audit_writer is granted EXECUTE on the procedure ONLY.</a:t>
+            </a:r>
+          </a:p>
+          <a:p>
+            <a:r>
+              <a:rPr sz="1200" b="0">
+                <a:solidFill>
+                  <a:srgbClr val="15201C"/>
+                </a:solidFill>
+                <a:latin typeface="Hanken Grotesk"/>
+              </a:rPr>
+              <a:t>-  The stored procedure serializes concurrent appends (advisory lock).</a:t>
+            </a:r>
+          </a:p>
+        </p:txBody>
+      </p:sp>
+    </p:spTree>
+  </p:cSld>
+  <p:clrMapOvr>
+    <a:masterClrMapping/>
+  </p:clrMapOvr>
+</p:sld>
+</file>
+
+<file path=ppt/slides/slide32.xml><?xml version="1.0" encoding="utf-8"?>
+<p:sld xmlns:a="http://schemas.openxmlformats.org/drawingml/2006/main" xmlns:p="http://schemas.openxmlformats.org/presentationml/2006/main" xmlns:r="http://schemas.openxmlformats.org/officeDocument/2006/relationships">
+  <p:cSld>
+    <p:spTree>
+      <p:nvGrpSpPr>
+        <p:cNvPr id="1" name=""/>
+        <p:cNvGrpSpPr/>
+        <p:nvPr/>
+      </p:nvGrpSpPr>
+      <p:grpSpPr/>
+      <p:sp>
+        <p:nvSpPr>
+          <p:cNvPr id="2" name="TextBox 1"/>
+          <p:cNvSpPr txBox="1"/>
+          <p:nvPr/>
+        </p:nvSpPr>
+        <p:spPr>
+          <a:xfrm>
+            <a:off x="10195560" y="256032"/>
+            <a:ext cx="1371600" cy="1005840"/>
+          </a:xfrm>
+          <a:prstGeom prst="rect">
+            <a:avLst/>
+          </a:prstGeom>
+          <a:noFill/>
+        </p:spPr>
+        <p:txBody>
+          <a:bodyPr wrap="square" anchor="t" lIns="0" rIns="0" tIns="0" bIns="0">
+            <a:spAutoFit/>
+          </a:bodyPr>
+          <a:lstStyle/>
+          <a:p>
+            <a:pPr algn="r"/>
+            <a:r>
+              <a:rPr sz="4600" b="1">
+                <a:solidFill>
+                  <a:srgbClr val="DCE5E0"/>
+                </a:solidFill>
+                <a:latin typeface="Space Grotesk"/>
+              </a:rPr>
+              <a:t>13</a:t>
+            </a:r>
+          </a:p>
+        </p:txBody>
+      </p:sp>
+      <p:sp>
+        <p:nvSpPr>
+          <p:cNvPr id="3" name="TextBox 2"/>
+          <p:cNvSpPr txBox="1"/>
+          <p:nvPr/>
+        </p:nvSpPr>
+        <p:spPr>
+          <a:xfrm>
+            <a:off x="640080" y="420624"/>
+            <a:ext cx="9418320" cy="292608"/>
+          </a:xfrm>
+          <a:prstGeom prst="rect">
+            <a:avLst/>
+          </a:prstGeom>
+          <a:noFill/>
+        </p:spPr>
+        <p:txBody>
+          <a:bodyPr wrap="square" anchor="t" lIns="0" rIns="0" tIns="0" bIns="0">
+            <a:spAutoFit/>
+          </a:bodyPr>
+          <a:lstStyle/>
+          <a:p>
+            <a:r>
+              <a:rPr sz="1150" b="1">
+                <a:solidFill>
+                  <a:srgbClr val="1F7A57"/>
+                </a:solidFill>
+                <a:latin typeface="Space Mono"/>
+              </a:rPr>
+              <a:t>ENGINEERING</a:t>
+            </a:r>
+          </a:p>
+        </p:txBody>
+      </p:sp>
+      <p:sp>
+        <p:nvSpPr>
+          <p:cNvPr id="4" name="TextBox 3"/>
+          <p:cNvSpPr txBox="1"/>
+          <p:nvPr/>
+        </p:nvSpPr>
+        <p:spPr>
+          <a:xfrm>
+            <a:off x="621792" y="731520"/>
+            <a:ext cx="9509760" cy="868680"/>
+          </a:xfrm>
+          <a:prstGeom prst="rect">
+            <a:avLst/>
+          </a:prstGeom>
+          <a:noFill/>
+        </p:spPr>
+        <p:txBody>
+          <a:bodyPr wrap="square" anchor="t" lIns="0" rIns="0" tIns="0" bIns="0">
+            <a:spAutoFit/>
+          </a:bodyPr>
+          <a:lstStyle/>
+          <a:p>
+            <a:r>
+              <a:rPr sz="2700" b="1">
+                <a:solidFill>
+                  <a:srgbClr val="15201C"/>
+                </a:solidFill>
+                <a:latin typeface="Space Grotesk"/>
+              </a:rPr>
+              <a:t>Architecture UC4 — settlement pulled in the background</a:t>
+            </a:r>
+          </a:p>
+        </p:txBody>
+      </p:sp>
+      <p:sp>
+        <p:nvSpPr>
+          <p:cNvPr id="5" name="Rounded Rectangle 4"/>
+          <p:cNvSpPr/>
+          <p:nvPr/>
+        </p:nvSpPr>
+        <p:spPr>
+          <a:xfrm>
+            <a:off x="3886200" y="1600200"/>
+            <a:ext cx="7653527" cy="4709160"/>
+          </a:xfrm>
+          <a:prstGeom prst="roundRect">
+            <a:avLst>
+              <a:gd name="adj" fmla="val 3000"/>
+            </a:avLst>
+          </a:prstGeom>
+          <a:solidFill>
+            <a:srgbClr val="FFFFFF"/>
+          </a:solidFill>
+          <a:ln w="12700">
+            <a:solidFill>
+              <a:srgbClr val="E6EBE8"/>
+            </a:solidFill>
+          </a:ln>
+          <a:effectLst/>
+        </p:spPr>
+        <p:style>
+          <a:lnRef idx="1">
+            <a:schemeClr val="accent1"/>
+          </a:lnRef>
+          <a:fillRef idx="3">
+            <a:schemeClr val="accent1"/>
+          </a:fillRef>
+          <a:effectRef idx="2">
+            <a:schemeClr val="accent1"/>
+          </a:effectRef>
+          <a:fontRef idx="minor">
+            <a:schemeClr val="lt1"/>
+          </a:fontRef>
+        </p:style>
+        <p:txBody>
+          <a:bodyPr rtlCol="0" anchor="ctr"/>
+          <a:lstStyle/>
+          <a:p>
+            <a:pPr algn="ctr"/>
+          </a:p>
+        </p:txBody>
+      </p:sp>
+      <p:sp>
+        <p:nvSpPr>
+          <p:cNvPr id="7" name="Rectangle 6"/>
+          <p:cNvSpPr/>
+          <p:nvPr/>
+        </p:nvSpPr>
+        <p:spPr>
+          <a:xfrm>
+            <a:off x="640080" y="6455664"/>
+            <a:ext cx="10908792" cy="9144"/>
+          </a:xfrm>
+          <a:prstGeom prst="rect">
+            <a:avLst/>
+          </a:prstGeom>
+          <a:solidFill>
+            <a:srgbClr val="E6EBE8"/>
+          </a:solidFill>
+          <a:ln>
+            <a:noFill/>
+          </a:ln>
+          <a:effectLst/>
+        </p:spPr>
+        <p:style>
+          <a:lnRef idx="1">
+            <a:schemeClr val="accent1"/>
+          </a:lnRef>
+          <a:fillRef idx="3">
+            <a:schemeClr val="accent1"/>
+          </a:fillRef>
+          <a:effectRef idx="2">
+            <a:schemeClr val="accent1"/>
+          </a:effectRef>
+          <a:fontRef idx="minor">
+            <a:schemeClr val="lt1"/>
+          </a:fontRef>
+        </p:style>
+        <p:txBody>
+          <a:bodyPr rtlCol="0" anchor="ctr"/>
+          <a:lstStyle/>
+          <a:p>
+            <a:pPr algn="ctr"/>
+          </a:p>
+        </p:txBody>
+      </p:sp>
+      <p:sp>
+        <p:nvSpPr>
+          <p:cNvPr id="8" name="TextBox 7"/>
+          <p:cNvSpPr txBox="1"/>
+          <p:nvPr/>
+        </p:nvSpPr>
+        <p:spPr>
+          <a:xfrm>
+            <a:off x="640080" y="6510528"/>
+            <a:ext cx="2743200" cy="274320"/>
+          </a:xfrm>
+          <a:prstGeom prst="rect">
+            <a:avLst/>
+          </a:prstGeom>
+          <a:noFill/>
+        </p:spPr>
+        <p:txBody>
+          <a:bodyPr wrap="square" anchor="t" lIns="0" rIns="0" tIns="0" bIns="0">
+            <a:spAutoFit/>
+          </a:bodyPr>
+          <a:lstStyle/>
+          <a:p>
+            <a:r>
+              <a:rPr sz="1100" b="1">
+                <a:solidFill>
+                  <a:srgbClr val="6B7B73"/>
+                </a:solidFill>
+                <a:latin typeface="Space Grotesk"/>
+              </a:rPr>
+              <a:t>want</a:t>
+            </a:r>
+            <a:r>
+              <a:rPr sz="1100" b="1">
+                <a:solidFill>
+                  <a:srgbClr val="1F7A57"/>
+                </a:solidFill>
+                <a:latin typeface="Space Grotesk"/>
+              </a:rPr>
+              <a:t>hat</a:t>
+            </a:r>
+          </a:p>
+        </p:txBody>
+      </p:sp>
+      <p:sp>
+        <p:nvSpPr>
+          <p:cNvPr id="9" name="TextBox 8"/>
+          <p:cNvSpPr txBox="1"/>
+          <p:nvPr/>
+        </p:nvSpPr>
+        <p:spPr>
+          <a:xfrm>
+            <a:off x="10607040" y="6510528"/>
+            <a:ext cx="941832" cy="274320"/>
+          </a:xfrm>
+          <a:prstGeom prst="rect">
+            <a:avLst/>
+          </a:prstGeom>
+          <a:noFill/>
+        </p:spPr>
+        <p:txBody>
+          <a:bodyPr wrap="square" anchor="t" lIns="0" rIns="0" tIns="0" bIns="0">
+            <a:spAutoFit/>
+          </a:bodyPr>
+          <a:lstStyle/>
+          <a:p>
+            <a:pPr algn="r"/>
+            <a:r>
+              <a:rPr sz="1000" b="0">
+                <a:solidFill>
+                  <a:srgbClr val="8A968F"/>
+                </a:solidFill>
+                <a:latin typeface="Space Mono"/>
+              </a:rPr>
+              <a:t>13</a:t>
+            </a:r>
+          </a:p>
+        </p:txBody>
+      </p:sp>
+      <p:sp>
+        <p:nvSpPr>
+          <p:cNvPr id="10" name="TextBox 9"/>
+          <p:cNvSpPr txBox="1"/>
+          <p:nvPr/>
+        </p:nvSpPr>
+        <p:spPr>
+          <a:xfrm>
+            <a:off x="658368" y="1783080"/>
+            <a:ext cx="3063240" cy="4480560"/>
+          </a:xfrm>
+          <a:prstGeom prst="rect">
+            <a:avLst/>
+          </a:prstGeom>
+          <a:noFill/>
+        </p:spPr>
+        <p:txBody>
+          <a:bodyPr wrap="square">
+            <a:spAutoFit/>
+          </a:bodyPr>
+          <a:lstStyle/>
+          <a:p>
+            <a:r>
+              <a:rPr sz="1200" b="0">
+                <a:solidFill>
+                  <a:srgbClr val="15201C"/>
+                </a:solidFill>
+                <a:latin typeface="Hanken Grotesk"/>
+              </a:rPr>
+              <a:t>-  Internal-only flow — the ONLY path that can append wallet entries (GRANT-enforced).</a:t>
+            </a:r>
+          </a:p>
+          <a:p>
+            <a:r>
+              <a:rPr sz="1200" b="0">
+                <a:solidFill>
+                  <a:srgbClr val="15201C"/>
+                </a:solidFill>
+                <a:latin typeface="Hanken Grotesk"/>
+              </a:rPr>
+              <a:t>-  Side use case: FX rates pulled from the exchange-rate provider.</a:t>
+            </a:r>
+          </a:p>
+        </p:txBody>
+      </p:sp>
+    </p:spTree>
+  </p:cSld>
+  <p:clrMapOvr>
+    <a:masterClrMapping/>
+  </p:clrMapOvr>
+</p:sld>
+</file>
+
+<file path=ppt/slides/slide33.xml><?xml version="1.0" encoding="utf-8"?>
+<p:sld xmlns:a="http://schemas.openxmlformats.org/drawingml/2006/main" xmlns:p="http://schemas.openxmlformats.org/presentationml/2006/main" xmlns:r="http://schemas.openxmlformats.org/officeDocument/2006/relationships">
+  <p:cSld>
+    <p:spTree>
+      <p:nvGrpSpPr>
+        <p:cNvPr id="1" name=""/>
+        <p:cNvGrpSpPr/>
+        <p:nvPr/>
+      </p:nvGrpSpPr>
+      <p:grpSpPr/>
+      <p:sp>
+        <p:nvSpPr>
+          <p:cNvPr id="2" name="TextBox 1"/>
+          <p:cNvSpPr txBox="1"/>
+          <p:nvPr/>
+        </p:nvSpPr>
+        <p:spPr>
+          <a:xfrm>
+            <a:off x="10195560" y="256032"/>
+            <a:ext cx="1371600" cy="1005840"/>
+          </a:xfrm>
+          <a:prstGeom prst="rect">
+            <a:avLst/>
+          </a:prstGeom>
+          <a:noFill/>
+        </p:spPr>
+        <p:txBody>
+          <a:bodyPr wrap="square" anchor="t" lIns="0" rIns="0" tIns="0" bIns="0">
+            <a:spAutoFit/>
+          </a:bodyPr>
+          <a:lstStyle/>
+          <a:p>
+            <a:pPr algn="r"/>
+            <a:r>
+              <a:rPr sz="4600" b="1">
+                <a:solidFill>
+                  <a:srgbClr val="DCE5E0"/>
+                </a:solidFill>
+                <a:latin typeface="Space Grotesk"/>
+              </a:rPr>
+              <a:t>14</a:t>
+            </a:r>
+          </a:p>
+        </p:txBody>
+      </p:sp>
+      <p:sp>
+        <p:nvSpPr>
+          <p:cNvPr id="3" name="TextBox 2"/>
+          <p:cNvSpPr txBox="1"/>
+          <p:nvPr/>
+        </p:nvSpPr>
+        <p:spPr>
+          <a:xfrm>
+            <a:off x="640080" y="420624"/>
+            <a:ext cx="9418320" cy="292608"/>
+          </a:xfrm>
+          <a:prstGeom prst="rect">
+            <a:avLst/>
+          </a:prstGeom>
+          <a:noFill/>
+        </p:spPr>
+        <p:txBody>
+          <a:bodyPr wrap="square" anchor="t" lIns="0" rIns="0" tIns="0" bIns="0">
+            <a:spAutoFit/>
+          </a:bodyPr>
+          <a:lstStyle/>
+          <a:p>
+            <a:r>
+              <a:rPr sz="1150" b="1">
+                <a:solidFill>
+                  <a:srgbClr val="1F7A57"/>
+                </a:solidFill>
+                <a:latin typeface="Space Mono"/>
+              </a:rPr>
+              <a:t>ENGINEERING</a:t>
+            </a:r>
+          </a:p>
+        </p:txBody>
+      </p:sp>
+      <p:sp>
+        <p:nvSpPr>
+          <p:cNvPr id="4" name="TextBox 3"/>
+          <p:cNvSpPr txBox="1"/>
+          <p:nvPr/>
+        </p:nvSpPr>
+        <p:spPr>
+          <a:xfrm>
+            <a:off x="621792" y="731520"/>
+            <a:ext cx="9509760" cy="868680"/>
+          </a:xfrm>
+          <a:prstGeom prst="rect">
+            <a:avLst/>
+          </a:prstGeom>
+          <a:noFill/>
+        </p:spPr>
+        <p:txBody>
+          <a:bodyPr wrap="square" anchor="t" lIns="0" rIns="0" tIns="0" bIns="0">
+            <a:spAutoFit/>
+          </a:bodyPr>
+          <a:lstStyle/>
+          <a:p>
+            <a:r>
+              <a:rPr sz="2700" b="1">
+                <a:solidFill>
+                  <a:srgbClr val="15201C"/>
+                </a:solidFill>
+                <a:latin typeface="Space Grotesk"/>
+              </a:rPr>
+              <a:t>Architecture UC5 — the member home page</a:t>
+            </a:r>
+          </a:p>
+        </p:txBody>
+      </p:sp>
+      <p:sp>
+        <p:nvSpPr>
+          <p:cNvPr id="5" name="Rounded Rectangle 4"/>
+          <p:cNvSpPr/>
+          <p:nvPr/>
+        </p:nvSpPr>
+        <p:spPr>
+          <a:xfrm>
+            <a:off x="3886200" y="1600200"/>
+            <a:ext cx="7653527" cy="4709160"/>
+          </a:xfrm>
+          <a:prstGeom prst="roundRect">
+            <a:avLst>
+              <a:gd name="adj" fmla="val 3000"/>
+            </a:avLst>
+          </a:prstGeom>
+          <a:solidFill>
+            <a:srgbClr val="FFFFFF"/>
+          </a:solidFill>
+          <a:ln w="12700">
+            <a:solidFill>
+              <a:srgbClr val="E6EBE8"/>
+            </a:solidFill>
+          </a:ln>
+          <a:effectLst/>
+        </p:spPr>
+        <p:style>
+          <a:lnRef idx="1">
+            <a:schemeClr val="accent1"/>
+          </a:lnRef>
+          <a:fillRef idx="3">
+            <a:schemeClr val="accent1"/>
+          </a:fillRef>
+          <a:effectRef idx="2">
+            <a:schemeClr val="accent1"/>
+          </a:effectRef>
+          <a:fontRef idx="minor">
+            <a:schemeClr val="lt1"/>
+          </a:fontRef>
+        </p:style>
+        <p:txBody>
+          <a:bodyPr rtlCol="0" anchor="ctr"/>
+          <a:lstStyle/>
+          <a:p>
+            <a:pPr algn="ctr"/>
+          </a:p>
+        </p:txBody>
+      </p:sp>
+      <p:sp>
+        <p:nvSpPr>
+          <p:cNvPr id="7" name="Rectangle 6"/>
+          <p:cNvSpPr/>
+          <p:nvPr/>
+        </p:nvSpPr>
+        <p:spPr>
+          <a:xfrm>
+            <a:off x="640080" y="6455664"/>
+            <a:ext cx="10908792" cy="9144"/>
+          </a:xfrm>
+          <a:prstGeom prst="rect">
+            <a:avLst/>
+          </a:prstGeom>
+          <a:solidFill>
+            <a:srgbClr val="E6EBE8"/>
+          </a:solidFill>
+          <a:ln>
+            <a:noFill/>
+          </a:ln>
+          <a:effectLst/>
+        </p:spPr>
+        <p:style>
+          <a:lnRef idx="1">
+            <a:schemeClr val="accent1"/>
+          </a:lnRef>
+          <a:fillRef idx="3">
+            <a:schemeClr val="accent1"/>
+          </a:fillRef>
+          <a:effectRef idx="2">
+            <a:schemeClr val="accent1"/>
+          </a:effectRef>
+          <a:fontRef idx="minor">
+            <a:schemeClr val="lt1"/>
+          </a:fontRef>
+        </p:style>
+        <p:txBody>
+          <a:bodyPr rtlCol="0" anchor="ctr"/>
+          <a:lstStyle/>
+          <a:p>
+            <a:pPr algn="ctr"/>
+          </a:p>
+        </p:txBody>
+      </p:sp>
+      <p:sp>
+        <p:nvSpPr>
+          <p:cNvPr id="8" name="TextBox 7"/>
+          <p:cNvSpPr txBox="1"/>
+          <p:nvPr/>
+        </p:nvSpPr>
+        <p:spPr>
+          <a:xfrm>
+            <a:off x="640080" y="6510528"/>
+            <a:ext cx="2743200" cy="274320"/>
+          </a:xfrm>
+          <a:prstGeom prst="rect">
+            <a:avLst/>
+          </a:prstGeom>
+          <a:noFill/>
+        </p:spPr>
+        <p:txBody>
+          <a:bodyPr wrap="square" anchor="t" lIns="0" rIns="0" tIns="0" bIns="0">
+            <a:spAutoFit/>
+          </a:bodyPr>
+          <a:lstStyle/>
+          <a:p>
+            <a:r>
+              <a:rPr sz="1100" b="1">
+                <a:solidFill>
+                  <a:srgbClr val="6B7B73"/>
+                </a:solidFill>
+                <a:latin typeface="Space Grotesk"/>
+              </a:rPr>
+              <a:t>want</a:t>
+            </a:r>
+            <a:r>
+              <a:rPr sz="1100" b="1">
+                <a:solidFill>
+                  <a:srgbClr val="1F7A57"/>
+                </a:solidFill>
+                <a:latin typeface="Space Grotesk"/>
+              </a:rPr>
+              <a:t>hat</a:t>
+            </a:r>
+          </a:p>
+        </p:txBody>
+      </p:sp>
+      <p:sp>
+        <p:nvSpPr>
+          <p:cNvPr id="9" name="TextBox 8"/>
+          <p:cNvSpPr txBox="1"/>
+          <p:nvPr/>
+        </p:nvSpPr>
+        <p:spPr>
+          <a:xfrm>
+            <a:off x="10607040" y="6510528"/>
+            <a:ext cx="941832" cy="274320"/>
+          </a:xfrm>
+          <a:prstGeom prst="rect">
+            <a:avLst/>
+          </a:prstGeom>
+          <a:noFill/>
+        </p:spPr>
+        <p:txBody>
+          <a:bodyPr wrap="square" anchor="t" lIns="0" rIns="0" tIns="0" bIns="0">
+            <a:spAutoFit/>
+          </a:bodyPr>
+          <a:lstStyle/>
+          <a:p>
+            <a:pPr algn="r"/>
+            <a:r>
+              <a:rPr sz="1000" b="0">
+                <a:solidFill>
+                  <a:srgbClr val="8A968F"/>
+                </a:solidFill>
+                <a:latin typeface="Space Mono"/>
+              </a:rPr>
+              <a:t>14</a:t>
+            </a:r>
+          </a:p>
+        </p:txBody>
+      </p:sp>
+      <p:sp>
+        <p:nvSpPr>
+          <p:cNvPr id="10" name="TextBox 9"/>
+          <p:cNvSpPr txBox="1"/>
+          <p:nvPr/>
+        </p:nvSpPr>
+        <p:spPr>
+          <a:xfrm>
+            <a:off x="658368" y="1783080"/>
+            <a:ext cx="3063240" cy="4480560"/>
+          </a:xfrm>
+          <a:prstGeom prst="rect">
+            <a:avLst/>
+          </a:prstGeom>
+          <a:noFill/>
+        </p:spPr>
+        <p:txBody>
+          <a:bodyPr wrap="square">
+            <a:spAutoFit/>
+          </a:bodyPr>
+          <a:lstStyle/>
+          <a:p>
+            <a:r>
+              <a:rPr sz="1200" b="0">
+                <a:solidFill>
+                  <a:srgbClr val="15201C"/>
+                </a:solidFill>
+                <a:latin typeface="Hanken Grotesk"/>
+              </a:rPr>
+              <a:t>-  An Aurora cold resume may delay the wallet total + recent activity.</a:t>
+            </a:r>
+          </a:p>
+          <a:p>
+            <a:r>
+              <a:rPr sz="1200" b="0">
+                <a:solidFill>
+                  <a:srgbClr val="15201C"/>
+                </a:solidFill>
+                <a:latin typeface="Hanken Grotesk"/>
+              </a:rPr>
+              <a:t>-  Everything else is operational immediately.</a:t>
+            </a:r>
+          </a:p>
+        </p:txBody>
+      </p:sp>
+    </p:spTree>
+  </p:cSld>
+  <p:clrMapOvr>
+    <a:masterClrMapping/>
+  </p:clrMapOvr>
+</p:sld>
+</file>
+
+<file path=ppt/slides/slide34.xml><?xml version="1.0" encoding="utf-8"?>
+<p:sld xmlns:a="http://schemas.openxmlformats.org/drawingml/2006/main" xmlns:p="http://schemas.openxmlformats.org/presentationml/2006/main" xmlns:r="http://schemas.openxmlformats.org/officeDocument/2006/relationships">
+  <p:cSld>
+    <p:spTree>
+      <p:nvGrpSpPr>
+        <p:cNvPr id="1" name=""/>
+        <p:cNvGrpSpPr/>
+        <p:nvPr/>
+      </p:nvGrpSpPr>
+      <p:grpSpPr/>
+      <p:sp>
+        <p:nvSpPr>
+          <p:cNvPr id="2" name="TextBox 1"/>
+          <p:cNvSpPr txBox="1"/>
+          <p:nvPr/>
+        </p:nvSpPr>
+        <p:spPr>
+          <a:xfrm>
+            <a:off x="10195560" y="256032"/>
+            <a:ext cx="1371600" cy="1005840"/>
+          </a:xfrm>
+          <a:prstGeom prst="rect">
+            <a:avLst/>
+          </a:prstGeom>
+          <a:noFill/>
+        </p:spPr>
+        <p:txBody>
+          <a:bodyPr wrap="square" anchor="t" lIns="0" rIns="0" tIns="0" bIns="0">
+            <a:spAutoFit/>
+          </a:bodyPr>
+          <a:lstStyle/>
+          <a:p>
+            <a:pPr algn="r"/>
+            <a:r>
+              <a:rPr sz="4600" b="1">
+                <a:solidFill>
+                  <a:srgbClr val="DCE5E0"/>
+                </a:solidFill>
+                <a:latin typeface="Space Grotesk"/>
+              </a:rPr>
+              <a:t>15</a:t>
+            </a:r>
+          </a:p>
+        </p:txBody>
+      </p:sp>
+      <p:sp>
+        <p:nvSpPr>
+          <p:cNvPr id="3" name="TextBox 2"/>
+          <p:cNvSpPr txBox="1"/>
+          <p:nvPr/>
+        </p:nvSpPr>
+        <p:spPr>
+          <a:xfrm>
+            <a:off x="640080" y="420624"/>
+            <a:ext cx="9418320" cy="292608"/>
+          </a:xfrm>
+          <a:prstGeom prst="rect">
+            <a:avLst/>
+          </a:prstGeom>
+          <a:noFill/>
+        </p:spPr>
+        <p:txBody>
+          <a:bodyPr wrap="square" anchor="t" lIns="0" rIns="0" tIns="0" bIns="0">
+            <a:spAutoFit/>
+          </a:bodyPr>
+          <a:lstStyle/>
+          <a:p>
+            <a:r>
+              <a:rPr sz="1150" b="1">
+                <a:solidFill>
+                  <a:srgbClr val="1F7A57"/>
+                </a:solidFill>
+                <a:latin typeface="Space Mono"/>
+              </a:rPr>
+              <a:t>ENGINEERING</a:t>
+            </a:r>
+          </a:p>
+        </p:txBody>
+      </p:sp>
+      <p:sp>
+        <p:nvSpPr>
+          <p:cNvPr id="4" name="TextBox 3"/>
+          <p:cNvSpPr txBox="1"/>
+          <p:nvPr/>
+        </p:nvSpPr>
+        <p:spPr>
+          <a:xfrm>
+            <a:off x="621792" y="731520"/>
+            <a:ext cx="9509760" cy="868680"/>
+          </a:xfrm>
+          <a:prstGeom prst="rect">
+            <a:avLst/>
+          </a:prstGeom>
+          <a:noFill/>
+        </p:spPr>
+        <p:txBody>
+          <a:bodyPr wrap="square" anchor="t" lIns="0" rIns="0" tIns="0" bIns="0">
+            <a:spAutoFit/>
+          </a:bodyPr>
+          <a:lstStyle/>
+          <a:p>
+            <a:r>
+              <a:rPr sz="2700" b="1">
+                <a:solidFill>
+                  <a:srgbClr val="15201C"/>
+                </a:solidFill>
+                <a:latin typeface="Space Grotesk"/>
+              </a:rPr>
+              <a:t>Architecture UC6 — the admin console</a:t>
+            </a:r>
+          </a:p>
+        </p:txBody>
+      </p:sp>
+      <p:sp>
+        <p:nvSpPr>
+          <p:cNvPr id="5" name="Rounded Rectangle 4"/>
+          <p:cNvSpPr/>
+          <p:nvPr/>
+        </p:nvSpPr>
+        <p:spPr>
+          <a:xfrm>
+            <a:off x="3886200" y="1600200"/>
+            <a:ext cx="7653527" cy="4709160"/>
+          </a:xfrm>
+          <a:prstGeom prst="roundRect">
+            <a:avLst>
+              <a:gd name="adj" fmla="val 3000"/>
+            </a:avLst>
+          </a:prstGeom>
+          <a:solidFill>
+            <a:srgbClr val="FFFFFF"/>
+          </a:solidFill>
+          <a:ln w="12700">
+            <a:solidFill>
+              <a:srgbClr val="E6EBE8"/>
+            </a:solidFill>
+          </a:ln>
+          <a:effectLst/>
+        </p:spPr>
+        <p:style>
+          <a:lnRef idx="1">
+            <a:schemeClr val="accent1"/>
+          </a:lnRef>
+          <a:fillRef idx="3">
+            <a:schemeClr val="accent1"/>
+          </a:fillRef>
+          <a:effectRef idx="2">
+            <a:schemeClr val="accent1"/>
+          </a:effectRef>
+          <a:fontRef idx="minor">
+            <a:schemeClr val="lt1"/>
+          </a:fontRef>
+        </p:style>
+        <p:txBody>
+          <a:bodyPr rtlCol="0" anchor="ctr"/>
+          <a:lstStyle/>
+          <a:p>
+            <a:pPr algn="ctr"/>
+          </a:p>
+        </p:txBody>
+      </p:sp>
+      <p:sp>
+        <p:nvSpPr>
+          <p:cNvPr id="7" name="Rectangle 6"/>
+          <p:cNvSpPr/>
+          <p:nvPr/>
+        </p:nvSpPr>
+        <p:spPr>
+          <a:xfrm>
+            <a:off x="640080" y="6455664"/>
+            <a:ext cx="10908792" cy="9144"/>
+          </a:xfrm>
+          <a:prstGeom prst="rect">
+            <a:avLst/>
+          </a:prstGeom>
+          <a:solidFill>
+            <a:srgbClr val="E6EBE8"/>
+          </a:solidFill>
+          <a:ln>
+            <a:noFill/>
+          </a:ln>
+          <a:effectLst/>
+        </p:spPr>
+        <p:style>
+          <a:lnRef idx="1">
+            <a:schemeClr val="accent1"/>
+          </a:lnRef>
+          <a:fillRef idx="3">
+            <a:schemeClr val="accent1"/>
+          </a:fillRef>
+          <a:effectRef idx="2">
+            <a:schemeClr val="accent1"/>
+          </a:effectRef>
+          <a:fontRef idx="minor">
+            <a:schemeClr val="lt1"/>
+          </a:fontRef>
+        </p:style>
+        <p:txBody>
+          <a:bodyPr rtlCol="0" anchor="ctr"/>
+          <a:lstStyle/>
+          <a:p>
+            <a:pPr algn="ctr"/>
+          </a:p>
+        </p:txBody>
+      </p:sp>
+      <p:sp>
+        <p:nvSpPr>
+          <p:cNvPr id="8" name="TextBox 7"/>
+          <p:cNvSpPr txBox="1"/>
+          <p:nvPr/>
+        </p:nvSpPr>
+        <p:spPr>
+          <a:xfrm>
+            <a:off x="640080" y="6510528"/>
+            <a:ext cx="2743200" cy="274320"/>
+          </a:xfrm>
+          <a:prstGeom prst="rect">
+            <a:avLst/>
+          </a:prstGeom>
+          <a:noFill/>
+        </p:spPr>
+        <p:txBody>
+          <a:bodyPr wrap="square" anchor="t" lIns="0" rIns="0" tIns="0" bIns="0">
+            <a:spAutoFit/>
+          </a:bodyPr>
+          <a:lstStyle/>
+          <a:p>
+            <a:r>
+              <a:rPr sz="1100" b="1">
+                <a:solidFill>
+                  <a:srgbClr val="6B7B73"/>
+                </a:solidFill>
+                <a:latin typeface="Space Grotesk"/>
+              </a:rPr>
+              <a:t>want</a:t>
+            </a:r>
+            <a:r>
+              <a:rPr sz="1100" b="1">
+                <a:solidFill>
+                  <a:srgbClr val="1F7A57"/>
+                </a:solidFill>
+                <a:latin typeface="Space Grotesk"/>
+              </a:rPr>
+              <a:t>hat</a:t>
+            </a:r>
+          </a:p>
+        </p:txBody>
+      </p:sp>
+      <p:sp>
+        <p:nvSpPr>
+          <p:cNvPr id="9" name="TextBox 8"/>
+          <p:cNvSpPr txBox="1"/>
+          <p:nvPr/>
+        </p:nvSpPr>
+        <p:spPr>
+          <a:xfrm>
+            <a:off x="10607040" y="6510528"/>
+            <a:ext cx="941832" cy="274320"/>
+          </a:xfrm>
+          <a:prstGeom prst="rect">
+            <a:avLst/>
+          </a:prstGeom>
+          <a:noFill/>
+        </p:spPr>
+        <p:txBody>
+          <a:bodyPr wrap="square" anchor="t" lIns="0" rIns="0" tIns="0" bIns="0">
+            <a:spAutoFit/>
+          </a:bodyPr>
+          <a:lstStyle/>
+          <a:p>
+            <a:pPr algn="r"/>
+            <a:r>
+              <a:rPr sz="1000" b="0">
+                <a:solidFill>
+                  <a:srgbClr val="8A968F"/>
+                </a:solidFill>
+                <a:latin typeface="Space Mono"/>
+              </a:rPr>
+              <a:t>15</a:t>
+            </a:r>
+          </a:p>
+        </p:txBody>
+      </p:sp>
+      <p:sp>
+        <p:nvSpPr>
+          <p:cNvPr id="10" name="TextBox 9"/>
+          <p:cNvSpPr txBox="1"/>
+          <p:nvPr/>
+        </p:nvSpPr>
+        <p:spPr>
+          <a:xfrm>
+            <a:off x="658368" y="1783080"/>
+            <a:ext cx="3063240" cy="4480560"/>
+          </a:xfrm>
+          <a:prstGeom prst="rect">
+            <a:avLst/>
+          </a:prstGeom>
+          <a:noFill/>
+        </p:spPr>
+        <p:txBody>
+          <a:bodyPr wrap="square">
+            <a:spAutoFit/>
+          </a:bodyPr>
+          <a:lstStyle/>
+          <a:p>
+            <a:r>
+              <a:rPr sz="1200" b="0">
+                <a:solidFill>
+                  <a:srgbClr val="15201C"/>
+                </a:solidFill>
+                <a:latin typeface="Hanken Grotesk"/>
+              </a:rPr>
+              <a:t>-  Cognito Managed Login; a SEPARATE employee pool.</a:t>
+            </a:r>
+          </a:p>
+          <a:p>
+            <a:r>
+              <a:rPr sz="1200" b="0">
+                <a:solidFill>
+                  <a:srgbClr val="15201C"/>
+                </a:solidFill>
+                <a:latin typeface="Hanken Grotesk"/>
+              </a:rPr>
+              <a:t>-  Operational-data management; money views are read-only.</a:t>
+            </a:r>
+          </a:p>
+        </p:txBody>
+      </p:sp>
+    </p:spTree>
+  </p:cSld>
+  <p:clrMapOvr>
+    <a:masterClrMapping/>
+  </p:clrMapOvr>
+</p:sld>
+</file>
+
+<file path=ppt/slides/slide35.xml><?xml version="1.0" encoding="utf-8"?>
+<p:sld xmlns:a="http://schemas.openxmlformats.org/drawingml/2006/main" xmlns:p="http://schemas.openxmlformats.org/presentationml/2006/main" xmlns:r="http://schemas.openxmlformats.org/officeDocument/2006/relationships">
+  <p:cSld>
+    <p:spTree>
+      <p:nvGrpSpPr>
+        <p:cNvPr id="1" name=""/>
+        <p:cNvGrpSpPr/>
+        <p:nvPr/>
+      </p:nvGrpSpPr>
+      <p:grpSpPr/>
+      <p:sp>
+        <p:nvSpPr>
+          <p:cNvPr id="2" name="TextBox 1"/>
+          <p:cNvSpPr txBox="1"/>
+          <p:nvPr/>
+        </p:nvSpPr>
+        <p:spPr>
+          <a:xfrm>
+            <a:off x="10195560" y="256032"/>
+            <a:ext cx="1371600" cy="1005840"/>
+          </a:xfrm>
+          <a:prstGeom prst="rect">
+            <a:avLst/>
+          </a:prstGeom>
+          <a:noFill/>
+        </p:spPr>
+        <p:txBody>
+          <a:bodyPr wrap="square" anchor="t" lIns="0" rIns="0" tIns="0" bIns="0">
+            <a:spAutoFit/>
+          </a:bodyPr>
+          <a:lstStyle/>
+          <a:p>
+            <a:pPr algn="r"/>
+            <a:r>
+              <a:rPr sz="4600" b="1">
+                <a:solidFill>
+                  <a:srgbClr val="DCE5E0"/>
+                </a:solidFill>
+                <a:latin typeface="Space Grotesk"/>
+              </a:rPr>
+              <a:t>16</a:t>
+            </a:r>
+          </a:p>
+        </p:txBody>
+      </p:sp>
+      <p:sp>
+        <p:nvSpPr>
+          <p:cNvPr id="3" name="TextBox 2"/>
+          <p:cNvSpPr txBox="1"/>
+          <p:nvPr/>
+        </p:nvSpPr>
+        <p:spPr>
+          <a:xfrm>
+            <a:off x="640080" y="420624"/>
+            <a:ext cx="9418320" cy="292608"/>
+          </a:xfrm>
+          <a:prstGeom prst="rect">
+            <a:avLst/>
+          </a:prstGeom>
+          <a:noFill/>
+        </p:spPr>
+        <p:txBody>
+          <a:bodyPr wrap="square" anchor="t" lIns="0" rIns="0" tIns="0" bIns="0">
+            <a:spAutoFit/>
+          </a:bodyPr>
+          <a:lstStyle/>
+          <a:p>
+            <a:r>
+              <a:rPr sz="1150" b="1">
+                <a:solidFill>
+                  <a:srgbClr val="1F7A57"/>
+                </a:solidFill>
+                <a:latin typeface="Space Mono"/>
+              </a:rPr>
+              <a:t>ENGINEERING</a:t>
+            </a:r>
+          </a:p>
+        </p:txBody>
+      </p:sp>
+      <p:sp>
+        <p:nvSpPr>
+          <p:cNvPr id="4" name="TextBox 3"/>
+          <p:cNvSpPr txBox="1"/>
+          <p:nvPr/>
+        </p:nvSpPr>
+        <p:spPr>
+          <a:xfrm>
+            <a:off x="621792" y="731520"/>
+            <a:ext cx="9509760" cy="868680"/>
+          </a:xfrm>
+          <a:prstGeom prst="rect">
+            <a:avLst/>
+          </a:prstGeom>
+          <a:noFill/>
+        </p:spPr>
+        <p:txBody>
+          <a:bodyPr wrap="square" anchor="t" lIns="0" rIns="0" tIns="0" bIns="0">
+            <a:spAutoFit/>
+          </a:bodyPr>
+          <a:lstStyle/>
+          <a:p>
+            <a:r>
+              <a:rPr sz="2700" b="1">
+                <a:solidFill>
+                  <a:srgbClr val="15201C"/>
+                </a:solidFill>
+                <a:latin typeface="Space Grotesk"/>
+              </a:rPr>
+              <a:t>Architecture — additional use cases, same principles</a:t>
+            </a:r>
+          </a:p>
+        </p:txBody>
+      </p:sp>
+      <p:sp>
+        <p:nvSpPr>
+          <p:cNvPr id="5" name="Rounded Rectangle 4"/>
+          <p:cNvSpPr/>
+          <p:nvPr/>
+        </p:nvSpPr>
+        <p:spPr>
+          <a:xfrm>
+            <a:off x="3886200" y="1600200"/>
+            <a:ext cx="7653527" cy="4709160"/>
+          </a:xfrm>
+          <a:prstGeom prst="roundRect">
+            <a:avLst>
+              <a:gd name="adj" fmla="val 3000"/>
+            </a:avLst>
+          </a:prstGeom>
+          <a:solidFill>
+            <a:srgbClr val="FFFFFF"/>
+          </a:solidFill>
+          <a:ln w="12700">
+            <a:solidFill>
+              <a:srgbClr val="E6EBE8"/>
+            </a:solidFill>
+          </a:ln>
+          <a:effectLst/>
+        </p:spPr>
+        <p:style>
+          <a:lnRef idx="1">
+            <a:schemeClr val="accent1"/>
+          </a:lnRef>
+          <a:fillRef idx="3">
+            <a:schemeClr val="accent1"/>
+          </a:fillRef>
+          <a:effectRef idx="2">
+            <a:schemeClr val="accent1"/>
+          </a:effectRef>
+          <a:fontRef idx="minor">
+            <a:schemeClr val="lt1"/>
+          </a:fontRef>
+        </p:style>
+        <p:txBody>
+          <a:bodyPr rtlCol="0" anchor="ctr"/>
+          <a:lstStyle/>
+          <a:p>
+            <a:pPr algn="ctr"/>
+          </a:p>
+        </p:txBody>
+      </p:sp>
+      <p:sp>
+        <p:nvSpPr>
+          <p:cNvPr id="7" name="Rectangle 6"/>
+          <p:cNvSpPr/>
+          <p:nvPr/>
+        </p:nvSpPr>
+        <p:spPr>
+          <a:xfrm>
+            <a:off x="640080" y="6455664"/>
+            <a:ext cx="10908792" cy="9144"/>
+          </a:xfrm>
+          <a:prstGeom prst="rect">
+            <a:avLst/>
+          </a:prstGeom>
+          <a:solidFill>
+            <a:srgbClr val="E6EBE8"/>
+          </a:solidFill>
+          <a:ln>
+            <a:noFill/>
+          </a:ln>
+          <a:effectLst/>
+        </p:spPr>
+        <p:style>
+          <a:lnRef idx="1">
+            <a:schemeClr val="accent1"/>
+          </a:lnRef>
+          <a:fillRef idx="3">
+            <a:schemeClr val="accent1"/>
+          </a:fillRef>
+          <a:effectRef idx="2">
+            <a:schemeClr val="accent1"/>
+          </a:effectRef>
+          <a:fontRef idx="minor">
+            <a:schemeClr val="lt1"/>
+          </a:fontRef>
+        </p:style>
+        <p:txBody>
+          <a:bodyPr rtlCol="0" anchor="ctr"/>
+          <a:lstStyle/>
+          <a:p>
+            <a:pPr algn="ctr"/>
+          </a:p>
+        </p:txBody>
+      </p:sp>
+      <p:sp>
+        <p:nvSpPr>
+          <p:cNvPr id="8" name="TextBox 7"/>
+          <p:cNvSpPr txBox="1"/>
+          <p:nvPr/>
+        </p:nvSpPr>
+        <p:spPr>
+          <a:xfrm>
+            <a:off x="640080" y="6510528"/>
+            <a:ext cx="2743200" cy="274320"/>
+          </a:xfrm>
+          <a:prstGeom prst="rect">
+            <a:avLst/>
+          </a:prstGeom>
+          <a:noFill/>
+        </p:spPr>
+        <p:txBody>
+          <a:bodyPr wrap="square" anchor="t" lIns="0" rIns="0" tIns="0" bIns="0">
+            <a:spAutoFit/>
+          </a:bodyPr>
+          <a:lstStyle/>
+          <a:p>
+            <a:r>
+              <a:rPr sz="1100" b="1">
+                <a:solidFill>
+                  <a:srgbClr val="6B7B73"/>
+                </a:solidFill>
+                <a:latin typeface="Space Grotesk"/>
+              </a:rPr>
+              <a:t>want</a:t>
+            </a:r>
+            <a:r>
+              <a:rPr sz="1100" b="1">
+                <a:solidFill>
+                  <a:srgbClr val="1F7A57"/>
+                </a:solidFill>
+                <a:latin typeface="Space Grotesk"/>
+              </a:rPr>
+              <a:t>hat</a:t>
+            </a:r>
+          </a:p>
+        </p:txBody>
+      </p:sp>
+      <p:sp>
+        <p:nvSpPr>
+          <p:cNvPr id="9" name="TextBox 8"/>
+          <p:cNvSpPr txBox="1"/>
+          <p:nvPr/>
+        </p:nvSpPr>
+        <p:spPr>
+          <a:xfrm>
+            <a:off x="10607040" y="6510528"/>
+            <a:ext cx="941832" cy="274320"/>
+          </a:xfrm>
+          <a:prstGeom prst="rect">
+            <a:avLst/>
+          </a:prstGeom>
+          <a:noFill/>
+        </p:spPr>
+        <p:txBody>
+          <a:bodyPr wrap="square" anchor="t" lIns="0" rIns="0" tIns="0" bIns="0">
+            <a:spAutoFit/>
+          </a:bodyPr>
+          <a:lstStyle/>
+          <a:p>
+            <a:pPr algn="r"/>
+            <a:r>
+              <a:rPr sz="1000" b="0">
+                <a:solidFill>
+                  <a:srgbClr val="8A968F"/>
+                </a:solidFill>
+                <a:latin typeface="Space Mono"/>
+              </a:rPr>
+              <a:t>16</a:t>
+            </a:r>
+          </a:p>
+        </p:txBody>
+      </p:sp>
+      <p:sp>
+        <p:nvSpPr>
+          <p:cNvPr id="10" name="TextBox 9"/>
+          <p:cNvSpPr txBox="1"/>
+          <p:nvPr/>
+        </p:nvSpPr>
+        <p:spPr>
+          <a:xfrm>
+            <a:off x="658368" y="1783080"/>
+            <a:ext cx="3063240" cy="4480560"/>
+          </a:xfrm>
+          <a:prstGeom prst="rect">
+            <a:avLst/>
+          </a:prstGeom>
+          <a:noFill/>
+        </p:spPr>
+        <p:txBody>
+          <a:bodyPr wrap="square">
+            <a:spAutoFit/>
+          </a:bodyPr>
+          <a:lstStyle/>
+          <a:p>
+            <a:r>
+              <a:rPr sz="1200" b="0">
+                <a:solidFill>
+                  <a:srgbClr val="15201C"/>
+                </a:solidFill>
+                <a:latin typeface="Hanken Grotesk"/>
+              </a:rPr>
+              <a:t>-  Observability.</a:t>
+            </a:r>
+          </a:p>
+          <a:p>
+            <a:r>
+              <a:rPr sz="1200" b="0">
+                <a:solidFill>
+                  <a:srgbClr val="15201C"/>
+                </a:solidFill>
+                <a:latin typeface="Hanken Grotesk"/>
+              </a:rPr>
+              <a:t>-  Guest attribution within the affiliation window.</a:t>
+            </a:r>
+          </a:p>
+          <a:p>
+            <a:r>
+              <a:rPr sz="1200" b="0">
+                <a:solidFill>
+                  <a:srgbClr val="15201C"/>
+                </a:solidFill>
+                <a:latin typeface="Hanken Grotesk"/>
+              </a:rPr>
+              <a:t>-  Manual attribution of unattributed settlements.</a:t>
+            </a:r>
+          </a:p>
+          <a:p>
+            <a:r>
+              <a:rPr sz="1200" b="0">
+                <a:solidFill>
+                  <a:srgbClr val="15201C"/>
+                </a:solidFill>
+                <a:latin typeface="Hanken Grotesk"/>
+              </a:rPr>
+              <a:t>-  Ops counters for real-time admin stats.</a:t>
+            </a:r>
+          </a:p>
+          <a:p>
+            <a:r>
+              <a:rPr sz="1200" b="0">
+                <a:solidFill>
+                  <a:srgbClr val="15201C"/>
+                </a:solidFill>
+                <a:latin typeface="Hanken Grotesk"/>
+              </a:rPr>
+              <a:t>-  Offline analytics.</a:t>
+            </a:r>
+          </a:p>
+        </p:txBody>
+      </p:sp>
+    </p:spTree>
+  </p:cSld>
+  <p:clrMapOvr>
+    <a:masterClrMapping/>
+  </p:clrMapOvr>
+</p:sld>
+</file>
+
+<file path=ppt/slides/slide36.xml><?xml version="1.0" encoding="utf-8"?>
+<p:sld xmlns:a="http://schemas.openxmlformats.org/drawingml/2006/main" xmlns:p="http://schemas.openxmlformats.org/presentationml/2006/main" xmlns:r="http://schemas.openxmlformats.org/officeDocument/2006/relationships">
+  <p:cSld>
+    <p:spTree>
+      <p:nvGrpSpPr>
+        <p:cNvPr id="1" name=""/>
+        <p:cNvGrpSpPr/>
+        <p:nvPr/>
+      </p:nvGrpSpPr>
+      <p:grpSpPr/>
+      <p:sp>
+        <p:nvSpPr>
+          <p:cNvPr id="2" name="TextBox 1"/>
+          <p:cNvSpPr txBox="1"/>
+          <p:nvPr/>
+        </p:nvSpPr>
+        <p:spPr>
+          <a:xfrm>
+            <a:off x="10195560" y="256032"/>
+            <a:ext cx="1371600" cy="1005840"/>
+          </a:xfrm>
+          <a:prstGeom prst="rect">
+            <a:avLst/>
+          </a:prstGeom>
+          <a:noFill/>
+        </p:spPr>
+        <p:txBody>
+          <a:bodyPr wrap="square" anchor="t" lIns="0" rIns="0" tIns="0" bIns="0">
+            <a:spAutoFit/>
+          </a:bodyPr>
+          <a:lstStyle/>
+          <a:p>
+            <a:pPr algn="r"/>
+            <a:r>
+              <a:rPr sz="4600" b="1">
+                <a:solidFill>
+                  <a:srgbClr val="DCE5E0"/>
+                </a:solidFill>
+                <a:latin typeface="Space Grotesk"/>
+              </a:rPr>
+              <a:t>B17</a:t>
+            </a:r>
+          </a:p>
+        </p:txBody>
+      </p:sp>
+      <p:sp>
+        <p:nvSpPr>
+          <p:cNvPr id="3" name="TextBox 2"/>
+          <p:cNvSpPr txBox="1"/>
+          <p:nvPr/>
+        </p:nvSpPr>
+        <p:spPr>
+          <a:xfrm>
+            <a:off x="640080" y="420624"/>
+            <a:ext cx="9418320" cy="292608"/>
+          </a:xfrm>
+          <a:prstGeom prst="rect">
+            <a:avLst/>
+          </a:prstGeom>
+          <a:noFill/>
+        </p:spPr>
+        <p:txBody>
+          <a:bodyPr wrap="square" anchor="t" lIns="0" rIns="0" tIns="0" bIns="0">
+            <a:spAutoFit/>
+          </a:bodyPr>
+          <a:lstStyle/>
+          <a:p>
+            <a:r>
+              <a:rPr sz="1150" b="1">
+                <a:solidFill>
+                  <a:srgbClr val="1F7A57"/>
+                </a:solidFill>
+                <a:latin typeface="Space Mono"/>
+              </a:rPr>
+              <a:t>BACKUP</a:t>
+            </a:r>
+          </a:p>
+        </p:txBody>
+      </p:sp>
+      <p:sp>
+        <p:nvSpPr>
+          <p:cNvPr id="4" name="TextBox 3"/>
+          <p:cNvSpPr txBox="1"/>
+          <p:nvPr/>
+        </p:nvSpPr>
+        <p:spPr>
+          <a:xfrm>
+            <a:off x="621792" y="731520"/>
+            <a:ext cx="9509760" cy="868680"/>
+          </a:xfrm>
+          <a:prstGeom prst="rect">
+            <a:avLst/>
+          </a:prstGeom>
+          <a:noFill/>
+        </p:spPr>
+        <p:txBody>
+          <a:bodyPr wrap="square" anchor="t" lIns="0" rIns="0" tIns="0" bIns="0">
+            <a:spAutoFit/>
+          </a:bodyPr>
+          <a:lstStyle/>
+          <a:p>
+            <a:r>
+              <a:rPr sz="2700" b="1">
+                <a:solidFill>
+                  <a:srgbClr val="15201C"/>
+                </a:solidFill>
+                <a:latin typeface="Space Grotesk"/>
+              </a:rPr>
+              <a:t>Cost progression — 10 to 100k active users</a:t>
+            </a:r>
+          </a:p>
+        </p:txBody>
+      </p:sp>
+      <p:sp>
+        <p:nvSpPr>
+          <p:cNvPr id="6" name="Rectangle 5"/>
+          <p:cNvSpPr/>
+          <p:nvPr/>
+        </p:nvSpPr>
+        <p:spPr>
+          <a:xfrm>
+            <a:off x="640080" y="6455664"/>
+            <a:ext cx="10908792" cy="9144"/>
+          </a:xfrm>
+          <a:prstGeom prst="rect">
+            <a:avLst/>
+          </a:prstGeom>
+          <a:solidFill>
+            <a:srgbClr val="E6EBE8"/>
+          </a:solidFill>
+          <a:ln>
+            <a:noFill/>
+          </a:ln>
+          <a:effectLst/>
+        </p:spPr>
+        <p:style>
+          <a:lnRef idx="1">
+            <a:schemeClr val="accent1"/>
+          </a:lnRef>
+          <a:fillRef idx="3">
+            <a:schemeClr val="accent1"/>
+          </a:fillRef>
+          <a:effectRef idx="2">
+            <a:schemeClr val="accent1"/>
+          </a:effectRef>
+          <a:fontRef idx="minor">
+            <a:schemeClr val="lt1"/>
+          </a:fontRef>
+        </p:style>
+        <p:txBody>
+          <a:bodyPr rtlCol="0" anchor="ctr"/>
+          <a:lstStyle/>
+          <a:p>
+            <a:pPr algn="ctr"/>
+          </a:p>
+        </p:txBody>
+      </p:sp>
+      <p:sp>
+        <p:nvSpPr>
+          <p:cNvPr id="7" name="TextBox 6"/>
+          <p:cNvSpPr txBox="1"/>
+          <p:nvPr/>
+        </p:nvSpPr>
+        <p:spPr>
+          <a:xfrm>
+            <a:off x="640080" y="6510528"/>
+            <a:ext cx="2743200" cy="274320"/>
+          </a:xfrm>
+          <a:prstGeom prst="rect">
+            <a:avLst/>
+          </a:prstGeom>
+          <a:noFill/>
+        </p:spPr>
+        <p:txBody>
+          <a:bodyPr wrap="square" anchor="t" lIns="0" rIns="0" tIns="0" bIns="0">
+            <a:spAutoFit/>
+          </a:bodyPr>
+          <a:lstStyle/>
+          <a:p>
+            <a:r>
+              <a:rPr sz="1100" b="1">
+                <a:solidFill>
+                  <a:srgbClr val="6B7B73"/>
+                </a:solidFill>
+                <a:latin typeface="Space Grotesk"/>
+              </a:rPr>
+              <a:t>want</a:t>
+            </a:r>
+            <a:r>
+              <a:rPr sz="1100" b="1">
+                <a:solidFill>
+                  <a:srgbClr val="1F7A57"/>
+                </a:solidFill>
+                <a:latin typeface="Space Grotesk"/>
+              </a:rPr>
+              <a:t>hat</a:t>
+            </a:r>
+          </a:p>
+        </p:txBody>
+      </p:sp>
+      <p:sp>
+        <p:nvSpPr>
+          <p:cNvPr id="8" name="TextBox 7"/>
+          <p:cNvSpPr txBox="1"/>
+          <p:nvPr/>
+        </p:nvSpPr>
+        <p:spPr>
+          <a:xfrm>
+            <a:off x="10607040" y="6510528"/>
+            <a:ext cx="941832" cy="274320"/>
+          </a:xfrm>
+          <a:prstGeom prst="rect">
+            <a:avLst/>
+          </a:prstGeom>
+          <a:noFill/>
+        </p:spPr>
+        <p:txBody>
+          <a:bodyPr wrap="square" anchor="t" lIns="0" rIns="0" tIns="0" bIns="0">
+            <a:spAutoFit/>
+          </a:bodyPr>
+          <a:lstStyle/>
+          <a:p>
+            <a:pPr algn="r"/>
+            <a:r>
+              <a:rPr sz="1000" b="0">
+                <a:solidFill>
+                  <a:srgbClr val="8A968F"/>
+                </a:solidFill>
+                <a:latin typeface="Space Mono"/>
+              </a:rPr>
+              <a:t>B17</a:t>
+            </a:r>
+          </a:p>
+        </p:txBody>
+      </p:sp>
+      <p:graphicFrame>
+        <p:nvGraphicFramePr>
+          <p:cNvPr id="9" name="Table 8"/>
+          <p:cNvGraphicFramePr>
+            <a:graphicFrameLocks noGrp="1"/>
+          </p:cNvGraphicFramePr>
+          <p:nvPr/>
+        </p:nvGraphicFramePr>
+        <p:xfrm>
+          <a:off x="658368" y="1600200"/>
+          <a:ext cx="10881360" cy="2651760"/>
+        </p:xfrm>
+        <a:graphic>
+          <a:graphicData uri="http://schemas.openxmlformats.org/drawingml/2006/table">
+            <a:tbl>
+              <a:tblPr firstRow="1" bandRow="1">
+                <a:tableStyleId>{5C22544A-7EE6-4342-B048-85BDC9FD1C3A}</a:tableStyleId>
+              </a:tblPr>
+              <a:tblGrid>
+                <a:gridCol w="3627120"/>
+                <a:gridCol w="3627120"/>
+                <a:gridCol w="3627120"/>
+              </a:tblGrid>
+              <a:tr h="441960">
+                <a:tc>
+                  <a:txBody>
+                    <a:bodyPr/>
+                    <a:lstStyle/>
+                    <a:p>
+                      <a:r>
+                        <a:rPr sz="1100" b="1">
+                          <a:solidFill>
+                            <a:srgbClr val="7FE0B0"/>
+                          </a:solidFill>
+                          <a:latin typeface="Space Grotesk"/>
+                        </a:rPr>
+                        <a:t>Active users</a:t>
+                      </a:r>
+                    </a:p>
+                  </a:txBody>
+                  <a:tcPr>
+                    <a:solidFill>
+                      <a:srgbClr val="15201C"/>
+                    </a:solidFill>
+                  </a:tcPr>
+                </a:tc>
+                <a:tc>
+                  <a:txBody>
+                    <a:bodyPr/>
+                    <a:lstStyle/>
+                    <a:p>
+                      <a:r>
+                        <a:rPr sz="1100" b="1">
+                          <a:solidFill>
+                            <a:srgbClr val="7FE0B0"/>
+                          </a:solidFill>
+                          <a:latin typeface="Space Grotesk"/>
+                        </a:rPr>
+                        <a:t>Monthly (prod)</a:t>
+                      </a:r>
+                    </a:p>
+                  </a:txBody>
+                  <a:tcPr>
+                    <a:solidFill>
+                      <a:srgbClr val="15201C"/>
+                    </a:solidFill>
+                  </a:tcPr>
+                </a:tc>
+                <a:tc>
+                  <a:txBody>
+                    <a:bodyPr/>
+                    <a:lstStyle/>
+                    <a:p>
+                      <a:r>
+                        <a:rPr sz="1100" b="1">
+                          <a:solidFill>
+                            <a:srgbClr val="7FE0B0"/>
+                          </a:solidFill>
+                          <a:latin typeface="Space Grotesk"/>
+                        </a:rPr>
+                        <a:t>What dominates</a:t>
+                      </a:r>
+                    </a:p>
+                  </a:txBody>
+                  <a:tcPr>
+                    <a:solidFill>
+                      <a:srgbClr val="15201C"/>
+                    </a:solidFill>
+                  </a:tcPr>
+                </a:tc>
+              </a:tr>
+              <a:tr h="441960">
+                <a:tc>
+                  <a:txBody>
+                    <a:bodyPr/>
+                    <a:lstStyle/>
+                    <a:p>
+                      <a:r>
+                        <a:rPr sz="1050" b="1">
+                          <a:solidFill>
+                            <a:srgbClr val="15201C"/>
+                          </a:solidFill>
+                          <a:latin typeface="Hanken Grotesk"/>
+                        </a:rPr>
+                        <a:t>10</a:t>
+                      </a:r>
+                    </a:p>
+                  </a:txBody>
+                  <a:tcPr>
+                    <a:solidFill>
+                      <a:srgbClr val="FFFFFF"/>
+                    </a:solidFill>
+                  </a:tcPr>
+                </a:tc>
+                <a:tc>
+                  <a:txBody>
+                    <a:bodyPr/>
+                    <a:lstStyle/>
+                    <a:p>
+                      <a:r>
+                        <a:rPr sz="1050" b="1">
+                          <a:solidFill>
+                            <a:srgbClr val="15201C"/>
+                          </a:solidFill>
+                          <a:latin typeface="Hanken Grotesk"/>
+                        </a:rPr>
+                        <a:t>~$20</a:t>
+                      </a:r>
+                    </a:p>
+                  </a:txBody>
+                  <a:tcPr>
+                    <a:solidFill>
+                      <a:srgbClr val="FFFFFF"/>
+                    </a:solidFill>
+                  </a:tcPr>
+                </a:tc>
+                <a:tc>
+                  <a:txBody>
+                    <a:bodyPr/>
+                    <a:lstStyle/>
+                    <a:p>
+                      <a:r>
+                        <a:rPr sz="1050" b="1">
+                          <a:solidFill>
+                            <a:srgbClr val="15201C"/>
+                          </a:solidFill>
+                          <a:latin typeface="Hanken Grotesk"/>
+                        </a:rPr>
+                        <a:t>the fixed floor (WAF $14 + Aurora storage)</a:t>
+                      </a:r>
+                    </a:p>
+                  </a:txBody>
+                  <a:tcPr>
+                    <a:solidFill>
+                      <a:srgbClr val="FFFFFF"/>
+                    </a:solidFill>
+                  </a:tcPr>
+                </a:tc>
+              </a:tr>
+              <a:tr h="441960">
+                <a:tc>
+                  <a:txBody>
+                    <a:bodyPr/>
+                    <a:lstStyle/>
+                    <a:p>
+                      <a:r>
+                        <a:rPr sz="1050" b="1">
+                          <a:solidFill>
+                            <a:srgbClr val="15201C"/>
+                          </a:solidFill>
+                          <a:latin typeface="Hanken Grotesk"/>
+                        </a:rPr>
+                        <a:t>1,000</a:t>
+                      </a:r>
+                    </a:p>
+                  </a:txBody>
+                  <a:tcPr>
+                    <a:solidFill>
+                      <a:srgbClr val="FFFFFF"/>
+                    </a:solidFill>
+                  </a:tcPr>
+                </a:tc>
+                <a:tc>
+                  <a:txBody>
+                    <a:bodyPr/>
+                    <a:lstStyle/>
+                    <a:p>
+                      <a:r>
+                        <a:rPr sz="1050" b="1">
+                          <a:solidFill>
+                            <a:srgbClr val="15201C"/>
+                          </a:solidFill>
+                          <a:latin typeface="Hanken Grotesk"/>
+                        </a:rPr>
+                        <a:t>~$55-75</a:t>
+                      </a:r>
+                    </a:p>
+                  </a:txBody>
+                  <a:tcPr>
+                    <a:solidFill>
+                      <a:srgbClr val="FFFFFF"/>
+                    </a:solidFill>
+                  </a:tcPr>
+                </a:tc>
+                <a:tc>
+                  <a:txBody>
+                    <a:bodyPr/>
+                    <a:lstStyle/>
+                    <a:p>
+                      <a:r>
+                        <a:rPr sz="1050" b="1">
+                          <a:solidFill>
+                            <a:srgbClr val="15201C"/>
+                          </a:solidFill>
+                          <a:latin typeface="Hanken Grotesk"/>
+                        </a:rPr>
+                        <a:t>Aurora stops scaling to zero (~$35-55)</a:t>
+                      </a:r>
+                    </a:p>
+                  </a:txBody>
+                  <a:tcPr>
+                    <a:solidFill>
+                      <a:srgbClr val="FFFFFF"/>
+                    </a:solidFill>
+                  </a:tcPr>
+                </a:tc>
+              </a:tr>
+              <a:tr h="441960">
+                <a:tc>
+                  <a:txBody>
+                    <a:bodyPr/>
+                    <a:lstStyle/>
+                    <a:p>
+                      <a:r>
+                        <a:rPr sz="1050" b="1">
+                          <a:solidFill>
+                            <a:srgbClr val="15201C"/>
+                          </a:solidFill>
+                          <a:latin typeface="Hanken Grotesk"/>
+                        </a:rPr>
+                        <a:t>10,000</a:t>
+                      </a:r>
+                    </a:p>
+                  </a:txBody>
+                  <a:tcPr>
+                    <a:solidFill>
+                      <a:srgbClr val="FFFFFF"/>
+                    </a:solidFill>
+                  </a:tcPr>
+                </a:tc>
+                <a:tc>
+                  <a:txBody>
+                    <a:bodyPr/>
+                    <a:lstStyle/>
+                    <a:p>
+                      <a:r>
+                        <a:rPr sz="1050" b="1">
+                          <a:solidFill>
+                            <a:srgbClr val="15201C"/>
+                          </a:solidFill>
+                          <a:latin typeface="Hanken Grotesk"/>
+                        </a:rPr>
+                        <a:t>~$90-150</a:t>
+                      </a:r>
+                    </a:p>
+                  </a:txBody>
+                  <a:tcPr>
+                    <a:solidFill>
+                      <a:srgbClr val="FFFFFF"/>
+                    </a:solidFill>
+                  </a:tcPr>
+                </a:tc>
+                <a:tc>
+                  <a:txBody>
+                    <a:bodyPr/>
+                    <a:lstStyle/>
+                    <a:p>
+                      <a:r>
+                        <a:rPr sz="1050" b="1">
+                          <a:solidFill>
+                            <a:srgbClr val="15201C"/>
+                          </a:solidFill>
+                          <a:latin typeface="Hanken Grotesk"/>
+                        </a:rPr>
+                        <a:t>still inside the Cognito free tier (10k MAU)</a:t>
+                      </a:r>
+                    </a:p>
+                  </a:txBody>
+                  <a:tcPr>
+                    <a:solidFill>
+                      <a:srgbClr val="FFFFFF"/>
+                    </a:solidFill>
+                  </a:tcPr>
+                </a:tc>
+              </a:tr>
+              <a:tr h="441960">
+                <a:tc>
+                  <a:txBody>
+                    <a:bodyPr/>
+                    <a:lstStyle/>
+                    <a:p>
+                      <a:r>
+                        <a:rPr sz="1050" b="1">
+                          <a:solidFill>
+                            <a:srgbClr val="15201C"/>
+                          </a:solidFill>
+                          <a:latin typeface="Hanken Grotesk"/>
+                        </a:rPr>
+                        <a:t>10,000 + RDS Proxy</a:t>
+                      </a:r>
+                    </a:p>
+                  </a:txBody>
+                  <a:tcPr>
+                    <a:solidFill>
+                      <a:srgbClr val="FFFFFF"/>
+                    </a:solidFill>
+                  </a:tcPr>
+                </a:tc>
+                <a:tc>
+                  <a:txBody>
+                    <a:bodyPr/>
+                    <a:lstStyle/>
+                    <a:p>
+                      <a:r>
+                        <a:rPr sz="1050" b="1">
+                          <a:solidFill>
+                            <a:srgbClr val="15201C"/>
+                          </a:solidFill>
+                          <a:latin typeface="Hanken Grotesk"/>
+                        </a:rPr>
+                        <a:t>~$190-250</a:t>
+                      </a:r>
+                    </a:p>
+                  </a:txBody>
+                  <a:tcPr>
+                    <a:solidFill>
+                      <a:srgbClr val="FFFFFF"/>
+                    </a:solidFill>
+                  </a:tcPr>
+                </a:tc>
+                <a:tc>
+                  <a:txBody>
+                    <a:bodyPr/>
+                    <a:lstStyle/>
+                    <a:p>
+                      <a:r>
+                        <a:rPr sz="1050" b="1">
+                          <a:solidFill>
+                            <a:srgbClr val="15201C"/>
+                          </a:solidFill>
+                          <a:latin typeface="Hanken Grotesk"/>
+                        </a:rPr>
+                        <a:t>proxy 8-ACU minimum = ~$100/month FLAT</a:t>
+                      </a:r>
+                    </a:p>
+                  </a:txBody>
+                  <a:tcPr>
+                    <a:solidFill>
+                      <a:srgbClr val="FFFFFF"/>
+                    </a:solidFill>
+                  </a:tcPr>
+                </a:tc>
+              </a:tr>
+              <a:tr h="441960">
+                <a:tc>
+                  <a:txBody>
+                    <a:bodyPr/>
+                    <a:lstStyle/>
+                    <a:p>
+                      <a:r>
+                        <a:rPr sz="1050" b="1">
+                          <a:solidFill>
+                            <a:srgbClr val="15201C"/>
+                          </a:solidFill>
+                          <a:latin typeface="Hanken Grotesk"/>
+                        </a:rPr>
+                        <a:t>100,000</a:t>
+                      </a:r>
+                    </a:p>
+                  </a:txBody>
+                  <a:tcPr>
+                    <a:solidFill>
+                      <a:srgbClr val="FFFFFF"/>
+                    </a:solidFill>
+                  </a:tcPr>
+                </a:tc>
+                <a:tc>
+                  <a:txBody>
+                    <a:bodyPr/>
+                    <a:lstStyle/>
+                    <a:p>
+                      <a:r>
+                        <a:rPr sz="1050" b="1">
+                          <a:solidFill>
+                            <a:srgbClr val="15201C"/>
+                          </a:solidFill>
+                          <a:latin typeface="Hanken Grotesk"/>
+                        </a:rPr>
+                        <a:t>~$1,730</a:t>
+                      </a:r>
+                    </a:p>
+                  </a:txBody>
+                  <a:tcPr>
+                    <a:solidFill>
+                      <a:srgbClr val="FFFFFF"/>
+                    </a:solidFill>
+                  </a:tcPr>
+                </a:tc>
+                <a:tc>
+                  <a:txBody>
+                    <a:bodyPr/>
+                    <a:lstStyle/>
+                    <a:p>
+                      <a:r>
+                        <a:rPr sz="1050" b="1">
+                          <a:solidFill>
+                            <a:srgbClr val="15201C"/>
+                          </a:solidFill>
+                          <a:latin typeface="Hanken Grotesk"/>
+                        </a:rPr>
+                        <a:t>Cognito MAU $1,350 = 78% of the bill</a:t>
+                      </a:r>
+                    </a:p>
+                  </a:txBody>
+                  <a:tcPr>
+                    <a:solidFill>
+                      <a:srgbClr val="FFFFFF"/>
+                    </a:solidFill>
+                  </a:tcPr>
+                </a:tc>
+              </a:tr>
+            </a:tbl>
+          </a:graphicData>
+        </a:graphic>
+      </p:graphicFrame>
+      <p:sp>
+        <p:nvSpPr>
+          <p:cNvPr id="10" name="TextBox 9"/>
+          <p:cNvSpPr txBox="1"/>
+          <p:nvPr/>
+        </p:nvSpPr>
+        <p:spPr>
+          <a:xfrm>
+            <a:off x="658368" y="4572000"/>
+            <a:ext cx="10881360" cy="1737360"/>
+          </a:xfrm>
+          <a:prstGeom prst="rect">
+            <a:avLst/>
+          </a:prstGeom>
+          <a:noFill/>
+        </p:spPr>
+        <p:txBody>
+          <a:bodyPr wrap="square">
+            <a:spAutoFit/>
+          </a:bodyPr>
+          <a:lstStyle/>
+          <a:p>
+            <a:r>
+              <a:rPr sz="1150" b="0">
+                <a:solidFill>
+                  <a:srgbClr val="6B7B73"/>
+                </a:solidFill>
+                <a:latin typeface="Hanken Grotesk"/>
+              </a:rPr>
+              <a:t>Assumptions: 10 operations/user/day (wallet refresh, create recommendation), ~70/30 read-write, il-central-1 approximate prices, prod only; every active user = 1 Cognito MAU.</a:t>
+            </a:r>
+          </a:p>
+          <a:p>
+            <a:r>
+              <a:rPr sz="1150" b="0">
+                <a:solidFill>
+                  <a:srgbClr val="6B7B73"/>
+                </a:solidFill>
+                <a:latin typeface="Hanken Grotesk"/>
+              </a:rPr>
+              <a:t>Two step functions, then linear: Aurora stops sleeping (~1k users); the Cognito free tier ends at exactly 10k MAU ($0.015/MAU after). Per-user at 100k: ~$0.017/month.</a:t>
+            </a:r>
+          </a:p>
+          <a:p>
+            <a:r>
+              <a:rPr sz="1150" b="0">
+                <a:solidFill>
+                  <a:srgbClr val="6B7B73"/>
+                </a:solidFill>
+                <a:latin typeface="Hanken Grotesk"/>
+              </a:rPr>
+              <a:t>Breaks BEFORE the bill: account concurrency 10 (~10k users, peaks) - AliExpress rate limits (ADR-0021) - Aurora 50 connections post-quota-raise (only THEN the proxy) - the 2-ACU max.</a:t>
             </a:r>
           </a:p>
         </p:txBody>
@@ -22986,7 +26717,7 @@
                 </a:solidFill>
                 <a:latin typeface="Hanken Grotesk"/>
               </a:rPr>
-              <a:t>AWS CDK v2; per-env stacks; zero console changes. PRs run CI + a cdk diff dry run; merge deploys dev, prod promotes explicitly; SQL migrations run in-deploy.</a:t>
+              <a:t>AWS CDK v2; per-env stacks; zero console changes. PRs run CI + cdk diff; merge deploys dev; SQL migrations run in-deploy; verify no orphaned resources after deploys.</a:t>
             </a:r>
           </a:p>
         </p:txBody>
@@ -23184,7 +26915,7 @@
                 </a:solidFill>
                 <a:latin typeface="Hanken Grotesk"/>
               </a:rPr>
-              <a:t>21 ADRs beside the code. Locked: change = a new superseding ADR, never an edit.</a:t>
+              <a:t>ADRs beside the code. Locked: change is a new superseding ADR, never an edit.</a:t>
             </a:r>
           </a:p>
         </p:txBody>
@@ -23382,7 +27113,7 @@
                 </a:solidFill>
                 <a:latin typeface="Hanken Grotesk"/>
               </a:rPr>
-              <a:t>No NAT, no RDS Proxy, zero interface endpoints, scale-to-zero Aurora, on-demand DynamoDB. The dominant cost line is OTP delivery, not infrastructure.</a:t>
+              <a:t>Avoid constant costs: zero interface endpoints, scale-to-zero, on-demand DBs.</a:t>
             </a:r>
           </a:p>
         </p:txBody>
@@ -23580,7 +27311,7 @@
                 </a:solidFill>
                 <a:latin typeface="Hanken Grotesk"/>
               </a:rPr>
-              <a:t>A link going viral in a WhatsApp group is the design load: the redirect hot path is non-VPC Lambda + DynamoDB and never touches SQL.</a:t>
+              <a:t>A link going viral in a WhatsApp group is the design spike.</a:t>
             </a:r>
           </a:p>
         </p:txBody>
@@ -24112,7 +27843,7 @@
                 </a:solidFill>
                 <a:latin typeface="Space Grotesk"/>
               </a:rPr>
-              <a:t>08</a:t>
+              <a:t>09</a:t>
             </a:r>
           </a:p>
         </p:txBody>
@@ -24180,7 +27911,7 @@
                 </a:solidFill>
                 <a:latin typeface="Space Grotesk"/>
               </a:rPr>
-              <a:t>Architecture — the whole system</a:t>
+              <a:t>Architecture — the starting point</a:t>
             </a:r>
           </a:p>
         </p:txBody>
@@ -24193,8 +27924,8 @@
         </p:nvSpPr>
         <p:spPr>
           <a:xfrm>
-            <a:off x="3615319" y="1481328"/>
-            <a:ext cx="4961056" cy="5084064"/>
+            <a:off x="658368" y="1600200"/>
+            <a:ext cx="10881360" cy="4114800"/>
           </a:xfrm>
           <a:prstGeom prst="roundRect">
             <a:avLst>
@@ -24233,30 +27964,6 @@
           </a:p>
         </p:txBody>
       </p:sp>
-      <p:pic>
-        <p:nvPicPr>
-          <p:cNvPr id="6" name="Picture 5" descr="slide-7.png"/>
-          <p:cNvPicPr>
-            <a:picLocks noChangeAspect="1"/>
-          </p:cNvPicPr>
-          <p:nvPr/>
-        </p:nvPicPr>
-        <p:blipFill>
-          <a:blip r:embed="rId2"/>
-          <a:stretch>
-            <a:fillRect/>
-          </a:stretch>
-        </p:blipFill>
-        <p:spPr>
-          <a:xfrm>
-            <a:off x="3779911" y="1645920"/>
-            <a:ext cx="4631872" cy="4754880"/>
-          </a:xfrm>
-          <a:prstGeom prst="rect">
-            <a:avLst/>
-          </a:prstGeom>
-        </p:spPr>
-      </p:pic>
       <p:sp>
         <p:nvSpPr>
           <p:cNvPr id="7" name="Rectangle 6"/>
@@ -24374,7 +28081,41 @@
                 </a:solidFill>
                 <a:latin typeface="Space Mono"/>
               </a:rPr>
-              <a:t>8</a:t>
+              <a:t>9</a:t>
+            </a:r>
+          </a:p>
+        </p:txBody>
+      </p:sp>
+      <p:sp>
+        <p:nvSpPr>
+          <p:cNvPr id="10" name="TextBox 9"/>
+          <p:cNvSpPr txBox="1"/>
+          <p:nvPr/>
+        </p:nvSpPr>
+        <p:spPr>
+          <a:xfrm>
+            <a:off x="658368" y="5852160"/>
+            <a:ext cx="10881360" cy="457200"/>
+          </a:xfrm>
+          <a:prstGeom prst="rect">
+            <a:avLst/>
+          </a:prstGeom>
+          <a:noFill/>
+        </p:spPr>
+        <p:txBody>
+          <a:bodyPr wrap="square">
+            <a:spAutoFit/>
+          </a:bodyPr>
+          <a:lstStyle/>
+          <a:p>
+            <a:r>
+              <a:rPr sz="1400" b="1">
+                <a:solidFill>
+                  <a:srgbClr val="15201C"/>
+                </a:solidFill>
+                <a:latin typeface="Hanken Grotesk"/>
+              </a:rPr>
+              <a:t>Starting with:  in-VPC Aurora Serverless v2   and   DynamoDB on-demand.</a:t>
             </a:r>
           </a:p>
         </p:txBody>
@@ -24435,7 +28176,7 @@
                 </a:solidFill>
                 <a:latin typeface="Space Grotesk"/>
               </a:rPr>
-              <a:t>09</a:t>
+              <a:t>08</a:t>
             </a:r>
           </a:p>
         </p:txBody>
@@ -24503,7 +28244,7 @@
                 </a:solidFill>
                 <a:latin typeface="Space Grotesk"/>
               </a:rPr>
-              <a:t>Data — one store per job, and what each costs us</a:t>
+              <a:t>Data stores and cost</a:t>
             </a:r>
           </a:p>
         </p:txBody>
@@ -25141,7 +28882,7 @@
                 </a:solidFill>
                 <a:latin typeface="Space Mono"/>
               </a:rPr>
-              <a:t>9</a:t>
+              <a:t>8</a:t>
             </a:r>
           </a:p>
         </p:txBody>

--- a/slides/wanthat-presentation.pptx
+++ b/slides/wanthat-presentation.pptx
@@ -2217,7 +2217,7 @@
           <a:lstStyle/>
           <a:p>
             <a:r>
-              <a:t>WAF stays flat at every scale - member API operations bypass CloudFront entirely. The scaling costs live in identity (Cognito MAU), Aurora always-on, and the per-request stack (~$90/month combined at 100k).</a:t>
+              <a:t>WAF stays flat at every scale - member API operations bypass CloudFront entirely. Breaks BEFORE the bill: account concurrency 10 (~10k users, peaks) - AliExpress rate limits (ADR-0021) - Aurora's 50-connection cap post-quota-raise (only THEN does the proxy earn its cost) - the 2-ACU max.</a:t>
             </a:r>
           </a:p>
         </p:txBody>
@@ -23950,8 +23950,8 @@
           <p:nvPr/>
         </p:nvGraphicFramePr>
         <p:xfrm>
-          <a:off x="658368" y="1600200"/>
-          <a:ext cx="10881360" cy="2651760"/>
+          <a:off x="658368" y="1554480"/>
+          <a:ext cx="10881360" cy="3931920"/>
         </p:xfrm>
         <a:graphic>
           <a:graphicData uri="http://schemas.openxmlformats.org/drawingml/2006/table">
@@ -23960,33 +23960,14 @@
                 <a:tableStyleId>{5C22544A-7EE6-4342-B048-85BDC9FD1C3A}</a:tableStyleId>
               </a:tblPr>
               <a:tblGrid>
-                <a:gridCol w="3627120"/>
-                <a:gridCol w="3627120"/>
-                <a:gridCol w="3627120"/>
+                <a:gridCol w="3566160"/>
+                <a:gridCol w="1463040"/>
+                <a:gridCol w="1463040"/>
+                <a:gridCol w="1463040"/>
+                <a:gridCol w="1463040"/>
+                <a:gridCol w="1463040"/>
               </a:tblGrid>
-              <a:tr h="441960">
-                <a:tc>
-                  <a:txBody>
-                    <a:bodyPr/>
-                    <a:lstStyle/>
-                    <a:p>
-                      <a:r>
-                        <a:rPr sz="1100" b="1">
-                          <a:solidFill>
-                            <a:srgbClr val="7FE0B0"/>
-                          </a:solidFill>
-                          <a:latin typeface="Space Grotesk"/>
-                        </a:rPr>
-                        <a:t>Active users</a:t>
-                      </a:r>
-                    </a:p>
-                  </a:txBody>
-                  <a:tcPr>
-                    <a:solidFill>
-                      <a:srgbClr val="15201C"/>
-                    </a:solidFill>
-                  </a:tcPr>
-                </a:tc>
+              <a:tr h="393192">
                 <a:tc>
                   <a:txBody>
                     <a:bodyPr/>
@@ -24021,7 +24002,95 @@
                           </a:solidFill>
                           <a:latin typeface="Space Grotesk"/>
                         </a:rPr>
-                        <a:t>What dominates</a:t>
+                        <a:t>10</a:t>
+                      </a:r>
+                    </a:p>
+                  </a:txBody>
+                  <a:tcPr>
+                    <a:solidFill>
+                      <a:srgbClr val="15201C"/>
+                    </a:solidFill>
+                  </a:tcPr>
+                </a:tc>
+                <a:tc>
+                  <a:txBody>
+                    <a:bodyPr/>
+                    <a:lstStyle/>
+                    <a:p>
+                      <a:r>
+                        <a:rPr sz="1100" b="1">
+                          <a:solidFill>
+                            <a:srgbClr val="7FE0B0"/>
+                          </a:solidFill>
+                          <a:latin typeface="Space Grotesk"/>
+                        </a:rPr>
+                        <a:t>100</a:t>
+                      </a:r>
+                    </a:p>
+                  </a:txBody>
+                  <a:tcPr>
+                    <a:solidFill>
+                      <a:srgbClr val="15201C"/>
+                    </a:solidFill>
+                  </a:tcPr>
+                </a:tc>
+                <a:tc>
+                  <a:txBody>
+                    <a:bodyPr/>
+                    <a:lstStyle/>
+                    <a:p>
+                      <a:r>
+                        <a:rPr sz="1100" b="1">
+                          <a:solidFill>
+                            <a:srgbClr val="7FE0B0"/>
+                          </a:solidFill>
+                          <a:latin typeface="Space Grotesk"/>
+                        </a:rPr>
+                        <a:t>1,000</a:t>
+                      </a:r>
+                    </a:p>
+                  </a:txBody>
+                  <a:tcPr>
+                    <a:solidFill>
+                      <a:srgbClr val="15201C"/>
+                    </a:solidFill>
+                  </a:tcPr>
+                </a:tc>
+                <a:tc>
+                  <a:txBody>
+                    <a:bodyPr/>
+                    <a:lstStyle/>
+                    <a:p>
+                      <a:r>
+                        <a:rPr sz="1100" b="1">
+                          <a:solidFill>
+                            <a:srgbClr val="7FE0B0"/>
+                          </a:solidFill>
+                          <a:latin typeface="Space Grotesk"/>
+                        </a:rPr>
+                        <a:t>10,000</a:t>
+                      </a:r>
+                    </a:p>
+                  </a:txBody>
+                  <a:tcPr>
+                    <a:solidFill>
+                      <a:srgbClr val="15201C"/>
+                    </a:solidFill>
+                  </a:tcPr>
+                </a:tc>
+                <a:tc>
+                  <a:txBody>
+                    <a:bodyPr/>
+                    <a:lstStyle/>
+                    <a:p>
+                      <a:r>
+                        <a:rPr sz="1100" b="1">
+                          <a:solidFill>
+                            <a:srgbClr val="7FE0B0"/>
+                          </a:solidFill>
+                          <a:latin typeface="Space Grotesk"/>
+                        </a:rPr>
+                        <a:t>100,000</a:t>
                       </a:r>
                     </a:p>
                   </a:txBody>
@@ -24032,7 +24101,7 @@
                   </a:tcPr>
                 </a:tc>
               </a:tr>
-              <a:tr h="441960">
+              <a:tr h="393192">
                 <a:tc>
                   <a:txBody>
                     <a:bodyPr/>
@@ -24045,13 +24114,1085 @@
                           </a:solidFill>
                           <a:latin typeface="Hanken Grotesk"/>
                         </a:rPr>
-                        <a:t>10</a:t>
+                        <a:t>WAF (2 ACLs, fixed + $0.60/M req)</a:t>
                       </a:r>
                     </a:p>
                   </a:txBody>
                   <a:tcPr>
                     <a:solidFill>
                       <a:srgbClr val="FFFFFF"/>
+                    </a:solidFill>
+                  </a:tcPr>
+                </a:tc>
+                <a:tc>
+                  <a:txBody>
+                    <a:bodyPr/>
+                    <a:lstStyle/>
+                    <a:p>
+                      <a:r>
+                        <a:rPr sz="1050" b="0">
+                          <a:solidFill>
+                            <a:srgbClr val="15201C"/>
+                          </a:solidFill>
+                          <a:latin typeface="Hanken Grotesk"/>
+                        </a:rPr>
+                        <a:t>$14</a:t>
+                      </a:r>
+                    </a:p>
+                  </a:txBody>
+                  <a:tcPr>
+                    <a:solidFill>
+                      <a:srgbClr val="FFFFFF"/>
+                    </a:solidFill>
+                  </a:tcPr>
+                </a:tc>
+                <a:tc>
+                  <a:txBody>
+                    <a:bodyPr/>
+                    <a:lstStyle/>
+                    <a:p>
+                      <a:r>
+                        <a:rPr sz="1050" b="0">
+                          <a:solidFill>
+                            <a:srgbClr val="15201C"/>
+                          </a:solidFill>
+                          <a:latin typeface="Hanken Grotesk"/>
+                        </a:rPr>
+                        <a:t>$14</a:t>
+                      </a:r>
+                    </a:p>
+                  </a:txBody>
+                  <a:tcPr>
+                    <a:solidFill>
+                      <a:srgbClr val="FFFFFF"/>
+                    </a:solidFill>
+                  </a:tcPr>
+                </a:tc>
+                <a:tc>
+                  <a:txBody>
+                    <a:bodyPr/>
+                    <a:lstStyle/>
+                    <a:p>
+                      <a:r>
+                        <a:rPr sz="1050" b="0">
+                          <a:solidFill>
+                            <a:srgbClr val="15201C"/>
+                          </a:solidFill>
+                          <a:latin typeface="Hanken Grotesk"/>
+                        </a:rPr>
+                        <a:t>$14</a:t>
+                      </a:r>
+                    </a:p>
+                  </a:txBody>
+                  <a:tcPr>
+                    <a:solidFill>
+                      <a:srgbClr val="FFFFFF"/>
+                    </a:solidFill>
+                  </a:tcPr>
+                </a:tc>
+                <a:tc>
+                  <a:txBody>
+                    <a:bodyPr/>
+                    <a:lstStyle/>
+                    <a:p>
+                      <a:r>
+                        <a:rPr sz="1050" b="0">
+                          <a:solidFill>
+                            <a:srgbClr val="15201C"/>
+                          </a:solidFill>
+                          <a:latin typeface="Hanken Grotesk"/>
+                        </a:rPr>
+                        <a:t>$15</a:t>
+                      </a:r>
+                    </a:p>
+                  </a:txBody>
+                  <a:tcPr>
+                    <a:solidFill>
+                      <a:srgbClr val="FFFFFF"/>
+                    </a:solidFill>
+                  </a:tcPr>
+                </a:tc>
+                <a:tc>
+                  <a:txBody>
+                    <a:bodyPr/>
+                    <a:lstStyle/>
+                    <a:p>
+                      <a:r>
+                        <a:rPr sz="1050" b="0">
+                          <a:solidFill>
+                            <a:srgbClr val="15201C"/>
+                          </a:solidFill>
+                          <a:latin typeface="Hanken Grotesk"/>
+                        </a:rPr>
+                        <a:t>$27</a:t>
+                      </a:r>
+                    </a:p>
+                  </a:txBody>
+                  <a:tcPr>
+                    <a:solidFill>
+                      <a:srgbClr val="FFFFFF"/>
+                    </a:solidFill>
+                  </a:tcPr>
+                </a:tc>
+              </a:tr>
+              <a:tr h="393192">
+                <a:tc>
+                  <a:txBody>
+                    <a:bodyPr/>
+                    <a:lstStyle/>
+                    <a:p>
+                      <a:r>
+                        <a:rPr sz="1050" b="1">
+                          <a:solidFill>
+                            <a:srgbClr val="15201C"/>
+                          </a:solidFill>
+                          <a:latin typeface="Hanken Grotesk"/>
+                        </a:rPr>
+                        <a:t>API Gateway (~$1.2/M)</a:t>
+                      </a:r>
+                    </a:p>
+                  </a:txBody>
+                  <a:tcPr>
+                    <a:solidFill>
+                      <a:srgbClr val="FFFFFF"/>
+                    </a:solidFill>
+                  </a:tcPr>
+                </a:tc>
+                <a:tc>
+                  <a:txBody>
+                    <a:bodyPr/>
+                    <a:lstStyle/>
+                    <a:p>
+                      <a:r>
+                        <a:rPr sz="1050" b="0">
+                          <a:solidFill>
+                            <a:srgbClr val="15201C"/>
+                          </a:solidFill>
+                          <a:latin typeface="Hanken Grotesk"/>
+                        </a:rPr>
+                        <a:t>~$0</a:t>
+                      </a:r>
+                    </a:p>
+                  </a:txBody>
+                  <a:tcPr>
+                    <a:solidFill>
+                      <a:srgbClr val="FFFFFF"/>
+                    </a:solidFill>
+                  </a:tcPr>
+                </a:tc>
+                <a:tc>
+                  <a:txBody>
+                    <a:bodyPr/>
+                    <a:lstStyle/>
+                    <a:p>
+                      <a:r>
+                        <a:rPr sz="1050" b="0">
+                          <a:solidFill>
+                            <a:srgbClr val="15201C"/>
+                          </a:solidFill>
+                          <a:latin typeface="Hanken Grotesk"/>
+                        </a:rPr>
+                        <a:t>~$0</a:t>
+                      </a:r>
+                    </a:p>
+                  </a:txBody>
+                  <a:tcPr>
+                    <a:solidFill>
+                      <a:srgbClr val="FFFFFF"/>
+                    </a:solidFill>
+                  </a:tcPr>
+                </a:tc>
+                <a:tc>
+                  <a:txBody>
+                    <a:bodyPr/>
+                    <a:lstStyle/>
+                    <a:p>
+                      <a:r>
+                        <a:rPr sz="1050" b="0">
+                          <a:solidFill>
+                            <a:srgbClr val="15201C"/>
+                          </a:solidFill>
+                          <a:latin typeface="Hanken Grotesk"/>
+                        </a:rPr>
+                        <a:t>$0.40</a:t>
+                      </a:r>
+                    </a:p>
+                  </a:txBody>
+                  <a:tcPr>
+                    <a:solidFill>
+                      <a:srgbClr val="FFFFFF"/>
+                    </a:solidFill>
+                  </a:tcPr>
+                </a:tc>
+                <a:tc>
+                  <a:txBody>
+                    <a:bodyPr/>
+                    <a:lstStyle/>
+                    <a:p>
+                      <a:r>
+                        <a:rPr sz="1050" b="0">
+                          <a:solidFill>
+                            <a:srgbClr val="15201C"/>
+                          </a:solidFill>
+                          <a:latin typeface="Hanken Grotesk"/>
+                        </a:rPr>
+                        <a:t>$4</a:t>
+                      </a:r>
+                    </a:p>
+                  </a:txBody>
+                  <a:tcPr>
+                    <a:solidFill>
+                      <a:srgbClr val="FFFFFF"/>
+                    </a:solidFill>
+                  </a:tcPr>
+                </a:tc>
+                <a:tc>
+                  <a:txBody>
+                    <a:bodyPr/>
+                    <a:lstStyle/>
+                    <a:p>
+                      <a:r>
+                        <a:rPr sz="1050" b="0">
+                          <a:solidFill>
+                            <a:srgbClr val="15201C"/>
+                          </a:solidFill>
+                          <a:latin typeface="Hanken Grotesk"/>
+                        </a:rPr>
+                        <a:t>$36</a:t>
+                      </a:r>
+                    </a:p>
+                  </a:txBody>
+                  <a:tcPr>
+                    <a:solidFill>
+                      <a:srgbClr val="FFFFFF"/>
+                    </a:solidFill>
+                  </a:tcPr>
+                </a:tc>
+              </a:tr>
+              <a:tr h="393192">
+                <a:tc>
+                  <a:txBody>
+                    <a:bodyPr/>
+                    <a:lstStyle/>
+                    <a:p>
+                      <a:r>
+                        <a:rPr sz="1050" b="1">
+                          <a:solidFill>
+                            <a:srgbClr val="15201C"/>
+                          </a:solidFill>
+                          <a:latin typeface="Hanken Grotesk"/>
+                        </a:rPr>
+                        <a:t>Lambda (256MB arm64)</a:t>
+                      </a:r>
+                    </a:p>
+                  </a:txBody>
+                  <a:tcPr>
+                    <a:solidFill>
+                      <a:srgbClr val="FFFFFF"/>
+                    </a:solidFill>
+                  </a:tcPr>
+                </a:tc>
+                <a:tc>
+                  <a:txBody>
+                    <a:bodyPr/>
+                    <a:lstStyle/>
+                    <a:p>
+                      <a:r>
+                        <a:rPr sz="1050" b="0">
+                          <a:solidFill>
+                            <a:srgbClr val="15201C"/>
+                          </a:solidFill>
+                          <a:latin typeface="Hanken Grotesk"/>
+                        </a:rPr>
+                        <a:t>~$0</a:t>
+                      </a:r>
+                    </a:p>
+                  </a:txBody>
+                  <a:tcPr>
+                    <a:solidFill>
+                      <a:srgbClr val="FFFFFF"/>
+                    </a:solidFill>
+                  </a:tcPr>
+                </a:tc>
+                <a:tc>
+                  <a:txBody>
+                    <a:bodyPr/>
+                    <a:lstStyle/>
+                    <a:p>
+                      <a:r>
+                        <a:rPr sz="1050" b="0">
+                          <a:solidFill>
+                            <a:srgbClr val="15201C"/>
+                          </a:solidFill>
+                          <a:latin typeface="Hanken Grotesk"/>
+                        </a:rPr>
+                        <a:t>~$0</a:t>
+                      </a:r>
+                    </a:p>
+                  </a:txBody>
+                  <a:tcPr>
+                    <a:solidFill>
+                      <a:srgbClr val="FFFFFF"/>
+                    </a:solidFill>
+                  </a:tcPr>
+                </a:tc>
+                <a:tc>
+                  <a:txBody>
+                    <a:bodyPr/>
+                    <a:lstStyle/>
+                    <a:p>
+                      <a:r>
+                        <a:rPr sz="1050" b="0">
+                          <a:solidFill>
+                            <a:srgbClr val="15201C"/>
+                          </a:solidFill>
+                          <a:latin typeface="Hanken Grotesk"/>
+                        </a:rPr>
+                        <a:t>$0.20</a:t>
+                      </a:r>
+                    </a:p>
+                  </a:txBody>
+                  <a:tcPr>
+                    <a:solidFill>
+                      <a:srgbClr val="FFFFFF"/>
+                    </a:solidFill>
+                  </a:tcPr>
+                </a:tc>
+                <a:tc>
+                  <a:txBody>
+                    <a:bodyPr/>
+                    <a:lstStyle/>
+                    <a:p>
+                      <a:r>
+                        <a:rPr sz="1050" b="0">
+                          <a:solidFill>
+                            <a:srgbClr val="15201C"/>
+                          </a:solidFill>
+                          <a:latin typeface="Hanken Grotesk"/>
+                        </a:rPr>
+                        <a:t>$2</a:t>
+                      </a:r>
+                    </a:p>
+                  </a:txBody>
+                  <a:tcPr>
+                    <a:solidFill>
+                      <a:srgbClr val="FFFFFF"/>
+                    </a:solidFill>
+                  </a:tcPr>
+                </a:tc>
+                <a:tc>
+                  <a:txBody>
+                    <a:bodyPr/>
+                    <a:lstStyle/>
+                    <a:p>
+                      <a:r>
+                        <a:rPr sz="1050" b="0">
+                          <a:solidFill>
+                            <a:srgbClr val="15201C"/>
+                          </a:solidFill>
+                          <a:latin typeface="Hanken Grotesk"/>
+                        </a:rPr>
+                        <a:t>$18</a:t>
+                      </a:r>
+                    </a:p>
+                  </a:txBody>
+                  <a:tcPr>
+                    <a:solidFill>
+                      <a:srgbClr val="FFFFFF"/>
+                    </a:solidFill>
+                  </a:tcPr>
+                </a:tc>
+              </a:tr>
+              <a:tr h="393192">
+                <a:tc>
+                  <a:txBody>
+                    <a:bodyPr/>
+                    <a:lstStyle/>
+                    <a:p>
+                      <a:r>
+                        <a:rPr sz="1050" b="1">
+                          <a:solidFill>
+                            <a:srgbClr val="15201C"/>
+                          </a:solidFill>
+                          <a:latin typeface="Hanken Grotesk"/>
+                        </a:rPr>
+                        <a:t>DynamoDB on-demand</a:t>
+                      </a:r>
+                    </a:p>
+                  </a:txBody>
+                  <a:tcPr>
+                    <a:solidFill>
+                      <a:srgbClr val="FFFFFF"/>
+                    </a:solidFill>
+                  </a:tcPr>
+                </a:tc>
+                <a:tc>
+                  <a:txBody>
+                    <a:bodyPr/>
+                    <a:lstStyle/>
+                    <a:p>
+                      <a:r>
+                        <a:rPr sz="1050" b="0">
+                          <a:solidFill>
+                            <a:srgbClr val="15201C"/>
+                          </a:solidFill>
+                          <a:latin typeface="Hanken Grotesk"/>
+                        </a:rPr>
+                        <a:t>~$0</a:t>
+                      </a:r>
+                    </a:p>
+                  </a:txBody>
+                  <a:tcPr>
+                    <a:solidFill>
+                      <a:srgbClr val="FFFFFF"/>
+                    </a:solidFill>
+                  </a:tcPr>
+                </a:tc>
+                <a:tc>
+                  <a:txBody>
+                    <a:bodyPr/>
+                    <a:lstStyle/>
+                    <a:p>
+                      <a:r>
+                        <a:rPr sz="1050" b="0">
+                          <a:solidFill>
+                            <a:srgbClr val="15201C"/>
+                          </a:solidFill>
+                          <a:latin typeface="Hanken Grotesk"/>
+                        </a:rPr>
+                        <a:t>~$0</a:t>
+                      </a:r>
+                    </a:p>
+                  </a:txBody>
+                  <a:tcPr>
+                    <a:solidFill>
+                      <a:srgbClr val="FFFFFF"/>
+                    </a:solidFill>
+                  </a:tcPr>
+                </a:tc>
+                <a:tc>
+                  <a:txBody>
+                    <a:bodyPr/>
+                    <a:lstStyle/>
+                    <a:p>
+                      <a:r>
+                        <a:rPr sz="1050" b="0">
+                          <a:solidFill>
+                            <a:srgbClr val="15201C"/>
+                          </a:solidFill>
+                          <a:latin typeface="Hanken Grotesk"/>
+                        </a:rPr>
+                        <a:t>$0.40</a:t>
+                      </a:r>
+                    </a:p>
+                  </a:txBody>
+                  <a:tcPr>
+                    <a:solidFill>
+                      <a:srgbClr val="FFFFFF"/>
+                    </a:solidFill>
+                  </a:tcPr>
+                </a:tc>
+                <a:tc>
+                  <a:txBody>
+                    <a:bodyPr/>
+                    <a:lstStyle/>
+                    <a:p>
+                      <a:r>
+                        <a:rPr sz="1050" b="0">
+                          <a:solidFill>
+                            <a:srgbClr val="15201C"/>
+                          </a:solidFill>
+                          <a:latin typeface="Hanken Grotesk"/>
+                        </a:rPr>
+                        <a:t>$4</a:t>
+                      </a:r>
+                    </a:p>
+                  </a:txBody>
+                  <a:tcPr>
+                    <a:solidFill>
+                      <a:srgbClr val="FFFFFF"/>
+                    </a:solidFill>
+                  </a:tcPr>
+                </a:tc>
+                <a:tc>
+                  <a:txBody>
+                    <a:bodyPr/>
+                    <a:lstStyle/>
+                    <a:p>
+                      <a:r>
+                        <a:rPr sz="1050" b="0">
+                          <a:solidFill>
+                            <a:srgbClr val="15201C"/>
+                          </a:solidFill>
+                          <a:latin typeface="Hanken Grotesk"/>
+                        </a:rPr>
+                        <a:t>$40</a:t>
+                      </a:r>
+                    </a:p>
+                  </a:txBody>
+                  <a:tcPr>
+                    <a:solidFill>
+                      <a:srgbClr val="FFFFFF"/>
+                    </a:solidFill>
+                  </a:tcPr>
+                </a:tc>
+              </a:tr>
+              <a:tr h="393192">
+                <a:tc>
+                  <a:txBody>
+                    <a:bodyPr/>
+                    <a:lstStyle/>
+                    <a:p>
+                      <a:r>
+                        <a:rPr sz="1050" b="1">
+                          <a:solidFill>
+                            <a:srgbClr val="15201C"/>
+                          </a:solidFill>
+                          <a:latin typeface="Hanken Grotesk"/>
+                        </a:rPr>
+                        <a:t>Aurora (compute + storage)</a:t>
+                      </a:r>
+                    </a:p>
+                  </a:txBody>
+                  <a:tcPr>
+                    <a:solidFill>
+                      <a:srgbClr val="FFFFFF"/>
+                    </a:solidFill>
+                  </a:tcPr>
+                </a:tc>
+                <a:tc>
+                  <a:txBody>
+                    <a:bodyPr/>
+                    <a:lstStyle/>
+                    <a:p>
+                      <a:r>
+                        <a:rPr sz="1050" b="0">
+                          <a:solidFill>
+                            <a:srgbClr val="15201C"/>
+                          </a:solidFill>
+                          <a:latin typeface="Hanken Grotesk"/>
+                        </a:rPr>
+                        <a:t>~$3</a:t>
+                      </a:r>
+                    </a:p>
+                  </a:txBody>
+                  <a:tcPr>
+                    <a:solidFill>
+                      <a:srgbClr val="FFFFFF"/>
+                    </a:solidFill>
+                  </a:tcPr>
+                </a:tc>
+                <a:tc>
+                  <a:txBody>
+                    <a:bodyPr/>
+                    <a:lstStyle/>
+                    <a:p>
+                      <a:r>
+                        <a:rPr sz="1050" b="0">
+                          <a:solidFill>
+                            <a:srgbClr val="15201C"/>
+                          </a:solidFill>
+                          <a:latin typeface="Hanken Grotesk"/>
+                        </a:rPr>
+                        <a:t>~$8</a:t>
+                      </a:r>
+                    </a:p>
+                  </a:txBody>
+                  <a:tcPr>
+                    <a:solidFill>
+                      <a:srgbClr val="FFFFFF"/>
+                    </a:solidFill>
+                  </a:tcPr>
+                </a:tc>
+                <a:tc>
+                  <a:txBody>
+                    <a:bodyPr/>
+                    <a:lstStyle/>
+                    <a:p>
+                      <a:r>
+                        <a:rPr sz="1050" b="0">
+                          <a:solidFill>
+                            <a:srgbClr val="15201C"/>
+                          </a:solidFill>
+                          <a:latin typeface="Hanken Grotesk"/>
+                        </a:rPr>
+                        <a:t>~$45</a:t>
+                      </a:r>
+                    </a:p>
+                  </a:txBody>
+                  <a:tcPr>
+                    <a:solidFill>
+                      <a:srgbClr val="FFFFFF"/>
+                    </a:solidFill>
+                  </a:tcPr>
+                </a:tc>
+                <a:tc>
+                  <a:txBody>
+                    <a:bodyPr/>
+                    <a:lstStyle/>
+                    <a:p>
+                      <a:r>
+                        <a:rPr sz="1050" b="0">
+                          <a:solidFill>
+                            <a:srgbClr val="15201C"/>
+                          </a:solidFill>
+                          <a:latin typeface="Hanken Grotesk"/>
+                        </a:rPr>
+                        <a:t>~$80</a:t>
+                      </a:r>
+                    </a:p>
+                  </a:txBody>
+                  <a:tcPr>
+                    <a:solidFill>
+                      <a:srgbClr val="FFFFFF"/>
+                    </a:solidFill>
+                  </a:tcPr>
+                </a:tc>
+                <a:tc>
+                  <a:txBody>
+                    <a:bodyPr/>
+                    <a:lstStyle/>
+                    <a:p>
+                      <a:r>
+                        <a:rPr sz="1050" b="0">
+                          <a:solidFill>
+                            <a:srgbClr val="15201C"/>
+                          </a:solidFill>
+                          <a:latin typeface="Hanken Grotesk"/>
+                        </a:rPr>
+                        <a:t>~$220</a:t>
+                      </a:r>
+                    </a:p>
+                  </a:txBody>
+                  <a:tcPr>
+                    <a:solidFill>
+                      <a:srgbClr val="FFFFFF"/>
+                    </a:solidFill>
+                  </a:tcPr>
+                </a:tc>
+              </a:tr>
+              <a:tr h="393192">
+                <a:tc>
+                  <a:txBody>
+                    <a:bodyPr/>
+                    <a:lstStyle/>
+                    <a:p>
+                      <a:r>
+                        <a:rPr sz="1050" b="1">
+                          <a:solidFill>
+                            <a:srgbClr val="15201C"/>
+                          </a:solidFill>
+                          <a:latin typeface="Hanken Grotesk"/>
+                        </a:rPr>
+                        <a:t>RDS Proxy (8-ACU minimum)</a:t>
+                      </a:r>
+                    </a:p>
+                  </a:txBody>
+                  <a:tcPr>
+                    <a:solidFill>
+                      <a:srgbClr val="FFFFFF"/>
+                    </a:solidFill>
+                  </a:tcPr>
+                </a:tc>
+                <a:tc>
+                  <a:txBody>
+                    <a:bodyPr/>
+                    <a:lstStyle/>
+                    <a:p>
+                      <a:r>
+                        <a:rPr sz="1050" b="0">
+                          <a:solidFill>
+                            <a:srgbClr val="15201C"/>
+                          </a:solidFill>
+                          <a:latin typeface="Hanken Grotesk"/>
+                        </a:rPr>
+                        <a:t>—</a:t>
+                      </a:r>
+                    </a:p>
+                  </a:txBody>
+                  <a:tcPr>
+                    <a:solidFill>
+                      <a:srgbClr val="FFFFFF"/>
+                    </a:solidFill>
+                  </a:tcPr>
+                </a:tc>
+                <a:tc>
+                  <a:txBody>
+                    <a:bodyPr/>
+                    <a:lstStyle/>
+                    <a:p>
+                      <a:r>
+                        <a:rPr sz="1050" b="0">
+                          <a:solidFill>
+                            <a:srgbClr val="15201C"/>
+                          </a:solidFill>
+                          <a:latin typeface="Hanken Grotesk"/>
+                        </a:rPr>
+                        <a:t>—</a:t>
+                      </a:r>
+                    </a:p>
+                  </a:txBody>
+                  <a:tcPr>
+                    <a:solidFill>
+                      <a:srgbClr val="FFFFFF"/>
+                    </a:solidFill>
+                  </a:tcPr>
+                </a:tc>
+                <a:tc>
+                  <a:txBody>
+                    <a:bodyPr/>
+                    <a:lstStyle/>
+                    <a:p>
+                      <a:r>
+                        <a:rPr sz="1050" b="0">
+                          <a:solidFill>
+                            <a:srgbClr val="15201C"/>
+                          </a:solidFill>
+                          <a:latin typeface="Hanken Grotesk"/>
+                        </a:rPr>
+                        <a:t>—</a:t>
+                      </a:r>
+                    </a:p>
+                  </a:txBody>
+                  <a:tcPr>
+                    <a:solidFill>
+                      <a:srgbClr val="FFFFFF"/>
+                    </a:solidFill>
+                  </a:tcPr>
+                </a:tc>
+                <a:tc>
+                  <a:txBody>
+                    <a:bodyPr/>
+                    <a:lstStyle/>
+                    <a:p>
+                      <a:r>
+                        <a:rPr sz="1050" b="0">
+                          <a:solidFill>
+                            <a:srgbClr val="15201C"/>
+                          </a:solidFill>
+                          <a:latin typeface="Hanken Grotesk"/>
+                        </a:rPr>
+                        <a:t>~$100</a:t>
+                      </a:r>
+                    </a:p>
+                  </a:txBody>
+                  <a:tcPr>
+                    <a:solidFill>
+                      <a:srgbClr val="FFFFFF"/>
+                    </a:solidFill>
+                  </a:tcPr>
+                </a:tc>
+                <a:tc>
+                  <a:txBody>
+                    <a:bodyPr/>
+                    <a:lstStyle/>
+                    <a:p>
+                      <a:r>
+                        <a:rPr sz="1050" b="0">
+                          <a:solidFill>
+                            <a:srgbClr val="15201C"/>
+                          </a:solidFill>
+                          <a:latin typeface="Hanken Grotesk"/>
+                        </a:rPr>
+                        <a:t>~$100</a:t>
+                      </a:r>
+                    </a:p>
+                  </a:txBody>
+                  <a:tcPr>
+                    <a:solidFill>
+                      <a:srgbClr val="FFFFFF"/>
+                    </a:solidFill>
+                  </a:tcPr>
+                </a:tc>
+              </a:tr>
+              <a:tr h="393192">
+                <a:tc>
+                  <a:txBody>
+                    <a:bodyPr/>
+                    <a:lstStyle/>
+                    <a:p>
+                      <a:r>
+                        <a:rPr sz="1050" b="1">
+                          <a:solidFill>
+                            <a:srgbClr val="15201C"/>
+                          </a:solidFill>
+                          <a:latin typeface="Hanken Grotesk"/>
+                        </a:rPr>
+                        <a:t>Cognito ($0.015/MAU after 10k free)</a:t>
+                      </a:r>
+                    </a:p>
+                  </a:txBody>
+                  <a:tcPr>
+                    <a:solidFill>
+                      <a:srgbClr val="FFFFFF"/>
+                    </a:solidFill>
+                  </a:tcPr>
+                </a:tc>
+                <a:tc>
+                  <a:txBody>
+                    <a:bodyPr/>
+                    <a:lstStyle/>
+                    <a:p>
+                      <a:r>
+                        <a:rPr sz="1050" b="0">
+                          <a:solidFill>
+                            <a:srgbClr val="15201C"/>
+                          </a:solidFill>
+                          <a:latin typeface="Hanken Grotesk"/>
+                        </a:rPr>
+                        <a:t>$0</a:t>
+                      </a:r>
+                    </a:p>
+                  </a:txBody>
+                  <a:tcPr>
+                    <a:solidFill>
+                      <a:srgbClr val="FFFFFF"/>
+                    </a:solidFill>
+                  </a:tcPr>
+                </a:tc>
+                <a:tc>
+                  <a:txBody>
+                    <a:bodyPr/>
+                    <a:lstStyle/>
+                    <a:p>
+                      <a:r>
+                        <a:rPr sz="1050" b="0">
+                          <a:solidFill>
+                            <a:srgbClr val="15201C"/>
+                          </a:solidFill>
+                          <a:latin typeface="Hanken Grotesk"/>
+                        </a:rPr>
+                        <a:t>$0</a:t>
+                      </a:r>
+                    </a:p>
+                  </a:txBody>
+                  <a:tcPr>
+                    <a:solidFill>
+                      <a:srgbClr val="FFFFFF"/>
+                    </a:solidFill>
+                  </a:tcPr>
+                </a:tc>
+                <a:tc>
+                  <a:txBody>
+                    <a:bodyPr/>
+                    <a:lstStyle/>
+                    <a:p>
+                      <a:r>
+                        <a:rPr sz="1050" b="0">
+                          <a:solidFill>
+                            <a:srgbClr val="15201C"/>
+                          </a:solidFill>
+                          <a:latin typeface="Hanken Grotesk"/>
+                        </a:rPr>
+                        <a:t>$0</a:t>
+                      </a:r>
+                    </a:p>
+                  </a:txBody>
+                  <a:tcPr>
+                    <a:solidFill>
+                      <a:srgbClr val="FFFFFF"/>
+                    </a:solidFill>
+                  </a:tcPr>
+                </a:tc>
+                <a:tc>
+                  <a:txBody>
+                    <a:bodyPr/>
+                    <a:lstStyle/>
+                    <a:p>
+                      <a:r>
+                        <a:rPr sz="1050" b="0">
+                          <a:solidFill>
+                            <a:srgbClr val="15201C"/>
+                          </a:solidFill>
+                          <a:latin typeface="Hanken Grotesk"/>
+                        </a:rPr>
+                        <a:t>$0</a:t>
+                      </a:r>
+                    </a:p>
+                  </a:txBody>
+                  <a:tcPr>
+                    <a:solidFill>
+                      <a:srgbClr val="FFFFFF"/>
+                    </a:solidFill>
+                  </a:tcPr>
+                </a:tc>
+                <a:tc>
+                  <a:txBody>
+                    <a:bodyPr/>
+                    <a:lstStyle/>
+                    <a:p>
+                      <a:r>
+                        <a:rPr sz="1050" b="0">
+                          <a:solidFill>
+                            <a:srgbClr val="15201C"/>
+                          </a:solidFill>
+                          <a:latin typeface="Hanken Grotesk"/>
+                        </a:rPr>
+                        <a:t>$1,350</a:t>
+                      </a:r>
+                    </a:p>
+                  </a:txBody>
+                  <a:tcPr>
+                    <a:solidFill>
+                      <a:srgbClr val="FFFFFF"/>
+                    </a:solidFill>
+                  </a:tcPr>
+                </a:tc>
+              </a:tr>
+              <a:tr h="393192">
+                <a:tc>
+                  <a:txBody>
+                    <a:bodyPr/>
+                    <a:lstStyle/>
+                    <a:p>
+                      <a:r>
+                        <a:rPr sz="1050" b="1">
+                          <a:solidFill>
+                            <a:srgbClr val="15201C"/>
+                          </a:solidFill>
+                          <a:latin typeface="Hanken Grotesk"/>
+                        </a:rPr>
+                        <a:t>CloudFront + misc</a:t>
+                      </a:r>
+                    </a:p>
+                  </a:txBody>
+                  <a:tcPr>
+                    <a:solidFill>
+                      <a:srgbClr val="FFFFFF"/>
+                    </a:solidFill>
+                  </a:tcPr>
+                </a:tc>
+                <a:tc>
+                  <a:txBody>
+                    <a:bodyPr/>
+                    <a:lstStyle/>
+                    <a:p>
+                      <a:r>
+                        <a:rPr sz="1050" b="0">
+                          <a:solidFill>
+                            <a:srgbClr val="15201C"/>
+                          </a:solidFill>
+                          <a:latin typeface="Hanken Grotesk"/>
+                        </a:rPr>
+                        <a:t>~$3</a:t>
+                      </a:r>
+                    </a:p>
+                  </a:txBody>
+                  <a:tcPr>
+                    <a:solidFill>
+                      <a:srgbClr val="FFFFFF"/>
+                    </a:solidFill>
+                  </a:tcPr>
+                </a:tc>
+                <a:tc>
+                  <a:txBody>
+                    <a:bodyPr/>
+                    <a:lstStyle/>
+                    <a:p>
+                      <a:r>
+                        <a:rPr sz="1050" b="0">
+                          <a:solidFill>
+                            <a:srgbClr val="15201C"/>
+                          </a:solidFill>
+                          <a:latin typeface="Hanken Grotesk"/>
+                        </a:rPr>
+                        <a:t>~$3</a:t>
+                      </a:r>
+                    </a:p>
+                  </a:txBody>
+                  <a:tcPr>
+                    <a:solidFill>
+                      <a:srgbClr val="FFFFFF"/>
+                    </a:solidFill>
+                  </a:tcPr>
+                </a:tc>
+                <a:tc>
+                  <a:txBody>
+                    <a:bodyPr/>
+                    <a:lstStyle/>
+                    <a:p>
+                      <a:r>
+                        <a:rPr sz="1050" b="0">
+                          <a:solidFill>
+                            <a:srgbClr val="15201C"/>
+                          </a:solidFill>
+                          <a:latin typeface="Hanken Grotesk"/>
+                        </a:rPr>
+                        <a:t>~$5</a:t>
+                      </a:r>
+                    </a:p>
+                  </a:txBody>
+                  <a:tcPr>
+                    <a:solidFill>
+                      <a:srgbClr val="FFFFFF"/>
+                    </a:solidFill>
+                  </a:tcPr>
+                </a:tc>
+                <a:tc>
+                  <a:txBody>
+                    <a:bodyPr/>
+                    <a:lstStyle/>
+                    <a:p>
+                      <a:r>
+                        <a:rPr sz="1050" b="0">
+                          <a:solidFill>
+                            <a:srgbClr val="15201C"/>
+                          </a:solidFill>
+                          <a:latin typeface="Hanken Grotesk"/>
+                        </a:rPr>
+                        <a:t>~$12</a:t>
+                      </a:r>
+                    </a:p>
+                  </a:txBody>
+                  <a:tcPr>
+                    <a:solidFill>
+                      <a:srgbClr val="FFFFFF"/>
+                    </a:solidFill>
+                  </a:tcPr>
+                </a:tc>
+                <a:tc>
+                  <a:txBody>
+                    <a:bodyPr/>
+                    <a:lstStyle/>
+                    <a:p>
+                      <a:r>
+                        <a:rPr sz="1050" b="0">
+                          <a:solidFill>
+                            <a:srgbClr val="15201C"/>
+                          </a:solidFill>
+                          <a:latin typeface="Hanken Grotesk"/>
+                        </a:rPr>
+                        <a:t>~$42</a:t>
+                      </a:r>
+                    </a:p>
+                  </a:txBody>
+                  <a:tcPr>
+                    <a:solidFill>
+                      <a:srgbClr val="FFFFFF"/>
+                    </a:solidFill>
+                  </a:tcPr>
+                </a:tc>
+              </a:tr>
+              <a:tr h="393192">
+                <a:tc>
+                  <a:txBody>
+                    <a:bodyPr/>
+                    <a:lstStyle/>
+                    <a:p>
+                      <a:r>
+                        <a:rPr sz="1050" b="1">
+                          <a:solidFill>
+                            <a:srgbClr val="15201C"/>
+                          </a:solidFill>
+                          <a:latin typeface="Hanken Grotesk"/>
+                        </a:rPr>
+                        <a:t>Total</a:t>
+                      </a:r>
+                    </a:p>
+                  </a:txBody>
+                  <a:tcPr>
+                    <a:solidFill>
+                      <a:srgbClr val="EAF5EF"/>
                     </a:solidFill>
                   </a:tcPr>
                 </a:tc>
@@ -24073,7 +25214,7 @@
                   </a:txBody>
                   <a:tcPr>
                     <a:solidFill>
-                      <a:srgbClr val="FFFFFF"/>
+                      <a:srgbClr val="EAF5EF"/>
                     </a:solidFill>
                   </a:tcPr>
                 </a:tc>
@@ -24089,37 +25230,13 @@
                           </a:solidFill>
                           <a:latin typeface="Hanken Grotesk"/>
                         </a:rPr>
-                        <a:t>the fixed floor (WAF $14 + Aurora storage)</a:t>
+                        <a:t>~$25</a:t>
                       </a:r>
                     </a:p>
                   </a:txBody>
                   <a:tcPr>
                     <a:solidFill>
-                      <a:srgbClr val="FFFFFF"/>
-                    </a:solidFill>
-                  </a:tcPr>
-                </a:tc>
-              </a:tr>
-              <a:tr h="441960">
-                <a:tc>
-                  <a:txBody>
-                    <a:bodyPr/>
-                    <a:lstStyle/>
-                    <a:p>
-                      <a:r>
-                        <a:rPr sz="1050" b="1">
-                          <a:solidFill>
-                            <a:srgbClr val="15201C"/>
-                          </a:solidFill>
-                          <a:latin typeface="Hanken Grotesk"/>
-                        </a:rPr>
-                        <a:t>1,000</a:t>
-                      </a:r>
-                    </a:p>
-                  </a:txBody>
-                  <a:tcPr>
-                    <a:solidFill>
-                      <a:srgbClr val="FFFFFF"/>
+                      <a:srgbClr val="EAF5EF"/>
                     </a:solidFill>
                   </a:tcPr>
                 </a:tc>
@@ -24135,13 +25252,13 @@
                           </a:solidFill>
                           <a:latin typeface="Hanken Grotesk"/>
                         </a:rPr>
-                        <a:t>~$55-75</a:t>
+                        <a:t>~$65</a:t>
                       </a:r>
                     </a:p>
                   </a:txBody>
                   <a:tcPr>
                     <a:solidFill>
-                      <a:srgbClr val="FFFFFF"/>
+                      <a:srgbClr val="EAF5EF"/>
                     </a:solidFill>
                   </a:tcPr>
                 </a:tc>
@@ -24157,37 +25274,13 @@
                           </a:solidFill>
                           <a:latin typeface="Hanken Grotesk"/>
                         </a:rPr>
-                        <a:t>Aurora stops scaling to zero (~$35-55)</a:t>
+                        <a:t>~$215</a:t>
                       </a:r>
                     </a:p>
                   </a:txBody>
                   <a:tcPr>
                     <a:solidFill>
-                      <a:srgbClr val="FFFFFF"/>
-                    </a:solidFill>
-                  </a:tcPr>
-                </a:tc>
-              </a:tr>
-              <a:tr h="441960">
-                <a:tc>
-                  <a:txBody>
-                    <a:bodyPr/>
-                    <a:lstStyle/>
-                    <a:p>
-                      <a:r>
-                        <a:rPr sz="1050" b="1">
-                          <a:solidFill>
-                            <a:srgbClr val="15201C"/>
-                          </a:solidFill>
-                          <a:latin typeface="Hanken Grotesk"/>
-                        </a:rPr>
-                        <a:t>10,000</a:t>
-                      </a:r>
-                    </a:p>
-                  </a:txBody>
-                  <a:tcPr>
-                    <a:solidFill>
-                      <a:srgbClr val="FFFFFF"/>
+                      <a:srgbClr val="EAF5EF"/>
                     </a:solidFill>
                   </a:tcPr>
                 </a:tc>
@@ -24203,171 +25296,13 @@
                           </a:solidFill>
                           <a:latin typeface="Hanken Grotesk"/>
                         </a:rPr>
-                        <a:t>~$90-150</a:t>
+                        <a:t>~$1,835</a:t>
                       </a:r>
                     </a:p>
                   </a:txBody>
                   <a:tcPr>
                     <a:solidFill>
-                      <a:srgbClr val="FFFFFF"/>
-                    </a:solidFill>
-                  </a:tcPr>
-                </a:tc>
-                <a:tc>
-                  <a:txBody>
-                    <a:bodyPr/>
-                    <a:lstStyle/>
-                    <a:p>
-                      <a:r>
-                        <a:rPr sz="1050" b="1">
-                          <a:solidFill>
-                            <a:srgbClr val="15201C"/>
-                          </a:solidFill>
-                          <a:latin typeface="Hanken Grotesk"/>
-                        </a:rPr>
-                        <a:t>still inside the Cognito free tier (10k MAU)</a:t>
-                      </a:r>
-                    </a:p>
-                  </a:txBody>
-                  <a:tcPr>
-                    <a:solidFill>
-                      <a:srgbClr val="FFFFFF"/>
-                    </a:solidFill>
-                  </a:tcPr>
-                </a:tc>
-              </a:tr>
-              <a:tr h="441960">
-                <a:tc>
-                  <a:txBody>
-                    <a:bodyPr/>
-                    <a:lstStyle/>
-                    <a:p>
-                      <a:r>
-                        <a:rPr sz="1050" b="1">
-                          <a:solidFill>
-                            <a:srgbClr val="15201C"/>
-                          </a:solidFill>
-                          <a:latin typeface="Hanken Grotesk"/>
-                        </a:rPr>
-                        <a:t>10,000 + RDS Proxy</a:t>
-                      </a:r>
-                    </a:p>
-                  </a:txBody>
-                  <a:tcPr>
-                    <a:solidFill>
-                      <a:srgbClr val="FFFFFF"/>
-                    </a:solidFill>
-                  </a:tcPr>
-                </a:tc>
-                <a:tc>
-                  <a:txBody>
-                    <a:bodyPr/>
-                    <a:lstStyle/>
-                    <a:p>
-                      <a:r>
-                        <a:rPr sz="1050" b="1">
-                          <a:solidFill>
-                            <a:srgbClr val="15201C"/>
-                          </a:solidFill>
-                          <a:latin typeface="Hanken Grotesk"/>
-                        </a:rPr>
-                        <a:t>~$190-250</a:t>
-                      </a:r>
-                    </a:p>
-                  </a:txBody>
-                  <a:tcPr>
-                    <a:solidFill>
-                      <a:srgbClr val="FFFFFF"/>
-                    </a:solidFill>
-                  </a:tcPr>
-                </a:tc>
-                <a:tc>
-                  <a:txBody>
-                    <a:bodyPr/>
-                    <a:lstStyle/>
-                    <a:p>
-                      <a:r>
-                        <a:rPr sz="1050" b="1">
-                          <a:solidFill>
-                            <a:srgbClr val="15201C"/>
-                          </a:solidFill>
-                          <a:latin typeface="Hanken Grotesk"/>
-                        </a:rPr>
-                        <a:t>proxy 8-ACU minimum = ~$100/month FLAT</a:t>
-                      </a:r>
-                    </a:p>
-                  </a:txBody>
-                  <a:tcPr>
-                    <a:solidFill>
-                      <a:srgbClr val="FFFFFF"/>
-                    </a:solidFill>
-                  </a:tcPr>
-                </a:tc>
-              </a:tr>
-              <a:tr h="441960">
-                <a:tc>
-                  <a:txBody>
-                    <a:bodyPr/>
-                    <a:lstStyle/>
-                    <a:p>
-                      <a:r>
-                        <a:rPr sz="1050" b="1">
-                          <a:solidFill>
-                            <a:srgbClr val="15201C"/>
-                          </a:solidFill>
-                          <a:latin typeface="Hanken Grotesk"/>
-                        </a:rPr>
-                        <a:t>100,000</a:t>
-                      </a:r>
-                    </a:p>
-                  </a:txBody>
-                  <a:tcPr>
-                    <a:solidFill>
-                      <a:srgbClr val="FFFFFF"/>
-                    </a:solidFill>
-                  </a:tcPr>
-                </a:tc>
-                <a:tc>
-                  <a:txBody>
-                    <a:bodyPr/>
-                    <a:lstStyle/>
-                    <a:p>
-                      <a:r>
-                        <a:rPr sz="1050" b="1">
-                          <a:solidFill>
-                            <a:srgbClr val="15201C"/>
-                          </a:solidFill>
-                          <a:latin typeface="Hanken Grotesk"/>
-                        </a:rPr>
-                        <a:t>~$1,730</a:t>
-                      </a:r>
-                    </a:p>
-                  </a:txBody>
-                  <a:tcPr>
-                    <a:solidFill>
-                      <a:srgbClr val="FFFFFF"/>
-                    </a:solidFill>
-                  </a:tcPr>
-                </a:tc>
-                <a:tc>
-                  <a:txBody>
-                    <a:bodyPr/>
-                    <a:lstStyle/>
-                    <a:p>
-                      <a:r>
-                        <a:rPr sz="1050" b="1">
-                          <a:solidFill>
-                            <a:srgbClr val="15201C"/>
-                          </a:solidFill>
-                          <a:latin typeface="Hanken Grotesk"/>
-                        </a:rPr>
-                        <a:t>Cognito MAU $1,350 = 78% of the bill</a:t>
-                      </a:r>
-                    </a:p>
-                  </a:txBody>
-                  <a:tcPr>
-                    <a:solidFill>
-                      <a:srgbClr val="FFFFFF"/>
+                      <a:srgbClr val="EAF5EF"/>
                     </a:solidFill>
                   </a:tcPr>
                 </a:tc>
@@ -24384,8 +25319,8 @@
         </p:nvSpPr>
         <p:spPr>
           <a:xfrm>
-            <a:off x="658368" y="4572000"/>
-            <a:ext cx="10881360" cy="1737360"/>
+            <a:off x="658368" y="5623560"/>
+            <a:ext cx="10881360" cy="731520"/>
           </a:xfrm>
           <a:prstGeom prst="rect">
             <a:avLst/>
@@ -24399,35 +25334,24 @@
           <a:lstStyle/>
           <a:p>
             <a:r>
-              <a:rPr sz="1150" b="0">
+              <a:rPr sz="1100">
                 <a:solidFill>
                   <a:srgbClr val="6B7B73"/>
                 </a:solidFill>
                 <a:latin typeface="Hanken Grotesk"/>
               </a:rPr>
-              <a:t>Assumptions: 10 operations/user/day (wallet refresh, create recommendation), ~70/30 read-write, il-central-1 approximate prices, prod only; every active user = 1 Cognito MAU.</a:t>
-            </a:r>
-          </a:p>
-          <a:p>
-            <a:r>
-              <a:rPr sz="1150" b="0">
+              <a:t>Assumptions: 10 operations/user/day, ~70/30 read-write, il-central-1 approximate prices, prod only; every active user = 1 Cognito MAU; RDS Proxy included from 10k users.</a:t>
+            </a:r>
+          </a:p>
+          <a:p>
+            <a:r>
+              <a:rPr sz="1100">
                 <a:solidFill>
                   <a:srgbClr val="6B7B73"/>
                 </a:solidFill>
                 <a:latin typeface="Hanken Grotesk"/>
               </a:rPr>
-              <a:t>Two step functions, then linear: Aurora stops sleeping (~1k users); the Cognito free tier ends at exactly 10k MAU ($0.015/MAU after). Per-user at 100k: ~$0.017/month.</a:t>
-            </a:r>
-          </a:p>
-          <a:p>
-            <a:r>
-              <a:rPr sz="1150" b="0">
-                <a:solidFill>
-                  <a:srgbClr val="6B7B73"/>
-                </a:solidFill>
-                <a:latin typeface="Hanken Grotesk"/>
-              </a:rPr>
-              <a:t>Breaks BEFORE the bill: account concurrency 10 (~10k users, peaks) - AliExpress rate limits (ADR-0021) - Aurora 50 connections post-quota-raise (only THEN the proxy) - the 2-ACU max.</a:t>
+              <a:t>Two step functions, then linear: Aurora stops sleeping (~1k users); the Cognito free tier ends at exactly 10k MAU. Per-user at 100k: ~$0.018/month.</a:t>
             </a:r>
           </a:p>
         </p:txBody>

--- a/slides/wanthat-presentation.pptx
+++ b/slides/wanthat-presentation.pptx
@@ -22,6 +22,7 @@
     <p:sldId id="289" r:id="rId41"/>
     <p:sldId id="290" r:id="rId42"/>
     <p:sldId id="267" r:id="rId19"/>
+    <p:sldId id="291" r:id="rId43"/>
     <p:sldId id="268" r:id="rId20"/>
     <p:sldId id="269" r:id="rId21"/>
     <p:sldId id="264" r:id="rId16"/>
@@ -40,7 +41,6 @@
     <p:sldId id="275" r:id="rId27"/>
     <p:sldId id="276" r:id="rId28"/>
     <p:sldId id="277" r:id="rId29"/>
-    <p:sldId id="291" r:id="rId43"/>
   </p:sldIdLst>
   <p:sldSz cx="12191695" cy="6858000" type="screen4x3"/>
   <p:notesSz cx="6858000" cy="9144000"/>
@@ -9225,7 +9225,7 @@
                 </a:solidFill>
                 <a:latin typeface="Hanken Grotesk"/>
               </a:rPr>
-              <a:t>Scale projection (10 → 100k users): backup B17.</a:t>
+              <a:t>Scale projection (10 → 100k users): next slide.</a:t>
             </a:r>
           </a:p>
         </p:txBody>
@@ -9408,7 +9408,7 @@
                 </a:solidFill>
                 <a:latin typeface="Space Grotesk"/>
               </a:rPr>
-              <a:t>18</a:t>
+              <a:t>19</a:t>
             </a:r>
           </a:p>
         </p:txBody>
@@ -9771,89 +9771,6 @@
                           </a:solidFill>
                           <a:latin typeface="Hanken Grotesk"/>
                         </a:rPr>
-                        <a:t>JWT revocation lag &lt;= 1 h</a:t>
-                      </a:r>
-                    </a:p>
-                  </a:txBody>
-                  <a:tcPr marL="91440" marR="91440" marT="45720" marB="45720">
-                    <a:solidFill>
-                      <a:srgbClr val="FFFFFF"/>
-                    </a:solidFill>
-                  </a:tcPr>
-                </a:tc>
-                <a:tc>
-                  <a:txBody>
-                    <a:bodyPr/>
-                    <a:lstStyle/>
-                    <a:p>
-                      <a:pPr>
-                        <a:lnSpc>
-                          <a:spcPct val="108000"/>
-                        </a:lnSpc>
-                      </a:pPr>
-                      <a:r>
-                        <a:rPr sz="1050" b="0">
-                          <a:solidFill>
-                            <a:srgbClr val="6B7B73"/>
-                          </a:solidFill>
-                          <a:latin typeface="Hanken Grotesk"/>
-                        </a:rPr>
-                        <a:t>Only member surface is a read-only wallet</a:t>
-                      </a:r>
-                    </a:p>
-                  </a:txBody>
-                  <a:tcPr marL="91440" marR="91440" marT="45720" marB="45720">
-                    <a:solidFill>
-                      <a:srgbClr val="FFFFFF"/>
-                    </a:solidFill>
-                  </a:tcPr>
-                </a:tc>
-                <a:tc>
-                  <a:txBody>
-                    <a:bodyPr/>
-                    <a:lstStyle/>
-                    <a:p>
-                      <a:pPr>
-                        <a:lnSpc>
-                          <a:spcPct val="108000"/>
-                        </a:lnSpc>
-                      </a:pPr>
-                      <a:r>
-                        <a:rPr sz="1050" b="0">
-                          <a:solidFill>
-                            <a:srgbClr val="6B7B73"/>
-                          </a:solidFill>
-                          <a:latin typeface="Hanken Grotesk"/>
-                        </a:rPr>
-                        <a:t>Any sensitive member mutation → short tokens or in-handler check</a:t>
-                      </a:r>
-                    </a:p>
-                  </a:txBody>
-                  <a:tcPr marL="91440" marR="91440" marT="45720" marB="45720">
-                    <a:solidFill>
-                      <a:srgbClr val="FFFFFF"/>
-                    </a:solidFill>
-                  </a:tcPr>
-                </a:tc>
-              </a:tr>
-              <a:tr h="365760">
-                <a:tc>
-                  <a:txBody>
-                    <a:bodyPr/>
-                    <a:lstStyle/>
-                    <a:p>
-                      <a:pPr>
-                        <a:lnSpc>
-                          <a:spcPct val="108000"/>
-                        </a:lnSpc>
-                      </a:pPr>
-                      <a:r>
-                        <a:rPr sz="1050" b="1">
-                          <a:solidFill>
-                            <a:srgbClr val="15201C"/>
-                          </a:solidFill>
-                          <a:latin typeface="Hanken Grotesk"/>
-                        </a:rPr>
                         <a:t>Account concurrency = 10</a:t>
                       </a:r>
                     </a:p>
@@ -10249,7 +10166,7 @@
                 </a:solidFill>
                 <a:latin typeface="Space Mono"/>
               </a:rPr>
-              <a:t>18</a:t>
+              <a:t>19</a:t>
             </a:r>
           </a:p>
         </p:txBody>
@@ -12197,16 +12114,7 @@
                 </a:solidFill>
                 <a:latin typeface="Hanken Grotesk"/>
               </a:rPr>
-              <a:t>Trade-offs signed off with B: </a:t>
-            </a:r>
-            <a:r>
-              <a:rPr sz="1250" b="0">
-                <a:solidFill>
-                  <a:srgbClr val="6B7B73"/>
-                </a:solidFill>
-                <a:latin typeface="Hanken Grotesk"/>
-              </a:rPr>
-              <a:t>userless Face ID waived (remembered-phone one-prompt kept); phone enumeration accepted (preventUserExistenceErrors LEGACY) — mitigated by pool WAF rate rules; JWT revocation lags up to 1 h on our APIs (stateless authorizer) — acceptable while the only member surface is a read-only wallet.</a:t>
+              <a:t>Trade-offs signed off with B: userless Face ID waived (remembered-phone one-prompt kept); phone enumeration accepted (preventUserExistenceErrors LEGACY) — mitigated by pool WAF rate rules; JWT revocation lags up to 15 min on our APIs (stateless authorizer, 15-minute access tokens) — acceptable for the current member surface.</a:t>
             </a:r>
           </a:p>
           <a:p>
@@ -23746,7 +23654,7 @@
                 </a:solidFill>
                 <a:latin typeface="Space Grotesk"/>
               </a:rPr>
-              <a:t>B17</a:t>
+              <a:t>18</a:t>
             </a:r>
           </a:p>
         </p:txBody>
@@ -23780,7 +23688,7 @@
                 </a:solidFill>
                 <a:latin typeface="Space Mono"/>
               </a:rPr>
-              <a:t>BACKUP</a:t>
+              <a:t>DECISIONS</a:t>
             </a:r>
           </a:p>
         </p:txBody>
@@ -23814,7 +23722,7 @@
                 </a:solidFill>
                 <a:latin typeface="Space Grotesk"/>
               </a:rPr>
-              <a:t>Cost progression — 10 to 100k active users</a:t>
+              <a:t>Cost projection by user count</a:t>
             </a:r>
           </a:p>
         </p:txBody>
@@ -23936,7 +23844,7 @@
                 </a:solidFill>
                 <a:latin typeface="Space Mono"/>
               </a:rPr>
-              <a:t>B17</a:t>
+              <a:t>18</a:t>
             </a:r>
           </a:p>
         </p:txBody>
@@ -27277,8 +27185,8 @@
         </p:nvSpPr>
         <p:spPr>
           <a:xfrm>
-            <a:off x="658368" y="1874519"/>
-            <a:ext cx="2157984" cy="3794760"/>
+            <a:off x="658368" y="1691640"/>
+            <a:ext cx="3520440" cy="2240280"/>
           </a:xfrm>
           <a:prstGeom prst="roundRect">
             <a:avLst>
@@ -27325,7 +27233,7 @@
         </p:nvSpPr>
         <p:spPr>
           <a:xfrm>
-            <a:off x="841247" y="2075688"/>
+            <a:off x="841248" y="1874520"/>
             <a:ext cx="475488" cy="475488"/>
           </a:xfrm>
           <a:prstGeom prst="roundRect">
@@ -27381,7 +27289,7 @@
         </p:blipFill>
         <p:spPr>
           <a:xfrm>
-            <a:off x="909827" y="2144268"/>
+            <a:off x="905256" y="1943100"/>
             <a:ext cx="338328" cy="338328"/>
           </a:xfrm>
           <a:prstGeom prst="rect">
@@ -27397,8 +27305,8 @@
         </p:nvSpPr>
         <p:spPr>
           <a:xfrm>
-            <a:off x="841247" y="2697480"/>
-            <a:ext cx="1792224" cy="777240"/>
+            <a:off x="1435608" y="1929384"/>
+            <a:ext cx="2560320" cy="457200"/>
           </a:xfrm>
           <a:prstGeom prst="rect">
             <a:avLst/>
@@ -27436,8 +27344,8 @@
         </p:nvSpPr>
         <p:spPr>
           <a:xfrm>
-            <a:off x="841247" y="3520440"/>
-            <a:ext cx="1792224" cy="2011680"/>
+            <a:off x="841248" y="2468880"/>
+            <a:ext cx="3154680" cy="1371600"/>
           </a:xfrm>
           <a:prstGeom prst="rect">
             <a:avLst/>
@@ -27475,8 +27383,8 @@
         </p:nvSpPr>
         <p:spPr>
           <a:xfrm>
-            <a:off x="2962656" y="1874519"/>
-            <a:ext cx="2157984" cy="3794760"/>
+            <a:off x="4343400" y="1691640"/>
+            <a:ext cx="3520440" cy="2240280"/>
           </a:xfrm>
           <a:prstGeom prst="roundRect">
             <a:avLst>
@@ -27523,7 +27431,7 @@
         </p:nvSpPr>
         <p:spPr>
           <a:xfrm>
-            <a:off x="3145536" y="2075688"/>
+            <a:off x="4526280" y="1874520"/>
             <a:ext cx="475488" cy="475488"/>
           </a:xfrm>
           <a:prstGeom prst="roundRect">
@@ -27579,7 +27487,7 @@
         </p:blipFill>
         <p:spPr>
           <a:xfrm>
-            <a:off x="3214116" y="2144268"/>
+            <a:off x="4590288" y="1943100"/>
             <a:ext cx="338328" cy="338328"/>
           </a:xfrm>
           <a:prstGeom prst="rect">
@@ -27595,8 +27503,8 @@
         </p:nvSpPr>
         <p:spPr>
           <a:xfrm>
-            <a:off x="3145536" y="2697480"/>
-            <a:ext cx="1792224" cy="777240"/>
+            <a:off x="5120640" y="1929384"/>
+            <a:ext cx="2560320" cy="457200"/>
           </a:xfrm>
           <a:prstGeom prst="rect">
             <a:avLst/>
@@ -27634,8 +27542,8 @@
         </p:nvSpPr>
         <p:spPr>
           <a:xfrm>
-            <a:off x="3145536" y="3520440"/>
-            <a:ext cx="1792224" cy="2011680"/>
+            <a:off x="4526280" y="2468880"/>
+            <a:ext cx="3154680" cy="1371600"/>
           </a:xfrm>
           <a:prstGeom prst="rect">
             <a:avLst/>
@@ -27673,8 +27581,8 @@
         </p:nvSpPr>
         <p:spPr>
           <a:xfrm>
-            <a:off x="5266944" y="1874519"/>
-            <a:ext cx="2157984" cy="3794760"/>
+            <a:off x="8028432" y="1691640"/>
+            <a:ext cx="3520440" cy="2240280"/>
           </a:xfrm>
           <a:prstGeom prst="roundRect">
             <a:avLst>
@@ -27721,7 +27629,7 @@
         </p:nvSpPr>
         <p:spPr>
           <a:xfrm>
-            <a:off x="5449824" y="2075688"/>
+            <a:off x="8211312" y="1874520"/>
             <a:ext cx="475488" cy="475488"/>
           </a:xfrm>
           <a:prstGeom prst="roundRect">
@@ -27777,7 +27685,7 @@
         </p:blipFill>
         <p:spPr>
           <a:xfrm>
-            <a:off x="5518404" y="2144268"/>
+            <a:off x="8275320" y="1943100"/>
             <a:ext cx="338328" cy="338328"/>
           </a:xfrm>
           <a:prstGeom prst="rect">
@@ -27793,8 +27701,8 @@
         </p:nvSpPr>
         <p:spPr>
           <a:xfrm>
-            <a:off x="5449824" y="2697480"/>
-            <a:ext cx="1792224" cy="777240"/>
+            <a:off x="8805672" y="1929384"/>
+            <a:ext cx="2560320" cy="457200"/>
           </a:xfrm>
           <a:prstGeom prst="rect">
             <a:avLst/>
@@ -27832,8 +27740,8 @@
         </p:nvSpPr>
         <p:spPr>
           <a:xfrm>
-            <a:off x="5449824" y="3520440"/>
-            <a:ext cx="1792224" cy="2011680"/>
+            <a:off x="8211312" y="2468880"/>
+            <a:ext cx="3154680" cy="1371600"/>
           </a:xfrm>
           <a:prstGeom prst="rect">
             <a:avLst/>
@@ -27871,8 +27779,8 @@
         </p:nvSpPr>
         <p:spPr>
           <a:xfrm>
-            <a:off x="7571232" y="1874519"/>
-            <a:ext cx="2157984" cy="3794760"/>
+            <a:off x="658368" y="4050792"/>
+            <a:ext cx="3520440" cy="2240280"/>
           </a:xfrm>
           <a:prstGeom prst="roundRect">
             <a:avLst>
@@ -27919,7 +27827,7 @@
         </p:nvSpPr>
         <p:spPr>
           <a:xfrm>
-            <a:off x="7754112" y="2075688"/>
+            <a:off x="841248" y="4233672"/>
             <a:ext cx="475488" cy="475488"/>
           </a:xfrm>
           <a:prstGeom prst="roundRect">
@@ -27975,7 +27883,7 @@
         </p:blipFill>
         <p:spPr>
           <a:xfrm>
-            <a:off x="7822692" y="2144268"/>
+            <a:off x="905256" y="4302252"/>
             <a:ext cx="338328" cy="338328"/>
           </a:xfrm>
           <a:prstGeom prst="rect">
@@ -27991,8 +27899,8 @@
         </p:nvSpPr>
         <p:spPr>
           <a:xfrm>
-            <a:off x="7754112" y="2697480"/>
-            <a:ext cx="1792224" cy="777240"/>
+            <a:off x="1435608" y="4288536"/>
+            <a:ext cx="2560320" cy="457200"/>
           </a:xfrm>
           <a:prstGeom prst="rect">
             <a:avLst/>
@@ -28030,8 +27938,8 @@
         </p:nvSpPr>
         <p:spPr>
           <a:xfrm>
-            <a:off x="7754112" y="3520440"/>
-            <a:ext cx="1792224" cy="2011680"/>
+            <a:off x="841248" y="4828032"/>
+            <a:ext cx="3154680" cy="1371600"/>
           </a:xfrm>
           <a:prstGeom prst="rect">
             <a:avLst/>
@@ -28069,8 +27977,8 @@
         </p:nvSpPr>
         <p:spPr>
           <a:xfrm>
-            <a:off x="9875520" y="1874519"/>
-            <a:ext cx="2157984" cy="3794760"/>
+            <a:off x="4343400" y="4050792"/>
+            <a:ext cx="3520440" cy="2240280"/>
           </a:xfrm>
           <a:prstGeom prst="roundRect">
             <a:avLst>
@@ -28117,7 +28025,7 @@
         </p:nvSpPr>
         <p:spPr>
           <a:xfrm>
-            <a:off x="10058400" y="2075688"/>
+            <a:off x="4526280" y="4233672"/>
             <a:ext cx="475488" cy="475488"/>
           </a:xfrm>
           <a:prstGeom prst="roundRect">
@@ -28173,7 +28081,7 @@
         </p:blipFill>
         <p:spPr>
           <a:xfrm>
-            <a:off x="10126980" y="2144268"/>
+            <a:off x="4590288" y="4302252"/>
             <a:ext cx="338328" cy="338328"/>
           </a:xfrm>
           <a:prstGeom prst="rect">
@@ -28189,8 +28097,8 @@
         </p:nvSpPr>
         <p:spPr>
           <a:xfrm>
-            <a:off x="10058400" y="2697480"/>
-            <a:ext cx="1792224" cy="777240"/>
+            <a:off x="5120640" y="4288536"/>
+            <a:ext cx="2560320" cy="457200"/>
           </a:xfrm>
           <a:prstGeom prst="rect">
             <a:avLst/>
@@ -28228,8 +28136,8 @@
         </p:nvSpPr>
         <p:spPr>
           <a:xfrm>
-            <a:off x="10058400" y="3520440"/>
-            <a:ext cx="1792224" cy="2011680"/>
+            <a:off x="4526280" y="4828032"/>
+            <a:ext cx="3154680" cy="1371600"/>
           </a:xfrm>
           <a:prstGeom prst="rect">
             <a:avLst/>
@@ -28377,6 +28285,204 @@
                 <a:latin typeface="Space Mono"/>
               </a:rPr>
               <a:t>6</a:t>
+            </a:r>
+          </a:p>
+        </p:txBody>
+      </p:sp>
+      <p:sp>
+        <p:nvSpPr>
+          <p:cNvPr id="5" name="Rounded Rectangle 4"/>
+          <p:cNvSpPr/>
+          <p:nvPr/>
+        </p:nvSpPr>
+        <p:spPr>
+          <a:xfrm>
+            <a:off x="8028432" y="4050792"/>
+            <a:ext cx="3520440" cy="2240280"/>
+          </a:xfrm>
+          <a:prstGeom prst="roundRect">
+            <a:avLst>
+              <a:gd name="adj" fmla="val 5000"/>
+            </a:avLst>
+          </a:prstGeom>
+          <a:solidFill>
+            <a:srgbClr val="FFFFFF"/>
+          </a:solidFill>
+          <a:ln w="12700">
+            <a:solidFill>
+              <a:srgbClr val="E6EBE8"/>
+            </a:solidFill>
+          </a:ln>
+          <a:effectLst/>
+        </p:spPr>
+        <p:style>
+          <a:lnRef idx="1">
+            <a:schemeClr val="accent1"/>
+          </a:lnRef>
+          <a:fillRef idx="3">
+            <a:schemeClr val="accent1"/>
+          </a:fillRef>
+          <a:effectRef idx="2">
+            <a:schemeClr val="accent1"/>
+          </a:effectRef>
+          <a:fontRef idx="minor">
+            <a:schemeClr val="lt1"/>
+          </a:fontRef>
+        </p:style>
+        <p:txBody>
+          <a:bodyPr rtlCol="0" anchor="ctr"/>
+          <a:lstStyle/>
+          <a:p>
+            <a:pPr algn="ctr"/>
+          </a:p>
+        </p:txBody>
+      </p:sp>
+      <p:sp>
+        <p:nvSpPr>
+          <p:cNvPr id="6" name="Rounded Rectangle 5"/>
+          <p:cNvSpPr/>
+          <p:nvPr/>
+        </p:nvSpPr>
+        <p:spPr>
+          <a:xfrm>
+            <a:off x="8211312" y="4233672"/>
+            <a:ext cx="475488" cy="475488"/>
+          </a:xfrm>
+          <a:prstGeom prst="roundRect">
+            <a:avLst>
+              <a:gd name="adj" fmla="val 22000"/>
+            </a:avLst>
+          </a:prstGeom>
+          <a:solidFill>
+            <a:srgbClr val="E7F1EC"/>
+          </a:solidFill>
+          <a:ln w="12700">
+            <a:solidFill>
+              <a:srgbClr val="D2E3D9"/>
+            </a:solidFill>
+          </a:ln>
+          <a:effectLst/>
+        </p:spPr>
+        <p:style>
+          <a:lnRef idx="1">
+            <a:schemeClr val="accent1"/>
+          </a:lnRef>
+          <a:fillRef idx="3">
+            <a:schemeClr val="accent1"/>
+          </a:fillRef>
+          <a:effectRef idx="2">
+            <a:schemeClr val="accent1"/>
+          </a:effectRef>
+          <a:fontRef idx="minor">
+            <a:schemeClr val="lt1"/>
+          </a:fontRef>
+        </p:style>
+        <p:txBody>
+          <a:bodyPr rtlCol="0" anchor="ctr"/>
+          <a:lstStyle/>
+          <a:p>
+            <a:pPr algn="ctr"/>
+          </a:p>
+        </p:txBody>
+      </p:sp>
+      <p:pic>
+        <p:nvPicPr>
+          <p:cNvPr id="7" name="Picture 6" descr="s06_i1.png"/>
+          <p:cNvPicPr>
+            <a:picLocks noChangeAspect="1"/>
+          </p:cNvPicPr>
+          <p:nvPr/>
+        </p:nvPicPr>
+        <p:blipFill>
+          <a:blip r:embed="rId2"/>
+          <a:stretch>
+            <a:fillRect/>
+          </a:stretch>
+        </p:blipFill>
+        <p:spPr>
+          <a:xfrm>
+            <a:off x="8275320" y="4302252"/>
+            <a:ext cx="338328" cy="338328"/>
+          </a:xfrm>
+          <a:prstGeom prst="rect">
+            <a:avLst/>
+          </a:prstGeom>
+        </p:spPr>
+      </p:pic>
+      <p:sp>
+        <p:nvSpPr>
+          <p:cNvPr id="8" name="TextBox 7"/>
+          <p:cNvSpPr txBox="1"/>
+          <p:nvPr/>
+        </p:nvSpPr>
+        <p:spPr>
+          <a:xfrm>
+            <a:off x="8805672" y="4288536"/>
+            <a:ext cx="2560320" cy="457200"/>
+          </a:xfrm>
+          <a:prstGeom prst="rect">
+            <a:avLst/>
+          </a:prstGeom>
+          <a:noFill/>
+        </p:spPr>
+        <p:txBody>
+          <a:bodyPr wrap="square" anchor="t" lIns="0" rIns="0" tIns="0" bIns="0">
+            <a:spAutoFit/>
+          </a:bodyPr>
+          <a:lstStyle/>
+          <a:p>
+            <a:pPr>
+              <a:lnSpc>
+                <a:spcPct val="102000"/>
+              </a:lnSpc>
+            </a:pPr>
+            <a:r>
+              <a:rPr sz="1450" b="1">
+                <a:solidFill>
+                  <a:srgbClr val="15201C"/>
+                </a:solidFill>
+                <a:latin typeface="Space Grotesk"/>
+              </a:rPr>
+              <a:t>Security by design</a:t>
+            </a:r>
+          </a:p>
+        </p:txBody>
+      </p:sp>
+      <p:sp>
+        <p:nvSpPr>
+          <p:cNvPr id="9" name="TextBox 8"/>
+          <p:cNvSpPr txBox="1"/>
+          <p:nvPr/>
+        </p:nvSpPr>
+        <p:spPr>
+          <a:xfrm>
+            <a:off x="8211312" y="4828032"/>
+            <a:ext cx="3154680" cy="1371600"/>
+          </a:xfrm>
+          <a:prstGeom prst="rect">
+            <a:avLst/>
+          </a:prstGeom>
+          <a:noFill/>
+        </p:spPr>
+        <p:txBody>
+          <a:bodyPr wrap="square" anchor="t" lIns="0" rIns="0" tIns="0" bIns="0">
+            <a:spAutoFit/>
+          </a:bodyPr>
+          <a:lstStyle/>
+          <a:p>
+            <a:pPr>
+              <a:lnSpc>
+                <a:spcPct val="110000"/>
+              </a:lnSpc>
+            </a:pPr>
+            <a:r>
+              <a:rPr sz="1100" b="0">
+                <a:solidFill>
+                  <a:srgbClr val="6B7B73"/>
+                </a:solidFill>
+                <a:latin typeface="Hanken Grotesk"/>
+              </a:rPr>
+              <a:t>Least privilege per function — IAM + one Postgres role each; money is append-only + audited; PII isolated in Cognito; workers never HTTP-exposed.</a:t>
             </a:r>
           </a:p>
         </p:txBody>

--- a/slides/wanthat-presentation.pptx
+++ b/slides/wanthat-presentation.pptx
@@ -6086,335 +6086,30 @@
         <p:nvPr/>
       </p:nvGrpSpPr>
       <p:grpSpPr/>
-      <p:sp>
-        <p:nvSpPr>
-          <p:cNvPr id="2" name="TextBox 1"/>
-          <p:cNvSpPr txBox="1"/>
-          <p:nvPr/>
-        </p:nvSpPr>
-        <p:spPr>
-          <a:xfrm>
-            <a:off x="10195560" y="256032"/>
-            <a:ext cx="1371600" cy="1005840"/>
-          </a:xfrm>
-          <a:prstGeom prst="rect">
-            <a:avLst/>
-          </a:prstGeom>
-          <a:noFill/>
-        </p:spPr>
-        <p:txBody>
-          <a:bodyPr wrap="square" anchor="t" lIns="0" rIns="0" tIns="0" bIns="0">
-            <a:spAutoFit/>
-          </a:bodyPr>
-          <a:lstStyle/>
-          <a:p>
-            <a:pPr algn="r"/>
-            <a:r>
-              <a:rPr sz="4600" b="1">
-                <a:solidFill>
-                  <a:srgbClr val="DCE5E0"/>
-                </a:solidFill>
-                <a:latin typeface="Space Grotesk"/>
-              </a:rPr>
-              <a:t>10</a:t>
-            </a:r>
-          </a:p>
-        </p:txBody>
-      </p:sp>
-      <p:sp>
-        <p:nvSpPr>
-          <p:cNvPr id="3" name="TextBox 2"/>
-          <p:cNvSpPr txBox="1"/>
-          <p:nvPr/>
-        </p:nvSpPr>
-        <p:spPr>
-          <a:xfrm>
-            <a:off x="640080" y="420624"/>
-            <a:ext cx="9418320" cy="292608"/>
-          </a:xfrm>
-          <a:prstGeom prst="rect">
-            <a:avLst/>
-          </a:prstGeom>
-          <a:noFill/>
-        </p:spPr>
-        <p:txBody>
-          <a:bodyPr wrap="square" anchor="t" lIns="0" rIns="0" tIns="0" bIns="0">
-            <a:spAutoFit/>
-          </a:bodyPr>
-          <a:lstStyle/>
-          <a:p>
-            <a:r>
-              <a:rPr sz="1150" b="1">
-                <a:solidFill>
-                  <a:srgbClr val="1F7A57"/>
-                </a:solidFill>
-                <a:latin typeface="Space Mono"/>
-              </a:rPr>
-              <a:t>ENGINEERING</a:t>
-            </a:r>
-          </a:p>
-        </p:txBody>
-      </p:sp>
-      <p:sp>
-        <p:nvSpPr>
-          <p:cNvPr id="4" name="TextBox 3"/>
-          <p:cNvSpPr txBox="1"/>
-          <p:nvPr/>
-        </p:nvSpPr>
-        <p:spPr>
-          <a:xfrm>
-            <a:off x="621792" y="731520"/>
-            <a:ext cx="9509760" cy="868680"/>
-          </a:xfrm>
-          <a:prstGeom prst="rect">
-            <a:avLst/>
-          </a:prstGeom>
-          <a:noFill/>
-        </p:spPr>
-        <p:txBody>
-          <a:bodyPr wrap="square" anchor="t" lIns="0" rIns="0" tIns="0" bIns="0">
-            <a:spAutoFit/>
-          </a:bodyPr>
-          <a:lstStyle/>
-          <a:p>
-            <a:r>
-              <a:rPr sz="2700" b="1">
-                <a:solidFill>
-                  <a:srgbClr val="15201C"/>
-                </a:solidFill>
-                <a:latin typeface="Space Grotesk"/>
-              </a:rPr>
-              <a:t>Architecture UC1 — member creates a recommendation</a:t>
-            </a:r>
-          </a:p>
-        </p:txBody>
-      </p:sp>
-      <p:sp>
-        <p:nvSpPr>
-          <p:cNvPr id="5" name="Rounded Rectangle 4"/>
-          <p:cNvSpPr/>
-          <p:nvPr/>
-        </p:nvSpPr>
-        <p:spPr>
-          <a:xfrm>
-            <a:off x="3886200" y="1600200"/>
-            <a:ext cx="7653527" cy="4709160"/>
-          </a:xfrm>
-          <a:prstGeom prst="roundRect">
-            <a:avLst>
-              <a:gd name="adj" fmla="val 3000"/>
-            </a:avLst>
-          </a:prstGeom>
-          <a:solidFill>
-            <a:srgbClr val="FFFFFF"/>
-          </a:solidFill>
-          <a:ln w="12700">
-            <a:solidFill>
-              <a:srgbClr val="E6EBE8"/>
-            </a:solidFill>
-          </a:ln>
-          <a:effectLst/>
-        </p:spPr>
-        <p:style>
-          <a:lnRef idx="1">
-            <a:schemeClr val="accent1"/>
-          </a:lnRef>
-          <a:fillRef idx="3">
-            <a:schemeClr val="accent1"/>
-          </a:fillRef>
-          <a:effectRef idx="2">
-            <a:schemeClr val="accent1"/>
-          </a:effectRef>
-          <a:fontRef idx="minor">
-            <a:schemeClr val="lt1"/>
-          </a:fontRef>
-        </p:style>
-        <p:txBody>
-          <a:bodyPr rtlCol="0" anchor="ctr"/>
-          <a:lstStyle/>
-          <a:p>
-            <a:pPr algn="ctr"/>
-          </a:p>
-        </p:txBody>
-      </p:sp>
-      <p:sp>
-        <p:nvSpPr>
-          <p:cNvPr id="7" name="Rectangle 6"/>
-          <p:cNvSpPr/>
-          <p:nvPr/>
-        </p:nvSpPr>
-        <p:spPr>
-          <a:xfrm>
-            <a:off x="640080" y="6455664"/>
-            <a:ext cx="10908792" cy="9144"/>
-          </a:xfrm>
-          <a:prstGeom prst="rect">
-            <a:avLst/>
-          </a:prstGeom>
-          <a:solidFill>
-            <a:srgbClr val="E6EBE8"/>
-          </a:solidFill>
-          <a:ln>
-            <a:noFill/>
-          </a:ln>
-          <a:effectLst/>
-        </p:spPr>
-        <p:style>
-          <a:lnRef idx="1">
-            <a:schemeClr val="accent1"/>
-          </a:lnRef>
-          <a:fillRef idx="3">
-            <a:schemeClr val="accent1"/>
-          </a:fillRef>
-          <a:effectRef idx="2">
-            <a:schemeClr val="accent1"/>
-          </a:effectRef>
-          <a:fontRef idx="minor">
-            <a:schemeClr val="lt1"/>
-          </a:fontRef>
-        </p:style>
-        <p:txBody>
-          <a:bodyPr rtlCol="0" anchor="ctr"/>
-          <a:lstStyle/>
-          <a:p>
-            <a:pPr algn="ctr"/>
-          </a:p>
-        </p:txBody>
-      </p:sp>
-      <p:sp>
-        <p:nvSpPr>
-          <p:cNvPr id="8" name="TextBox 7"/>
-          <p:cNvSpPr txBox="1"/>
-          <p:nvPr/>
-        </p:nvSpPr>
-        <p:spPr>
-          <a:xfrm>
-            <a:off x="640080" y="6510528"/>
-            <a:ext cx="2743200" cy="274320"/>
-          </a:xfrm>
-          <a:prstGeom prst="rect">
-            <a:avLst/>
-          </a:prstGeom>
-          <a:noFill/>
-        </p:spPr>
-        <p:txBody>
-          <a:bodyPr wrap="square" anchor="t" lIns="0" rIns="0" tIns="0" bIns="0">
-            <a:spAutoFit/>
-          </a:bodyPr>
-          <a:lstStyle/>
-          <a:p>
-            <a:r>
-              <a:rPr sz="1100" b="1">
-                <a:solidFill>
-                  <a:srgbClr val="6B7B73"/>
-                </a:solidFill>
-                <a:latin typeface="Space Grotesk"/>
-              </a:rPr>
-              <a:t>want</a:t>
-            </a:r>
-            <a:r>
-              <a:rPr sz="1100" b="1">
-                <a:solidFill>
-                  <a:srgbClr val="1F7A57"/>
-                </a:solidFill>
-                <a:latin typeface="Space Grotesk"/>
-              </a:rPr>
-              <a:t>hat</a:t>
-            </a:r>
-          </a:p>
-        </p:txBody>
-      </p:sp>
-      <p:sp>
-        <p:nvSpPr>
-          <p:cNvPr id="9" name="TextBox 8"/>
-          <p:cNvSpPr txBox="1"/>
-          <p:nvPr/>
-        </p:nvSpPr>
-        <p:spPr>
-          <a:xfrm>
-            <a:off x="10607040" y="6510528"/>
-            <a:ext cx="941832" cy="274320"/>
-          </a:xfrm>
-          <a:prstGeom prst="rect">
-            <a:avLst/>
-          </a:prstGeom>
-          <a:noFill/>
-        </p:spPr>
-        <p:txBody>
-          <a:bodyPr wrap="square" anchor="t" lIns="0" rIns="0" tIns="0" bIns="0">
-            <a:spAutoFit/>
-          </a:bodyPr>
-          <a:lstStyle/>
-          <a:p>
-            <a:pPr algn="r"/>
-            <a:r>
-              <a:rPr sz="1000" b="0">
-                <a:solidFill>
-                  <a:srgbClr val="8A968F"/>
-                </a:solidFill>
-                <a:latin typeface="Space Mono"/>
-              </a:rPr>
-              <a:t>10</a:t>
-            </a:r>
-          </a:p>
-        </p:txBody>
-      </p:sp>
-      <p:sp>
-        <p:nvSpPr>
-          <p:cNvPr id="10" name="TextBox 9"/>
-          <p:cNvSpPr txBox="1"/>
-          <p:nvPr/>
-        </p:nvSpPr>
-        <p:spPr>
-          <a:xfrm>
-            <a:off x="658368" y="1783080"/>
-            <a:ext cx="3063240" cy="4480560"/>
-          </a:xfrm>
-          <a:prstGeom prst="rect">
-            <a:avLst/>
-          </a:prstGeom>
-          <a:noFill/>
-        </p:spPr>
-        <p:txBody>
-          <a:bodyPr wrap="square">
-            <a:spAutoFit/>
-          </a:bodyPr>
-          <a:lstStyle/>
-          <a:p>
-            <a:r>
-              <a:rPr sz="1200" b="0">
-                <a:solidFill>
-                  <a:srgbClr val="15201C"/>
-                </a:solidFill>
-                <a:latin typeface="Hanken Grotesk"/>
-              </a:rPr>
-              <a:t>-  SPA is served from S3 via CloudFront.</a:t>
-            </a:r>
-          </a:p>
-          <a:p>
-            <a:r>
-              <a:rPr sz="1200" b="0">
-                <a:solidFill>
-                  <a:srgbClr val="15201C"/>
-                </a:solidFill>
-                <a:latin typeface="Hanken Grotesk"/>
-              </a:rPr>
-              <a:t>-  Cognito-native authentication at the application level.</a:t>
-            </a:r>
-          </a:p>
-          <a:p>
-            <a:r>
-              <a:rPr sz="1200" b="0">
-                <a:solidFill>
-                  <a:srgbClr val="15201C"/>
-                </a:solidFill>
-                <a:latin typeface="Hanken Grotesk"/>
-              </a:rPr>
-              <a:t>-  The retailer link is created ONCE per product (cache; linkgen is the sole writer).</a:t>
-            </a:r>
-          </a:p>
-        </p:txBody>
-      </p:sp>
+      <p:pic>
+        <p:nvPicPr>
+          <p:cNvPr id="2" name="Picture 1" descr="page-10.png"/>
+          <p:cNvPicPr>
+            <a:picLocks noChangeAspect="1"/>
+          </p:cNvPicPr>
+          <p:nvPr/>
+        </p:nvPicPr>
+        <p:blipFill>
+          <a:blip r:embed="rId4"/>
+          <a:stretch>
+            <a:fillRect/>
+          </a:stretch>
+        </p:blipFill>
+        <p:spPr>
+          <a:xfrm>
+            <a:off x="0" y="0"/>
+            <a:ext cx="12191695" cy="6858000"/>
+          </a:xfrm>
+          <a:prstGeom prst="rect">
+            <a:avLst/>
+          </a:prstGeom>
+        </p:spPr>
+      </p:pic>
     </p:spTree>
   </p:cSld>
   <p:clrMapOvr>
@@ -6433,335 +6128,30 @@
         <p:nvPr/>
       </p:nvGrpSpPr>
       <p:grpSpPr/>
-      <p:sp>
-        <p:nvSpPr>
-          <p:cNvPr id="2" name="TextBox 1"/>
-          <p:cNvSpPr txBox="1"/>
-          <p:nvPr/>
-        </p:nvSpPr>
-        <p:spPr>
-          <a:xfrm>
-            <a:off x="10195560" y="256032"/>
-            <a:ext cx="1371600" cy="1005840"/>
-          </a:xfrm>
-          <a:prstGeom prst="rect">
-            <a:avLst/>
-          </a:prstGeom>
-          <a:noFill/>
-        </p:spPr>
-        <p:txBody>
-          <a:bodyPr wrap="square" anchor="t" lIns="0" rIns="0" tIns="0" bIns="0">
-            <a:spAutoFit/>
-          </a:bodyPr>
-          <a:lstStyle/>
-          <a:p>
-            <a:pPr algn="r"/>
-            <a:r>
-              <a:rPr sz="4600" b="1">
-                <a:solidFill>
-                  <a:srgbClr val="DCE5E0"/>
-                </a:solidFill>
-                <a:latin typeface="Space Grotesk"/>
-              </a:rPr>
-              <a:t>11</a:t>
-            </a:r>
-          </a:p>
-        </p:txBody>
-      </p:sp>
-      <p:sp>
-        <p:nvSpPr>
-          <p:cNvPr id="3" name="TextBox 2"/>
-          <p:cNvSpPr txBox="1"/>
-          <p:nvPr/>
-        </p:nvSpPr>
-        <p:spPr>
-          <a:xfrm>
-            <a:off x="640080" y="420624"/>
-            <a:ext cx="9418320" cy="292608"/>
-          </a:xfrm>
-          <a:prstGeom prst="rect">
-            <a:avLst/>
-          </a:prstGeom>
-          <a:noFill/>
-        </p:spPr>
-        <p:txBody>
-          <a:bodyPr wrap="square" anchor="t" lIns="0" rIns="0" tIns="0" bIns="0">
-            <a:spAutoFit/>
-          </a:bodyPr>
-          <a:lstStyle/>
-          <a:p>
-            <a:r>
-              <a:rPr sz="1150" b="1">
-                <a:solidFill>
-                  <a:srgbClr val="1F7A57"/>
-                </a:solidFill>
-                <a:latin typeface="Space Mono"/>
-              </a:rPr>
-              <a:t>ENGINEERING</a:t>
-            </a:r>
-          </a:p>
-        </p:txBody>
-      </p:sp>
-      <p:sp>
-        <p:nvSpPr>
-          <p:cNvPr id="4" name="TextBox 3"/>
-          <p:cNvSpPr txBox="1"/>
-          <p:nvPr/>
-        </p:nvSpPr>
-        <p:spPr>
-          <a:xfrm>
-            <a:off x="621792" y="731520"/>
-            <a:ext cx="9509760" cy="868680"/>
-          </a:xfrm>
-          <a:prstGeom prst="rect">
-            <a:avLst/>
-          </a:prstGeom>
-          <a:noFill/>
-        </p:spPr>
-        <p:txBody>
-          <a:bodyPr wrap="square" anchor="t" lIns="0" rIns="0" tIns="0" bIns="0">
-            <a:spAutoFit/>
-          </a:bodyPr>
-          <a:lstStyle/>
-          <a:p>
-            <a:r>
-              <a:rPr sz="2700" b="1">
-                <a:solidFill>
-                  <a:srgbClr val="15201C"/>
-                </a:solidFill>
-                <a:latin typeface="Space Grotesk"/>
-              </a:rPr>
-              <a:t>Architecture UC2 — the recommendation is shared</a:t>
-            </a:r>
-          </a:p>
-        </p:txBody>
-      </p:sp>
-      <p:sp>
-        <p:nvSpPr>
-          <p:cNvPr id="5" name="Rounded Rectangle 4"/>
-          <p:cNvSpPr/>
-          <p:nvPr/>
-        </p:nvSpPr>
-        <p:spPr>
-          <a:xfrm>
-            <a:off x="3886200" y="1600200"/>
-            <a:ext cx="7653527" cy="4709160"/>
-          </a:xfrm>
-          <a:prstGeom prst="roundRect">
-            <a:avLst>
-              <a:gd name="adj" fmla="val 3000"/>
-            </a:avLst>
-          </a:prstGeom>
-          <a:solidFill>
-            <a:srgbClr val="FFFFFF"/>
-          </a:solidFill>
-          <a:ln w="12700">
-            <a:solidFill>
-              <a:srgbClr val="E6EBE8"/>
-            </a:solidFill>
-          </a:ln>
-          <a:effectLst/>
-        </p:spPr>
-        <p:style>
-          <a:lnRef idx="1">
-            <a:schemeClr val="accent1"/>
-          </a:lnRef>
-          <a:fillRef idx="3">
-            <a:schemeClr val="accent1"/>
-          </a:fillRef>
-          <a:effectRef idx="2">
-            <a:schemeClr val="accent1"/>
-          </a:effectRef>
-          <a:fontRef idx="minor">
-            <a:schemeClr val="lt1"/>
-          </a:fontRef>
-        </p:style>
-        <p:txBody>
-          <a:bodyPr rtlCol="0" anchor="ctr"/>
-          <a:lstStyle/>
-          <a:p>
-            <a:pPr algn="ctr"/>
-          </a:p>
-        </p:txBody>
-      </p:sp>
-      <p:sp>
-        <p:nvSpPr>
-          <p:cNvPr id="7" name="Rectangle 6"/>
-          <p:cNvSpPr/>
-          <p:nvPr/>
-        </p:nvSpPr>
-        <p:spPr>
-          <a:xfrm>
-            <a:off x="640080" y="6455664"/>
-            <a:ext cx="10908792" cy="9144"/>
-          </a:xfrm>
-          <a:prstGeom prst="rect">
-            <a:avLst/>
-          </a:prstGeom>
-          <a:solidFill>
-            <a:srgbClr val="E6EBE8"/>
-          </a:solidFill>
-          <a:ln>
-            <a:noFill/>
-          </a:ln>
-          <a:effectLst/>
-        </p:spPr>
-        <p:style>
-          <a:lnRef idx="1">
-            <a:schemeClr val="accent1"/>
-          </a:lnRef>
-          <a:fillRef idx="3">
-            <a:schemeClr val="accent1"/>
-          </a:fillRef>
-          <a:effectRef idx="2">
-            <a:schemeClr val="accent1"/>
-          </a:effectRef>
-          <a:fontRef idx="minor">
-            <a:schemeClr val="lt1"/>
-          </a:fontRef>
-        </p:style>
-        <p:txBody>
-          <a:bodyPr rtlCol="0" anchor="ctr"/>
-          <a:lstStyle/>
-          <a:p>
-            <a:pPr algn="ctr"/>
-          </a:p>
-        </p:txBody>
-      </p:sp>
-      <p:sp>
-        <p:nvSpPr>
-          <p:cNvPr id="8" name="TextBox 7"/>
-          <p:cNvSpPr txBox="1"/>
-          <p:nvPr/>
-        </p:nvSpPr>
-        <p:spPr>
-          <a:xfrm>
-            <a:off x="640080" y="6510528"/>
-            <a:ext cx="2743200" cy="274320"/>
-          </a:xfrm>
-          <a:prstGeom prst="rect">
-            <a:avLst/>
-          </a:prstGeom>
-          <a:noFill/>
-        </p:spPr>
-        <p:txBody>
-          <a:bodyPr wrap="square" anchor="t" lIns="0" rIns="0" tIns="0" bIns="0">
-            <a:spAutoFit/>
-          </a:bodyPr>
-          <a:lstStyle/>
-          <a:p>
-            <a:r>
-              <a:rPr sz="1100" b="1">
-                <a:solidFill>
-                  <a:srgbClr val="6B7B73"/>
-                </a:solidFill>
-                <a:latin typeface="Space Grotesk"/>
-              </a:rPr>
-              <a:t>want</a:t>
-            </a:r>
-            <a:r>
-              <a:rPr sz="1100" b="1">
-                <a:solidFill>
-                  <a:srgbClr val="1F7A57"/>
-                </a:solidFill>
-                <a:latin typeface="Space Grotesk"/>
-              </a:rPr>
-              <a:t>hat</a:t>
-            </a:r>
-          </a:p>
-        </p:txBody>
-      </p:sp>
-      <p:sp>
-        <p:nvSpPr>
-          <p:cNvPr id="9" name="TextBox 8"/>
-          <p:cNvSpPr txBox="1"/>
-          <p:nvPr/>
-        </p:nvSpPr>
-        <p:spPr>
-          <a:xfrm>
-            <a:off x="10607040" y="6510528"/>
-            <a:ext cx="941832" cy="274320"/>
-          </a:xfrm>
-          <a:prstGeom prst="rect">
-            <a:avLst/>
-          </a:prstGeom>
-          <a:noFill/>
-        </p:spPr>
-        <p:txBody>
-          <a:bodyPr wrap="square" anchor="t" lIns="0" rIns="0" tIns="0" bIns="0">
-            <a:spAutoFit/>
-          </a:bodyPr>
-          <a:lstStyle/>
-          <a:p>
-            <a:pPr algn="r"/>
-            <a:r>
-              <a:rPr sz="1000" b="0">
-                <a:solidFill>
-                  <a:srgbClr val="8A968F"/>
-                </a:solidFill>
-                <a:latin typeface="Space Mono"/>
-              </a:rPr>
-              <a:t>11</a:t>
-            </a:r>
-          </a:p>
-        </p:txBody>
-      </p:sp>
-      <p:sp>
-        <p:nvSpPr>
-          <p:cNvPr id="10" name="TextBox 9"/>
-          <p:cNvSpPr txBox="1"/>
-          <p:nvPr/>
-        </p:nvSpPr>
-        <p:spPr>
-          <a:xfrm>
-            <a:off x="658368" y="1783080"/>
-            <a:ext cx="3063240" cy="4480560"/>
-          </a:xfrm>
-          <a:prstGeom prst="rect">
-            <a:avLst/>
-          </a:prstGeom>
-          <a:noFill/>
-        </p:spPr>
-        <p:txBody>
-          <a:bodyPr wrap="square">
-            <a:spAutoFit/>
-          </a:bodyPr>
-          <a:lstStyle/>
-          <a:p>
-            <a:r>
-              <a:rPr sz="1200" b="0">
-                <a:solidFill>
-                  <a:srgbClr val="15201C"/>
-                </a:solidFill>
-                <a:latin typeface="Hanken Grotesk"/>
-              </a:rPr>
-              <a:t>-  This is the hot path.</a:t>
-            </a:r>
-          </a:p>
-          <a:p>
-            <a:r>
-              <a:rPr sz="1200" b="0">
-                <a:solidFill>
-                  <a:srgbClr val="15201C"/>
-                </a:solidFill>
-                <a:latin typeface="Hanken Grotesk"/>
-              </a:rPr>
-              <a:t>-  The recommendation page is server-rendered and cached on CloudFront (60 s, origin-controlled).</a:t>
-            </a:r>
-          </a:p>
-          <a:p>
-            <a:r>
-              <a:rPr sz="1200" b="0">
-                <a:solidFill>
-                  <a:srgbClr val="15201C"/>
-                </a:solidFill>
-                <a:latin typeface="Hanken Grotesk"/>
-              </a:rPr>
-              <a:t>-  The TS landing app boots on the page for auth / registration and redirect-link generation.</a:t>
-            </a:r>
-          </a:p>
-        </p:txBody>
-      </p:sp>
+      <p:pic>
+        <p:nvPicPr>
+          <p:cNvPr id="2" name="Picture 1" descr="page-11.png"/>
+          <p:cNvPicPr>
+            <a:picLocks noChangeAspect="1"/>
+          </p:cNvPicPr>
+          <p:nvPr/>
+        </p:nvPicPr>
+        <p:blipFill>
+          <a:blip r:embed="rId4"/>
+          <a:stretch>
+            <a:fillRect/>
+          </a:stretch>
+        </p:blipFill>
+        <p:spPr>
+          <a:xfrm>
+            <a:off x="0" y="0"/>
+            <a:ext cx="12191695" cy="6858000"/>
+          </a:xfrm>
+          <a:prstGeom prst="rect">
+            <a:avLst/>
+          </a:prstGeom>
+        </p:spPr>
+      </p:pic>
     </p:spTree>
   </p:cSld>
   <p:clrMapOvr>
@@ -6780,335 +6170,30 @@
         <p:nvPr/>
       </p:nvGrpSpPr>
       <p:grpSpPr/>
-      <p:sp>
-        <p:nvSpPr>
-          <p:cNvPr id="2" name="TextBox 1"/>
-          <p:cNvSpPr txBox="1"/>
-          <p:nvPr/>
-        </p:nvSpPr>
-        <p:spPr>
-          <a:xfrm>
-            <a:off x="10195560" y="256032"/>
-            <a:ext cx="1371600" cy="1005840"/>
-          </a:xfrm>
-          <a:prstGeom prst="rect">
-            <a:avLst/>
-          </a:prstGeom>
-          <a:noFill/>
-        </p:spPr>
-        <p:txBody>
-          <a:bodyPr wrap="square" anchor="t" lIns="0" rIns="0" tIns="0" bIns="0">
-            <a:spAutoFit/>
-          </a:bodyPr>
-          <a:lstStyle/>
-          <a:p>
-            <a:pPr algn="r"/>
-            <a:r>
-              <a:rPr sz="4600" b="1">
-                <a:solidFill>
-                  <a:srgbClr val="DCE5E0"/>
-                </a:solidFill>
-                <a:latin typeface="Space Grotesk"/>
-              </a:rPr>
-              <a:t>12</a:t>
-            </a:r>
-          </a:p>
-        </p:txBody>
-      </p:sp>
-      <p:sp>
-        <p:nvSpPr>
-          <p:cNvPr id="3" name="TextBox 2"/>
-          <p:cNvSpPr txBox="1"/>
-          <p:nvPr/>
-        </p:nvSpPr>
-        <p:spPr>
-          <a:xfrm>
-            <a:off x="640080" y="420624"/>
-            <a:ext cx="9418320" cy="292608"/>
-          </a:xfrm>
-          <a:prstGeom prst="rect">
-            <a:avLst/>
-          </a:prstGeom>
-          <a:noFill/>
-        </p:spPr>
-        <p:txBody>
-          <a:bodyPr wrap="square" anchor="t" lIns="0" rIns="0" tIns="0" bIns="0">
-            <a:spAutoFit/>
-          </a:bodyPr>
-          <a:lstStyle/>
-          <a:p>
-            <a:r>
-              <a:rPr sz="1150" b="1">
-                <a:solidFill>
-                  <a:srgbClr val="1F7A57"/>
-                </a:solidFill>
-                <a:latin typeface="Space Mono"/>
-              </a:rPr>
-              <a:t>ENGINEERING</a:t>
-            </a:r>
-          </a:p>
-        </p:txBody>
-      </p:sp>
-      <p:sp>
-        <p:nvSpPr>
-          <p:cNvPr id="4" name="TextBox 3"/>
-          <p:cNvSpPr txBox="1"/>
-          <p:nvPr/>
-        </p:nvSpPr>
-        <p:spPr>
-          <a:xfrm>
-            <a:off x="621792" y="731520"/>
-            <a:ext cx="9509760" cy="868680"/>
-          </a:xfrm>
-          <a:prstGeom prst="rect">
-            <a:avLst/>
-          </a:prstGeom>
-          <a:noFill/>
-        </p:spPr>
-        <p:txBody>
-          <a:bodyPr wrap="square" anchor="t" lIns="0" rIns="0" tIns="0" bIns="0">
-            <a:spAutoFit/>
-          </a:bodyPr>
-          <a:lstStyle/>
-          <a:p>
-            <a:r>
-              <a:rPr sz="2700" b="1">
-                <a:solidFill>
-                  <a:srgbClr val="15201C"/>
-                </a:solidFill>
-                <a:latin typeface="Space Grotesk"/>
-              </a:rPr>
-              <a:t>Architecture UC3 — registration, login, guest + redirect</a:t>
-            </a:r>
-          </a:p>
-        </p:txBody>
-      </p:sp>
-      <p:sp>
-        <p:nvSpPr>
-          <p:cNvPr id="5" name="Rounded Rectangle 4"/>
-          <p:cNvSpPr/>
-          <p:nvPr/>
-        </p:nvSpPr>
-        <p:spPr>
-          <a:xfrm>
-            <a:off x="3886200" y="1600200"/>
-            <a:ext cx="7653527" cy="4709160"/>
-          </a:xfrm>
-          <a:prstGeom prst="roundRect">
-            <a:avLst>
-              <a:gd name="adj" fmla="val 3000"/>
-            </a:avLst>
-          </a:prstGeom>
-          <a:solidFill>
-            <a:srgbClr val="FFFFFF"/>
-          </a:solidFill>
-          <a:ln w="12700">
-            <a:solidFill>
-              <a:srgbClr val="E6EBE8"/>
-            </a:solidFill>
-          </a:ln>
-          <a:effectLst/>
-        </p:spPr>
-        <p:style>
-          <a:lnRef idx="1">
-            <a:schemeClr val="accent1"/>
-          </a:lnRef>
-          <a:fillRef idx="3">
-            <a:schemeClr val="accent1"/>
-          </a:fillRef>
-          <a:effectRef idx="2">
-            <a:schemeClr val="accent1"/>
-          </a:effectRef>
-          <a:fontRef idx="minor">
-            <a:schemeClr val="lt1"/>
-          </a:fontRef>
-        </p:style>
-        <p:txBody>
-          <a:bodyPr rtlCol="0" anchor="ctr"/>
-          <a:lstStyle/>
-          <a:p>
-            <a:pPr algn="ctr"/>
-          </a:p>
-        </p:txBody>
-      </p:sp>
-      <p:sp>
-        <p:nvSpPr>
-          <p:cNvPr id="7" name="Rectangle 6"/>
-          <p:cNvSpPr/>
-          <p:nvPr/>
-        </p:nvSpPr>
-        <p:spPr>
-          <a:xfrm>
-            <a:off x="640080" y="6455664"/>
-            <a:ext cx="10908792" cy="9144"/>
-          </a:xfrm>
-          <a:prstGeom prst="rect">
-            <a:avLst/>
-          </a:prstGeom>
-          <a:solidFill>
-            <a:srgbClr val="E6EBE8"/>
-          </a:solidFill>
-          <a:ln>
-            <a:noFill/>
-          </a:ln>
-          <a:effectLst/>
-        </p:spPr>
-        <p:style>
-          <a:lnRef idx="1">
-            <a:schemeClr val="accent1"/>
-          </a:lnRef>
-          <a:fillRef idx="3">
-            <a:schemeClr val="accent1"/>
-          </a:fillRef>
-          <a:effectRef idx="2">
-            <a:schemeClr val="accent1"/>
-          </a:effectRef>
-          <a:fontRef idx="minor">
-            <a:schemeClr val="lt1"/>
-          </a:fontRef>
-        </p:style>
-        <p:txBody>
-          <a:bodyPr rtlCol="0" anchor="ctr"/>
-          <a:lstStyle/>
-          <a:p>
-            <a:pPr algn="ctr"/>
-          </a:p>
-        </p:txBody>
-      </p:sp>
-      <p:sp>
-        <p:nvSpPr>
-          <p:cNvPr id="8" name="TextBox 7"/>
-          <p:cNvSpPr txBox="1"/>
-          <p:nvPr/>
-        </p:nvSpPr>
-        <p:spPr>
-          <a:xfrm>
-            <a:off x="640080" y="6510528"/>
-            <a:ext cx="2743200" cy="274320"/>
-          </a:xfrm>
-          <a:prstGeom prst="rect">
-            <a:avLst/>
-          </a:prstGeom>
-          <a:noFill/>
-        </p:spPr>
-        <p:txBody>
-          <a:bodyPr wrap="square" anchor="t" lIns="0" rIns="0" tIns="0" bIns="0">
-            <a:spAutoFit/>
-          </a:bodyPr>
-          <a:lstStyle/>
-          <a:p>
-            <a:r>
-              <a:rPr sz="1100" b="1">
-                <a:solidFill>
-                  <a:srgbClr val="6B7B73"/>
-                </a:solidFill>
-                <a:latin typeface="Space Grotesk"/>
-              </a:rPr>
-              <a:t>want</a:t>
-            </a:r>
-            <a:r>
-              <a:rPr sz="1100" b="1">
-                <a:solidFill>
-                  <a:srgbClr val="1F7A57"/>
-                </a:solidFill>
-                <a:latin typeface="Space Grotesk"/>
-              </a:rPr>
-              <a:t>hat</a:t>
-            </a:r>
-          </a:p>
-        </p:txBody>
-      </p:sp>
-      <p:sp>
-        <p:nvSpPr>
-          <p:cNvPr id="9" name="TextBox 8"/>
-          <p:cNvSpPr txBox="1"/>
-          <p:nvPr/>
-        </p:nvSpPr>
-        <p:spPr>
-          <a:xfrm>
-            <a:off x="10607040" y="6510528"/>
-            <a:ext cx="941832" cy="274320"/>
-          </a:xfrm>
-          <a:prstGeom prst="rect">
-            <a:avLst/>
-          </a:prstGeom>
-          <a:noFill/>
-        </p:spPr>
-        <p:txBody>
-          <a:bodyPr wrap="square" anchor="t" lIns="0" rIns="0" tIns="0" bIns="0">
-            <a:spAutoFit/>
-          </a:bodyPr>
-          <a:lstStyle/>
-          <a:p>
-            <a:pPr algn="r"/>
-            <a:r>
-              <a:rPr sz="1000" b="0">
-                <a:solidFill>
-                  <a:srgbClr val="8A968F"/>
-                </a:solidFill>
-                <a:latin typeface="Space Mono"/>
-              </a:rPr>
-              <a:t>12</a:t>
-            </a:r>
-          </a:p>
-        </p:txBody>
-      </p:sp>
-      <p:sp>
-        <p:nvSpPr>
-          <p:cNvPr id="10" name="TextBox 9"/>
-          <p:cNvSpPr txBox="1"/>
-          <p:nvPr/>
-        </p:nvSpPr>
-        <p:spPr>
-          <a:xfrm>
-            <a:off x="658368" y="1783080"/>
-            <a:ext cx="3063240" cy="4480560"/>
-          </a:xfrm>
-          <a:prstGeom prst="rect">
-            <a:avLst/>
-          </a:prstGeom>
-          <a:noFill/>
-        </p:spPr>
-        <p:txBody>
-          <a:bodyPr wrap="square">
-            <a:spAutoFit/>
-          </a:bodyPr>
-          <a:lstStyle/>
-          <a:p>
-            <a:r>
-              <a:rPr sz="1200" b="0">
-                <a:solidFill>
-                  <a:srgbClr val="15201C"/>
-                </a:solidFill>
-                <a:latin typeface="Hanken Grotesk"/>
-              </a:rPr>
-              <a:t>-  Every registration appends a hash-chained audit row — each row carries the previous row's hash.</a:t>
-            </a:r>
-          </a:p>
-          <a:p>
-            <a:r>
-              <a:rPr sz="1200" b="0">
-                <a:solidFill>
-                  <a:srgbClr val="15201C"/>
-                </a:solidFill>
-                <a:latin typeface="Hanken Grotesk"/>
-              </a:rPr>
-              <a:t>-  audit_writer is granted EXECUTE on the procedure ONLY.</a:t>
-            </a:r>
-          </a:p>
-          <a:p>
-            <a:r>
-              <a:rPr sz="1200" b="0">
-                <a:solidFill>
-                  <a:srgbClr val="15201C"/>
-                </a:solidFill>
-                <a:latin typeface="Hanken Grotesk"/>
-              </a:rPr>
-              <a:t>-  The stored procedure serializes concurrent appends (advisory lock).</a:t>
-            </a:r>
-          </a:p>
-        </p:txBody>
-      </p:sp>
+      <p:pic>
+        <p:nvPicPr>
+          <p:cNvPr id="2" name="Picture 1" descr="page-12.png"/>
+          <p:cNvPicPr>
+            <a:picLocks noChangeAspect="1"/>
+          </p:cNvPicPr>
+          <p:nvPr/>
+        </p:nvPicPr>
+        <p:blipFill>
+          <a:blip r:embed="rId4"/>
+          <a:stretch>
+            <a:fillRect/>
+          </a:stretch>
+        </p:blipFill>
+        <p:spPr>
+          <a:xfrm>
+            <a:off x="0" y="0"/>
+            <a:ext cx="12191695" cy="6858000"/>
+          </a:xfrm>
+          <a:prstGeom prst="rect">
+            <a:avLst/>
+          </a:prstGeom>
+        </p:spPr>
+      </p:pic>
     </p:spTree>
   </p:cSld>
   <p:clrMapOvr>
@@ -7127,324 +6212,30 @@
         <p:nvPr/>
       </p:nvGrpSpPr>
       <p:grpSpPr/>
-      <p:sp>
-        <p:nvSpPr>
-          <p:cNvPr id="2" name="TextBox 1"/>
-          <p:cNvSpPr txBox="1"/>
-          <p:nvPr/>
-        </p:nvSpPr>
-        <p:spPr>
-          <a:xfrm>
-            <a:off x="10195560" y="256032"/>
-            <a:ext cx="1371600" cy="1005840"/>
-          </a:xfrm>
-          <a:prstGeom prst="rect">
-            <a:avLst/>
-          </a:prstGeom>
-          <a:noFill/>
-        </p:spPr>
-        <p:txBody>
-          <a:bodyPr wrap="square" anchor="t" lIns="0" rIns="0" tIns="0" bIns="0">
-            <a:spAutoFit/>
-          </a:bodyPr>
-          <a:lstStyle/>
-          <a:p>
-            <a:pPr algn="r"/>
-            <a:r>
-              <a:rPr sz="4600" b="1">
-                <a:solidFill>
-                  <a:srgbClr val="DCE5E0"/>
-                </a:solidFill>
-                <a:latin typeface="Space Grotesk"/>
-              </a:rPr>
-              <a:t>13</a:t>
-            </a:r>
-          </a:p>
-        </p:txBody>
-      </p:sp>
-      <p:sp>
-        <p:nvSpPr>
-          <p:cNvPr id="3" name="TextBox 2"/>
-          <p:cNvSpPr txBox="1"/>
-          <p:nvPr/>
-        </p:nvSpPr>
-        <p:spPr>
-          <a:xfrm>
-            <a:off x="640080" y="420624"/>
-            <a:ext cx="9418320" cy="292608"/>
-          </a:xfrm>
-          <a:prstGeom prst="rect">
-            <a:avLst/>
-          </a:prstGeom>
-          <a:noFill/>
-        </p:spPr>
-        <p:txBody>
-          <a:bodyPr wrap="square" anchor="t" lIns="0" rIns="0" tIns="0" bIns="0">
-            <a:spAutoFit/>
-          </a:bodyPr>
-          <a:lstStyle/>
-          <a:p>
-            <a:r>
-              <a:rPr sz="1150" b="1">
-                <a:solidFill>
-                  <a:srgbClr val="1F7A57"/>
-                </a:solidFill>
-                <a:latin typeface="Space Mono"/>
-              </a:rPr>
-              <a:t>ENGINEERING</a:t>
-            </a:r>
-          </a:p>
-        </p:txBody>
-      </p:sp>
-      <p:sp>
-        <p:nvSpPr>
-          <p:cNvPr id="4" name="TextBox 3"/>
-          <p:cNvSpPr txBox="1"/>
-          <p:nvPr/>
-        </p:nvSpPr>
-        <p:spPr>
-          <a:xfrm>
-            <a:off x="621792" y="731520"/>
-            <a:ext cx="9509760" cy="868680"/>
-          </a:xfrm>
-          <a:prstGeom prst="rect">
-            <a:avLst/>
-          </a:prstGeom>
-          <a:noFill/>
-        </p:spPr>
-        <p:txBody>
-          <a:bodyPr wrap="square" anchor="t" lIns="0" rIns="0" tIns="0" bIns="0">
-            <a:spAutoFit/>
-          </a:bodyPr>
-          <a:lstStyle/>
-          <a:p>
-            <a:r>
-              <a:rPr sz="2700" b="1">
-                <a:solidFill>
-                  <a:srgbClr val="15201C"/>
-                </a:solidFill>
-                <a:latin typeface="Space Grotesk"/>
-              </a:rPr>
-              <a:t>Architecture UC4 — settlement pulled in the background</a:t>
-            </a:r>
-          </a:p>
-        </p:txBody>
-      </p:sp>
-      <p:sp>
-        <p:nvSpPr>
-          <p:cNvPr id="5" name="Rounded Rectangle 4"/>
-          <p:cNvSpPr/>
-          <p:nvPr/>
-        </p:nvSpPr>
-        <p:spPr>
-          <a:xfrm>
-            <a:off x="3886200" y="1600200"/>
-            <a:ext cx="7653527" cy="4709160"/>
-          </a:xfrm>
-          <a:prstGeom prst="roundRect">
-            <a:avLst>
-              <a:gd name="adj" fmla="val 3000"/>
-            </a:avLst>
-          </a:prstGeom>
-          <a:solidFill>
-            <a:srgbClr val="FFFFFF"/>
-          </a:solidFill>
-          <a:ln w="12700">
-            <a:solidFill>
-              <a:srgbClr val="E6EBE8"/>
-            </a:solidFill>
-          </a:ln>
-          <a:effectLst/>
-        </p:spPr>
-        <p:style>
-          <a:lnRef idx="1">
-            <a:schemeClr val="accent1"/>
-          </a:lnRef>
-          <a:fillRef idx="3">
-            <a:schemeClr val="accent1"/>
-          </a:fillRef>
-          <a:effectRef idx="2">
-            <a:schemeClr val="accent1"/>
-          </a:effectRef>
-          <a:fontRef idx="minor">
-            <a:schemeClr val="lt1"/>
-          </a:fontRef>
-        </p:style>
-        <p:txBody>
-          <a:bodyPr rtlCol="0" anchor="ctr"/>
-          <a:lstStyle/>
-          <a:p>
-            <a:pPr algn="ctr"/>
-          </a:p>
-        </p:txBody>
-      </p:sp>
-      <p:sp>
-        <p:nvSpPr>
-          <p:cNvPr id="7" name="Rectangle 6"/>
-          <p:cNvSpPr/>
-          <p:nvPr/>
-        </p:nvSpPr>
-        <p:spPr>
-          <a:xfrm>
-            <a:off x="640080" y="6455664"/>
-            <a:ext cx="10908792" cy="9144"/>
-          </a:xfrm>
-          <a:prstGeom prst="rect">
-            <a:avLst/>
-          </a:prstGeom>
-          <a:solidFill>
-            <a:srgbClr val="E6EBE8"/>
-          </a:solidFill>
-          <a:ln>
-            <a:noFill/>
-          </a:ln>
-          <a:effectLst/>
-        </p:spPr>
-        <p:style>
-          <a:lnRef idx="1">
-            <a:schemeClr val="accent1"/>
-          </a:lnRef>
-          <a:fillRef idx="3">
-            <a:schemeClr val="accent1"/>
-          </a:fillRef>
-          <a:effectRef idx="2">
-            <a:schemeClr val="accent1"/>
-          </a:effectRef>
-          <a:fontRef idx="minor">
-            <a:schemeClr val="lt1"/>
-          </a:fontRef>
-        </p:style>
-        <p:txBody>
-          <a:bodyPr rtlCol="0" anchor="ctr"/>
-          <a:lstStyle/>
-          <a:p>
-            <a:pPr algn="ctr"/>
-          </a:p>
-        </p:txBody>
-      </p:sp>
-      <p:sp>
-        <p:nvSpPr>
-          <p:cNvPr id="8" name="TextBox 7"/>
-          <p:cNvSpPr txBox="1"/>
-          <p:nvPr/>
-        </p:nvSpPr>
-        <p:spPr>
-          <a:xfrm>
-            <a:off x="640080" y="6510528"/>
-            <a:ext cx="2743200" cy="274320"/>
-          </a:xfrm>
-          <a:prstGeom prst="rect">
-            <a:avLst/>
-          </a:prstGeom>
-          <a:noFill/>
-        </p:spPr>
-        <p:txBody>
-          <a:bodyPr wrap="square" anchor="t" lIns="0" rIns="0" tIns="0" bIns="0">
-            <a:spAutoFit/>
-          </a:bodyPr>
-          <a:lstStyle/>
-          <a:p>
-            <a:r>
-              <a:rPr sz="1100" b="1">
-                <a:solidFill>
-                  <a:srgbClr val="6B7B73"/>
-                </a:solidFill>
-                <a:latin typeface="Space Grotesk"/>
-              </a:rPr>
-              <a:t>want</a:t>
-            </a:r>
-            <a:r>
-              <a:rPr sz="1100" b="1">
-                <a:solidFill>
-                  <a:srgbClr val="1F7A57"/>
-                </a:solidFill>
-                <a:latin typeface="Space Grotesk"/>
-              </a:rPr>
-              <a:t>hat</a:t>
-            </a:r>
-          </a:p>
-        </p:txBody>
-      </p:sp>
-      <p:sp>
-        <p:nvSpPr>
-          <p:cNvPr id="9" name="TextBox 8"/>
-          <p:cNvSpPr txBox="1"/>
-          <p:nvPr/>
-        </p:nvSpPr>
-        <p:spPr>
-          <a:xfrm>
-            <a:off x="10607040" y="6510528"/>
-            <a:ext cx="941832" cy="274320"/>
-          </a:xfrm>
-          <a:prstGeom prst="rect">
-            <a:avLst/>
-          </a:prstGeom>
-          <a:noFill/>
-        </p:spPr>
-        <p:txBody>
-          <a:bodyPr wrap="square" anchor="t" lIns="0" rIns="0" tIns="0" bIns="0">
-            <a:spAutoFit/>
-          </a:bodyPr>
-          <a:lstStyle/>
-          <a:p>
-            <a:pPr algn="r"/>
-            <a:r>
-              <a:rPr sz="1000" b="0">
-                <a:solidFill>
-                  <a:srgbClr val="8A968F"/>
-                </a:solidFill>
-                <a:latin typeface="Space Mono"/>
-              </a:rPr>
-              <a:t>13</a:t>
-            </a:r>
-          </a:p>
-        </p:txBody>
-      </p:sp>
-      <p:sp>
-        <p:nvSpPr>
-          <p:cNvPr id="10" name="TextBox 9"/>
-          <p:cNvSpPr txBox="1"/>
-          <p:nvPr/>
-        </p:nvSpPr>
-        <p:spPr>
-          <a:xfrm>
-            <a:off x="658368" y="1783080"/>
-            <a:ext cx="3063240" cy="4480560"/>
-          </a:xfrm>
-          <a:prstGeom prst="rect">
-            <a:avLst/>
-          </a:prstGeom>
-          <a:noFill/>
-        </p:spPr>
-        <p:txBody>
-          <a:bodyPr wrap="square">
-            <a:spAutoFit/>
-          </a:bodyPr>
-          <a:lstStyle/>
-          <a:p>
-            <a:r>
-              <a:rPr sz="1200" b="0">
-                <a:solidFill>
-                  <a:srgbClr val="15201C"/>
-                </a:solidFill>
-                <a:latin typeface="Hanken Grotesk"/>
-              </a:rPr>
-              <a:t>-  Internal-only flow — the ONLY path that can append wallet entries (GRANT-enforced).</a:t>
-            </a:r>
-          </a:p>
-          <a:p>
-            <a:r>
-              <a:rPr sz="1200" b="0">
-                <a:solidFill>
-                  <a:srgbClr val="15201C"/>
-                </a:solidFill>
-                <a:latin typeface="Hanken Grotesk"/>
-              </a:rPr>
-              <a:t>-  Side use case: FX rates pulled from the exchange-rate provider.</a:t>
-            </a:r>
-          </a:p>
-        </p:txBody>
-      </p:sp>
+      <p:pic>
+        <p:nvPicPr>
+          <p:cNvPr id="2" name="Picture 1" descr="page-13.jpg"/>
+          <p:cNvPicPr>
+            <a:picLocks noChangeAspect="1"/>
+          </p:cNvPicPr>
+          <p:nvPr/>
+        </p:nvPicPr>
+        <p:blipFill>
+          <a:blip r:embed="rId4"/>
+          <a:stretch>
+            <a:fillRect/>
+          </a:stretch>
+        </p:blipFill>
+        <p:spPr>
+          <a:xfrm>
+            <a:off x="0" y="0"/>
+            <a:ext cx="12191695" cy="6858000"/>
+          </a:xfrm>
+          <a:prstGeom prst="rect">
+            <a:avLst/>
+          </a:prstGeom>
+        </p:spPr>
+      </p:pic>
     </p:spTree>
   </p:cSld>
   <p:clrMapOvr>
@@ -7463,324 +6254,30 @@
         <p:nvPr/>
       </p:nvGrpSpPr>
       <p:grpSpPr/>
-      <p:sp>
-        <p:nvSpPr>
-          <p:cNvPr id="2" name="TextBox 1"/>
-          <p:cNvSpPr txBox="1"/>
-          <p:nvPr/>
-        </p:nvSpPr>
-        <p:spPr>
-          <a:xfrm>
-            <a:off x="10195560" y="256032"/>
-            <a:ext cx="1371600" cy="1005840"/>
-          </a:xfrm>
-          <a:prstGeom prst="rect">
-            <a:avLst/>
-          </a:prstGeom>
-          <a:noFill/>
-        </p:spPr>
-        <p:txBody>
-          <a:bodyPr wrap="square" anchor="t" lIns="0" rIns="0" tIns="0" bIns="0">
-            <a:spAutoFit/>
-          </a:bodyPr>
-          <a:lstStyle/>
-          <a:p>
-            <a:pPr algn="r"/>
-            <a:r>
-              <a:rPr sz="4600" b="1">
-                <a:solidFill>
-                  <a:srgbClr val="DCE5E0"/>
-                </a:solidFill>
-                <a:latin typeface="Space Grotesk"/>
-              </a:rPr>
-              <a:t>14</a:t>
-            </a:r>
-          </a:p>
-        </p:txBody>
-      </p:sp>
-      <p:sp>
-        <p:nvSpPr>
-          <p:cNvPr id="3" name="TextBox 2"/>
-          <p:cNvSpPr txBox="1"/>
-          <p:nvPr/>
-        </p:nvSpPr>
-        <p:spPr>
-          <a:xfrm>
-            <a:off x="640080" y="420624"/>
-            <a:ext cx="9418320" cy="292608"/>
-          </a:xfrm>
-          <a:prstGeom prst="rect">
-            <a:avLst/>
-          </a:prstGeom>
-          <a:noFill/>
-        </p:spPr>
-        <p:txBody>
-          <a:bodyPr wrap="square" anchor="t" lIns="0" rIns="0" tIns="0" bIns="0">
-            <a:spAutoFit/>
-          </a:bodyPr>
-          <a:lstStyle/>
-          <a:p>
-            <a:r>
-              <a:rPr sz="1150" b="1">
-                <a:solidFill>
-                  <a:srgbClr val="1F7A57"/>
-                </a:solidFill>
-                <a:latin typeface="Space Mono"/>
-              </a:rPr>
-              <a:t>ENGINEERING</a:t>
-            </a:r>
-          </a:p>
-        </p:txBody>
-      </p:sp>
-      <p:sp>
-        <p:nvSpPr>
-          <p:cNvPr id="4" name="TextBox 3"/>
-          <p:cNvSpPr txBox="1"/>
-          <p:nvPr/>
-        </p:nvSpPr>
-        <p:spPr>
-          <a:xfrm>
-            <a:off x="621792" y="731520"/>
-            <a:ext cx="9509760" cy="868680"/>
-          </a:xfrm>
-          <a:prstGeom prst="rect">
-            <a:avLst/>
-          </a:prstGeom>
-          <a:noFill/>
-        </p:spPr>
-        <p:txBody>
-          <a:bodyPr wrap="square" anchor="t" lIns="0" rIns="0" tIns="0" bIns="0">
-            <a:spAutoFit/>
-          </a:bodyPr>
-          <a:lstStyle/>
-          <a:p>
-            <a:r>
-              <a:rPr sz="2700" b="1">
-                <a:solidFill>
-                  <a:srgbClr val="15201C"/>
-                </a:solidFill>
-                <a:latin typeface="Space Grotesk"/>
-              </a:rPr>
-              <a:t>Architecture UC5 — the member home page</a:t>
-            </a:r>
-          </a:p>
-        </p:txBody>
-      </p:sp>
-      <p:sp>
-        <p:nvSpPr>
-          <p:cNvPr id="5" name="Rounded Rectangle 4"/>
-          <p:cNvSpPr/>
-          <p:nvPr/>
-        </p:nvSpPr>
-        <p:spPr>
-          <a:xfrm>
-            <a:off x="3886200" y="1600200"/>
-            <a:ext cx="7653527" cy="4709160"/>
-          </a:xfrm>
-          <a:prstGeom prst="roundRect">
-            <a:avLst>
-              <a:gd name="adj" fmla="val 3000"/>
-            </a:avLst>
-          </a:prstGeom>
-          <a:solidFill>
-            <a:srgbClr val="FFFFFF"/>
-          </a:solidFill>
-          <a:ln w="12700">
-            <a:solidFill>
-              <a:srgbClr val="E6EBE8"/>
-            </a:solidFill>
-          </a:ln>
-          <a:effectLst/>
-        </p:spPr>
-        <p:style>
-          <a:lnRef idx="1">
-            <a:schemeClr val="accent1"/>
-          </a:lnRef>
-          <a:fillRef idx="3">
-            <a:schemeClr val="accent1"/>
-          </a:fillRef>
-          <a:effectRef idx="2">
-            <a:schemeClr val="accent1"/>
-          </a:effectRef>
-          <a:fontRef idx="minor">
-            <a:schemeClr val="lt1"/>
-          </a:fontRef>
-        </p:style>
-        <p:txBody>
-          <a:bodyPr rtlCol="0" anchor="ctr"/>
-          <a:lstStyle/>
-          <a:p>
-            <a:pPr algn="ctr"/>
-          </a:p>
-        </p:txBody>
-      </p:sp>
-      <p:sp>
-        <p:nvSpPr>
-          <p:cNvPr id="7" name="Rectangle 6"/>
-          <p:cNvSpPr/>
-          <p:nvPr/>
-        </p:nvSpPr>
-        <p:spPr>
-          <a:xfrm>
-            <a:off x="640080" y="6455664"/>
-            <a:ext cx="10908792" cy="9144"/>
-          </a:xfrm>
-          <a:prstGeom prst="rect">
-            <a:avLst/>
-          </a:prstGeom>
-          <a:solidFill>
-            <a:srgbClr val="E6EBE8"/>
-          </a:solidFill>
-          <a:ln>
-            <a:noFill/>
-          </a:ln>
-          <a:effectLst/>
-        </p:spPr>
-        <p:style>
-          <a:lnRef idx="1">
-            <a:schemeClr val="accent1"/>
-          </a:lnRef>
-          <a:fillRef idx="3">
-            <a:schemeClr val="accent1"/>
-          </a:fillRef>
-          <a:effectRef idx="2">
-            <a:schemeClr val="accent1"/>
-          </a:effectRef>
-          <a:fontRef idx="minor">
-            <a:schemeClr val="lt1"/>
-          </a:fontRef>
-        </p:style>
-        <p:txBody>
-          <a:bodyPr rtlCol="0" anchor="ctr"/>
-          <a:lstStyle/>
-          <a:p>
-            <a:pPr algn="ctr"/>
-          </a:p>
-        </p:txBody>
-      </p:sp>
-      <p:sp>
-        <p:nvSpPr>
-          <p:cNvPr id="8" name="TextBox 7"/>
-          <p:cNvSpPr txBox="1"/>
-          <p:nvPr/>
-        </p:nvSpPr>
-        <p:spPr>
-          <a:xfrm>
-            <a:off x="640080" y="6510528"/>
-            <a:ext cx="2743200" cy="274320"/>
-          </a:xfrm>
-          <a:prstGeom prst="rect">
-            <a:avLst/>
-          </a:prstGeom>
-          <a:noFill/>
-        </p:spPr>
-        <p:txBody>
-          <a:bodyPr wrap="square" anchor="t" lIns="0" rIns="0" tIns="0" bIns="0">
-            <a:spAutoFit/>
-          </a:bodyPr>
-          <a:lstStyle/>
-          <a:p>
-            <a:r>
-              <a:rPr sz="1100" b="1">
-                <a:solidFill>
-                  <a:srgbClr val="6B7B73"/>
-                </a:solidFill>
-                <a:latin typeface="Space Grotesk"/>
-              </a:rPr>
-              <a:t>want</a:t>
-            </a:r>
-            <a:r>
-              <a:rPr sz="1100" b="1">
-                <a:solidFill>
-                  <a:srgbClr val="1F7A57"/>
-                </a:solidFill>
-                <a:latin typeface="Space Grotesk"/>
-              </a:rPr>
-              <a:t>hat</a:t>
-            </a:r>
-          </a:p>
-        </p:txBody>
-      </p:sp>
-      <p:sp>
-        <p:nvSpPr>
-          <p:cNvPr id="9" name="TextBox 8"/>
-          <p:cNvSpPr txBox="1"/>
-          <p:nvPr/>
-        </p:nvSpPr>
-        <p:spPr>
-          <a:xfrm>
-            <a:off x="10607040" y="6510528"/>
-            <a:ext cx="941832" cy="274320"/>
-          </a:xfrm>
-          <a:prstGeom prst="rect">
-            <a:avLst/>
-          </a:prstGeom>
-          <a:noFill/>
-        </p:spPr>
-        <p:txBody>
-          <a:bodyPr wrap="square" anchor="t" lIns="0" rIns="0" tIns="0" bIns="0">
-            <a:spAutoFit/>
-          </a:bodyPr>
-          <a:lstStyle/>
-          <a:p>
-            <a:pPr algn="r"/>
-            <a:r>
-              <a:rPr sz="1000" b="0">
-                <a:solidFill>
-                  <a:srgbClr val="8A968F"/>
-                </a:solidFill>
-                <a:latin typeface="Space Mono"/>
-              </a:rPr>
-              <a:t>14</a:t>
-            </a:r>
-          </a:p>
-        </p:txBody>
-      </p:sp>
-      <p:sp>
-        <p:nvSpPr>
-          <p:cNvPr id="10" name="TextBox 9"/>
-          <p:cNvSpPr txBox="1"/>
-          <p:nvPr/>
-        </p:nvSpPr>
-        <p:spPr>
-          <a:xfrm>
-            <a:off x="658368" y="1783080"/>
-            <a:ext cx="3063240" cy="4480560"/>
-          </a:xfrm>
-          <a:prstGeom prst="rect">
-            <a:avLst/>
-          </a:prstGeom>
-          <a:noFill/>
-        </p:spPr>
-        <p:txBody>
-          <a:bodyPr wrap="square">
-            <a:spAutoFit/>
-          </a:bodyPr>
-          <a:lstStyle/>
-          <a:p>
-            <a:r>
-              <a:rPr sz="1200" b="0">
-                <a:solidFill>
-                  <a:srgbClr val="15201C"/>
-                </a:solidFill>
-                <a:latin typeface="Hanken Grotesk"/>
-              </a:rPr>
-              <a:t>-  An Aurora cold resume may delay the wallet total + recent activity.</a:t>
-            </a:r>
-          </a:p>
-          <a:p>
-            <a:r>
-              <a:rPr sz="1200" b="0">
-                <a:solidFill>
-                  <a:srgbClr val="15201C"/>
-                </a:solidFill>
-                <a:latin typeface="Hanken Grotesk"/>
-              </a:rPr>
-              <a:t>-  Everything else is operational immediately.</a:t>
-            </a:r>
-          </a:p>
-        </p:txBody>
-      </p:sp>
+      <p:pic>
+        <p:nvPicPr>
+          <p:cNvPr id="2" name="Picture 1" descr="page-14.jpg"/>
+          <p:cNvPicPr>
+            <a:picLocks noChangeAspect="1"/>
+          </p:cNvPicPr>
+          <p:nvPr/>
+        </p:nvPicPr>
+        <p:blipFill>
+          <a:blip r:embed="rId4"/>
+          <a:stretch>
+            <a:fillRect/>
+          </a:stretch>
+        </p:blipFill>
+        <p:spPr>
+          <a:xfrm>
+            <a:off x="0" y="0"/>
+            <a:ext cx="12191695" cy="6858000"/>
+          </a:xfrm>
+          <a:prstGeom prst="rect">
+            <a:avLst/>
+          </a:prstGeom>
+        </p:spPr>
+      </p:pic>
     </p:spTree>
   </p:cSld>
   <p:clrMapOvr>
@@ -7799,324 +6296,30 @@
         <p:nvPr/>
       </p:nvGrpSpPr>
       <p:grpSpPr/>
-      <p:sp>
-        <p:nvSpPr>
-          <p:cNvPr id="2" name="TextBox 1"/>
-          <p:cNvSpPr txBox="1"/>
-          <p:nvPr/>
-        </p:nvSpPr>
-        <p:spPr>
-          <a:xfrm>
-            <a:off x="10195560" y="256032"/>
-            <a:ext cx="1371600" cy="1005840"/>
-          </a:xfrm>
-          <a:prstGeom prst="rect">
-            <a:avLst/>
-          </a:prstGeom>
-          <a:noFill/>
-        </p:spPr>
-        <p:txBody>
-          <a:bodyPr wrap="square" anchor="t" lIns="0" rIns="0" tIns="0" bIns="0">
-            <a:spAutoFit/>
-          </a:bodyPr>
-          <a:lstStyle/>
-          <a:p>
-            <a:pPr algn="r"/>
-            <a:r>
-              <a:rPr sz="4600" b="1">
-                <a:solidFill>
-                  <a:srgbClr val="DCE5E0"/>
-                </a:solidFill>
-                <a:latin typeface="Space Grotesk"/>
-              </a:rPr>
-              <a:t>15</a:t>
-            </a:r>
-          </a:p>
-        </p:txBody>
-      </p:sp>
-      <p:sp>
-        <p:nvSpPr>
-          <p:cNvPr id="3" name="TextBox 2"/>
-          <p:cNvSpPr txBox="1"/>
-          <p:nvPr/>
-        </p:nvSpPr>
-        <p:spPr>
-          <a:xfrm>
-            <a:off x="640080" y="420624"/>
-            <a:ext cx="9418320" cy="292608"/>
-          </a:xfrm>
-          <a:prstGeom prst="rect">
-            <a:avLst/>
-          </a:prstGeom>
-          <a:noFill/>
-        </p:spPr>
-        <p:txBody>
-          <a:bodyPr wrap="square" anchor="t" lIns="0" rIns="0" tIns="0" bIns="0">
-            <a:spAutoFit/>
-          </a:bodyPr>
-          <a:lstStyle/>
-          <a:p>
-            <a:r>
-              <a:rPr sz="1150" b="1">
-                <a:solidFill>
-                  <a:srgbClr val="1F7A57"/>
-                </a:solidFill>
-                <a:latin typeface="Space Mono"/>
-              </a:rPr>
-              <a:t>ENGINEERING</a:t>
-            </a:r>
-          </a:p>
-        </p:txBody>
-      </p:sp>
-      <p:sp>
-        <p:nvSpPr>
-          <p:cNvPr id="4" name="TextBox 3"/>
-          <p:cNvSpPr txBox="1"/>
-          <p:nvPr/>
-        </p:nvSpPr>
-        <p:spPr>
-          <a:xfrm>
-            <a:off x="621792" y="731520"/>
-            <a:ext cx="9509760" cy="868680"/>
-          </a:xfrm>
-          <a:prstGeom prst="rect">
-            <a:avLst/>
-          </a:prstGeom>
-          <a:noFill/>
-        </p:spPr>
-        <p:txBody>
-          <a:bodyPr wrap="square" anchor="t" lIns="0" rIns="0" tIns="0" bIns="0">
-            <a:spAutoFit/>
-          </a:bodyPr>
-          <a:lstStyle/>
-          <a:p>
-            <a:r>
-              <a:rPr sz="2700" b="1">
-                <a:solidFill>
-                  <a:srgbClr val="15201C"/>
-                </a:solidFill>
-                <a:latin typeface="Space Grotesk"/>
-              </a:rPr>
-              <a:t>Architecture UC6 — the admin console</a:t>
-            </a:r>
-          </a:p>
-        </p:txBody>
-      </p:sp>
-      <p:sp>
-        <p:nvSpPr>
-          <p:cNvPr id="5" name="Rounded Rectangle 4"/>
-          <p:cNvSpPr/>
-          <p:nvPr/>
-        </p:nvSpPr>
-        <p:spPr>
-          <a:xfrm>
-            <a:off x="3886200" y="1600200"/>
-            <a:ext cx="7653527" cy="4709160"/>
-          </a:xfrm>
-          <a:prstGeom prst="roundRect">
-            <a:avLst>
-              <a:gd name="adj" fmla="val 3000"/>
-            </a:avLst>
-          </a:prstGeom>
-          <a:solidFill>
-            <a:srgbClr val="FFFFFF"/>
-          </a:solidFill>
-          <a:ln w="12700">
-            <a:solidFill>
-              <a:srgbClr val="E6EBE8"/>
-            </a:solidFill>
-          </a:ln>
-          <a:effectLst/>
-        </p:spPr>
-        <p:style>
-          <a:lnRef idx="1">
-            <a:schemeClr val="accent1"/>
-          </a:lnRef>
-          <a:fillRef idx="3">
-            <a:schemeClr val="accent1"/>
-          </a:fillRef>
-          <a:effectRef idx="2">
-            <a:schemeClr val="accent1"/>
-          </a:effectRef>
-          <a:fontRef idx="minor">
-            <a:schemeClr val="lt1"/>
-          </a:fontRef>
-        </p:style>
-        <p:txBody>
-          <a:bodyPr rtlCol="0" anchor="ctr"/>
-          <a:lstStyle/>
-          <a:p>
-            <a:pPr algn="ctr"/>
-          </a:p>
-        </p:txBody>
-      </p:sp>
-      <p:sp>
-        <p:nvSpPr>
-          <p:cNvPr id="7" name="Rectangle 6"/>
-          <p:cNvSpPr/>
-          <p:nvPr/>
-        </p:nvSpPr>
-        <p:spPr>
-          <a:xfrm>
-            <a:off x="640080" y="6455664"/>
-            <a:ext cx="10908792" cy="9144"/>
-          </a:xfrm>
-          <a:prstGeom prst="rect">
-            <a:avLst/>
-          </a:prstGeom>
-          <a:solidFill>
-            <a:srgbClr val="E6EBE8"/>
-          </a:solidFill>
-          <a:ln>
-            <a:noFill/>
-          </a:ln>
-          <a:effectLst/>
-        </p:spPr>
-        <p:style>
-          <a:lnRef idx="1">
-            <a:schemeClr val="accent1"/>
-          </a:lnRef>
-          <a:fillRef idx="3">
-            <a:schemeClr val="accent1"/>
-          </a:fillRef>
-          <a:effectRef idx="2">
-            <a:schemeClr val="accent1"/>
-          </a:effectRef>
-          <a:fontRef idx="minor">
-            <a:schemeClr val="lt1"/>
-          </a:fontRef>
-        </p:style>
-        <p:txBody>
-          <a:bodyPr rtlCol="0" anchor="ctr"/>
-          <a:lstStyle/>
-          <a:p>
-            <a:pPr algn="ctr"/>
-          </a:p>
-        </p:txBody>
-      </p:sp>
-      <p:sp>
-        <p:nvSpPr>
-          <p:cNvPr id="8" name="TextBox 7"/>
-          <p:cNvSpPr txBox="1"/>
-          <p:nvPr/>
-        </p:nvSpPr>
-        <p:spPr>
-          <a:xfrm>
-            <a:off x="640080" y="6510528"/>
-            <a:ext cx="2743200" cy="274320"/>
-          </a:xfrm>
-          <a:prstGeom prst="rect">
-            <a:avLst/>
-          </a:prstGeom>
-          <a:noFill/>
-        </p:spPr>
-        <p:txBody>
-          <a:bodyPr wrap="square" anchor="t" lIns="0" rIns="0" tIns="0" bIns="0">
-            <a:spAutoFit/>
-          </a:bodyPr>
-          <a:lstStyle/>
-          <a:p>
-            <a:r>
-              <a:rPr sz="1100" b="1">
-                <a:solidFill>
-                  <a:srgbClr val="6B7B73"/>
-                </a:solidFill>
-                <a:latin typeface="Space Grotesk"/>
-              </a:rPr>
-              <a:t>want</a:t>
-            </a:r>
-            <a:r>
-              <a:rPr sz="1100" b="1">
-                <a:solidFill>
-                  <a:srgbClr val="1F7A57"/>
-                </a:solidFill>
-                <a:latin typeface="Space Grotesk"/>
-              </a:rPr>
-              <a:t>hat</a:t>
-            </a:r>
-          </a:p>
-        </p:txBody>
-      </p:sp>
-      <p:sp>
-        <p:nvSpPr>
-          <p:cNvPr id="9" name="TextBox 8"/>
-          <p:cNvSpPr txBox="1"/>
-          <p:nvPr/>
-        </p:nvSpPr>
-        <p:spPr>
-          <a:xfrm>
-            <a:off x="10607040" y="6510528"/>
-            <a:ext cx="941832" cy="274320"/>
-          </a:xfrm>
-          <a:prstGeom prst="rect">
-            <a:avLst/>
-          </a:prstGeom>
-          <a:noFill/>
-        </p:spPr>
-        <p:txBody>
-          <a:bodyPr wrap="square" anchor="t" lIns="0" rIns="0" tIns="0" bIns="0">
-            <a:spAutoFit/>
-          </a:bodyPr>
-          <a:lstStyle/>
-          <a:p>
-            <a:pPr algn="r"/>
-            <a:r>
-              <a:rPr sz="1000" b="0">
-                <a:solidFill>
-                  <a:srgbClr val="8A968F"/>
-                </a:solidFill>
-                <a:latin typeface="Space Mono"/>
-              </a:rPr>
-              <a:t>15</a:t>
-            </a:r>
-          </a:p>
-        </p:txBody>
-      </p:sp>
-      <p:sp>
-        <p:nvSpPr>
-          <p:cNvPr id="10" name="TextBox 9"/>
-          <p:cNvSpPr txBox="1"/>
-          <p:nvPr/>
-        </p:nvSpPr>
-        <p:spPr>
-          <a:xfrm>
-            <a:off x="658368" y="1783080"/>
-            <a:ext cx="3063240" cy="4480560"/>
-          </a:xfrm>
-          <a:prstGeom prst="rect">
-            <a:avLst/>
-          </a:prstGeom>
-          <a:noFill/>
-        </p:spPr>
-        <p:txBody>
-          <a:bodyPr wrap="square">
-            <a:spAutoFit/>
-          </a:bodyPr>
-          <a:lstStyle/>
-          <a:p>
-            <a:r>
-              <a:rPr sz="1200" b="0">
-                <a:solidFill>
-                  <a:srgbClr val="15201C"/>
-                </a:solidFill>
-                <a:latin typeface="Hanken Grotesk"/>
-              </a:rPr>
-              <a:t>-  Cognito Managed Login; a SEPARATE employee pool.</a:t>
-            </a:r>
-          </a:p>
-          <a:p>
-            <a:r>
-              <a:rPr sz="1200" b="0">
-                <a:solidFill>
-                  <a:srgbClr val="15201C"/>
-                </a:solidFill>
-                <a:latin typeface="Hanken Grotesk"/>
-              </a:rPr>
-              <a:t>-  Operational-data management; money views are read-only.</a:t>
-            </a:r>
-          </a:p>
-        </p:txBody>
-      </p:sp>
+      <p:pic>
+        <p:nvPicPr>
+          <p:cNvPr id="2" name="Picture 1" descr="page-15.jpg"/>
+          <p:cNvPicPr>
+            <a:picLocks noChangeAspect="1"/>
+          </p:cNvPicPr>
+          <p:nvPr/>
+        </p:nvPicPr>
+        <p:blipFill>
+          <a:blip r:embed="rId4"/>
+          <a:stretch>
+            <a:fillRect/>
+          </a:stretch>
+        </p:blipFill>
+        <p:spPr>
+          <a:xfrm>
+            <a:off x="0" y="0"/>
+            <a:ext cx="12191695" cy="6858000"/>
+          </a:xfrm>
+          <a:prstGeom prst="rect">
+            <a:avLst/>
+          </a:prstGeom>
+        </p:spPr>
+      </p:pic>
     </p:spTree>
   </p:cSld>
   <p:clrMapOvr>
@@ -8135,357 +6338,30 @@
         <p:nvPr/>
       </p:nvGrpSpPr>
       <p:grpSpPr/>
-      <p:sp>
-        <p:nvSpPr>
-          <p:cNvPr id="2" name="TextBox 1"/>
-          <p:cNvSpPr txBox="1"/>
-          <p:nvPr/>
-        </p:nvSpPr>
-        <p:spPr>
-          <a:xfrm>
-            <a:off x="10195560" y="256032"/>
-            <a:ext cx="1371600" cy="1005840"/>
-          </a:xfrm>
-          <a:prstGeom prst="rect">
-            <a:avLst/>
-          </a:prstGeom>
-          <a:noFill/>
-        </p:spPr>
-        <p:txBody>
-          <a:bodyPr wrap="square" anchor="t" lIns="0" rIns="0" tIns="0" bIns="0">
-            <a:spAutoFit/>
-          </a:bodyPr>
-          <a:lstStyle/>
-          <a:p>
-            <a:pPr algn="r"/>
-            <a:r>
-              <a:rPr sz="4600" b="1">
-                <a:solidFill>
-                  <a:srgbClr val="DCE5E0"/>
-                </a:solidFill>
-                <a:latin typeface="Space Grotesk"/>
-              </a:rPr>
-              <a:t>16</a:t>
-            </a:r>
-          </a:p>
-        </p:txBody>
-      </p:sp>
-      <p:sp>
-        <p:nvSpPr>
-          <p:cNvPr id="3" name="TextBox 2"/>
-          <p:cNvSpPr txBox="1"/>
-          <p:nvPr/>
-        </p:nvSpPr>
-        <p:spPr>
-          <a:xfrm>
-            <a:off x="640080" y="420624"/>
-            <a:ext cx="9418320" cy="292608"/>
-          </a:xfrm>
-          <a:prstGeom prst="rect">
-            <a:avLst/>
-          </a:prstGeom>
-          <a:noFill/>
-        </p:spPr>
-        <p:txBody>
-          <a:bodyPr wrap="square" anchor="t" lIns="0" rIns="0" tIns="0" bIns="0">
-            <a:spAutoFit/>
-          </a:bodyPr>
-          <a:lstStyle/>
-          <a:p>
-            <a:r>
-              <a:rPr sz="1150" b="1">
-                <a:solidFill>
-                  <a:srgbClr val="1F7A57"/>
-                </a:solidFill>
-                <a:latin typeface="Space Mono"/>
-              </a:rPr>
-              <a:t>ENGINEERING</a:t>
-            </a:r>
-          </a:p>
-        </p:txBody>
-      </p:sp>
-      <p:sp>
-        <p:nvSpPr>
-          <p:cNvPr id="4" name="TextBox 3"/>
-          <p:cNvSpPr txBox="1"/>
-          <p:nvPr/>
-        </p:nvSpPr>
-        <p:spPr>
-          <a:xfrm>
-            <a:off x="621792" y="731520"/>
-            <a:ext cx="9509760" cy="868680"/>
-          </a:xfrm>
-          <a:prstGeom prst="rect">
-            <a:avLst/>
-          </a:prstGeom>
-          <a:noFill/>
-        </p:spPr>
-        <p:txBody>
-          <a:bodyPr wrap="square" anchor="t" lIns="0" rIns="0" tIns="0" bIns="0">
-            <a:spAutoFit/>
-          </a:bodyPr>
-          <a:lstStyle/>
-          <a:p>
-            <a:r>
-              <a:rPr sz="2700" b="1">
-                <a:solidFill>
-                  <a:srgbClr val="15201C"/>
-                </a:solidFill>
-                <a:latin typeface="Space Grotesk"/>
-              </a:rPr>
-              <a:t>Architecture — additional use cases, same principles</a:t>
-            </a:r>
-          </a:p>
-        </p:txBody>
-      </p:sp>
-      <p:sp>
-        <p:nvSpPr>
-          <p:cNvPr id="5" name="Rounded Rectangle 4"/>
-          <p:cNvSpPr/>
-          <p:nvPr/>
-        </p:nvSpPr>
-        <p:spPr>
-          <a:xfrm>
-            <a:off x="3886200" y="1600200"/>
-            <a:ext cx="7653527" cy="4709160"/>
-          </a:xfrm>
-          <a:prstGeom prst="roundRect">
-            <a:avLst>
-              <a:gd name="adj" fmla="val 3000"/>
-            </a:avLst>
-          </a:prstGeom>
-          <a:solidFill>
-            <a:srgbClr val="FFFFFF"/>
-          </a:solidFill>
-          <a:ln w="12700">
-            <a:solidFill>
-              <a:srgbClr val="E6EBE8"/>
-            </a:solidFill>
-          </a:ln>
-          <a:effectLst/>
-        </p:spPr>
-        <p:style>
-          <a:lnRef idx="1">
-            <a:schemeClr val="accent1"/>
-          </a:lnRef>
-          <a:fillRef idx="3">
-            <a:schemeClr val="accent1"/>
-          </a:fillRef>
-          <a:effectRef idx="2">
-            <a:schemeClr val="accent1"/>
-          </a:effectRef>
-          <a:fontRef idx="minor">
-            <a:schemeClr val="lt1"/>
-          </a:fontRef>
-        </p:style>
-        <p:txBody>
-          <a:bodyPr rtlCol="0" anchor="ctr"/>
-          <a:lstStyle/>
-          <a:p>
-            <a:pPr algn="ctr"/>
-          </a:p>
-        </p:txBody>
-      </p:sp>
-      <p:sp>
-        <p:nvSpPr>
-          <p:cNvPr id="7" name="Rectangle 6"/>
-          <p:cNvSpPr/>
-          <p:nvPr/>
-        </p:nvSpPr>
-        <p:spPr>
-          <a:xfrm>
-            <a:off x="640080" y="6455664"/>
-            <a:ext cx="10908792" cy="9144"/>
-          </a:xfrm>
-          <a:prstGeom prst="rect">
-            <a:avLst/>
-          </a:prstGeom>
-          <a:solidFill>
-            <a:srgbClr val="E6EBE8"/>
-          </a:solidFill>
-          <a:ln>
-            <a:noFill/>
-          </a:ln>
-          <a:effectLst/>
-        </p:spPr>
-        <p:style>
-          <a:lnRef idx="1">
-            <a:schemeClr val="accent1"/>
-          </a:lnRef>
-          <a:fillRef idx="3">
-            <a:schemeClr val="accent1"/>
-          </a:fillRef>
-          <a:effectRef idx="2">
-            <a:schemeClr val="accent1"/>
-          </a:effectRef>
-          <a:fontRef idx="minor">
-            <a:schemeClr val="lt1"/>
-          </a:fontRef>
-        </p:style>
-        <p:txBody>
-          <a:bodyPr rtlCol="0" anchor="ctr"/>
-          <a:lstStyle/>
-          <a:p>
-            <a:pPr algn="ctr"/>
-          </a:p>
-        </p:txBody>
-      </p:sp>
-      <p:sp>
-        <p:nvSpPr>
-          <p:cNvPr id="8" name="TextBox 7"/>
-          <p:cNvSpPr txBox="1"/>
-          <p:nvPr/>
-        </p:nvSpPr>
-        <p:spPr>
-          <a:xfrm>
-            <a:off x="640080" y="6510528"/>
-            <a:ext cx="2743200" cy="274320"/>
-          </a:xfrm>
-          <a:prstGeom prst="rect">
-            <a:avLst/>
-          </a:prstGeom>
-          <a:noFill/>
-        </p:spPr>
-        <p:txBody>
-          <a:bodyPr wrap="square" anchor="t" lIns="0" rIns="0" tIns="0" bIns="0">
-            <a:spAutoFit/>
-          </a:bodyPr>
-          <a:lstStyle/>
-          <a:p>
-            <a:r>
-              <a:rPr sz="1100" b="1">
-                <a:solidFill>
-                  <a:srgbClr val="6B7B73"/>
-                </a:solidFill>
-                <a:latin typeface="Space Grotesk"/>
-              </a:rPr>
-              <a:t>want</a:t>
-            </a:r>
-            <a:r>
-              <a:rPr sz="1100" b="1">
-                <a:solidFill>
-                  <a:srgbClr val="1F7A57"/>
-                </a:solidFill>
-                <a:latin typeface="Space Grotesk"/>
-              </a:rPr>
-              <a:t>hat</a:t>
-            </a:r>
-          </a:p>
-        </p:txBody>
-      </p:sp>
-      <p:sp>
-        <p:nvSpPr>
-          <p:cNvPr id="9" name="TextBox 8"/>
-          <p:cNvSpPr txBox="1"/>
-          <p:nvPr/>
-        </p:nvSpPr>
-        <p:spPr>
-          <a:xfrm>
-            <a:off x="10607040" y="6510528"/>
-            <a:ext cx="941832" cy="274320"/>
-          </a:xfrm>
-          <a:prstGeom prst="rect">
-            <a:avLst/>
-          </a:prstGeom>
-          <a:noFill/>
-        </p:spPr>
-        <p:txBody>
-          <a:bodyPr wrap="square" anchor="t" lIns="0" rIns="0" tIns="0" bIns="0">
-            <a:spAutoFit/>
-          </a:bodyPr>
-          <a:lstStyle/>
-          <a:p>
-            <a:pPr algn="r"/>
-            <a:r>
-              <a:rPr sz="1000" b="0">
-                <a:solidFill>
-                  <a:srgbClr val="8A968F"/>
-                </a:solidFill>
-                <a:latin typeface="Space Mono"/>
-              </a:rPr>
-              <a:t>16</a:t>
-            </a:r>
-          </a:p>
-        </p:txBody>
-      </p:sp>
-      <p:sp>
-        <p:nvSpPr>
-          <p:cNvPr id="10" name="TextBox 9"/>
-          <p:cNvSpPr txBox="1"/>
-          <p:nvPr/>
-        </p:nvSpPr>
-        <p:spPr>
-          <a:xfrm>
-            <a:off x="658368" y="1783080"/>
-            <a:ext cx="3063240" cy="4480560"/>
-          </a:xfrm>
-          <a:prstGeom prst="rect">
-            <a:avLst/>
-          </a:prstGeom>
-          <a:noFill/>
-        </p:spPr>
-        <p:txBody>
-          <a:bodyPr wrap="square">
-            <a:spAutoFit/>
-          </a:bodyPr>
-          <a:lstStyle/>
-          <a:p>
-            <a:r>
-              <a:rPr sz="1200" b="0">
-                <a:solidFill>
-                  <a:srgbClr val="15201C"/>
-                </a:solidFill>
-                <a:latin typeface="Hanken Grotesk"/>
-              </a:rPr>
-              <a:t>-  Observability.</a:t>
-            </a:r>
-          </a:p>
-          <a:p>
-            <a:r>
-              <a:rPr sz="1200" b="0">
-                <a:solidFill>
-                  <a:srgbClr val="15201C"/>
-                </a:solidFill>
-                <a:latin typeface="Hanken Grotesk"/>
-              </a:rPr>
-              <a:t>-  Guest attribution within the affiliation window.</a:t>
-            </a:r>
-          </a:p>
-          <a:p>
-            <a:r>
-              <a:rPr sz="1200" b="0">
-                <a:solidFill>
-                  <a:srgbClr val="15201C"/>
-                </a:solidFill>
-                <a:latin typeface="Hanken Grotesk"/>
-              </a:rPr>
-              <a:t>-  Manual attribution of unattributed settlements.</a:t>
-            </a:r>
-          </a:p>
-          <a:p>
-            <a:r>
-              <a:rPr sz="1200" b="0">
-                <a:solidFill>
-                  <a:srgbClr val="15201C"/>
-                </a:solidFill>
-                <a:latin typeface="Hanken Grotesk"/>
-              </a:rPr>
-              <a:t>-  Ops counters for real-time admin stats.</a:t>
-            </a:r>
-          </a:p>
-          <a:p>
-            <a:r>
-              <a:rPr sz="1200" b="0">
-                <a:solidFill>
-                  <a:srgbClr val="15201C"/>
-                </a:solidFill>
-                <a:latin typeface="Hanken Grotesk"/>
-              </a:rPr>
-              <a:t>-  Offline analytics.</a:t>
-            </a:r>
-          </a:p>
-        </p:txBody>
-      </p:sp>
+      <p:pic>
+        <p:nvPicPr>
+          <p:cNvPr id="2" name="Picture 1" descr="page-16.jpg"/>
+          <p:cNvPicPr>
+            <a:picLocks noChangeAspect="1"/>
+          </p:cNvPicPr>
+          <p:nvPr/>
+        </p:nvPicPr>
+        <p:blipFill>
+          <a:blip r:embed="rId4"/>
+          <a:stretch>
+            <a:fillRect/>
+          </a:stretch>
+        </p:blipFill>
+        <p:spPr>
+          <a:xfrm>
+            <a:off x="0" y="0"/>
+            <a:ext cx="12191695" cy="6858000"/>
+          </a:xfrm>
+          <a:prstGeom prst="rect">
+            <a:avLst/>
+          </a:prstGeom>
+        </p:spPr>
+      </p:pic>
     </p:spTree>
   </p:cSld>
   <p:clrMapOvr>
@@ -27185,7 +25061,7 @@
         </p:nvSpPr>
         <p:spPr>
           <a:xfrm>
-            <a:off x="658368" y="1691640"/>
+            <a:off x="658368" y="4050792"/>
             <a:ext cx="3520440" cy="2240280"/>
           </a:xfrm>
           <a:prstGeom prst="roundRect">
@@ -27233,7 +25109,7 @@
         </p:nvSpPr>
         <p:spPr>
           <a:xfrm>
-            <a:off x="841248" y="1874520"/>
+            <a:off x="841248" y="4233672"/>
             <a:ext cx="475488" cy="475488"/>
           </a:xfrm>
           <a:prstGeom prst="roundRect">
@@ -27289,7 +25165,7 @@
         </p:blipFill>
         <p:spPr>
           <a:xfrm>
-            <a:off x="905256" y="1943100"/>
+            <a:off x="905256" y="4302252"/>
             <a:ext cx="338328" cy="338328"/>
           </a:xfrm>
           <a:prstGeom prst="rect">
@@ -27305,7 +25181,7 @@
         </p:nvSpPr>
         <p:spPr>
           <a:xfrm>
-            <a:off x="1435608" y="1929384"/>
+            <a:off x="1435608" y="4288536"/>
             <a:ext cx="2560320" cy="457200"/>
           </a:xfrm>
           <a:prstGeom prst="rect">
@@ -27344,7 +25220,7 @@
         </p:nvSpPr>
         <p:spPr>
           <a:xfrm>
-            <a:off x="841248" y="2468880"/>
+            <a:off x="841248" y="4828032"/>
             <a:ext cx="3154680" cy="1371600"/>
           </a:xfrm>
           <a:prstGeom prst="rect">
@@ -27383,7 +25259,7 @@
         </p:nvSpPr>
         <p:spPr>
           <a:xfrm>
-            <a:off x="4343400" y="1691640"/>
+            <a:off x="4343400" y="4050792"/>
             <a:ext cx="3520440" cy="2240280"/>
           </a:xfrm>
           <a:prstGeom prst="roundRect">
@@ -27431,7 +25307,7 @@
         </p:nvSpPr>
         <p:spPr>
           <a:xfrm>
-            <a:off x="4526280" y="1874520"/>
+            <a:off x="4526280" y="4233672"/>
             <a:ext cx="475488" cy="475488"/>
           </a:xfrm>
           <a:prstGeom prst="roundRect">
@@ -27487,7 +25363,7 @@
         </p:blipFill>
         <p:spPr>
           <a:xfrm>
-            <a:off x="4590288" y="1943100"/>
+            <a:off x="4590288" y="4302252"/>
             <a:ext cx="338328" cy="338328"/>
           </a:xfrm>
           <a:prstGeom prst="rect">
@@ -27503,7 +25379,7 @@
         </p:nvSpPr>
         <p:spPr>
           <a:xfrm>
-            <a:off x="5120640" y="1929384"/>
+            <a:off x="5120640" y="4288536"/>
             <a:ext cx="2560320" cy="457200"/>
           </a:xfrm>
           <a:prstGeom prst="rect">
@@ -27542,7 +25418,7 @@
         </p:nvSpPr>
         <p:spPr>
           <a:xfrm>
-            <a:off x="4526280" y="2468880"/>
+            <a:off x="4526280" y="4828032"/>
             <a:ext cx="3154680" cy="1371600"/>
           </a:xfrm>
           <a:prstGeom prst="rect">
@@ -27581,7 +25457,7 @@
         </p:nvSpPr>
         <p:spPr>
           <a:xfrm>
-            <a:off x="8028432" y="1691640"/>
+            <a:off x="8028432" y="4050792"/>
             <a:ext cx="3520440" cy="2240280"/>
           </a:xfrm>
           <a:prstGeom prst="roundRect">
@@ -27629,7 +25505,7 @@
         </p:nvSpPr>
         <p:spPr>
           <a:xfrm>
-            <a:off x="8211312" y="1874520"/>
+            <a:off x="8211312" y="4233672"/>
             <a:ext cx="475488" cy="475488"/>
           </a:xfrm>
           <a:prstGeom prst="roundRect">
@@ -27685,7 +25561,7 @@
         </p:blipFill>
         <p:spPr>
           <a:xfrm>
-            <a:off x="8275320" y="1943100"/>
+            <a:off x="8275320" y="4302252"/>
             <a:ext cx="338328" cy="338328"/>
           </a:xfrm>
           <a:prstGeom prst="rect">
@@ -27701,7 +25577,7 @@
         </p:nvSpPr>
         <p:spPr>
           <a:xfrm>
-            <a:off x="8805672" y="1929384"/>
+            <a:off x="8805672" y="4288536"/>
             <a:ext cx="2560320" cy="457200"/>
           </a:xfrm>
           <a:prstGeom prst="rect">
@@ -27740,7 +25616,7 @@
         </p:nvSpPr>
         <p:spPr>
           <a:xfrm>
-            <a:off x="8211312" y="2468880"/>
+            <a:off x="8211312" y="4828032"/>
             <a:ext cx="3154680" cy="1371600"/>
           </a:xfrm>
           <a:prstGeom prst="rect">
@@ -27779,7 +25655,7 @@
         </p:nvSpPr>
         <p:spPr>
           <a:xfrm>
-            <a:off x="658368" y="4050792"/>
+            <a:off x="658368" y="1691640"/>
             <a:ext cx="3520440" cy="2240280"/>
           </a:xfrm>
           <a:prstGeom prst="roundRect">
@@ -27827,7 +25703,7 @@
         </p:nvSpPr>
         <p:spPr>
           <a:xfrm>
-            <a:off x="841248" y="4233672"/>
+            <a:off x="841248" y="1874520"/>
             <a:ext cx="475488" cy="475488"/>
           </a:xfrm>
           <a:prstGeom prst="roundRect">
@@ -27883,7 +25759,7 @@
         </p:blipFill>
         <p:spPr>
           <a:xfrm>
-            <a:off x="905256" y="4302252"/>
+            <a:off x="905256" y="1943100"/>
             <a:ext cx="338328" cy="338328"/>
           </a:xfrm>
           <a:prstGeom prst="rect">
@@ -27899,7 +25775,7 @@
         </p:nvSpPr>
         <p:spPr>
           <a:xfrm>
-            <a:off x="1435608" y="4288536"/>
+            <a:off x="1435608" y="1929384"/>
             <a:ext cx="2560320" cy="457200"/>
           </a:xfrm>
           <a:prstGeom prst="rect">
@@ -27938,7 +25814,7 @@
         </p:nvSpPr>
         <p:spPr>
           <a:xfrm>
-            <a:off x="841248" y="4828032"/>
+            <a:off x="841248" y="2468880"/>
             <a:ext cx="3154680" cy="1371600"/>
           </a:xfrm>
           <a:prstGeom prst="rect">
@@ -27977,7 +25853,7 @@
         </p:nvSpPr>
         <p:spPr>
           <a:xfrm>
-            <a:off x="4343400" y="4050792"/>
+            <a:off x="4343400" y="1691640"/>
             <a:ext cx="3520440" cy="2240280"/>
           </a:xfrm>
           <a:prstGeom prst="roundRect">
@@ -28025,7 +25901,7 @@
         </p:nvSpPr>
         <p:spPr>
           <a:xfrm>
-            <a:off x="4526280" y="4233672"/>
+            <a:off x="4526280" y="1874520"/>
             <a:ext cx="475488" cy="475488"/>
           </a:xfrm>
           <a:prstGeom prst="roundRect">
@@ -28081,7 +25957,7 @@
         </p:blipFill>
         <p:spPr>
           <a:xfrm>
-            <a:off x="4590288" y="4302252"/>
+            <a:off x="4590288" y="1943100"/>
             <a:ext cx="338328" cy="338328"/>
           </a:xfrm>
           <a:prstGeom prst="rect">
@@ -28097,7 +25973,7 @@
         </p:nvSpPr>
         <p:spPr>
           <a:xfrm>
-            <a:off x="5120640" y="4288536"/>
+            <a:off x="5120640" y="1929384"/>
             <a:ext cx="2560320" cy="457200"/>
           </a:xfrm>
           <a:prstGeom prst="rect">
@@ -28136,7 +26012,7 @@
         </p:nvSpPr>
         <p:spPr>
           <a:xfrm>
-            <a:off x="4526280" y="4828032"/>
+            <a:off x="4526280" y="2468880"/>
             <a:ext cx="3154680" cy="1371600"/>
           </a:xfrm>
           <a:prstGeom prst="rect">
@@ -28162,7 +26038,7 @@
                 </a:solidFill>
                 <a:latin typeface="Hanken Grotesk"/>
               </a:rPr>
-              <a:t>A link going viral in a WhatsApp group is the design spike.</a:t>
+              <a:t>A link going viral in a WhatsApp group is the potential spike.</a:t>
             </a:r>
           </a:p>
         </p:txBody>
@@ -28297,7 +26173,7 @@
         </p:nvSpPr>
         <p:spPr>
           <a:xfrm>
-            <a:off x="8028432" y="4050792"/>
+            <a:off x="8028432" y="1691640"/>
             <a:ext cx="3520440" cy="2240280"/>
           </a:xfrm>
           <a:prstGeom prst="roundRect">
@@ -28345,7 +26221,7 @@
         </p:nvSpPr>
         <p:spPr>
           <a:xfrm>
-            <a:off x="8211312" y="4233672"/>
+            <a:off x="8211312" y="1874520"/>
             <a:ext cx="475488" cy="475488"/>
           </a:xfrm>
           <a:prstGeom prst="roundRect">
@@ -28393,7 +26269,7 @@
         </p:nvSpPr>
         <p:spPr>
           <a:xfrm>
-            <a:off x="8805672" y="4288536"/>
+            <a:off x="8805672" y="1929384"/>
             <a:ext cx="2560320" cy="457200"/>
           </a:xfrm>
           <a:prstGeom prst="rect">
@@ -28432,7 +26308,7 @@
         </p:nvSpPr>
         <p:spPr>
           <a:xfrm>
-            <a:off x="8211312" y="4828032"/>
+            <a:off x="8211312" y="2468880"/>
             <a:ext cx="3154680" cy="1371600"/>
           </a:xfrm>
           <a:prstGeom prst="rect">
@@ -28458,7 +26334,7 @@
                 </a:solidFill>
                 <a:latin typeface="Hanken Grotesk"/>
               </a:rPr>
-              <a:t>Least privilege per function — IAM + one Postgres role each; money is append-only + audited; PII isolated in Cognito; workers never HTTP-exposed.</a:t>
+              <a:t>The entire framework is about money movement. Apply least privilege access, MFA, data integrity provability, isolation of concerns, strict auditing and other security principles.</a:t>
             </a:r>
           </a:p>
         </p:txBody>
@@ -28479,7 +26355,7 @@
         </p:blipFill>
         <p:spPr>
           <a:xfrm>
-            <a:off x="8275320" y="4302252"/>
+            <a:off x="8275320" y="1943100"/>
             <a:ext cx="338328" cy="338328"/>
           </a:xfrm>
           <a:prstGeom prst="rect">
@@ -28505,337 +26381,30 @@
         <p:nvPr/>
       </p:nvGrpSpPr>
       <p:grpSpPr/>
-      <p:sp>
-        <p:nvSpPr>
-          <p:cNvPr id="2" name="TextBox 1"/>
-          <p:cNvSpPr txBox="1"/>
-          <p:nvPr/>
-        </p:nvSpPr>
-        <p:spPr>
-          <a:xfrm>
-            <a:off x="10195560" y="256032"/>
-            <a:ext cx="1371600" cy="1005840"/>
-          </a:xfrm>
-          <a:prstGeom prst="rect">
-            <a:avLst/>
-          </a:prstGeom>
-          <a:noFill/>
-        </p:spPr>
-        <p:txBody>
-          <a:bodyPr wrap="square" anchor="t" lIns="0" rIns="0" tIns="0" bIns="0">
-            <a:spAutoFit/>
-          </a:bodyPr>
-          <a:lstStyle/>
-          <a:p>
-            <a:pPr algn="r"/>
-            <a:r>
-              <a:rPr sz="4600" b="1">
-                <a:solidFill>
-                  <a:srgbClr val="DCE5E0"/>
-                </a:solidFill>
-                <a:latin typeface="Space Grotesk"/>
-              </a:rPr>
-              <a:t>07</a:t>
-            </a:r>
-          </a:p>
-        </p:txBody>
-      </p:sp>
-      <p:sp>
-        <p:nvSpPr>
-          <p:cNvPr id="3" name="TextBox 2"/>
-          <p:cNvSpPr txBox="1"/>
-          <p:nvPr/>
-        </p:nvSpPr>
-        <p:spPr>
-          <a:xfrm>
-            <a:off x="640080" y="420624"/>
-            <a:ext cx="9418320" cy="292608"/>
-          </a:xfrm>
-          <a:prstGeom prst="rect">
-            <a:avLst/>
-          </a:prstGeom>
-          <a:noFill/>
-        </p:spPr>
-        <p:txBody>
-          <a:bodyPr wrap="square" anchor="t" lIns="0" rIns="0" tIns="0" bIns="0">
-            <a:spAutoFit/>
-          </a:bodyPr>
-          <a:lstStyle/>
-          <a:p>
-            <a:r>
-              <a:rPr sz="1150" b="1">
-                <a:solidFill>
-                  <a:srgbClr val="1F7A57"/>
-                </a:solidFill>
-                <a:latin typeface="Space Mono"/>
-              </a:rPr>
-              <a:t>ENGINEERING</a:t>
-            </a:r>
-          </a:p>
-        </p:txBody>
-      </p:sp>
-      <p:sp>
-        <p:nvSpPr>
-          <p:cNvPr id="4" name="TextBox 3"/>
-          <p:cNvSpPr txBox="1"/>
-          <p:nvPr/>
-        </p:nvSpPr>
-        <p:spPr>
-          <a:xfrm>
-            <a:off x="621792" y="731520"/>
-            <a:ext cx="9509760" cy="868680"/>
-          </a:xfrm>
-          <a:prstGeom prst="rect">
-            <a:avLst/>
-          </a:prstGeom>
-          <a:noFill/>
-        </p:spPr>
-        <p:txBody>
-          <a:bodyPr wrap="square" anchor="t" lIns="0" rIns="0" tIns="0" bIns="0">
-            <a:spAutoFit/>
-          </a:bodyPr>
-          <a:lstStyle/>
-          <a:p>
-            <a:r>
-              <a:rPr sz="2500" b="1">
-                <a:solidFill>
-                  <a:srgbClr val="15201C"/>
-                </a:solidFill>
-                <a:latin typeface="Space Grotesk"/>
-              </a:rPr>
-              <a:t>Data model — three homes, one key</a:t>
-            </a:r>
-          </a:p>
-        </p:txBody>
-      </p:sp>
-      <p:sp>
-        <p:nvSpPr>
-          <p:cNvPr id="5" name="Rounded Rectangle 4"/>
-          <p:cNvSpPr/>
-          <p:nvPr/>
-        </p:nvSpPr>
-        <p:spPr>
-          <a:xfrm>
-            <a:off x="1344168" y="1481328"/>
-            <a:ext cx="9509760" cy="4206240"/>
-          </a:xfrm>
-          <a:prstGeom prst="roundRect">
-            <a:avLst>
-              <a:gd name="adj" fmla="val 3000"/>
-            </a:avLst>
-          </a:prstGeom>
-          <a:solidFill>
-            <a:srgbClr val="FFFFFF"/>
-          </a:solidFill>
-          <a:ln w="12700">
-            <a:solidFill>
-              <a:srgbClr val="E6EBE8"/>
-            </a:solidFill>
-          </a:ln>
-          <a:effectLst/>
-        </p:spPr>
-        <p:style>
-          <a:lnRef idx="1">
-            <a:schemeClr val="accent1"/>
-          </a:lnRef>
-          <a:fillRef idx="3">
-            <a:schemeClr val="accent1"/>
-          </a:fillRef>
-          <a:effectRef idx="2">
-            <a:schemeClr val="accent1"/>
-          </a:effectRef>
-          <a:fontRef idx="minor">
-            <a:schemeClr val="lt1"/>
-          </a:fontRef>
-        </p:style>
-        <p:txBody>
-          <a:bodyPr rtlCol="0" anchor="ctr"/>
-          <a:lstStyle/>
-          <a:p>
-            <a:pPr algn="ctr"/>
-          </a:p>
-        </p:txBody>
-      </p:sp>
-      <p:sp>
-        <p:nvSpPr>
-          <p:cNvPr id="7" name="Rectangle 6"/>
-          <p:cNvSpPr/>
-          <p:nvPr/>
-        </p:nvSpPr>
-        <p:spPr>
-          <a:xfrm>
-            <a:off x="640080" y="6455664"/>
-            <a:ext cx="10908792" cy="9144"/>
-          </a:xfrm>
-          <a:prstGeom prst="rect">
-            <a:avLst/>
-          </a:prstGeom>
-          <a:solidFill>
-            <a:srgbClr val="E6EBE8"/>
-          </a:solidFill>
-          <a:ln>
-            <a:noFill/>
-          </a:ln>
-          <a:effectLst/>
-        </p:spPr>
-        <p:style>
-          <a:lnRef idx="1">
-            <a:schemeClr val="accent1"/>
-          </a:lnRef>
-          <a:fillRef idx="3">
-            <a:schemeClr val="accent1"/>
-          </a:fillRef>
-          <a:effectRef idx="2">
-            <a:schemeClr val="accent1"/>
-          </a:effectRef>
-          <a:fontRef idx="minor">
-            <a:schemeClr val="lt1"/>
-          </a:fontRef>
-        </p:style>
-        <p:txBody>
-          <a:bodyPr rtlCol="0" anchor="ctr"/>
-          <a:lstStyle/>
-          <a:p>
-            <a:pPr algn="ctr"/>
-          </a:p>
-        </p:txBody>
-      </p:sp>
-      <p:sp>
-        <p:nvSpPr>
-          <p:cNvPr id="8" name="TextBox 7"/>
-          <p:cNvSpPr txBox="1"/>
-          <p:nvPr/>
-        </p:nvSpPr>
-        <p:spPr>
-          <a:xfrm>
-            <a:off x="640080" y="6510528"/>
-            <a:ext cx="2743200" cy="274320"/>
-          </a:xfrm>
-          <a:prstGeom prst="rect">
-            <a:avLst/>
-          </a:prstGeom>
-          <a:noFill/>
-        </p:spPr>
-        <p:txBody>
-          <a:bodyPr wrap="square" anchor="t" lIns="0" rIns="0" tIns="0" bIns="0">
-            <a:spAutoFit/>
-          </a:bodyPr>
-          <a:lstStyle/>
-          <a:p>
-            <a:r>
-              <a:rPr sz="1100" b="1">
-                <a:solidFill>
-                  <a:srgbClr val="6B7B73"/>
-                </a:solidFill>
-                <a:latin typeface="Space Grotesk"/>
-              </a:rPr>
-              <a:t>want</a:t>
-            </a:r>
-            <a:r>
-              <a:rPr sz="1100" b="1">
-                <a:solidFill>
-                  <a:srgbClr val="1F7A57"/>
-                </a:solidFill>
-                <a:latin typeface="Space Grotesk"/>
-              </a:rPr>
-              <a:t>hat</a:t>
-            </a:r>
-          </a:p>
-        </p:txBody>
-      </p:sp>
-      <p:sp>
-        <p:nvSpPr>
-          <p:cNvPr id="9" name="TextBox 8"/>
-          <p:cNvSpPr txBox="1"/>
-          <p:nvPr/>
-        </p:nvSpPr>
-        <p:spPr>
-          <a:xfrm>
-            <a:off x="10607040" y="6510528"/>
-            <a:ext cx="941832" cy="274320"/>
-          </a:xfrm>
-          <a:prstGeom prst="rect">
-            <a:avLst/>
-          </a:prstGeom>
-          <a:noFill/>
-        </p:spPr>
-        <p:txBody>
-          <a:bodyPr wrap="square" anchor="t" lIns="0" rIns="0" tIns="0" bIns="0">
-            <a:spAutoFit/>
-          </a:bodyPr>
-          <a:lstStyle/>
-          <a:p>
-            <a:pPr algn="r"/>
-            <a:r>
-              <a:rPr sz="1000" b="0">
-                <a:solidFill>
-                  <a:srgbClr val="8A968F"/>
-                </a:solidFill>
-                <a:latin typeface="Space Mono"/>
-              </a:rPr>
-              <a:t>7</a:t>
-            </a:r>
-          </a:p>
-        </p:txBody>
-      </p:sp>
       <p:pic>
         <p:nvPicPr>
-          <p:cNvPr id="10" name="Picture 9" descr="slide-7.png"/>
+          <p:cNvPr id="2" name="Picture 1" descr="page-07.png"/>
           <p:cNvPicPr>
             <a:picLocks noChangeAspect="1"/>
           </p:cNvPicPr>
           <p:nvPr/>
         </p:nvPicPr>
         <p:blipFill>
-          <a:blip r:embed="rId3"/>
+          <a:blip r:embed="rId5"/>
           <a:stretch>
             <a:fillRect/>
           </a:stretch>
         </p:blipFill>
         <p:spPr>
           <a:xfrm>
-            <a:off x="1527048" y="2221857"/>
-            <a:ext cx="9144000" cy="2725182"/>
+            <a:off x="0" y="0"/>
+            <a:ext cx="12191695" cy="6858000"/>
           </a:xfrm>
           <a:prstGeom prst="rect">
             <a:avLst/>
           </a:prstGeom>
         </p:spPr>
       </p:pic>
-      <p:sp>
-        <p:nvSpPr>
-          <p:cNvPr id="11" name="TextBox 10"/>
-          <p:cNvSpPr txBox="1"/>
-          <p:nvPr/>
-        </p:nvSpPr>
-        <p:spPr>
-          <a:xfrm>
-            <a:off x="658368" y="5760720"/>
-            <a:ext cx="10881360" cy="640080"/>
-          </a:xfrm>
-          <a:prstGeom prst="rect">
-            <a:avLst/>
-          </a:prstGeom>
-          <a:noFill/>
-        </p:spPr>
-        <p:txBody>
-          <a:bodyPr wrap="square">
-            <a:spAutoFit/>
-          </a:bodyPr>
-          <a:lstStyle/>
-          <a:p>
-            <a:r>
-              <a:rPr sz="1200">
-                <a:solidFill>
-                  <a:srgbClr val="6B7B73"/>
-                </a:solidFill>
-                <a:latin typeface="Hanken Grotesk"/>
-              </a:rPr>
-              <a:t>References across stores are soft — keys plus idempotency, never foreign keys or cross-store transactions. The Cognito sub ties PII, links and money together.</a:t>
-            </a:r>
-          </a:p>
-        </p:txBody>
-      </p:sp>
     </p:spTree>
   </p:cSld>
   <p:clrMapOvr>
@@ -28995,11 +26564,6 @@
                     <a:bodyPr/>
                     <a:lstStyle/>
                     <a:p>
-                      <a:pPr>
-                        <a:lnSpc>
-                          <a:spcPct val="108000"/>
-                        </a:lnSpc>
-                      </a:pPr>
                       <a:r>
                         <a:rPr sz="1100" b="1">
                           <a:solidFill>
@@ -29022,11 +26586,6 @@
                     <a:bodyPr/>
                     <a:lstStyle/>
                     <a:p>
-                      <a:pPr>
-                        <a:lnSpc>
-                          <a:spcPct val="108000"/>
-                        </a:lnSpc>
-                      </a:pPr>
                       <a:r>
                         <a:rPr sz="1100" b="1">
                           <a:solidFill>
@@ -29049,11 +26608,6 @@
                     <a:bodyPr/>
                     <a:lstStyle/>
                     <a:p>
-                      <a:pPr>
-                        <a:lnSpc>
-                          <a:spcPct val="108000"/>
-                        </a:lnSpc>
-                      </a:pPr>
                       <a:r>
                         <a:rPr sz="1100" b="1">
                           <a:solidFill>
@@ -29076,11 +26630,6 @@
                     <a:bodyPr/>
                     <a:lstStyle/>
                     <a:p>
-                      <a:pPr>
-                        <a:lnSpc>
-                          <a:spcPct val="108000"/>
-                        </a:lnSpc>
-                      </a:pPr>
                       <a:r>
                         <a:rPr sz="1100" b="1">
                           <a:solidFill>
@@ -29105,19 +26654,14 @@
                     <a:bodyPr/>
                     <a:lstStyle/>
                     <a:p>
-                      <a:pPr>
-                        <a:lnSpc>
-                          <a:spcPct val="108000"/>
-                        </a:lnSpc>
-                      </a:pPr>
                       <a:r>
-                        <a:rPr sz="1050" b="1">
+                        <a:rPr sz="1000" b="1">
                           <a:solidFill>
                             <a:srgbClr val="15201C"/>
                           </a:solidFill>
                           <a:latin typeface="Hanken Grotesk"/>
                         </a:rPr>
-                        <a:t>Money</a:t>
+                        <a:t>Money + Audit Log</a:t>
                       </a:r>
                     </a:p>
                   </a:txBody>
@@ -29132,15 +26676,10 @@
                     <a:bodyPr/>
                     <a:lstStyle/>
                     <a:p>
-                      <a:pPr>
-                        <a:lnSpc>
-                          <a:spcPct val="108000"/>
-                        </a:lnSpc>
-                      </a:pPr>
                       <a:r>
-                        <a:rPr sz="1050" b="0">
+                        <a:rPr sz="1000" b="0">
                           <a:solidFill>
-                            <a:srgbClr val="6B7B73"/>
+                            <a:srgbClr val="15201C"/>
                           </a:solidFill>
                           <a:latin typeface="Hanken Grotesk"/>
                         </a:rPr>
@@ -29159,19 +26698,14 @@
                     <a:bodyPr/>
                     <a:lstStyle/>
                     <a:p>
-                      <a:pPr>
-                        <a:lnSpc>
-                          <a:spcPct val="108000"/>
-                        </a:lnSpc>
-                      </a:pPr>
                       <a:r>
-                        <a:rPr sz="1050" b="0">
+                        <a:rPr sz="1000" b="0">
                           <a:solidFill>
-                            <a:srgbClr val="6B7B73"/>
+                            <a:srgbClr val="15201C"/>
                           </a:solidFill>
                           <a:latin typeface="Hanken Grotesk"/>
                         </a:rPr>
-                        <a:t>ACID + Postgres GRANTs as the money invariant (one role per function: wallet_reader / ledger_reader SELECT-only, ledger_writer INSERT-only, audit_writer = audit_append only); SQL for reconciliation</a:t>
+                        <a:t>ACID; permissions enforced on DB level (GRANTs); storing the audit log with hashed chains</a:t>
                       </a:r>
                     </a:p>
                   </a:txBody>
@@ -29186,19 +26720,14 @@
                     <a:bodyPr/>
                     <a:lstStyle/>
                     <a:p>
-                      <a:pPr>
-                        <a:lnSpc>
-                          <a:spcPct val="108000"/>
-                        </a:lnSpc>
-                      </a:pPr>
                       <a:r>
-                        <a:rPr sz="1050" b="0">
+                        <a:rPr sz="1000" b="0">
                           <a:solidFill>
-                            <a:srgbClr val="6B7B73"/>
+                            <a:srgbClr val="15201C"/>
                           </a:solidFill>
                           <a:latin typeface="Hanken Grotesk"/>
                         </a:rPr>
-                        <a:t>Scale-to-zero cold resume ~20 s (60 s connect timeout + SPA warm-up probe); 50-connection cap</a:t>
+                        <a:t>Scale-to-zero cold resume ~20 s (60 s connect timeout + SPA warm-up probe); 50-connection cap. Possible simple workaround — cached last known totals (display while reloading) per user on SPA or backend</a:t>
                       </a:r>
                     </a:p>
                   </a:txBody>
@@ -29215,13 +26744,8 @@
                     <a:bodyPr/>
                     <a:lstStyle/>
                     <a:p>
-                      <a:pPr>
-                        <a:lnSpc>
-                          <a:spcPct val="108000"/>
-                        </a:lnSpc>
-                      </a:pPr>
                       <a:r>
-                        <a:rPr sz="1050" b="1">
+                        <a:rPr sz="1000" b="1">
                           <a:solidFill>
                             <a:srgbClr val="15201C"/>
                           </a:solidFill>
@@ -29242,15 +26766,10 @@
                     <a:bodyPr/>
                     <a:lstStyle/>
                     <a:p>
-                      <a:pPr>
-                        <a:lnSpc>
-                          <a:spcPct val="108000"/>
-                        </a:lnSpc>
-                      </a:pPr>
                       <a:r>
-                        <a:rPr sz="1050" b="0">
+                        <a:rPr sz="1000" b="0">
                           <a:solidFill>
-                            <a:srgbClr val="6B7B73"/>
+                            <a:srgbClr val="15201C"/>
                           </a:solidFill>
                           <a:latin typeface="Hanken Grotesk"/>
                         </a:rPr>
@@ -29269,19 +26788,14 @@
                     <a:bodyPr/>
                     <a:lstStyle/>
                     <a:p>
-                      <a:pPr>
-                        <a:lnSpc>
-                          <a:spcPct val="108000"/>
-                        </a:lnSpc>
-                      </a:pPr>
                       <a:r>
-                        <a:rPr sz="1050" b="0">
+                        <a:rPr sz="1000" b="0">
                           <a:solidFill>
-                            <a:srgbClr val="6B7B73"/>
+                            <a:srgbClr val="15201C"/>
                           </a:solidFill>
                           <a:latin typeface="Hanken Grotesk"/>
                         </a:rPr>
-                        <a:t>Auth path touches zero databases; GDPR delete = one call; backups carry no PII</a:t>
+                        <a:t>Auth path touches zero databases; GDPR delete = one call; the only backup carrying PII is the Cognito backup</a:t>
                       </a:r>
                     </a:p>
                   </a:txBody>
@@ -29296,19 +26810,14 @@
                     <a:bodyPr/>
                     <a:lstStyle/>
                     <a:p>
-                      <a:pPr>
-                        <a:lnSpc>
-                          <a:spcPct val="108000"/>
-                        </a:lnSpc>
-                      </a:pPr>
                       <a:r>
-                        <a:rPr sz="1050" b="0">
+                        <a:rPr sz="1000" b="0">
                           <a:solidFill>
-                            <a:srgbClr val="6B7B73"/>
+                            <a:srgbClr val="15201C"/>
                           </a:solidFill>
                           <a:latin typeface="Hanken Grotesk"/>
                         </a:rPr>
-                        <a:t>ListUsers-only queries (no joins, one filter); no PITR; no attribute history. Escape hatch: dual-write projection</a:t>
+                        <a:t>ListUsers-only queries (no joins, one filter); no PITR; no attribute history</a:t>
                       </a:r>
                     </a:p>
                   </a:txBody>
@@ -29325,13 +26834,8 @@
                     <a:bodyPr/>
                     <a:lstStyle/>
                     <a:p>
-                      <a:pPr>
-                        <a:lnSpc>
-                          <a:spcPct val="108000"/>
-                        </a:lnSpc>
-                      </a:pPr>
                       <a:r>
-                        <a:rPr sz="1050" b="1">
+                        <a:rPr sz="1000" b="1">
                           <a:solidFill>
                             <a:srgbClr val="15201C"/>
                           </a:solidFill>
@@ -29352,15 +26856,10 @@
                     <a:bodyPr/>
                     <a:lstStyle/>
                     <a:p>
-                      <a:pPr>
-                        <a:lnSpc>
-                          <a:spcPct val="108000"/>
-                        </a:lnSpc>
-                      </a:pPr>
                       <a:r>
-                        <a:rPr sz="1050" b="0">
+                        <a:rPr sz="1000" b="0">
                           <a:solidFill>
-                            <a:srgbClr val="6B7B73"/>
+                            <a:srgbClr val="15201C"/>
                           </a:solidFill>
                           <a:latin typeface="Hanken Grotesk"/>
                         </a:rPr>
@@ -29379,15 +26878,10 @@
                     <a:bodyPr/>
                     <a:lstStyle/>
                     <a:p>
-                      <a:pPr>
-                        <a:lnSpc>
-                          <a:spcPct val="108000"/>
-                        </a:lnSpc>
-                      </a:pPr>
                       <a:r>
-                        <a:rPr sz="1050" b="0">
+                        <a:rPr sz="1000" b="0">
                           <a:solidFill>
-                            <a:srgbClr val="6B7B73"/>
+                            <a:srgbClr val="15201C"/>
                           </a:solidFill>
                           <a:latin typeface="Hanken Grotesk"/>
                         </a:rPr>
@@ -29406,15 +26900,10 @@
                     <a:bodyPr/>
                     <a:lstStyle/>
                     <a:p>
-                      <a:pPr>
-                        <a:lnSpc>
-                          <a:spcPct val="108000"/>
-                        </a:lnSpc>
-                      </a:pPr>
                       <a:r>
-                        <a:rPr sz="1050" b="0">
+                        <a:rPr sz="1000" b="0">
                           <a:solidFill>
-                            <a:srgbClr val="6B7B73"/>
+                            <a:srgbClr val="15201C"/>
                           </a:solidFill>
                           <a:latin typeface="Hanken Grotesk"/>
                         </a:rPr>
@@ -29629,313 +27118,30 @@
         <p:nvPr/>
       </p:nvGrpSpPr>
       <p:grpSpPr/>
-      <p:sp>
-        <p:nvSpPr>
-          <p:cNvPr id="2" name="TextBox 1"/>
-          <p:cNvSpPr txBox="1"/>
-          <p:nvPr/>
-        </p:nvSpPr>
-        <p:spPr>
-          <a:xfrm>
-            <a:off x="10195560" y="256032"/>
-            <a:ext cx="1371600" cy="1005840"/>
-          </a:xfrm>
-          <a:prstGeom prst="rect">
-            <a:avLst/>
-          </a:prstGeom>
-          <a:noFill/>
-        </p:spPr>
-        <p:txBody>
-          <a:bodyPr wrap="square" anchor="t" lIns="0" rIns="0" tIns="0" bIns="0">
-            <a:spAutoFit/>
-          </a:bodyPr>
-          <a:lstStyle/>
-          <a:p>
-            <a:pPr algn="r"/>
-            <a:r>
-              <a:rPr sz="4600" b="1">
-                <a:solidFill>
-                  <a:srgbClr val="DCE5E0"/>
-                </a:solidFill>
-                <a:latin typeface="Space Grotesk"/>
-              </a:rPr>
-              <a:t>09</a:t>
-            </a:r>
-          </a:p>
-        </p:txBody>
-      </p:sp>
-      <p:sp>
-        <p:nvSpPr>
-          <p:cNvPr id="3" name="TextBox 2"/>
-          <p:cNvSpPr txBox="1"/>
-          <p:nvPr/>
-        </p:nvSpPr>
-        <p:spPr>
-          <a:xfrm>
-            <a:off x="640080" y="420624"/>
-            <a:ext cx="9418320" cy="292608"/>
-          </a:xfrm>
-          <a:prstGeom prst="rect">
-            <a:avLst/>
-          </a:prstGeom>
-          <a:noFill/>
-        </p:spPr>
-        <p:txBody>
-          <a:bodyPr wrap="square" anchor="t" lIns="0" rIns="0" tIns="0" bIns="0">
-            <a:spAutoFit/>
-          </a:bodyPr>
-          <a:lstStyle/>
-          <a:p>
-            <a:r>
-              <a:rPr sz="1150" b="1">
-                <a:solidFill>
-                  <a:srgbClr val="1F7A57"/>
-                </a:solidFill>
-                <a:latin typeface="Space Mono"/>
-              </a:rPr>
-              <a:t>ENGINEERING</a:t>
-            </a:r>
-          </a:p>
-        </p:txBody>
-      </p:sp>
-      <p:sp>
-        <p:nvSpPr>
-          <p:cNvPr id="4" name="TextBox 3"/>
-          <p:cNvSpPr txBox="1"/>
-          <p:nvPr/>
-        </p:nvSpPr>
-        <p:spPr>
-          <a:xfrm>
-            <a:off x="621792" y="731520"/>
-            <a:ext cx="9509760" cy="868680"/>
-          </a:xfrm>
-          <a:prstGeom prst="rect">
-            <a:avLst/>
-          </a:prstGeom>
-          <a:noFill/>
-        </p:spPr>
-        <p:txBody>
-          <a:bodyPr wrap="square" anchor="t" lIns="0" rIns="0" tIns="0" bIns="0">
-            <a:spAutoFit/>
-          </a:bodyPr>
-          <a:lstStyle/>
-          <a:p>
-            <a:r>
-              <a:rPr sz="2700" b="1">
-                <a:solidFill>
-                  <a:srgbClr val="15201C"/>
-                </a:solidFill>
-                <a:latin typeface="Space Grotesk"/>
-              </a:rPr>
-              <a:t>Architecture — the starting point</a:t>
-            </a:r>
-          </a:p>
-        </p:txBody>
-      </p:sp>
-      <p:sp>
-        <p:nvSpPr>
-          <p:cNvPr id="5" name="Rounded Rectangle 4"/>
-          <p:cNvSpPr/>
-          <p:nvPr/>
-        </p:nvSpPr>
-        <p:spPr>
-          <a:xfrm>
-            <a:off x="658368" y="1600200"/>
-            <a:ext cx="10881360" cy="4114800"/>
-          </a:xfrm>
-          <a:prstGeom prst="roundRect">
-            <a:avLst>
-              <a:gd name="adj" fmla="val 3000"/>
-            </a:avLst>
-          </a:prstGeom>
-          <a:solidFill>
-            <a:srgbClr val="FFFFFF"/>
-          </a:solidFill>
-          <a:ln w="12700">
-            <a:solidFill>
-              <a:srgbClr val="E6EBE8"/>
-            </a:solidFill>
-          </a:ln>
-          <a:effectLst/>
-        </p:spPr>
-        <p:style>
-          <a:lnRef idx="1">
-            <a:schemeClr val="accent1"/>
-          </a:lnRef>
-          <a:fillRef idx="3">
-            <a:schemeClr val="accent1"/>
-          </a:fillRef>
-          <a:effectRef idx="2">
-            <a:schemeClr val="accent1"/>
-          </a:effectRef>
-          <a:fontRef idx="minor">
-            <a:schemeClr val="lt1"/>
-          </a:fontRef>
-        </p:style>
-        <p:txBody>
-          <a:bodyPr rtlCol="0" anchor="ctr"/>
-          <a:lstStyle/>
-          <a:p>
-            <a:pPr algn="ctr"/>
-          </a:p>
-        </p:txBody>
-      </p:sp>
-      <p:sp>
-        <p:nvSpPr>
-          <p:cNvPr id="7" name="Rectangle 6"/>
-          <p:cNvSpPr/>
-          <p:nvPr/>
-        </p:nvSpPr>
-        <p:spPr>
-          <a:xfrm>
-            <a:off x="640080" y="6455664"/>
-            <a:ext cx="10908792" cy="9144"/>
-          </a:xfrm>
-          <a:prstGeom prst="rect">
-            <a:avLst/>
-          </a:prstGeom>
-          <a:solidFill>
-            <a:srgbClr val="E6EBE8"/>
-          </a:solidFill>
-          <a:ln>
-            <a:noFill/>
-          </a:ln>
-          <a:effectLst/>
-        </p:spPr>
-        <p:style>
-          <a:lnRef idx="1">
-            <a:schemeClr val="accent1"/>
-          </a:lnRef>
-          <a:fillRef idx="3">
-            <a:schemeClr val="accent1"/>
-          </a:fillRef>
-          <a:effectRef idx="2">
-            <a:schemeClr val="accent1"/>
-          </a:effectRef>
-          <a:fontRef idx="minor">
-            <a:schemeClr val="lt1"/>
-          </a:fontRef>
-        </p:style>
-        <p:txBody>
-          <a:bodyPr rtlCol="0" anchor="ctr"/>
-          <a:lstStyle/>
-          <a:p>
-            <a:pPr algn="ctr"/>
-          </a:p>
-        </p:txBody>
-      </p:sp>
-      <p:sp>
-        <p:nvSpPr>
-          <p:cNvPr id="8" name="TextBox 7"/>
-          <p:cNvSpPr txBox="1"/>
-          <p:nvPr/>
-        </p:nvSpPr>
-        <p:spPr>
-          <a:xfrm>
-            <a:off x="640080" y="6510528"/>
-            <a:ext cx="2743200" cy="274320"/>
-          </a:xfrm>
-          <a:prstGeom prst="rect">
-            <a:avLst/>
-          </a:prstGeom>
-          <a:noFill/>
-        </p:spPr>
-        <p:txBody>
-          <a:bodyPr wrap="square" anchor="t" lIns="0" rIns="0" tIns="0" bIns="0">
-            <a:spAutoFit/>
-          </a:bodyPr>
-          <a:lstStyle/>
-          <a:p>
-            <a:r>
-              <a:rPr sz="1100" b="1">
-                <a:solidFill>
-                  <a:srgbClr val="6B7B73"/>
-                </a:solidFill>
-                <a:latin typeface="Space Grotesk"/>
-              </a:rPr>
-              <a:t>want</a:t>
-            </a:r>
-            <a:r>
-              <a:rPr sz="1100" b="1">
-                <a:solidFill>
-                  <a:srgbClr val="1F7A57"/>
-                </a:solidFill>
-                <a:latin typeface="Space Grotesk"/>
-              </a:rPr>
-              <a:t>hat</a:t>
-            </a:r>
-          </a:p>
-        </p:txBody>
-      </p:sp>
-      <p:sp>
-        <p:nvSpPr>
-          <p:cNvPr id="9" name="TextBox 8"/>
-          <p:cNvSpPr txBox="1"/>
-          <p:nvPr/>
-        </p:nvSpPr>
-        <p:spPr>
-          <a:xfrm>
-            <a:off x="10607040" y="6510528"/>
-            <a:ext cx="941832" cy="274320"/>
-          </a:xfrm>
-          <a:prstGeom prst="rect">
-            <a:avLst/>
-          </a:prstGeom>
-          <a:noFill/>
-        </p:spPr>
-        <p:txBody>
-          <a:bodyPr wrap="square" anchor="t" lIns="0" rIns="0" tIns="0" bIns="0">
-            <a:spAutoFit/>
-          </a:bodyPr>
-          <a:lstStyle/>
-          <a:p>
-            <a:pPr algn="r"/>
-            <a:r>
-              <a:rPr sz="1000" b="0">
-                <a:solidFill>
-                  <a:srgbClr val="8A968F"/>
-                </a:solidFill>
-                <a:latin typeface="Space Mono"/>
-              </a:rPr>
-              <a:t>9</a:t>
-            </a:r>
-          </a:p>
-        </p:txBody>
-      </p:sp>
-      <p:sp>
-        <p:nvSpPr>
-          <p:cNvPr id="10" name="TextBox 9"/>
-          <p:cNvSpPr txBox="1"/>
-          <p:nvPr/>
-        </p:nvSpPr>
-        <p:spPr>
-          <a:xfrm>
-            <a:off x="658368" y="5852160"/>
-            <a:ext cx="10881360" cy="457200"/>
-          </a:xfrm>
-          <a:prstGeom prst="rect">
-            <a:avLst/>
-          </a:prstGeom>
-          <a:noFill/>
-        </p:spPr>
-        <p:txBody>
-          <a:bodyPr wrap="square">
-            <a:spAutoFit/>
-          </a:bodyPr>
-          <a:lstStyle/>
-          <a:p>
-            <a:r>
-              <a:rPr sz="1400" b="1">
-                <a:solidFill>
-                  <a:srgbClr val="15201C"/>
-                </a:solidFill>
-                <a:latin typeface="Hanken Grotesk"/>
-              </a:rPr>
-              <a:t>Starting with:  in-VPC Aurora Serverless v2   and   DynamoDB on-demand.</a:t>
-            </a:r>
-          </a:p>
-        </p:txBody>
-      </p:sp>
+      <p:pic>
+        <p:nvPicPr>
+          <p:cNvPr id="2" name="Picture 1" descr="page-09.png"/>
+          <p:cNvPicPr>
+            <a:picLocks noChangeAspect="1"/>
+          </p:cNvPicPr>
+          <p:nvPr/>
+        </p:nvPicPr>
+        <p:blipFill>
+          <a:blip r:embed="rId4"/>
+          <a:stretch>
+            <a:fillRect/>
+          </a:stretch>
+        </p:blipFill>
+        <p:spPr>
+          <a:xfrm>
+            <a:off x="0" y="0"/>
+            <a:ext cx="12191695" cy="6858000"/>
+          </a:xfrm>
+          <a:prstGeom prst="rect">
+            <a:avLst/>
+          </a:prstGeom>
+        </p:spPr>
+      </p:pic>
     </p:spTree>
   </p:cSld>
   <p:clrMapOvr>
